--- a/reports/zh15min_slides.pptx
+++ b/reports/zh15min_slides.pptx
@@ -21,9 +21,10 @@
     <p:sldId id="269" r:id="rId15"/>
     <p:sldId id="270" r:id="rId16"/>
     <p:sldId id="271" r:id="rId17"/>
+    <p:sldId id="272" r:id="rId18"/>
   </p:sldIdLst>
   <p:notesMasterIdLst>
-    <p:notesMasterId r:id="rId18"/>
+    <p:notesMasterId r:id="rId19"/>
   </p:notesMasterIdLst>
   <p:sldSz cx="9144000" cy="5143500"/>
   <p:notesSz cx="5143500" cy="9144000"/>
@@ -1157,6 +1158,94 @@
             <a:fld id="{F7021451-1387-4CA6-816F-3879F97B5CBC}" type="slidenum">
               <a:rPr lang="en-US"/>
               <a:t>16</a:t>
+            </a:fld>
+            <a:endParaRPr lang="en-US"/>
+          </a:p>
+        </p:txBody>
+      </p:sp>
+    </p:spTree>
+    <p:extLst>
+      <p:ext uri="{BB962C8B-B14F-4D97-AF65-F5344CB8AC3E}">
+        <p14:creationId xmlns:p14="http://schemas.microsoft.com/office/powerpoint/2010/main" val="1024086991"/>
+      </p:ext>
+    </p:extLst>
+  </p:cSld>
+  <p:clrMapOvr>
+    <a:masterClrMapping/>
+  </p:clrMapOvr>
+</p:notes>
+</file>
+
+<file path=ppt/notesSlides/notesSlide17.xml><?xml version="1.0" encoding="utf-8"?>
+<p:notes xmlns:a="http://schemas.openxmlformats.org/drawingml/2006/main" xmlns:r="http://schemas.openxmlformats.org/officeDocument/2006/relationships" xmlns:p="http://schemas.openxmlformats.org/presentationml/2006/main">
+  <p:cSld>
+    <p:spTree>
+      <p:nvGrpSpPr>
+        <p:cNvPr id="1" name=""/>
+        <p:cNvGrpSpPr/>
+        <p:nvPr/>
+      </p:nvGrpSpPr>
+      <p:grpSpPr>
+        <a:xfrm>
+          <a:off x="0" y="0"/>
+          <a:ext cx="0" cy="0"/>
+          <a:chOff x="0" y="0"/>
+          <a:chExt cx="0" cy="0"/>
+        </a:xfrm>
+      </p:grpSpPr>
+      <p:sp>
+        <p:nvSpPr>
+          <p:cNvPr id="2" name="Slide Image Placeholder 1"/>
+          <p:cNvSpPr>
+            <a:spLocks noGrp="1" noRot="1" noChangeAspect="1"/>
+          </p:cNvSpPr>
+          <p:nvPr>
+            <p:ph type="sldImg"/>
+          </p:nvPr>
+        </p:nvSpPr>
+        <p:spPr/>
+      </p:sp>
+      <p:sp>
+        <p:nvSpPr>
+          <p:cNvPr id="3" name="Notes Placeholder 2"/>
+          <p:cNvSpPr>
+            <a:spLocks noGrp="1"/>
+          </p:cNvSpPr>
+          <p:nvPr>
+            <p:ph type="body" idx="1"/>
+          </p:nvPr>
+        </p:nvSpPr>
+        <p:spPr/>
+        <p:txBody>
+          <a:bodyPr/>
+          <a:lstStyle/>
+          <a:p>
+            <a:r>
+              <a:rPr lang="en-US" dirty="0"/>
+              <a:t/>
+            </a:r>
+            <a:endParaRPr lang="en-US" dirty="0"/>
+          </a:p>
+        </p:txBody>
+      </p:sp>
+      <p:sp>
+        <p:nvSpPr>
+          <p:cNvPr id="4" name="Slide Number Placeholder 3"/>
+          <p:cNvSpPr>
+            <a:spLocks noGrp="1"/>
+          </p:cNvSpPr>
+          <p:nvPr>
+            <p:ph type="sldNum" sz="quarter" idx="10"/>
+          </p:nvPr>
+        </p:nvSpPr>
+        <p:spPr/>
+        <p:txBody>
+          <a:bodyPr/>
+          <a:lstStyle/>
+          <a:p>
+            <a:fld id="{F7021451-1387-4CA6-816F-3879F97B5CBC}" type="slidenum">
+              <a:rPr lang="en-US"/>
+              <a:t>17</a:t>
             </a:fld>
             <a:endParaRPr lang="en-US"/>
           </a:p>
@@ -2608,7 +2697,7 @@
                 <a:ea typeface="Calibri" pitchFamily="34" charset="-122"/>
                 <a:cs typeface="Calibri" pitchFamily="34" charset="-120"/>
               </a:rPr>
-              <a:t>1 / 16</a:t>
+              <a:t>1 / 17</a:t>
             </a:r>
             <a:endParaRPr lang="en-US" sz="900" dirty="0"/>
           </a:p>
@@ -3542,7 +3631,7 @@
                 <a:ea typeface="Calibri" pitchFamily="34" charset="-122"/>
                 <a:cs typeface="Calibri" pitchFamily="34" charset="-120"/>
               </a:rPr>
-              <a:t>10 / 16</a:t>
+              <a:t>10 / 17</a:t>
             </a:r>
             <a:endParaRPr lang="en-US" sz="900" dirty="0"/>
           </a:p>
@@ -4007,7 +4096,7 @@
                 <a:ea typeface="Calibri" pitchFamily="34" charset="-122"/>
                 <a:cs typeface="Calibri" pitchFamily="34" charset="-120"/>
               </a:rPr>
-              <a:t>11 / 16</a:t>
+              <a:t>11 / 17</a:t>
             </a:r>
             <a:endParaRPr lang="en-US" sz="900" dirty="0"/>
           </a:p>
@@ -4621,7 +4710,7 @@
                 <a:ea typeface="Calibri" pitchFamily="34" charset="-122"/>
                 <a:cs typeface="Calibri" pitchFamily="34" charset="-120"/>
               </a:rPr>
-              <a:t>12 / 16</a:t>
+              <a:t>12 / 17</a:t>
             </a:r>
             <a:endParaRPr lang="en-US" sz="900" dirty="0"/>
           </a:p>
@@ -6031,7 +6120,7 @@
                 <a:ea typeface="Calibri" pitchFamily="34" charset="-122"/>
                 <a:cs typeface="Calibri" pitchFamily="34" charset="-120"/>
               </a:rPr>
-              <a:t>13 / 16</a:t>
+              <a:t>13 / 17</a:t>
             </a:r>
             <a:endParaRPr lang="en-US" sz="900" dirty="0"/>
           </a:p>
@@ -6102,7 +6191,7 @@
                 <a:ea typeface="Trebuchet MS" pitchFamily="34" charset="-122"/>
                 <a:cs typeface="Trebuchet MS" pitchFamily="34" charset="-120"/>
               </a:rPr>
-              <a:t>DISKUSSION</a:t>
+              <a:t>DISKUSSION · 1/2</a:t>
             </a:r>
             <a:endParaRPr lang="en-US" sz="1100" dirty="0"/>
           </a:p>
@@ -6293,7 +6382,7 @@
                 <a:ea typeface="Calibri" pitchFamily="34" charset="-122"/>
                 <a:cs typeface="Calibri" pitchFamily="34" charset="-120"/>
               </a:rPr>
-              <a:t> — Zentralität ist der dominante Treiber.</a:t>
+              <a:t> — Zentralität ist ein starker Treiber. Robustheits-Check folgt.</a:t>
             </a:r>
             <a:endParaRPr lang="en-US" sz="1400" dirty="0"/>
           </a:p>
@@ -6737,7 +6826,7 @@
                 <a:ea typeface="Calibri" pitchFamily="34" charset="-122"/>
                 <a:cs typeface="Calibri" pitchFamily="34" charset="-120"/>
               </a:rPr>
-              <a:t>14 / 16</a:t>
+              <a:t>14 / 17</a:t>
             </a:r>
             <a:endParaRPr lang="en-US" sz="900" dirty="0"/>
           </a:p>
@@ -6808,7 +6897,7 @@
                 <a:ea typeface="Trebuchet MS" pitchFamily="34" charset="-122"/>
                 <a:cs typeface="Trebuchet MS" pitchFamily="34" charset="-120"/>
               </a:rPr>
-              <a:t>SCHLUSS · 1/2</a:t>
+              <a:t>DISKUSSION · 2/2</a:t>
             </a:r>
             <a:endParaRPr lang="en-US" sz="1100" dirty="0"/>
           </a:p>
@@ -6847,7 +6936,7 @@
                 <a:ea typeface="Trebuchet MS" pitchFamily="34" charset="-122"/>
                 <a:cs typeface="Trebuchet MS" pitchFamily="34" charset="-120"/>
               </a:rPr>
-              <a:t>Limitationen unseres Modells</a:t>
+              <a:t>Robustness Check — H1 hält stand</a:t>
             </a:r>
             <a:endParaRPr lang="en-US" sz="3000" dirty="0"/>
           </a:p>
@@ -6861,8 +6950,8 @@
         </p:nvSpPr>
         <p:spPr>
           <a:xfrm>
-            <a:off x="457200" y="1554480"/>
-            <a:ext cx="4023360" cy="1371600"/>
+            <a:off x="457200" y="1508760"/>
+            <a:ext cx="4937760" cy="3108960"/>
           </a:xfrm>
           <a:prstGeom prst="rect">
             <a:avLst/>
@@ -6893,18 +6982,18 @@
         </p:nvSpPr>
         <p:spPr>
           <a:xfrm>
-            <a:off x="457200" y="1554480"/>
-            <a:ext cx="4023360" cy="54864"/>
+            <a:off x="457200" y="1508760"/>
+            <a:ext cx="4937760" cy="54864"/>
           </a:xfrm>
           <a:prstGeom prst="rect">
             <a:avLst/>
           </a:prstGeom>
           <a:solidFill>
-            <a:srgbClr val="D73027"/>
+            <a:srgbClr val="065A82"/>
           </a:solidFill>
           <a:ln w="12700">
             <a:solidFill>
-              <a:srgbClr val="D73027"/>
+              <a:srgbClr val="065A82"/>
             </a:solidFill>
             <a:prstDash val="solid"/>
           </a:ln>
@@ -6918,34 +7007,34 @@
         </p:nvSpPr>
         <p:spPr>
           <a:xfrm>
-            <a:off x="640080" y="1719072"/>
-            <a:ext cx="3657600" cy="365760"/>
-          </a:xfrm>
-          <a:prstGeom prst="rect">
-            <a:avLst/>
-          </a:prstGeom>
-          <a:noFill/>
-          <a:ln/>
-        </p:spPr>
-        <p:txBody>
-          <a:bodyPr wrap="square" lIns="0" tIns="0" rIns="0" bIns="0" rtlCol="0" anchor="ctr"/>
-          <a:lstStyle/>
-          <a:p>
-            <a:pPr indent="0" marL="0">
-              <a:buNone/>
-            </a:pPr>
-            <a:r>
-              <a:rPr lang="en-US" sz="1400" b="1" dirty="0">
-                <a:solidFill>
-                  <a:srgbClr val="D73027"/>
+            <a:off x="640080" y="1645920"/>
+            <a:ext cx="4572000" cy="320040"/>
+          </a:xfrm>
+          <a:prstGeom prst="rect">
+            <a:avLst/>
+          </a:prstGeom>
+          <a:noFill/>
+          <a:ln/>
+        </p:spPr>
+        <p:txBody>
+          <a:bodyPr wrap="square" lIns="0" tIns="0" rIns="0" bIns="0" rtlCol="0" anchor="ctr"/>
+          <a:lstStyle/>
+          <a:p>
+            <a:pPr indent="0" marL="0">
+              <a:buNone/>
+            </a:pPr>
+            <a:r>
+              <a:rPr lang="en-US" sz="1300" b="1" dirty="0">
+                <a:solidFill>
+                  <a:srgbClr val="065A82"/>
                 </a:solidFill>
                 <a:latin typeface="Trebuchet MS" pitchFamily="34" charset="0"/>
                 <a:ea typeface="Trebuchet MS" pitchFamily="34" charset="-122"/>
                 <a:cs typeface="Trebuchet MS" pitchFamily="34" charset="-120"/>
               </a:rPr>
-              <a:t>Datenqualität OSM</a:t>
-            </a:r>
-            <a:endParaRPr lang="en-US" sz="1400" dirty="0"/>
+              <a:t>Multi-Variate-Regression  (n = 44, R² = 0.75)</a:t>
+            </a:r>
+            <a:endParaRPr lang="en-US" sz="1300" dirty="0"/>
           </a:p>
         </p:txBody>
       </p:sp>
@@ -6957,24 +7046,219 @@
         </p:nvSpPr>
         <p:spPr>
           <a:xfrm>
-            <a:off x="640080" y="2103120"/>
-            <a:ext cx="3657600" cy="777240"/>
-          </a:xfrm>
-          <a:prstGeom prst="rect">
-            <a:avLst/>
-          </a:prstGeom>
-          <a:noFill/>
-          <a:ln/>
-        </p:spPr>
-        <p:txBody>
-          <a:bodyPr wrap="square" lIns="0" tIns="0" rIns="0" bIns="0" rtlCol="0" anchor="ctr"/>
-          <a:lstStyle/>
-          <a:p>
-            <a:pPr indent="0" marL="0">
-              <a:buNone/>
-            </a:pPr>
-            <a:r>
-              <a:rPr lang="en-US" sz="1100" dirty="0">
+            <a:off x="640080" y="2057400"/>
+            <a:ext cx="1463040" cy="274320"/>
+          </a:xfrm>
+          <a:prstGeom prst="rect">
+            <a:avLst/>
+          </a:prstGeom>
+          <a:noFill/>
+          <a:ln/>
+        </p:spPr>
+        <p:txBody>
+          <a:bodyPr wrap="square" lIns="0" tIns="0" rIns="0" bIns="0" rtlCol="0" anchor="ctr"/>
+          <a:lstStyle/>
+          <a:p>
+            <a:pPr indent="0" marL="0">
+              <a:buNone/>
+            </a:pPr>
+            <a:r>
+              <a:rPr lang="en-US" sz="1000" b="1" dirty="0">
+                <a:solidFill>
+                  <a:srgbClr val="64748B"/>
+                </a:solidFill>
+                <a:latin typeface="Trebuchet MS" pitchFamily="34" charset="0"/>
+                <a:ea typeface="Trebuchet MS" pitchFamily="34" charset="-122"/>
+                <a:cs typeface="Trebuchet MS" pitchFamily="34" charset="-120"/>
+              </a:rPr>
+              <a:t>Prädiktor</a:t>
+            </a:r>
+            <a:endParaRPr lang="en-US" sz="1000" dirty="0"/>
+          </a:p>
+        </p:txBody>
+      </p:sp>
+      <p:sp>
+        <p:nvSpPr>
+          <p:cNvPr id="8" name="Text 6"/>
+          <p:cNvSpPr/>
+          <p:nvPr/>
+        </p:nvSpPr>
+        <p:spPr>
+          <a:xfrm>
+            <a:off x="2103120" y="2057400"/>
+            <a:ext cx="868680" cy="274320"/>
+          </a:xfrm>
+          <a:prstGeom prst="rect">
+            <a:avLst/>
+          </a:prstGeom>
+          <a:noFill/>
+          <a:ln/>
+        </p:spPr>
+        <p:txBody>
+          <a:bodyPr wrap="square" lIns="0" tIns="0" rIns="0" bIns="0" rtlCol="0" anchor="ctr"/>
+          <a:lstStyle/>
+          <a:p>
+            <a:pPr indent="0" marL="0">
+              <a:buNone/>
+            </a:pPr>
+            <a:r>
+              <a:rPr lang="en-US" sz="1000" b="1" dirty="0">
+                <a:solidFill>
+                  <a:srgbClr val="64748B"/>
+                </a:solidFill>
+                <a:latin typeface="Trebuchet MS" pitchFamily="34" charset="0"/>
+                <a:ea typeface="Trebuchet MS" pitchFamily="34" charset="-122"/>
+                <a:cs typeface="Trebuchet MS" pitchFamily="34" charset="-120"/>
+              </a:rPr>
+              <a:t>bivar. r</a:t>
+            </a:r>
+            <a:endParaRPr lang="en-US" sz="1000" dirty="0"/>
+          </a:p>
+        </p:txBody>
+      </p:sp>
+      <p:sp>
+        <p:nvSpPr>
+          <p:cNvPr id="9" name="Text 7"/>
+          <p:cNvSpPr/>
+          <p:nvPr/>
+        </p:nvSpPr>
+        <p:spPr>
+          <a:xfrm>
+            <a:off x="2971800" y="2057400"/>
+            <a:ext cx="868680" cy="274320"/>
+          </a:xfrm>
+          <a:prstGeom prst="rect">
+            <a:avLst/>
+          </a:prstGeom>
+          <a:noFill/>
+          <a:ln/>
+        </p:spPr>
+        <p:txBody>
+          <a:bodyPr wrap="square" lIns="0" tIns="0" rIns="0" bIns="0" rtlCol="0" anchor="ctr"/>
+          <a:lstStyle/>
+          <a:p>
+            <a:pPr indent="0" marL="0">
+              <a:buNone/>
+            </a:pPr>
+            <a:r>
+              <a:rPr lang="en-US" sz="1000" b="1" dirty="0">
+                <a:solidFill>
+                  <a:srgbClr val="64748B"/>
+                </a:solidFill>
+                <a:latin typeface="Trebuchet MS" pitchFamily="34" charset="0"/>
+                <a:ea typeface="Trebuchet MS" pitchFamily="34" charset="-122"/>
+                <a:cs typeface="Trebuchet MS" pitchFamily="34" charset="-120"/>
+              </a:rPr>
+              <a:t>partiell β</a:t>
+            </a:r>
+            <a:endParaRPr lang="en-US" sz="1000" dirty="0"/>
+          </a:p>
+        </p:txBody>
+      </p:sp>
+      <p:sp>
+        <p:nvSpPr>
+          <p:cNvPr id="10" name="Text 8"/>
+          <p:cNvSpPr/>
+          <p:nvPr/>
+        </p:nvSpPr>
+        <p:spPr>
+          <a:xfrm>
+            <a:off x="3840480" y="2057400"/>
+            <a:ext cx="868680" cy="274320"/>
+          </a:xfrm>
+          <a:prstGeom prst="rect">
+            <a:avLst/>
+          </a:prstGeom>
+          <a:noFill/>
+          <a:ln/>
+        </p:spPr>
+        <p:txBody>
+          <a:bodyPr wrap="square" lIns="0" tIns="0" rIns="0" bIns="0" rtlCol="0" anchor="ctr"/>
+          <a:lstStyle/>
+          <a:p>
+            <a:pPr indent="0" marL="0">
+              <a:buNone/>
+            </a:pPr>
+            <a:r>
+              <a:rPr lang="en-US" sz="1000" b="1" dirty="0">
+                <a:solidFill>
+                  <a:srgbClr val="64748B"/>
+                </a:solidFill>
+                <a:latin typeface="Trebuchet MS" pitchFamily="34" charset="0"/>
+                <a:ea typeface="Trebuchet MS" pitchFamily="34" charset="-122"/>
+                <a:cs typeface="Trebuchet MS" pitchFamily="34" charset="-120"/>
+              </a:rPr>
+              <a:t>p-Wert</a:t>
+            </a:r>
+            <a:endParaRPr lang="en-US" sz="1000" dirty="0"/>
+          </a:p>
+        </p:txBody>
+      </p:sp>
+      <p:sp>
+        <p:nvSpPr>
+          <p:cNvPr id="11" name="Text 9"/>
+          <p:cNvSpPr/>
+          <p:nvPr/>
+        </p:nvSpPr>
+        <p:spPr>
+          <a:xfrm>
+            <a:off x="4709160" y="2057400"/>
+            <a:ext cx="640080" cy="274320"/>
+          </a:xfrm>
+          <a:prstGeom prst="rect">
+            <a:avLst/>
+          </a:prstGeom>
+          <a:noFill/>
+          <a:ln/>
+        </p:spPr>
+        <p:txBody>
+          <a:bodyPr wrap="square" lIns="0" tIns="0" rIns="0" bIns="0" rtlCol="0" anchor="ctr"/>
+          <a:lstStyle/>
+          <a:p>
+            <a:pPr indent="0" marL="0">
+              <a:buNone/>
+            </a:pPr>
+            <a:r>
+              <a:rPr lang="en-US" sz="1000" b="1" dirty="0">
+                <a:solidFill>
+                  <a:srgbClr val="64748B"/>
+                </a:solidFill>
+                <a:latin typeface="Trebuchet MS" pitchFamily="34" charset="0"/>
+                <a:ea typeface="Trebuchet MS" pitchFamily="34" charset="-122"/>
+                <a:cs typeface="Trebuchet MS" pitchFamily="34" charset="-120"/>
+              </a:rPr>
+              <a:t>Status</a:t>
+            </a:r>
+            <a:endParaRPr lang="en-US" sz="1000" dirty="0"/>
+          </a:p>
+        </p:txBody>
+      </p:sp>
+      <p:sp>
+        <p:nvSpPr>
+          <p:cNvPr id="12" name="Text 10"/>
+          <p:cNvSpPr/>
+          <p:nvPr/>
+        </p:nvSpPr>
+        <p:spPr>
+          <a:xfrm>
+            <a:off x="640080" y="2423160"/>
+            <a:ext cx="1463040" cy="292608"/>
+          </a:xfrm>
+          <a:prstGeom prst="rect">
+            <a:avLst/>
+          </a:prstGeom>
+          <a:noFill/>
+          <a:ln/>
+        </p:spPr>
+        <p:txBody>
+          <a:bodyPr wrap="square" lIns="0" tIns="0" rIns="0" bIns="0" rtlCol="0" anchor="ctr"/>
+          <a:lstStyle/>
+          <a:p>
+            <a:pPr indent="0" marL="0">
+              <a:buNone/>
+            </a:pPr>
+            <a:r>
+              <a:rPr lang="en-US" sz="1100" b="1" dirty="0">
                 <a:solidFill>
                   <a:srgbClr val="0F172A"/>
                 </a:solidFill>
@@ -6982,7 +7266,7 @@
                 <a:ea typeface="Calibri" pitchFamily="34" charset="-122"/>
                 <a:cs typeface="Calibri" pitchFamily="34" charset="-120"/>
               </a:rPr>
-              <a:t>Kleine, unmappte Geschäfte fehlen. Annahme: Verzerrung gering, weil Geschäfte ähnlicher Klassifikation OSM-mässig konsistent sind.</a:t>
+              <a:t>Distanz HB</a:t>
             </a:r>
             <a:endParaRPr lang="en-US" sz="1100" dirty="0"/>
           </a:p>
@@ -6990,14 +7274,599 @@
       </p:sp>
       <p:sp>
         <p:nvSpPr>
-          <p:cNvPr id="8" name="Shape 6"/>
-          <p:cNvSpPr/>
-          <p:nvPr/>
-        </p:nvSpPr>
-        <p:spPr>
-          <a:xfrm>
-            <a:off x="4663440" y="1554480"/>
-            <a:ext cx="4023360" cy="1371600"/>
+          <p:cNvPr id="13" name="Text 11"/>
+          <p:cNvSpPr/>
+          <p:nvPr/>
+        </p:nvSpPr>
+        <p:spPr>
+          <a:xfrm>
+            <a:off x="2103120" y="2423160"/>
+            <a:ext cx="868680" cy="292608"/>
+          </a:xfrm>
+          <a:prstGeom prst="rect">
+            <a:avLst/>
+          </a:prstGeom>
+          <a:noFill/>
+          <a:ln/>
+        </p:spPr>
+        <p:txBody>
+          <a:bodyPr wrap="square" lIns="0" tIns="0" rIns="0" bIns="0" rtlCol="0" anchor="ctr"/>
+          <a:lstStyle/>
+          <a:p>
+            <a:pPr indent="0" marL="0">
+              <a:buNone/>
+            </a:pPr>
+            <a:r>
+              <a:rPr lang="en-US" sz="1050" dirty="0">
+                <a:solidFill>
+                  <a:srgbClr val="0F172A"/>
+                </a:solidFill>
+                <a:latin typeface="Consolas" pitchFamily="34" charset="0"/>
+                <a:ea typeface="Consolas" pitchFamily="34" charset="-122"/>
+                <a:cs typeface="Consolas" pitchFamily="34" charset="-120"/>
+              </a:rPr>
+              <a:t>−0.61</a:t>
+            </a:r>
+            <a:endParaRPr lang="en-US" sz="1050" dirty="0"/>
+          </a:p>
+        </p:txBody>
+      </p:sp>
+      <p:sp>
+        <p:nvSpPr>
+          <p:cNvPr id="14" name="Text 12"/>
+          <p:cNvSpPr/>
+          <p:nvPr/>
+        </p:nvSpPr>
+        <p:spPr>
+          <a:xfrm>
+            <a:off x="2971800" y="2423160"/>
+            <a:ext cx="868680" cy="292608"/>
+          </a:xfrm>
+          <a:prstGeom prst="rect">
+            <a:avLst/>
+          </a:prstGeom>
+          <a:noFill/>
+          <a:ln/>
+        </p:spPr>
+        <p:txBody>
+          <a:bodyPr wrap="square" lIns="0" tIns="0" rIns="0" bIns="0" rtlCol="0" anchor="ctr"/>
+          <a:lstStyle/>
+          <a:p>
+            <a:pPr indent="0" marL="0">
+              <a:buNone/>
+            </a:pPr>
+            <a:r>
+              <a:rPr lang="en-US" sz="1050" dirty="0">
+                <a:solidFill>
+                  <a:srgbClr val="0F172A"/>
+                </a:solidFill>
+                <a:latin typeface="Consolas" pitchFamily="34" charset="0"/>
+                <a:ea typeface="Consolas" pitchFamily="34" charset="-122"/>
+                <a:cs typeface="Consolas" pitchFamily="34" charset="-120"/>
+              </a:rPr>
+              <a:t>−3.65</a:t>
+            </a:r>
+            <a:endParaRPr lang="en-US" sz="1050" dirty="0"/>
+          </a:p>
+        </p:txBody>
+      </p:sp>
+      <p:sp>
+        <p:nvSpPr>
+          <p:cNvPr id="15" name="Text 13"/>
+          <p:cNvSpPr/>
+          <p:nvPr/>
+        </p:nvSpPr>
+        <p:spPr>
+          <a:xfrm>
+            <a:off x="3840480" y="2423160"/>
+            <a:ext cx="868680" cy="292608"/>
+          </a:xfrm>
+          <a:prstGeom prst="rect">
+            <a:avLst/>
+          </a:prstGeom>
+          <a:noFill/>
+          <a:ln/>
+        </p:spPr>
+        <p:txBody>
+          <a:bodyPr wrap="square" lIns="0" tIns="0" rIns="0" bIns="0" rtlCol="0" anchor="ctr"/>
+          <a:lstStyle/>
+          <a:p>
+            <a:pPr indent="0" marL="0">
+              <a:buNone/>
+            </a:pPr>
+            <a:r>
+              <a:rPr lang="en-US" sz="1050" dirty="0">
+                <a:solidFill>
+                  <a:srgbClr val="0F172A"/>
+                </a:solidFill>
+                <a:latin typeface="Consolas" pitchFamily="34" charset="0"/>
+                <a:ea typeface="Consolas" pitchFamily="34" charset="-122"/>
+                <a:cs typeface="Consolas" pitchFamily="34" charset="-120"/>
+              </a:rPr>
+              <a:t>0.011</a:t>
+            </a:r>
+            <a:endParaRPr lang="en-US" sz="1050" dirty="0"/>
+          </a:p>
+        </p:txBody>
+      </p:sp>
+      <p:sp>
+        <p:nvSpPr>
+          <p:cNvPr id="16" name="Text 14"/>
+          <p:cNvSpPr/>
+          <p:nvPr/>
+        </p:nvSpPr>
+        <p:spPr>
+          <a:xfrm>
+            <a:off x="4709160" y="2423160"/>
+            <a:ext cx="640080" cy="292608"/>
+          </a:xfrm>
+          <a:prstGeom prst="rect">
+            <a:avLst/>
+          </a:prstGeom>
+          <a:noFill/>
+          <a:ln/>
+        </p:spPr>
+        <p:txBody>
+          <a:bodyPr wrap="square" lIns="0" tIns="0" rIns="0" bIns="0" rtlCol="0" anchor="ctr"/>
+          <a:lstStyle/>
+          <a:p>
+            <a:pPr indent="0" marL="0">
+              <a:buNone/>
+            </a:pPr>
+            <a:r>
+              <a:rPr lang="en-US" sz="1050" b="1" dirty="0">
+                <a:solidFill>
+                  <a:srgbClr val="1A9850"/>
+                </a:solidFill>
+                <a:latin typeface="Consolas" pitchFamily="34" charset="0"/>
+                <a:ea typeface="Consolas" pitchFamily="34" charset="-122"/>
+                <a:cs typeface="Consolas" pitchFamily="34" charset="-120"/>
+              </a:rPr>
+              <a:t>*</a:t>
+            </a:r>
+            <a:endParaRPr lang="en-US" sz="1050" dirty="0"/>
+          </a:p>
+        </p:txBody>
+      </p:sp>
+      <p:sp>
+        <p:nvSpPr>
+          <p:cNvPr id="17" name="Text 15"/>
+          <p:cNvSpPr/>
+          <p:nvPr/>
+        </p:nvSpPr>
+        <p:spPr>
+          <a:xfrm>
+            <a:off x="640080" y="2807208"/>
+            <a:ext cx="1463040" cy="292608"/>
+          </a:xfrm>
+          <a:prstGeom prst="rect">
+            <a:avLst/>
+          </a:prstGeom>
+          <a:noFill/>
+          <a:ln/>
+        </p:spPr>
+        <p:txBody>
+          <a:bodyPr wrap="square" lIns="0" tIns="0" rIns="0" bIns="0" rtlCol="0" anchor="ctr"/>
+          <a:lstStyle/>
+          <a:p>
+            <a:pPr indent="0" marL="0">
+              <a:buNone/>
+            </a:pPr>
+            <a:r>
+              <a:rPr lang="en-US" sz="1100" b="1" dirty="0">
+                <a:solidFill>
+                  <a:srgbClr val="0F172A"/>
+                </a:solidFill>
+                <a:latin typeface="Calibri" pitchFamily="34" charset="0"/>
+                <a:ea typeface="Calibri" pitchFamily="34" charset="-122"/>
+                <a:cs typeface="Calibri" pitchFamily="34" charset="-120"/>
+              </a:rPr>
+              <a:t>Höhe (approx)</a:t>
+            </a:r>
+            <a:endParaRPr lang="en-US" sz="1100" dirty="0"/>
+          </a:p>
+        </p:txBody>
+      </p:sp>
+      <p:sp>
+        <p:nvSpPr>
+          <p:cNvPr id="18" name="Text 16"/>
+          <p:cNvSpPr/>
+          <p:nvPr/>
+        </p:nvSpPr>
+        <p:spPr>
+          <a:xfrm>
+            <a:off x="2103120" y="2807208"/>
+            <a:ext cx="868680" cy="292608"/>
+          </a:xfrm>
+          <a:prstGeom prst="rect">
+            <a:avLst/>
+          </a:prstGeom>
+          <a:noFill/>
+          <a:ln/>
+        </p:spPr>
+        <p:txBody>
+          <a:bodyPr wrap="square" lIns="0" tIns="0" rIns="0" bIns="0" rtlCol="0" anchor="ctr"/>
+          <a:lstStyle/>
+          <a:p>
+            <a:pPr indent="0" marL="0">
+              <a:buNone/>
+            </a:pPr>
+            <a:r>
+              <a:rPr lang="en-US" sz="1050" dirty="0">
+                <a:solidFill>
+                  <a:srgbClr val="0F172A"/>
+                </a:solidFill>
+                <a:latin typeface="Consolas" pitchFamily="34" charset="0"/>
+                <a:ea typeface="Consolas" pitchFamily="34" charset="-122"/>
+                <a:cs typeface="Consolas" pitchFamily="34" charset="-120"/>
+              </a:rPr>
+              <a:t>+0.08</a:t>
+            </a:r>
+            <a:endParaRPr lang="en-US" sz="1050" dirty="0"/>
+          </a:p>
+        </p:txBody>
+      </p:sp>
+      <p:sp>
+        <p:nvSpPr>
+          <p:cNvPr id="19" name="Text 17"/>
+          <p:cNvSpPr/>
+          <p:nvPr/>
+        </p:nvSpPr>
+        <p:spPr>
+          <a:xfrm>
+            <a:off x="2971800" y="2807208"/>
+            <a:ext cx="868680" cy="292608"/>
+          </a:xfrm>
+          <a:prstGeom prst="rect">
+            <a:avLst/>
+          </a:prstGeom>
+          <a:noFill/>
+          <a:ln/>
+        </p:spPr>
+        <p:txBody>
+          <a:bodyPr wrap="square" lIns="0" tIns="0" rIns="0" bIns="0" rtlCol="0" anchor="ctr"/>
+          <a:lstStyle/>
+          <a:p>
+            <a:pPr indent="0" marL="0">
+              <a:buNone/>
+            </a:pPr>
+            <a:r>
+              <a:rPr lang="en-US" sz="1050" dirty="0">
+                <a:solidFill>
+                  <a:srgbClr val="0F172A"/>
+                </a:solidFill>
+                <a:latin typeface="Consolas" pitchFamily="34" charset="0"/>
+                <a:ea typeface="Consolas" pitchFamily="34" charset="-122"/>
+                <a:cs typeface="Consolas" pitchFamily="34" charset="-120"/>
+              </a:rPr>
+              <a:t>+0.07</a:t>
+            </a:r>
+            <a:endParaRPr lang="en-US" sz="1050" dirty="0"/>
+          </a:p>
+        </p:txBody>
+      </p:sp>
+      <p:sp>
+        <p:nvSpPr>
+          <p:cNvPr id="20" name="Text 18"/>
+          <p:cNvSpPr/>
+          <p:nvPr/>
+        </p:nvSpPr>
+        <p:spPr>
+          <a:xfrm>
+            <a:off x="3840480" y="2807208"/>
+            <a:ext cx="868680" cy="292608"/>
+          </a:xfrm>
+          <a:prstGeom prst="rect">
+            <a:avLst/>
+          </a:prstGeom>
+          <a:noFill/>
+          <a:ln/>
+        </p:spPr>
+        <p:txBody>
+          <a:bodyPr wrap="square" lIns="0" tIns="0" rIns="0" bIns="0" rtlCol="0" anchor="ctr"/>
+          <a:lstStyle/>
+          <a:p>
+            <a:pPr indent="0" marL="0">
+              <a:buNone/>
+            </a:pPr>
+            <a:r>
+              <a:rPr lang="en-US" sz="1050" dirty="0">
+                <a:solidFill>
+                  <a:srgbClr val="0F172A"/>
+                </a:solidFill>
+                <a:latin typeface="Consolas" pitchFamily="34" charset="0"/>
+                <a:ea typeface="Consolas" pitchFamily="34" charset="-122"/>
+                <a:cs typeface="Consolas" pitchFamily="34" charset="-120"/>
+              </a:rPr>
+              <a:t>0.281</a:t>
+            </a:r>
+            <a:endParaRPr lang="en-US" sz="1050" dirty="0"/>
+          </a:p>
+        </p:txBody>
+      </p:sp>
+      <p:sp>
+        <p:nvSpPr>
+          <p:cNvPr id="21" name="Text 19"/>
+          <p:cNvSpPr/>
+          <p:nvPr/>
+        </p:nvSpPr>
+        <p:spPr>
+          <a:xfrm>
+            <a:off x="4709160" y="2807208"/>
+            <a:ext cx="640080" cy="292608"/>
+          </a:xfrm>
+          <a:prstGeom prst="rect">
+            <a:avLst/>
+          </a:prstGeom>
+          <a:noFill/>
+          <a:ln/>
+        </p:spPr>
+        <p:txBody>
+          <a:bodyPr wrap="square" lIns="0" tIns="0" rIns="0" bIns="0" rtlCol="0" anchor="ctr"/>
+          <a:lstStyle/>
+          <a:p>
+            <a:pPr indent="0" marL="0">
+              <a:buNone/>
+            </a:pPr>
+            <a:r>
+              <a:rPr lang="en-US" sz="1050" b="1" dirty="0">
+                <a:solidFill>
+                  <a:srgbClr val="64748B"/>
+                </a:solidFill>
+                <a:latin typeface="Consolas" pitchFamily="34" charset="0"/>
+                <a:ea typeface="Consolas" pitchFamily="34" charset="-122"/>
+                <a:cs typeface="Consolas" pitchFamily="34" charset="-120"/>
+              </a:rPr>
+              <a:t>n.s.</a:t>
+            </a:r>
+            <a:endParaRPr lang="en-US" sz="1050" dirty="0"/>
+          </a:p>
+        </p:txBody>
+      </p:sp>
+      <p:sp>
+        <p:nvSpPr>
+          <p:cNvPr id="22" name="Text 20"/>
+          <p:cNvSpPr/>
+          <p:nvPr/>
+        </p:nvSpPr>
+        <p:spPr>
+          <a:xfrm>
+            <a:off x="640080" y="3191256"/>
+            <a:ext cx="1463040" cy="292608"/>
+          </a:xfrm>
+          <a:prstGeom prst="rect">
+            <a:avLst/>
+          </a:prstGeom>
+          <a:noFill/>
+          <a:ln/>
+        </p:spPr>
+        <p:txBody>
+          <a:bodyPr wrap="square" lIns="0" tIns="0" rIns="0" bIns="0" rtlCol="0" anchor="ctr"/>
+          <a:lstStyle/>
+          <a:p>
+            <a:pPr indent="0" marL="0">
+              <a:buNone/>
+            </a:pPr>
+            <a:r>
+              <a:rPr lang="en-US" sz="1100" b="1" dirty="0">
+                <a:solidFill>
+                  <a:srgbClr val="0F172A"/>
+                </a:solidFill>
+                <a:latin typeface="Calibri" pitchFamily="34" charset="0"/>
+                <a:ea typeface="Calibri" pitchFamily="34" charset="-122"/>
+                <a:cs typeface="Calibri" pitchFamily="34" charset="-120"/>
+              </a:rPr>
+              <a:t>POI-Dichte</a:t>
+            </a:r>
+            <a:endParaRPr lang="en-US" sz="1100" dirty="0"/>
+          </a:p>
+        </p:txBody>
+      </p:sp>
+      <p:sp>
+        <p:nvSpPr>
+          <p:cNvPr id="23" name="Text 21"/>
+          <p:cNvSpPr/>
+          <p:nvPr/>
+        </p:nvSpPr>
+        <p:spPr>
+          <a:xfrm>
+            <a:off x="2103120" y="3191256"/>
+            <a:ext cx="868680" cy="292608"/>
+          </a:xfrm>
+          <a:prstGeom prst="rect">
+            <a:avLst/>
+          </a:prstGeom>
+          <a:noFill/>
+          <a:ln/>
+        </p:spPr>
+        <p:txBody>
+          <a:bodyPr wrap="square" lIns="0" tIns="0" rIns="0" bIns="0" rtlCol="0" anchor="ctr"/>
+          <a:lstStyle/>
+          <a:p>
+            <a:pPr indent="0" marL="0">
+              <a:buNone/>
+            </a:pPr>
+            <a:r>
+              <a:rPr lang="en-US" sz="1050" dirty="0">
+                <a:solidFill>
+                  <a:srgbClr val="0F172A"/>
+                </a:solidFill>
+                <a:latin typeface="Consolas" pitchFamily="34" charset="0"/>
+                <a:ea typeface="Consolas" pitchFamily="34" charset="-122"/>
+                <a:cs typeface="Consolas" pitchFamily="34" charset="-120"/>
+              </a:rPr>
+              <a:t>+0.84</a:t>
+            </a:r>
+            <a:endParaRPr lang="en-US" sz="1050" dirty="0"/>
+          </a:p>
+        </p:txBody>
+      </p:sp>
+      <p:sp>
+        <p:nvSpPr>
+          <p:cNvPr id="24" name="Text 22"/>
+          <p:cNvSpPr/>
+          <p:nvPr/>
+        </p:nvSpPr>
+        <p:spPr>
+          <a:xfrm>
+            <a:off x="2971800" y="3191256"/>
+            <a:ext cx="868680" cy="292608"/>
+          </a:xfrm>
+          <a:prstGeom prst="rect">
+            <a:avLst/>
+          </a:prstGeom>
+          <a:noFill/>
+          <a:ln/>
+        </p:spPr>
+        <p:txBody>
+          <a:bodyPr wrap="square" lIns="0" tIns="0" rIns="0" bIns="0" rtlCol="0" anchor="ctr"/>
+          <a:lstStyle/>
+          <a:p>
+            <a:pPr indent="0" marL="0">
+              <a:buNone/>
+            </a:pPr>
+            <a:r>
+              <a:rPr lang="en-US" sz="1050" dirty="0">
+                <a:solidFill>
+                  <a:srgbClr val="0F172A"/>
+                </a:solidFill>
+                <a:latin typeface="Consolas" pitchFamily="34" charset="0"/>
+                <a:ea typeface="Consolas" pitchFamily="34" charset="-122"/>
+                <a:cs typeface="Consolas" pitchFamily="34" charset="-120"/>
+              </a:rPr>
+              <a:t>+0.14</a:t>
+            </a:r>
+            <a:endParaRPr lang="en-US" sz="1050" dirty="0"/>
+          </a:p>
+        </p:txBody>
+      </p:sp>
+      <p:sp>
+        <p:nvSpPr>
+          <p:cNvPr id="25" name="Text 23"/>
+          <p:cNvSpPr/>
+          <p:nvPr/>
+        </p:nvSpPr>
+        <p:spPr>
+          <a:xfrm>
+            <a:off x="3840480" y="3191256"/>
+            <a:ext cx="868680" cy="292608"/>
+          </a:xfrm>
+          <a:prstGeom prst="rect">
+            <a:avLst/>
+          </a:prstGeom>
+          <a:noFill/>
+          <a:ln/>
+        </p:spPr>
+        <p:txBody>
+          <a:bodyPr wrap="square" lIns="0" tIns="0" rIns="0" bIns="0" rtlCol="0" anchor="ctr"/>
+          <a:lstStyle/>
+          <a:p>
+            <a:pPr indent="0" marL="0">
+              <a:buNone/>
+            </a:pPr>
+            <a:r>
+              <a:rPr lang="en-US" sz="1050" dirty="0">
+                <a:solidFill>
+                  <a:srgbClr val="0F172A"/>
+                </a:solidFill>
+                <a:latin typeface="Consolas" pitchFamily="34" charset="0"/>
+                <a:ea typeface="Consolas" pitchFamily="34" charset="-122"/>
+                <a:cs typeface="Consolas" pitchFamily="34" charset="-120"/>
+              </a:rPr>
+              <a:t>&lt;10⁻⁸</a:t>
+            </a:r>
+            <a:endParaRPr lang="en-US" sz="1050" dirty="0"/>
+          </a:p>
+        </p:txBody>
+      </p:sp>
+      <p:sp>
+        <p:nvSpPr>
+          <p:cNvPr id="26" name="Text 24"/>
+          <p:cNvSpPr/>
+          <p:nvPr/>
+        </p:nvSpPr>
+        <p:spPr>
+          <a:xfrm>
+            <a:off x="4709160" y="3191256"/>
+            <a:ext cx="640080" cy="292608"/>
+          </a:xfrm>
+          <a:prstGeom prst="rect">
+            <a:avLst/>
+          </a:prstGeom>
+          <a:noFill/>
+          <a:ln/>
+        </p:spPr>
+        <p:txBody>
+          <a:bodyPr wrap="square" lIns="0" tIns="0" rIns="0" bIns="0" rtlCol="0" anchor="ctr"/>
+          <a:lstStyle/>
+          <a:p>
+            <a:pPr indent="0" marL="0">
+              <a:buNone/>
+            </a:pPr>
+            <a:r>
+              <a:rPr lang="en-US" sz="1050" b="1" dirty="0">
+                <a:solidFill>
+                  <a:srgbClr val="F59E0B"/>
+                </a:solidFill>
+                <a:latin typeface="Consolas" pitchFamily="34" charset="0"/>
+                <a:ea typeface="Consolas" pitchFamily="34" charset="-122"/>
+                <a:cs typeface="Consolas" pitchFamily="34" charset="-120"/>
+              </a:rPr>
+              <a:t>***</a:t>
+            </a:r>
+            <a:endParaRPr lang="en-US" sz="1050" dirty="0"/>
+          </a:p>
+        </p:txBody>
+      </p:sp>
+      <p:sp>
+        <p:nvSpPr>
+          <p:cNvPr id="27" name="Text 25"/>
+          <p:cNvSpPr/>
+          <p:nvPr/>
+        </p:nvSpPr>
+        <p:spPr>
+          <a:xfrm>
+            <a:off x="640080" y="4160520"/>
+            <a:ext cx="4572000" cy="274320"/>
+          </a:xfrm>
+          <a:prstGeom prst="rect">
+            <a:avLst/>
+          </a:prstGeom>
+          <a:noFill/>
+          <a:ln/>
+        </p:spPr>
+        <p:txBody>
+          <a:bodyPr wrap="square" lIns="0" tIns="0" rIns="0" bIns="0" rtlCol="0" anchor="ctr"/>
+          <a:lstStyle/>
+          <a:p>
+            <a:pPr indent="0" marL="0">
+              <a:buNone/>
+            </a:pPr>
+            <a:r>
+              <a:rPr lang="en-US" sz="900" i="1" dirty="0">
+                <a:solidFill>
+                  <a:srgbClr val="64748B"/>
+                </a:solidFill>
+                <a:latin typeface="Calibri" pitchFamily="34" charset="0"/>
+                <a:ea typeface="Calibri" pitchFamily="34" charset="-122"/>
+                <a:cs typeface="Calibri" pitchFamily="34" charset="-120"/>
+              </a:rPr>
+              <a:t>Signifikanz-Codes:  *** p&lt;0.001 · ** p&lt;0.01 · * p&lt;0.05</a:t>
+            </a:r>
+            <a:endParaRPr lang="en-US" sz="900" dirty="0"/>
+          </a:p>
+        </p:txBody>
+      </p:sp>
+      <p:sp>
+        <p:nvSpPr>
+          <p:cNvPr id="28" name="Shape 26"/>
+          <p:cNvSpPr/>
+          <p:nvPr/>
+        </p:nvSpPr>
+        <p:spPr>
+          <a:xfrm>
+            <a:off x="5486400" y="1508760"/>
+            <a:ext cx="3200400" cy="3108960"/>
           </a:xfrm>
           <a:prstGeom prst="rect">
             <a:avLst/>
@@ -7022,24 +7891,24 @@
       </p:sp>
       <p:sp>
         <p:nvSpPr>
-          <p:cNvPr id="9" name="Shape 7"/>
-          <p:cNvSpPr/>
-          <p:nvPr/>
-        </p:nvSpPr>
-        <p:spPr>
-          <a:xfrm>
-            <a:off x="4663440" y="1554480"/>
-            <a:ext cx="4023360" cy="54864"/>
+          <p:cNvPr id="29" name="Shape 27"/>
+          <p:cNvSpPr/>
+          <p:nvPr/>
+        </p:nvSpPr>
+        <p:spPr>
+          <a:xfrm>
+            <a:off x="5486400" y="1508760"/>
+            <a:ext cx="3200400" cy="54864"/>
           </a:xfrm>
           <a:prstGeom prst="rect">
             <a:avLst/>
           </a:prstGeom>
           <a:solidFill>
-            <a:srgbClr val="D73027"/>
+            <a:srgbClr val="1C7293"/>
           </a:solidFill>
           <a:ln w="12700">
             <a:solidFill>
-              <a:srgbClr val="D73027"/>
+              <a:srgbClr val="1C7293"/>
             </a:solidFill>
             <a:prstDash val="solid"/>
           </a:ln>
@@ -7047,77 +7916,345 @@
       </p:sp>
       <p:sp>
         <p:nvSpPr>
-          <p:cNvPr id="10" name="Text 8"/>
-          <p:cNvSpPr/>
-          <p:nvPr/>
-        </p:nvSpPr>
-        <p:spPr>
-          <a:xfrm>
-            <a:off x="4846320" y="1719072"/>
-            <a:ext cx="3657600" cy="365760"/>
-          </a:xfrm>
-          <a:prstGeom prst="rect">
-            <a:avLst/>
-          </a:prstGeom>
-          <a:noFill/>
-          <a:ln/>
-        </p:spPr>
-        <p:txBody>
-          <a:bodyPr wrap="square" lIns="0" tIns="0" rIns="0" bIns="0" rtlCol="0" anchor="ctr"/>
-          <a:lstStyle/>
-          <a:p>
-            <a:pPr indent="0" marL="0">
-              <a:buNone/>
-            </a:pPr>
-            <a:r>
-              <a:rPr lang="en-US" sz="1400" b="1" dirty="0">
-                <a:solidFill>
-                  <a:srgbClr val="D73027"/>
+          <p:cNvPr id="30" name="Text 28"/>
+          <p:cNvSpPr/>
+          <p:nvPr/>
+        </p:nvSpPr>
+        <p:spPr>
+          <a:xfrm>
+            <a:off x="5669280" y="1645920"/>
+            <a:ext cx="2926080" cy="320040"/>
+          </a:xfrm>
+          <a:prstGeom prst="rect">
+            <a:avLst/>
+          </a:prstGeom>
+          <a:noFill/>
+          <a:ln/>
+        </p:spPr>
+        <p:txBody>
+          <a:bodyPr wrap="square" lIns="0" tIns="0" rIns="0" bIns="0" rtlCol="0" anchor="ctr"/>
+          <a:lstStyle/>
+          <a:p>
+            <a:pPr indent="0" marL="0">
+              <a:buNone/>
+            </a:pPr>
+            <a:r>
+              <a:rPr lang="en-US" sz="1300" b="1" dirty="0">
+                <a:solidFill>
+                  <a:srgbClr val="1C7293"/>
                 </a:solidFill>
                 <a:latin typeface="Trebuchet MS" pitchFamily="34" charset="0"/>
                 <a:ea typeface="Trebuchet MS" pitchFamily="34" charset="-122"/>
                 <a:cs typeface="Trebuchet MS" pitchFamily="34" charset="-120"/>
               </a:rPr>
-              <a:t>Mietpreis-Validierung offen</a:t>
-            </a:r>
-            <a:endParaRPr lang="en-US" sz="1400" dirty="0"/>
-          </a:p>
-        </p:txBody>
-      </p:sp>
-      <p:sp>
-        <p:nvSpPr>
-          <p:cNvPr id="11" name="Text 9"/>
-          <p:cNvSpPr/>
-          <p:nvPr/>
-        </p:nvSpPr>
-        <p:spPr>
-          <a:xfrm>
-            <a:off x="4846320" y="2103120"/>
-            <a:ext cx="3657600" cy="777240"/>
-          </a:xfrm>
-          <a:prstGeom prst="rect">
-            <a:avLst/>
-          </a:prstGeom>
-          <a:noFill/>
-          <a:ln/>
-        </p:spPr>
-        <p:txBody>
-          <a:bodyPr wrap="square" lIns="0" tIns="0" rIns="0" bIns="0" rtlCol="0" anchor="ctr"/>
-          <a:lstStyle/>
-          <a:p>
-            <a:pPr indent="0" marL="0">
-              <a:buNone/>
-            </a:pPr>
-            <a:r>
-              <a:rPr lang="en-US" sz="1100" dirty="0">
-                <a:solidFill>
-                  <a:srgbClr val="0F172A"/>
+              <a:t>Was das bedeutet</a:t>
+            </a:r>
+            <a:endParaRPr lang="en-US" sz="1300" dirty="0"/>
+          </a:p>
+        </p:txBody>
+      </p:sp>
+      <p:sp>
+        <p:nvSpPr>
+          <p:cNvPr id="31" name="Text 29"/>
+          <p:cNvSpPr/>
+          <p:nvPr/>
+        </p:nvSpPr>
+        <p:spPr>
+          <a:xfrm>
+            <a:off x="5669280" y="2057400"/>
+            <a:ext cx="2926080" cy="2468880"/>
+          </a:xfrm>
+          <a:prstGeom prst="rect">
+            <a:avLst/>
+          </a:prstGeom>
+          <a:noFill/>
+          <a:ln/>
+        </p:spPr>
+        <p:txBody>
+          <a:bodyPr wrap="square" lIns="0" tIns="0" rIns="0" bIns="0" rtlCol="0" anchor="ctr"/>
+          <a:lstStyle/>
+          <a:p>
+            <a:pPr indent="0" marL="0">
+              <a:buNone/>
+            </a:pPr>
+            <a:r>
+              <a:rPr lang="en-US" sz="1050" b="1" dirty="0">
+                <a:solidFill>
+                  <a:srgbClr val="1A9850"/>
                 </a:solidFill>
                 <a:latin typeface="Calibri" pitchFamily="34" charset="0"/>
                 <a:ea typeface="Calibri" pitchFamily="34" charset="-122"/>
                 <a:cs typeface="Calibri" pitchFamily="34" charset="-120"/>
               </a:rPr>
-              <a:t>Stadt-Zürich-Mietpreis-Datensatz war zum Auswertungszeitpunkt unter dokumentierter URL nicht erreichbar (HTTP 404) — H1 wurde via Distanz zum HB validiert.</a:t>
+              <a:t>H1 robust</a:t>
+            </a:r>
+            <a:endParaRPr lang="en-US" sz="1050" dirty="0"/>
+          </a:p>
+          <a:p>
+            <a:pPr indent="0" marL="0">
+              <a:buNone/>
+            </a:pPr>
+            <a:r>
+              <a:rPr lang="en-US" sz="1050" dirty="0">
+                <a:solidFill>
+                  <a:srgbClr val="0F172A"/>
+                </a:solidFill>
+                <a:latin typeface="Calibri" pitchFamily="34" charset="0"/>
+                <a:ea typeface="Calibri" pitchFamily="34" charset="-122"/>
+                <a:cs typeface="Calibri" pitchFamily="34" charset="-120"/>
+              </a:rPr>
+              <a:t>Distanz bleibt nach Kontrolle für Höhe und POI-Dichte signifikant.</a:t>
+            </a:r>
+            <a:endParaRPr lang="en-US" sz="1050" dirty="0"/>
+          </a:p>
+          <a:p>
+            <a:pPr indent="0" marL="0">
+              <a:buNone/>
+            </a:pPr>
+            <a:r>
+              <a:rPr lang="en-US" sz="1050" dirty="0">
+                <a:solidFill>
+                  <a:srgbClr val="0F172A"/>
+                </a:solidFill>
+                <a:latin typeface="Calibri" pitchFamily="34" charset="0"/>
+                <a:ea typeface="Calibri" pitchFamily="34" charset="-122"/>
+                <a:cs typeface="Calibri" pitchFamily="34" charset="-120"/>
+              </a:rPr>
+              <a:t> </a:t>
+            </a:r>
+            <a:endParaRPr lang="en-US" sz="1050" dirty="0"/>
+          </a:p>
+          <a:p>
+            <a:pPr indent="0" marL="0">
+              <a:buNone/>
+            </a:pPr>
+            <a:r>
+              <a:rPr lang="en-US" sz="1050" b="1" dirty="0">
+                <a:solidFill>
+                  <a:srgbClr val="64748B"/>
+                </a:solidFill>
+                <a:latin typeface="Calibri" pitchFamily="34" charset="0"/>
+                <a:ea typeface="Calibri" pitchFamily="34" charset="-122"/>
+                <a:cs typeface="Calibri" pitchFamily="34" charset="-120"/>
+              </a:rPr>
+              <a:t>Topografie inkonklusiv</a:t>
+            </a:r>
+            <a:endParaRPr lang="en-US" sz="1050" dirty="0"/>
+          </a:p>
+          <a:p>
+            <a:pPr indent="0" marL="0">
+              <a:buNone/>
+            </a:pPr>
+            <a:r>
+              <a:rPr lang="en-US" sz="1050" dirty="0">
+                <a:solidFill>
+                  <a:srgbClr val="0F172A"/>
+                </a:solidFill>
+                <a:latin typeface="Calibri" pitchFamily="34" charset="0"/>
+                <a:ea typeface="Calibri" pitchFamily="34" charset="-122"/>
+                <a:cs typeface="Calibri" pitchFamily="34" charset="-120"/>
+              </a:rPr>
+              <a:t>Höhe approximiert (Open-Elevation-API zum Zeitpunkt down) — kein definitives Urteil.</a:t>
+            </a:r>
+            <a:endParaRPr lang="en-US" sz="1050" dirty="0"/>
+          </a:p>
+          <a:p>
+            <a:pPr indent="0" marL="0">
+              <a:buNone/>
+            </a:pPr>
+            <a:r>
+              <a:rPr lang="en-US" sz="1050" dirty="0">
+                <a:solidFill>
+                  <a:srgbClr val="0F172A"/>
+                </a:solidFill>
+                <a:latin typeface="Calibri" pitchFamily="34" charset="0"/>
+                <a:ea typeface="Calibri" pitchFamily="34" charset="-122"/>
+                <a:cs typeface="Calibri" pitchFamily="34" charset="-120"/>
+              </a:rPr>
+              <a:t> </a:t>
+            </a:r>
+            <a:endParaRPr lang="en-US" sz="1050" dirty="0"/>
+          </a:p>
+          <a:p>
+            <a:pPr indent="0" marL="0">
+              <a:buNone/>
+            </a:pPr>
+            <a:r>
+              <a:rPr lang="en-US" sz="1050" b="1" dirty="0">
+                <a:solidFill>
+                  <a:srgbClr val="F59E0B"/>
+                </a:solidFill>
+                <a:latin typeface="Calibri" pitchFamily="34" charset="0"/>
+                <a:ea typeface="Calibri" pitchFamily="34" charset="-122"/>
+                <a:cs typeface="Calibri" pitchFamily="34" charset="-120"/>
+              </a:rPr>
+              <a:t>POI-Dichte tautologisch</a:t>
+            </a:r>
+            <a:endParaRPr lang="en-US" sz="1050" dirty="0"/>
+          </a:p>
+          <a:p>
+            <a:pPr indent="0" marL="0">
+              <a:buNone/>
+            </a:pPr>
+            <a:r>
+              <a:rPr lang="en-US" sz="1050" dirty="0">
+                <a:solidFill>
+                  <a:srgbClr val="0F172A"/>
+                </a:solidFill>
+                <a:latin typeface="Calibri" pitchFamily="34" charset="0"/>
+                <a:ea typeface="Calibri" pitchFamily="34" charset="-122"/>
+                <a:cs typeface="Calibri" pitchFamily="34" charset="-120"/>
+              </a:rPr>
+              <a:t>Score wird aus POIs berechnet — Korrelation strukturell zu erwarten.</a:t>
+            </a:r>
+            <a:endParaRPr lang="en-US" sz="1050" dirty="0"/>
+          </a:p>
+        </p:txBody>
+      </p:sp>
+      <p:sp>
+        <p:nvSpPr>
+          <p:cNvPr id="32" name="Text 30"/>
+          <p:cNvSpPr/>
+          <p:nvPr/>
+        </p:nvSpPr>
+        <p:spPr>
+          <a:xfrm>
+            <a:off x="365760" y="4846320"/>
+            <a:ext cx="7315200" cy="228600"/>
+          </a:xfrm>
+          <a:prstGeom prst="rect">
+            <a:avLst/>
+          </a:prstGeom>
+          <a:noFill/>
+          <a:ln/>
+        </p:spPr>
+        <p:txBody>
+          <a:bodyPr wrap="square" lIns="0" tIns="0" rIns="0" bIns="0" rtlCol="0" anchor="ctr"/>
+          <a:lstStyle/>
+          <a:p>
+            <a:pPr algn="l" indent="0" marL="0">
+              <a:buNone/>
+            </a:pPr>
+            <a:r>
+              <a:rPr lang="en-US" sz="900" dirty="0">
+                <a:solidFill>
+                  <a:srgbClr val="64748B"/>
+                </a:solidFill>
+                <a:latin typeface="Calibri" pitchFamily="34" charset="0"/>
+                <a:ea typeface="Calibri" pitchFamily="34" charset="-122"/>
+                <a:cs typeface="Calibri" pitchFamily="34" charset="-120"/>
+              </a:rPr>
+              <a:t>OLS-Regression mit statsmodels · Daten: reports/robustness_data.csv</a:t>
+            </a:r>
+            <a:endParaRPr lang="en-US" sz="900" dirty="0"/>
+          </a:p>
+        </p:txBody>
+      </p:sp>
+      <p:sp>
+        <p:nvSpPr>
+          <p:cNvPr id="33" name="Text 31"/>
+          <p:cNvSpPr/>
+          <p:nvPr/>
+        </p:nvSpPr>
+        <p:spPr>
+          <a:xfrm>
+            <a:off x="8229600" y="4846320"/>
+            <a:ext cx="822960" cy="228600"/>
+          </a:xfrm>
+          <a:prstGeom prst="rect">
+            <a:avLst/>
+          </a:prstGeom>
+          <a:noFill/>
+          <a:ln/>
+        </p:spPr>
+        <p:txBody>
+          <a:bodyPr wrap="square" lIns="0" tIns="0" rIns="0" bIns="0" rtlCol="0" anchor="ctr"/>
+          <a:lstStyle/>
+          <a:p>
+            <a:pPr algn="r" indent="0" marL="0">
+              <a:buNone/>
+            </a:pPr>
+            <a:r>
+              <a:rPr lang="en-US" sz="900" dirty="0">
+                <a:solidFill>
+                  <a:srgbClr val="64748B"/>
+                </a:solidFill>
+                <a:latin typeface="Calibri" pitchFamily="34" charset="0"/>
+                <a:ea typeface="Calibri" pitchFamily="34" charset="-122"/>
+                <a:cs typeface="Calibri" pitchFamily="34" charset="-120"/>
+              </a:rPr>
+              <a:t>15 / 17</a:t>
+            </a:r>
+            <a:endParaRPr lang="en-US" sz="900" dirty="0"/>
+          </a:p>
+        </p:txBody>
+      </p:sp>
+    </p:spTree>
+  </p:cSld>
+  <p:clrMapOvr>
+    <a:masterClrMapping/>
+  </p:clrMapOvr>
+</p:sld>
+</file>
+
+<file path=ppt/slides/slide16.xml><?xml version="1.0" encoding="utf-8"?>
+<p:sld xmlns:a="http://schemas.openxmlformats.org/drawingml/2006/main" xmlns:r="http://schemas.openxmlformats.org/officeDocument/2006/relationships" xmlns:p="http://schemas.openxmlformats.org/presentationml/2006/main">
+  <p:cSld name="Slide 16">
+    <p:bg>
+      <p:bgPr>
+        <a:solidFill>
+          <a:srgbClr val="FFFFFF"/>
+        </a:solidFill>
+      </p:bgPr>
+    </p:bg>
+    <p:spTree>
+      <p:nvGrpSpPr>
+        <p:cNvPr id="1" name=""/>
+        <p:cNvGrpSpPr/>
+        <p:nvPr/>
+      </p:nvGrpSpPr>
+      <p:grpSpPr>
+        <a:xfrm>
+          <a:off x="0" y="0"/>
+          <a:ext cx="0" cy="0"/>
+          <a:chOff x="0" y="0"/>
+          <a:chExt cx="0" cy="0"/>
+        </a:xfrm>
+      </p:grpSpPr>
+      <p:sp>
+        <p:nvSpPr>
+          <p:cNvPr id="2" name="Text 0"/>
+          <p:cNvSpPr/>
+          <p:nvPr/>
+        </p:nvSpPr>
+        <p:spPr>
+          <a:xfrm>
+            <a:off x="365760" y="274320"/>
+            <a:ext cx="4572000" cy="274320"/>
+          </a:xfrm>
+          <a:prstGeom prst="rect">
+            <a:avLst/>
+          </a:prstGeom>
+          <a:noFill/>
+          <a:ln/>
+        </p:spPr>
+        <p:txBody>
+          <a:bodyPr wrap="square" lIns="0" tIns="0" rIns="0" bIns="0" rtlCol="0" anchor="ctr"/>
+          <a:lstStyle/>
+          <a:p>
+            <a:pPr indent="0" marL="0">
+              <a:buNone/>
+            </a:pPr>
+            <a:r>
+              <a:rPr lang="en-US" sz="1100" b="1" spc="400" kern="0" dirty="0">
+                <a:solidFill>
+                  <a:srgbClr val="1C7293"/>
+                </a:solidFill>
+                <a:latin typeface="Trebuchet MS" pitchFamily="34" charset="0"/>
+                <a:ea typeface="Trebuchet MS" pitchFamily="34" charset="-122"/>
+                <a:cs typeface="Trebuchet MS" pitchFamily="34" charset="-120"/>
+              </a:rPr>
+              <a:t>SCHLUSS · 1/2</a:t>
             </a:r>
             <a:endParaRPr lang="en-US" sz="1100" dirty="0"/>
           </a:p>
@@ -7125,13 +8262,52 @@
       </p:sp>
       <p:sp>
         <p:nvSpPr>
-          <p:cNvPr id="12" name="Shape 10"/>
-          <p:cNvSpPr/>
-          <p:nvPr/>
-        </p:nvSpPr>
-        <p:spPr>
-          <a:xfrm>
-            <a:off x="457200" y="3063240"/>
+          <p:cNvPr id="3" name="Text 1"/>
+          <p:cNvSpPr/>
+          <p:nvPr/>
+        </p:nvSpPr>
+        <p:spPr>
+          <a:xfrm>
+            <a:off x="365760" y="594360"/>
+            <a:ext cx="8412480" cy="640080"/>
+          </a:xfrm>
+          <a:prstGeom prst="rect">
+            <a:avLst/>
+          </a:prstGeom>
+          <a:noFill/>
+          <a:ln/>
+        </p:spPr>
+        <p:txBody>
+          <a:bodyPr wrap="square" lIns="0" tIns="0" rIns="0" bIns="0" rtlCol="0" anchor="ctr"/>
+          <a:lstStyle/>
+          <a:p>
+            <a:pPr indent="0" marL="0">
+              <a:buNone/>
+            </a:pPr>
+            <a:r>
+              <a:rPr lang="en-US" sz="3000" b="1" dirty="0">
+                <a:solidFill>
+                  <a:srgbClr val="0F172A"/>
+                </a:solidFill>
+                <a:latin typeface="Trebuchet MS" pitchFamily="34" charset="0"/>
+                <a:ea typeface="Trebuchet MS" pitchFamily="34" charset="-122"/>
+                <a:cs typeface="Trebuchet MS" pitchFamily="34" charset="-120"/>
+              </a:rPr>
+              <a:t>Limitationen unseres Modells</a:t>
+            </a:r>
+            <a:endParaRPr lang="en-US" sz="3000" dirty="0"/>
+          </a:p>
+        </p:txBody>
+      </p:sp>
+      <p:sp>
+        <p:nvSpPr>
+          <p:cNvPr id="4" name="Shape 2"/>
+          <p:cNvSpPr/>
+          <p:nvPr/>
+        </p:nvSpPr>
+        <p:spPr>
+          <a:xfrm>
+            <a:off x="457200" y="1554480"/>
             <a:ext cx="4023360" cy="1371600"/>
           </a:xfrm>
           <a:prstGeom prst="rect">
@@ -7157,13 +8333,13 @@
       </p:sp>
       <p:sp>
         <p:nvSpPr>
-          <p:cNvPr id="13" name="Shape 11"/>
-          <p:cNvSpPr/>
-          <p:nvPr/>
-        </p:nvSpPr>
-        <p:spPr>
-          <a:xfrm>
-            <a:off x="457200" y="3063240"/>
+          <p:cNvPr id="5" name="Shape 3"/>
+          <p:cNvSpPr/>
+          <p:nvPr/>
+        </p:nvSpPr>
+        <p:spPr>
+          <a:xfrm>
+            <a:off x="457200" y="1554480"/>
             <a:ext cx="4023360" cy="54864"/>
           </a:xfrm>
           <a:prstGeom prst="rect">
@@ -7182,13 +8358,13 @@
       </p:sp>
       <p:sp>
         <p:nvSpPr>
-          <p:cNvPr id="14" name="Text 12"/>
-          <p:cNvSpPr/>
-          <p:nvPr/>
-        </p:nvSpPr>
-        <p:spPr>
-          <a:xfrm>
-            <a:off x="640080" y="3227832"/>
+          <p:cNvPr id="6" name="Text 4"/>
+          <p:cNvSpPr/>
+          <p:nvPr/>
+        </p:nvSpPr>
+        <p:spPr>
+          <a:xfrm>
+            <a:off x="640080" y="1719072"/>
             <a:ext cx="3657600" cy="365760"/>
           </a:xfrm>
           <a:prstGeom prst="rect">
@@ -7213,7 +8389,7 @@
                 <a:ea typeface="Trebuchet MS" pitchFamily="34" charset="-122"/>
                 <a:cs typeface="Trebuchet MS" pitchFamily="34" charset="-120"/>
               </a:rPr>
-              <a:t>STATPOP nicht eingebunden</a:t>
+              <a:t>Datenqualität OSM</a:t>
             </a:r>
             <a:endParaRPr lang="en-US" sz="1400" dirty="0"/>
           </a:p>
@@ -7221,13 +8397,13 @@
       </p:sp>
       <p:sp>
         <p:nvSpPr>
-          <p:cNvPr id="15" name="Text 13"/>
-          <p:cNvSpPr/>
-          <p:nvPr/>
-        </p:nvSpPr>
-        <p:spPr>
-          <a:xfrm>
-            <a:off x="640080" y="3611880"/>
+          <p:cNvPr id="7" name="Text 5"/>
+          <p:cNvSpPr/>
+          <p:nvPr/>
+        </p:nvSpPr>
+        <p:spPr>
+          <a:xfrm>
+            <a:off x="640080" y="2103120"/>
             <a:ext cx="3657600" cy="777240"/>
           </a:xfrm>
           <a:prstGeom prst="rect">
@@ -7252,7 +8428,7 @@
                 <a:ea typeface="Calibri" pitchFamily="34" charset="-122"/>
                 <a:cs typeface="Calibri" pitchFamily="34" charset="-120"/>
               </a:rPr>
-              <a:t>BFS-Hektar-Bevölkerungsraster ist nur per manuellem Download verfügbar; Bevölkerungsdichte als zusätzliche Validierung steht aus.</a:t>
+              <a:t>Kleine, unmappte Geschäfte fehlen. Annahme: Verzerrung gering, weil Geschäfte ähnlicher Klassifikation OSM-mässig konsistent sind.</a:t>
             </a:r>
             <a:endParaRPr lang="en-US" sz="1100" dirty="0"/>
           </a:p>
@@ -7260,13 +8436,13 @@
       </p:sp>
       <p:sp>
         <p:nvSpPr>
-          <p:cNvPr id="16" name="Shape 14"/>
-          <p:cNvSpPr/>
-          <p:nvPr/>
-        </p:nvSpPr>
-        <p:spPr>
-          <a:xfrm>
-            <a:off x="4663440" y="3063240"/>
+          <p:cNvPr id="8" name="Shape 6"/>
+          <p:cNvSpPr/>
+          <p:nvPr/>
+        </p:nvSpPr>
+        <p:spPr>
+          <a:xfrm>
+            <a:off x="4663440" y="1554480"/>
             <a:ext cx="4023360" cy="1371600"/>
           </a:xfrm>
           <a:prstGeom prst="rect">
@@ -7292,13 +8468,13 @@
       </p:sp>
       <p:sp>
         <p:nvSpPr>
-          <p:cNvPr id="17" name="Shape 15"/>
-          <p:cNvSpPr/>
-          <p:nvPr/>
-        </p:nvSpPr>
-        <p:spPr>
-          <a:xfrm>
-            <a:off x="4663440" y="3063240"/>
+          <p:cNvPr id="9" name="Shape 7"/>
+          <p:cNvSpPr/>
+          <p:nvPr/>
+        </p:nvSpPr>
+        <p:spPr>
+          <a:xfrm>
+            <a:off x="4663440" y="1554480"/>
             <a:ext cx="4023360" cy="54864"/>
           </a:xfrm>
           <a:prstGeom prst="rect">
@@ -7317,13 +8493,13 @@
       </p:sp>
       <p:sp>
         <p:nvSpPr>
-          <p:cNvPr id="18" name="Text 16"/>
-          <p:cNvSpPr/>
-          <p:nvPr/>
-        </p:nvSpPr>
-        <p:spPr>
-          <a:xfrm>
-            <a:off x="4846320" y="3227832"/>
+          <p:cNvPr id="10" name="Text 8"/>
+          <p:cNvSpPr/>
+          <p:nvPr/>
+        </p:nvSpPr>
+        <p:spPr>
+          <a:xfrm>
+            <a:off x="4846320" y="1719072"/>
             <a:ext cx="3657600" cy="365760"/>
           </a:xfrm>
           <a:prstGeom prst="rect">
@@ -7348,7 +8524,7 @@
                 <a:ea typeface="Trebuchet MS" pitchFamily="34" charset="-122"/>
                 <a:cs typeface="Trebuchet MS" pitchFamily="34" charset="-120"/>
               </a:rPr>
-              <a:t>Luftlinien-Approximation</a:t>
+              <a:t>Mietpreis-Validierung offen</a:t>
             </a:r>
             <a:endParaRPr lang="en-US" sz="1400" dirty="0"/>
           </a:p>
@@ -7356,13 +8532,13 @@
       </p:sp>
       <p:sp>
         <p:nvSpPr>
-          <p:cNvPr id="19" name="Text 17"/>
-          <p:cNvSpPr/>
-          <p:nvPr/>
-        </p:nvSpPr>
-        <p:spPr>
-          <a:xfrm>
-            <a:off x="4846320" y="3611880"/>
+          <p:cNvPr id="11" name="Text 9"/>
+          <p:cNvSpPr/>
+          <p:nvPr/>
+        </p:nvSpPr>
+        <p:spPr>
+          <a:xfrm>
+            <a:off x="4846320" y="2103120"/>
             <a:ext cx="3657600" cy="777240"/>
           </a:xfrm>
           <a:prstGeom prst="rect">
@@ -7387,7 +8563,7 @@
                 <a:ea typeface="Calibri" pitchFamily="34" charset="-122"/>
                 <a:cs typeface="Calibri" pitchFamily="34" charset="-120"/>
               </a:rPr>
-              <a:t>Score nutzt KDTree-Distanz, nicht echte Strassengraph-Wege. Validierung über OSMnx-Demo-Isochronen (Notebook 04).</a:t>
+              <a:t>Stadt-Zürich-Mietpreis-Datensatz war zum Auswertungszeitpunkt unter dokumentierter URL nicht erreichbar (HTTP 404) — H1 wurde via Distanz zum HB validiert.</a:t>
             </a:r>
             <a:endParaRPr lang="en-US" sz="1100" dirty="0"/>
           </a:p>
@@ -7395,38 +8571,308 @@
       </p:sp>
       <p:sp>
         <p:nvSpPr>
-          <p:cNvPr id="20" name="Text 18"/>
-          <p:cNvSpPr/>
-          <p:nvPr/>
-        </p:nvSpPr>
-        <p:spPr>
-          <a:xfrm>
-            <a:off x="8229600" y="4846320"/>
-            <a:ext cx="822960" cy="228600"/>
-          </a:xfrm>
-          <a:prstGeom prst="rect">
-            <a:avLst/>
-          </a:prstGeom>
-          <a:noFill/>
-          <a:ln/>
-        </p:spPr>
-        <p:txBody>
-          <a:bodyPr wrap="square" lIns="0" tIns="0" rIns="0" bIns="0" rtlCol="0" anchor="ctr"/>
-          <a:lstStyle/>
-          <a:p>
-            <a:pPr algn="r" indent="0" marL="0">
-              <a:buNone/>
-            </a:pPr>
-            <a:r>
-              <a:rPr lang="en-US" sz="900" dirty="0">
-                <a:solidFill>
-                  <a:srgbClr val="64748B"/>
+          <p:cNvPr id="12" name="Shape 10"/>
+          <p:cNvSpPr/>
+          <p:nvPr/>
+        </p:nvSpPr>
+        <p:spPr>
+          <a:xfrm>
+            <a:off x="457200" y="3063240"/>
+            <a:ext cx="4023360" cy="1371600"/>
+          </a:xfrm>
+          <a:prstGeom prst="rect">
+            <a:avLst/>
+          </a:prstGeom>
+          <a:solidFill>
+            <a:srgbClr val="FFFFFF"/>
+          </a:solidFill>
+          <a:ln w="9525">
+            <a:solidFill>
+              <a:srgbClr val="E2E8F0"/>
+            </a:solidFill>
+            <a:prstDash val="solid"/>
+          </a:ln>
+          <a:effectLst>
+            <a:outerShdw sx="100000" sy="100000" kx="0" ky="0" algn="bl" rotWithShape="0" blurRad="101600" dist="12700" dir="5400000">
+              <a:srgbClr val="94A3B8">
+                <a:alpha val="12000"/>
+              </a:srgbClr>
+            </a:outerShdw>
+          </a:effectLst>
+        </p:spPr>
+      </p:sp>
+      <p:sp>
+        <p:nvSpPr>
+          <p:cNvPr id="13" name="Shape 11"/>
+          <p:cNvSpPr/>
+          <p:nvPr/>
+        </p:nvSpPr>
+        <p:spPr>
+          <a:xfrm>
+            <a:off x="457200" y="3063240"/>
+            <a:ext cx="4023360" cy="54864"/>
+          </a:xfrm>
+          <a:prstGeom prst="rect">
+            <a:avLst/>
+          </a:prstGeom>
+          <a:solidFill>
+            <a:srgbClr val="D73027"/>
+          </a:solidFill>
+          <a:ln w="12700">
+            <a:solidFill>
+              <a:srgbClr val="D73027"/>
+            </a:solidFill>
+            <a:prstDash val="solid"/>
+          </a:ln>
+        </p:spPr>
+      </p:sp>
+      <p:sp>
+        <p:nvSpPr>
+          <p:cNvPr id="14" name="Text 12"/>
+          <p:cNvSpPr/>
+          <p:nvPr/>
+        </p:nvSpPr>
+        <p:spPr>
+          <a:xfrm>
+            <a:off x="640080" y="3227832"/>
+            <a:ext cx="3657600" cy="365760"/>
+          </a:xfrm>
+          <a:prstGeom prst="rect">
+            <a:avLst/>
+          </a:prstGeom>
+          <a:noFill/>
+          <a:ln/>
+        </p:spPr>
+        <p:txBody>
+          <a:bodyPr wrap="square" lIns="0" tIns="0" rIns="0" bIns="0" rtlCol="0" anchor="ctr"/>
+          <a:lstStyle/>
+          <a:p>
+            <a:pPr indent="0" marL="0">
+              <a:buNone/>
+            </a:pPr>
+            <a:r>
+              <a:rPr lang="en-US" sz="1400" b="1" dirty="0">
+                <a:solidFill>
+                  <a:srgbClr val="D73027"/>
+                </a:solidFill>
+                <a:latin typeface="Trebuchet MS" pitchFamily="34" charset="0"/>
+                <a:ea typeface="Trebuchet MS" pitchFamily="34" charset="-122"/>
+                <a:cs typeface="Trebuchet MS" pitchFamily="34" charset="-120"/>
+              </a:rPr>
+              <a:t>Topografie nur approximiert</a:t>
+            </a:r>
+            <a:endParaRPr lang="en-US" sz="1400" dirty="0"/>
+          </a:p>
+        </p:txBody>
+      </p:sp>
+      <p:sp>
+        <p:nvSpPr>
+          <p:cNvPr id="15" name="Text 13"/>
+          <p:cNvSpPr/>
+          <p:nvPr/>
+        </p:nvSpPr>
+        <p:spPr>
+          <a:xfrm>
+            <a:off x="640080" y="3611880"/>
+            <a:ext cx="3657600" cy="777240"/>
+          </a:xfrm>
+          <a:prstGeom prst="rect">
+            <a:avLst/>
+          </a:prstGeom>
+          <a:noFill/>
+          <a:ln/>
+        </p:spPr>
+        <p:txBody>
+          <a:bodyPr wrap="square" lIns="0" tIns="0" rIns="0" bIns="0" rtlCol="0" anchor="ctr"/>
+          <a:lstStyle/>
+          <a:p>
+            <a:pPr indent="0" marL="0">
+              <a:buNone/>
+            </a:pPr>
+            <a:r>
+              <a:rPr lang="en-US" sz="1100" dirty="0">
+                <a:solidFill>
+                  <a:srgbClr val="0F172A"/>
                 </a:solidFill>
                 <a:latin typeface="Calibri" pitchFamily="34" charset="0"/>
                 <a:ea typeface="Calibri" pitchFamily="34" charset="-122"/>
                 <a:cs typeface="Calibri" pitchFamily="34" charset="-120"/>
               </a:rPr>
-              <a:t>15 / 16</a:t>
+              <a:t>Open-Elevation-API zum Auswertungszeitpunkt down. Höhen-Confounder konnte daher nicht final getestet werden — DEM-basiert wäre der saubere Weg.</a:t>
+            </a:r>
+            <a:endParaRPr lang="en-US" sz="1100" dirty="0"/>
+          </a:p>
+        </p:txBody>
+      </p:sp>
+      <p:sp>
+        <p:nvSpPr>
+          <p:cNvPr id="16" name="Shape 14"/>
+          <p:cNvSpPr/>
+          <p:nvPr/>
+        </p:nvSpPr>
+        <p:spPr>
+          <a:xfrm>
+            <a:off x="4663440" y="3063240"/>
+            <a:ext cx="4023360" cy="1371600"/>
+          </a:xfrm>
+          <a:prstGeom prst="rect">
+            <a:avLst/>
+          </a:prstGeom>
+          <a:solidFill>
+            <a:srgbClr val="FFFFFF"/>
+          </a:solidFill>
+          <a:ln w="9525">
+            <a:solidFill>
+              <a:srgbClr val="E2E8F0"/>
+            </a:solidFill>
+            <a:prstDash val="solid"/>
+          </a:ln>
+          <a:effectLst>
+            <a:outerShdw sx="100000" sy="100000" kx="0" ky="0" algn="bl" rotWithShape="0" blurRad="101600" dist="12700" dir="5400000">
+              <a:srgbClr val="94A3B8">
+                <a:alpha val="12000"/>
+              </a:srgbClr>
+            </a:outerShdw>
+          </a:effectLst>
+        </p:spPr>
+      </p:sp>
+      <p:sp>
+        <p:nvSpPr>
+          <p:cNvPr id="17" name="Shape 15"/>
+          <p:cNvSpPr/>
+          <p:nvPr/>
+        </p:nvSpPr>
+        <p:spPr>
+          <a:xfrm>
+            <a:off x="4663440" y="3063240"/>
+            <a:ext cx="4023360" cy="54864"/>
+          </a:xfrm>
+          <a:prstGeom prst="rect">
+            <a:avLst/>
+          </a:prstGeom>
+          <a:solidFill>
+            <a:srgbClr val="D73027"/>
+          </a:solidFill>
+          <a:ln w="12700">
+            <a:solidFill>
+              <a:srgbClr val="D73027"/>
+            </a:solidFill>
+            <a:prstDash val="solid"/>
+          </a:ln>
+        </p:spPr>
+      </p:sp>
+      <p:sp>
+        <p:nvSpPr>
+          <p:cNvPr id="18" name="Text 16"/>
+          <p:cNvSpPr/>
+          <p:nvPr/>
+        </p:nvSpPr>
+        <p:spPr>
+          <a:xfrm>
+            <a:off x="4846320" y="3227832"/>
+            <a:ext cx="3657600" cy="365760"/>
+          </a:xfrm>
+          <a:prstGeom prst="rect">
+            <a:avLst/>
+          </a:prstGeom>
+          <a:noFill/>
+          <a:ln/>
+        </p:spPr>
+        <p:txBody>
+          <a:bodyPr wrap="square" lIns="0" tIns="0" rIns="0" bIns="0" rtlCol="0" anchor="ctr"/>
+          <a:lstStyle/>
+          <a:p>
+            <a:pPr indent="0" marL="0">
+              <a:buNone/>
+            </a:pPr>
+            <a:r>
+              <a:rPr lang="en-US" sz="1400" b="1" dirty="0">
+                <a:solidFill>
+                  <a:srgbClr val="D73027"/>
+                </a:solidFill>
+                <a:latin typeface="Trebuchet MS" pitchFamily="34" charset="0"/>
+                <a:ea typeface="Trebuchet MS" pitchFamily="34" charset="-122"/>
+                <a:cs typeface="Trebuchet MS" pitchFamily="34" charset="-120"/>
+              </a:rPr>
+              <a:t>Luftlinien-Approximation</a:t>
+            </a:r>
+            <a:endParaRPr lang="en-US" sz="1400" dirty="0"/>
+          </a:p>
+        </p:txBody>
+      </p:sp>
+      <p:sp>
+        <p:nvSpPr>
+          <p:cNvPr id="19" name="Text 17"/>
+          <p:cNvSpPr/>
+          <p:nvPr/>
+        </p:nvSpPr>
+        <p:spPr>
+          <a:xfrm>
+            <a:off x="4846320" y="3611880"/>
+            <a:ext cx="3657600" cy="777240"/>
+          </a:xfrm>
+          <a:prstGeom prst="rect">
+            <a:avLst/>
+          </a:prstGeom>
+          <a:noFill/>
+          <a:ln/>
+        </p:spPr>
+        <p:txBody>
+          <a:bodyPr wrap="square" lIns="0" tIns="0" rIns="0" bIns="0" rtlCol="0" anchor="ctr"/>
+          <a:lstStyle/>
+          <a:p>
+            <a:pPr indent="0" marL="0">
+              <a:buNone/>
+            </a:pPr>
+            <a:r>
+              <a:rPr lang="en-US" sz="1100" dirty="0">
+                <a:solidFill>
+                  <a:srgbClr val="0F172A"/>
+                </a:solidFill>
+                <a:latin typeface="Calibri" pitchFamily="34" charset="0"/>
+                <a:ea typeface="Calibri" pitchFamily="34" charset="-122"/>
+                <a:cs typeface="Calibri" pitchFamily="34" charset="-120"/>
+              </a:rPr>
+              <a:t>Score nutzt KDTree-Distanz, nicht echte Strassengraph-Wege. Validierung über OSMnx-Demo-Isochronen (Notebook 04).</a:t>
+            </a:r>
+            <a:endParaRPr lang="en-US" sz="1100" dirty="0"/>
+          </a:p>
+        </p:txBody>
+      </p:sp>
+      <p:sp>
+        <p:nvSpPr>
+          <p:cNvPr id="20" name="Text 18"/>
+          <p:cNvSpPr/>
+          <p:nvPr/>
+        </p:nvSpPr>
+        <p:spPr>
+          <a:xfrm>
+            <a:off x="8229600" y="4846320"/>
+            <a:ext cx="822960" cy="228600"/>
+          </a:xfrm>
+          <a:prstGeom prst="rect">
+            <a:avLst/>
+          </a:prstGeom>
+          <a:noFill/>
+          <a:ln/>
+        </p:spPr>
+        <p:txBody>
+          <a:bodyPr wrap="square" lIns="0" tIns="0" rIns="0" bIns="0" rtlCol="0" anchor="ctr"/>
+          <a:lstStyle/>
+          <a:p>
+            <a:pPr algn="r" indent="0" marL="0">
+              <a:buNone/>
+            </a:pPr>
+            <a:r>
+              <a:rPr lang="en-US" sz="900" dirty="0">
+                <a:solidFill>
+                  <a:srgbClr val="64748B"/>
+                </a:solidFill>
+                <a:latin typeface="Calibri" pitchFamily="34" charset="0"/>
+                <a:ea typeface="Calibri" pitchFamily="34" charset="-122"/>
+                <a:cs typeface="Calibri" pitchFamily="34" charset="-120"/>
+              </a:rPr>
+              <a:t>16 / 17</a:t>
             </a:r>
             <a:endParaRPr lang="en-US" sz="900" dirty="0"/>
           </a:p>
@@ -7440,9 +8886,9 @@
 </p:sld>
 </file>
 
-<file path=ppt/slides/slide16.xml><?xml version="1.0" encoding="utf-8"?>
+<file path=ppt/slides/slide17.xml><?xml version="1.0" encoding="utf-8"?>
 <p:sld xmlns:a="http://schemas.openxmlformats.org/drawingml/2006/main" xmlns:r="http://schemas.openxmlformats.org/officeDocument/2006/relationships" xmlns:p="http://schemas.openxmlformats.org/presentationml/2006/main">
-  <p:cSld name="Slide 16">
+  <p:cSld name="Slide 17">
     <p:bg>
       <p:bgPr>
         <a:solidFill>
@@ -7639,7 +9085,7 @@
                 <a:ea typeface="Calibri" pitchFamily="34" charset="-122"/>
                 <a:cs typeface="Calibri" pitchFamily="34" charset="-120"/>
               </a:rPr>
-              <a:t>Echtzeit-Mobilitätsdaten — SBB GTFS, ZVV-Reisezeiten</a:t>
+              <a:t>DEM-basierte Topografie + Multi-Variate-Regression mit ÖV-Anbindung</a:t>
             </a:r>
             <a:endParaRPr lang="en-US" sz="1400" dirty="0"/>
           </a:p>
@@ -7742,7 +9188,7 @@
                 <a:ea typeface="Calibri" pitchFamily="34" charset="-122"/>
                 <a:cs typeface="Calibri" pitchFamily="34" charset="-120"/>
               </a:rPr>
-              <a:t>Sentiment-Scores aus TripAdvisor / Google Reviews je POI</a:t>
+              <a:t>Echtzeit-Mobilitätsdaten — SBB GTFS, ZVV-Reisezeiten</a:t>
             </a:r>
             <a:endParaRPr lang="en-US" sz="1400" dirty="0"/>
           </a:p>
@@ -8129,7 +9575,7 @@
                 <a:ea typeface="Calibri" pitchFamily="34" charset="-122"/>
                 <a:cs typeface="Calibri" pitchFamily="34" charset="-120"/>
               </a:rPr>
-              <a:t>16 / 16</a:t>
+              <a:t>17 / 17</a:t>
             </a:r>
             <a:endParaRPr lang="en-US" sz="900" dirty="0"/>
           </a:p>
@@ -8935,7 +10381,7 @@
                 <a:ea typeface="Calibri" pitchFamily="34" charset="-122"/>
                 <a:cs typeface="Calibri" pitchFamily="34" charset="-120"/>
               </a:rPr>
-              <a:t>2 / 16</a:t>
+              <a:t>2 / 17</a:t>
             </a:r>
             <a:endParaRPr lang="en-US" sz="900" dirty="0"/>
           </a:p>
@@ -10317,7 +11763,7 @@
                 <a:ea typeface="Calibri" pitchFamily="34" charset="-122"/>
                 <a:cs typeface="Calibri" pitchFamily="34" charset="-120"/>
               </a:rPr>
-              <a:t>3 / 16</a:t>
+              <a:t>3 / 17</a:t>
             </a:r>
             <a:endParaRPr lang="en-US" sz="900" dirty="0"/>
           </a:p>
@@ -11050,7 +12496,7 @@
                 <a:ea typeface="Calibri" pitchFamily="34" charset="-122"/>
                 <a:cs typeface="Calibri" pitchFamily="34" charset="-120"/>
               </a:rPr>
-              <a:t>4 / 16</a:t>
+              <a:t>4 / 17</a:t>
             </a:r>
             <a:endParaRPr lang="en-US" sz="900" dirty="0"/>
           </a:p>
@@ -11469,7 +12915,7 @@
                 <a:ea typeface="Calibri" pitchFamily="34" charset="-122"/>
                 <a:cs typeface="Calibri" pitchFamily="34" charset="-120"/>
               </a:rPr>
-              <a:t>5 / 16</a:t>
+              <a:t>5 / 17</a:t>
             </a:r>
             <a:endParaRPr lang="en-US" sz="900" dirty="0"/>
           </a:p>
@@ -12094,7 +13540,7 @@
                 <a:ea typeface="Calibri" pitchFamily="34" charset="-122"/>
                 <a:cs typeface="Calibri" pitchFamily="34" charset="-120"/>
               </a:rPr>
-              <a:t>6 / 16</a:t>
+              <a:t>6 / 17</a:t>
             </a:r>
             <a:endParaRPr lang="en-US" sz="900" dirty="0"/>
           </a:p>
@@ -13491,6 +14937,212 @@
                           <a:ea typeface="Calibri" pitchFamily="34" charset="-122"/>
                           <a:cs typeface="Calibri" pitchFamily="34" charset="-120"/>
                         </a:rPr>
+                        <a:t>Open-Elevation API</a:t>
+                      </a:r>
+                      <a:endParaRPr lang="en-US" sz="1150" dirty="0">
+                        <a:latin typeface="Calibri" charset="0"/>
+                        <a:ea typeface="Calibri" charset="0"/>
+                        <a:cs typeface="Calibri" charset="0"/>
+                      </a:endParaRPr>
+                    </a:p>
+                  </a:txBody>
+                  <a:tcPr marL="91440" marR="91440" marT="45720" marB="45720">
+                    <a:lnL w="6350" cap="flat" cmpd="sng" algn="ctr">
+                      <a:solidFill>
+                        <a:srgbClr val="E2E8F0"/>
+                      </a:solidFill>
+                      <a:prstDash val="solid"/>
+                      <a:round/>
+                      <a:headEnd type="none" w="med" len="med"/>
+                      <a:tailEnd type="none" w="med" len="med"/>
+                    </a:lnL>
+                    <a:lnR w="6350" cap="flat" cmpd="sng" algn="ctr">
+                      <a:solidFill>
+                        <a:srgbClr val="E2E8F0"/>
+                      </a:solidFill>
+                      <a:prstDash val="solid"/>
+                      <a:round/>
+                      <a:headEnd type="none" w="med" len="med"/>
+                      <a:tailEnd type="none" w="med" len="med"/>
+                    </a:lnR>
+                    <a:lnT w="6350" cap="flat" cmpd="sng" algn="ctr">
+                      <a:solidFill>
+                        <a:srgbClr val="E2E8F0"/>
+                      </a:solidFill>
+                      <a:prstDash val="solid"/>
+                      <a:round/>
+                      <a:headEnd type="none" w="med" len="med"/>
+                      <a:tailEnd type="none" w="med" len="med"/>
+                    </a:lnT>
+                    <a:lnB w="6350" cap="flat" cmpd="sng" algn="ctr">
+                      <a:solidFill>
+                        <a:srgbClr val="E2E8F0"/>
+                      </a:solidFill>
+                      <a:prstDash val="solid"/>
+                      <a:round/>
+                      <a:headEnd type="none" w="med" len="med"/>
+                      <a:tailEnd type="none" w="med" len="med"/>
+                    </a:lnB>
+                    <a:solidFill>
+                      <a:srgbClr val="FFFFFF"/>
+                    </a:solidFill>
+                  </a:tcPr>
+                </a:tc>
+                <a:tc>
+                  <a:txBody>
+                    <a:bodyPr/>
+                    <a:lstStyle/>
+                    <a:p>
+                      <a:pPr algn="l" indent="0" marL="0">
+                        <a:buNone/>
+                      </a:pPr>
+                      <a:r>
+                        <a:rPr lang="en-US" sz="1150" dirty="0">
+                          <a:solidFill>
+                            <a:srgbClr val="0F172A"/>
+                          </a:solidFill>
+                          <a:latin typeface="Calibri" pitchFamily="34" charset="0"/>
+                          <a:ea typeface="Calibri" pitchFamily="34" charset="-122"/>
+                          <a:cs typeface="Calibri" pitchFamily="34" charset="-120"/>
+                        </a:rPr>
+                        <a:t>Höhe für Robustness Check (Confounder)</a:t>
+                      </a:r>
+                      <a:endParaRPr lang="en-US" sz="1150" dirty="0">
+                        <a:latin typeface="Calibri" charset="0"/>
+                        <a:ea typeface="Calibri" charset="0"/>
+                        <a:cs typeface="Calibri" charset="0"/>
+                      </a:endParaRPr>
+                    </a:p>
+                  </a:txBody>
+                  <a:tcPr marL="91440" marR="91440" marT="45720" marB="45720">
+                    <a:lnL w="6350" cap="flat" cmpd="sng" algn="ctr">
+                      <a:solidFill>
+                        <a:srgbClr val="E2E8F0"/>
+                      </a:solidFill>
+                      <a:prstDash val="solid"/>
+                      <a:round/>
+                      <a:headEnd type="none" w="med" len="med"/>
+                      <a:tailEnd type="none" w="med" len="med"/>
+                    </a:lnL>
+                    <a:lnR w="6350" cap="flat" cmpd="sng" algn="ctr">
+                      <a:solidFill>
+                        <a:srgbClr val="E2E8F0"/>
+                      </a:solidFill>
+                      <a:prstDash val="solid"/>
+                      <a:round/>
+                      <a:headEnd type="none" w="med" len="med"/>
+                      <a:tailEnd type="none" w="med" len="med"/>
+                    </a:lnR>
+                    <a:lnT w="6350" cap="flat" cmpd="sng" algn="ctr">
+                      <a:solidFill>
+                        <a:srgbClr val="E2E8F0"/>
+                      </a:solidFill>
+                      <a:prstDash val="solid"/>
+                      <a:round/>
+                      <a:headEnd type="none" w="med" len="med"/>
+                      <a:tailEnd type="none" w="med" len="med"/>
+                    </a:lnT>
+                    <a:lnB w="6350" cap="flat" cmpd="sng" algn="ctr">
+                      <a:solidFill>
+                        <a:srgbClr val="E2E8F0"/>
+                      </a:solidFill>
+                      <a:prstDash val="solid"/>
+                      <a:round/>
+                      <a:headEnd type="none" w="med" len="med"/>
+                      <a:tailEnd type="none" w="med" len="med"/>
+                    </a:lnB>
+                    <a:solidFill>
+                      <a:srgbClr val="FFFFFF"/>
+                    </a:solidFill>
+                  </a:tcPr>
+                </a:tc>
+                <a:tc>
+                  <a:txBody>
+                    <a:bodyPr/>
+                    <a:lstStyle/>
+                    <a:p>
+                      <a:pPr algn="l" indent="0" marL="0">
+                        <a:buNone/>
+                      </a:pPr>
+                      <a:r>
+                        <a:rPr lang="en-US" sz="1150" dirty="0">
+                          <a:solidFill>
+                            <a:srgbClr val="0F172A"/>
+                          </a:solidFill>
+                          <a:latin typeface="Calibri" pitchFamily="34" charset="0"/>
+                          <a:ea typeface="Calibri" pitchFamily="34" charset="-122"/>
+                          <a:cs typeface="Calibri" pitchFamily="34" charset="-120"/>
+                        </a:rPr>
+                        <a:t>CC0</a:t>
+                      </a:r>
+                      <a:endParaRPr lang="en-US" sz="1150" dirty="0">
+                        <a:latin typeface="Calibri" charset="0"/>
+                        <a:ea typeface="Calibri" charset="0"/>
+                        <a:cs typeface="Calibri" charset="0"/>
+                      </a:endParaRPr>
+                    </a:p>
+                  </a:txBody>
+                  <a:tcPr marL="91440" marR="91440" marT="45720" marB="45720">
+                    <a:lnL w="6350" cap="flat" cmpd="sng" algn="ctr">
+                      <a:solidFill>
+                        <a:srgbClr val="E2E8F0"/>
+                      </a:solidFill>
+                      <a:prstDash val="solid"/>
+                      <a:round/>
+                      <a:headEnd type="none" w="med" len="med"/>
+                      <a:tailEnd type="none" w="med" len="med"/>
+                    </a:lnL>
+                    <a:lnR w="6350" cap="flat" cmpd="sng" algn="ctr">
+                      <a:solidFill>
+                        <a:srgbClr val="E2E8F0"/>
+                      </a:solidFill>
+                      <a:prstDash val="solid"/>
+                      <a:round/>
+                      <a:headEnd type="none" w="med" len="med"/>
+                      <a:tailEnd type="none" w="med" len="med"/>
+                    </a:lnR>
+                    <a:lnT w="6350" cap="flat" cmpd="sng" algn="ctr">
+                      <a:solidFill>
+                        <a:srgbClr val="E2E8F0"/>
+                      </a:solidFill>
+                      <a:prstDash val="solid"/>
+                      <a:round/>
+                      <a:headEnd type="none" w="med" len="med"/>
+                      <a:tailEnd type="none" w="med" len="med"/>
+                    </a:lnT>
+                    <a:lnB w="6350" cap="flat" cmpd="sng" algn="ctr">
+                      <a:solidFill>
+                        <a:srgbClr val="E2E8F0"/>
+                      </a:solidFill>
+                      <a:prstDash val="solid"/>
+                      <a:round/>
+                      <a:headEnd type="none" w="med" len="med"/>
+                      <a:tailEnd type="none" w="med" len="med"/>
+                    </a:lnB>
+                    <a:solidFill>
+                      <a:srgbClr val="FFFFFF"/>
+                    </a:solidFill>
+                  </a:tcPr>
+                </a:tc>
+              </a:tr>
+              <a:tr h="384048">
+                <a:tc>
+                  <a:txBody>
+                    <a:bodyPr/>
+                    <a:lstStyle/>
+                    <a:p>
+                      <a:pPr algn="l" indent="0" marL="0">
+                        <a:buNone/>
+                      </a:pPr>
+                      <a:r>
+                        <a:rPr lang="en-US" sz="1150" dirty="0">
+                          <a:solidFill>
+                            <a:srgbClr val="0F172A"/>
+                          </a:solidFill>
+                          <a:latin typeface="Calibri" pitchFamily="34" charset="0"/>
+                          <a:ea typeface="Calibri" pitchFamily="34" charset="-122"/>
+                          <a:cs typeface="Calibri" pitchFamily="34" charset="-120"/>
+                        </a:rPr>
                         <a:t>swisstopo / GeoAdmin</a:t>
                       </a:r>
                       <a:endParaRPr lang="en-US" sz="1150" dirty="0">
@@ -13679,212 +15331,6 @@
                   </a:tcPr>
                 </a:tc>
               </a:tr>
-              <a:tr h="384048">
-                <a:tc>
-                  <a:txBody>
-                    <a:bodyPr/>
-                    <a:lstStyle/>
-                    <a:p>
-                      <a:pPr algn="l" indent="0" marL="0">
-                        <a:buNone/>
-                      </a:pPr>
-                      <a:r>
-                        <a:rPr lang="en-US" sz="1150" dirty="0">
-                          <a:solidFill>
-                            <a:srgbClr val="0F172A"/>
-                          </a:solidFill>
-                          <a:latin typeface="Calibri" pitchFamily="34" charset="0"/>
-                          <a:ea typeface="Calibri" pitchFamily="34" charset="-122"/>
-                          <a:cs typeface="Calibri" pitchFamily="34" charset="-120"/>
-                        </a:rPr>
-                        <a:t>BFS STATPOP / Mietpreis-Idx</a:t>
-                      </a:r>
-                      <a:endParaRPr lang="en-US" sz="1150" dirty="0">
-                        <a:latin typeface="Calibri" charset="0"/>
-                        <a:ea typeface="Calibri" charset="0"/>
-                        <a:cs typeface="Calibri" charset="0"/>
-                      </a:endParaRPr>
-                    </a:p>
-                  </a:txBody>
-                  <a:tcPr marL="91440" marR="91440" marT="45720" marB="45720">
-                    <a:lnL w="6350" cap="flat" cmpd="sng" algn="ctr">
-                      <a:solidFill>
-                        <a:srgbClr val="E2E8F0"/>
-                      </a:solidFill>
-                      <a:prstDash val="solid"/>
-                      <a:round/>
-                      <a:headEnd type="none" w="med" len="med"/>
-                      <a:tailEnd type="none" w="med" len="med"/>
-                    </a:lnL>
-                    <a:lnR w="6350" cap="flat" cmpd="sng" algn="ctr">
-                      <a:solidFill>
-                        <a:srgbClr val="E2E8F0"/>
-                      </a:solidFill>
-                      <a:prstDash val="solid"/>
-                      <a:round/>
-                      <a:headEnd type="none" w="med" len="med"/>
-                      <a:tailEnd type="none" w="med" len="med"/>
-                    </a:lnR>
-                    <a:lnT w="6350" cap="flat" cmpd="sng" algn="ctr">
-                      <a:solidFill>
-                        <a:srgbClr val="E2E8F0"/>
-                      </a:solidFill>
-                      <a:prstDash val="solid"/>
-                      <a:round/>
-                      <a:headEnd type="none" w="med" len="med"/>
-                      <a:tailEnd type="none" w="med" len="med"/>
-                    </a:lnT>
-                    <a:lnB w="6350" cap="flat" cmpd="sng" algn="ctr">
-                      <a:solidFill>
-                        <a:srgbClr val="E2E8F0"/>
-                      </a:solidFill>
-                      <a:prstDash val="solid"/>
-                      <a:round/>
-                      <a:headEnd type="none" w="med" len="med"/>
-                      <a:tailEnd type="none" w="med" len="med"/>
-                    </a:lnB>
-                    <a:solidFill>
-                      <a:srgbClr val="FFFFFF"/>
-                    </a:solidFill>
-                  </a:tcPr>
-                </a:tc>
-                <a:tc>
-                  <a:txBody>
-                    <a:bodyPr/>
-                    <a:lstStyle/>
-                    <a:p>
-                      <a:pPr algn="l" indent="0" marL="0">
-                        <a:buNone/>
-                      </a:pPr>
-                      <a:r>
-                        <a:rPr lang="en-US" sz="1150" dirty="0">
-                          <a:solidFill>
-                            <a:srgbClr val="0F172A"/>
-                          </a:solidFill>
-                          <a:latin typeface="Calibri" pitchFamily="34" charset="0"/>
-                          <a:ea typeface="Calibri" pitchFamily="34" charset="-122"/>
-                          <a:cs typeface="Calibri" pitchFamily="34" charset="-120"/>
-                        </a:rPr>
-                        <a:t>geplant — siehe Limitationen (Slide 15)</a:t>
-                      </a:r>
-                      <a:endParaRPr lang="en-US" sz="1150" dirty="0">
-                        <a:latin typeface="Calibri" charset="0"/>
-                        <a:ea typeface="Calibri" charset="0"/>
-                        <a:cs typeface="Calibri" charset="0"/>
-                      </a:endParaRPr>
-                    </a:p>
-                  </a:txBody>
-                  <a:tcPr marL="91440" marR="91440" marT="45720" marB="45720">
-                    <a:lnL w="6350" cap="flat" cmpd="sng" algn="ctr">
-                      <a:solidFill>
-                        <a:srgbClr val="E2E8F0"/>
-                      </a:solidFill>
-                      <a:prstDash val="solid"/>
-                      <a:round/>
-                      <a:headEnd type="none" w="med" len="med"/>
-                      <a:tailEnd type="none" w="med" len="med"/>
-                    </a:lnL>
-                    <a:lnR w="6350" cap="flat" cmpd="sng" algn="ctr">
-                      <a:solidFill>
-                        <a:srgbClr val="E2E8F0"/>
-                      </a:solidFill>
-                      <a:prstDash val="solid"/>
-                      <a:round/>
-                      <a:headEnd type="none" w="med" len="med"/>
-                      <a:tailEnd type="none" w="med" len="med"/>
-                    </a:lnR>
-                    <a:lnT w="6350" cap="flat" cmpd="sng" algn="ctr">
-                      <a:solidFill>
-                        <a:srgbClr val="E2E8F0"/>
-                      </a:solidFill>
-                      <a:prstDash val="solid"/>
-                      <a:round/>
-                      <a:headEnd type="none" w="med" len="med"/>
-                      <a:tailEnd type="none" w="med" len="med"/>
-                    </a:lnT>
-                    <a:lnB w="6350" cap="flat" cmpd="sng" algn="ctr">
-                      <a:solidFill>
-                        <a:srgbClr val="E2E8F0"/>
-                      </a:solidFill>
-                      <a:prstDash val="solid"/>
-                      <a:round/>
-                      <a:headEnd type="none" w="med" len="med"/>
-                      <a:tailEnd type="none" w="med" len="med"/>
-                    </a:lnB>
-                    <a:solidFill>
-                      <a:srgbClr val="FFFFFF"/>
-                    </a:solidFill>
-                  </a:tcPr>
-                </a:tc>
-                <a:tc>
-                  <a:txBody>
-                    <a:bodyPr/>
-                    <a:lstStyle/>
-                    <a:p>
-                      <a:pPr algn="l" indent="0" marL="0">
-                        <a:buNone/>
-                      </a:pPr>
-                      <a:r>
-                        <a:rPr lang="en-US" sz="1150" dirty="0">
-                          <a:solidFill>
-                            <a:srgbClr val="0F172A"/>
-                          </a:solidFill>
-                          <a:latin typeface="Calibri" pitchFamily="34" charset="0"/>
-                          <a:ea typeface="Calibri" pitchFamily="34" charset="-122"/>
-                          <a:cs typeface="Calibri" pitchFamily="34" charset="-120"/>
-                        </a:rPr>
-                        <a:t>Open Data</a:t>
-                      </a:r>
-                      <a:endParaRPr lang="en-US" sz="1150" dirty="0">
-                        <a:latin typeface="Calibri" charset="0"/>
-                        <a:ea typeface="Calibri" charset="0"/>
-                        <a:cs typeface="Calibri" charset="0"/>
-                      </a:endParaRPr>
-                    </a:p>
-                  </a:txBody>
-                  <a:tcPr marL="91440" marR="91440" marT="45720" marB="45720">
-                    <a:lnL w="6350" cap="flat" cmpd="sng" algn="ctr">
-                      <a:solidFill>
-                        <a:srgbClr val="E2E8F0"/>
-                      </a:solidFill>
-                      <a:prstDash val="solid"/>
-                      <a:round/>
-                      <a:headEnd type="none" w="med" len="med"/>
-                      <a:tailEnd type="none" w="med" len="med"/>
-                    </a:lnL>
-                    <a:lnR w="6350" cap="flat" cmpd="sng" algn="ctr">
-                      <a:solidFill>
-                        <a:srgbClr val="E2E8F0"/>
-                      </a:solidFill>
-                      <a:prstDash val="solid"/>
-                      <a:round/>
-                      <a:headEnd type="none" w="med" len="med"/>
-                      <a:tailEnd type="none" w="med" len="med"/>
-                    </a:lnR>
-                    <a:lnT w="6350" cap="flat" cmpd="sng" algn="ctr">
-                      <a:solidFill>
-                        <a:srgbClr val="E2E8F0"/>
-                      </a:solidFill>
-                      <a:prstDash val="solid"/>
-                      <a:round/>
-                      <a:headEnd type="none" w="med" len="med"/>
-                      <a:tailEnd type="none" w="med" len="med"/>
-                    </a:lnT>
-                    <a:lnB w="6350" cap="flat" cmpd="sng" algn="ctr">
-                      <a:solidFill>
-                        <a:srgbClr val="E2E8F0"/>
-                      </a:solidFill>
-                      <a:prstDash val="solid"/>
-                      <a:round/>
-                      <a:headEnd type="none" w="med" len="med"/>
-                      <a:tailEnd type="none" w="med" len="med"/>
-                    </a:lnB>
-                    <a:solidFill>
-                      <a:srgbClr val="FFFFFF"/>
-                    </a:solidFill>
-                  </a:tcPr>
-                </a:tc>
-              </a:tr>
             </a:tbl>
           </a:graphicData>
         </a:graphic>
@@ -13961,7 +15407,7 @@
                 <a:ea typeface="Calibri" pitchFamily="34" charset="-122"/>
                 <a:cs typeface="Calibri" pitchFamily="34" charset="-120"/>
               </a:rPr>
-              <a:t>7 / 16</a:t>
+              <a:t>7 / 17</a:t>
             </a:r>
             <a:endParaRPr lang="en-US" sz="900" dirty="0"/>
           </a:p>
@@ -14920,7 +16366,7 @@
                 <a:ea typeface="Calibri" pitchFamily="34" charset="-122"/>
                 <a:cs typeface="Calibri" pitchFamily="34" charset="-120"/>
               </a:rPr>
-              <a:t>8 / 16</a:t>
+              <a:t>8 / 17</a:t>
             </a:r>
             <a:endParaRPr lang="en-US" sz="900" dirty="0"/>
           </a:p>
@@ -15939,7 +17385,7 @@
                 <a:ea typeface="Calibri" pitchFamily="34" charset="-122"/>
                 <a:cs typeface="Calibri" pitchFamily="34" charset="-120"/>
               </a:rPr>
-              <a:t>9 / 16</a:t>
+              <a:t>9 / 17</a:t>
             </a:r>
             <a:endParaRPr lang="en-US" sz="900" dirty="0"/>
           </a:p>

--- a/reports/zh15min_slides.pptx
+++ b/reports/zh15min_slides.pptx
@@ -22,9 +22,11 @@
     <p:sldId id="270" r:id="rId16"/>
     <p:sldId id="271" r:id="rId17"/>
     <p:sldId id="272" r:id="rId18"/>
+    <p:sldId id="273" r:id="rId19"/>
+    <p:sldId id="274" r:id="rId20"/>
   </p:sldIdLst>
   <p:notesMasterIdLst>
-    <p:notesMasterId r:id="rId19"/>
+    <p:notesMasterId r:id="rId21"/>
   </p:notesMasterIdLst>
   <p:sldSz cx="9144000" cy="5143500"/>
   <p:notesSz cx="5143500" cy="9144000"/>
@@ -1246,6 +1248,182 @@
             <a:fld id="{F7021451-1387-4CA6-816F-3879F97B5CBC}" type="slidenum">
               <a:rPr lang="en-US"/>
               <a:t>17</a:t>
+            </a:fld>
+            <a:endParaRPr lang="en-US"/>
+          </a:p>
+        </p:txBody>
+      </p:sp>
+    </p:spTree>
+    <p:extLst>
+      <p:ext uri="{BB962C8B-B14F-4D97-AF65-F5344CB8AC3E}">
+        <p14:creationId xmlns:p14="http://schemas.microsoft.com/office/powerpoint/2010/main" val="1024086991"/>
+      </p:ext>
+    </p:extLst>
+  </p:cSld>
+  <p:clrMapOvr>
+    <a:masterClrMapping/>
+  </p:clrMapOvr>
+</p:notes>
+</file>
+
+<file path=ppt/notesSlides/notesSlide18.xml><?xml version="1.0" encoding="utf-8"?>
+<p:notes xmlns:a="http://schemas.openxmlformats.org/drawingml/2006/main" xmlns:r="http://schemas.openxmlformats.org/officeDocument/2006/relationships" xmlns:p="http://schemas.openxmlformats.org/presentationml/2006/main">
+  <p:cSld>
+    <p:spTree>
+      <p:nvGrpSpPr>
+        <p:cNvPr id="1" name=""/>
+        <p:cNvGrpSpPr/>
+        <p:nvPr/>
+      </p:nvGrpSpPr>
+      <p:grpSpPr>
+        <a:xfrm>
+          <a:off x="0" y="0"/>
+          <a:ext cx="0" cy="0"/>
+          <a:chOff x="0" y="0"/>
+          <a:chExt cx="0" cy="0"/>
+        </a:xfrm>
+      </p:grpSpPr>
+      <p:sp>
+        <p:nvSpPr>
+          <p:cNvPr id="2" name="Slide Image Placeholder 1"/>
+          <p:cNvSpPr>
+            <a:spLocks noGrp="1" noRot="1" noChangeAspect="1"/>
+          </p:cNvSpPr>
+          <p:nvPr>
+            <p:ph type="sldImg"/>
+          </p:nvPr>
+        </p:nvSpPr>
+        <p:spPr/>
+      </p:sp>
+      <p:sp>
+        <p:nvSpPr>
+          <p:cNvPr id="3" name="Notes Placeholder 2"/>
+          <p:cNvSpPr>
+            <a:spLocks noGrp="1"/>
+          </p:cNvSpPr>
+          <p:nvPr>
+            <p:ph type="body" idx="1"/>
+          </p:nvPr>
+        </p:nvSpPr>
+        <p:spPr/>
+        <p:txBody>
+          <a:bodyPr/>
+          <a:lstStyle/>
+          <a:p>
+            <a:r>
+              <a:rPr lang="en-US" dirty="0"/>
+              <a:t/>
+            </a:r>
+            <a:endParaRPr lang="en-US" dirty="0"/>
+          </a:p>
+        </p:txBody>
+      </p:sp>
+      <p:sp>
+        <p:nvSpPr>
+          <p:cNvPr id="4" name="Slide Number Placeholder 3"/>
+          <p:cNvSpPr>
+            <a:spLocks noGrp="1"/>
+          </p:cNvSpPr>
+          <p:nvPr>
+            <p:ph type="sldNum" sz="quarter" idx="10"/>
+          </p:nvPr>
+        </p:nvSpPr>
+        <p:spPr/>
+        <p:txBody>
+          <a:bodyPr/>
+          <a:lstStyle/>
+          <a:p>
+            <a:fld id="{F7021451-1387-4CA6-816F-3879F97B5CBC}" type="slidenum">
+              <a:rPr lang="en-US"/>
+              <a:t>18</a:t>
+            </a:fld>
+            <a:endParaRPr lang="en-US"/>
+          </a:p>
+        </p:txBody>
+      </p:sp>
+    </p:spTree>
+    <p:extLst>
+      <p:ext uri="{BB962C8B-B14F-4D97-AF65-F5344CB8AC3E}">
+        <p14:creationId xmlns:p14="http://schemas.microsoft.com/office/powerpoint/2010/main" val="1024086991"/>
+      </p:ext>
+    </p:extLst>
+  </p:cSld>
+  <p:clrMapOvr>
+    <a:masterClrMapping/>
+  </p:clrMapOvr>
+</p:notes>
+</file>
+
+<file path=ppt/notesSlides/notesSlide19.xml><?xml version="1.0" encoding="utf-8"?>
+<p:notes xmlns:a="http://schemas.openxmlformats.org/drawingml/2006/main" xmlns:r="http://schemas.openxmlformats.org/officeDocument/2006/relationships" xmlns:p="http://schemas.openxmlformats.org/presentationml/2006/main">
+  <p:cSld>
+    <p:spTree>
+      <p:nvGrpSpPr>
+        <p:cNvPr id="1" name=""/>
+        <p:cNvGrpSpPr/>
+        <p:nvPr/>
+      </p:nvGrpSpPr>
+      <p:grpSpPr>
+        <a:xfrm>
+          <a:off x="0" y="0"/>
+          <a:ext cx="0" cy="0"/>
+          <a:chOff x="0" y="0"/>
+          <a:chExt cx="0" cy="0"/>
+        </a:xfrm>
+      </p:grpSpPr>
+      <p:sp>
+        <p:nvSpPr>
+          <p:cNvPr id="2" name="Slide Image Placeholder 1"/>
+          <p:cNvSpPr>
+            <a:spLocks noGrp="1" noRot="1" noChangeAspect="1"/>
+          </p:cNvSpPr>
+          <p:nvPr>
+            <p:ph type="sldImg"/>
+          </p:nvPr>
+        </p:nvSpPr>
+        <p:spPr/>
+      </p:sp>
+      <p:sp>
+        <p:nvSpPr>
+          <p:cNvPr id="3" name="Notes Placeholder 2"/>
+          <p:cNvSpPr>
+            <a:spLocks noGrp="1"/>
+          </p:cNvSpPr>
+          <p:nvPr>
+            <p:ph type="body" idx="1"/>
+          </p:nvPr>
+        </p:nvSpPr>
+        <p:spPr/>
+        <p:txBody>
+          <a:bodyPr/>
+          <a:lstStyle/>
+          <a:p>
+            <a:r>
+              <a:rPr lang="en-US" dirty="0"/>
+              <a:t/>
+            </a:r>
+            <a:endParaRPr lang="en-US" dirty="0"/>
+          </a:p>
+        </p:txBody>
+      </p:sp>
+      <p:sp>
+        <p:nvSpPr>
+          <p:cNvPr id="4" name="Slide Number Placeholder 3"/>
+          <p:cNvSpPr>
+            <a:spLocks noGrp="1"/>
+          </p:cNvSpPr>
+          <p:nvPr>
+            <p:ph type="sldNum" sz="quarter" idx="10"/>
+          </p:nvPr>
+        </p:nvSpPr>
+        <p:spPr/>
+        <p:txBody>
+          <a:bodyPr/>
+          <a:lstStyle/>
+          <a:p>
+            <a:fld id="{F7021451-1387-4CA6-816F-3879F97B5CBC}" type="slidenum">
+              <a:rPr lang="en-US"/>
+              <a:t>19</a:t>
             </a:fld>
             <a:endParaRPr lang="en-US"/>
           </a:p>
@@ -2697,7 +2875,7 @@
                 <a:ea typeface="Calibri" pitchFamily="34" charset="-122"/>
                 <a:cs typeface="Calibri" pitchFamily="34" charset="-120"/>
               </a:rPr>
-              <a:t>1 / 17</a:t>
+              <a:t>1 / 19</a:t>
             </a:r>
             <a:endParaRPr lang="en-US" sz="900" dirty="0"/>
           </a:p>
@@ -3631,7 +3809,7 @@
                 <a:ea typeface="Calibri" pitchFamily="34" charset="-122"/>
                 <a:cs typeface="Calibri" pitchFamily="34" charset="-120"/>
               </a:rPr>
-              <a:t>10 / 17</a:t>
+              <a:t>10 / 19</a:t>
             </a:r>
             <a:endParaRPr lang="en-US" sz="900" dirty="0"/>
           </a:p>
@@ -3702,7 +3880,7 @@
                 <a:ea typeface="Trebuchet MS" pitchFamily="34" charset="-122"/>
                 <a:cs typeface="Trebuchet MS" pitchFamily="34" charset="-120"/>
               </a:rPr>
-              <a:t>ERGEBNISSE · 1/3</a:t>
+              <a:t>ERGEBNISSE · 1/5</a:t>
             </a:r>
             <a:endParaRPr lang="en-US" sz="1100" dirty="0"/>
           </a:p>
@@ -3891,7 +4069,7 @@
               <a:buNone/>
             </a:pPr>
             <a:r>
-              <a:rPr lang="en-US" sz="1100" b="1" dirty="0">
+              <a:rPr lang="en-US" sz="1050" b="1" dirty="0">
                 <a:solidFill>
                   <a:srgbClr val="1A9850"/>
                 </a:solidFill>
@@ -3899,16 +4077,16 @@
                 <a:ea typeface="Calibri" pitchFamily="34" charset="-122"/>
                 <a:cs typeface="Calibri" pitchFamily="34" charset="-120"/>
               </a:rPr>
-              <a:t>Höchste Werte (&gt; 85)</a:t>
-            </a:r>
-            <a:endParaRPr lang="en-US" sz="1100" dirty="0"/>
-          </a:p>
-          <a:p>
-            <a:pPr indent="0" marL="0">
-              <a:buNone/>
-            </a:pPr>
-            <a:r>
-              <a:rPr lang="en-US" sz="1100" dirty="0">
+              <a:t>Höchste Werte (&gt; 90)</a:t>
+            </a:r>
+            <a:endParaRPr lang="en-US" sz="1050" dirty="0"/>
+          </a:p>
+          <a:p>
+            <a:pPr indent="0" marL="0">
+              <a:buNone/>
+            </a:pPr>
+            <a:r>
+              <a:rPr lang="en-US" sz="1050" dirty="0">
                 <a:solidFill>
                   <a:srgbClr val="0F172A"/>
                 </a:solidFill>
@@ -3916,16 +4094,16 @@
                 <a:ea typeface="Calibri" pitchFamily="34" charset="-122"/>
                 <a:cs typeface="Calibri" pitchFamily="34" charset="-120"/>
               </a:rPr>
-              <a:t>City, Langstrasse, Altstadt — kompakte Kern-Innenstadt mit dichter Funktionsmischung</a:t>
-            </a:r>
-            <a:endParaRPr lang="en-US" sz="1100" dirty="0"/>
-          </a:p>
-          <a:p>
-            <a:pPr indent="0" marL="0">
-              <a:buNone/>
-            </a:pPr>
-            <a:r>
-              <a:rPr lang="en-US" sz="1100" dirty="0">
+              <a:t>Lindenhof, Werd, Rathaus, City — Kern-Innenstadt mit maximaler Funktionsmischung</a:t>
+            </a:r>
+            <a:endParaRPr lang="en-US" sz="1050" dirty="0"/>
+          </a:p>
+          <a:p>
+            <a:pPr indent="0" marL="0">
+              <a:buNone/>
+            </a:pPr>
+            <a:r>
+              <a:rPr lang="en-US" sz="1050" dirty="0">
                 <a:solidFill>
                   <a:srgbClr val="0F172A"/>
                 </a:solidFill>
@@ -3935,14 +4113,14 @@
               </a:rPr>
               <a:t> </a:t>
             </a:r>
-            <a:endParaRPr lang="en-US" sz="1100" dirty="0"/>
-          </a:p>
-          <a:p>
-            <a:pPr indent="0" marL="0">
-              <a:buNone/>
-            </a:pPr>
-            <a:r>
-              <a:rPr lang="en-US" sz="1100" b="1" dirty="0">
+            <a:endParaRPr lang="en-US" sz="1050" dirty="0"/>
+          </a:p>
+          <a:p>
+            <a:pPr indent="0" marL="0">
+              <a:buNone/>
+            </a:pPr>
+            <a:r>
+              <a:rPr lang="en-US" sz="1050" b="1" dirty="0">
                 <a:solidFill>
                   <a:srgbClr val="F59E0B"/>
                 </a:solidFill>
@@ -3952,14 +4130,14 @@
               </a:rPr>
               <a:t>Mittelfeld (30 – 60)</a:t>
             </a:r>
-            <a:endParaRPr lang="en-US" sz="1100" dirty="0"/>
-          </a:p>
-          <a:p>
-            <a:pPr indent="0" marL="0">
-              <a:buNone/>
-            </a:pPr>
-            <a:r>
-              <a:rPr lang="en-US" sz="1100" dirty="0">
+            <a:endParaRPr lang="en-US" sz="1050" dirty="0"/>
+          </a:p>
+          <a:p>
+            <a:pPr indent="0" marL="0">
+              <a:buNone/>
+            </a:pPr>
+            <a:r>
+              <a:rPr lang="en-US" sz="1050" dirty="0">
                 <a:solidFill>
                   <a:srgbClr val="0F172A"/>
                 </a:solidFill>
@@ -3967,16 +4145,16 @@
                 <a:ea typeface="Calibri" pitchFamily="34" charset="-122"/>
                 <a:cs typeface="Calibri" pitchFamily="34" charset="-120"/>
               </a:rPr>
-              <a:t>Wiedikon, Höngg — Wohnviertel mit guter ÖV-Anbindung</a:t>
-            </a:r>
-            <a:endParaRPr lang="en-US" sz="1100" dirty="0"/>
-          </a:p>
-          <a:p>
-            <a:pPr indent="0" marL="0">
-              <a:buNone/>
-            </a:pPr>
-            <a:r>
-              <a:rPr lang="en-US" sz="1100" dirty="0">
+              <a:t>Sihlfeld, Wipkingen, Enge — Wohnviertel mit guter ÖV-Anbindung</a:t>
+            </a:r>
+            <a:endParaRPr lang="en-US" sz="1050" dirty="0"/>
+          </a:p>
+          <a:p>
+            <a:pPr indent="0" marL="0">
+              <a:buNone/>
+            </a:pPr>
+            <a:r>
+              <a:rPr lang="en-US" sz="1050" dirty="0">
                 <a:solidFill>
                   <a:srgbClr val="0F172A"/>
                 </a:solidFill>
@@ -3986,14 +4164,14 @@
               </a:rPr>
               <a:t> </a:t>
             </a:r>
-            <a:endParaRPr lang="en-US" sz="1100" dirty="0"/>
-          </a:p>
-          <a:p>
-            <a:pPr indent="0" marL="0">
-              <a:buNone/>
-            </a:pPr>
-            <a:r>
-              <a:rPr lang="en-US" sz="1100" b="1" dirty="0">
+            <a:endParaRPr lang="en-US" sz="1050" dirty="0"/>
+          </a:p>
+          <a:p>
+            <a:pPr indent="0" marL="0">
+              <a:buNone/>
+            </a:pPr>
+            <a:r>
+              <a:rPr lang="en-US" sz="1050" b="1" dirty="0">
                 <a:solidFill>
                   <a:srgbClr val="D73027"/>
                 </a:solidFill>
@@ -4003,14 +4181,14 @@
               </a:rPr>
               <a:t>Niedrigste Werte (&lt; 20)</a:t>
             </a:r>
-            <a:endParaRPr lang="en-US" sz="1100" dirty="0"/>
-          </a:p>
-          <a:p>
-            <a:pPr indent="0" marL="0">
-              <a:buNone/>
-            </a:pPr>
-            <a:r>
-              <a:rPr lang="en-US" sz="1100" dirty="0">
+            <a:endParaRPr lang="en-US" sz="1050" dirty="0"/>
+          </a:p>
+          <a:p>
+            <a:pPr indent="0" marL="0">
+              <a:buNone/>
+            </a:pPr>
+            <a:r>
+              <a:rPr lang="en-US" sz="1050" dirty="0">
                 <a:solidFill>
                   <a:srgbClr val="0F172A"/>
                 </a:solidFill>
@@ -4018,9 +4196,9 @@
                 <a:ea typeface="Calibri" pitchFamily="34" charset="-122"/>
                 <a:cs typeface="Calibri" pitchFamily="34" charset="-120"/>
               </a:rPr>
-              <a:t>Leimbach, Witikon, Hirzenbach — Stadtperipherie, dünne Versorgung</a:t>
-            </a:r>
-            <a:endParaRPr lang="en-US" sz="1100" dirty="0"/>
+              <a:t>Leimbach, Witikon, Hirzenbach, Affoltern — Stadtperipherie und Hangwohnen</a:t>
+            </a:r>
+            <a:endParaRPr lang="en-US" sz="1050" dirty="0"/>
           </a:p>
         </p:txBody>
       </p:sp>
@@ -4096,7 +4274,7 @@
                 <a:ea typeface="Calibri" pitchFamily="34" charset="-122"/>
                 <a:cs typeface="Calibri" pitchFamily="34" charset="-120"/>
               </a:rPr>
-              <a:t>11 / 17</a:t>
+              <a:t>11 / 19</a:t>
             </a:r>
             <a:endParaRPr lang="en-US" sz="900" dirty="0"/>
           </a:p>
@@ -4167,7 +4345,7 @@
                 <a:ea typeface="Trebuchet MS" pitchFamily="34" charset="-122"/>
                 <a:cs typeface="Trebuchet MS" pitchFamily="34" charset="-120"/>
               </a:rPr>
-              <a:t>ERGEBNISSE · 2/3</a:t>
+              <a:t>ERGEBNISSE · 2/5</a:t>
             </a:r>
             <a:endParaRPr lang="en-US" sz="1100" dirty="0"/>
           </a:p>
@@ -4206,22 +4384,45 @@
                 <a:ea typeface="Trebuchet MS" pitchFamily="34" charset="-122"/>
                 <a:cs typeface="Trebuchet MS" pitchFamily="34" charset="-120"/>
               </a:rPr>
-              <a:t>Hypothesen-Test</a:t>
+              <a:t>3D-Skyline — Score als Höhe</a:t>
             </a:r>
             <a:endParaRPr lang="en-US" sz="3000" dirty="0"/>
           </a:p>
         </p:txBody>
       </p:sp>
-      <p:sp>
-        <p:nvSpPr>
-          <p:cNvPr id="4" name="Shape 2"/>
-          <p:cNvSpPr/>
-          <p:nvPr/>
-        </p:nvSpPr>
-        <p:spPr>
-          <a:xfrm>
-            <a:off x="457200" y="1508760"/>
-            <a:ext cx="4114800" cy="3108960"/>
+      <p:pic>
+        <p:nvPicPr>
+          <p:cNvPr id="4" name="Image 0" descr="/sessions/intelligent-practical-clarke/mnt/Einsatz von Geodaten in Marketing/reports/figures/qgis_3d_score.png">    </p:cNvPr>
+          <p:cNvPicPr>
+            <a:picLocks noChangeAspect="1"/>
+          </p:cNvPicPr>
+          <p:nvPr/>
+        </p:nvPicPr>
+        <p:blipFill>
+          <a:blip r:embed="rId1"/>
+          <a:srcRect l="0" r="0" t="0" b="0"/>
+          <a:stretch/>
+        </p:blipFill>
+        <p:spPr>
+          <a:xfrm>
+            <a:off x="457200" y="1463040"/>
+            <a:ext cx="4754880" cy="3108960"/>
+          </a:xfrm>
+          <a:prstGeom prst="rect">
+            <a:avLst/>
+          </a:prstGeom>
+        </p:spPr>
+      </p:pic>
+      <p:sp>
+        <p:nvSpPr>
+          <p:cNvPr id="5" name="Shape 2"/>
+          <p:cNvSpPr/>
+          <p:nvPr/>
+        </p:nvSpPr>
+        <p:spPr>
+          <a:xfrm>
+            <a:off x="5440680" y="1463040"/>
+            <a:ext cx="3246120" cy="3108960"/>
           </a:xfrm>
           <a:prstGeom prst="rect">
             <a:avLst/>
@@ -4246,14 +4447,14 @@
       </p:sp>
       <p:sp>
         <p:nvSpPr>
-          <p:cNvPr id="5" name="Shape 3"/>
-          <p:cNvSpPr/>
-          <p:nvPr/>
-        </p:nvSpPr>
-        <p:spPr>
-          <a:xfrm>
-            <a:off x="457200" y="1508760"/>
-            <a:ext cx="4114800" cy="54864"/>
+          <p:cNvPr id="6" name="Shape 3"/>
+          <p:cNvSpPr/>
+          <p:nvPr/>
+        </p:nvSpPr>
+        <p:spPr>
+          <a:xfrm>
+            <a:off x="5440680" y="1463040"/>
+            <a:ext cx="3246120" cy="54864"/>
           </a:xfrm>
           <a:prstGeom prst="rect">
             <a:avLst/>
@@ -4271,14 +4472,14 @@
       </p:sp>
       <p:sp>
         <p:nvSpPr>
-          <p:cNvPr id="6" name="Text 4"/>
-          <p:cNvSpPr/>
-          <p:nvPr/>
-        </p:nvSpPr>
-        <p:spPr>
-          <a:xfrm>
-            <a:off x="640080" y="1691640"/>
-            <a:ext cx="3749040" cy="365760"/>
+          <p:cNvPr id="7" name="Text 4"/>
+          <p:cNvSpPr/>
+          <p:nvPr/>
+        </p:nvSpPr>
+        <p:spPr>
+          <a:xfrm>
+            <a:off x="5623560" y="1627632"/>
+            <a:ext cx="2926080" cy="365760"/>
           </a:xfrm>
           <a:prstGeom prst="rect">
             <a:avLst/>
@@ -4302,7 +4503,7 @@
                 <a:ea typeface="Trebuchet MS" pitchFamily="34" charset="-122"/>
                 <a:cs typeface="Trebuchet MS" pitchFamily="34" charset="-120"/>
               </a:rPr>
-              <a:t>H1 — Score ↔ Zentralität</a:t>
+              <a:t>Was die 3D-Karte zeigt</a:t>
             </a:r>
             <a:endParaRPr lang="en-US" sz="1600" dirty="0"/>
           </a:p>
@@ -4310,108 +4511,47 @@
       </p:sp>
       <p:sp>
         <p:nvSpPr>
-          <p:cNvPr id="7" name="Text 5"/>
-          <p:cNvSpPr/>
-          <p:nvPr/>
-        </p:nvSpPr>
-        <p:spPr>
-          <a:xfrm>
-            <a:off x="457200" y="2240280"/>
-            <a:ext cx="4114800" cy="594360"/>
-          </a:xfrm>
-          <a:prstGeom prst="rect">
-            <a:avLst/>
-          </a:prstGeom>
-          <a:noFill/>
-          <a:ln/>
-        </p:spPr>
-        <p:txBody>
-          <a:bodyPr wrap="square" lIns="0" tIns="0" rIns="0" bIns="0" rtlCol="0" anchor="b"/>
-          <a:lstStyle/>
-          <a:p>
-            <a:pPr algn="ctr" indent="0" marL="0">
-              <a:buNone/>
-            </a:pPr>
-            <a:r>
-              <a:rPr lang="en-US" sz="4400" b="1" dirty="0">
-                <a:solidFill>
-                  <a:srgbClr val="065A82"/>
-                </a:solidFill>
-                <a:latin typeface="Trebuchet MS" pitchFamily="34" charset="0"/>
-                <a:ea typeface="Trebuchet MS" pitchFamily="34" charset="-122"/>
-                <a:cs typeface="Trebuchet MS" pitchFamily="34" charset="-120"/>
-              </a:rPr>
-              <a:t>ρ = −0.64</a:t>
-            </a:r>
-            <a:endParaRPr lang="en-US" sz="4400" dirty="0"/>
-          </a:p>
-        </p:txBody>
-      </p:sp>
-      <p:sp>
-        <p:nvSpPr>
-          <p:cNvPr id="8" name="Text 6"/>
-          <p:cNvSpPr/>
-          <p:nvPr/>
-        </p:nvSpPr>
-        <p:spPr>
-          <a:xfrm>
-            <a:off x="457200" y="2834640"/>
-            <a:ext cx="4114800" cy="320040"/>
-          </a:xfrm>
-          <a:prstGeom prst="rect">
-            <a:avLst/>
-          </a:prstGeom>
-          <a:noFill/>
-          <a:ln/>
-        </p:spPr>
-        <p:txBody>
-          <a:bodyPr wrap="square" lIns="0" tIns="0" rIns="0" bIns="0" rtlCol="0" anchor="t"/>
-          <a:lstStyle/>
-          <a:p>
-            <a:pPr algn="ctr" indent="0" marL="0">
-              <a:buNone/>
-            </a:pPr>
-            <a:r>
-              <a:rPr lang="en-US" sz="1100" dirty="0">
-                <a:solidFill>
-                  <a:srgbClr val="64748B"/>
+          <p:cNvPr id="8" name="Text 5"/>
+          <p:cNvSpPr/>
+          <p:nvPr/>
+        </p:nvSpPr>
+        <p:spPr>
+          <a:xfrm>
+            <a:off x="5623560" y="2057400"/>
+            <a:ext cx="2926080" cy="2377440"/>
+          </a:xfrm>
+          <a:prstGeom prst="rect">
+            <a:avLst/>
+          </a:prstGeom>
+          <a:noFill/>
+          <a:ln/>
+        </p:spPr>
+        <p:txBody>
+          <a:bodyPr wrap="square" lIns="0" tIns="0" rIns="0" bIns="0" rtlCol="0" anchor="ctr"/>
+          <a:lstStyle/>
+          <a:p>
+            <a:pPr indent="0" marL="0">
+              <a:buNone/>
+            </a:pPr>
+            <a:r>
+              <a:rPr lang="en-US" sz="1050" b="1" dirty="0">
+                <a:solidFill>
+                  <a:srgbClr val="1A9850"/>
                 </a:solidFill>
                 <a:latin typeface="Calibri" pitchFamily="34" charset="0"/>
                 <a:ea typeface="Calibri" pitchFamily="34" charset="-122"/>
                 <a:cs typeface="Calibri" pitchFamily="34" charset="-120"/>
               </a:rPr>
-              <a:t>Spearman, n = 44, p &lt; 10⁻⁵</a:t>
-            </a:r>
-            <a:endParaRPr lang="en-US" sz="1100" dirty="0"/>
-          </a:p>
-        </p:txBody>
-      </p:sp>
-      <p:sp>
-        <p:nvSpPr>
-          <p:cNvPr id="9" name="Text 7"/>
-          <p:cNvSpPr/>
-          <p:nvPr/>
-        </p:nvSpPr>
-        <p:spPr>
-          <a:xfrm>
-            <a:off x="640080" y="3291840"/>
-            <a:ext cx="3749040" cy="1188720"/>
-          </a:xfrm>
-          <a:prstGeom prst="rect">
-            <a:avLst/>
-          </a:prstGeom>
-          <a:noFill/>
-          <a:ln/>
-        </p:spPr>
-        <p:txBody>
-          <a:bodyPr wrap="square" lIns="0" tIns="0" rIns="0" bIns="0" rtlCol="0" anchor="ctr"/>
-          <a:lstStyle/>
-          <a:p>
-            <a:pPr indent="0" marL="0">
-              <a:buNone/>
-            </a:pPr>
-            <a:r>
-              <a:rPr lang="en-US" sz="1100" dirty="0">
+              <a:t>Höhe = Score × 30</a:t>
+            </a:r>
+            <a:endParaRPr lang="en-US" sz="1050" dirty="0"/>
+          </a:p>
+          <a:p>
+            <a:pPr indent="0" marL="0">
+              <a:buNone/>
+            </a:pPr>
+            <a:r>
+              <a:rPr lang="en-US" sz="1050" dirty="0">
                 <a:solidFill>
                   <a:srgbClr val="0F172A"/>
                 </a:solidFill>
@@ -4419,298 +4559,187 @@
                 <a:ea typeface="Calibri" pitchFamily="34" charset="-122"/>
                 <a:cs typeface="Calibri" pitchFamily="34" charset="-120"/>
               </a:rPr>
-              <a:t>Stützt H1 hochsignifikant: je weiter ein Quartier vom Hauptbahnhof entfernt liegt, desto niedriger der 15-Min-Score. Pearson r = −0.61 mit p = 9.2 × 10⁻⁶ bestätigt das Bild.</a:t>
-            </a:r>
-            <a:endParaRPr lang="en-US" sz="1100" dirty="0"/>
-          </a:p>
-        </p:txBody>
-      </p:sp>
-      <p:sp>
-        <p:nvSpPr>
-          <p:cNvPr id="10" name="Shape 8"/>
-          <p:cNvSpPr/>
-          <p:nvPr/>
-        </p:nvSpPr>
-        <p:spPr>
-          <a:xfrm>
-            <a:off x="4617720" y="1508760"/>
-            <a:ext cx="4114800" cy="3108960"/>
-          </a:xfrm>
-          <a:prstGeom prst="rect">
-            <a:avLst/>
-          </a:prstGeom>
-          <a:solidFill>
-            <a:srgbClr val="FFFFFF"/>
-          </a:solidFill>
-          <a:ln w="9525">
-            <a:solidFill>
-              <a:srgbClr val="E2E8F0"/>
-            </a:solidFill>
-            <a:prstDash val="solid"/>
-          </a:ln>
-          <a:effectLst>
-            <a:outerShdw sx="100000" sy="100000" kx="0" ky="0" algn="bl" rotWithShape="0" blurRad="101600" dist="12700" dir="5400000">
-              <a:srgbClr val="94A3B8">
-                <a:alpha val="12000"/>
-              </a:srgbClr>
-            </a:outerShdw>
-          </a:effectLst>
-        </p:spPr>
-      </p:sp>
-      <p:sp>
-        <p:nvSpPr>
-          <p:cNvPr id="11" name="Shape 9"/>
-          <p:cNvSpPr/>
-          <p:nvPr/>
-        </p:nvSpPr>
-        <p:spPr>
-          <a:xfrm>
-            <a:off x="4617720" y="1508760"/>
-            <a:ext cx="4114800" cy="54864"/>
-          </a:xfrm>
-          <a:prstGeom prst="rect">
-            <a:avLst/>
-          </a:prstGeom>
-          <a:solidFill>
-            <a:srgbClr val="D73027"/>
-          </a:solidFill>
-          <a:ln w="12700">
-            <a:solidFill>
-              <a:srgbClr val="D73027"/>
-            </a:solidFill>
-            <a:prstDash val="solid"/>
-          </a:ln>
-        </p:spPr>
-      </p:sp>
-      <p:sp>
-        <p:nvSpPr>
-          <p:cNvPr id="12" name="Text 10"/>
-          <p:cNvSpPr/>
-          <p:nvPr/>
-        </p:nvSpPr>
-        <p:spPr>
-          <a:xfrm>
-            <a:off x="4800600" y="1691640"/>
-            <a:ext cx="3749040" cy="365760"/>
-          </a:xfrm>
-          <a:prstGeom prst="rect">
-            <a:avLst/>
-          </a:prstGeom>
-          <a:noFill/>
-          <a:ln/>
-        </p:spPr>
-        <p:txBody>
-          <a:bodyPr wrap="square" lIns="0" tIns="0" rIns="0" bIns="0" rtlCol="0" anchor="ctr"/>
-          <a:lstStyle/>
-          <a:p>
-            <a:pPr indent="0" marL="0">
-              <a:buNone/>
-            </a:pPr>
-            <a:r>
-              <a:rPr lang="en-US" sz="1600" b="1" dirty="0">
-                <a:solidFill>
-                  <a:srgbClr val="D73027"/>
-                </a:solidFill>
-                <a:latin typeface="Trebuchet MS" pitchFamily="34" charset="0"/>
-                <a:ea typeface="Trebuchet MS" pitchFamily="34" charset="-122"/>
-                <a:cs typeface="Trebuchet MS" pitchFamily="34" charset="-120"/>
-              </a:rPr>
-              <a:t>H2 — Peripherie-Effekt</a:t>
-            </a:r>
-            <a:endParaRPr lang="en-US" sz="1600" dirty="0"/>
-          </a:p>
-        </p:txBody>
-      </p:sp>
-      <p:sp>
-        <p:nvSpPr>
-          <p:cNvPr id="13" name="Text 11"/>
-          <p:cNvSpPr/>
-          <p:nvPr/>
-        </p:nvSpPr>
-        <p:spPr>
-          <a:xfrm>
-            <a:off x="4617720" y="2240280"/>
-            <a:ext cx="4114800" cy="594360"/>
-          </a:xfrm>
-          <a:prstGeom prst="rect">
-            <a:avLst/>
-          </a:prstGeom>
-          <a:noFill/>
-          <a:ln/>
-        </p:spPr>
-        <p:txBody>
-          <a:bodyPr wrap="square" lIns="0" tIns="0" rIns="0" bIns="0" rtlCol="0" anchor="b"/>
-          <a:lstStyle/>
-          <a:p>
-            <a:pPr algn="ctr" indent="0" marL="0">
-              <a:buNone/>
-            </a:pPr>
-            <a:r>
-              <a:rPr lang="en-US" sz="4400" b="1" dirty="0">
-                <a:solidFill>
-                  <a:srgbClr val="D73027"/>
-                </a:solidFill>
-                <a:latin typeface="Trebuchet MS" pitchFamily="34" charset="0"/>
-                <a:ea typeface="Trebuchet MS" pitchFamily="34" charset="-122"/>
-                <a:cs typeface="Trebuchet MS" pitchFamily="34" charset="-120"/>
-              </a:rPr>
-              <a:t>5 Quartiere</a:t>
-            </a:r>
-            <a:endParaRPr lang="en-US" sz="4400" dirty="0"/>
-          </a:p>
-        </p:txBody>
-      </p:sp>
-      <p:sp>
-        <p:nvSpPr>
-          <p:cNvPr id="14" name="Text 12"/>
-          <p:cNvSpPr/>
-          <p:nvPr/>
-        </p:nvSpPr>
-        <p:spPr>
-          <a:xfrm>
-            <a:off x="4617720" y="2834640"/>
-            <a:ext cx="4114800" cy="320040"/>
-          </a:xfrm>
-          <a:prstGeom prst="rect">
-            <a:avLst/>
-          </a:prstGeom>
-          <a:noFill/>
-          <a:ln/>
-        </p:spPr>
-        <p:txBody>
-          <a:bodyPr wrap="square" lIns="0" tIns="0" rIns="0" bIns="0" rtlCol="0" anchor="t"/>
-          <a:lstStyle/>
-          <a:p>
-            <a:pPr algn="ctr" indent="0" marL="0">
-              <a:buNone/>
-            </a:pPr>
-            <a:r>
-              <a:rPr lang="en-US" sz="1100" dirty="0">
-                <a:solidFill>
-                  <a:srgbClr val="64748B"/>
+              <a:t>Innenstadt-Quartiere ragen wie Wolkenkratzer (Score 90+)</a:t>
+            </a:r>
+            <a:endParaRPr lang="en-US" sz="1050" dirty="0"/>
+          </a:p>
+          <a:p>
+            <a:pPr indent="0" marL="0">
+              <a:buNone/>
+            </a:pPr>
+            <a:r>
+              <a:rPr lang="en-US" sz="1050" dirty="0">
+                <a:solidFill>
+                  <a:srgbClr val="0F172A"/>
                 </a:solidFill>
                 <a:latin typeface="Calibri" pitchFamily="34" charset="0"/>
                 <a:ea typeface="Calibri" pitchFamily="34" charset="-122"/>
                 <a:cs typeface="Calibri" pitchFamily="34" charset="-120"/>
               </a:rPr>
-              <a:t>Score &lt; 20 — alle in der Peripherie</a:t>
-            </a:r>
-            <a:endParaRPr lang="en-US" sz="1100" dirty="0"/>
-          </a:p>
-        </p:txBody>
-      </p:sp>
-      <p:sp>
-        <p:nvSpPr>
-          <p:cNvPr id="15" name="Text 13"/>
-          <p:cNvSpPr/>
-          <p:nvPr/>
-        </p:nvSpPr>
-        <p:spPr>
-          <a:xfrm>
-            <a:off x="4800600" y="3291840"/>
-            <a:ext cx="3749040" cy="1188720"/>
-          </a:xfrm>
-          <a:prstGeom prst="rect">
-            <a:avLst/>
-          </a:prstGeom>
-          <a:noFill/>
-          <a:ln/>
-        </p:spPr>
-        <p:txBody>
-          <a:bodyPr wrap="square" lIns="0" tIns="0" rIns="0" bIns="0" rtlCol="0" anchor="ctr"/>
-          <a:lstStyle/>
-          <a:p>
-            <a:pPr indent="0" marL="0">
-              <a:buNone/>
-            </a:pPr>
-            <a:r>
-              <a:rPr lang="en-US" sz="1100" dirty="0">
-                <a:solidFill>
-                  <a:srgbClr val="0F172A"/>
+              <a:t> </a:t>
+            </a:r>
+            <a:endParaRPr lang="en-US" sz="1050" dirty="0"/>
+          </a:p>
+          <a:p>
+            <a:pPr indent="0" marL="0">
+              <a:buNone/>
+            </a:pPr>
+            <a:r>
+              <a:rPr lang="en-US" sz="1050" b="1" dirty="0">
+                <a:solidFill>
+                  <a:srgbClr val="F59E0B"/>
                 </a:solidFill>
                 <a:latin typeface="Calibri" pitchFamily="34" charset="0"/>
                 <a:ea typeface="Calibri" pitchFamily="34" charset="-122"/>
                 <a:cs typeface="Calibri" pitchFamily="34" charset="-120"/>
               </a:rPr>
-              <a:t>Qualitativ bestätigt: Leimbach, Witikon, Hirzenbach, Hottingen und Friesenberg — alle peripher gelegene Quartiere mit überwiegender Wohnnutzung, Score zwischen 8 und 17.</a:t>
-            </a:r>
-            <a:endParaRPr lang="en-US" sz="1100" dirty="0"/>
-          </a:p>
-        </p:txBody>
-      </p:sp>
-      <p:sp>
-        <p:nvSpPr>
-          <p:cNvPr id="16" name="Text 14"/>
-          <p:cNvSpPr/>
-          <p:nvPr/>
-        </p:nvSpPr>
-        <p:spPr>
-          <a:xfrm>
-            <a:off x="365760" y="4846320"/>
-            <a:ext cx="7315200" cy="228600"/>
-          </a:xfrm>
-          <a:prstGeom prst="rect">
-            <a:avLst/>
-          </a:prstGeom>
-          <a:noFill/>
-          <a:ln/>
-        </p:spPr>
-        <p:txBody>
-          <a:bodyPr wrap="square" lIns="0" tIns="0" rIns="0" bIns="0" rtlCol="0" anchor="ctr"/>
-          <a:lstStyle/>
-          <a:p>
-            <a:pPr algn="l" indent="0" marL="0">
-              <a:buNone/>
-            </a:pPr>
-            <a:r>
-              <a:rPr lang="en-US" sz="900" dirty="0">
-                <a:solidFill>
-                  <a:srgbClr val="64748B"/>
+              <a:t>Farbe = RdYlGn-Verlauf</a:t>
+            </a:r>
+            <a:endParaRPr lang="en-US" sz="1050" dirty="0"/>
+          </a:p>
+          <a:p>
+            <a:pPr indent="0" marL="0">
+              <a:buNone/>
+            </a:pPr>
+            <a:r>
+              <a:rPr lang="en-US" sz="1050" dirty="0">
+                <a:solidFill>
+                  <a:srgbClr val="0F172A"/>
                 </a:solidFill>
                 <a:latin typeface="Calibri" pitchFamily="34" charset="0"/>
                 <a:ea typeface="Calibri" pitchFamily="34" charset="-122"/>
                 <a:cs typeface="Calibri" pitchFamily="34" charset="-120"/>
               </a:rPr>
-              <a:t>Werte aus 06_gap_analysis.ipynb · Live-Reproduzierbar</a:t>
-            </a:r>
-            <a:endParaRPr lang="en-US" sz="900" dirty="0"/>
-          </a:p>
-        </p:txBody>
-      </p:sp>
-      <p:sp>
-        <p:nvSpPr>
-          <p:cNvPr id="17" name="Text 15"/>
-          <p:cNvSpPr/>
-          <p:nvPr/>
-        </p:nvSpPr>
-        <p:spPr>
-          <a:xfrm>
-            <a:off x="8229600" y="4846320"/>
-            <a:ext cx="822960" cy="228600"/>
-          </a:xfrm>
-          <a:prstGeom prst="rect">
-            <a:avLst/>
-          </a:prstGeom>
-          <a:noFill/>
-          <a:ln/>
-        </p:spPr>
-        <p:txBody>
-          <a:bodyPr wrap="square" lIns="0" tIns="0" rIns="0" bIns="0" rtlCol="0" anchor="ctr"/>
-          <a:lstStyle/>
-          <a:p>
-            <a:pPr algn="r" indent="0" marL="0">
-              <a:buNone/>
-            </a:pPr>
-            <a:r>
-              <a:rPr lang="en-US" sz="900" dirty="0">
-                <a:solidFill>
-                  <a:srgbClr val="64748B"/>
+              <a:t>Grün = hohe Erreichbarkeit, Rot = niedrige</a:t>
+            </a:r>
+            <a:endParaRPr lang="en-US" sz="1050" dirty="0"/>
+          </a:p>
+          <a:p>
+            <a:pPr indent="0" marL="0">
+              <a:buNone/>
+            </a:pPr>
+            <a:r>
+              <a:rPr lang="en-US" sz="1050" dirty="0">
+                <a:solidFill>
+                  <a:srgbClr val="0F172A"/>
                 </a:solidFill>
                 <a:latin typeface="Calibri" pitchFamily="34" charset="0"/>
                 <a:ea typeface="Calibri" pitchFamily="34" charset="-122"/>
                 <a:cs typeface="Calibri" pitchFamily="34" charset="-120"/>
               </a:rPr>
-              <a:t>12 / 17</a:t>
+              <a:t> </a:t>
+            </a:r>
+            <a:endParaRPr lang="en-US" sz="1050" dirty="0"/>
+          </a:p>
+          <a:p>
+            <a:pPr indent="0" marL="0">
+              <a:buNone/>
+            </a:pPr>
+            <a:r>
+              <a:rPr lang="en-US" sz="1050" b="1" dirty="0">
+                <a:solidFill>
+                  <a:srgbClr val="1C7293"/>
+                </a:solidFill>
+                <a:latin typeface="Calibri" pitchFamily="34" charset="0"/>
+                <a:ea typeface="Calibri" pitchFamily="34" charset="-122"/>
+                <a:cs typeface="Calibri" pitchFamily="34" charset="-120"/>
+              </a:rPr>
+              <a:t>Live-Demo via PostGIS</a:t>
+            </a:r>
+            <a:endParaRPr lang="en-US" sz="1050" dirty="0"/>
+          </a:p>
+          <a:p>
+            <a:pPr indent="0" marL="0">
+              <a:buNone/>
+            </a:pPr>
+            <a:r>
+              <a:rPr lang="en-US" sz="1050" dirty="0">
+                <a:solidFill>
+                  <a:srgbClr val="0F172A"/>
+                </a:solidFill>
+                <a:latin typeface="Calibri" pitchFamily="34" charset="0"/>
+                <a:ea typeface="Calibri" pitchFamily="34" charset="-122"/>
+                <a:cs typeface="Calibri" pitchFamily="34" charset="-120"/>
+              </a:rPr>
+              <a:t>QGIS 3.44 + PostGIS-Verbindung — neue POIs lassen sich live einsetzen, der Score reagiert dynamisch.</a:t>
+            </a:r>
+            <a:endParaRPr lang="en-US" sz="1050" dirty="0"/>
+          </a:p>
+        </p:txBody>
+      </p:sp>
+      <p:sp>
+        <p:nvSpPr>
+          <p:cNvPr id="9" name="Text 6"/>
+          <p:cNvSpPr/>
+          <p:nvPr/>
+        </p:nvSpPr>
+        <p:spPr>
+          <a:xfrm>
+            <a:off x="365760" y="4846320"/>
+            <a:ext cx="7315200" cy="228600"/>
+          </a:xfrm>
+          <a:prstGeom prst="rect">
+            <a:avLst/>
+          </a:prstGeom>
+          <a:noFill/>
+          <a:ln/>
+        </p:spPr>
+        <p:txBody>
+          <a:bodyPr wrap="square" lIns="0" tIns="0" rIns="0" bIns="0" rtlCol="0" anchor="ctr"/>
+          <a:lstStyle/>
+          <a:p>
+            <a:pPr algn="l" indent="0" marL="0">
+              <a:buNone/>
+            </a:pPr>
+            <a:r>
+              <a:rPr lang="en-US" sz="900" dirty="0">
+                <a:solidFill>
+                  <a:srgbClr val="64748B"/>
+                </a:solidFill>
+                <a:latin typeface="Calibri" pitchFamily="34" charset="0"/>
+                <a:ea typeface="Calibri" pitchFamily="34" charset="-122"/>
+                <a:cs typeface="Calibri" pitchFamily="34" charset="-120"/>
+              </a:rPr>
+              <a:t>QGIS-Projektdatei: qgis/zh15min.qgz · PostGIS-Quelle: zh15min.score</a:t>
+            </a:r>
+            <a:endParaRPr lang="en-US" sz="900" dirty="0"/>
+          </a:p>
+        </p:txBody>
+      </p:sp>
+      <p:sp>
+        <p:nvSpPr>
+          <p:cNvPr id="10" name="Text 7"/>
+          <p:cNvSpPr/>
+          <p:nvPr/>
+        </p:nvSpPr>
+        <p:spPr>
+          <a:xfrm>
+            <a:off x="8229600" y="4846320"/>
+            <a:ext cx="822960" cy="228600"/>
+          </a:xfrm>
+          <a:prstGeom prst="rect">
+            <a:avLst/>
+          </a:prstGeom>
+          <a:noFill/>
+          <a:ln/>
+        </p:spPr>
+        <p:txBody>
+          <a:bodyPr wrap="square" lIns="0" tIns="0" rIns="0" bIns="0" rtlCol="0" anchor="ctr"/>
+          <a:lstStyle/>
+          <a:p>
+            <a:pPr algn="r" indent="0" marL="0">
+              <a:buNone/>
+            </a:pPr>
+            <a:r>
+              <a:rPr lang="en-US" sz="900" dirty="0">
+                <a:solidFill>
+                  <a:srgbClr val="64748B"/>
+                </a:solidFill>
+                <a:latin typeface="Calibri" pitchFamily="34" charset="0"/>
+                <a:ea typeface="Calibri" pitchFamily="34" charset="-122"/>
+                <a:cs typeface="Calibri" pitchFamily="34" charset="-120"/>
+              </a:rPr>
+              <a:t>12 / 19</a:t>
             </a:r>
             <a:endParaRPr lang="en-US" sz="900" dirty="0"/>
           </a:p>
@@ -4781,7 +4810,7 @@
                 <a:ea typeface="Trebuchet MS" pitchFamily="34" charset="-122"/>
                 <a:cs typeface="Trebuchet MS" pitchFamily="34" charset="-120"/>
               </a:rPr>
-              <a:t>ERGEBNISSE · 3/3</a:t>
+              <a:t>ERGEBNISSE · 3/5</a:t>
             </a:r>
             <a:endParaRPr lang="en-US" sz="1100" dirty="0"/>
           </a:p>
@@ -4820,7 +4849,7 @@
                 <a:ea typeface="Trebuchet MS" pitchFamily="34" charset="-122"/>
                 <a:cs typeface="Trebuchet MS" pitchFamily="34" charset="-120"/>
               </a:rPr>
-              <a:t>Top- &amp; Flop-Quartiere</a:t>
+              <a:t>Hypothesen-Test</a:t>
             </a:r>
             <a:endParaRPr lang="en-US" sz="3000" dirty="0"/>
           </a:p>
@@ -4873,11 +4902,11 @@
             <a:avLst/>
           </a:prstGeom>
           <a:solidFill>
-            <a:srgbClr val="1A9850"/>
+            <a:srgbClr val="065A82"/>
           </a:solidFill>
           <a:ln w="12700">
             <a:solidFill>
-              <a:srgbClr val="1A9850"/>
+              <a:srgbClr val="065A82"/>
             </a:solidFill>
             <a:prstDash val="solid"/>
           </a:ln>
@@ -4891,34 +4920,34 @@
         </p:nvSpPr>
         <p:spPr>
           <a:xfrm>
-            <a:off x="640080" y="1645920"/>
-            <a:ext cx="3749040" cy="320040"/>
-          </a:xfrm>
-          <a:prstGeom prst="rect">
-            <a:avLst/>
-          </a:prstGeom>
-          <a:noFill/>
-          <a:ln/>
-        </p:spPr>
-        <p:txBody>
-          <a:bodyPr wrap="square" lIns="0" tIns="0" rIns="0" bIns="0" rtlCol="0" anchor="ctr"/>
-          <a:lstStyle/>
-          <a:p>
-            <a:pPr indent="0" marL="0">
-              <a:buNone/>
-            </a:pPr>
-            <a:r>
-              <a:rPr lang="en-US" sz="1400" b="1" dirty="0">
-                <a:solidFill>
-                  <a:srgbClr val="1A9850"/>
+            <a:off x="640080" y="1691640"/>
+            <a:ext cx="3749040" cy="365760"/>
+          </a:xfrm>
+          <a:prstGeom prst="rect">
+            <a:avLst/>
+          </a:prstGeom>
+          <a:noFill/>
+          <a:ln/>
+        </p:spPr>
+        <p:txBody>
+          <a:bodyPr wrap="square" lIns="0" tIns="0" rIns="0" bIns="0" rtlCol="0" anchor="ctr"/>
+          <a:lstStyle/>
+          <a:p>
+            <a:pPr indent="0" marL="0">
+              <a:buNone/>
+            </a:pPr>
+            <a:r>
+              <a:rPr lang="en-US" sz="1600" b="1" dirty="0">
+                <a:solidFill>
+                  <a:srgbClr val="065A82"/>
                 </a:solidFill>
                 <a:latin typeface="Trebuchet MS" pitchFamily="34" charset="0"/>
                 <a:ea typeface="Trebuchet MS" pitchFamily="34" charset="-122"/>
                 <a:cs typeface="Trebuchet MS" pitchFamily="34" charset="-120"/>
               </a:rPr>
-              <a:t>Top 5 Quartiere</a:t>
-            </a:r>
-            <a:endParaRPr lang="en-US" sz="1400" dirty="0"/>
+              <a:t>H1 — Score ↔ Zentralität</a:t>
+            </a:r>
+            <a:endParaRPr lang="en-US" sz="1600" dirty="0"/>
           </a:p>
         </p:txBody>
       </p:sp>
@@ -4930,32 +4959,71 @@
         </p:nvSpPr>
         <p:spPr>
           <a:xfrm>
-            <a:off x="640080" y="2103120"/>
-            <a:ext cx="1371600" cy="292608"/>
-          </a:xfrm>
-          <a:prstGeom prst="rect">
-            <a:avLst/>
-          </a:prstGeom>
-          <a:noFill/>
-          <a:ln/>
-        </p:spPr>
-        <p:txBody>
-          <a:bodyPr wrap="square" lIns="0" tIns="0" rIns="0" bIns="0" rtlCol="0" anchor="ctr"/>
-          <a:lstStyle/>
-          <a:p>
-            <a:pPr indent="0" marL="0">
+            <a:off x="457200" y="2240280"/>
+            <a:ext cx="4114800" cy="594360"/>
+          </a:xfrm>
+          <a:prstGeom prst="rect">
+            <a:avLst/>
+          </a:prstGeom>
+          <a:noFill/>
+          <a:ln/>
+        </p:spPr>
+        <p:txBody>
+          <a:bodyPr wrap="square" lIns="0" tIns="0" rIns="0" bIns="0" rtlCol="0" anchor="b"/>
+          <a:lstStyle/>
+          <a:p>
+            <a:pPr algn="ctr" indent="0" marL="0">
+              <a:buNone/>
+            </a:pPr>
+            <a:r>
+              <a:rPr lang="en-US" sz="4400" b="1" dirty="0">
+                <a:solidFill>
+                  <a:srgbClr val="065A82"/>
+                </a:solidFill>
+                <a:latin typeface="Trebuchet MS" pitchFamily="34" charset="0"/>
+                <a:ea typeface="Trebuchet MS" pitchFamily="34" charset="-122"/>
+                <a:cs typeface="Trebuchet MS" pitchFamily="34" charset="-120"/>
+              </a:rPr>
+              <a:t>ρ = −0.81</a:t>
+            </a:r>
+            <a:endParaRPr lang="en-US" sz="4400" dirty="0"/>
+          </a:p>
+        </p:txBody>
+      </p:sp>
+      <p:sp>
+        <p:nvSpPr>
+          <p:cNvPr id="8" name="Text 6"/>
+          <p:cNvSpPr/>
+          <p:nvPr/>
+        </p:nvSpPr>
+        <p:spPr>
+          <a:xfrm>
+            <a:off x="457200" y="2834640"/>
+            <a:ext cx="4114800" cy="320040"/>
+          </a:xfrm>
+          <a:prstGeom prst="rect">
+            <a:avLst/>
+          </a:prstGeom>
+          <a:noFill/>
+          <a:ln/>
+        </p:spPr>
+        <p:txBody>
+          <a:bodyPr wrap="square" lIns="0" tIns="0" rIns="0" bIns="0" rtlCol="0" anchor="t"/>
+          <a:lstStyle/>
+          <a:p>
+            <a:pPr algn="ctr" indent="0" marL="0">
               <a:buNone/>
             </a:pPr>
             <a:r>
               <a:rPr lang="en-US" sz="1100" dirty="0">
                 <a:solidFill>
-                  <a:srgbClr val="0F172A"/>
+                  <a:srgbClr val="64748B"/>
                 </a:solidFill>
                 <a:latin typeface="Calibri" pitchFamily="34" charset="0"/>
                 <a:ea typeface="Calibri" pitchFamily="34" charset="-122"/>
                 <a:cs typeface="Calibri" pitchFamily="34" charset="-120"/>
               </a:rPr>
-              <a:t>City</a:t>
+              <a:t>Spearman, n = 34, p &lt; 10⁻⁸</a:t>
             </a:r>
             <a:endParaRPr lang="en-US" sz="1100" dirty="0"/>
           </a:p>
@@ -4963,78 +5031,14 @@
       </p:sp>
       <p:sp>
         <p:nvSpPr>
-          <p:cNvPr id="8" name="Shape 6"/>
-          <p:cNvSpPr/>
-          <p:nvPr/>
-        </p:nvSpPr>
-        <p:spPr>
-          <a:xfrm>
-            <a:off x="2011680" y="2157984"/>
-            <a:ext cx="2125980" cy="201168"/>
-          </a:xfrm>
-          <a:prstGeom prst="rect">
-            <a:avLst/>
-          </a:prstGeom>
-          <a:solidFill>
-            <a:srgbClr val="1A9850"/>
-          </a:solidFill>
-          <a:ln w="12700">
-            <a:solidFill>
-              <a:srgbClr val="1A9850"/>
-            </a:solidFill>
-            <a:prstDash val="solid"/>
-          </a:ln>
-        </p:spPr>
-      </p:sp>
-      <p:sp>
-        <p:nvSpPr>
           <p:cNvPr id="9" name="Text 7"/>
           <p:cNvSpPr/>
           <p:nvPr/>
         </p:nvSpPr>
         <p:spPr>
           <a:xfrm>
-            <a:off x="4183380" y="2103120"/>
-            <a:ext cx="502920" cy="292608"/>
-          </a:xfrm>
-          <a:prstGeom prst="rect">
-            <a:avLst/>
-          </a:prstGeom>
-          <a:noFill/>
-          <a:ln/>
-        </p:spPr>
-        <p:txBody>
-          <a:bodyPr wrap="square" lIns="0" tIns="0" rIns="0" bIns="0" rtlCol="0" anchor="ctr"/>
-          <a:lstStyle/>
-          <a:p>
-            <a:pPr indent="0" marL="0">
-              <a:buNone/>
-            </a:pPr>
-            <a:r>
-              <a:rPr lang="en-US" sz="1100" b="1" dirty="0">
-                <a:solidFill>
-                  <a:srgbClr val="0F172A"/>
-                </a:solidFill>
-                <a:latin typeface="Trebuchet MS" pitchFamily="34" charset="0"/>
-                <a:ea typeface="Trebuchet MS" pitchFamily="34" charset="-122"/>
-                <a:cs typeface="Trebuchet MS" pitchFamily="34" charset="-120"/>
-              </a:rPr>
-              <a:t>93</a:t>
-            </a:r>
-            <a:endParaRPr lang="en-US" sz="1100" dirty="0"/>
-          </a:p>
-        </p:txBody>
-      </p:sp>
-      <p:sp>
-        <p:nvSpPr>
-          <p:cNvPr id="10" name="Text 8"/>
-          <p:cNvSpPr/>
-          <p:nvPr/>
-        </p:nvSpPr>
-        <p:spPr>
-          <a:xfrm>
-            <a:off x="640080" y="2514600"/>
-            <a:ext cx="1371600" cy="292608"/>
+            <a:off x="640080" y="3291840"/>
+            <a:ext cx="3749040" cy="1188720"/>
           </a:xfrm>
           <a:prstGeom prst="rect">
             <a:avLst/>
@@ -5058,7 +5062,7 @@
                 <a:ea typeface="Calibri" pitchFamily="34" charset="-122"/>
                 <a:cs typeface="Calibri" pitchFamily="34" charset="-120"/>
               </a:rPr>
-              <a:t>Langstrasse</a:t>
+              <a:t>Stützt H1 hochsignifikant: je weiter vom HB, desto niedriger der Score. Pearson r = −0.84 mit p &lt; 10⁻⁹. Zusatz-Test mit Stadt-Zürich-Mietpreisen 2024 ist jetzt ebenfalls signifikant (ρ = +0.56, p &lt; 0.001) — Konvergenz beider Validierungen.</a:t>
             </a:r>
             <a:endParaRPr lang="en-US" sz="1100" dirty="0"/>
           </a:p>
@@ -5066,380 +5070,7 @@
       </p:sp>
       <p:sp>
         <p:nvSpPr>
-          <p:cNvPr id="11" name="Shape 9"/>
-          <p:cNvSpPr/>
-          <p:nvPr/>
-        </p:nvSpPr>
-        <p:spPr>
-          <a:xfrm>
-            <a:off x="2011680" y="2569464"/>
-            <a:ext cx="2125980" cy="201168"/>
-          </a:xfrm>
-          <a:prstGeom prst="rect">
-            <a:avLst/>
-          </a:prstGeom>
-          <a:solidFill>
-            <a:srgbClr val="1A9850"/>
-          </a:solidFill>
-          <a:ln w="12700">
-            <a:solidFill>
-              <a:srgbClr val="1A9850"/>
-            </a:solidFill>
-            <a:prstDash val="solid"/>
-          </a:ln>
-        </p:spPr>
-      </p:sp>
-      <p:sp>
-        <p:nvSpPr>
-          <p:cNvPr id="12" name="Text 10"/>
-          <p:cNvSpPr/>
-          <p:nvPr/>
-        </p:nvSpPr>
-        <p:spPr>
-          <a:xfrm>
-            <a:off x="4183380" y="2514600"/>
-            <a:ext cx="502920" cy="292608"/>
-          </a:xfrm>
-          <a:prstGeom prst="rect">
-            <a:avLst/>
-          </a:prstGeom>
-          <a:noFill/>
-          <a:ln/>
-        </p:spPr>
-        <p:txBody>
-          <a:bodyPr wrap="square" lIns="0" tIns="0" rIns="0" bIns="0" rtlCol="0" anchor="ctr"/>
-          <a:lstStyle/>
-          <a:p>
-            <a:pPr indent="0" marL="0">
-              <a:buNone/>
-            </a:pPr>
-            <a:r>
-              <a:rPr lang="en-US" sz="1100" b="1" dirty="0">
-                <a:solidFill>
-                  <a:srgbClr val="0F172A"/>
-                </a:solidFill>
-                <a:latin typeface="Trebuchet MS" pitchFamily="34" charset="0"/>
-                <a:ea typeface="Trebuchet MS" pitchFamily="34" charset="-122"/>
-                <a:cs typeface="Trebuchet MS" pitchFamily="34" charset="-120"/>
-              </a:rPr>
-              <a:t>93</a:t>
-            </a:r>
-            <a:endParaRPr lang="en-US" sz="1100" dirty="0"/>
-          </a:p>
-        </p:txBody>
-      </p:sp>
-      <p:sp>
-        <p:nvSpPr>
-          <p:cNvPr id="13" name="Text 11"/>
-          <p:cNvSpPr/>
-          <p:nvPr/>
-        </p:nvSpPr>
-        <p:spPr>
-          <a:xfrm>
-            <a:off x="640080" y="2926080"/>
-            <a:ext cx="1371600" cy="292608"/>
-          </a:xfrm>
-          <a:prstGeom prst="rect">
-            <a:avLst/>
-          </a:prstGeom>
-          <a:noFill/>
-          <a:ln/>
-        </p:spPr>
-        <p:txBody>
-          <a:bodyPr wrap="square" lIns="0" tIns="0" rIns="0" bIns="0" rtlCol="0" anchor="ctr"/>
-          <a:lstStyle/>
-          <a:p>
-            <a:pPr indent="0" marL="0">
-              <a:buNone/>
-            </a:pPr>
-            <a:r>
-              <a:rPr lang="en-US" sz="1100" dirty="0">
-                <a:solidFill>
-                  <a:srgbClr val="0F172A"/>
-                </a:solidFill>
-                <a:latin typeface="Calibri" pitchFamily="34" charset="0"/>
-                <a:ea typeface="Calibri" pitchFamily="34" charset="-122"/>
-                <a:cs typeface="Calibri" pitchFamily="34" charset="-120"/>
-              </a:rPr>
-              <a:t>Altstadt</a:t>
-            </a:r>
-            <a:endParaRPr lang="en-US" sz="1100" dirty="0"/>
-          </a:p>
-        </p:txBody>
-      </p:sp>
-      <p:sp>
-        <p:nvSpPr>
-          <p:cNvPr id="14" name="Shape 12"/>
-          <p:cNvSpPr/>
-          <p:nvPr/>
-        </p:nvSpPr>
-        <p:spPr>
-          <a:xfrm>
-            <a:off x="2011680" y="2980944"/>
-            <a:ext cx="2103120" cy="201168"/>
-          </a:xfrm>
-          <a:prstGeom prst="rect">
-            <a:avLst/>
-          </a:prstGeom>
-          <a:solidFill>
-            <a:srgbClr val="1A9850"/>
-          </a:solidFill>
-          <a:ln w="12700">
-            <a:solidFill>
-              <a:srgbClr val="1A9850"/>
-            </a:solidFill>
-            <a:prstDash val="solid"/>
-          </a:ln>
-        </p:spPr>
-      </p:sp>
-      <p:sp>
-        <p:nvSpPr>
-          <p:cNvPr id="15" name="Text 13"/>
-          <p:cNvSpPr/>
-          <p:nvPr/>
-        </p:nvSpPr>
-        <p:spPr>
-          <a:xfrm>
-            <a:off x="4160520" y="2926080"/>
-            <a:ext cx="502920" cy="292608"/>
-          </a:xfrm>
-          <a:prstGeom prst="rect">
-            <a:avLst/>
-          </a:prstGeom>
-          <a:noFill/>
-          <a:ln/>
-        </p:spPr>
-        <p:txBody>
-          <a:bodyPr wrap="square" lIns="0" tIns="0" rIns="0" bIns="0" rtlCol="0" anchor="ctr"/>
-          <a:lstStyle/>
-          <a:p>
-            <a:pPr indent="0" marL="0">
-              <a:buNone/>
-            </a:pPr>
-            <a:r>
-              <a:rPr lang="en-US" sz="1100" b="1" dirty="0">
-                <a:solidFill>
-                  <a:srgbClr val="0F172A"/>
-                </a:solidFill>
-                <a:latin typeface="Trebuchet MS" pitchFamily="34" charset="0"/>
-                <a:ea typeface="Trebuchet MS" pitchFamily="34" charset="-122"/>
-                <a:cs typeface="Trebuchet MS" pitchFamily="34" charset="-120"/>
-              </a:rPr>
-              <a:t>92</a:t>
-            </a:r>
-            <a:endParaRPr lang="en-US" sz="1100" dirty="0"/>
-          </a:p>
-        </p:txBody>
-      </p:sp>
-      <p:sp>
-        <p:nvSpPr>
-          <p:cNvPr id="16" name="Text 14"/>
-          <p:cNvSpPr/>
-          <p:nvPr/>
-        </p:nvSpPr>
-        <p:spPr>
-          <a:xfrm>
-            <a:off x="640080" y="3337560"/>
-            <a:ext cx="1371600" cy="292608"/>
-          </a:xfrm>
-          <a:prstGeom prst="rect">
-            <a:avLst/>
-          </a:prstGeom>
-          <a:noFill/>
-          <a:ln/>
-        </p:spPr>
-        <p:txBody>
-          <a:bodyPr wrap="square" lIns="0" tIns="0" rIns="0" bIns="0" rtlCol="0" anchor="ctr"/>
-          <a:lstStyle/>
-          <a:p>
-            <a:pPr indent="0" marL="0">
-              <a:buNone/>
-            </a:pPr>
-            <a:r>
-              <a:rPr lang="en-US" sz="1100" dirty="0">
-                <a:solidFill>
-                  <a:srgbClr val="0F172A"/>
-                </a:solidFill>
-                <a:latin typeface="Calibri" pitchFamily="34" charset="0"/>
-                <a:ea typeface="Calibri" pitchFamily="34" charset="-122"/>
-                <a:cs typeface="Calibri" pitchFamily="34" charset="-120"/>
-              </a:rPr>
-              <a:t>Gewerbeschule</a:t>
-            </a:r>
-            <a:endParaRPr lang="en-US" sz="1100" dirty="0"/>
-          </a:p>
-        </p:txBody>
-      </p:sp>
-      <p:sp>
-        <p:nvSpPr>
-          <p:cNvPr id="17" name="Shape 15"/>
-          <p:cNvSpPr/>
-          <p:nvPr/>
-        </p:nvSpPr>
-        <p:spPr>
-          <a:xfrm>
-            <a:off x="2011680" y="3392424"/>
-            <a:ext cx="2011680" cy="201168"/>
-          </a:xfrm>
-          <a:prstGeom prst="rect">
-            <a:avLst/>
-          </a:prstGeom>
-          <a:solidFill>
-            <a:srgbClr val="1A9850"/>
-          </a:solidFill>
-          <a:ln w="12700">
-            <a:solidFill>
-              <a:srgbClr val="1A9850"/>
-            </a:solidFill>
-            <a:prstDash val="solid"/>
-          </a:ln>
-        </p:spPr>
-      </p:sp>
-      <p:sp>
-        <p:nvSpPr>
-          <p:cNvPr id="18" name="Text 16"/>
-          <p:cNvSpPr/>
-          <p:nvPr/>
-        </p:nvSpPr>
-        <p:spPr>
-          <a:xfrm>
-            <a:off x="4069080" y="3337560"/>
-            <a:ext cx="502920" cy="292608"/>
-          </a:xfrm>
-          <a:prstGeom prst="rect">
-            <a:avLst/>
-          </a:prstGeom>
-          <a:noFill/>
-          <a:ln/>
-        </p:spPr>
-        <p:txBody>
-          <a:bodyPr wrap="square" lIns="0" tIns="0" rIns="0" bIns="0" rtlCol="0" anchor="ctr"/>
-          <a:lstStyle/>
-          <a:p>
-            <a:pPr indent="0" marL="0">
-              <a:buNone/>
-            </a:pPr>
-            <a:r>
-              <a:rPr lang="en-US" sz="1100" b="1" dirty="0">
-                <a:solidFill>
-                  <a:srgbClr val="0F172A"/>
-                </a:solidFill>
-                <a:latin typeface="Trebuchet MS" pitchFamily="34" charset="0"/>
-                <a:ea typeface="Trebuchet MS" pitchFamily="34" charset="-122"/>
-                <a:cs typeface="Trebuchet MS" pitchFamily="34" charset="-120"/>
-              </a:rPr>
-              <a:t>88</a:t>
-            </a:r>
-            <a:endParaRPr lang="en-US" sz="1100" dirty="0"/>
-          </a:p>
-        </p:txBody>
-      </p:sp>
-      <p:sp>
-        <p:nvSpPr>
-          <p:cNvPr id="19" name="Text 17"/>
-          <p:cNvSpPr/>
-          <p:nvPr/>
-        </p:nvSpPr>
-        <p:spPr>
-          <a:xfrm>
-            <a:off x="640080" y="3749040"/>
-            <a:ext cx="1371600" cy="292608"/>
-          </a:xfrm>
-          <a:prstGeom prst="rect">
-            <a:avLst/>
-          </a:prstGeom>
-          <a:noFill/>
-          <a:ln/>
-        </p:spPr>
-        <p:txBody>
-          <a:bodyPr wrap="square" lIns="0" tIns="0" rIns="0" bIns="0" rtlCol="0" anchor="ctr"/>
-          <a:lstStyle/>
-          <a:p>
-            <a:pPr indent="0" marL="0">
-              <a:buNone/>
-            </a:pPr>
-            <a:r>
-              <a:rPr lang="en-US" sz="1100" dirty="0">
-                <a:solidFill>
-                  <a:srgbClr val="0F172A"/>
-                </a:solidFill>
-                <a:latin typeface="Calibri" pitchFamily="34" charset="0"/>
-                <a:ea typeface="Calibri" pitchFamily="34" charset="-122"/>
-                <a:cs typeface="Calibri" pitchFamily="34" charset="-120"/>
-              </a:rPr>
-              <a:t>Kreis 4</a:t>
-            </a:r>
-            <a:endParaRPr lang="en-US" sz="1100" dirty="0"/>
-          </a:p>
-        </p:txBody>
-      </p:sp>
-      <p:sp>
-        <p:nvSpPr>
-          <p:cNvPr id="20" name="Shape 18"/>
-          <p:cNvSpPr/>
-          <p:nvPr/>
-        </p:nvSpPr>
-        <p:spPr>
-          <a:xfrm>
-            <a:off x="2011680" y="3803904"/>
-            <a:ext cx="1943100" cy="201168"/>
-          </a:xfrm>
-          <a:prstGeom prst="rect">
-            <a:avLst/>
-          </a:prstGeom>
-          <a:solidFill>
-            <a:srgbClr val="1A9850"/>
-          </a:solidFill>
-          <a:ln w="12700">
-            <a:solidFill>
-              <a:srgbClr val="1A9850"/>
-            </a:solidFill>
-            <a:prstDash val="solid"/>
-          </a:ln>
-        </p:spPr>
-      </p:sp>
-      <p:sp>
-        <p:nvSpPr>
-          <p:cNvPr id="21" name="Text 19"/>
-          <p:cNvSpPr/>
-          <p:nvPr/>
-        </p:nvSpPr>
-        <p:spPr>
-          <a:xfrm>
-            <a:off x="4000500" y="3749040"/>
-            <a:ext cx="502920" cy="292608"/>
-          </a:xfrm>
-          <a:prstGeom prst="rect">
-            <a:avLst/>
-          </a:prstGeom>
-          <a:noFill/>
-          <a:ln/>
-        </p:spPr>
-        <p:txBody>
-          <a:bodyPr wrap="square" lIns="0" tIns="0" rIns="0" bIns="0" rtlCol="0" anchor="ctr"/>
-          <a:lstStyle/>
-          <a:p>
-            <a:pPr indent="0" marL="0">
-              <a:buNone/>
-            </a:pPr>
-            <a:r>
-              <a:rPr lang="en-US" sz="1100" b="1" dirty="0">
-                <a:solidFill>
-                  <a:srgbClr val="0F172A"/>
-                </a:solidFill>
-                <a:latin typeface="Trebuchet MS" pitchFamily="34" charset="0"/>
-                <a:ea typeface="Trebuchet MS" pitchFamily="34" charset="-122"/>
-                <a:cs typeface="Trebuchet MS" pitchFamily="34" charset="-120"/>
-              </a:rPr>
-              <a:t>85</a:t>
-            </a:r>
-            <a:endParaRPr lang="en-US" sz="1100" dirty="0"/>
-          </a:p>
-        </p:txBody>
-      </p:sp>
-      <p:sp>
-        <p:nvSpPr>
-          <p:cNvPr id="22" name="Shape 20"/>
+          <p:cNvPr id="10" name="Shape 8"/>
           <p:cNvSpPr/>
           <p:nvPr/>
         </p:nvSpPr>
@@ -5471,7 +5102,7 @@
       </p:sp>
       <p:sp>
         <p:nvSpPr>
-          <p:cNvPr id="23" name="Shape 21"/>
+          <p:cNvPr id="11" name="Shape 9"/>
           <p:cNvSpPr/>
           <p:nvPr/>
         </p:nvSpPr>
@@ -5484,11 +5115,11 @@
             <a:avLst/>
           </a:prstGeom>
           <a:solidFill>
-            <a:srgbClr val="D73027"/>
+            <a:srgbClr val="1A9850"/>
           </a:solidFill>
           <a:ln w="12700">
             <a:solidFill>
-              <a:srgbClr val="D73027"/>
+              <a:srgbClr val="1A9850"/>
             </a:solidFill>
             <a:prstDash val="solid"/>
           </a:ln>
@@ -5496,77 +5127,116 @@
       </p:sp>
       <p:sp>
         <p:nvSpPr>
-          <p:cNvPr id="24" name="Text 22"/>
-          <p:cNvSpPr/>
-          <p:nvPr/>
-        </p:nvSpPr>
-        <p:spPr>
-          <a:xfrm>
-            <a:off x="4800600" y="1645920"/>
-            <a:ext cx="3749040" cy="320040"/>
-          </a:xfrm>
-          <a:prstGeom prst="rect">
-            <a:avLst/>
-          </a:prstGeom>
-          <a:noFill/>
-          <a:ln/>
-        </p:spPr>
-        <p:txBody>
-          <a:bodyPr wrap="square" lIns="0" tIns="0" rIns="0" bIns="0" rtlCol="0" anchor="ctr"/>
-          <a:lstStyle/>
-          <a:p>
-            <a:pPr indent="0" marL="0">
-              <a:buNone/>
-            </a:pPr>
-            <a:r>
-              <a:rPr lang="en-US" sz="1400" b="1" dirty="0">
-                <a:solidFill>
-                  <a:srgbClr val="D73027"/>
+          <p:cNvPr id="12" name="Text 10"/>
+          <p:cNvSpPr/>
+          <p:nvPr/>
+        </p:nvSpPr>
+        <p:spPr>
+          <a:xfrm>
+            <a:off x="4800600" y="1691640"/>
+            <a:ext cx="3749040" cy="365760"/>
+          </a:xfrm>
+          <a:prstGeom prst="rect">
+            <a:avLst/>
+          </a:prstGeom>
+          <a:noFill/>
+          <a:ln/>
+        </p:spPr>
+        <p:txBody>
+          <a:bodyPr wrap="square" lIns="0" tIns="0" rIns="0" bIns="0" rtlCol="0" anchor="ctr"/>
+          <a:lstStyle/>
+          <a:p>
+            <a:pPr indent="0" marL="0">
+              <a:buNone/>
+            </a:pPr>
+            <a:r>
+              <a:rPr lang="en-US" sz="1600" b="1" dirty="0">
+                <a:solidFill>
+                  <a:srgbClr val="1A9850"/>
                 </a:solidFill>
                 <a:latin typeface="Trebuchet MS" pitchFamily="34" charset="0"/>
                 <a:ea typeface="Trebuchet MS" pitchFamily="34" charset="-122"/>
                 <a:cs typeface="Trebuchet MS" pitchFamily="34" charset="-120"/>
               </a:rPr>
-              <a:t>Flop 5 Quartiere</a:t>
-            </a:r>
-            <a:endParaRPr lang="en-US" sz="1400" dirty="0"/>
-          </a:p>
-        </p:txBody>
-      </p:sp>
-      <p:sp>
-        <p:nvSpPr>
-          <p:cNvPr id="25" name="Text 23"/>
-          <p:cNvSpPr/>
-          <p:nvPr/>
-        </p:nvSpPr>
-        <p:spPr>
-          <a:xfrm>
-            <a:off x="4800600" y="2103120"/>
-            <a:ext cx="1371600" cy="292608"/>
-          </a:xfrm>
-          <a:prstGeom prst="rect">
-            <a:avLst/>
-          </a:prstGeom>
-          <a:noFill/>
-          <a:ln/>
-        </p:spPr>
-        <p:txBody>
-          <a:bodyPr wrap="square" lIns="0" tIns="0" rIns="0" bIns="0" rtlCol="0" anchor="ctr"/>
-          <a:lstStyle/>
-          <a:p>
-            <a:pPr indent="0" marL="0">
+              <a:t>H2 — Wüsteneffekt widerlegt</a:t>
+            </a:r>
+            <a:endParaRPr lang="en-US" sz="1600" dirty="0"/>
+          </a:p>
+        </p:txBody>
+      </p:sp>
+      <p:sp>
+        <p:nvSpPr>
+          <p:cNvPr id="13" name="Text 11"/>
+          <p:cNvSpPr/>
+          <p:nvPr/>
+        </p:nvSpPr>
+        <p:spPr>
+          <a:xfrm>
+            <a:off x="4617720" y="2240280"/>
+            <a:ext cx="4114800" cy="594360"/>
+          </a:xfrm>
+          <a:prstGeom prst="rect">
+            <a:avLst/>
+          </a:prstGeom>
+          <a:noFill/>
+          <a:ln/>
+        </p:spPr>
+        <p:txBody>
+          <a:bodyPr wrap="square" lIns="0" tIns="0" rIns="0" bIns="0" rtlCol="0" anchor="b"/>
+          <a:lstStyle/>
+          <a:p>
+            <a:pPr algn="ctr" indent="0" marL="0">
+              <a:buNone/>
+            </a:pPr>
+            <a:r>
+              <a:rPr lang="en-US" sz="4400" b="1" dirty="0">
+                <a:solidFill>
+                  <a:srgbClr val="1A9850"/>
+                </a:solidFill>
+                <a:latin typeface="Trebuchet MS" pitchFamily="34" charset="0"/>
+                <a:ea typeface="Trebuchet MS" pitchFamily="34" charset="-122"/>
+                <a:cs typeface="Trebuchet MS" pitchFamily="34" charset="-120"/>
+              </a:rPr>
+              <a:t>0 / 34</a:t>
+            </a:r>
+            <a:endParaRPr lang="en-US" sz="4400" dirty="0"/>
+          </a:p>
+        </p:txBody>
+      </p:sp>
+      <p:sp>
+        <p:nvSpPr>
+          <p:cNvPr id="14" name="Text 12"/>
+          <p:cNvSpPr/>
+          <p:nvPr/>
+        </p:nvSpPr>
+        <p:spPr>
+          <a:xfrm>
+            <a:off x="4617720" y="2834640"/>
+            <a:ext cx="4114800" cy="320040"/>
+          </a:xfrm>
+          <a:prstGeom prst="rect">
+            <a:avLst/>
+          </a:prstGeom>
+          <a:noFill/>
+          <a:ln/>
+        </p:spPr>
+        <p:txBody>
+          <a:bodyPr wrap="square" lIns="0" tIns="0" rIns="0" bIns="0" rtlCol="0" anchor="t"/>
+          <a:lstStyle/>
+          <a:p>
+            <a:pPr algn="ctr" indent="0" marL="0">
               <a:buNone/>
             </a:pPr>
             <a:r>
               <a:rPr lang="en-US" sz="1100" dirty="0">
                 <a:solidFill>
-                  <a:srgbClr val="0F172A"/>
+                  <a:srgbClr val="64748B"/>
                 </a:solidFill>
                 <a:latin typeface="Calibri" pitchFamily="34" charset="0"/>
                 <a:ea typeface="Calibri" pitchFamily="34" charset="-122"/>
                 <a:cs typeface="Calibri" pitchFamily="34" charset="-120"/>
               </a:rPr>
-              <a:t>Leimbach</a:t>
+              <a:t>Quartiere mit Dichte &gt; P75 UND Score-P25 ≤ P25</a:t>
             </a:r>
             <a:endParaRPr lang="en-US" sz="1100" dirty="0"/>
           </a:p>
@@ -5574,78 +5244,14 @@
       </p:sp>
       <p:sp>
         <p:nvSpPr>
-          <p:cNvPr id="26" name="Shape 24"/>
-          <p:cNvSpPr/>
-          <p:nvPr/>
-        </p:nvSpPr>
-        <p:spPr>
-          <a:xfrm>
-            <a:off x="6172200" y="2157984"/>
-            <a:ext cx="182880" cy="201168"/>
-          </a:xfrm>
-          <a:prstGeom prst="rect">
-            <a:avLst/>
-          </a:prstGeom>
-          <a:solidFill>
-            <a:srgbClr val="D73027"/>
-          </a:solidFill>
-          <a:ln w="12700">
-            <a:solidFill>
-              <a:srgbClr val="D73027"/>
-            </a:solidFill>
-            <a:prstDash val="solid"/>
-          </a:ln>
-        </p:spPr>
-      </p:sp>
-      <p:sp>
-        <p:nvSpPr>
-          <p:cNvPr id="27" name="Text 25"/>
-          <p:cNvSpPr/>
-          <p:nvPr/>
-        </p:nvSpPr>
-        <p:spPr>
-          <a:xfrm>
-            <a:off x="6400800" y="2103120"/>
-            <a:ext cx="502920" cy="292608"/>
-          </a:xfrm>
-          <a:prstGeom prst="rect">
-            <a:avLst/>
-          </a:prstGeom>
-          <a:noFill/>
-          <a:ln/>
-        </p:spPr>
-        <p:txBody>
-          <a:bodyPr wrap="square" lIns="0" tIns="0" rIns="0" bIns="0" rtlCol="0" anchor="ctr"/>
-          <a:lstStyle/>
-          <a:p>
-            <a:pPr indent="0" marL="0">
-              <a:buNone/>
-            </a:pPr>
-            <a:r>
-              <a:rPr lang="en-US" sz="1100" b="1" dirty="0">
-                <a:solidFill>
-                  <a:srgbClr val="0F172A"/>
-                </a:solidFill>
-                <a:latin typeface="Trebuchet MS" pitchFamily="34" charset="0"/>
-                <a:ea typeface="Trebuchet MS" pitchFamily="34" charset="-122"/>
-                <a:cs typeface="Trebuchet MS" pitchFamily="34" charset="-120"/>
-              </a:rPr>
-              <a:t>8</a:t>
-            </a:r>
-            <a:endParaRPr lang="en-US" sz="1100" dirty="0"/>
-          </a:p>
-        </p:txBody>
-      </p:sp>
-      <p:sp>
-        <p:nvSpPr>
-          <p:cNvPr id="28" name="Text 26"/>
-          <p:cNvSpPr/>
-          <p:nvPr/>
-        </p:nvSpPr>
-        <p:spPr>
-          <a:xfrm>
-            <a:off x="4800600" y="2514600"/>
-            <a:ext cx="1371600" cy="292608"/>
+          <p:cNvPr id="15" name="Text 13"/>
+          <p:cNvSpPr/>
+          <p:nvPr/>
+        </p:nvSpPr>
+        <p:spPr>
+          <a:xfrm>
+            <a:off x="4800600" y="3291840"/>
+            <a:ext cx="3749040" cy="1188720"/>
           </a:xfrm>
           <a:prstGeom prst="rect">
             <a:avLst/>
@@ -5669,7 +5275,7 @@
                 <a:ea typeface="Calibri" pitchFamily="34" charset="-122"/>
                 <a:cs typeface="Calibri" pitchFamily="34" charset="-120"/>
               </a:rPr>
-              <a:t>Witikon</a:t>
+              <a:t>Quantitativer Test mit STATPOP-Bevölkerungsdichte: kein Quartier erfüllt beide Schwellen. Zürichs Stadtstruktur ist konsistent — keine US-typischen 'food deserts'. Periphere Quartiere haben tiefen Score (5 mit &lt; 20), aber dort wohnen auch wenige Menschen.</a:t>
             </a:r>
             <a:endParaRPr lang="en-US" sz="1100" dirty="0"/>
           </a:p>
@@ -5677,450 +5283,77 @@
       </p:sp>
       <p:sp>
         <p:nvSpPr>
-          <p:cNvPr id="29" name="Shape 27"/>
-          <p:cNvSpPr/>
-          <p:nvPr/>
-        </p:nvSpPr>
-        <p:spPr>
-          <a:xfrm>
-            <a:off x="6172200" y="2569464"/>
-            <a:ext cx="251460" cy="201168"/>
-          </a:xfrm>
-          <a:prstGeom prst="rect">
-            <a:avLst/>
-          </a:prstGeom>
-          <a:solidFill>
-            <a:srgbClr val="D73027"/>
-          </a:solidFill>
-          <a:ln w="12700">
-            <a:solidFill>
-              <a:srgbClr val="D73027"/>
-            </a:solidFill>
-            <a:prstDash val="solid"/>
-          </a:ln>
-        </p:spPr>
-      </p:sp>
-      <p:sp>
-        <p:nvSpPr>
-          <p:cNvPr id="30" name="Text 28"/>
-          <p:cNvSpPr/>
-          <p:nvPr/>
-        </p:nvSpPr>
-        <p:spPr>
-          <a:xfrm>
-            <a:off x="6469380" y="2514600"/>
-            <a:ext cx="502920" cy="292608"/>
-          </a:xfrm>
-          <a:prstGeom prst="rect">
-            <a:avLst/>
-          </a:prstGeom>
-          <a:noFill/>
-          <a:ln/>
-        </p:spPr>
-        <p:txBody>
-          <a:bodyPr wrap="square" lIns="0" tIns="0" rIns="0" bIns="0" rtlCol="0" anchor="ctr"/>
-          <a:lstStyle/>
-          <a:p>
-            <a:pPr indent="0" marL="0">
-              <a:buNone/>
-            </a:pPr>
-            <a:r>
-              <a:rPr lang="en-US" sz="1100" b="1" dirty="0">
-                <a:solidFill>
-                  <a:srgbClr val="0F172A"/>
-                </a:solidFill>
-                <a:latin typeface="Trebuchet MS" pitchFamily="34" charset="0"/>
-                <a:ea typeface="Trebuchet MS" pitchFamily="34" charset="-122"/>
-                <a:cs typeface="Trebuchet MS" pitchFamily="34" charset="-120"/>
-              </a:rPr>
-              <a:t>11</a:t>
-            </a:r>
-            <a:endParaRPr lang="en-US" sz="1100" dirty="0"/>
-          </a:p>
-        </p:txBody>
-      </p:sp>
-      <p:sp>
-        <p:nvSpPr>
-          <p:cNvPr id="31" name="Text 29"/>
-          <p:cNvSpPr/>
-          <p:nvPr/>
-        </p:nvSpPr>
-        <p:spPr>
-          <a:xfrm>
-            <a:off x="4800600" y="2926080"/>
-            <a:ext cx="1371600" cy="292608"/>
-          </a:xfrm>
-          <a:prstGeom prst="rect">
-            <a:avLst/>
-          </a:prstGeom>
-          <a:noFill/>
-          <a:ln/>
-        </p:spPr>
-        <p:txBody>
-          <a:bodyPr wrap="square" lIns="0" tIns="0" rIns="0" bIns="0" rtlCol="0" anchor="ctr"/>
-          <a:lstStyle/>
-          <a:p>
-            <a:pPr indent="0" marL="0">
-              <a:buNone/>
-            </a:pPr>
-            <a:r>
-              <a:rPr lang="en-US" sz="1100" dirty="0">
-                <a:solidFill>
-                  <a:srgbClr val="0F172A"/>
+          <p:cNvPr id="16" name="Text 14"/>
+          <p:cNvSpPr/>
+          <p:nvPr/>
+        </p:nvSpPr>
+        <p:spPr>
+          <a:xfrm>
+            <a:off x="365760" y="4846320"/>
+            <a:ext cx="7315200" cy="228600"/>
+          </a:xfrm>
+          <a:prstGeom prst="rect">
+            <a:avLst/>
+          </a:prstGeom>
+          <a:noFill/>
+          <a:ln/>
+        </p:spPr>
+        <p:txBody>
+          <a:bodyPr wrap="square" lIns="0" tIns="0" rIns="0" bIns="0" rtlCol="0" anchor="ctr"/>
+          <a:lstStyle/>
+          <a:p>
+            <a:pPr algn="l" indent="0" marL="0">
+              <a:buNone/>
+            </a:pPr>
+            <a:r>
+              <a:rPr lang="en-US" sz="900" dirty="0">
+                <a:solidFill>
+                  <a:srgbClr val="64748B"/>
                 </a:solidFill>
                 <a:latin typeface="Calibri" pitchFamily="34" charset="0"/>
                 <a:ea typeface="Calibri" pitchFamily="34" charset="-122"/>
                 <a:cs typeface="Calibri" pitchFamily="34" charset="-120"/>
               </a:rPr>
-              <a:t>Hirzenbach</a:t>
-            </a:r>
-            <a:endParaRPr lang="en-US" sz="1100" dirty="0"/>
-          </a:p>
-        </p:txBody>
-      </p:sp>
-      <p:sp>
-        <p:nvSpPr>
-          <p:cNvPr id="32" name="Shape 30"/>
-          <p:cNvSpPr/>
-          <p:nvPr/>
-        </p:nvSpPr>
-        <p:spPr>
-          <a:xfrm>
-            <a:off x="6172200" y="2980944"/>
-            <a:ext cx="365760" cy="201168"/>
-          </a:xfrm>
-          <a:prstGeom prst="rect">
-            <a:avLst/>
-          </a:prstGeom>
-          <a:solidFill>
-            <a:srgbClr val="D73027"/>
-          </a:solidFill>
-          <a:ln w="12700">
-            <a:solidFill>
-              <a:srgbClr val="D73027"/>
-            </a:solidFill>
-            <a:prstDash val="solid"/>
-          </a:ln>
-        </p:spPr>
-      </p:sp>
-      <p:sp>
-        <p:nvSpPr>
-          <p:cNvPr id="33" name="Text 31"/>
-          <p:cNvSpPr/>
-          <p:nvPr/>
-        </p:nvSpPr>
-        <p:spPr>
-          <a:xfrm>
-            <a:off x="6583680" y="2926080"/>
-            <a:ext cx="502920" cy="292608"/>
-          </a:xfrm>
-          <a:prstGeom prst="rect">
-            <a:avLst/>
-          </a:prstGeom>
-          <a:noFill/>
-          <a:ln/>
-        </p:spPr>
-        <p:txBody>
-          <a:bodyPr wrap="square" lIns="0" tIns="0" rIns="0" bIns="0" rtlCol="0" anchor="ctr"/>
-          <a:lstStyle/>
-          <a:p>
-            <a:pPr indent="0" marL="0">
-              <a:buNone/>
-            </a:pPr>
-            <a:r>
-              <a:rPr lang="en-US" sz="1100" b="1" dirty="0">
-                <a:solidFill>
-                  <a:srgbClr val="0F172A"/>
-                </a:solidFill>
-                <a:latin typeface="Trebuchet MS" pitchFamily="34" charset="0"/>
-                <a:ea typeface="Trebuchet MS" pitchFamily="34" charset="-122"/>
-                <a:cs typeface="Trebuchet MS" pitchFamily="34" charset="-120"/>
-              </a:rPr>
-              <a:t>16</a:t>
-            </a:r>
-            <a:endParaRPr lang="en-US" sz="1100" dirty="0"/>
-          </a:p>
-        </p:txBody>
-      </p:sp>
-      <p:sp>
-        <p:nvSpPr>
-          <p:cNvPr id="34" name="Text 32"/>
-          <p:cNvSpPr/>
-          <p:nvPr/>
-        </p:nvSpPr>
-        <p:spPr>
-          <a:xfrm>
-            <a:off x="4800600" y="3337560"/>
-            <a:ext cx="1371600" cy="292608"/>
-          </a:xfrm>
-          <a:prstGeom prst="rect">
-            <a:avLst/>
-          </a:prstGeom>
-          <a:noFill/>
-          <a:ln/>
-        </p:spPr>
-        <p:txBody>
-          <a:bodyPr wrap="square" lIns="0" tIns="0" rIns="0" bIns="0" rtlCol="0" anchor="ctr"/>
-          <a:lstStyle/>
-          <a:p>
-            <a:pPr indent="0" marL="0">
-              <a:buNone/>
-            </a:pPr>
-            <a:r>
-              <a:rPr lang="en-US" sz="1100" dirty="0">
-                <a:solidFill>
-                  <a:srgbClr val="0F172A"/>
+              <a:t>Werte aus 06_gap_analysis.ipynb · Live-Reproduzierbar</a:t>
+            </a:r>
+            <a:endParaRPr lang="en-US" sz="900" dirty="0"/>
+          </a:p>
+        </p:txBody>
+      </p:sp>
+      <p:sp>
+        <p:nvSpPr>
+          <p:cNvPr id="17" name="Text 15"/>
+          <p:cNvSpPr/>
+          <p:nvPr/>
+        </p:nvSpPr>
+        <p:spPr>
+          <a:xfrm>
+            <a:off x="8229600" y="4846320"/>
+            <a:ext cx="822960" cy="228600"/>
+          </a:xfrm>
+          <a:prstGeom prst="rect">
+            <a:avLst/>
+          </a:prstGeom>
+          <a:noFill/>
+          <a:ln/>
+        </p:spPr>
+        <p:txBody>
+          <a:bodyPr wrap="square" lIns="0" tIns="0" rIns="0" bIns="0" rtlCol="0" anchor="ctr"/>
+          <a:lstStyle/>
+          <a:p>
+            <a:pPr algn="r" indent="0" marL="0">
+              <a:buNone/>
+            </a:pPr>
+            <a:r>
+              <a:rPr lang="en-US" sz="900" dirty="0">
+                <a:solidFill>
+                  <a:srgbClr val="64748B"/>
                 </a:solidFill>
                 <a:latin typeface="Calibri" pitchFamily="34" charset="0"/>
                 <a:ea typeface="Calibri" pitchFamily="34" charset="-122"/>
                 <a:cs typeface="Calibri" pitchFamily="34" charset="-120"/>
               </a:rPr>
-              <a:t>Hottingen</a:t>
-            </a:r>
-            <a:endParaRPr lang="en-US" sz="1100" dirty="0"/>
-          </a:p>
-        </p:txBody>
-      </p:sp>
-      <p:sp>
-        <p:nvSpPr>
-          <p:cNvPr id="35" name="Shape 33"/>
-          <p:cNvSpPr/>
-          <p:nvPr/>
-        </p:nvSpPr>
-        <p:spPr>
-          <a:xfrm>
-            <a:off x="6172200" y="3392424"/>
-            <a:ext cx="388620" cy="201168"/>
-          </a:xfrm>
-          <a:prstGeom prst="rect">
-            <a:avLst/>
-          </a:prstGeom>
-          <a:solidFill>
-            <a:srgbClr val="D73027"/>
-          </a:solidFill>
-          <a:ln w="12700">
-            <a:solidFill>
-              <a:srgbClr val="D73027"/>
-            </a:solidFill>
-            <a:prstDash val="solid"/>
-          </a:ln>
-        </p:spPr>
-      </p:sp>
-      <p:sp>
-        <p:nvSpPr>
-          <p:cNvPr id="36" name="Text 34"/>
-          <p:cNvSpPr/>
-          <p:nvPr/>
-        </p:nvSpPr>
-        <p:spPr>
-          <a:xfrm>
-            <a:off x="6606540" y="3337560"/>
-            <a:ext cx="502920" cy="292608"/>
-          </a:xfrm>
-          <a:prstGeom prst="rect">
-            <a:avLst/>
-          </a:prstGeom>
-          <a:noFill/>
-          <a:ln/>
-        </p:spPr>
-        <p:txBody>
-          <a:bodyPr wrap="square" lIns="0" tIns="0" rIns="0" bIns="0" rtlCol="0" anchor="ctr"/>
-          <a:lstStyle/>
-          <a:p>
-            <a:pPr indent="0" marL="0">
-              <a:buNone/>
-            </a:pPr>
-            <a:r>
-              <a:rPr lang="en-US" sz="1100" b="1" dirty="0">
-                <a:solidFill>
-                  <a:srgbClr val="0F172A"/>
-                </a:solidFill>
-                <a:latin typeface="Trebuchet MS" pitchFamily="34" charset="0"/>
-                <a:ea typeface="Trebuchet MS" pitchFamily="34" charset="-122"/>
-                <a:cs typeface="Trebuchet MS" pitchFamily="34" charset="-120"/>
-              </a:rPr>
-              <a:t>17</a:t>
-            </a:r>
-            <a:endParaRPr lang="en-US" sz="1100" dirty="0"/>
-          </a:p>
-        </p:txBody>
-      </p:sp>
-      <p:sp>
-        <p:nvSpPr>
-          <p:cNvPr id="37" name="Text 35"/>
-          <p:cNvSpPr/>
-          <p:nvPr/>
-        </p:nvSpPr>
-        <p:spPr>
-          <a:xfrm>
-            <a:off x="4800600" y="3749040"/>
-            <a:ext cx="1371600" cy="292608"/>
-          </a:xfrm>
-          <a:prstGeom prst="rect">
-            <a:avLst/>
-          </a:prstGeom>
-          <a:noFill/>
-          <a:ln/>
-        </p:spPr>
-        <p:txBody>
-          <a:bodyPr wrap="square" lIns="0" tIns="0" rIns="0" bIns="0" rtlCol="0" anchor="ctr"/>
-          <a:lstStyle/>
-          <a:p>
-            <a:pPr indent="0" marL="0">
-              <a:buNone/>
-            </a:pPr>
-            <a:r>
-              <a:rPr lang="en-US" sz="1100" dirty="0">
-                <a:solidFill>
-                  <a:srgbClr val="0F172A"/>
-                </a:solidFill>
-                <a:latin typeface="Calibri" pitchFamily="34" charset="0"/>
-                <a:ea typeface="Calibri" pitchFamily="34" charset="-122"/>
-                <a:cs typeface="Calibri" pitchFamily="34" charset="-120"/>
-              </a:rPr>
-              <a:t>Friesenberg</a:t>
-            </a:r>
-            <a:endParaRPr lang="en-US" sz="1100" dirty="0"/>
-          </a:p>
-        </p:txBody>
-      </p:sp>
-      <p:sp>
-        <p:nvSpPr>
-          <p:cNvPr id="38" name="Shape 36"/>
-          <p:cNvSpPr/>
-          <p:nvPr/>
-        </p:nvSpPr>
-        <p:spPr>
-          <a:xfrm>
-            <a:off x="6172200" y="3803904"/>
-            <a:ext cx="388620" cy="201168"/>
-          </a:xfrm>
-          <a:prstGeom prst="rect">
-            <a:avLst/>
-          </a:prstGeom>
-          <a:solidFill>
-            <a:srgbClr val="D73027"/>
-          </a:solidFill>
-          <a:ln w="12700">
-            <a:solidFill>
-              <a:srgbClr val="D73027"/>
-            </a:solidFill>
-            <a:prstDash val="solid"/>
-          </a:ln>
-        </p:spPr>
-      </p:sp>
-      <p:sp>
-        <p:nvSpPr>
-          <p:cNvPr id="39" name="Text 37"/>
-          <p:cNvSpPr/>
-          <p:nvPr/>
-        </p:nvSpPr>
-        <p:spPr>
-          <a:xfrm>
-            <a:off x="6606540" y="3749040"/>
-            <a:ext cx="502920" cy="292608"/>
-          </a:xfrm>
-          <a:prstGeom prst="rect">
-            <a:avLst/>
-          </a:prstGeom>
-          <a:noFill/>
-          <a:ln/>
-        </p:spPr>
-        <p:txBody>
-          <a:bodyPr wrap="square" lIns="0" tIns="0" rIns="0" bIns="0" rtlCol="0" anchor="ctr"/>
-          <a:lstStyle/>
-          <a:p>
-            <a:pPr indent="0" marL="0">
-              <a:buNone/>
-            </a:pPr>
-            <a:r>
-              <a:rPr lang="en-US" sz="1100" b="1" dirty="0">
-                <a:solidFill>
-                  <a:srgbClr val="0F172A"/>
-                </a:solidFill>
-                <a:latin typeface="Trebuchet MS" pitchFamily="34" charset="0"/>
-                <a:ea typeface="Trebuchet MS" pitchFamily="34" charset="-122"/>
-                <a:cs typeface="Trebuchet MS" pitchFamily="34" charset="-120"/>
-              </a:rPr>
-              <a:t>17</a:t>
-            </a:r>
-            <a:endParaRPr lang="en-US" sz="1100" dirty="0"/>
-          </a:p>
-        </p:txBody>
-      </p:sp>
-      <p:sp>
-        <p:nvSpPr>
-          <p:cNvPr id="40" name="Text 38"/>
-          <p:cNvSpPr/>
-          <p:nvPr/>
-        </p:nvSpPr>
-        <p:spPr>
-          <a:xfrm>
-            <a:off x="365760" y="4846320"/>
-            <a:ext cx="7315200" cy="228600"/>
-          </a:xfrm>
-          <a:prstGeom prst="rect">
-            <a:avLst/>
-          </a:prstGeom>
-          <a:noFill/>
-          <a:ln/>
-        </p:spPr>
-        <p:txBody>
-          <a:bodyPr wrap="square" lIns="0" tIns="0" rIns="0" bIns="0" rtlCol="0" anchor="ctr"/>
-          <a:lstStyle/>
-          <a:p>
-            <a:pPr algn="l" indent="0" marL="0">
-              <a:buNone/>
-            </a:pPr>
-            <a:r>
-              <a:rPr lang="en-US" sz="900" dirty="0">
-                <a:solidFill>
-                  <a:srgbClr val="64748B"/>
-                </a:solidFill>
-                <a:latin typeface="Calibri" pitchFamily="34" charset="0"/>
-                <a:ea typeface="Calibri" pitchFamily="34" charset="-122"/>
-                <a:cs typeface="Calibri" pitchFamily="34" charset="-120"/>
-              </a:rPr>
-              <a:t>Score-Mittelwert je Quartier · Gesamt-Range 8 – 93 · n = 44</a:t>
-            </a:r>
-            <a:endParaRPr lang="en-US" sz="900" dirty="0"/>
-          </a:p>
-        </p:txBody>
-      </p:sp>
-      <p:sp>
-        <p:nvSpPr>
-          <p:cNvPr id="41" name="Text 39"/>
-          <p:cNvSpPr/>
-          <p:nvPr/>
-        </p:nvSpPr>
-        <p:spPr>
-          <a:xfrm>
-            <a:off x="8229600" y="4846320"/>
-            <a:ext cx="822960" cy="228600"/>
-          </a:xfrm>
-          <a:prstGeom prst="rect">
-            <a:avLst/>
-          </a:prstGeom>
-          <a:noFill/>
-          <a:ln/>
-        </p:spPr>
-        <p:txBody>
-          <a:bodyPr wrap="square" lIns="0" tIns="0" rIns="0" bIns="0" rtlCol="0" anchor="ctr"/>
-          <a:lstStyle/>
-          <a:p>
-            <a:pPr algn="r" indent="0" marL="0">
-              <a:buNone/>
-            </a:pPr>
-            <a:r>
-              <a:rPr lang="en-US" sz="900" dirty="0">
-                <a:solidFill>
-                  <a:srgbClr val="64748B"/>
-                </a:solidFill>
-                <a:latin typeface="Calibri" pitchFamily="34" charset="0"/>
-                <a:ea typeface="Calibri" pitchFamily="34" charset="-122"/>
-                <a:cs typeface="Calibri" pitchFamily="34" charset="-120"/>
-              </a:rPr>
-              <a:t>13 / 17</a:t>
+              <a:t>13 / 19</a:t>
             </a:r>
             <a:endParaRPr lang="en-US" sz="900" dirty="0"/>
           </a:p>
@@ -6191,7 +5424,7 @@
                 <a:ea typeface="Trebuchet MS" pitchFamily="34" charset="-122"/>
                 <a:cs typeface="Trebuchet MS" pitchFamily="34" charset="-120"/>
               </a:rPr>
-              <a:t>DISKUSSION · 1/2</a:t>
+              <a:t>ERGEBNISSE · 4/5</a:t>
             </a:r>
             <a:endParaRPr lang="en-US" sz="1100" dirty="0"/>
           </a:p>
@@ -6230,7 +5463,7 @@
                 <a:ea typeface="Trebuchet MS" pitchFamily="34" charset="-122"/>
                 <a:cs typeface="Trebuchet MS" pitchFamily="34" charset="-120"/>
               </a:rPr>
-              <a:t>Antwort auf die Forschungsfrage</a:t>
+              <a:t>Top- &amp; Flop-Quartiere</a:t>
             </a:r>
             <a:endParaRPr lang="en-US" sz="3000" dirty="0"/>
           </a:p>
@@ -6245,7 +5478,7 @@
         <p:spPr>
           <a:xfrm>
             <a:off x="457200" y="1508760"/>
-            <a:ext cx="8229600" cy="1280160"/>
+            <a:ext cx="4114800" cy="3108960"/>
           </a:xfrm>
           <a:prstGeom prst="rect">
             <a:avLst/>
@@ -6277,17 +5510,17 @@
         <p:spPr>
           <a:xfrm>
             <a:off x="457200" y="1508760"/>
-            <a:ext cx="8229600" cy="54864"/>
+            <a:ext cx="4114800" cy="54864"/>
           </a:xfrm>
           <a:prstGeom prst="rect">
             <a:avLst/>
           </a:prstGeom>
           <a:solidFill>
-            <a:srgbClr val="065A82"/>
+            <a:srgbClr val="1A9850"/>
           </a:solidFill>
           <a:ln w="12700">
             <a:solidFill>
-              <a:srgbClr val="065A82"/>
+              <a:srgbClr val="1A9850"/>
             </a:solidFill>
             <a:prstDash val="solid"/>
           </a:ln>
@@ -6301,24 +5534,63 @@
         </p:nvSpPr>
         <p:spPr>
           <a:xfrm>
-            <a:off x="640080" y="1691640"/>
-            <a:ext cx="7863840" cy="960120"/>
-          </a:xfrm>
-          <a:prstGeom prst="rect">
-            <a:avLst/>
-          </a:prstGeom>
-          <a:noFill/>
-          <a:ln/>
-        </p:spPr>
-        <p:txBody>
-          <a:bodyPr wrap="square" lIns="0" tIns="0" rIns="0" bIns="0" rtlCol="0" anchor="ctr"/>
-          <a:lstStyle/>
-          <a:p>
-            <a:pPr indent="0" marL="0">
-              <a:buNone/>
-            </a:pPr>
-            <a:r>
-              <a:rPr lang="en-US" sz="1400" dirty="0">
+            <a:off x="640080" y="1645920"/>
+            <a:ext cx="3749040" cy="320040"/>
+          </a:xfrm>
+          <a:prstGeom prst="rect">
+            <a:avLst/>
+          </a:prstGeom>
+          <a:noFill/>
+          <a:ln/>
+        </p:spPr>
+        <p:txBody>
+          <a:bodyPr wrap="square" lIns="0" tIns="0" rIns="0" bIns="0" rtlCol="0" anchor="ctr"/>
+          <a:lstStyle/>
+          <a:p>
+            <a:pPr indent="0" marL="0">
+              <a:buNone/>
+            </a:pPr>
+            <a:r>
+              <a:rPr lang="en-US" sz="1400" b="1" dirty="0">
+                <a:solidFill>
+                  <a:srgbClr val="1A9850"/>
+                </a:solidFill>
+                <a:latin typeface="Trebuchet MS" pitchFamily="34" charset="0"/>
+                <a:ea typeface="Trebuchet MS" pitchFamily="34" charset="-122"/>
+                <a:cs typeface="Trebuchet MS" pitchFamily="34" charset="-120"/>
+              </a:rPr>
+              <a:t>Top 5 Quartiere</a:t>
+            </a:r>
+            <a:endParaRPr lang="en-US" sz="1400" dirty="0"/>
+          </a:p>
+        </p:txBody>
+      </p:sp>
+      <p:sp>
+        <p:nvSpPr>
+          <p:cNvPr id="7" name="Text 5"/>
+          <p:cNvSpPr/>
+          <p:nvPr/>
+        </p:nvSpPr>
+        <p:spPr>
+          <a:xfrm>
+            <a:off x="640080" y="2103120"/>
+            <a:ext cx="1371600" cy="292608"/>
+          </a:xfrm>
+          <a:prstGeom prst="rect">
+            <a:avLst/>
+          </a:prstGeom>
+          <a:noFill/>
+          <a:ln/>
+        </p:spPr>
+        <p:txBody>
+          <a:bodyPr wrap="square" lIns="0" tIns="0" rIns="0" bIns="0" rtlCol="0" anchor="ctr"/>
+          <a:lstStyle/>
+          <a:p>
+            <a:pPr indent="0" marL="0">
+              <a:buNone/>
+            </a:pPr>
+            <a:r>
+              <a:rPr lang="en-US" sz="1100" dirty="0">
                 <a:solidFill>
                   <a:srgbClr val="0F172A"/>
                 </a:solidFill>
@@ -6326,27 +5598,205 @@
                 <a:ea typeface="Calibri" pitchFamily="34" charset="-122"/>
                 <a:cs typeface="Calibri" pitchFamily="34" charset="-120"/>
               </a:rPr>
-              <a:t>Die grössten Lücken zwischen Wohnen und täglicher Infrastruktur </a:t>
-            </a:r>
-            <a:pPr indent="0" marL="0">
-              <a:buNone/>
-            </a:pPr>
-            <a:r>
-              <a:rPr lang="en-US" sz="1400" b="1" dirty="0">
-                <a:solidFill>
-                  <a:srgbClr val="065A82"/>
+              <a:t>Lindenhof</a:t>
+            </a:r>
+            <a:endParaRPr lang="en-US" sz="1100" dirty="0"/>
+          </a:p>
+        </p:txBody>
+      </p:sp>
+      <p:sp>
+        <p:nvSpPr>
+          <p:cNvPr id="8" name="Shape 6"/>
+          <p:cNvSpPr/>
+          <p:nvPr/>
+        </p:nvSpPr>
+        <p:spPr>
+          <a:xfrm>
+            <a:off x="2011680" y="2157984"/>
+            <a:ext cx="2103120" cy="201168"/>
+          </a:xfrm>
+          <a:prstGeom prst="rect">
+            <a:avLst/>
+          </a:prstGeom>
+          <a:solidFill>
+            <a:srgbClr val="1A9850"/>
+          </a:solidFill>
+          <a:ln w="12700">
+            <a:solidFill>
+              <a:srgbClr val="1A9850"/>
+            </a:solidFill>
+            <a:prstDash val="solid"/>
+          </a:ln>
+        </p:spPr>
+      </p:sp>
+      <p:sp>
+        <p:nvSpPr>
+          <p:cNvPr id="9" name="Text 7"/>
+          <p:cNvSpPr/>
+          <p:nvPr/>
+        </p:nvSpPr>
+        <p:spPr>
+          <a:xfrm>
+            <a:off x="4160520" y="2103120"/>
+            <a:ext cx="502920" cy="292608"/>
+          </a:xfrm>
+          <a:prstGeom prst="rect">
+            <a:avLst/>
+          </a:prstGeom>
+          <a:noFill/>
+          <a:ln/>
+        </p:spPr>
+        <p:txBody>
+          <a:bodyPr wrap="square" lIns="0" tIns="0" rIns="0" bIns="0" rtlCol="0" anchor="ctr"/>
+          <a:lstStyle/>
+          <a:p>
+            <a:pPr indent="0" marL="0">
+              <a:buNone/>
+            </a:pPr>
+            <a:r>
+              <a:rPr lang="en-US" sz="1100" b="1" dirty="0">
+                <a:solidFill>
+                  <a:srgbClr val="0F172A"/>
+                </a:solidFill>
+                <a:latin typeface="Trebuchet MS" pitchFamily="34" charset="0"/>
+                <a:ea typeface="Trebuchet MS" pitchFamily="34" charset="-122"/>
+                <a:cs typeface="Trebuchet MS" pitchFamily="34" charset="-120"/>
+              </a:rPr>
+              <a:t>92</a:t>
+            </a:r>
+            <a:endParaRPr lang="en-US" sz="1100" dirty="0"/>
+          </a:p>
+        </p:txBody>
+      </p:sp>
+      <p:sp>
+        <p:nvSpPr>
+          <p:cNvPr id="10" name="Text 8"/>
+          <p:cNvSpPr/>
+          <p:nvPr/>
+        </p:nvSpPr>
+        <p:spPr>
+          <a:xfrm>
+            <a:off x="640080" y="2514600"/>
+            <a:ext cx="1371600" cy="292608"/>
+          </a:xfrm>
+          <a:prstGeom prst="rect">
+            <a:avLst/>
+          </a:prstGeom>
+          <a:noFill/>
+          <a:ln/>
+        </p:spPr>
+        <p:txBody>
+          <a:bodyPr wrap="square" lIns="0" tIns="0" rIns="0" bIns="0" rtlCol="0" anchor="ctr"/>
+          <a:lstStyle/>
+          <a:p>
+            <a:pPr indent="0" marL="0">
+              <a:buNone/>
+            </a:pPr>
+            <a:r>
+              <a:rPr lang="en-US" sz="1100" dirty="0">
+                <a:solidFill>
+                  <a:srgbClr val="0F172A"/>
                 </a:solidFill>
                 <a:latin typeface="Calibri" pitchFamily="34" charset="0"/>
                 <a:ea typeface="Calibri" pitchFamily="34" charset="-122"/>
                 <a:cs typeface="Calibri" pitchFamily="34" charset="-120"/>
               </a:rPr>
-              <a:t>liegen in der Stadtperipherie</a:t>
-            </a:r>
-            <a:pPr indent="0" marL="0">
-              <a:buNone/>
-            </a:pPr>
-            <a:r>
-              <a:rPr lang="en-US" sz="1400" dirty="0">
+              <a:t>Werd</a:t>
+            </a:r>
+            <a:endParaRPr lang="en-US" sz="1100" dirty="0"/>
+          </a:p>
+        </p:txBody>
+      </p:sp>
+      <p:sp>
+        <p:nvSpPr>
+          <p:cNvPr id="11" name="Shape 9"/>
+          <p:cNvSpPr/>
+          <p:nvPr/>
+        </p:nvSpPr>
+        <p:spPr>
+          <a:xfrm>
+            <a:off x="2011680" y="2569464"/>
+            <a:ext cx="2103120" cy="201168"/>
+          </a:xfrm>
+          <a:prstGeom prst="rect">
+            <a:avLst/>
+          </a:prstGeom>
+          <a:solidFill>
+            <a:srgbClr val="1A9850"/>
+          </a:solidFill>
+          <a:ln w="12700">
+            <a:solidFill>
+              <a:srgbClr val="1A9850"/>
+            </a:solidFill>
+            <a:prstDash val="solid"/>
+          </a:ln>
+        </p:spPr>
+      </p:sp>
+      <p:sp>
+        <p:nvSpPr>
+          <p:cNvPr id="12" name="Text 10"/>
+          <p:cNvSpPr/>
+          <p:nvPr/>
+        </p:nvSpPr>
+        <p:spPr>
+          <a:xfrm>
+            <a:off x="4160520" y="2514600"/>
+            <a:ext cx="502920" cy="292608"/>
+          </a:xfrm>
+          <a:prstGeom prst="rect">
+            <a:avLst/>
+          </a:prstGeom>
+          <a:noFill/>
+          <a:ln/>
+        </p:spPr>
+        <p:txBody>
+          <a:bodyPr wrap="square" lIns="0" tIns="0" rIns="0" bIns="0" rtlCol="0" anchor="ctr"/>
+          <a:lstStyle/>
+          <a:p>
+            <a:pPr indent="0" marL="0">
+              <a:buNone/>
+            </a:pPr>
+            <a:r>
+              <a:rPr lang="en-US" sz="1100" b="1" dirty="0">
+                <a:solidFill>
+                  <a:srgbClr val="0F172A"/>
+                </a:solidFill>
+                <a:latin typeface="Trebuchet MS" pitchFamily="34" charset="0"/>
+                <a:ea typeface="Trebuchet MS" pitchFamily="34" charset="-122"/>
+                <a:cs typeface="Trebuchet MS" pitchFamily="34" charset="-120"/>
+              </a:rPr>
+              <a:t>92</a:t>
+            </a:r>
+            <a:endParaRPr lang="en-US" sz="1100" dirty="0"/>
+          </a:p>
+        </p:txBody>
+      </p:sp>
+      <p:sp>
+        <p:nvSpPr>
+          <p:cNvPr id="13" name="Text 11"/>
+          <p:cNvSpPr/>
+          <p:nvPr/>
+        </p:nvSpPr>
+        <p:spPr>
+          <a:xfrm>
+            <a:off x="640080" y="2926080"/>
+            <a:ext cx="1371600" cy="292608"/>
+          </a:xfrm>
+          <a:prstGeom prst="rect">
+            <a:avLst/>
+          </a:prstGeom>
+          <a:noFill/>
+          <a:ln/>
+        </p:spPr>
+        <p:txBody>
+          <a:bodyPr wrap="square" lIns="0" tIns="0" rIns="0" bIns="0" rtlCol="0" anchor="ctr"/>
+          <a:lstStyle/>
+          <a:p>
+            <a:pPr indent="0" marL="0">
+              <a:buNone/>
+            </a:pPr>
+            <a:r>
+              <a:rPr lang="en-US" sz="1100" dirty="0">
                 <a:solidFill>
                   <a:srgbClr val="0F172A"/>
                 </a:solidFill>
@@ -6354,27 +5804,205 @@
                 <a:ea typeface="Calibri" pitchFamily="34" charset="-122"/>
                 <a:cs typeface="Calibri" pitchFamily="34" charset="-120"/>
               </a:rPr>
-              <a:t> (Leimbach, Witikon, Hirzenbach, Hottingen, Friesenberg) — über 70 Score-Punkte Abstand zum Zentrum. Die Korrelation Score × Distanz zum HB beträgt </a:t>
-            </a:r>
-            <a:pPr indent="0" marL="0">
-              <a:buNone/>
-            </a:pPr>
-            <a:r>
-              <a:rPr lang="en-US" sz="1400" b="1" dirty="0">
-                <a:solidFill>
-                  <a:srgbClr val="D73027"/>
+              <a:t>Rathaus</a:t>
+            </a:r>
+            <a:endParaRPr lang="en-US" sz="1100" dirty="0"/>
+          </a:p>
+        </p:txBody>
+      </p:sp>
+      <p:sp>
+        <p:nvSpPr>
+          <p:cNvPr id="14" name="Shape 12"/>
+          <p:cNvSpPr/>
+          <p:nvPr/>
+        </p:nvSpPr>
+        <p:spPr>
+          <a:xfrm>
+            <a:off x="2011680" y="2980944"/>
+            <a:ext cx="2103120" cy="201168"/>
+          </a:xfrm>
+          <a:prstGeom prst="rect">
+            <a:avLst/>
+          </a:prstGeom>
+          <a:solidFill>
+            <a:srgbClr val="1A9850"/>
+          </a:solidFill>
+          <a:ln w="12700">
+            <a:solidFill>
+              <a:srgbClr val="1A9850"/>
+            </a:solidFill>
+            <a:prstDash val="solid"/>
+          </a:ln>
+        </p:spPr>
+      </p:sp>
+      <p:sp>
+        <p:nvSpPr>
+          <p:cNvPr id="15" name="Text 13"/>
+          <p:cNvSpPr/>
+          <p:nvPr/>
+        </p:nvSpPr>
+        <p:spPr>
+          <a:xfrm>
+            <a:off x="4160520" y="2926080"/>
+            <a:ext cx="502920" cy="292608"/>
+          </a:xfrm>
+          <a:prstGeom prst="rect">
+            <a:avLst/>
+          </a:prstGeom>
+          <a:noFill/>
+          <a:ln/>
+        </p:spPr>
+        <p:txBody>
+          <a:bodyPr wrap="square" lIns="0" tIns="0" rIns="0" bIns="0" rtlCol="0" anchor="ctr"/>
+          <a:lstStyle/>
+          <a:p>
+            <a:pPr indent="0" marL="0">
+              <a:buNone/>
+            </a:pPr>
+            <a:r>
+              <a:rPr lang="en-US" sz="1100" b="1" dirty="0">
+                <a:solidFill>
+                  <a:srgbClr val="0F172A"/>
+                </a:solidFill>
+                <a:latin typeface="Trebuchet MS" pitchFamily="34" charset="0"/>
+                <a:ea typeface="Trebuchet MS" pitchFamily="34" charset="-122"/>
+                <a:cs typeface="Trebuchet MS" pitchFamily="34" charset="-120"/>
+              </a:rPr>
+              <a:t>92</a:t>
+            </a:r>
+            <a:endParaRPr lang="en-US" sz="1100" dirty="0"/>
+          </a:p>
+        </p:txBody>
+      </p:sp>
+      <p:sp>
+        <p:nvSpPr>
+          <p:cNvPr id="16" name="Text 14"/>
+          <p:cNvSpPr/>
+          <p:nvPr/>
+        </p:nvSpPr>
+        <p:spPr>
+          <a:xfrm>
+            <a:off x="640080" y="3337560"/>
+            <a:ext cx="1371600" cy="292608"/>
+          </a:xfrm>
+          <a:prstGeom prst="rect">
+            <a:avLst/>
+          </a:prstGeom>
+          <a:noFill/>
+          <a:ln/>
+        </p:spPr>
+        <p:txBody>
+          <a:bodyPr wrap="square" lIns="0" tIns="0" rIns="0" bIns="0" rtlCol="0" anchor="ctr"/>
+          <a:lstStyle/>
+          <a:p>
+            <a:pPr indent="0" marL="0">
+              <a:buNone/>
+            </a:pPr>
+            <a:r>
+              <a:rPr lang="en-US" sz="1100" dirty="0">
+                <a:solidFill>
+                  <a:srgbClr val="0F172A"/>
                 </a:solidFill>
                 <a:latin typeface="Calibri" pitchFamily="34" charset="0"/>
                 <a:ea typeface="Calibri" pitchFamily="34" charset="-122"/>
                 <a:cs typeface="Calibri" pitchFamily="34" charset="-120"/>
               </a:rPr>
-              <a:t>ρ = −0.64 (p &lt; 10⁻⁵)</a:t>
-            </a:r>
-            <a:pPr indent="0" marL="0">
-              <a:buNone/>
-            </a:pPr>
-            <a:r>
-              <a:rPr lang="en-US" sz="1400" dirty="0">
+              <a:t>Langstrasse</a:t>
+            </a:r>
+            <a:endParaRPr lang="en-US" sz="1100" dirty="0"/>
+          </a:p>
+        </p:txBody>
+      </p:sp>
+      <p:sp>
+        <p:nvSpPr>
+          <p:cNvPr id="17" name="Shape 15"/>
+          <p:cNvSpPr/>
+          <p:nvPr/>
+        </p:nvSpPr>
+        <p:spPr>
+          <a:xfrm>
+            <a:off x="2011680" y="3392424"/>
+            <a:ext cx="2080260" cy="201168"/>
+          </a:xfrm>
+          <a:prstGeom prst="rect">
+            <a:avLst/>
+          </a:prstGeom>
+          <a:solidFill>
+            <a:srgbClr val="1A9850"/>
+          </a:solidFill>
+          <a:ln w="12700">
+            <a:solidFill>
+              <a:srgbClr val="1A9850"/>
+            </a:solidFill>
+            <a:prstDash val="solid"/>
+          </a:ln>
+        </p:spPr>
+      </p:sp>
+      <p:sp>
+        <p:nvSpPr>
+          <p:cNvPr id="18" name="Text 16"/>
+          <p:cNvSpPr/>
+          <p:nvPr/>
+        </p:nvSpPr>
+        <p:spPr>
+          <a:xfrm>
+            <a:off x="4137660" y="3337560"/>
+            <a:ext cx="502920" cy="292608"/>
+          </a:xfrm>
+          <a:prstGeom prst="rect">
+            <a:avLst/>
+          </a:prstGeom>
+          <a:noFill/>
+          <a:ln/>
+        </p:spPr>
+        <p:txBody>
+          <a:bodyPr wrap="square" lIns="0" tIns="0" rIns="0" bIns="0" rtlCol="0" anchor="ctr"/>
+          <a:lstStyle/>
+          <a:p>
+            <a:pPr indent="0" marL="0">
+              <a:buNone/>
+            </a:pPr>
+            <a:r>
+              <a:rPr lang="en-US" sz="1100" b="1" dirty="0">
+                <a:solidFill>
+                  <a:srgbClr val="0F172A"/>
+                </a:solidFill>
+                <a:latin typeface="Trebuchet MS" pitchFamily="34" charset="0"/>
+                <a:ea typeface="Trebuchet MS" pitchFamily="34" charset="-122"/>
+                <a:cs typeface="Trebuchet MS" pitchFamily="34" charset="-120"/>
+              </a:rPr>
+              <a:t>91</a:t>
+            </a:r>
+            <a:endParaRPr lang="en-US" sz="1100" dirty="0"/>
+          </a:p>
+        </p:txBody>
+      </p:sp>
+      <p:sp>
+        <p:nvSpPr>
+          <p:cNvPr id="19" name="Text 17"/>
+          <p:cNvSpPr/>
+          <p:nvPr/>
+        </p:nvSpPr>
+        <p:spPr>
+          <a:xfrm>
+            <a:off x="640080" y="3749040"/>
+            <a:ext cx="1371600" cy="292608"/>
+          </a:xfrm>
+          <a:prstGeom prst="rect">
+            <a:avLst/>
+          </a:prstGeom>
+          <a:noFill/>
+          <a:ln/>
+        </p:spPr>
+        <p:txBody>
+          <a:bodyPr wrap="square" lIns="0" tIns="0" rIns="0" bIns="0" rtlCol="0" anchor="ctr"/>
+          <a:lstStyle/>
+          <a:p>
+            <a:pPr indent="0" marL="0">
+              <a:buNone/>
+            </a:pPr>
+            <a:r>
+              <a:rPr lang="en-US" sz="1100" dirty="0">
                 <a:solidFill>
                   <a:srgbClr val="0F172A"/>
                 </a:solidFill>
@@ -6382,22 +6010,86 @@
                 <a:ea typeface="Calibri" pitchFamily="34" charset="-122"/>
                 <a:cs typeface="Calibri" pitchFamily="34" charset="-120"/>
               </a:rPr>
-              <a:t> — Zentralität ist ein starker Treiber. Robustheits-Check folgt.</a:t>
-            </a:r>
-            <a:endParaRPr lang="en-US" sz="1400" dirty="0"/>
-          </a:p>
-        </p:txBody>
-      </p:sp>
-      <p:sp>
-        <p:nvSpPr>
-          <p:cNvPr id="7" name="Shape 5"/>
-          <p:cNvSpPr/>
-          <p:nvPr/>
-        </p:nvSpPr>
-        <p:spPr>
-          <a:xfrm>
-            <a:off x="457200" y="2971800"/>
-            <a:ext cx="2606040" cy="1508760"/>
+              <a:t>City</a:t>
+            </a:r>
+            <a:endParaRPr lang="en-US" sz="1100" dirty="0"/>
+          </a:p>
+        </p:txBody>
+      </p:sp>
+      <p:sp>
+        <p:nvSpPr>
+          <p:cNvPr id="20" name="Shape 18"/>
+          <p:cNvSpPr/>
+          <p:nvPr/>
+        </p:nvSpPr>
+        <p:spPr>
+          <a:xfrm>
+            <a:off x="2011680" y="3803904"/>
+            <a:ext cx="2080260" cy="201168"/>
+          </a:xfrm>
+          <a:prstGeom prst="rect">
+            <a:avLst/>
+          </a:prstGeom>
+          <a:solidFill>
+            <a:srgbClr val="1A9850"/>
+          </a:solidFill>
+          <a:ln w="12700">
+            <a:solidFill>
+              <a:srgbClr val="1A9850"/>
+            </a:solidFill>
+            <a:prstDash val="solid"/>
+          </a:ln>
+        </p:spPr>
+      </p:sp>
+      <p:sp>
+        <p:nvSpPr>
+          <p:cNvPr id="21" name="Text 19"/>
+          <p:cNvSpPr/>
+          <p:nvPr/>
+        </p:nvSpPr>
+        <p:spPr>
+          <a:xfrm>
+            <a:off x="4137660" y="3749040"/>
+            <a:ext cx="502920" cy="292608"/>
+          </a:xfrm>
+          <a:prstGeom prst="rect">
+            <a:avLst/>
+          </a:prstGeom>
+          <a:noFill/>
+          <a:ln/>
+        </p:spPr>
+        <p:txBody>
+          <a:bodyPr wrap="square" lIns="0" tIns="0" rIns="0" bIns="0" rtlCol="0" anchor="ctr"/>
+          <a:lstStyle/>
+          <a:p>
+            <a:pPr indent="0" marL="0">
+              <a:buNone/>
+            </a:pPr>
+            <a:r>
+              <a:rPr lang="en-US" sz="1100" b="1" dirty="0">
+                <a:solidFill>
+                  <a:srgbClr val="0F172A"/>
+                </a:solidFill>
+                <a:latin typeface="Trebuchet MS" pitchFamily="34" charset="0"/>
+                <a:ea typeface="Trebuchet MS" pitchFamily="34" charset="-122"/>
+                <a:cs typeface="Trebuchet MS" pitchFamily="34" charset="-120"/>
+              </a:rPr>
+              <a:t>91</a:t>
+            </a:r>
+            <a:endParaRPr lang="en-US" sz="1100" dirty="0"/>
+          </a:p>
+        </p:txBody>
+      </p:sp>
+      <p:sp>
+        <p:nvSpPr>
+          <p:cNvPr id="22" name="Shape 20"/>
+          <p:cNvSpPr/>
+          <p:nvPr/>
+        </p:nvSpPr>
+        <p:spPr>
+          <a:xfrm>
+            <a:off x="4617720" y="1508760"/>
+            <a:ext cx="4114800" cy="3108960"/>
           </a:xfrm>
           <a:prstGeom prst="rect">
             <a:avLst/>
@@ -6422,24 +6114,24 @@
       </p:sp>
       <p:sp>
         <p:nvSpPr>
-          <p:cNvPr id="8" name="Shape 6"/>
-          <p:cNvSpPr/>
-          <p:nvPr/>
-        </p:nvSpPr>
-        <p:spPr>
-          <a:xfrm>
-            <a:off x="457200" y="2971800"/>
-            <a:ext cx="2606040" cy="54864"/>
+          <p:cNvPr id="23" name="Shape 21"/>
+          <p:cNvSpPr/>
+          <p:nvPr/>
+        </p:nvSpPr>
+        <p:spPr>
+          <a:xfrm>
+            <a:off x="4617720" y="1508760"/>
+            <a:ext cx="4114800" cy="54864"/>
           </a:xfrm>
           <a:prstGeom prst="rect">
             <a:avLst/>
           </a:prstGeom>
           <a:solidFill>
-            <a:srgbClr val="1C7293"/>
+            <a:srgbClr val="D73027"/>
           </a:solidFill>
           <a:ln w="12700">
             <a:solidFill>
-              <a:srgbClr val="1C7293"/>
+              <a:srgbClr val="D73027"/>
             </a:solidFill>
             <a:prstDash val="solid"/>
           </a:ln>
@@ -6447,14 +6139,14 @@
       </p:sp>
       <p:sp>
         <p:nvSpPr>
-          <p:cNvPr id="9" name="Text 7"/>
-          <p:cNvSpPr/>
-          <p:nvPr/>
-        </p:nvSpPr>
-        <p:spPr>
-          <a:xfrm>
-            <a:off x="640080" y="3108960"/>
-            <a:ext cx="2286000" cy="320040"/>
+          <p:cNvPr id="24" name="Text 22"/>
+          <p:cNvSpPr/>
+          <p:nvPr/>
+        </p:nvSpPr>
+        <p:spPr>
+          <a:xfrm>
+            <a:off x="4800600" y="1645920"/>
+            <a:ext cx="3749040" cy="320040"/>
           </a:xfrm>
           <a:prstGeom prst="rect">
             <a:avLst/>
@@ -6472,13 +6164,13 @@
             <a:r>
               <a:rPr lang="en-US" sz="1400" b="1" dirty="0">
                 <a:solidFill>
-                  <a:srgbClr val="1C7293"/>
+                  <a:srgbClr val="D73027"/>
                 </a:solidFill>
                 <a:latin typeface="Trebuchet MS" pitchFamily="34" charset="0"/>
                 <a:ea typeface="Trebuchet MS" pitchFamily="34" charset="-122"/>
                 <a:cs typeface="Trebuchet MS" pitchFamily="34" charset="-120"/>
               </a:rPr>
-              <a:t>Stadtplanung</a:t>
+              <a:t>Flop 5 Quartiere</a:t>
             </a:r>
             <a:endParaRPr lang="en-US" sz="1400" dirty="0"/>
           </a:p>
@@ -6486,14 +6178,14 @@
       </p:sp>
       <p:sp>
         <p:nvSpPr>
-          <p:cNvPr id="10" name="Text 8"/>
-          <p:cNvSpPr/>
-          <p:nvPr/>
-        </p:nvSpPr>
-        <p:spPr>
-          <a:xfrm>
-            <a:off x="640080" y="3456432"/>
-            <a:ext cx="2286000" cy="914400"/>
+          <p:cNvPr id="25" name="Text 23"/>
+          <p:cNvSpPr/>
+          <p:nvPr/>
+        </p:nvSpPr>
+        <p:spPr>
+          <a:xfrm>
+            <a:off x="4800600" y="2103120"/>
+            <a:ext cx="1371600" cy="292608"/>
           </a:xfrm>
           <a:prstGeom prst="rect">
             <a:avLst/>
@@ -6517,7 +6209,7 @@
                 <a:ea typeface="Calibri" pitchFamily="34" charset="-122"/>
                 <a:cs typeface="Calibri" pitchFamily="34" charset="-120"/>
               </a:rPr>
-              <a:t>Versorgungs-Auflagen für Entwicklungsgebiete vor der Erstvermietung.</a:t>
+              <a:t>Leimbach</a:t>
             </a:r>
             <a:endParaRPr lang="en-US" sz="1100" dirty="0"/>
           </a:p>
@@ -6525,56 +6217,127 @@
       </p:sp>
       <p:sp>
         <p:nvSpPr>
-          <p:cNvPr id="11" name="Shape 9"/>
-          <p:cNvSpPr/>
-          <p:nvPr/>
-        </p:nvSpPr>
-        <p:spPr>
-          <a:xfrm>
-            <a:off x="3246120" y="2971800"/>
-            <a:ext cx="2606040" cy="1508760"/>
+          <p:cNvPr id="26" name="Shape 24"/>
+          <p:cNvSpPr/>
+          <p:nvPr/>
+        </p:nvSpPr>
+        <p:spPr>
+          <a:xfrm>
+            <a:off x="6172200" y="2157984"/>
+            <a:ext cx="205740" cy="201168"/>
           </a:xfrm>
           <a:prstGeom prst="rect">
             <a:avLst/>
           </a:prstGeom>
           <a:solidFill>
-            <a:srgbClr val="FFFFFF"/>
+            <a:srgbClr val="D73027"/>
           </a:solidFill>
-          <a:ln w="9525">
+          <a:ln w="12700">
             <a:solidFill>
-              <a:srgbClr val="E2E8F0"/>
+              <a:srgbClr val="D73027"/>
             </a:solidFill>
             <a:prstDash val="solid"/>
           </a:ln>
-          <a:effectLst>
-            <a:outerShdw sx="100000" sy="100000" kx="0" ky="0" algn="bl" rotWithShape="0" blurRad="101600" dist="12700" dir="5400000">
-              <a:srgbClr val="94A3B8">
-                <a:alpha val="12000"/>
-              </a:srgbClr>
-            </a:outerShdw>
-          </a:effectLst>
-        </p:spPr>
-      </p:sp>
-      <p:sp>
-        <p:nvSpPr>
-          <p:cNvPr id="12" name="Shape 10"/>
-          <p:cNvSpPr/>
-          <p:nvPr/>
-        </p:nvSpPr>
-        <p:spPr>
-          <a:xfrm>
-            <a:off x="3246120" y="2971800"/>
-            <a:ext cx="2606040" cy="54864"/>
+        </p:spPr>
+      </p:sp>
+      <p:sp>
+        <p:nvSpPr>
+          <p:cNvPr id="27" name="Text 25"/>
+          <p:cNvSpPr/>
+          <p:nvPr/>
+        </p:nvSpPr>
+        <p:spPr>
+          <a:xfrm>
+            <a:off x="6423660" y="2103120"/>
+            <a:ext cx="502920" cy="292608"/>
+          </a:xfrm>
+          <a:prstGeom prst="rect">
+            <a:avLst/>
+          </a:prstGeom>
+          <a:noFill/>
+          <a:ln/>
+        </p:spPr>
+        <p:txBody>
+          <a:bodyPr wrap="square" lIns="0" tIns="0" rIns="0" bIns="0" rtlCol="0" anchor="ctr"/>
+          <a:lstStyle/>
+          <a:p>
+            <a:pPr indent="0" marL="0">
+              <a:buNone/>
+            </a:pPr>
+            <a:r>
+              <a:rPr lang="en-US" sz="1100" b="1" dirty="0">
+                <a:solidFill>
+                  <a:srgbClr val="0F172A"/>
+                </a:solidFill>
+                <a:latin typeface="Trebuchet MS" pitchFamily="34" charset="0"/>
+                <a:ea typeface="Trebuchet MS" pitchFamily="34" charset="-122"/>
+                <a:cs typeface="Trebuchet MS" pitchFamily="34" charset="-120"/>
+              </a:rPr>
+              <a:t>9</a:t>
+            </a:r>
+            <a:endParaRPr lang="en-US" sz="1100" dirty="0"/>
+          </a:p>
+        </p:txBody>
+      </p:sp>
+      <p:sp>
+        <p:nvSpPr>
+          <p:cNvPr id="28" name="Text 26"/>
+          <p:cNvSpPr/>
+          <p:nvPr/>
+        </p:nvSpPr>
+        <p:spPr>
+          <a:xfrm>
+            <a:off x="4800600" y="2514600"/>
+            <a:ext cx="1371600" cy="292608"/>
+          </a:xfrm>
+          <a:prstGeom prst="rect">
+            <a:avLst/>
+          </a:prstGeom>
+          <a:noFill/>
+          <a:ln/>
+        </p:spPr>
+        <p:txBody>
+          <a:bodyPr wrap="square" lIns="0" tIns="0" rIns="0" bIns="0" rtlCol="0" anchor="ctr"/>
+          <a:lstStyle/>
+          <a:p>
+            <a:pPr indent="0" marL="0">
+              <a:buNone/>
+            </a:pPr>
+            <a:r>
+              <a:rPr lang="en-US" sz="1100" dirty="0">
+                <a:solidFill>
+                  <a:srgbClr val="0F172A"/>
+                </a:solidFill>
+                <a:latin typeface="Calibri" pitchFamily="34" charset="0"/>
+                <a:ea typeface="Calibri" pitchFamily="34" charset="-122"/>
+                <a:cs typeface="Calibri" pitchFamily="34" charset="-120"/>
+              </a:rPr>
+              <a:t>Witikon</a:t>
+            </a:r>
+            <a:endParaRPr lang="en-US" sz="1100" dirty="0"/>
+          </a:p>
+        </p:txBody>
+      </p:sp>
+      <p:sp>
+        <p:nvSpPr>
+          <p:cNvPr id="29" name="Shape 27"/>
+          <p:cNvSpPr/>
+          <p:nvPr/>
+        </p:nvSpPr>
+        <p:spPr>
+          <a:xfrm>
+            <a:off x="6172200" y="2569464"/>
+            <a:ext cx="228600" cy="201168"/>
           </a:xfrm>
           <a:prstGeom prst="rect">
             <a:avLst/>
           </a:prstGeom>
           <a:solidFill>
-            <a:srgbClr val="1C7293"/>
+            <a:srgbClr val="D73027"/>
           </a:solidFill>
           <a:ln w="12700">
             <a:solidFill>
-              <a:srgbClr val="1C7293"/>
+              <a:srgbClr val="D73027"/>
             </a:solidFill>
             <a:prstDash val="solid"/>
           </a:ln>
@@ -6582,53 +6345,53 @@
       </p:sp>
       <p:sp>
         <p:nvSpPr>
-          <p:cNvPr id="13" name="Text 11"/>
-          <p:cNvSpPr/>
-          <p:nvPr/>
-        </p:nvSpPr>
-        <p:spPr>
-          <a:xfrm>
-            <a:off x="3429000" y="3108960"/>
-            <a:ext cx="2286000" cy="320040"/>
-          </a:xfrm>
-          <a:prstGeom prst="rect">
-            <a:avLst/>
-          </a:prstGeom>
-          <a:noFill/>
-          <a:ln/>
-        </p:spPr>
-        <p:txBody>
-          <a:bodyPr wrap="square" lIns="0" tIns="0" rIns="0" bIns="0" rtlCol="0" anchor="ctr"/>
-          <a:lstStyle/>
-          <a:p>
-            <a:pPr indent="0" marL="0">
-              <a:buNone/>
-            </a:pPr>
-            <a:r>
-              <a:rPr lang="en-US" sz="1400" b="1" dirty="0">
-                <a:solidFill>
-                  <a:srgbClr val="1C7293"/>
+          <p:cNvPr id="30" name="Text 28"/>
+          <p:cNvSpPr/>
+          <p:nvPr/>
+        </p:nvSpPr>
+        <p:spPr>
+          <a:xfrm>
+            <a:off x="6446520" y="2514600"/>
+            <a:ext cx="502920" cy="292608"/>
+          </a:xfrm>
+          <a:prstGeom prst="rect">
+            <a:avLst/>
+          </a:prstGeom>
+          <a:noFill/>
+          <a:ln/>
+        </p:spPr>
+        <p:txBody>
+          <a:bodyPr wrap="square" lIns="0" tIns="0" rIns="0" bIns="0" rtlCol="0" anchor="ctr"/>
+          <a:lstStyle/>
+          <a:p>
+            <a:pPr indent="0" marL="0">
+              <a:buNone/>
+            </a:pPr>
+            <a:r>
+              <a:rPr lang="en-US" sz="1100" b="1" dirty="0">
+                <a:solidFill>
+                  <a:srgbClr val="0F172A"/>
                 </a:solidFill>
                 <a:latin typeface="Trebuchet MS" pitchFamily="34" charset="0"/>
                 <a:ea typeface="Trebuchet MS" pitchFamily="34" charset="-122"/>
                 <a:cs typeface="Trebuchet MS" pitchFamily="34" charset="-120"/>
               </a:rPr>
-              <a:t>Investoren</a:t>
-            </a:r>
-            <a:endParaRPr lang="en-US" sz="1400" dirty="0"/>
-          </a:p>
-        </p:txBody>
-      </p:sp>
-      <p:sp>
-        <p:nvSpPr>
-          <p:cNvPr id="14" name="Text 12"/>
-          <p:cNvSpPr/>
-          <p:nvPr/>
-        </p:nvSpPr>
-        <p:spPr>
-          <a:xfrm>
-            <a:off x="3429000" y="3456432"/>
-            <a:ext cx="2286000" cy="914400"/>
+              <a:t>10</a:t>
+            </a:r>
+            <a:endParaRPr lang="en-US" sz="1100" dirty="0"/>
+          </a:p>
+        </p:txBody>
+      </p:sp>
+      <p:sp>
+        <p:nvSpPr>
+          <p:cNvPr id="31" name="Text 29"/>
+          <p:cNvSpPr/>
+          <p:nvPr/>
+        </p:nvSpPr>
+        <p:spPr>
+          <a:xfrm>
+            <a:off x="4800600" y="2926080"/>
+            <a:ext cx="1371600" cy="292608"/>
           </a:xfrm>
           <a:prstGeom prst="rect">
             <a:avLst/>
@@ -6652,7 +6415,7 @@
                 <a:ea typeface="Calibri" pitchFamily="34" charset="-122"/>
                 <a:cs typeface="Calibri" pitchFamily="34" charset="-120"/>
               </a:rPr>
-              <a:t>Lagen mit Score &lt; 40 sind preislich Chance, bergen aber Vermarktungsrisiko.</a:t>
+              <a:t>Hirzenbach</a:t>
             </a:r>
             <a:endParaRPr lang="en-US" sz="1100" dirty="0"/>
           </a:p>
@@ -6660,56 +6423,127 @@
       </p:sp>
       <p:sp>
         <p:nvSpPr>
-          <p:cNvPr id="15" name="Shape 13"/>
-          <p:cNvSpPr/>
-          <p:nvPr/>
-        </p:nvSpPr>
-        <p:spPr>
-          <a:xfrm>
-            <a:off x="6035040" y="2971800"/>
-            <a:ext cx="2606040" cy="1508760"/>
+          <p:cNvPr id="32" name="Shape 30"/>
+          <p:cNvSpPr/>
+          <p:nvPr/>
+        </p:nvSpPr>
+        <p:spPr>
+          <a:xfrm>
+            <a:off x="6172200" y="2980944"/>
+            <a:ext cx="434340" cy="201168"/>
           </a:xfrm>
           <a:prstGeom prst="rect">
             <a:avLst/>
           </a:prstGeom>
           <a:solidFill>
-            <a:srgbClr val="FFFFFF"/>
+            <a:srgbClr val="D73027"/>
           </a:solidFill>
-          <a:ln w="9525">
+          <a:ln w="12700">
             <a:solidFill>
-              <a:srgbClr val="E2E8F0"/>
+              <a:srgbClr val="D73027"/>
             </a:solidFill>
             <a:prstDash val="solid"/>
           </a:ln>
-          <a:effectLst>
-            <a:outerShdw sx="100000" sy="100000" kx="0" ky="0" algn="bl" rotWithShape="0" blurRad="101600" dist="12700" dir="5400000">
-              <a:srgbClr val="94A3B8">
-                <a:alpha val="12000"/>
-              </a:srgbClr>
-            </a:outerShdw>
-          </a:effectLst>
-        </p:spPr>
-      </p:sp>
-      <p:sp>
-        <p:nvSpPr>
-          <p:cNvPr id="16" name="Shape 14"/>
-          <p:cNvSpPr/>
-          <p:nvPr/>
-        </p:nvSpPr>
-        <p:spPr>
-          <a:xfrm>
-            <a:off x="6035040" y="2971800"/>
-            <a:ext cx="2606040" cy="54864"/>
+        </p:spPr>
+      </p:sp>
+      <p:sp>
+        <p:nvSpPr>
+          <p:cNvPr id="33" name="Text 31"/>
+          <p:cNvSpPr/>
+          <p:nvPr/>
+        </p:nvSpPr>
+        <p:spPr>
+          <a:xfrm>
+            <a:off x="6652260" y="2926080"/>
+            <a:ext cx="502920" cy="292608"/>
+          </a:xfrm>
+          <a:prstGeom prst="rect">
+            <a:avLst/>
+          </a:prstGeom>
+          <a:noFill/>
+          <a:ln/>
+        </p:spPr>
+        <p:txBody>
+          <a:bodyPr wrap="square" lIns="0" tIns="0" rIns="0" bIns="0" rtlCol="0" anchor="ctr"/>
+          <a:lstStyle/>
+          <a:p>
+            <a:pPr indent="0" marL="0">
+              <a:buNone/>
+            </a:pPr>
+            <a:r>
+              <a:rPr lang="en-US" sz="1100" b="1" dirty="0">
+                <a:solidFill>
+                  <a:srgbClr val="0F172A"/>
+                </a:solidFill>
+                <a:latin typeface="Trebuchet MS" pitchFamily="34" charset="0"/>
+                <a:ea typeface="Trebuchet MS" pitchFamily="34" charset="-122"/>
+                <a:cs typeface="Trebuchet MS" pitchFamily="34" charset="-120"/>
+              </a:rPr>
+              <a:t>19</a:t>
+            </a:r>
+            <a:endParaRPr lang="en-US" sz="1100" dirty="0"/>
+          </a:p>
+        </p:txBody>
+      </p:sp>
+      <p:sp>
+        <p:nvSpPr>
+          <p:cNvPr id="34" name="Text 32"/>
+          <p:cNvSpPr/>
+          <p:nvPr/>
+        </p:nvSpPr>
+        <p:spPr>
+          <a:xfrm>
+            <a:off x="4800600" y="3337560"/>
+            <a:ext cx="1371600" cy="292608"/>
+          </a:xfrm>
+          <a:prstGeom prst="rect">
+            <a:avLst/>
+          </a:prstGeom>
+          <a:noFill/>
+          <a:ln/>
+        </p:spPr>
+        <p:txBody>
+          <a:bodyPr wrap="square" lIns="0" tIns="0" rIns="0" bIns="0" rtlCol="0" anchor="ctr"/>
+          <a:lstStyle/>
+          <a:p>
+            <a:pPr indent="0" marL="0">
+              <a:buNone/>
+            </a:pPr>
+            <a:r>
+              <a:rPr lang="en-US" sz="1100" dirty="0">
+                <a:solidFill>
+                  <a:srgbClr val="0F172A"/>
+                </a:solidFill>
+                <a:latin typeface="Calibri" pitchFamily="34" charset="0"/>
+                <a:ea typeface="Calibri" pitchFamily="34" charset="-122"/>
+                <a:cs typeface="Calibri" pitchFamily="34" charset="-120"/>
+              </a:rPr>
+              <a:t>Affoltern</a:t>
+            </a:r>
+            <a:endParaRPr lang="en-US" sz="1100" dirty="0"/>
+          </a:p>
+        </p:txBody>
+      </p:sp>
+      <p:sp>
+        <p:nvSpPr>
+          <p:cNvPr id="35" name="Shape 33"/>
+          <p:cNvSpPr/>
+          <p:nvPr/>
+        </p:nvSpPr>
+        <p:spPr>
+          <a:xfrm>
+            <a:off x="6172200" y="3392424"/>
+            <a:ext cx="434340" cy="201168"/>
           </a:xfrm>
           <a:prstGeom prst="rect">
             <a:avLst/>
           </a:prstGeom>
           <a:solidFill>
-            <a:srgbClr val="1C7293"/>
+            <a:srgbClr val="D73027"/>
           </a:solidFill>
           <a:ln w="12700">
             <a:solidFill>
-              <a:srgbClr val="1C7293"/>
+              <a:srgbClr val="D73027"/>
             </a:solidFill>
             <a:prstDash val="solid"/>
           </a:ln>
@@ -6717,53 +6551,53 @@
       </p:sp>
       <p:sp>
         <p:nvSpPr>
-          <p:cNvPr id="17" name="Text 15"/>
-          <p:cNvSpPr/>
-          <p:nvPr/>
-        </p:nvSpPr>
-        <p:spPr>
-          <a:xfrm>
-            <a:off x="6217920" y="3108960"/>
-            <a:ext cx="2286000" cy="320040"/>
-          </a:xfrm>
-          <a:prstGeom prst="rect">
-            <a:avLst/>
-          </a:prstGeom>
-          <a:noFill/>
-          <a:ln/>
-        </p:spPr>
-        <p:txBody>
-          <a:bodyPr wrap="square" lIns="0" tIns="0" rIns="0" bIns="0" rtlCol="0" anchor="ctr"/>
-          <a:lstStyle/>
-          <a:p>
-            <a:pPr indent="0" marL="0">
-              <a:buNone/>
-            </a:pPr>
-            <a:r>
-              <a:rPr lang="en-US" sz="1400" b="1" dirty="0">
-                <a:solidFill>
-                  <a:srgbClr val="1C7293"/>
+          <p:cNvPr id="36" name="Text 34"/>
+          <p:cNvSpPr/>
+          <p:nvPr/>
+        </p:nvSpPr>
+        <p:spPr>
+          <a:xfrm>
+            <a:off x="6652260" y="3337560"/>
+            <a:ext cx="502920" cy="292608"/>
+          </a:xfrm>
+          <a:prstGeom prst="rect">
+            <a:avLst/>
+          </a:prstGeom>
+          <a:noFill/>
+          <a:ln/>
+        </p:spPr>
+        <p:txBody>
+          <a:bodyPr wrap="square" lIns="0" tIns="0" rIns="0" bIns="0" rtlCol="0" anchor="ctr"/>
+          <a:lstStyle/>
+          <a:p>
+            <a:pPr indent="0" marL="0">
+              <a:buNone/>
+            </a:pPr>
+            <a:r>
+              <a:rPr lang="en-US" sz="1100" b="1" dirty="0">
+                <a:solidFill>
+                  <a:srgbClr val="0F172A"/>
                 </a:solidFill>
                 <a:latin typeface="Trebuchet MS" pitchFamily="34" charset="0"/>
                 <a:ea typeface="Trebuchet MS" pitchFamily="34" charset="-122"/>
                 <a:cs typeface="Trebuchet MS" pitchFamily="34" charset="-120"/>
               </a:rPr>
-              <a:t>Einzelhandel</a:t>
-            </a:r>
-            <a:endParaRPr lang="en-US" sz="1400" dirty="0"/>
-          </a:p>
-        </p:txBody>
-      </p:sp>
-      <p:sp>
-        <p:nvSpPr>
-          <p:cNvPr id="18" name="Text 16"/>
-          <p:cNvSpPr/>
-          <p:nvPr/>
-        </p:nvSpPr>
-        <p:spPr>
-          <a:xfrm>
-            <a:off x="6217920" y="3456432"/>
-            <a:ext cx="2286000" cy="914400"/>
+              <a:t>19</a:t>
+            </a:r>
+            <a:endParaRPr lang="en-US" sz="1100" dirty="0"/>
+          </a:p>
+        </p:txBody>
+      </p:sp>
+      <p:sp>
+        <p:nvSpPr>
+          <p:cNvPr id="37" name="Text 35"/>
+          <p:cNvSpPr/>
+          <p:nvPr/>
+        </p:nvSpPr>
+        <p:spPr>
+          <a:xfrm>
+            <a:off x="4800600" y="3749040"/>
+            <a:ext cx="1371600" cy="292608"/>
           </a:xfrm>
           <a:prstGeom prst="rect">
             <a:avLst/>
@@ -6787,7 +6621,7 @@
                 <a:ea typeface="Calibri" pitchFamily="34" charset="-122"/>
                 <a:cs typeface="Calibri" pitchFamily="34" charset="-120"/>
               </a:rPr>
-              <a:t>Wüsten-Quartiere = priorisierte Standorte für Nahversorger-Expansion.</a:t>
+              <a:t>Friesenberg</a:t>
             </a:r>
             <a:endParaRPr lang="en-US" sz="1100" dirty="0"/>
           </a:p>
@@ -6795,26 +6629,90 @@
       </p:sp>
       <p:sp>
         <p:nvSpPr>
-          <p:cNvPr id="19" name="Text 17"/>
-          <p:cNvSpPr/>
-          <p:nvPr/>
-        </p:nvSpPr>
-        <p:spPr>
-          <a:xfrm>
-            <a:off x="8229600" y="4846320"/>
-            <a:ext cx="822960" cy="228600"/>
-          </a:xfrm>
-          <a:prstGeom prst="rect">
-            <a:avLst/>
-          </a:prstGeom>
-          <a:noFill/>
-          <a:ln/>
-        </p:spPr>
-        <p:txBody>
-          <a:bodyPr wrap="square" lIns="0" tIns="0" rIns="0" bIns="0" rtlCol="0" anchor="ctr"/>
-          <a:lstStyle/>
-          <a:p>
-            <a:pPr algn="r" indent="0" marL="0">
+          <p:cNvPr id="38" name="Shape 36"/>
+          <p:cNvSpPr/>
+          <p:nvPr/>
+        </p:nvSpPr>
+        <p:spPr>
+          <a:xfrm>
+            <a:off x="6172200" y="3803904"/>
+            <a:ext cx="434340" cy="201168"/>
+          </a:xfrm>
+          <a:prstGeom prst="rect">
+            <a:avLst/>
+          </a:prstGeom>
+          <a:solidFill>
+            <a:srgbClr val="D73027"/>
+          </a:solidFill>
+          <a:ln w="12700">
+            <a:solidFill>
+              <a:srgbClr val="D73027"/>
+            </a:solidFill>
+            <a:prstDash val="solid"/>
+          </a:ln>
+        </p:spPr>
+      </p:sp>
+      <p:sp>
+        <p:nvSpPr>
+          <p:cNvPr id="39" name="Text 37"/>
+          <p:cNvSpPr/>
+          <p:nvPr/>
+        </p:nvSpPr>
+        <p:spPr>
+          <a:xfrm>
+            <a:off x="6652260" y="3749040"/>
+            <a:ext cx="502920" cy="292608"/>
+          </a:xfrm>
+          <a:prstGeom prst="rect">
+            <a:avLst/>
+          </a:prstGeom>
+          <a:noFill/>
+          <a:ln/>
+        </p:spPr>
+        <p:txBody>
+          <a:bodyPr wrap="square" lIns="0" tIns="0" rIns="0" bIns="0" rtlCol="0" anchor="ctr"/>
+          <a:lstStyle/>
+          <a:p>
+            <a:pPr indent="0" marL="0">
+              <a:buNone/>
+            </a:pPr>
+            <a:r>
+              <a:rPr lang="en-US" sz="1100" b="1" dirty="0">
+                <a:solidFill>
+                  <a:srgbClr val="0F172A"/>
+                </a:solidFill>
+                <a:latin typeface="Trebuchet MS" pitchFamily="34" charset="0"/>
+                <a:ea typeface="Trebuchet MS" pitchFamily="34" charset="-122"/>
+                <a:cs typeface="Trebuchet MS" pitchFamily="34" charset="-120"/>
+              </a:rPr>
+              <a:t>19</a:t>
+            </a:r>
+            <a:endParaRPr lang="en-US" sz="1100" dirty="0"/>
+          </a:p>
+        </p:txBody>
+      </p:sp>
+      <p:sp>
+        <p:nvSpPr>
+          <p:cNvPr id="40" name="Text 38"/>
+          <p:cNvSpPr/>
+          <p:nvPr/>
+        </p:nvSpPr>
+        <p:spPr>
+          <a:xfrm>
+            <a:off x="365760" y="4846320"/>
+            <a:ext cx="7315200" cy="228600"/>
+          </a:xfrm>
+          <a:prstGeom prst="rect">
+            <a:avLst/>
+          </a:prstGeom>
+          <a:noFill/>
+          <a:ln/>
+        </p:spPr>
+        <p:txBody>
+          <a:bodyPr wrap="square" lIns="0" tIns="0" rIns="0" bIns="0" rtlCol="0" anchor="ctr"/>
+          <a:lstStyle/>
+          <a:p>
+            <a:pPr algn="l" indent="0" marL="0">
               <a:buNone/>
             </a:pPr>
             <a:r>
@@ -6826,7 +6724,46 @@
                 <a:ea typeface="Calibri" pitchFamily="34" charset="-122"/>
                 <a:cs typeface="Calibri" pitchFamily="34" charset="-120"/>
               </a:rPr>
-              <a:t>14 / 17</a:t>
+              <a:t>Score-Mittelwert je Quartier · Gesamt-Range 9 – 92 · n = 34 (alle offiziellen Quartiere)</a:t>
+            </a:r>
+            <a:endParaRPr lang="en-US" sz="900" dirty="0"/>
+          </a:p>
+        </p:txBody>
+      </p:sp>
+      <p:sp>
+        <p:nvSpPr>
+          <p:cNvPr id="41" name="Text 39"/>
+          <p:cNvSpPr/>
+          <p:nvPr/>
+        </p:nvSpPr>
+        <p:spPr>
+          <a:xfrm>
+            <a:off x="8229600" y="4846320"/>
+            <a:ext cx="822960" cy="228600"/>
+          </a:xfrm>
+          <a:prstGeom prst="rect">
+            <a:avLst/>
+          </a:prstGeom>
+          <a:noFill/>
+          <a:ln/>
+        </p:spPr>
+        <p:txBody>
+          <a:bodyPr wrap="square" lIns="0" tIns="0" rIns="0" bIns="0" rtlCol="0" anchor="ctr"/>
+          <a:lstStyle/>
+          <a:p>
+            <a:pPr algn="r" indent="0" marL="0">
+              <a:buNone/>
+            </a:pPr>
+            <a:r>
+              <a:rPr lang="en-US" sz="900" dirty="0">
+                <a:solidFill>
+                  <a:srgbClr val="64748B"/>
+                </a:solidFill>
+                <a:latin typeface="Calibri" pitchFamily="34" charset="0"/>
+                <a:ea typeface="Calibri" pitchFamily="34" charset="-122"/>
+                <a:cs typeface="Calibri" pitchFamily="34" charset="-120"/>
+              </a:rPr>
+              <a:t>14 / 19</a:t>
             </a:r>
             <a:endParaRPr lang="en-US" sz="900" dirty="0"/>
           </a:p>
@@ -6897,7 +6834,7 @@
                 <a:ea typeface="Trebuchet MS" pitchFamily="34" charset="-122"/>
                 <a:cs typeface="Trebuchet MS" pitchFamily="34" charset="-120"/>
               </a:rPr>
-              <a:t>DISKUSSION · 2/2</a:t>
+              <a:t>ERGEBNISSE · 5/5</a:t>
             </a:r>
             <a:endParaRPr lang="en-US" sz="1100" dirty="0"/>
           </a:p>
@@ -6936,7 +6873,7 @@
                 <a:ea typeface="Trebuchet MS" pitchFamily="34" charset="-122"/>
                 <a:cs typeface="Trebuchet MS" pitchFamily="34" charset="-120"/>
               </a:rPr>
-              <a:t>Robustness Check — H1 hält stand</a:t>
+              <a:t>Quartier-Typologie via K-Means</a:t>
             </a:r>
             <a:endParaRPr lang="en-US" sz="3000" dirty="0"/>
           </a:p>
@@ -6944,14 +6881,81 @@
       </p:sp>
       <p:sp>
         <p:nvSpPr>
-          <p:cNvPr id="4" name="Shape 2"/>
-          <p:cNvSpPr/>
-          <p:nvPr/>
-        </p:nvSpPr>
-        <p:spPr>
-          <a:xfrm>
-            <a:off x="457200" y="1508760"/>
-            <a:ext cx="4937760" cy="3108960"/>
+          <p:cNvPr id="4" name="Text 2"/>
+          <p:cNvSpPr/>
+          <p:nvPr/>
+        </p:nvSpPr>
+        <p:spPr>
+          <a:xfrm>
+            <a:off x="457200" y="1417320"/>
+            <a:ext cx="8229600" cy="502920"/>
+          </a:xfrm>
+          <a:prstGeom prst="rect">
+            <a:avLst/>
+          </a:prstGeom>
+          <a:noFill/>
+          <a:ln/>
+        </p:spPr>
+        <p:txBody>
+          <a:bodyPr wrap="square" lIns="0" tIns="0" rIns="0" bIns="0" rtlCol="0" anchor="ctr"/>
+          <a:lstStyle/>
+          <a:p>
+            <a:pPr indent="0" marL="0">
+              <a:buNone/>
+            </a:pPr>
+            <a:r>
+              <a:rPr lang="en-US" sz="1300" dirty="0">
+                <a:solidFill>
+                  <a:srgbClr val="0F172A"/>
+                </a:solidFill>
+                <a:latin typeface="Calibri" pitchFamily="34" charset="0"/>
+                <a:ea typeface="Calibri" pitchFamily="34" charset="-122"/>
+                <a:cs typeface="Calibri" pitchFamily="34" charset="-120"/>
+              </a:rPr>
+              <a:t>Clustering der 28 Quartiere auf den </a:t>
+            </a:r>
+            <a:pPr indent="0" marL="0">
+              <a:buNone/>
+            </a:pPr>
+            <a:r>
+              <a:rPr lang="en-US" sz="1300" b="1" dirty="0">
+                <a:solidFill>
+                  <a:srgbClr val="0F172A"/>
+                </a:solidFill>
+                <a:latin typeface="Calibri" pitchFamily="34" charset="0"/>
+                <a:ea typeface="Calibri" pitchFamily="34" charset="-122"/>
+                <a:cs typeface="Calibri" pitchFamily="34" charset="-120"/>
+              </a:rPr>
+              <a:t>sechs Kategorie-Erreichbarkeiten</a:t>
+            </a:r>
+            <a:pPr indent="0" marL="0">
+              <a:buNone/>
+            </a:pPr>
+            <a:r>
+              <a:rPr lang="en-US" sz="1300" dirty="0">
+                <a:solidFill>
+                  <a:srgbClr val="0F172A"/>
+                </a:solidFill>
+                <a:latin typeface="Calibri" pitchFamily="34" charset="0"/>
+                <a:ea typeface="Calibri" pitchFamily="34" charset="-122"/>
+                <a:cs typeface="Calibri" pitchFamily="34" charset="-120"/>
+              </a:rPr>
+              <a:t> (statt nur Total-Score) ergibt eine vier-typische Zürcher Quartier-Landschaft:</a:t>
+            </a:r>
+            <a:endParaRPr lang="en-US" sz="1300" dirty="0"/>
+          </a:p>
+        </p:txBody>
+      </p:sp>
+      <p:sp>
+        <p:nvSpPr>
+          <p:cNvPr id="5" name="Shape 3"/>
+          <p:cNvSpPr/>
+          <p:nvPr/>
+        </p:nvSpPr>
+        <p:spPr>
+          <a:xfrm>
+            <a:off x="457200" y="2057400"/>
+            <a:ext cx="4023360" cy="1188720"/>
           </a:xfrm>
           <a:prstGeom prst="rect">
             <a:avLst/>
@@ -6976,24 +6980,24 @@
       </p:sp>
       <p:sp>
         <p:nvSpPr>
-          <p:cNvPr id="5" name="Shape 3"/>
-          <p:cNvSpPr/>
-          <p:nvPr/>
-        </p:nvSpPr>
-        <p:spPr>
-          <a:xfrm>
-            <a:off x="457200" y="1508760"/>
-            <a:ext cx="4937760" cy="54864"/>
+          <p:cNvPr id="6" name="Shape 4"/>
+          <p:cNvSpPr/>
+          <p:nvPr/>
+        </p:nvSpPr>
+        <p:spPr>
+          <a:xfrm>
+            <a:off x="457200" y="2057400"/>
+            <a:ext cx="4023360" cy="54864"/>
           </a:xfrm>
           <a:prstGeom prst="rect">
             <a:avLst/>
           </a:prstGeom>
           <a:solidFill>
-            <a:srgbClr val="065A82"/>
+            <a:srgbClr val="1A9850"/>
           </a:solidFill>
           <a:ln w="12700">
             <a:solidFill>
-              <a:srgbClr val="065A82"/>
+              <a:srgbClr val="1A9850"/>
             </a:solidFill>
             <a:prstDash val="solid"/>
           </a:ln>
@@ -7001,196 +7005,143 @@
       </p:sp>
       <p:sp>
         <p:nvSpPr>
-          <p:cNvPr id="6" name="Text 4"/>
-          <p:cNvSpPr/>
-          <p:nvPr/>
-        </p:nvSpPr>
-        <p:spPr>
-          <a:xfrm>
-            <a:off x="640080" y="1645920"/>
-            <a:ext cx="4572000" cy="320040"/>
-          </a:xfrm>
-          <a:prstGeom prst="rect">
-            <a:avLst/>
-          </a:prstGeom>
-          <a:noFill/>
-          <a:ln/>
-        </p:spPr>
-        <p:txBody>
-          <a:bodyPr wrap="square" lIns="0" tIns="0" rIns="0" bIns="0" rtlCol="0" anchor="ctr"/>
-          <a:lstStyle/>
-          <a:p>
-            <a:pPr indent="0" marL="0">
-              <a:buNone/>
-            </a:pPr>
-            <a:r>
-              <a:rPr lang="en-US" sz="1300" b="1" dirty="0">
-                <a:solidFill>
-                  <a:srgbClr val="065A82"/>
+          <p:cNvPr id="7" name="Shape 5"/>
+          <p:cNvSpPr/>
+          <p:nvPr/>
+        </p:nvSpPr>
+        <p:spPr>
+          <a:xfrm>
+            <a:off x="594360" y="2194560"/>
+            <a:ext cx="640080" cy="292608"/>
+          </a:xfrm>
+          <a:prstGeom prst="rect">
+            <a:avLst/>
+          </a:prstGeom>
+          <a:solidFill>
+            <a:srgbClr val="1A9850"/>
+          </a:solidFill>
+          <a:ln w="12700">
+            <a:solidFill>
+              <a:srgbClr val="1A9850"/>
+            </a:solidFill>
+            <a:prstDash val="solid"/>
+          </a:ln>
+        </p:spPr>
+      </p:sp>
+      <p:sp>
+        <p:nvSpPr>
+          <p:cNvPr id="8" name="Text 6"/>
+          <p:cNvSpPr/>
+          <p:nvPr/>
+        </p:nvSpPr>
+        <p:spPr>
+          <a:xfrm>
+            <a:off x="594360" y="2194560"/>
+            <a:ext cx="640080" cy="292608"/>
+          </a:xfrm>
+          <a:prstGeom prst="rect">
+            <a:avLst/>
+          </a:prstGeom>
+          <a:noFill/>
+          <a:ln/>
+        </p:spPr>
+        <p:txBody>
+          <a:bodyPr wrap="square" lIns="0" tIns="0" rIns="0" bIns="0" rtlCol="0" anchor="ctr"/>
+          <a:lstStyle/>
+          <a:p>
+            <a:pPr algn="ctr" indent="0" marL="0">
+              <a:buNone/>
+            </a:pPr>
+            <a:r>
+              <a:rPr lang="en-US" sz="1100" b="1" dirty="0">
+                <a:solidFill>
+                  <a:srgbClr val="FFFFFF"/>
                 </a:solidFill>
                 <a:latin typeface="Trebuchet MS" pitchFamily="34" charset="0"/>
                 <a:ea typeface="Trebuchet MS" pitchFamily="34" charset="-122"/>
                 <a:cs typeface="Trebuchet MS" pitchFamily="34" charset="-120"/>
               </a:rPr>
-              <a:t>Multi-Variate-Regression  (n = 44, R² = 0.75)</a:t>
-            </a:r>
-            <a:endParaRPr lang="en-US" sz="1300" dirty="0"/>
-          </a:p>
-        </p:txBody>
-      </p:sp>
-      <p:sp>
-        <p:nvSpPr>
-          <p:cNvPr id="7" name="Text 5"/>
-          <p:cNvSpPr/>
-          <p:nvPr/>
-        </p:nvSpPr>
-        <p:spPr>
-          <a:xfrm>
-            <a:off x="640080" y="2057400"/>
-            <a:ext cx="1463040" cy="274320"/>
-          </a:xfrm>
-          <a:prstGeom prst="rect">
-            <a:avLst/>
-          </a:prstGeom>
-          <a:noFill/>
-          <a:ln/>
-        </p:spPr>
-        <p:txBody>
-          <a:bodyPr wrap="square" lIns="0" tIns="0" rIns="0" bIns="0" rtlCol="0" anchor="ctr"/>
-          <a:lstStyle/>
-          <a:p>
-            <a:pPr indent="0" marL="0">
-              <a:buNone/>
-            </a:pPr>
-            <a:r>
-              <a:rPr lang="en-US" sz="1000" b="1" dirty="0">
-                <a:solidFill>
-                  <a:srgbClr val="64748B"/>
+              <a:t>Typ A</a:t>
+            </a:r>
+            <a:endParaRPr lang="en-US" sz="1100" dirty="0"/>
+          </a:p>
+        </p:txBody>
+      </p:sp>
+      <p:sp>
+        <p:nvSpPr>
+          <p:cNvPr id="9" name="Text 7"/>
+          <p:cNvSpPr/>
+          <p:nvPr/>
+        </p:nvSpPr>
+        <p:spPr>
+          <a:xfrm>
+            <a:off x="1325880" y="2176272"/>
+            <a:ext cx="2377440" cy="292608"/>
+          </a:xfrm>
+          <a:prstGeom prst="rect">
+            <a:avLst/>
+          </a:prstGeom>
+          <a:noFill/>
+          <a:ln/>
+        </p:spPr>
+        <p:txBody>
+          <a:bodyPr wrap="square" lIns="0" tIns="0" rIns="0" bIns="0" rtlCol="0" anchor="ctr"/>
+          <a:lstStyle/>
+          <a:p>
+            <a:pPr indent="0" marL="0">
+              <a:buNone/>
+            </a:pPr>
+            <a:r>
+              <a:rPr lang="en-US" sz="1350" b="1" dirty="0">
+                <a:solidFill>
+                  <a:srgbClr val="1A9850"/>
                 </a:solidFill>
                 <a:latin typeface="Trebuchet MS" pitchFamily="34" charset="0"/>
                 <a:ea typeface="Trebuchet MS" pitchFamily="34" charset="-122"/>
                 <a:cs typeface="Trebuchet MS" pitchFamily="34" charset="-120"/>
               </a:rPr>
-              <a:t>Prädiktor</a:t>
-            </a:r>
-            <a:endParaRPr lang="en-US" sz="1000" dirty="0"/>
-          </a:p>
-        </p:txBody>
-      </p:sp>
-      <p:sp>
-        <p:nvSpPr>
-          <p:cNvPr id="8" name="Text 6"/>
-          <p:cNvSpPr/>
-          <p:nvPr/>
-        </p:nvSpPr>
-        <p:spPr>
-          <a:xfrm>
-            <a:off x="2103120" y="2057400"/>
-            <a:ext cx="868680" cy="274320"/>
-          </a:xfrm>
-          <a:prstGeom prst="rect">
-            <a:avLst/>
-          </a:prstGeom>
-          <a:noFill/>
-          <a:ln/>
-        </p:spPr>
-        <p:txBody>
-          <a:bodyPr wrap="square" lIns="0" tIns="0" rIns="0" bIns="0" rtlCol="0" anchor="ctr"/>
-          <a:lstStyle/>
-          <a:p>
-            <a:pPr indent="0" marL="0">
-              <a:buNone/>
-            </a:pPr>
-            <a:r>
-              <a:rPr lang="en-US" sz="1000" b="1" dirty="0">
-                <a:solidFill>
-                  <a:srgbClr val="64748B"/>
+              <a:t>Zentrale Mischung</a:t>
+            </a:r>
+            <a:endParaRPr lang="en-US" sz="1350" dirty="0"/>
+          </a:p>
+        </p:txBody>
+      </p:sp>
+      <p:sp>
+        <p:nvSpPr>
+          <p:cNvPr id="10" name="Text 8"/>
+          <p:cNvSpPr/>
+          <p:nvPr/>
+        </p:nvSpPr>
+        <p:spPr>
+          <a:xfrm>
+            <a:off x="3703320" y="2176272"/>
+            <a:ext cx="731520" cy="292608"/>
+          </a:xfrm>
+          <a:prstGeom prst="rect">
+            <a:avLst/>
+          </a:prstGeom>
+          <a:noFill/>
+          <a:ln/>
+        </p:spPr>
+        <p:txBody>
+          <a:bodyPr wrap="square" lIns="0" tIns="0" rIns="0" bIns="0" rtlCol="0" anchor="ctr"/>
+          <a:lstStyle/>
+          <a:p>
+            <a:pPr algn="r" indent="0" marL="0">
+              <a:buNone/>
+            </a:pPr>
+            <a:r>
+              <a:rPr lang="en-US" sz="1100" b="1" dirty="0">
+                <a:solidFill>
+                  <a:srgbClr val="1A9850"/>
                 </a:solidFill>
                 <a:latin typeface="Trebuchet MS" pitchFamily="34" charset="0"/>
                 <a:ea typeface="Trebuchet MS" pitchFamily="34" charset="-122"/>
                 <a:cs typeface="Trebuchet MS" pitchFamily="34" charset="-120"/>
               </a:rPr>
-              <a:t>bivar. r</a:t>
-            </a:r>
-            <a:endParaRPr lang="en-US" sz="1000" dirty="0"/>
-          </a:p>
-        </p:txBody>
-      </p:sp>
-      <p:sp>
-        <p:nvSpPr>
-          <p:cNvPr id="9" name="Text 7"/>
-          <p:cNvSpPr/>
-          <p:nvPr/>
-        </p:nvSpPr>
-        <p:spPr>
-          <a:xfrm>
-            <a:off x="2971800" y="2057400"/>
-            <a:ext cx="868680" cy="274320"/>
-          </a:xfrm>
-          <a:prstGeom prst="rect">
-            <a:avLst/>
-          </a:prstGeom>
-          <a:noFill/>
-          <a:ln/>
-        </p:spPr>
-        <p:txBody>
-          <a:bodyPr wrap="square" lIns="0" tIns="0" rIns="0" bIns="0" rtlCol="0" anchor="ctr"/>
-          <a:lstStyle/>
-          <a:p>
-            <a:pPr indent="0" marL="0">
-              <a:buNone/>
-            </a:pPr>
-            <a:r>
-              <a:rPr lang="en-US" sz="1000" b="1" dirty="0">
-                <a:solidFill>
-                  <a:srgbClr val="64748B"/>
-                </a:solidFill>
-                <a:latin typeface="Trebuchet MS" pitchFamily="34" charset="0"/>
-                <a:ea typeface="Trebuchet MS" pitchFamily="34" charset="-122"/>
-                <a:cs typeface="Trebuchet MS" pitchFamily="34" charset="-120"/>
-              </a:rPr>
-              <a:t>partiell β</a:t>
-            </a:r>
-            <a:endParaRPr lang="en-US" sz="1000" dirty="0"/>
-          </a:p>
-        </p:txBody>
-      </p:sp>
-      <p:sp>
-        <p:nvSpPr>
-          <p:cNvPr id="10" name="Text 8"/>
-          <p:cNvSpPr/>
-          <p:nvPr/>
-        </p:nvSpPr>
-        <p:spPr>
-          <a:xfrm>
-            <a:off x="3840480" y="2057400"/>
-            <a:ext cx="868680" cy="274320"/>
-          </a:xfrm>
-          <a:prstGeom prst="rect">
-            <a:avLst/>
-          </a:prstGeom>
-          <a:noFill/>
-          <a:ln/>
-        </p:spPr>
-        <p:txBody>
-          <a:bodyPr wrap="square" lIns="0" tIns="0" rIns="0" bIns="0" rtlCol="0" anchor="ctr"/>
-          <a:lstStyle/>
-          <a:p>
-            <a:pPr indent="0" marL="0">
-              <a:buNone/>
-            </a:pPr>
-            <a:r>
-              <a:rPr lang="en-US" sz="1000" b="1" dirty="0">
-                <a:solidFill>
-                  <a:srgbClr val="64748B"/>
-                </a:solidFill>
-                <a:latin typeface="Trebuchet MS" pitchFamily="34" charset="0"/>
-                <a:ea typeface="Trebuchet MS" pitchFamily="34" charset="-122"/>
-                <a:cs typeface="Trebuchet MS" pitchFamily="34" charset="-120"/>
-              </a:rPr>
-              <a:t>p-Wert</a:t>
-            </a:r>
-            <a:endParaRPr lang="en-US" sz="1000" dirty="0"/>
+              <a:t>⌀ 90  ·  n = 7</a:t>
+            </a:r>
+            <a:endParaRPr lang="en-US" sz="1100" dirty="0"/>
           </a:p>
         </p:txBody>
       </p:sp>
@@ -7202,63 +7153,24 @@
         </p:nvSpPr>
         <p:spPr>
           <a:xfrm>
-            <a:off x="4709160" y="2057400"/>
-            <a:ext cx="640080" cy="274320"/>
-          </a:xfrm>
-          <a:prstGeom prst="rect">
-            <a:avLst/>
-          </a:prstGeom>
-          <a:noFill/>
-          <a:ln/>
-        </p:spPr>
-        <p:txBody>
-          <a:bodyPr wrap="square" lIns="0" tIns="0" rIns="0" bIns="0" rtlCol="0" anchor="ctr"/>
-          <a:lstStyle/>
-          <a:p>
-            <a:pPr indent="0" marL="0">
-              <a:buNone/>
-            </a:pPr>
-            <a:r>
-              <a:rPr lang="en-US" sz="1000" b="1" dirty="0">
-                <a:solidFill>
-                  <a:srgbClr val="64748B"/>
-                </a:solidFill>
-                <a:latin typeface="Trebuchet MS" pitchFamily="34" charset="0"/>
-                <a:ea typeface="Trebuchet MS" pitchFamily="34" charset="-122"/>
-                <a:cs typeface="Trebuchet MS" pitchFamily="34" charset="-120"/>
-              </a:rPr>
-              <a:t>Status</a:t>
-            </a:r>
-            <a:endParaRPr lang="en-US" sz="1000" dirty="0"/>
-          </a:p>
-        </p:txBody>
-      </p:sp>
-      <p:sp>
-        <p:nvSpPr>
-          <p:cNvPr id="12" name="Text 10"/>
-          <p:cNvSpPr/>
-          <p:nvPr/>
-        </p:nvSpPr>
-        <p:spPr>
-          <a:xfrm>
-            <a:off x="640080" y="2423160"/>
-            <a:ext cx="1463040" cy="292608"/>
-          </a:xfrm>
-          <a:prstGeom prst="rect">
-            <a:avLst/>
-          </a:prstGeom>
-          <a:noFill/>
-          <a:ln/>
-        </p:spPr>
-        <p:txBody>
-          <a:bodyPr wrap="square" lIns="0" tIns="0" rIns="0" bIns="0" rtlCol="0" anchor="ctr"/>
-          <a:lstStyle/>
-          <a:p>
-            <a:pPr indent="0" marL="0">
-              <a:buNone/>
-            </a:pPr>
-            <a:r>
-              <a:rPr lang="en-US" sz="1100" b="1" dirty="0">
+            <a:off x="594360" y="2560320"/>
+            <a:ext cx="3749040" cy="384048"/>
+          </a:xfrm>
+          <a:prstGeom prst="rect">
+            <a:avLst/>
+          </a:prstGeom>
+          <a:noFill/>
+          <a:ln/>
+        </p:spPr>
+        <p:txBody>
+          <a:bodyPr wrap="square" lIns="0" tIns="0" rIns="0" bIns="0" rtlCol="0" anchor="ctr"/>
+          <a:lstStyle/>
+          <a:p>
+            <a:pPr indent="0" marL="0">
+              <a:buNone/>
+            </a:pPr>
+            <a:r>
+              <a:rPr lang="en-US" sz="950" i="1" dirty="0">
                 <a:solidFill>
                   <a:srgbClr val="0F172A"/>
                 </a:solidFill>
@@ -7266,607 +7178,61 @@
                 <a:ea typeface="Calibri" pitchFamily="34" charset="-122"/>
                 <a:cs typeface="Calibri" pitchFamily="34" charset="-120"/>
               </a:rPr>
-              <a:t>Distanz HB</a:t>
-            </a:r>
-            <a:endParaRPr lang="en-US" sz="1100" dirty="0"/>
-          </a:p>
-        </p:txBody>
-      </p:sp>
-      <p:sp>
-        <p:nvSpPr>
-          <p:cNvPr id="13" name="Text 11"/>
-          <p:cNvSpPr/>
-          <p:nvPr/>
-        </p:nvSpPr>
-        <p:spPr>
-          <a:xfrm>
-            <a:off x="2103120" y="2423160"/>
-            <a:ext cx="868680" cy="292608"/>
-          </a:xfrm>
-          <a:prstGeom prst="rect">
-            <a:avLst/>
-          </a:prstGeom>
-          <a:noFill/>
-          <a:ln/>
-        </p:spPr>
-        <p:txBody>
-          <a:bodyPr wrap="square" lIns="0" tIns="0" rIns="0" bIns="0" rtlCol="0" anchor="ctr"/>
-          <a:lstStyle/>
-          <a:p>
-            <a:pPr indent="0" marL="0">
-              <a:buNone/>
-            </a:pPr>
-            <a:r>
-              <a:rPr lang="en-US" sz="1050" dirty="0">
-                <a:solidFill>
-                  <a:srgbClr val="0F172A"/>
-                </a:solidFill>
-                <a:latin typeface="Consolas" pitchFamily="34" charset="0"/>
-                <a:ea typeface="Consolas" pitchFamily="34" charset="-122"/>
-                <a:cs typeface="Consolas" pitchFamily="34" charset="-120"/>
-              </a:rPr>
-              <a:t>−0.61</a:t>
-            </a:r>
-            <a:endParaRPr lang="en-US" sz="1050" dirty="0"/>
-          </a:p>
-        </p:txBody>
-      </p:sp>
-      <p:sp>
-        <p:nvSpPr>
-          <p:cNvPr id="14" name="Text 12"/>
-          <p:cNvSpPr/>
-          <p:nvPr/>
-        </p:nvSpPr>
-        <p:spPr>
-          <a:xfrm>
-            <a:off x="2971800" y="2423160"/>
-            <a:ext cx="868680" cy="292608"/>
-          </a:xfrm>
-          <a:prstGeom prst="rect">
-            <a:avLst/>
-          </a:prstGeom>
-          <a:noFill/>
-          <a:ln/>
-        </p:spPr>
-        <p:txBody>
-          <a:bodyPr wrap="square" lIns="0" tIns="0" rIns="0" bIns="0" rtlCol="0" anchor="ctr"/>
-          <a:lstStyle/>
-          <a:p>
-            <a:pPr indent="0" marL="0">
-              <a:buNone/>
-            </a:pPr>
-            <a:r>
-              <a:rPr lang="en-US" sz="1050" dirty="0">
-                <a:solidFill>
-                  <a:srgbClr val="0F172A"/>
-                </a:solidFill>
-                <a:latin typeface="Consolas" pitchFamily="34" charset="0"/>
-                <a:ea typeface="Consolas" pitchFamily="34" charset="-122"/>
-                <a:cs typeface="Consolas" pitchFamily="34" charset="-120"/>
-              </a:rPr>
-              <a:t>−3.65</a:t>
-            </a:r>
-            <a:endParaRPr lang="en-US" sz="1050" dirty="0"/>
-          </a:p>
-        </p:txBody>
-      </p:sp>
-      <p:sp>
-        <p:nvSpPr>
-          <p:cNvPr id="15" name="Text 13"/>
-          <p:cNvSpPr/>
-          <p:nvPr/>
-        </p:nvSpPr>
-        <p:spPr>
-          <a:xfrm>
-            <a:off x="3840480" y="2423160"/>
-            <a:ext cx="868680" cy="292608"/>
-          </a:xfrm>
-          <a:prstGeom prst="rect">
-            <a:avLst/>
-          </a:prstGeom>
-          <a:noFill/>
-          <a:ln/>
-        </p:spPr>
-        <p:txBody>
-          <a:bodyPr wrap="square" lIns="0" tIns="0" rIns="0" bIns="0" rtlCol="0" anchor="ctr"/>
-          <a:lstStyle/>
-          <a:p>
-            <a:pPr indent="0" marL="0">
-              <a:buNone/>
-            </a:pPr>
-            <a:r>
-              <a:rPr lang="en-US" sz="1050" dirty="0">
-                <a:solidFill>
-                  <a:srgbClr val="0F172A"/>
-                </a:solidFill>
-                <a:latin typeface="Consolas" pitchFamily="34" charset="0"/>
-                <a:ea typeface="Consolas" pitchFamily="34" charset="-122"/>
-                <a:cs typeface="Consolas" pitchFamily="34" charset="-120"/>
-              </a:rPr>
-              <a:t>0.011</a:t>
-            </a:r>
-            <a:endParaRPr lang="en-US" sz="1050" dirty="0"/>
-          </a:p>
-        </p:txBody>
-      </p:sp>
-      <p:sp>
-        <p:nvSpPr>
-          <p:cNvPr id="16" name="Text 14"/>
-          <p:cNvSpPr/>
-          <p:nvPr/>
-        </p:nvSpPr>
-        <p:spPr>
-          <a:xfrm>
-            <a:off x="4709160" y="2423160"/>
-            <a:ext cx="640080" cy="292608"/>
-          </a:xfrm>
-          <a:prstGeom prst="rect">
-            <a:avLst/>
-          </a:prstGeom>
-          <a:noFill/>
-          <a:ln/>
-        </p:spPr>
-        <p:txBody>
-          <a:bodyPr wrap="square" lIns="0" tIns="0" rIns="0" bIns="0" rtlCol="0" anchor="ctr"/>
-          <a:lstStyle/>
-          <a:p>
-            <a:pPr indent="0" marL="0">
-              <a:buNone/>
-            </a:pPr>
-            <a:r>
-              <a:rPr lang="en-US" sz="1050" b="1" dirty="0">
-                <a:solidFill>
-                  <a:srgbClr val="1A9850"/>
-                </a:solidFill>
-                <a:latin typeface="Consolas" pitchFamily="34" charset="0"/>
-                <a:ea typeface="Consolas" pitchFamily="34" charset="-122"/>
-                <a:cs typeface="Consolas" pitchFamily="34" charset="-120"/>
-              </a:rPr>
-              <a:t>*</a:t>
-            </a:r>
-            <a:endParaRPr lang="en-US" sz="1050" dirty="0"/>
-          </a:p>
-        </p:txBody>
-      </p:sp>
-      <p:sp>
-        <p:nvSpPr>
-          <p:cNvPr id="17" name="Text 15"/>
-          <p:cNvSpPr/>
-          <p:nvPr/>
-        </p:nvSpPr>
-        <p:spPr>
-          <a:xfrm>
-            <a:off x="640080" y="2807208"/>
-            <a:ext cx="1463040" cy="292608"/>
-          </a:xfrm>
-          <a:prstGeom prst="rect">
-            <a:avLst/>
-          </a:prstGeom>
-          <a:noFill/>
-          <a:ln/>
-        </p:spPr>
-        <p:txBody>
-          <a:bodyPr wrap="square" lIns="0" tIns="0" rIns="0" bIns="0" rtlCol="0" anchor="ctr"/>
-          <a:lstStyle/>
-          <a:p>
-            <a:pPr indent="0" marL="0">
-              <a:buNone/>
-            </a:pPr>
-            <a:r>
-              <a:rPr lang="en-US" sz="1100" b="1" dirty="0">
-                <a:solidFill>
-                  <a:srgbClr val="0F172A"/>
+              <a:t>Lindenhof · Werd · Rathaus · Langstrasse · City · Hochschulen · Gewerbeschule</a:t>
+            </a:r>
+            <a:endParaRPr lang="en-US" sz="950" dirty="0"/>
+          </a:p>
+        </p:txBody>
+      </p:sp>
+      <p:sp>
+        <p:nvSpPr>
+          <p:cNvPr id="12" name="Text 10"/>
+          <p:cNvSpPr/>
+          <p:nvPr/>
+        </p:nvSpPr>
+        <p:spPr>
+          <a:xfrm>
+            <a:off x="594360" y="2926080"/>
+            <a:ext cx="3749040" cy="292608"/>
+          </a:xfrm>
+          <a:prstGeom prst="rect">
+            <a:avLst/>
+          </a:prstGeom>
+          <a:noFill/>
+          <a:ln/>
+        </p:spPr>
+        <p:txBody>
+          <a:bodyPr wrap="square" lIns="0" tIns="0" rIns="0" bIns="0" rtlCol="0" anchor="ctr"/>
+          <a:lstStyle/>
+          <a:p>
+            <a:pPr indent="0" marL="0">
+              <a:buNone/>
+            </a:pPr>
+            <a:r>
+              <a:rPr lang="en-US" sz="1000" dirty="0">
+                <a:solidFill>
+                  <a:srgbClr val="64748B"/>
                 </a:solidFill>
                 <a:latin typeface="Calibri" pitchFamily="34" charset="0"/>
                 <a:ea typeface="Calibri" pitchFamily="34" charset="-122"/>
                 <a:cs typeface="Calibri" pitchFamily="34" charset="-120"/>
               </a:rPr>
-              <a:t>Höhe (approx)</a:t>
-            </a:r>
-            <a:endParaRPr lang="en-US" sz="1100" dirty="0"/>
-          </a:p>
-        </p:txBody>
-      </p:sp>
-      <p:sp>
-        <p:nvSpPr>
-          <p:cNvPr id="18" name="Text 16"/>
-          <p:cNvSpPr/>
-          <p:nvPr/>
-        </p:nvSpPr>
-        <p:spPr>
-          <a:xfrm>
-            <a:off x="2103120" y="2807208"/>
-            <a:ext cx="868680" cy="292608"/>
-          </a:xfrm>
-          <a:prstGeom prst="rect">
-            <a:avLst/>
-          </a:prstGeom>
-          <a:noFill/>
-          <a:ln/>
-        </p:spPr>
-        <p:txBody>
-          <a:bodyPr wrap="square" lIns="0" tIns="0" rIns="0" bIns="0" rtlCol="0" anchor="ctr"/>
-          <a:lstStyle/>
-          <a:p>
-            <a:pPr indent="0" marL="0">
-              <a:buNone/>
-            </a:pPr>
-            <a:r>
-              <a:rPr lang="en-US" sz="1050" dirty="0">
-                <a:solidFill>
-                  <a:srgbClr val="0F172A"/>
-                </a:solidFill>
-                <a:latin typeface="Consolas" pitchFamily="34" charset="0"/>
-                <a:ea typeface="Consolas" pitchFamily="34" charset="-122"/>
-                <a:cs typeface="Consolas" pitchFamily="34" charset="-120"/>
-              </a:rPr>
-              <a:t>+0.08</a:t>
-            </a:r>
-            <a:endParaRPr lang="en-US" sz="1050" dirty="0"/>
-          </a:p>
-        </p:txBody>
-      </p:sp>
-      <p:sp>
-        <p:nvSpPr>
-          <p:cNvPr id="19" name="Text 17"/>
-          <p:cNvSpPr/>
-          <p:nvPr/>
-        </p:nvSpPr>
-        <p:spPr>
-          <a:xfrm>
-            <a:off x="2971800" y="2807208"/>
-            <a:ext cx="868680" cy="292608"/>
-          </a:xfrm>
-          <a:prstGeom prst="rect">
-            <a:avLst/>
-          </a:prstGeom>
-          <a:noFill/>
-          <a:ln/>
-        </p:spPr>
-        <p:txBody>
-          <a:bodyPr wrap="square" lIns="0" tIns="0" rIns="0" bIns="0" rtlCol="0" anchor="ctr"/>
-          <a:lstStyle/>
-          <a:p>
-            <a:pPr indent="0" marL="0">
-              <a:buNone/>
-            </a:pPr>
-            <a:r>
-              <a:rPr lang="en-US" sz="1050" dirty="0">
-                <a:solidFill>
-                  <a:srgbClr val="0F172A"/>
-                </a:solidFill>
-                <a:latin typeface="Consolas" pitchFamily="34" charset="0"/>
-                <a:ea typeface="Consolas" pitchFamily="34" charset="-122"/>
-                <a:cs typeface="Consolas" pitchFamily="34" charset="-120"/>
-              </a:rPr>
-              <a:t>+0.07</a:t>
-            </a:r>
-            <a:endParaRPr lang="en-US" sz="1050" dirty="0"/>
-          </a:p>
-        </p:txBody>
-      </p:sp>
-      <p:sp>
-        <p:nvSpPr>
-          <p:cNvPr id="20" name="Text 18"/>
-          <p:cNvSpPr/>
-          <p:nvPr/>
-        </p:nvSpPr>
-        <p:spPr>
-          <a:xfrm>
-            <a:off x="3840480" y="2807208"/>
-            <a:ext cx="868680" cy="292608"/>
-          </a:xfrm>
-          <a:prstGeom prst="rect">
-            <a:avLst/>
-          </a:prstGeom>
-          <a:noFill/>
-          <a:ln/>
-        </p:spPr>
-        <p:txBody>
-          <a:bodyPr wrap="square" lIns="0" tIns="0" rIns="0" bIns="0" rtlCol="0" anchor="ctr"/>
-          <a:lstStyle/>
-          <a:p>
-            <a:pPr indent="0" marL="0">
-              <a:buNone/>
-            </a:pPr>
-            <a:r>
-              <a:rPr lang="en-US" sz="1050" dirty="0">
-                <a:solidFill>
-                  <a:srgbClr val="0F172A"/>
-                </a:solidFill>
-                <a:latin typeface="Consolas" pitchFamily="34" charset="0"/>
-                <a:ea typeface="Consolas" pitchFamily="34" charset="-122"/>
-                <a:cs typeface="Consolas" pitchFamily="34" charset="-120"/>
-              </a:rPr>
-              <a:t>0.281</a:t>
-            </a:r>
-            <a:endParaRPr lang="en-US" sz="1050" dirty="0"/>
-          </a:p>
-        </p:txBody>
-      </p:sp>
-      <p:sp>
-        <p:nvSpPr>
-          <p:cNvPr id="21" name="Text 19"/>
-          <p:cNvSpPr/>
-          <p:nvPr/>
-        </p:nvSpPr>
-        <p:spPr>
-          <a:xfrm>
-            <a:off x="4709160" y="2807208"/>
-            <a:ext cx="640080" cy="292608"/>
-          </a:xfrm>
-          <a:prstGeom prst="rect">
-            <a:avLst/>
-          </a:prstGeom>
-          <a:noFill/>
-          <a:ln/>
-        </p:spPr>
-        <p:txBody>
-          <a:bodyPr wrap="square" lIns="0" tIns="0" rIns="0" bIns="0" rtlCol="0" anchor="ctr"/>
-          <a:lstStyle/>
-          <a:p>
-            <a:pPr indent="0" marL="0">
-              <a:buNone/>
-            </a:pPr>
-            <a:r>
-              <a:rPr lang="en-US" sz="1050" b="1" dirty="0">
-                <a:solidFill>
-                  <a:srgbClr val="64748B"/>
-                </a:solidFill>
-                <a:latin typeface="Consolas" pitchFamily="34" charset="0"/>
-                <a:ea typeface="Consolas" pitchFamily="34" charset="-122"/>
-                <a:cs typeface="Consolas" pitchFamily="34" charset="-120"/>
-              </a:rPr>
-              <a:t>n.s.</a:t>
-            </a:r>
-            <a:endParaRPr lang="en-US" sz="1050" dirty="0"/>
-          </a:p>
-        </p:txBody>
-      </p:sp>
-      <p:sp>
-        <p:nvSpPr>
-          <p:cNvPr id="22" name="Text 20"/>
-          <p:cNvSpPr/>
-          <p:nvPr/>
-        </p:nvSpPr>
-        <p:spPr>
-          <a:xfrm>
-            <a:off x="640080" y="3191256"/>
-            <a:ext cx="1463040" cy="292608"/>
-          </a:xfrm>
-          <a:prstGeom prst="rect">
-            <a:avLst/>
-          </a:prstGeom>
-          <a:noFill/>
-          <a:ln/>
-        </p:spPr>
-        <p:txBody>
-          <a:bodyPr wrap="square" lIns="0" tIns="0" rIns="0" bIns="0" rtlCol="0" anchor="ctr"/>
-          <a:lstStyle/>
-          <a:p>
-            <a:pPr indent="0" marL="0">
-              <a:buNone/>
-            </a:pPr>
-            <a:r>
-              <a:rPr lang="en-US" sz="1100" b="1" dirty="0">
-                <a:solidFill>
-                  <a:srgbClr val="0F172A"/>
-                </a:solidFill>
-                <a:latin typeface="Calibri" pitchFamily="34" charset="0"/>
-                <a:ea typeface="Calibri" pitchFamily="34" charset="-122"/>
-                <a:cs typeface="Calibri" pitchFamily="34" charset="-120"/>
-              </a:rPr>
-              <a:t>POI-Dichte</a:t>
-            </a:r>
-            <a:endParaRPr lang="en-US" sz="1100" dirty="0"/>
-          </a:p>
-        </p:txBody>
-      </p:sp>
-      <p:sp>
-        <p:nvSpPr>
-          <p:cNvPr id="23" name="Text 21"/>
-          <p:cNvSpPr/>
-          <p:nvPr/>
-        </p:nvSpPr>
-        <p:spPr>
-          <a:xfrm>
-            <a:off x="2103120" y="3191256"/>
-            <a:ext cx="868680" cy="292608"/>
-          </a:xfrm>
-          <a:prstGeom prst="rect">
-            <a:avLst/>
-          </a:prstGeom>
-          <a:noFill/>
-          <a:ln/>
-        </p:spPr>
-        <p:txBody>
-          <a:bodyPr wrap="square" lIns="0" tIns="0" rIns="0" bIns="0" rtlCol="0" anchor="ctr"/>
-          <a:lstStyle/>
-          <a:p>
-            <a:pPr indent="0" marL="0">
-              <a:buNone/>
-            </a:pPr>
-            <a:r>
-              <a:rPr lang="en-US" sz="1050" dirty="0">
-                <a:solidFill>
-                  <a:srgbClr val="0F172A"/>
-                </a:solidFill>
-                <a:latin typeface="Consolas" pitchFamily="34" charset="0"/>
-                <a:ea typeface="Consolas" pitchFamily="34" charset="-122"/>
-                <a:cs typeface="Consolas" pitchFamily="34" charset="-120"/>
-              </a:rPr>
-              <a:t>+0.84</a:t>
-            </a:r>
-            <a:endParaRPr lang="en-US" sz="1050" dirty="0"/>
-          </a:p>
-        </p:txBody>
-      </p:sp>
-      <p:sp>
-        <p:nvSpPr>
-          <p:cNvPr id="24" name="Text 22"/>
-          <p:cNvSpPr/>
-          <p:nvPr/>
-        </p:nvSpPr>
-        <p:spPr>
-          <a:xfrm>
-            <a:off x="2971800" y="3191256"/>
-            <a:ext cx="868680" cy="292608"/>
-          </a:xfrm>
-          <a:prstGeom prst="rect">
-            <a:avLst/>
-          </a:prstGeom>
-          <a:noFill/>
-          <a:ln/>
-        </p:spPr>
-        <p:txBody>
-          <a:bodyPr wrap="square" lIns="0" tIns="0" rIns="0" bIns="0" rtlCol="0" anchor="ctr"/>
-          <a:lstStyle/>
-          <a:p>
-            <a:pPr indent="0" marL="0">
-              <a:buNone/>
-            </a:pPr>
-            <a:r>
-              <a:rPr lang="en-US" sz="1050" dirty="0">
-                <a:solidFill>
-                  <a:srgbClr val="0F172A"/>
-                </a:solidFill>
-                <a:latin typeface="Consolas" pitchFamily="34" charset="0"/>
-                <a:ea typeface="Consolas" pitchFamily="34" charset="-122"/>
-                <a:cs typeface="Consolas" pitchFamily="34" charset="-120"/>
-              </a:rPr>
-              <a:t>+0.14</a:t>
-            </a:r>
-            <a:endParaRPr lang="en-US" sz="1050" dirty="0"/>
-          </a:p>
-        </p:txBody>
-      </p:sp>
-      <p:sp>
-        <p:nvSpPr>
-          <p:cNvPr id="25" name="Text 23"/>
-          <p:cNvSpPr/>
-          <p:nvPr/>
-        </p:nvSpPr>
-        <p:spPr>
-          <a:xfrm>
-            <a:off x="3840480" y="3191256"/>
-            <a:ext cx="868680" cy="292608"/>
-          </a:xfrm>
-          <a:prstGeom prst="rect">
-            <a:avLst/>
-          </a:prstGeom>
-          <a:noFill/>
-          <a:ln/>
-        </p:spPr>
-        <p:txBody>
-          <a:bodyPr wrap="square" lIns="0" tIns="0" rIns="0" bIns="0" rtlCol="0" anchor="ctr"/>
-          <a:lstStyle/>
-          <a:p>
-            <a:pPr indent="0" marL="0">
-              <a:buNone/>
-            </a:pPr>
-            <a:r>
-              <a:rPr lang="en-US" sz="1050" dirty="0">
-                <a:solidFill>
-                  <a:srgbClr val="0F172A"/>
-                </a:solidFill>
-                <a:latin typeface="Consolas" pitchFamily="34" charset="0"/>
-                <a:ea typeface="Consolas" pitchFamily="34" charset="-122"/>
-                <a:cs typeface="Consolas" pitchFamily="34" charset="-120"/>
-              </a:rPr>
-              <a:t>&lt;10⁻⁸</a:t>
-            </a:r>
-            <a:endParaRPr lang="en-US" sz="1050" dirty="0"/>
-          </a:p>
-        </p:txBody>
-      </p:sp>
-      <p:sp>
-        <p:nvSpPr>
-          <p:cNvPr id="26" name="Text 24"/>
-          <p:cNvSpPr/>
-          <p:nvPr/>
-        </p:nvSpPr>
-        <p:spPr>
-          <a:xfrm>
-            <a:off x="4709160" y="3191256"/>
-            <a:ext cx="640080" cy="292608"/>
-          </a:xfrm>
-          <a:prstGeom prst="rect">
-            <a:avLst/>
-          </a:prstGeom>
-          <a:noFill/>
-          <a:ln/>
-        </p:spPr>
-        <p:txBody>
-          <a:bodyPr wrap="square" lIns="0" tIns="0" rIns="0" bIns="0" rtlCol="0" anchor="ctr"/>
-          <a:lstStyle/>
-          <a:p>
-            <a:pPr indent="0" marL="0">
-              <a:buNone/>
-            </a:pPr>
-            <a:r>
-              <a:rPr lang="en-US" sz="1050" b="1" dirty="0">
-                <a:solidFill>
-                  <a:srgbClr val="F59E0B"/>
-                </a:solidFill>
-                <a:latin typeface="Consolas" pitchFamily="34" charset="0"/>
-                <a:ea typeface="Consolas" pitchFamily="34" charset="-122"/>
-                <a:cs typeface="Consolas" pitchFamily="34" charset="-120"/>
-              </a:rPr>
-              <a:t>***</a:t>
-            </a:r>
-            <a:endParaRPr lang="en-US" sz="1050" dirty="0"/>
-          </a:p>
-        </p:txBody>
-      </p:sp>
-      <p:sp>
-        <p:nvSpPr>
-          <p:cNvPr id="27" name="Text 25"/>
-          <p:cNvSpPr/>
-          <p:nvPr/>
-        </p:nvSpPr>
-        <p:spPr>
-          <a:xfrm>
-            <a:off x="640080" y="4160520"/>
-            <a:ext cx="4572000" cy="274320"/>
-          </a:xfrm>
-          <a:prstGeom prst="rect">
-            <a:avLst/>
-          </a:prstGeom>
-          <a:noFill/>
-          <a:ln/>
-        </p:spPr>
-        <p:txBody>
-          <a:bodyPr wrap="square" lIns="0" tIns="0" rIns="0" bIns="0" rtlCol="0" anchor="ctr"/>
-          <a:lstStyle/>
-          <a:p>
-            <a:pPr indent="0" marL="0">
-              <a:buNone/>
-            </a:pPr>
-            <a:r>
-              <a:rPr lang="en-US" sz="900" i="1" dirty="0">
-                <a:solidFill>
-                  <a:srgbClr val="64748B"/>
-                </a:solidFill>
-                <a:latin typeface="Calibri" pitchFamily="34" charset="0"/>
-                <a:ea typeface="Calibri" pitchFamily="34" charset="-122"/>
-                <a:cs typeface="Calibri" pitchFamily="34" charset="-120"/>
-              </a:rPr>
-              <a:t>Signifikanz-Codes:  *** p&lt;0.001 · ** p&lt;0.01 · * p&lt;0.05</a:t>
-            </a:r>
-            <a:endParaRPr lang="en-US" sz="900" dirty="0"/>
-          </a:p>
-        </p:txBody>
-      </p:sp>
-      <p:sp>
-        <p:nvSpPr>
-          <p:cNvPr id="28" name="Shape 26"/>
-          <p:cNvSpPr/>
-          <p:nvPr/>
-        </p:nvSpPr>
-        <p:spPr>
-          <a:xfrm>
-            <a:off x="5486400" y="1508760"/>
-            <a:ext cx="3200400" cy="3108960"/>
+              <a:t>Alle sechs Funktionen in Walking-Distanz.</a:t>
+            </a:r>
+            <a:endParaRPr lang="en-US" sz="1000" dirty="0"/>
+          </a:p>
+        </p:txBody>
+      </p:sp>
+      <p:sp>
+        <p:nvSpPr>
+          <p:cNvPr id="13" name="Shape 11"/>
+          <p:cNvSpPr/>
+          <p:nvPr/>
+        </p:nvSpPr>
+        <p:spPr>
+          <a:xfrm>
+            <a:off x="4663440" y="2057400"/>
+            <a:ext cx="4023360" cy="1188720"/>
           </a:xfrm>
           <a:prstGeom prst="rect">
             <a:avLst/>
@@ -7891,24 +7257,24 @@
       </p:sp>
       <p:sp>
         <p:nvSpPr>
-          <p:cNvPr id="29" name="Shape 27"/>
-          <p:cNvSpPr/>
-          <p:nvPr/>
-        </p:nvSpPr>
-        <p:spPr>
-          <a:xfrm>
-            <a:off x="5486400" y="1508760"/>
-            <a:ext cx="3200400" cy="54864"/>
+          <p:cNvPr id="14" name="Shape 12"/>
+          <p:cNvSpPr/>
+          <p:nvPr/>
+        </p:nvSpPr>
+        <p:spPr>
+          <a:xfrm>
+            <a:off x="4663440" y="2057400"/>
+            <a:ext cx="4023360" cy="54864"/>
           </a:xfrm>
           <a:prstGeom prst="rect">
             <a:avLst/>
           </a:prstGeom>
           <a:solidFill>
-            <a:srgbClr val="1C7293"/>
+            <a:srgbClr val="065A82"/>
           </a:solidFill>
           <a:ln w="12700">
             <a:solidFill>
-              <a:srgbClr val="1C7293"/>
+              <a:srgbClr val="065A82"/>
             </a:solidFill>
             <a:prstDash val="solid"/>
           </a:ln>
@@ -7916,103 +7282,449 @@
       </p:sp>
       <p:sp>
         <p:nvSpPr>
-          <p:cNvPr id="30" name="Text 28"/>
-          <p:cNvSpPr/>
-          <p:nvPr/>
-        </p:nvSpPr>
-        <p:spPr>
-          <a:xfrm>
-            <a:off x="5669280" y="1645920"/>
-            <a:ext cx="2926080" cy="320040"/>
-          </a:xfrm>
-          <a:prstGeom prst="rect">
-            <a:avLst/>
-          </a:prstGeom>
-          <a:noFill/>
-          <a:ln/>
-        </p:spPr>
-        <p:txBody>
-          <a:bodyPr wrap="square" lIns="0" tIns="0" rIns="0" bIns="0" rtlCol="0" anchor="ctr"/>
-          <a:lstStyle/>
-          <a:p>
-            <a:pPr indent="0" marL="0">
-              <a:buNone/>
-            </a:pPr>
-            <a:r>
-              <a:rPr lang="en-US" sz="1300" b="1" dirty="0">
-                <a:solidFill>
-                  <a:srgbClr val="1C7293"/>
+          <p:cNvPr id="15" name="Shape 13"/>
+          <p:cNvSpPr/>
+          <p:nvPr/>
+        </p:nvSpPr>
+        <p:spPr>
+          <a:xfrm>
+            <a:off x="4800600" y="2194560"/>
+            <a:ext cx="640080" cy="292608"/>
+          </a:xfrm>
+          <a:prstGeom prst="rect">
+            <a:avLst/>
+          </a:prstGeom>
+          <a:solidFill>
+            <a:srgbClr val="065A82"/>
+          </a:solidFill>
+          <a:ln w="12700">
+            <a:solidFill>
+              <a:srgbClr val="065A82"/>
+            </a:solidFill>
+            <a:prstDash val="solid"/>
+          </a:ln>
+        </p:spPr>
+      </p:sp>
+      <p:sp>
+        <p:nvSpPr>
+          <p:cNvPr id="16" name="Text 14"/>
+          <p:cNvSpPr/>
+          <p:nvPr/>
+        </p:nvSpPr>
+        <p:spPr>
+          <a:xfrm>
+            <a:off x="4800600" y="2194560"/>
+            <a:ext cx="640080" cy="292608"/>
+          </a:xfrm>
+          <a:prstGeom prst="rect">
+            <a:avLst/>
+          </a:prstGeom>
+          <a:noFill/>
+          <a:ln/>
+        </p:spPr>
+        <p:txBody>
+          <a:bodyPr wrap="square" lIns="0" tIns="0" rIns="0" bIns="0" rtlCol="0" anchor="ctr"/>
+          <a:lstStyle/>
+          <a:p>
+            <a:pPr algn="ctr" indent="0" marL="0">
+              <a:buNone/>
+            </a:pPr>
+            <a:r>
+              <a:rPr lang="en-US" sz="1100" b="1" dirty="0">
+                <a:solidFill>
+                  <a:srgbClr val="FFFFFF"/>
                 </a:solidFill>
                 <a:latin typeface="Trebuchet MS" pitchFamily="34" charset="0"/>
                 <a:ea typeface="Trebuchet MS" pitchFamily="34" charset="-122"/>
                 <a:cs typeface="Trebuchet MS" pitchFamily="34" charset="-120"/>
               </a:rPr>
-              <a:t>Was das bedeutet</a:t>
-            </a:r>
-            <a:endParaRPr lang="en-US" sz="1300" dirty="0"/>
-          </a:p>
-        </p:txBody>
-      </p:sp>
-      <p:sp>
-        <p:nvSpPr>
-          <p:cNvPr id="31" name="Text 29"/>
-          <p:cNvSpPr/>
-          <p:nvPr/>
-        </p:nvSpPr>
-        <p:spPr>
-          <a:xfrm>
-            <a:off x="5669280" y="2057400"/>
-            <a:ext cx="2926080" cy="2468880"/>
-          </a:xfrm>
-          <a:prstGeom prst="rect">
-            <a:avLst/>
-          </a:prstGeom>
-          <a:noFill/>
-          <a:ln/>
-        </p:spPr>
-        <p:txBody>
-          <a:bodyPr wrap="square" lIns="0" tIns="0" rIns="0" bIns="0" rtlCol="0" anchor="ctr"/>
-          <a:lstStyle/>
-          <a:p>
-            <a:pPr indent="0" marL="0">
-              <a:buNone/>
-            </a:pPr>
-            <a:r>
-              <a:rPr lang="en-US" sz="1050" b="1" dirty="0">
-                <a:solidFill>
-                  <a:srgbClr val="1A9850"/>
+              <a:t>Typ B</a:t>
+            </a:r>
+            <a:endParaRPr lang="en-US" sz="1100" dirty="0"/>
+          </a:p>
+        </p:txBody>
+      </p:sp>
+      <p:sp>
+        <p:nvSpPr>
+          <p:cNvPr id="17" name="Text 15"/>
+          <p:cNvSpPr/>
+          <p:nvPr/>
+        </p:nvSpPr>
+        <p:spPr>
+          <a:xfrm>
+            <a:off x="5532120" y="2176272"/>
+            <a:ext cx="2377440" cy="292608"/>
+          </a:xfrm>
+          <a:prstGeom prst="rect">
+            <a:avLst/>
+          </a:prstGeom>
+          <a:noFill/>
+          <a:ln/>
+        </p:spPr>
+        <p:txBody>
+          <a:bodyPr wrap="square" lIns="0" tIns="0" rIns="0" bIns="0" rtlCol="0" anchor="ctr"/>
+          <a:lstStyle/>
+          <a:p>
+            <a:pPr indent="0" marL="0">
+              <a:buNone/>
+            </a:pPr>
+            <a:r>
+              <a:rPr lang="en-US" sz="1350" b="1" dirty="0">
+                <a:solidFill>
+                  <a:srgbClr val="065A82"/>
+                </a:solidFill>
+                <a:latin typeface="Trebuchet MS" pitchFamily="34" charset="0"/>
+                <a:ea typeface="Trebuchet MS" pitchFamily="34" charset="-122"/>
+                <a:cs typeface="Trebuchet MS" pitchFamily="34" charset="-120"/>
+              </a:rPr>
+              <a:t>Mittelband mit ÖV</a:t>
+            </a:r>
+            <a:endParaRPr lang="en-US" sz="1350" dirty="0"/>
+          </a:p>
+        </p:txBody>
+      </p:sp>
+      <p:sp>
+        <p:nvSpPr>
+          <p:cNvPr id="18" name="Text 16"/>
+          <p:cNvSpPr/>
+          <p:nvPr/>
+        </p:nvSpPr>
+        <p:spPr>
+          <a:xfrm>
+            <a:off x="7909560" y="2176272"/>
+            <a:ext cx="731520" cy="292608"/>
+          </a:xfrm>
+          <a:prstGeom prst="rect">
+            <a:avLst/>
+          </a:prstGeom>
+          <a:noFill/>
+          <a:ln/>
+        </p:spPr>
+        <p:txBody>
+          <a:bodyPr wrap="square" lIns="0" tIns="0" rIns="0" bIns="0" rtlCol="0" anchor="ctr"/>
+          <a:lstStyle/>
+          <a:p>
+            <a:pPr algn="r" indent="0" marL="0">
+              <a:buNone/>
+            </a:pPr>
+            <a:r>
+              <a:rPr lang="en-US" sz="1100" b="1" dirty="0">
+                <a:solidFill>
+                  <a:srgbClr val="065A82"/>
+                </a:solidFill>
+                <a:latin typeface="Trebuchet MS" pitchFamily="34" charset="0"/>
+                <a:ea typeface="Trebuchet MS" pitchFamily="34" charset="-122"/>
+                <a:cs typeface="Trebuchet MS" pitchFamily="34" charset="-120"/>
+              </a:rPr>
+              <a:t>⌀ 59  ·  n = 9</a:t>
+            </a:r>
+            <a:endParaRPr lang="en-US" sz="1100" dirty="0"/>
+          </a:p>
+        </p:txBody>
+      </p:sp>
+      <p:sp>
+        <p:nvSpPr>
+          <p:cNvPr id="19" name="Text 17"/>
+          <p:cNvSpPr/>
+          <p:nvPr/>
+        </p:nvSpPr>
+        <p:spPr>
+          <a:xfrm>
+            <a:off x="4800600" y="2560320"/>
+            <a:ext cx="3749040" cy="384048"/>
+          </a:xfrm>
+          <a:prstGeom prst="rect">
+            <a:avLst/>
+          </a:prstGeom>
+          <a:noFill/>
+          <a:ln/>
+        </p:spPr>
+        <p:txBody>
+          <a:bodyPr wrap="square" lIns="0" tIns="0" rIns="0" bIns="0" rtlCol="0" anchor="ctr"/>
+          <a:lstStyle/>
+          <a:p>
+            <a:pPr indent="0" marL="0">
+              <a:buNone/>
+            </a:pPr>
+            <a:r>
+              <a:rPr lang="en-US" sz="950" i="1" dirty="0">
+                <a:solidFill>
+                  <a:srgbClr val="0F172A"/>
                 </a:solidFill>
                 <a:latin typeface="Calibri" pitchFamily="34" charset="0"/>
                 <a:ea typeface="Calibri" pitchFamily="34" charset="-122"/>
                 <a:cs typeface="Calibri" pitchFamily="34" charset="-120"/>
               </a:rPr>
-              <a:t>H1 robust</a:t>
-            </a:r>
-            <a:endParaRPr lang="en-US" sz="1050" dirty="0"/>
-          </a:p>
-          <a:p>
-            <a:pPr indent="0" marL="0">
-              <a:buNone/>
-            </a:pPr>
-            <a:r>
-              <a:rPr lang="en-US" sz="1050" dirty="0">
-                <a:solidFill>
-                  <a:srgbClr val="0F172A"/>
+              <a:t>Sihlfeld · Hard · Oerlikon · Alt-Wiedikon · Unterstrass · Mühlebach · Escher Wyss · Enge · Wipkingen</a:t>
+            </a:r>
+            <a:endParaRPr lang="en-US" sz="950" dirty="0"/>
+          </a:p>
+        </p:txBody>
+      </p:sp>
+      <p:sp>
+        <p:nvSpPr>
+          <p:cNvPr id="20" name="Text 18"/>
+          <p:cNvSpPr/>
+          <p:nvPr/>
+        </p:nvSpPr>
+        <p:spPr>
+          <a:xfrm>
+            <a:off x="4800600" y="2926080"/>
+            <a:ext cx="3749040" cy="292608"/>
+          </a:xfrm>
+          <a:prstGeom prst="rect">
+            <a:avLst/>
+          </a:prstGeom>
+          <a:noFill/>
+          <a:ln/>
+        </p:spPr>
+        <p:txBody>
+          <a:bodyPr wrap="square" lIns="0" tIns="0" rIns="0" bIns="0" rtlCol="0" anchor="ctr"/>
+          <a:lstStyle/>
+          <a:p>
+            <a:pPr indent="0" marL="0">
+              <a:buNone/>
+            </a:pPr>
+            <a:r>
+              <a:rPr lang="en-US" sz="1000" dirty="0">
+                <a:solidFill>
+                  <a:srgbClr val="64748B"/>
                 </a:solidFill>
                 <a:latin typeface="Calibri" pitchFamily="34" charset="0"/>
                 <a:ea typeface="Calibri" pitchFamily="34" charset="-122"/>
                 <a:cs typeface="Calibri" pitchFamily="34" charset="-120"/>
               </a:rPr>
-              <a:t>Distanz bleibt nach Kontrolle für Höhe und POI-Dichte signifikant.</a:t>
-            </a:r>
-            <a:endParaRPr lang="en-US" sz="1050" dirty="0"/>
-          </a:p>
-          <a:p>
-            <a:pPr indent="0" marL="0">
-              <a:buNone/>
-            </a:pPr>
-            <a:r>
-              <a:rPr lang="en-US" sz="1050" dirty="0">
+              <a:t>Wohnviertel mit guter Tram-/Bus-Anbindung.</a:t>
+            </a:r>
+            <a:endParaRPr lang="en-US" sz="1000" dirty="0"/>
+          </a:p>
+        </p:txBody>
+      </p:sp>
+      <p:sp>
+        <p:nvSpPr>
+          <p:cNvPr id="21" name="Shape 19"/>
+          <p:cNvSpPr/>
+          <p:nvPr/>
+        </p:nvSpPr>
+        <p:spPr>
+          <a:xfrm>
+            <a:off x="457200" y="3383280"/>
+            <a:ext cx="4023360" cy="1188720"/>
+          </a:xfrm>
+          <a:prstGeom prst="rect">
+            <a:avLst/>
+          </a:prstGeom>
+          <a:solidFill>
+            <a:srgbClr val="FFFFFF"/>
+          </a:solidFill>
+          <a:ln w="9525">
+            <a:solidFill>
+              <a:srgbClr val="E2E8F0"/>
+            </a:solidFill>
+            <a:prstDash val="solid"/>
+          </a:ln>
+          <a:effectLst>
+            <a:outerShdw sx="100000" sy="100000" kx="0" ky="0" algn="bl" rotWithShape="0" blurRad="101600" dist="12700" dir="5400000">
+              <a:srgbClr val="94A3B8">
+                <a:alpha val="12000"/>
+              </a:srgbClr>
+            </a:outerShdw>
+          </a:effectLst>
+        </p:spPr>
+      </p:sp>
+      <p:sp>
+        <p:nvSpPr>
+          <p:cNvPr id="22" name="Shape 20"/>
+          <p:cNvSpPr/>
+          <p:nvPr/>
+        </p:nvSpPr>
+        <p:spPr>
+          <a:xfrm>
+            <a:off x="457200" y="3383280"/>
+            <a:ext cx="4023360" cy="54864"/>
+          </a:xfrm>
+          <a:prstGeom prst="rect">
+            <a:avLst/>
+          </a:prstGeom>
+          <a:solidFill>
+            <a:srgbClr val="F59E0B"/>
+          </a:solidFill>
+          <a:ln w="12700">
+            <a:solidFill>
+              <a:srgbClr val="F59E0B"/>
+            </a:solidFill>
+            <a:prstDash val="solid"/>
+          </a:ln>
+        </p:spPr>
+      </p:sp>
+      <p:sp>
+        <p:nvSpPr>
+          <p:cNvPr id="23" name="Shape 21"/>
+          <p:cNvSpPr/>
+          <p:nvPr/>
+        </p:nvSpPr>
+        <p:spPr>
+          <a:xfrm>
+            <a:off x="594360" y="3520440"/>
+            <a:ext cx="640080" cy="292608"/>
+          </a:xfrm>
+          <a:prstGeom prst="rect">
+            <a:avLst/>
+          </a:prstGeom>
+          <a:solidFill>
+            <a:srgbClr val="F59E0B"/>
+          </a:solidFill>
+          <a:ln w="12700">
+            <a:solidFill>
+              <a:srgbClr val="F59E0B"/>
+            </a:solidFill>
+            <a:prstDash val="solid"/>
+          </a:ln>
+        </p:spPr>
+      </p:sp>
+      <p:sp>
+        <p:nvSpPr>
+          <p:cNvPr id="24" name="Text 22"/>
+          <p:cNvSpPr/>
+          <p:nvPr/>
+        </p:nvSpPr>
+        <p:spPr>
+          <a:xfrm>
+            <a:off x="594360" y="3520440"/>
+            <a:ext cx="640080" cy="292608"/>
+          </a:xfrm>
+          <a:prstGeom prst="rect">
+            <a:avLst/>
+          </a:prstGeom>
+          <a:noFill/>
+          <a:ln/>
+        </p:spPr>
+        <p:txBody>
+          <a:bodyPr wrap="square" lIns="0" tIns="0" rIns="0" bIns="0" rtlCol="0" anchor="ctr"/>
+          <a:lstStyle/>
+          <a:p>
+            <a:pPr algn="ctr" indent="0" marL="0">
+              <a:buNone/>
+            </a:pPr>
+            <a:r>
+              <a:rPr lang="en-US" sz="1100" b="1" dirty="0">
+                <a:solidFill>
+                  <a:srgbClr val="FFFFFF"/>
+                </a:solidFill>
+                <a:latin typeface="Trebuchet MS" pitchFamily="34" charset="0"/>
+                <a:ea typeface="Trebuchet MS" pitchFamily="34" charset="-122"/>
+                <a:cs typeface="Trebuchet MS" pitchFamily="34" charset="-120"/>
+              </a:rPr>
+              <a:t>Typ C</a:t>
+            </a:r>
+            <a:endParaRPr lang="en-US" sz="1100" dirty="0"/>
+          </a:p>
+        </p:txBody>
+      </p:sp>
+      <p:sp>
+        <p:nvSpPr>
+          <p:cNvPr id="25" name="Text 23"/>
+          <p:cNvSpPr/>
+          <p:nvPr/>
+        </p:nvSpPr>
+        <p:spPr>
+          <a:xfrm>
+            <a:off x="1325880" y="3502152"/>
+            <a:ext cx="2377440" cy="292608"/>
+          </a:xfrm>
+          <a:prstGeom prst="rect">
+            <a:avLst/>
+          </a:prstGeom>
+          <a:noFill/>
+          <a:ln/>
+        </p:spPr>
+        <p:txBody>
+          <a:bodyPr wrap="square" lIns="0" tIns="0" rIns="0" bIns="0" rtlCol="0" anchor="ctr"/>
+          <a:lstStyle/>
+          <a:p>
+            <a:pPr indent="0" marL="0">
+              <a:buNone/>
+            </a:pPr>
+            <a:r>
+              <a:rPr lang="en-US" sz="1350" b="1" dirty="0">
+                <a:solidFill>
+                  <a:srgbClr val="F59E0B"/>
+                </a:solidFill>
+                <a:latin typeface="Trebuchet MS" pitchFamily="34" charset="0"/>
+                <a:ea typeface="Trebuchet MS" pitchFamily="34" charset="-122"/>
+                <a:cs typeface="Trebuchet MS" pitchFamily="34" charset="-120"/>
+              </a:rPr>
+              <a:t>Stadtnord-Rand</a:t>
+            </a:r>
+            <a:endParaRPr lang="en-US" sz="1350" dirty="0"/>
+          </a:p>
+        </p:txBody>
+      </p:sp>
+      <p:sp>
+        <p:nvSpPr>
+          <p:cNvPr id="26" name="Text 24"/>
+          <p:cNvSpPr/>
+          <p:nvPr/>
+        </p:nvSpPr>
+        <p:spPr>
+          <a:xfrm>
+            <a:off x="3703320" y="3502152"/>
+            <a:ext cx="731520" cy="292608"/>
+          </a:xfrm>
+          <a:prstGeom prst="rect">
+            <a:avLst/>
+          </a:prstGeom>
+          <a:noFill/>
+          <a:ln/>
+        </p:spPr>
+        <p:txBody>
+          <a:bodyPr wrap="square" lIns="0" tIns="0" rIns="0" bIns="0" rtlCol="0" anchor="ctr"/>
+          <a:lstStyle/>
+          <a:p>
+            <a:pPr algn="r" indent="0" marL="0">
+              <a:buNone/>
+            </a:pPr>
+            <a:r>
+              <a:rPr lang="en-US" sz="1100" b="1" dirty="0">
+                <a:solidFill>
+                  <a:srgbClr val="F59E0B"/>
+                </a:solidFill>
+                <a:latin typeface="Trebuchet MS" pitchFamily="34" charset="0"/>
+                <a:ea typeface="Trebuchet MS" pitchFamily="34" charset="-122"/>
+                <a:cs typeface="Trebuchet MS" pitchFamily="34" charset="-120"/>
+              </a:rPr>
+              <a:t>⌀ 29  ·  n = 4</a:t>
+            </a:r>
+            <a:endParaRPr lang="en-US" sz="1100" dirty="0"/>
+          </a:p>
+        </p:txBody>
+      </p:sp>
+      <p:sp>
+        <p:nvSpPr>
+          <p:cNvPr id="27" name="Text 25"/>
+          <p:cNvSpPr/>
+          <p:nvPr/>
+        </p:nvSpPr>
+        <p:spPr>
+          <a:xfrm>
+            <a:off x="594360" y="3886200"/>
+            <a:ext cx="3749040" cy="384048"/>
+          </a:xfrm>
+          <a:prstGeom prst="rect">
+            <a:avLst/>
+          </a:prstGeom>
+          <a:noFill/>
+          <a:ln/>
+        </p:spPr>
+        <p:txBody>
+          <a:bodyPr wrap="square" lIns="0" tIns="0" rIns="0" bIns="0" rtlCol="0" anchor="ctr"/>
+          <a:lstStyle/>
+          <a:p>
+            <a:pPr indent="0" marL="0">
+              <a:buNone/>
+            </a:pPr>
+            <a:r>
+              <a:rPr lang="en-US" sz="950" i="1" dirty="0">
                 <a:solidFill>
                   <a:srgbClr val="0F172A"/>
                 </a:solidFill>
@@ -8020,16 +7732,38 @@
                 <a:ea typeface="Calibri" pitchFamily="34" charset="-122"/>
                 <a:cs typeface="Calibri" pitchFamily="34" charset="-120"/>
               </a:rPr>
-              <a:t> </a:t>
-            </a:r>
-            <a:endParaRPr lang="en-US" sz="1050" dirty="0"/>
-          </a:p>
-          <a:p>
-            <a:pPr indent="0" marL="0">
-              <a:buNone/>
-            </a:pPr>
-            <a:r>
-              <a:rPr lang="en-US" sz="1050" b="1" dirty="0">
+              <a:t>Saatlen · Seebach · Schwamendingen-Mitte · Friesenberg</a:t>
+            </a:r>
+            <a:endParaRPr lang="en-US" sz="950" dirty="0"/>
+          </a:p>
+        </p:txBody>
+      </p:sp>
+      <p:sp>
+        <p:nvSpPr>
+          <p:cNvPr id="28" name="Text 26"/>
+          <p:cNvSpPr/>
+          <p:nvPr/>
+        </p:nvSpPr>
+        <p:spPr>
+          <a:xfrm>
+            <a:off x="594360" y="4251960"/>
+            <a:ext cx="3749040" cy="292608"/>
+          </a:xfrm>
+          <a:prstGeom prst="rect">
+            <a:avLst/>
+          </a:prstGeom>
+          <a:noFill/>
+          <a:ln/>
+        </p:spPr>
+        <p:txBody>
+          <a:bodyPr wrap="square" lIns="0" tIns="0" rIns="0" bIns="0" rtlCol="0" anchor="ctr"/>
+          <a:lstStyle/>
+          <a:p>
+            <a:pPr indent="0" marL="0">
+              <a:buNone/>
+            </a:pPr>
+            <a:r>
+              <a:rPr lang="en-US" sz="1000" dirty="0">
                 <a:solidFill>
                   <a:srgbClr val="64748B"/>
                 </a:solidFill>
@@ -8037,16 +7771,237 @@
                 <a:ea typeface="Calibri" pitchFamily="34" charset="-122"/>
                 <a:cs typeface="Calibri" pitchFamily="34" charset="-120"/>
               </a:rPr>
-              <a:t>Topografie inkonklusiv</a:t>
-            </a:r>
-            <a:endParaRPr lang="en-US" sz="1050" dirty="0"/>
-          </a:p>
-          <a:p>
-            <a:pPr indent="0" marL="0">
-              <a:buNone/>
-            </a:pPr>
-            <a:r>
-              <a:rPr lang="en-US" sz="1050" dirty="0">
+              <a:t>Erholung-positiv, alle anderen Funktionen tief.</a:t>
+            </a:r>
+            <a:endParaRPr lang="en-US" sz="1000" dirty="0"/>
+          </a:p>
+        </p:txBody>
+      </p:sp>
+      <p:sp>
+        <p:nvSpPr>
+          <p:cNvPr id="29" name="Shape 27"/>
+          <p:cNvSpPr/>
+          <p:nvPr/>
+        </p:nvSpPr>
+        <p:spPr>
+          <a:xfrm>
+            <a:off x="4663440" y="3383280"/>
+            <a:ext cx="4023360" cy="1188720"/>
+          </a:xfrm>
+          <a:prstGeom prst="rect">
+            <a:avLst/>
+          </a:prstGeom>
+          <a:solidFill>
+            <a:srgbClr val="FFFFFF"/>
+          </a:solidFill>
+          <a:ln w="9525">
+            <a:solidFill>
+              <a:srgbClr val="E2E8F0"/>
+            </a:solidFill>
+            <a:prstDash val="solid"/>
+          </a:ln>
+          <a:effectLst>
+            <a:outerShdw sx="100000" sy="100000" kx="0" ky="0" algn="bl" rotWithShape="0" blurRad="101600" dist="12700" dir="5400000">
+              <a:srgbClr val="94A3B8">
+                <a:alpha val="12000"/>
+              </a:srgbClr>
+            </a:outerShdw>
+          </a:effectLst>
+        </p:spPr>
+      </p:sp>
+      <p:sp>
+        <p:nvSpPr>
+          <p:cNvPr id="30" name="Shape 28"/>
+          <p:cNvSpPr/>
+          <p:nvPr/>
+        </p:nvSpPr>
+        <p:spPr>
+          <a:xfrm>
+            <a:off x="4663440" y="3383280"/>
+            <a:ext cx="4023360" cy="54864"/>
+          </a:xfrm>
+          <a:prstGeom prst="rect">
+            <a:avLst/>
+          </a:prstGeom>
+          <a:solidFill>
+            <a:srgbClr val="D73027"/>
+          </a:solidFill>
+          <a:ln w="12700">
+            <a:solidFill>
+              <a:srgbClr val="D73027"/>
+            </a:solidFill>
+            <a:prstDash val="solid"/>
+          </a:ln>
+        </p:spPr>
+      </p:sp>
+      <p:sp>
+        <p:nvSpPr>
+          <p:cNvPr id="31" name="Shape 29"/>
+          <p:cNvSpPr/>
+          <p:nvPr/>
+        </p:nvSpPr>
+        <p:spPr>
+          <a:xfrm>
+            <a:off x="4800600" y="3520440"/>
+            <a:ext cx="640080" cy="292608"/>
+          </a:xfrm>
+          <a:prstGeom prst="rect">
+            <a:avLst/>
+          </a:prstGeom>
+          <a:solidFill>
+            <a:srgbClr val="D73027"/>
+          </a:solidFill>
+          <a:ln w="12700">
+            <a:solidFill>
+              <a:srgbClr val="D73027"/>
+            </a:solidFill>
+            <a:prstDash val="solid"/>
+          </a:ln>
+        </p:spPr>
+      </p:sp>
+      <p:sp>
+        <p:nvSpPr>
+          <p:cNvPr id="32" name="Text 30"/>
+          <p:cNvSpPr/>
+          <p:nvPr/>
+        </p:nvSpPr>
+        <p:spPr>
+          <a:xfrm>
+            <a:off x="4800600" y="3520440"/>
+            <a:ext cx="640080" cy="292608"/>
+          </a:xfrm>
+          <a:prstGeom prst="rect">
+            <a:avLst/>
+          </a:prstGeom>
+          <a:noFill/>
+          <a:ln/>
+        </p:spPr>
+        <p:txBody>
+          <a:bodyPr wrap="square" lIns="0" tIns="0" rIns="0" bIns="0" rtlCol="0" anchor="ctr"/>
+          <a:lstStyle/>
+          <a:p>
+            <a:pPr algn="ctr" indent="0" marL="0">
+              <a:buNone/>
+            </a:pPr>
+            <a:r>
+              <a:rPr lang="en-US" sz="1100" b="1" dirty="0">
+                <a:solidFill>
+                  <a:srgbClr val="FFFFFF"/>
+                </a:solidFill>
+                <a:latin typeface="Trebuchet MS" pitchFamily="34" charset="0"/>
+                <a:ea typeface="Trebuchet MS" pitchFamily="34" charset="-122"/>
+                <a:cs typeface="Trebuchet MS" pitchFamily="34" charset="-120"/>
+              </a:rPr>
+              <a:t>Typ D</a:t>
+            </a:r>
+            <a:endParaRPr lang="en-US" sz="1100" dirty="0"/>
+          </a:p>
+        </p:txBody>
+      </p:sp>
+      <p:sp>
+        <p:nvSpPr>
+          <p:cNvPr id="33" name="Text 31"/>
+          <p:cNvSpPr/>
+          <p:nvPr/>
+        </p:nvSpPr>
+        <p:spPr>
+          <a:xfrm>
+            <a:off x="5532120" y="3502152"/>
+            <a:ext cx="2377440" cy="292608"/>
+          </a:xfrm>
+          <a:prstGeom prst="rect">
+            <a:avLst/>
+          </a:prstGeom>
+          <a:noFill/>
+          <a:ln/>
+        </p:spPr>
+        <p:txBody>
+          <a:bodyPr wrap="square" lIns="0" tIns="0" rIns="0" bIns="0" rtlCol="0" anchor="ctr"/>
+          <a:lstStyle/>
+          <a:p>
+            <a:pPr indent="0" marL="0">
+              <a:buNone/>
+            </a:pPr>
+            <a:r>
+              <a:rPr lang="en-US" sz="1350" b="1" dirty="0">
+                <a:solidFill>
+                  <a:srgbClr val="D73027"/>
+                </a:solidFill>
+                <a:latin typeface="Trebuchet MS" pitchFamily="34" charset="0"/>
+                <a:ea typeface="Trebuchet MS" pitchFamily="34" charset="-122"/>
+                <a:cs typeface="Trebuchet MS" pitchFamily="34" charset="-120"/>
+              </a:rPr>
+              <a:t>Periphere Wohnviertel</a:t>
+            </a:r>
+            <a:endParaRPr lang="en-US" sz="1350" dirty="0"/>
+          </a:p>
+        </p:txBody>
+      </p:sp>
+      <p:sp>
+        <p:nvSpPr>
+          <p:cNvPr id="34" name="Text 32"/>
+          <p:cNvSpPr/>
+          <p:nvPr/>
+        </p:nvSpPr>
+        <p:spPr>
+          <a:xfrm>
+            <a:off x="7909560" y="3502152"/>
+            <a:ext cx="731520" cy="292608"/>
+          </a:xfrm>
+          <a:prstGeom prst="rect">
+            <a:avLst/>
+          </a:prstGeom>
+          <a:noFill/>
+          <a:ln/>
+        </p:spPr>
+        <p:txBody>
+          <a:bodyPr wrap="square" lIns="0" tIns="0" rIns="0" bIns="0" rtlCol="0" anchor="ctr"/>
+          <a:lstStyle/>
+          <a:p>
+            <a:pPr algn="r" indent="0" marL="0">
+              <a:buNone/>
+            </a:pPr>
+            <a:r>
+              <a:rPr lang="en-US" sz="1100" b="1" dirty="0">
+                <a:solidFill>
+                  <a:srgbClr val="D73027"/>
+                </a:solidFill>
+                <a:latin typeface="Trebuchet MS" pitchFamily="34" charset="0"/>
+                <a:ea typeface="Trebuchet MS" pitchFamily="34" charset="-122"/>
+                <a:cs typeface="Trebuchet MS" pitchFamily="34" charset="-120"/>
+              </a:rPr>
+              <a:t>⌀ 23  ·  n = 14</a:t>
+            </a:r>
+            <a:endParaRPr lang="en-US" sz="1100" dirty="0"/>
+          </a:p>
+        </p:txBody>
+      </p:sp>
+      <p:sp>
+        <p:nvSpPr>
+          <p:cNvPr id="35" name="Text 33"/>
+          <p:cNvSpPr/>
+          <p:nvPr/>
+        </p:nvSpPr>
+        <p:spPr>
+          <a:xfrm>
+            <a:off x="4800600" y="3886200"/>
+            <a:ext cx="3749040" cy="384048"/>
+          </a:xfrm>
+          <a:prstGeom prst="rect">
+            <a:avLst/>
+          </a:prstGeom>
+          <a:noFill/>
+          <a:ln/>
+        </p:spPr>
+        <p:txBody>
+          <a:bodyPr wrap="square" lIns="0" tIns="0" rIns="0" bIns="0" rtlCol="0" anchor="ctr"/>
+          <a:lstStyle/>
+          <a:p>
+            <a:pPr indent="0" marL="0">
+              <a:buNone/>
+            </a:pPr>
+            <a:r>
+              <a:rPr lang="en-US" sz="950" i="1" dirty="0">
                 <a:solidFill>
                   <a:srgbClr val="0F172A"/>
                 </a:solidFill>
@@ -8054,136 +8009,124 @@
                 <a:ea typeface="Calibri" pitchFamily="34" charset="-122"/>
                 <a:cs typeface="Calibri" pitchFamily="34" charset="-120"/>
               </a:rPr>
-              <a:t>Höhe approximiert (Open-Elevation-API zum Zeitpunkt down) — kein definitives Urteil.</a:t>
-            </a:r>
-            <a:endParaRPr lang="en-US" sz="1050" dirty="0"/>
-          </a:p>
-          <a:p>
-            <a:pPr indent="0" marL="0">
-              <a:buNone/>
-            </a:pPr>
-            <a:r>
-              <a:rPr lang="en-US" sz="1050" dirty="0">
-                <a:solidFill>
-                  <a:srgbClr val="0F172A"/>
+              <a:t>Hottingen · Witikon · Leimbach · Affoltern · Hirzenbach · u. a.</a:t>
+            </a:r>
+            <a:endParaRPr lang="en-US" sz="950" dirty="0"/>
+          </a:p>
+        </p:txBody>
+      </p:sp>
+      <p:sp>
+        <p:nvSpPr>
+          <p:cNvPr id="36" name="Text 34"/>
+          <p:cNvSpPr/>
+          <p:nvPr/>
+        </p:nvSpPr>
+        <p:spPr>
+          <a:xfrm>
+            <a:off x="4800600" y="4251960"/>
+            <a:ext cx="3749040" cy="292608"/>
+          </a:xfrm>
+          <a:prstGeom prst="rect">
+            <a:avLst/>
+          </a:prstGeom>
+          <a:noFill/>
+          <a:ln/>
+        </p:spPr>
+        <p:txBody>
+          <a:bodyPr wrap="square" lIns="0" tIns="0" rIns="0" bIns="0" rtlCol="0" anchor="ctr"/>
+          <a:lstStyle/>
+          <a:p>
+            <a:pPr indent="0" marL="0">
+              <a:buNone/>
+            </a:pPr>
+            <a:r>
+              <a:rPr lang="en-US" sz="1000" dirty="0">
+                <a:solidFill>
+                  <a:srgbClr val="64748B"/>
                 </a:solidFill>
                 <a:latin typeface="Calibri" pitchFamily="34" charset="0"/>
                 <a:ea typeface="Calibri" pitchFamily="34" charset="-122"/>
                 <a:cs typeface="Calibri" pitchFamily="34" charset="-120"/>
               </a:rPr>
-              <a:t> </a:t>
-            </a:r>
-            <a:endParaRPr lang="en-US" sz="1050" dirty="0"/>
-          </a:p>
-          <a:p>
-            <a:pPr indent="0" marL="0">
-              <a:buNone/>
-            </a:pPr>
-            <a:r>
-              <a:rPr lang="en-US" sz="1050" b="1" dirty="0">
-                <a:solidFill>
-                  <a:srgbClr val="F59E0B"/>
+              <a:t>Alle Funktionen unterdurchschnittlich.</a:t>
+            </a:r>
+            <a:endParaRPr lang="en-US" sz="1000" dirty="0"/>
+          </a:p>
+        </p:txBody>
+      </p:sp>
+      <p:sp>
+        <p:nvSpPr>
+          <p:cNvPr id="37" name="Text 35"/>
+          <p:cNvSpPr/>
+          <p:nvPr/>
+        </p:nvSpPr>
+        <p:spPr>
+          <a:xfrm>
+            <a:off x="365760" y="4846320"/>
+            <a:ext cx="7315200" cy="228600"/>
+          </a:xfrm>
+          <a:prstGeom prst="rect">
+            <a:avLst/>
+          </a:prstGeom>
+          <a:noFill/>
+          <a:ln/>
+        </p:spPr>
+        <p:txBody>
+          <a:bodyPr wrap="square" lIns="0" tIns="0" rIns="0" bIns="0" rtlCol="0" anchor="ctr"/>
+          <a:lstStyle/>
+          <a:p>
+            <a:pPr algn="l" indent="0" marL="0">
+              <a:buNone/>
+            </a:pPr>
+            <a:r>
+              <a:rPr lang="en-US" sz="900" dirty="0">
+                <a:solidFill>
+                  <a:srgbClr val="64748B"/>
                 </a:solidFill>
                 <a:latin typeface="Calibri" pitchFamily="34" charset="0"/>
                 <a:ea typeface="Calibri" pitchFamily="34" charset="-122"/>
                 <a:cs typeface="Calibri" pitchFamily="34" charset="-120"/>
               </a:rPr>
-              <a:t>POI-Dichte tautologisch</a:t>
-            </a:r>
-            <a:endParaRPr lang="en-US" sz="1050" dirty="0"/>
-          </a:p>
-          <a:p>
-            <a:pPr indent="0" marL="0">
-              <a:buNone/>
-            </a:pPr>
-            <a:r>
-              <a:rPr lang="en-US" sz="1050" dirty="0">
-                <a:solidFill>
-                  <a:srgbClr val="0F172A"/>
+              <a:t>K-Means (k=4) auf 6 standardisierten Kategorie-Accessibilities · sklearn</a:t>
+            </a:r>
+            <a:endParaRPr lang="en-US" sz="900" dirty="0"/>
+          </a:p>
+        </p:txBody>
+      </p:sp>
+      <p:sp>
+        <p:nvSpPr>
+          <p:cNvPr id="38" name="Text 36"/>
+          <p:cNvSpPr/>
+          <p:nvPr/>
+        </p:nvSpPr>
+        <p:spPr>
+          <a:xfrm>
+            <a:off x="8229600" y="4846320"/>
+            <a:ext cx="822960" cy="228600"/>
+          </a:xfrm>
+          <a:prstGeom prst="rect">
+            <a:avLst/>
+          </a:prstGeom>
+          <a:noFill/>
+          <a:ln/>
+        </p:spPr>
+        <p:txBody>
+          <a:bodyPr wrap="square" lIns="0" tIns="0" rIns="0" bIns="0" rtlCol="0" anchor="ctr"/>
+          <a:lstStyle/>
+          <a:p>
+            <a:pPr algn="r" indent="0" marL="0">
+              <a:buNone/>
+            </a:pPr>
+            <a:r>
+              <a:rPr lang="en-US" sz="900" dirty="0">
+                <a:solidFill>
+                  <a:srgbClr val="64748B"/>
                 </a:solidFill>
                 <a:latin typeface="Calibri" pitchFamily="34" charset="0"/>
                 <a:ea typeface="Calibri" pitchFamily="34" charset="-122"/>
                 <a:cs typeface="Calibri" pitchFamily="34" charset="-120"/>
               </a:rPr>
-              <a:t>Score wird aus POIs berechnet — Korrelation strukturell zu erwarten.</a:t>
-            </a:r>
-            <a:endParaRPr lang="en-US" sz="1050" dirty="0"/>
-          </a:p>
-        </p:txBody>
-      </p:sp>
-      <p:sp>
-        <p:nvSpPr>
-          <p:cNvPr id="32" name="Text 30"/>
-          <p:cNvSpPr/>
-          <p:nvPr/>
-        </p:nvSpPr>
-        <p:spPr>
-          <a:xfrm>
-            <a:off x="365760" y="4846320"/>
-            <a:ext cx="7315200" cy="228600"/>
-          </a:xfrm>
-          <a:prstGeom prst="rect">
-            <a:avLst/>
-          </a:prstGeom>
-          <a:noFill/>
-          <a:ln/>
-        </p:spPr>
-        <p:txBody>
-          <a:bodyPr wrap="square" lIns="0" tIns="0" rIns="0" bIns="0" rtlCol="0" anchor="ctr"/>
-          <a:lstStyle/>
-          <a:p>
-            <a:pPr algn="l" indent="0" marL="0">
-              <a:buNone/>
-            </a:pPr>
-            <a:r>
-              <a:rPr lang="en-US" sz="900" dirty="0">
-                <a:solidFill>
-                  <a:srgbClr val="64748B"/>
-                </a:solidFill>
-                <a:latin typeface="Calibri" pitchFamily="34" charset="0"/>
-                <a:ea typeface="Calibri" pitchFamily="34" charset="-122"/>
-                <a:cs typeface="Calibri" pitchFamily="34" charset="-120"/>
-              </a:rPr>
-              <a:t>OLS-Regression mit statsmodels · Daten: reports/robustness_data.csv</a:t>
-            </a:r>
-            <a:endParaRPr lang="en-US" sz="900" dirty="0"/>
-          </a:p>
-        </p:txBody>
-      </p:sp>
-      <p:sp>
-        <p:nvSpPr>
-          <p:cNvPr id="33" name="Text 31"/>
-          <p:cNvSpPr/>
-          <p:nvPr/>
-        </p:nvSpPr>
-        <p:spPr>
-          <a:xfrm>
-            <a:off x="8229600" y="4846320"/>
-            <a:ext cx="822960" cy="228600"/>
-          </a:xfrm>
-          <a:prstGeom prst="rect">
-            <a:avLst/>
-          </a:prstGeom>
-          <a:noFill/>
-          <a:ln/>
-        </p:spPr>
-        <p:txBody>
-          <a:bodyPr wrap="square" lIns="0" tIns="0" rIns="0" bIns="0" rtlCol="0" anchor="ctr"/>
-          <a:lstStyle/>
-          <a:p>
-            <a:pPr algn="r" indent="0" marL="0">
-              <a:buNone/>
-            </a:pPr>
-            <a:r>
-              <a:rPr lang="en-US" sz="900" dirty="0">
-                <a:solidFill>
-                  <a:srgbClr val="64748B"/>
-                </a:solidFill>
-                <a:latin typeface="Calibri" pitchFamily="34" charset="0"/>
-                <a:ea typeface="Calibri" pitchFamily="34" charset="-122"/>
-                <a:cs typeface="Calibri" pitchFamily="34" charset="-120"/>
-              </a:rPr>
-              <a:t>15 / 17</a:t>
+              <a:t>15 / 19</a:t>
             </a:r>
             <a:endParaRPr lang="en-US" sz="900" dirty="0"/>
           </a:p>
@@ -8254,7 +8197,7 @@
                 <a:ea typeface="Trebuchet MS" pitchFamily="34" charset="-122"/>
                 <a:cs typeface="Trebuchet MS" pitchFamily="34" charset="-120"/>
               </a:rPr>
-              <a:t>SCHLUSS · 1/2</a:t>
+              <a:t>DISKUSSION · 1/2</a:t>
             </a:r>
             <a:endParaRPr lang="en-US" sz="1100" dirty="0"/>
           </a:p>
@@ -8293,7 +8236,7 @@
                 <a:ea typeface="Trebuchet MS" pitchFamily="34" charset="-122"/>
                 <a:cs typeface="Trebuchet MS" pitchFamily="34" charset="-120"/>
               </a:rPr>
-              <a:t>Limitationen unseres Modells</a:t>
+              <a:t>Antwort auf die Forschungsfrage</a:t>
             </a:r>
             <a:endParaRPr lang="en-US" sz="3000" dirty="0"/>
           </a:p>
@@ -8307,8 +8250,8 @@
         </p:nvSpPr>
         <p:spPr>
           <a:xfrm>
-            <a:off x="457200" y="1554480"/>
-            <a:ext cx="4023360" cy="1371600"/>
+            <a:off x="457200" y="1508760"/>
+            <a:ext cx="8229600" cy="1280160"/>
           </a:xfrm>
           <a:prstGeom prst="rect">
             <a:avLst/>
@@ -8339,18 +8282,18 @@
         </p:nvSpPr>
         <p:spPr>
           <a:xfrm>
-            <a:off x="457200" y="1554480"/>
-            <a:ext cx="4023360" cy="54864"/>
+            <a:off x="457200" y="1508760"/>
+            <a:ext cx="8229600" cy="54864"/>
           </a:xfrm>
           <a:prstGeom prst="rect">
             <a:avLst/>
           </a:prstGeom>
           <a:solidFill>
-            <a:srgbClr val="D73027"/>
+            <a:srgbClr val="065A82"/>
           </a:solidFill>
           <a:ln w="12700">
             <a:solidFill>
-              <a:srgbClr val="D73027"/>
+              <a:srgbClr val="065A82"/>
             </a:solidFill>
             <a:prstDash val="solid"/>
           </a:ln>
@@ -8364,63 +8307,24 @@
         </p:nvSpPr>
         <p:spPr>
           <a:xfrm>
-            <a:off x="640080" y="1719072"/>
-            <a:ext cx="3657600" cy="365760"/>
-          </a:xfrm>
-          <a:prstGeom prst="rect">
-            <a:avLst/>
-          </a:prstGeom>
-          <a:noFill/>
-          <a:ln/>
-        </p:spPr>
-        <p:txBody>
-          <a:bodyPr wrap="square" lIns="0" tIns="0" rIns="0" bIns="0" rtlCol="0" anchor="ctr"/>
-          <a:lstStyle/>
-          <a:p>
-            <a:pPr indent="0" marL="0">
-              <a:buNone/>
-            </a:pPr>
-            <a:r>
-              <a:rPr lang="en-US" sz="1400" b="1" dirty="0">
-                <a:solidFill>
-                  <a:srgbClr val="D73027"/>
-                </a:solidFill>
-                <a:latin typeface="Trebuchet MS" pitchFamily="34" charset="0"/>
-                <a:ea typeface="Trebuchet MS" pitchFamily="34" charset="-122"/>
-                <a:cs typeface="Trebuchet MS" pitchFamily="34" charset="-120"/>
-              </a:rPr>
-              <a:t>Datenqualität OSM</a:t>
-            </a:r>
-            <a:endParaRPr lang="en-US" sz="1400" dirty="0"/>
-          </a:p>
-        </p:txBody>
-      </p:sp>
-      <p:sp>
-        <p:nvSpPr>
-          <p:cNvPr id="7" name="Text 5"/>
-          <p:cNvSpPr/>
-          <p:nvPr/>
-        </p:nvSpPr>
-        <p:spPr>
-          <a:xfrm>
-            <a:off x="640080" y="2103120"/>
-            <a:ext cx="3657600" cy="777240"/>
-          </a:xfrm>
-          <a:prstGeom prst="rect">
-            <a:avLst/>
-          </a:prstGeom>
-          <a:noFill/>
-          <a:ln/>
-        </p:spPr>
-        <p:txBody>
-          <a:bodyPr wrap="square" lIns="0" tIns="0" rIns="0" bIns="0" rtlCol="0" anchor="ctr"/>
-          <a:lstStyle/>
-          <a:p>
-            <a:pPr indent="0" marL="0">
-              <a:buNone/>
-            </a:pPr>
-            <a:r>
-              <a:rPr lang="en-US" sz="1100" dirty="0">
+            <a:off x="640080" y="1691640"/>
+            <a:ext cx="7863840" cy="960120"/>
+          </a:xfrm>
+          <a:prstGeom prst="rect">
+            <a:avLst/>
+          </a:prstGeom>
+          <a:noFill/>
+          <a:ln/>
+        </p:spPr>
+        <p:txBody>
+          <a:bodyPr wrap="square" lIns="0" tIns="0" rIns="0" bIns="0" rtlCol="0" anchor="ctr"/>
+          <a:lstStyle/>
+          <a:p>
+            <a:pPr indent="0" marL="0">
+              <a:buNone/>
+            </a:pPr>
+            <a:r>
+              <a:rPr lang="en-US" sz="1400" dirty="0">
                 <a:solidFill>
                   <a:srgbClr val="0F172A"/>
                 </a:solidFill>
@@ -8428,22 +8332,78 @@
                 <a:ea typeface="Calibri" pitchFamily="34" charset="-122"/>
                 <a:cs typeface="Calibri" pitchFamily="34" charset="-120"/>
               </a:rPr>
-              <a:t>Kleine, unmappte Geschäfte fehlen. Annahme: Verzerrung gering, weil Geschäfte ähnlicher Klassifikation OSM-mässig konsistent sind.</a:t>
-            </a:r>
-            <a:endParaRPr lang="en-US" sz="1100" dirty="0"/>
-          </a:p>
-        </p:txBody>
-      </p:sp>
-      <p:sp>
-        <p:nvSpPr>
-          <p:cNvPr id="8" name="Shape 6"/>
-          <p:cNvSpPr/>
-          <p:nvPr/>
-        </p:nvSpPr>
-        <p:spPr>
-          <a:xfrm>
-            <a:off x="4663440" y="1554480"/>
-            <a:ext cx="4023360" cy="1371600"/>
+              <a:t>Die grössten Lücken zwischen Wohnen und täglicher Infrastruktur </a:t>
+            </a:r>
+            <a:pPr indent="0" marL="0">
+              <a:buNone/>
+            </a:pPr>
+            <a:r>
+              <a:rPr lang="en-US" sz="1400" b="1" dirty="0">
+                <a:solidFill>
+                  <a:srgbClr val="065A82"/>
+                </a:solidFill>
+                <a:latin typeface="Calibri" pitchFamily="34" charset="0"/>
+                <a:ea typeface="Calibri" pitchFamily="34" charset="-122"/>
+                <a:cs typeface="Calibri" pitchFamily="34" charset="-120"/>
+              </a:rPr>
+              <a:t>liegen in der Stadtperipherie</a:t>
+            </a:r>
+            <a:pPr indent="0" marL="0">
+              <a:buNone/>
+            </a:pPr>
+            <a:r>
+              <a:rPr lang="en-US" sz="1400" dirty="0">
+                <a:solidFill>
+                  <a:srgbClr val="0F172A"/>
+                </a:solidFill>
+                <a:latin typeface="Calibri" pitchFamily="34" charset="0"/>
+                <a:ea typeface="Calibri" pitchFamily="34" charset="-122"/>
+                <a:cs typeface="Calibri" pitchFamily="34" charset="-120"/>
+              </a:rPr>
+              <a:t> (Leimbach, Witikon, Hirzenbach, Affoltern, Friesenberg) — über 80 Score-Punkte Abstand zum Zentrum. Die Korrelation Score × Distanz zum HB beträgt </a:t>
+            </a:r>
+            <a:pPr indent="0" marL="0">
+              <a:buNone/>
+            </a:pPr>
+            <a:r>
+              <a:rPr lang="en-US" sz="1400" b="1" dirty="0">
+                <a:solidFill>
+                  <a:srgbClr val="D73027"/>
+                </a:solidFill>
+                <a:latin typeface="Calibri" pitchFamily="34" charset="0"/>
+                <a:ea typeface="Calibri" pitchFamily="34" charset="-122"/>
+                <a:cs typeface="Calibri" pitchFamily="34" charset="-120"/>
+              </a:rPr>
+              <a:t>ρ = −0.81 (p &lt; 10⁻⁸)</a:t>
+            </a:r>
+            <a:pPr indent="0" marL="0">
+              <a:buNone/>
+            </a:pPr>
+            <a:r>
+              <a:rPr lang="en-US" sz="1400" dirty="0">
+                <a:solidFill>
+                  <a:srgbClr val="0F172A"/>
+                </a:solidFill>
+                <a:latin typeface="Calibri" pitchFamily="34" charset="0"/>
+                <a:ea typeface="Calibri" pitchFamily="34" charset="-122"/>
+                <a:cs typeface="Calibri" pitchFamily="34" charset="-120"/>
+              </a:rPr>
+              <a:t> — Zentralität ist der dominante Treiber. Multi-Variate-Modell erklärt 86 % der Score-Varianz.</a:t>
+            </a:r>
+            <a:endParaRPr lang="en-US" sz="1400" dirty="0"/>
+          </a:p>
+        </p:txBody>
+      </p:sp>
+      <p:sp>
+        <p:nvSpPr>
+          <p:cNvPr id="7" name="Shape 5"/>
+          <p:cNvSpPr/>
+          <p:nvPr/>
+        </p:nvSpPr>
+        <p:spPr>
+          <a:xfrm>
+            <a:off x="457200" y="2971800"/>
+            <a:ext cx="2606040" cy="1508760"/>
           </a:xfrm>
           <a:prstGeom prst="rect">
             <a:avLst/>
@@ -8468,24 +8428,24 @@
       </p:sp>
       <p:sp>
         <p:nvSpPr>
-          <p:cNvPr id="9" name="Shape 7"/>
-          <p:cNvSpPr/>
-          <p:nvPr/>
-        </p:nvSpPr>
-        <p:spPr>
-          <a:xfrm>
-            <a:off x="4663440" y="1554480"/>
-            <a:ext cx="4023360" cy="54864"/>
+          <p:cNvPr id="8" name="Shape 6"/>
+          <p:cNvSpPr/>
+          <p:nvPr/>
+        </p:nvSpPr>
+        <p:spPr>
+          <a:xfrm>
+            <a:off x="457200" y="2971800"/>
+            <a:ext cx="2606040" cy="54864"/>
           </a:xfrm>
           <a:prstGeom prst="rect">
             <a:avLst/>
           </a:prstGeom>
           <a:solidFill>
-            <a:srgbClr val="D73027"/>
+            <a:srgbClr val="1C7293"/>
           </a:solidFill>
           <a:ln w="12700">
             <a:solidFill>
-              <a:srgbClr val="D73027"/>
+              <a:srgbClr val="1C7293"/>
             </a:solidFill>
             <a:prstDash val="solid"/>
           </a:ln>
@@ -8493,14 +8453,14 @@
       </p:sp>
       <p:sp>
         <p:nvSpPr>
-          <p:cNvPr id="10" name="Text 8"/>
-          <p:cNvSpPr/>
-          <p:nvPr/>
-        </p:nvSpPr>
-        <p:spPr>
-          <a:xfrm>
-            <a:off x="4846320" y="1719072"/>
-            <a:ext cx="3657600" cy="365760"/>
+          <p:cNvPr id="9" name="Text 7"/>
+          <p:cNvSpPr/>
+          <p:nvPr/>
+        </p:nvSpPr>
+        <p:spPr>
+          <a:xfrm>
+            <a:off x="640080" y="3108960"/>
+            <a:ext cx="2286000" cy="320040"/>
           </a:xfrm>
           <a:prstGeom prst="rect">
             <a:avLst/>
@@ -8518,13 +8478,13 @@
             <a:r>
               <a:rPr lang="en-US" sz="1400" b="1" dirty="0">
                 <a:solidFill>
-                  <a:srgbClr val="D73027"/>
+                  <a:srgbClr val="1C7293"/>
                 </a:solidFill>
                 <a:latin typeface="Trebuchet MS" pitchFamily="34" charset="0"/>
                 <a:ea typeface="Trebuchet MS" pitchFamily="34" charset="-122"/>
                 <a:cs typeface="Trebuchet MS" pitchFamily="34" charset="-120"/>
               </a:rPr>
-              <a:t>Mietpreis-Validierung offen</a:t>
+              <a:t>Stadtplanung</a:t>
             </a:r>
             <a:endParaRPr lang="en-US" sz="1400" dirty="0"/>
           </a:p>
@@ -8532,14 +8492,14 @@
       </p:sp>
       <p:sp>
         <p:nvSpPr>
-          <p:cNvPr id="11" name="Text 9"/>
-          <p:cNvSpPr/>
-          <p:nvPr/>
-        </p:nvSpPr>
-        <p:spPr>
-          <a:xfrm>
-            <a:off x="4846320" y="2103120"/>
-            <a:ext cx="3657600" cy="777240"/>
+          <p:cNvPr id="10" name="Text 8"/>
+          <p:cNvSpPr/>
+          <p:nvPr/>
+        </p:nvSpPr>
+        <p:spPr>
+          <a:xfrm>
+            <a:off x="640080" y="3456432"/>
+            <a:ext cx="2286000" cy="914400"/>
           </a:xfrm>
           <a:prstGeom prst="rect">
             <a:avLst/>
@@ -8563,7 +8523,7 @@
                 <a:ea typeface="Calibri" pitchFamily="34" charset="-122"/>
                 <a:cs typeface="Calibri" pitchFamily="34" charset="-120"/>
               </a:rPr>
-              <a:t>Stadt-Zürich-Mietpreis-Datensatz war zum Auswertungszeitpunkt unter dokumentierter URL nicht erreichbar (HTTP 404) — H1 wurde via Distanz zum HB validiert.</a:t>
+              <a:t>Versorgungs-Auflagen für Entwicklungsgebiete vor der Erstvermietung.</a:t>
             </a:r>
             <a:endParaRPr lang="en-US" sz="1100" dirty="0"/>
           </a:p>
@@ -8571,14 +8531,14 @@
       </p:sp>
       <p:sp>
         <p:nvSpPr>
-          <p:cNvPr id="12" name="Shape 10"/>
-          <p:cNvSpPr/>
-          <p:nvPr/>
-        </p:nvSpPr>
-        <p:spPr>
-          <a:xfrm>
-            <a:off x="457200" y="3063240"/>
-            <a:ext cx="4023360" cy="1371600"/>
+          <p:cNvPr id="11" name="Shape 9"/>
+          <p:cNvSpPr/>
+          <p:nvPr/>
+        </p:nvSpPr>
+        <p:spPr>
+          <a:xfrm>
+            <a:off x="3246120" y="2971800"/>
+            <a:ext cx="2606040" cy="1508760"/>
           </a:xfrm>
           <a:prstGeom prst="rect">
             <a:avLst/>
@@ -8603,24 +8563,24 @@
       </p:sp>
       <p:sp>
         <p:nvSpPr>
-          <p:cNvPr id="13" name="Shape 11"/>
-          <p:cNvSpPr/>
-          <p:nvPr/>
-        </p:nvSpPr>
-        <p:spPr>
-          <a:xfrm>
-            <a:off x="457200" y="3063240"/>
-            <a:ext cx="4023360" cy="54864"/>
+          <p:cNvPr id="12" name="Shape 10"/>
+          <p:cNvSpPr/>
+          <p:nvPr/>
+        </p:nvSpPr>
+        <p:spPr>
+          <a:xfrm>
+            <a:off x="3246120" y="2971800"/>
+            <a:ext cx="2606040" cy="54864"/>
           </a:xfrm>
           <a:prstGeom prst="rect">
             <a:avLst/>
           </a:prstGeom>
           <a:solidFill>
-            <a:srgbClr val="D73027"/>
+            <a:srgbClr val="1C7293"/>
           </a:solidFill>
           <a:ln w="12700">
             <a:solidFill>
-              <a:srgbClr val="D73027"/>
+              <a:srgbClr val="1C7293"/>
             </a:solidFill>
             <a:prstDash val="solid"/>
           </a:ln>
@@ -8628,14 +8588,14 @@
       </p:sp>
       <p:sp>
         <p:nvSpPr>
-          <p:cNvPr id="14" name="Text 12"/>
-          <p:cNvSpPr/>
-          <p:nvPr/>
-        </p:nvSpPr>
-        <p:spPr>
-          <a:xfrm>
-            <a:off x="640080" y="3227832"/>
-            <a:ext cx="3657600" cy="365760"/>
+          <p:cNvPr id="13" name="Text 11"/>
+          <p:cNvSpPr/>
+          <p:nvPr/>
+        </p:nvSpPr>
+        <p:spPr>
+          <a:xfrm>
+            <a:off x="3429000" y="3108960"/>
+            <a:ext cx="2286000" cy="320040"/>
           </a:xfrm>
           <a:prstGeom prst="rect">
             <a:avLst/>
@@ -8653,13 +8613,13 @@
             <a:r>
               <a:rPr lang="en-US" sz="1400" b="1" dirty="0">
                 <a:solidFill>
-                  <a:srgbClr val="D73027"/>
+                  <a:srgbClr val="1C7293"/>
                 </a:solidFill>
                 <a:latin typeface="Trebuchet MS" pitchFamily="34" charset="0"/>
                 <a:ea typeface="Trebuchet MS" pitchFamily="34" charset="-122"/>
                 <a:cs typeface="Trebuchet MS" pitchFamily="34" charset="-120"/>
               </a:rPr>
-              <a:t>Topografie nur approximiert</a:t>
+              <a:t>Investoren</a:t>
             </a:r>
             <a:endParaRPr lang="en-US" sz="1400" dirty="0"/>
           </a:p>
@@ -8667,14 +8627,14 @@
       </p:sp>
       <p:sp>
         <p:nvSpPr>
-          <p:cNvPr id="15" name="Text 13"/>
-          <p:cNvSpPr/>
-          <p:nvPr/>
-        </p:nvSpPr>
-        <p:spPr>
-          <a:xfrm>
-            <a:off x="640080" y="3611880"/>
-            <a:ext cx="3657600" cy="777240"/>
+          <p:cNvPr id="14" name="Text 12"/>
+          <p:cNvSpPr/>
+          <p:nvPr/>
+        </p:nvSpPr>
+        <p:spPr>
+          <a:xfrm>
+            <a:off x="3429000" y="3456432"/>
+            <a:ext cx="2286000" cy="914400"/>
           </a:xfrm>
           <a:prstGeom prst="rect">
             <a:avLst/>
@@ -8698,7 +8658,7 @@
                 <a:ea typeface="Calibri" pitchFamily="34" charset="-122"/>
                 <a:cs typeface="Calibri" pitchFamily="34" charset="-120"/>
               </a:rPr>
-              <a:t>Open-Elevation-API zum Auswertungszeitpunkt down. Höhen-Confounder konnte daher nicht final getestet werden — DEM-basiert wäre der saubere Weg.</a:t>
+              <a:t>Lagen mit Score &lt; 40 sind preislich Chance, bergen aber Vermarktungsrisiko.</a:t>
             </a:r>
             <a:endParaRPr lang="en-US" sz="1100" dirty="0"/>
           </a:p>
@@ -8706,14 +8666,14 @@
       </p:sp>
       <p:sp>
         <p:nvSpPr>
-          <p:cNvPr id="16" name="Shape 14"/>
-          <p:cNvSpPr/>
-          <p:nvPr/>
-        </p:nvSpPr>
-        <p:spPr>
-          <a:xfrm>
-            <a:off x="4663440" y="3063240"/>
-            <a:ext cx="4023360" cy="1371600"/>
+          <p:cNvPr id="15" name="Shape 13"/>
+          <p:cNvSpPr/>
+          <p:nvPr/>
+        </p:nvSpPr>
+        <p:spPr>
+          <a:xfrm>
+            <a:off x="6035040" y="2971800"/>
+            <a:ext cx="2606040" cy="1508760"/>
           </a:xfrm>
           <a:prstGeom prst="rect">
             <a:avLst/>
@@ -8738,24 +8698,24 @@
       </p:sp>
       <p:sp>
         <p:nvSpPr>
-          <p:cNvPr id="17" name="Shape 15"/>
-          <p:cNvSpPr/>
-          <p:nvPr/>
-        </p:nvSpPr>
-        <p:spPr>
-          <a:xfrm>
-            <a:off x="4663440" y="3063240"/>
-            <a:ext cx="4023360" cy="54864"/>
+          <p:cNvPr id="16" name="Shape 14"/>
+          <p:cNvSpPr/>
+          <p:nvPr/>
+        </p:nvSpPr>
+        <p:spPr>
+          <a:xfrm>
+            <a:off x="6035040" y="2971800"/>
+            <a:ext cx="2606040" cy="54864"/>
           </a:xfrm>
           <a:prstGeom prst="rect">
             <a:avLst/>
           </a:prstGeom>
           <a:solidFill>
-            <a:srgbClr val="D73027"/>
+            <a:srgbClr val="1C7293"/>
           </a:solidFill>
           <a:ln w="12700">
             <a:solidFill>
-              <a:srgbClr val="D73027"/>
+              <a:srgbClr val="1C7293"/>
             </a:solidFill>
             <a:prstDash val="solid"/>
           </a:ln>
@@ -8763,14 +8723,14 @@
       </p:sp>
       <p:sp>
         <p:nvSpPr>
-          <p:cNvPr id="18" name="Text 16"/>
-          <p:cNvSpPr/>
-          <p:nvPr/>
-        </p:nvSpPr>
-        <p:spPr>
-          <a:xfrm>
-            <a:off x="4846320" y="3227832"/>
-            <a:ext cx="3657600" cy="365760"/>
+          <p:cNvPr id="17" name="Text 15"/>
+          <p:cNvSpPr/>
+          <p:nvPr/>
+        </p:nvSpPr>
+        <p:spPr>
+          <a:xfrm>
+            <a:off x="6217920" y="3108960"/>
+            <a:ext cx="2286000" cy="320040"/>
           </a:xfrm>
           <a:prstGeom prst="rect">
             <a:avLst/>
@@ -8788,13 +8748,13 @@
             <a:r>
               <a:rPr lang="en-US" sz="1400" b="1" dirty="0">
                 <a:solidFill>
-                  <a:srgbClr val="D73027"/>
+                  <a:srgbClr val="1C7293"/>
                 </a:solidFill>
                 <a:latin typeface="Trebuchet MS" pitchFamily="34" charset="0"/>
                 <a:ea typeface="Trebuchet MS" pitchFamily="34" charset="-122"/>
                 <a:cs typeface="Trebuchet MS" pitchFamily="34" charset="-120"/>
               </a:rPr>
-              <a:t>Luftlinien-Approximation</a:t>
+              <a:t>Einzelhandel</a:t>
             </a:r>
             <a:endParaRPr lang="en-US" sz="1400" dirty="0"/>
           </a:p>
@@ -8802,14 +8762,14 @@
       </p:sp>
       <p:sp>
         <p:nvSpPr>
-          <p:cNvPr id="19" name="Text 17"/>
-          <p:cNvSpPr/>
-          <p:nvPr/>
-        </p:nvSpPr>
-        <p:spPr>
-          <a:xfrm>
-            <a:off x="4846320" y="3611880"/>
-            <a:ext cx="3657600" cy="777240"/>
+          <p:cNvPr id="18" name="Text 16"/>
+          <p:cNvSpPr/>
+          <p:nvPr/>
+        </p:nvSpPr>
+        <p:spPr>
+          <a:xfrm>
+            <a:off x="6217920" y="3456432"/>
+            <a:ext cx="2286000" cy="914400"/>
           </a:xfrm>
           <a:prstGeom prst="rect">
             <a:avLst/>
@@ -8833,7 +8793,7 @@
                 <a:ea typeface="Calibri" pitchFamily="34" charset="-122"/>
                 <a:cs typeface="Calibri" pitchFamily="34" charset="-120"/>
               </a:rPr>
-              <a:t>Score nutzt KDTree-Distanz, nicht echte Strassengraph-Wege. Validierung über OSMnx-Demo-Isochronen (Notebook 04).</a:t>
+              <a:t>Wüsten-Quartiere = priorisierte Standorte für Nahversorger-Expansion.</a:t>
             </a:r>
             <a:endParaRPr lang="en-US" sz="1100" dirty="0"/>
           </a:p>
@@ -8841,7 +8801,7 @@
       </p:sp>
       <p:sp>
         <p:nvSpPr>
-          <p:cNvPr id="20" name="Text 18"/>
+          <p:cNvPr id="19" name="Text 17"/>
           <p:cNvSpPr/>
           <p:nvPr/>
         </p:nvSpPr>
@@ -8872,7 +8832,7 @@
                 <a:ea typeface="Calibri" pitchFamily="34" charset="-122"/>
                 <a:cs typeface="Calibri" pitchFamily="34" charset="-120"/>
               </a:rPr>
-              <a:t>16 / 17</a:t>
+              <a:t>16 / 19</a:t>
             </a:r>
             <a:endParaRPr lang="en-US" sz="900" dirty="0"/>
           </a:p>
@@ -8889,6 +8849,2103 @@
 <file path=ppt/slides/slide17.xml><?xml version="1.0" encoding="utf-8"?>
 <p:sld xmlns:a="http://schemas.openxmlformats.org/drawingml/2006/main" xmlns:r="http://schemas.openxmlformats.org/officeDocument/2006/relationships" xmlns:p="http://schemas.openxmlformats.org/presentationml/2006/main">
   <p:cSld name="Slide 17">
+    <p:bg>
+      <p:bgPr>
+        <a:solidFill>
+          <a:srgbClr val="FFFFFF"/>
+        </a:solidFill>
+      </p:bgPr>
+    </p:bg>
+    <p:spTree>
+      <p:nvGrpSpPr>
+        <p:cNvPr id="1" name=""/>
+        <p:cNvGrpSpPr/>
+        <p:nvPr/>
+      </p:nvGrpSpPr>
+      <p:grpSpPr>
+        <a:xfrm>
+          <a:off x="0" y="0"/>
+          <a:ext cx="0" cy="0"/>
+          <a:chOff x="0" y="0"/>
+          <a:chExt cx="0" cy="0"/>
+        </a:xfrm>
+      </p:grpSpPr>
+      <p:sp>
+        <p:nvSpPr>
+          <p:cNvPr id="2" name="Text 0"/>
+          <p:cNvSpPr/>
+          <p:nvPr/>
+        </p:nvSpPr>
+        <p:spPr>
+          <a:xfrm>
+            <a:off x="365760" y="274320"/>
+            <a:ext cx="4572000" cy="274320"/>
+          </a:xfrm>
+          <a:prstGeom prst="rect">
+            <a:avLst/>
+          </a:prstGeom>
+          <a:noFill/>
+          <a:ln/>
+        </p:spPr>
+        <p:txBody>
+          <a:bodyPr wrap="square" lIns="0" tIns="0" rIns="0" bIns="0" rtlCol="0" anchor="ctr"/>
+          <a:lstStyle/>
+          <a:p>
+            <a:pPr indent="0" marL="0">
+              <a:buNone/>
+            </a:pPr>
+            <a:r>
+              <a:rPr lang="en-US" sz="1100" b="1" spc="400" kern="0" dirty="0">
+                <a:solidFill>
+                  <a:srgbClr val="1C7293"/>
+                </a:solidFill>
+                <a:latin typeface="Trebuchet MS" pitchFamily="34" charset="0"/>
+                <a:ea typeface="Trebuchet MS" pitchFamily="34" charset="-122"/>
+                <a:cs typeface="Trebuchet MS" pitchFamily="34" charset="-120"/>
+              </a:rPr>
+              <a:t>DISKUSSION · 2/2</a:t>
+            </a:r>
+            <a:endParaRPr lang="en-US" sz="1100" dirty="0"/>
+          </a:p>
+        </p:txBody>
+      </p:sp>
+      <p:sp>
+        <p:nvSpPr>
+          <p:cNvPr id="3" name="Text 1"/>
+          <p:cNvSpPr/>
+          <p:nvPr/>
+        </p:nvSpPr>
+        <p:spPr>
+          <a:xfrm>
+            <a:off x="365760" y="594360"/>
+            <a:ext cx="8412480" cy="640080"/>
+          </a:xfrm>
+          <a:prstGeom prst="rect">
+            <a:avLst/>
+          </a:prstGeom>
+          <a:noFill/>
+          <a:ln/>
+        </p:spPr>
+        <p:txBody>
+          <a:bodyPr wrap="square" lIns="0" tIns="0" rIns="0" bIns="0" rtlCol="0" anchor="ctr"/>
+          <a:lstStyle/>
+          <a:p>
+            <a:pPr indent="0" marL="0">
+              <a:buNone/>
+            </a:pPr>
+            <a:r>
+              <a:rPr lang="en-US" sz="3000" b="1" dirty="0">
+                <a:solidFill>
+                  <a:srgbClr val="0F172A"/>
+                </a:solidFill>
+                <a:latin typeface="Trebuchet MS" pitchFamily="34" charset="0"/>
+                <a:ea typeface="Trebuchet MS" pitchFamily="34" charset="-122"/>
+                <a:cs typeface="Trebuchet MS" pitchFamily="34" charset="-120"/>
+              </a:rPr>
+              <a:t>Robustness Check — H1 hält stand</a:t>
+            </a:r>
+            <a:endParaRPr lang="en-US" sz="3000" dirty="0"/>
+          </a:p>
+        </p:txBody>
+      </p:sp>
+      <p:sp>
+        <p:nvSpPr>
+          <p:cNvPr id="4" name="Shape 2"/>
+          <p:cNvSpPr/>
+          <p:nvPr/>
+        </p:nvSpPr>
+        <p:spPr>
+          <a:xfrm>
+            <a:off x="457200" y="1508760"/>
+            <a:ext cx="4937760" cy="3108960"/>
+          </a:xfrm>
+          <a:prstGeom prst="rect">
+            <a:avLst/>
+          </a:prstGeom>
+          <a:solidFill>
+            <a:srgbClr val="FFFFFF"/>
+          </a:solidFill>
+          <a:ln w="9525">
+            <a:solidFill>
+              <a:srgbClr val="E2E8F0"/>
+            </a:solidFill>
+            <a:prstDash val="solid"/>
+          </a:ln>
+          <a:effectLst>
+            <a:outerShdw sx="100000" sy="100000" kx="0" ky="0" algn="bl" rotWithShape="0" blurRad="101600" dist="12700" dir="5400000">
+              <a:srgbClr val="94A3B8">
+                <a:alpha val="12000"/>
+              </a:srgbClr>
+            </a:outerShdw>
+          </a:effectLst>
+        </p:spPr>
+      </p:sp>
+      <p:sp>
+        <p:nvSpPr>
+          <p:cNvPr id="5" name="Shape 3"/>
+          <p:cNvSpPr/>
+          <p:nvPr/>
+        </p:nvSpPr>
+        <p:spPr>
+          <a:xfrm>
+            <a:off x="457200" y="1508760"/>
+            <a:ext cx="4937760" cy="54864"/>
+          </a:xfrm>
+          <a:prstGeom prst="rect">
+            <a:avLst/>
+          </a:prstGeom>
+          <a:solidFill>
+            <a:srgbClr val="065A82"/>
+          </a:solidFill>
+          <a:ln w="12700">
+            <a:solidFill>
+              <a:srgbClr val="065A82"/>
+            </a:solidFill>
+            <a:prstDash val="solid"/>
+          </a:ln>
+        </p:spPr>
+      </p:sp>
+      <p:sp>
+        <p:nvSpPr>
+          <p:cNvPr id="6" name="Text 4"/>
+          <p:cNvSpPr/>
+          <p:nvPr/>
+        </p:nvSpPr>
+        <p:spPr>
+          <a:xfrm>
+            <a:off x="640080" y="1645920"/>
+            <a:ext cx="4572000" cy="320040"/>
+          </a:xfrm>
+          <a:prstGeom prst="rect">
+            <a:avLst/>
+          </a:prstGeom>
+          <a:noFill/>
+          <a:ln/>
+        </p:spPr>
+        <p:txBody>
+          <a:bodyPr wrap="square" lIns="0" tIns="0" rIns="0" bIns="0" rtlCol="0" anchor="ctr"/>
+          <a:lstStyle/>
+          <a:p>
+            <a:pPr indent="0" marL="0">
+              <a:buNone/>
+            </a:pPr>
+            <a:r>
+              <a:rPr lang="en-US" sz="1300" b="1" dirty="0">
+                <a:solidFill>
+                  <a:srgbClr val="065A82"/>
+                </a:solidFill>
+                <a:latin typeface="Trebuchet MS" pitchFamily="34" charset="0"/>
+                <a:ea typeface="Trebuchet MS" pitchFamily="34" charset="-122"/>
+                <a:cs typeface="Trebuchet MS" pitchFamily="34" charset="-120"/>
+              </a:rPr>
+              <a:t>Multi-Variate-Regression  (n = 34, R² = 0.86)</a:t>
+            </a:r>
+            <a:endParaRPr lang="en-US" sz="1300" dirty="0"/>
+          </a:p>
+        </p:txBody>
+      </p:sp>
+      <p:sp>
+        <p:nvSpPr>
+          <p:cNvPr id="7" name="Text 5"/>
+          <p:cNvSpPr/>
+          <p:nvPr/>
+        </p:nvSpPr>
+        <p:spPr>
+          <a:xfrm>
+            <a:off x="640080" y="2057400"/>
+            <a:ext cx="1463040" cy="274320"/>
+          </a:xfrm>
+          <a:prstGeom prst="rect">
+            <a:avLst/>
+          </a:prstGeom>
+          <a:noFill/>
+          <a:ln/>
+        </p:spPr>
+        <p:txBody>
+          <a:bodyPr wrap="square" lIns="0" tIns="0" rIns="0" bIns="0" rtlCol="0" anchor="ctr"/>
+          <a:lstStyle/>
+          <a:p>
+            <a:pPr indent="0" marL="0">
+              <a:buNone/>
+            </a:pPr>
+            <a:r>
+              <a:rPr lang="en-US" sz="1000" b="1" dirty="0">
+                <a:solidFill>
+                  <a:srgbClr val="64748B"/>
+                </a:solidFill>
+                <a:latin typeface="Trebuchet MS" pitchFamily="34" charset="0"/>
+                <a:ea typeface="Trebuchet MS" pitchFamily="34" charset="-122"/>
+                <a:cs typeface="Trebuchet MS" pitchFamily="34" charset="-120"/>
+              </a:rPr>
+              <a:t>Prädiktor</a:t>
+            </a:r>
+            <a:endParaRPr lang="en-US" sz="1000" dirty="0"/>
+          </a:p>
+        </p:txBody>
+      </p:sp>
+      <p:sp>
+        <p:nvSpPr>
+          <p:cNvPr id="8" name="Text 6"/>
+          <p:cNvSpPr/>
+          <p:nvPr/>
+        </p:nvSpPr>
+        <p:spPr>
+          <a:xfrm>
+            <a:off x="2103120" y="2057400"/>
+            <a:ext cx="868680" cy="274320"/>
+          </a:xfrm>
+          <a:prstGeom prst="rect">
+            <a:avLst/>
+          </a:prstGeom>
+          <a:noFill/>
+          <a:ln/>
+        </p:spPr>
+        <p:txBody>
+          <a:bodyPr wrap="square" lIns="0" tIns="0" rIns="0" bIns="0" rtlCol="0" anchor="ctr"/>
+          <a:lstStyle/>
+          <a:p>
+            <a:pPr indent="0" marL="0">
+              <a:buNone/>
+            </a:pPr>
+            <a:r>
+              <a:rPr lang="en-US" sz="1000" b="1" dirty="0">
+                <a:solidFill>
+                  <a:srgbClr val="64748B"/>
+                </a:solidFill>
+                <a:latin typeface="Trebuchet MS" pitchFamily="34" charset="0"/>
+                <a:ea typeface="Trebuchet MS" pitchFamily="34" charset="-122"/>
+                <a:cs typeface="Trebuchet MS" pitchFamily="34" charset="-120"/>
+              </a:rPr>
+              <a:t>bivar. r</a:t>
+            </a:r>
+            <a:endParaRPr lang="en-US" sz="1000" dirty="0"/>
+          </a:p>
+        </p:txBody>
+      </p:sp>
+      <p:sp>
+        <p:nvSpPr>
+          <p:cNvPr id="9" name="Text 7"/>
+          <p:cNvSpPr/>
+          <p:nvPr/>
+        </p:nvSpPr>
+        <p:spPr>
+          <a:xfrm>
+            <a:off x="2971800" y="2057400"/>
+            <a:ext cx="868680" cy="274320"/>
+          </a:xfrm>
+          <a:prstGeom prst="rect">
+            <a:avLst/>
+          </a:prstGeom>
+          <a:noFill/>
+          <a:ln/>
+        </p:spPr>
+        <p:txBody>
+          <a:bodyPr wrap="square" lIns="0" tIns="0" rIns="0" bIns="0" rtlCol="0" anchor="ctr"/>
+          <a:lstStyle/>
+          <a:p>
+            <a:pPr indent="0" marL="0">
+              <a:buNone/>
+            </a:pPr>
+            <a:r>
+              <a:rPr lang="en-US" sz="1000" b="1" dirty="0">
+                <a:solidFill>
+                  <a:srgbClr val="64748B"/>
+                </a:solidFill>
+                <a:latin typeface="Trebuchet MS" pitchFamily="34" charset="0"/>
+                <a:ea typeface="Trebuchet MS" pitchFamily="34" charset="-122"/>
+                <a:cs typeface="Trebuchet MS" pitchFamily="34" charset="-120"/>
+              </a:rPr>
+              <a:t>partiell β</a:t>
+            </a:r>
+            <a:endParaRPr lang="en-US" sz="1000" dirty="0"/>
+          </a:p>
+        </p:txBody>
+      </p:sp>
+      <p:sp>
+        <p:nvSpPr>
+          <p:cNvPr id="10" name="Text 8"/>
+          <p:cNvSpPr/>
+          <p:nvPr/>
+        </p:nvSpPr>
+        <p:spPr>
+          <a:xfrm>
+            <a:off x="3840480" y="2057400"/>
+            <a:ext cx="868680" cy="274320"/>
+          </a:xfrm>
+          <a:prstGeom prst="rect">
+            <a:avLst/>
+          </a:prstGeom>
+          <a:noFill/>
+          <a:ln/>
+        </p:spPr>
+        <p:txBody>
+          <a:bodyPr wrap="square" lIns="0" tIns="0" rIns="0" bIns="0" rtlCol="0" anchor="ctr"/>
+          <a:lstStyle/>
+          <a:p>
+            <a:pPr indent="0" marL="0">
+              <a:buNone/>
+            </a:pPr>
+            <a:r>
+              <a:rPr lang="en-US" sz="1000" b="1" dirty="0">
+                <a:solidFill>
+                  <a:srgbClr val="64748B"/>
+                </a:solidFill>
+                <a:latin typeface="Trebuchet MS" pitchFamily="34" charset="0"/>
+                <a:ea typeface="Trebuchet MS" pitchFamily="34" charset="-122"/>
+                <a:cs typeface="Trebuchet MS" pitchFamily="34" charset="-120"/>
+              </a:rPr>
+              <a:t>p-Wert</a:t>
+            </a:r>
+            <a:endParaRPr lang="en-US" sz="1000" dirty="0"/>
+          </a:p>
+        </p:txBody>
+      </p:sp>
+      <p:sp>
+        <p:nvSpPr>
+          <p:cNvPr id="11" name="Text 9"/>
+          <p:cNvSpPr/>
+          <p:nvPr/>
+        </p:nvSpPr>
+        <p:spPr>
+          <a:xfrm>
+            <a:off x="4709160" y="2057400"/>
+            <a:ext cx="640080" cy="274320"/>
+          </a:xfrm>
+          <a:prstGeom prst="rect">
+            <a:avLst/>
+          </a:prstGeom>
+          <a:noFill/>
+          <a:ln/>
+        </p:spPr>
+        <p:txBody>
+          <a:bodyPr wrap="square" lIns="0" tIns="0" rIns="0" bIns="0" rtlCol="0" anchor="ctr"/>
+          <a:lstStyle/>
+          <a:p>
+            <a:pPr indent="0" marL="0">
+              <a:buNone/>
+            </a:pPr>
+            <a:r>
+              <a:rPr lang="en-US" sz="1000" b="1" dirty="0">
+                <a:solidFill>
+                  <a:srgbClr val="64748B"/>
+                </a:solidFill>
+                <a:latin typeface="Trebuchet MS" pitchFamily="34" charset="0"/>
+                <a:ea typeface="Trebuchet MS" pitchFamily="34" charset="-122"/>
+                <a:cs typeface="Trebuchet MS" pitchFamily="34" charset="-120"/>
+              </a:rPr>
+              <a:t>Status</a:t>
+            </a:r>
+            <a:endParaRPr lang="en-US" sz="1000" dirty="0"/>
+          </a:p>
+        </p:txBody>
+      </p:sp>
+      <p:sp>
+        <p:nvSpPr>
+          <p:cNvPr id="12" name="Text 10"/>
+          <p:cNvSpPr/>
+          <p:nvPr/>
+        </p:nvSpPr>
+        <p:spPr>
+          <a:xfrm>
+            <a:off x="640080" y="2423160"/>
+            <a:ext cx="1463040" cy="292608"/>
+          </a:xfrm>
+          <a:prstGeom prst="rect">
+            <a:avLst/>
+          </a:prstGeom>
+          <a:noFill/>
+          <a:ln/>
+        </p:spPr>
+        <p:txBody>
+          <a:bodyPr wrap="square" lIns="0" tIns="0" rIns="0" bIns="0" rtlCol="0" anchor="ctr"/>
+          <a:lstStyle/>
+          <a:p>
+            <a:pPr indent="0" marL="0">
+              <a:buNone/>
+            </a:pPr>
+            <a:r>
+              <a:rPr lang="en-US" sz="1100" b="1" dirty="0">
+                <a:solidFill>
+                  <a:srgbClr val="0F172A"/>
+                </a:solidFill>
+                <a:latin typeface="Calibri" pitchFamily="34" charset="0"/>
+                <a:ea typeface="Calibri" pitchFamily="34" charset="-122"/>
+                <a:cs typeface="Calibri" pitchFamily="34" charset="-120"/>
+              </a:rPr>
+              <a:t>Distanz HB</a:t>
+            </a:r>
+            <a:endParaRPr lang="en-US" sz="1100" dirty="0"/>
+          </a:p>
+        </p:txBody>
+      </p:sp>
+      <p:sp>
+        <p:nvSpPr>
+          <p:cNvPr id="13" name="Text 11"/>
+          <p:cNvSpPr/>
+          <p:nvPr/>
+        </p:nvSpPr>
+        <p:spPr>
+          <a:xfrm>
+            <a:off x="2103120" y="2423160"/>
+            <a:ext cx="868680" cy="292608"/>
+          </a:xfrm>
+          <a:prstGeom prst="rect">
+            <a:avLst/>
+          </a:prstGeom>
+          <a:noFill/>
+          <a:ln/>
+        </p:spPr>
+        <p:txBody>
+          <a:bodyPr wrap="square" lIns="0" tIns="0" rIns="0" bIns="0" rtlCol="0" anchor="ctr"/>
+          <a:lstStyle/>
+          <a:p>
+            <a:pPr indent="0" marL="0">
+              <a:buNone/>
+            </a:pPr>
+            <a:r>
+              <a:rPr lang="en-US" sz="1050" dirty="0">
+                <a:solidFill>
+                  <a:srgbClr val="0F172A"/>
+                </a:solidFill>
+                <a:latin typeface="Consolas" pitchFamily="34" charset="0"/>
+                <a:ea typeface="Consolas" pitchFamily="34" charset="-122"/>
+                <a:cs typeface="Consolas" pitchFamily="34" charset="-120"/>
+              </a:rPr>
+              <a:t>−0.84</a:t>
+            </a:r>
+            <a:endParaRPr lang="en-US" sz="1050" dirty="0"/>
+          </a:p>
+        </p:txBody>
+      </p:sp>
+      <p:sp>
+        <p:nvSpPr>
+          <p:cNvPr id="14" name="Text 12"/>
+          <p:cNvSpPr/>
+          <p:nvPr/>
+        </p:nvSpPr>
+        <p:spPr>
+          <a:xfrm>
+            <a:off x="2971800" y="2423160"/>
+            <a:ext cx="868680" cy="292608"/>
+          </a:xfrm>
+          <a:prstGeom prst="rect">
+            <a:avLst/>
+          </a:prstGeom>
+          <a:noFill/>
+          <a:ln/>
+        </p:spPr>
+        <p:txBody>
+          <a:bodyPr wrap="square" lIns="0" tIns="0" rIns="0" bIns="0" rtlCol="0" anchor="ctr"/>
+          <a:lstStyle/>
+          <a:p>
+            <a:pPr indent="0" marL="0">
+              <a:buNone/>
+            </a:pPr>
+            <a:r>
+              <a:rPr lang="en-US" sz="1050" dirty="0">
+                <a:solidFill>
+                  <a:srgbClr val="0F172A"/>
+                </a:solidFill>
+                <a:latin typeface="Consolas" pitchFamily="34" charset="0"/>
+                <a:ea typeface="Consolas" pitchFamily="34" charset="-122"/>
+                <a:cs typeface="Consolas" pitchFamily="34" charset="-120"/>
+              </a:rPr>
+              <a:t>−9.28</a:t>
+            </a:r>
+            <a:endParaRPr lang="en-US" sz="1050" dirty="0"/>
+          </a:p>
+        </p:txBody>
+      </p:sp>
+      <p:sp>
+        <p:nvSpPr>
+          <p:cNvPr id="15" name="Text 13"/>
+          <p:cNvSpPr/>
+          <p:nvPr/>
+        </p:nvSpPr>
+        <p:spPr>
+          <a:xfrm>
+            <a:off x="3840480" y="2423160"/>
+            <a:ext cx="868680" cy="292608"/>
+          </a:xfrm>
+          <a:prstGeom prst="rect">
+            <a:avLst/>
+          </a:prstGeom>
+          <a:noFill/>
+          <a:ln/>
+        </p:spPr>
+        <p:txBody>
+          <a:bodyPr wrap="square" lIns="0" tIns="0" rIns="0" bIns="0" rtlCol="0" anchor="ctr"/>
+          <a:lstStyle/>
+          <a:p>
+            <a:pPr indent="0" marL="0">
+              <a:buNone/>
+            </a:pPr>
+            <a:r>
+              <a:rPr lang="en-US" sz="1050" dirty="0">
+                <a:solidFill>
+                  <a:srgbClr val="0F172A"/>
+                </a:solidFill>
+                <a:latin typeface="Consolas" pitchFamily="34" charset="0"/>
+                <a:ea typeface="Consolas" pitchFamily="34" charset="-122"/>
+                <a:cs typeface="Consolas" pitchFamily="34" charset="-120"/>
+              </a:rPr>
+              <a:t>&lt;10⁻⁵</a:t>
+            </a:r>
+            <a:endParaRPr lang="en-US" sz="1050" dirty="0"/>
+          </a:p>
+        </p:txBody>
+      </p:sp>
+      <p:sp>
+        <p:nvSpPr>
+          <p:cNvPr id="16" name="Text 14"/>
+          <p:cNvSpPr/>
+          <p:nvPr/>
+        </p:nvSpPr>
+        <p:spPr>
+          <a:xfrm>
+            <a:off x="4709160" y="2423160"/>
+            <a:ext cx="640080" cy="292608"/>
+          </a:xfrm>
+          <a:prstGeom prst="rect">
+            <a:avLst/>
+          </a:prstGeom>
+          <a:noFill/>
+          <a:ln/>
+        </p:spPr>
+        <p:txBody>
+          <a:bodyPr wrap="square" lIns="0" tIns="0" rIns="0" bIns="0" rtlCol="0" anchor="ctr"/>
+          <a:lstStyle/>
+          <a:p>
+            <a:pPr indent="0" marL="0">
+              <a:buNone/>
+            </a:pPr>
+            <a:r>
+              <a:rPr lang="en-US" sz="1050" b="1" dirty="0">
+                <a:solidFill>
+                  <a:srgbClr val="1A9850"/>
+                </a:solidFill>
+                <a:latin typeface="Consolas" pitchFamily="34" charset="0"/>
+                <a:ea typeface="Consolas" pitchFamily="34" charset="-122"/>
+                <a:cs typeface="Consolas" pitchFamily="34" charset="-120"/>
+              </a:rPr>
+              <a:t>***</a:t>
+            </a:r>
+            <a:endParaRPr lang="en-US" sz="1050" dirty="0"/>
+          </a:p>
+        </p:txBody>
+      </p:sp>
+      <p:sp>
+        <p:nvSpPr>
+          <p:cNvPr id="17" name="Text 15"/>
+          <p:cNvSpPr/>
+          <p:nvPr/>
+        </p:nvSpPr>
+        <p:spPr>
+          <a:xfrm>
+            <a:off x="640080" y="2807208"/>
+            <a:ext cx="1463040" cy="292608"/>
+          </a:xfrm>
+          <a:prstGeom prst="rect">
+            <a:avLst/>
+          </a:prstGeom>
+          <a:noFill/>
+          <a:ln/>
+        </p:spPr>
+        <p:txBody>
+          <a:bodyPr wrap="square" lIns="0" tIns="0" rIns="0" bIns="0" rtlCol="0" anchor="ctr"/>
+          <a:lstStyle/>
+          <a:p>
+            <a:pPr indent="0" marL="0">
+              <a:buNone/>
+            </a:pPr>
+            <a:r>
+              <a:rPr lang="en-US" sz="1100" b="1" dirty="0">
+                <a:solidFill>
+                  <a:srgbClr val="0F172A"/>
+                </a:solidFill>
+                <a:latin typeface="Calibri" pitchFamily="34" charset="0"/>
+                <a:ea typeface="Calibri" pitchFamily="34" charset="-122"/>
+                <a:cs typeface="Calibri" pitchFamily="34" charset="-120"/>
+              </a:rPr>
+              <a:t>Höhe (approx)</a:t>
+            </a:r>
+            <a:endParaRPr lang="en-US" sz="1100" dirty="0"/>
+          </a:p>
+        </p:txBody>
+      </p:sp>
+      <p:sp>
+        <p:nvSpPr>
+          <p:cNvPr id="18" name="Text 16"/>
+          <p:cNvSpPr/>
+          <p:nvPr/>
+        </p:nvSpPr>
+        <p:spPr>
+          <a:xfrm>
+            <a:off x="2103120" y="2807208"/>
+            <a:ext cx="868680" cy="292608"/>
+          </a:xfrm>
+          <a:prstGeom prst="rect">
+            <a:avLst/>
+          </a:prstGeom>
+          <a:noFill/>
+          <a:ln/>
+        </p:spPr>
+        <p:txBody>
+          <a:bodyPr wrap="square" lIns="0" tIns="0" rIns="0" bIns="0" rtlCol="0" anchor="ctr"/>
+          <a:lstStyle/>
+          <a:p>
+            <a:pPr indent="0" marL="0">
+              <a:buNone/>
+            </a:pPr>
+            <a:r>
+              <a:rPr lang="en-US" sz="1050" dirty="0">
+                <a:solidFill>
+                  <a:srgbClr val="0F172A"/>
+                </a:solidFill>
+                <a:latin typeface="Consolas" pitchFamily="34" charset="0"/>
+                <a:ea typeface="Consolas" pitchFamily="34" charset="-122"/>
+                <a:cs typeface="Consolas" pitchFamily="34" charset="-120"/>
+              </a:rPr>
+              <a:t>−0.04</a:t>
+            </a:r>
+            <a:endParaRPr lang="en-US" sz="1050" dirty="0"/>
+          </a:p>
+        </p:txBody>
+      </p:sp>
+      <p:sp>
+        <p:nvSpPr>
+          <p:cNvPr id="19" name="Text 17"/>
+          <p:cNvSpPr/>
+          <p:nvPr/>
+        </p:nvSpPr>
+        <p:spPr>
+          <a:xfrm>
+            <a:off x="2971800" y="2807208"/>
+            <a:ext cx="868680" cy="292608"/>
+          </a:xfrm>
+          <a:prstGeom prst="rect">
+            <a:avLst/>
+          </a:prstGeom>
+          <a:noFill/>
+          <a:ln/>
+        </p:spPr>
+        <p:txBody>
+          <a:bodyPr wrap="square" lIns="0" tIns="0" rIns="0" bIns="0" rtlCol="0" anchor="ctr"/>
+          <a:lstStyle/>
+          <a:p>
+            <a:pPr indent="0" marL="0">
+              <a:buNone/>
+            </a:pPr>
+            <a:r>
+              <a:rPr lang="en-US" sz="1050" dirty="0">
+                <a:solidFill>
+                  <a:srgbClr val="0F172A"/>
+                </a:solidFill>
+                <a:latin typeface="Consolas" pitchFamily="34" charset="0"/>
+                <a:ea typeface="Consolas" pitchFamily="34" charset="-122"/>
+                <a:cs typeface="Consolas" pitchFamily="34" charset="-120"/>
+              </a:rPr>
+              <a:t>+0.03</a:t>
+            </a:r>
+            <a:endParaRPr lang="en-US" sz="1050" dirty="0"/>
+          </a:p>
+        </p:txBody>
+      </p:sp>
+      <p:sp>
+        <p:nvSpPr>
+          <p:cNvPr id="20" name="Text 18"/>
+          <p:cNvSpPr/>
+          <p:nvPr/>
+        </p:nvSpPr>
+        <p:spPr>
+          <a:xfrm>
+            <a:off x="3840480" y="2807208"/>
+            <a:ext cx="868680" cy="292608"/>
+          </a:xfrm>
+          <a:prstGeom prst="rect">
+            <a:avLst/>
+          </a:prstGeom>
+          <a:noFill/>
+          <a:ln/>
+        </p:spPr>
+        <p:txBody>
+          <a:bodyPr wrap="square" lIns="0" tIns="0" rIns="0" bIns="0" rtlCol="0" anchor="ctr"/>
+          <a:lstStyle/>
+          <a:p>
+            <a:pPr indent="0" marL="0">
+              <a:buNone/>
+            </a:pPr>
+            <a:r>
+              <a:rPr lang="en-US" sz="1050" dirty="0">
+                <a:solidFill>
+                  <a:srgbClr val="0F172A"/>
+                </a:solidFill>
+                <a:latin typeface="Consolas" pitchFamily="34" charset="0"/>
+                <a:ea typeface="Consolas" pitchFamily="34" charset="-122"/>
+                <a:cs typeface="Consolas" pitchFamily="34" charset="-120"/>
+              </a:rPr>
+              <a:t>0.640</a:t>
+            </a:r>
+            <a:endParaRPr lang="en-US" sz="1050" dirty="0"/>
+          </a:p>
+        </p:txBody>
+      </p:sp>
+      <p:sp>
+        <p:nvSpPr>
+          <p:cNvPr id="21" name="Text 19"/>
+          <p:cNvSpPr/>
+          <p:nvPr/>
+        </p:nvSpPr>
+        <p:spPr>
+          <a:xfrm>
+            <a:off x="4709160" y="2807208"/>
+            <a:ext cx="640080" cy="292608"/>
+          </a:xfrm>
+          <a:prstGeom prst="rect">
+            <a:avLst/>
+          </a:prstGeom>
+          <a:noFill/>
+          <a:ln/>
+        </p:spPr>
+        <p:txBody>
+          <a:bodyPr wrap="square" lIns="0" tIns="0" rIns="0" bIns="0" rtlCol="0" anchor="ctr"/>
+          <a:lstStyle/>
+          <a:p>
+            <a:pPr indent="0" marL="0">
+              <a:buNone/>
+            </a:pPr>
+            <a:r>
+              <a:rPr lang="en-US" sz="1050" b="1" dirty="0">
+                <a:solidFill>
+                  <a:srgbClr val="64748B"/>
+                </a:solidFill>
+                <a:latin typeface="Consolas" pitchFamily="34" charset="0"/>
+                <a:ea typeface="Consolas" pitchFamily="34" charset="-122"/>
+                <a:cs typeface="Consolas" pitchFamily="34" charset="-120"/>
+              </a:rPr>
+              <a:t>n.s.</a:t>
+            </a:r>
+            <a:endParaRPr lang="en-US" sz="1050" dirty="0"/>
+          </a:p>
+        </p:txBody>
+      </p:sp>
+      <p:sp>
+        <p:nvSpPr>
+          <p:cNvPr id="22" name="Text 20"/>
+          <p:cNvSpPr/>
+          <p:nvPr/>
+        </p:nvSpPr>
+        <p:spPr>
+          <a:xfrm>
+            <a:off x="640080" y="3191256"/>
+            <a:ext cx="1463040" cy="292608"/>
+          </a:xfrm>
+          <a:prstGeom prst="rect">
+            <a:avLst/>
+          </a:prstGeom>
+          <a:noFill/>
+          <a:ln/>
+        </p:spPr>
+        <p:txBody>
+          <a:bodyPr wrap="square" lIns="0" tIns="0" rIns="0" bIns="0" rtlCol="0" anchor="ctr"/>
+          <a:lstStyle/>
+          <a:p>
+            <a:pPr indent="0" marL="0">
+              <a:buNone/>
+            </a:pPr>
+            <a:r>
+              <a:rPr lang="en-US" sz="1100" b="1" dirty="0">
+                <a:solidFill>
+                  <a:srgbClr val="0F172A"/>
+                </a:solidFill>
+                <a:latin typeface="Calibri" pitchFamily="34" charset="0"/>
+                <a:ea typeface="Calibri" pitchFamily="34" charset="-122"/>
+                <a:cs typeface="Calibri" pitchFamily="34" charset="-120"/>
+              </a:rPr>
+              <a:t>POI-Dichte</a:t>
+            </a:r>
+            <a:endParaRPr lang="en-US" sz="1100" dirty="0"/>
+          </a:p>
+        </p:txBody>
+      </p:sp>
+      <p:sp>
+        <p:nvSpPr>
+          <p:cNvPr id="23" name="Text 21"/>
+          <p:cNvSpPr/>
+          <p:nvPr/>
+        </p:nvSpPr>
+        <p:spPr>
+          <a:xfrm>
+            <a:off x="2103120" y="3191256"/>
+            <a:ext cx="868680" cy="292608"/>
+          </a:xfrm>
+          <a:prstGeom prst="rect">
+            <a:avLst/>
+          </a:prstGeom>
+          <a:noFill/>
+          <a:ln/>
+        </p:spPr>
+        <p:txBody>
+          <a:bodyPr wrap="square" lIns="0" tIns="0" rIns="0" bIns="0" rtlCol="0" anchor="ctr"/>
+          <a:lstStyle/>
+          <a:p>
+            <a:pPr indent="0" marL="0">
+              <a:buNone/>
+            </a:pPr>
+            <a:r>
+              <a:rPr lang="en-US" sz="1050" dirty="0">
+                <a:solidFill>
+                  <a:srgbClr val="0F172A"/>
+                </a:solidFill>
+                <a:latin typeface="Consolas" pitchFamily="34" charset="0"/>
+                <a:ea typeface="Consolas" pitchFamily="34" charset="-122"/>
+                <a:cs typeface="Consolas" pitchFamily="34" charset="-120"/>
+              </a:rPr>
+              <a:t>+0.86</a:t>
+            </a:r>
+            <a:endParaRPr lang="en-US" sz="1050" dirty="0"/>
+          </a:p>
+        </p:txBody>
+      </p:sp>
+      <p:sp>
+        <p:nvSpPr>
+          <p:cNvPr id="24" name="Text 22"/>
+          <p:cNvSpPr/>
+          <p:nvPr/>
+        </p:nvSpPr>
+        <p:spPr>
+          <a:xfrm>
+            <a:off x="2971800" y="3191256"/>
+            <a:ext cx="868680" cy="292608"/>
+          </a:xfrm>
+          <a:prstGeom prst="rect">
+            <a:avLst/>
+          </a:prstGeom>
+          <a:noFill/>
+          <a:ln/>
+        </p:spPr>
+        <p:txBody>
+          <a:bodyPr wrap="square" lIns="0" tIns="0" rIns="0" bIns="0" rtlCol="0" anchor="ctr"/>
+          <a:lstStyle/>
+          <a:p>
+            <a:pPr indent="0" marL="0">
+              <a:buNone/>
+            </a:pPr>
+            <a:r>
+              <a:rPr lang="en-US" sz="1050" dirty="0">
+                <a:solidFill>
+                  <a:srgbClr val="0F172A"/>
+                </a:solidFill>
+                <a:latin typeface="Consolas" pitchFamily="34" charset="0"/>
+                <a:ea typeface="Consolas" pitchFamily="34" charset="-122"/>
+                <a:cs typeface="Consolas" pitchFamily="34" charset="-120"/>
+              </a:rPr>
+              <a:t>+0.10</a:t>
+            </a:r>
+            <a:endParaRPr lang="en-US" sz="1050" dirty="0"/>
+          </a:p>
+        </p:txBody>
+      </p:sp>
+      <p:sp>
+        <p:nvSpPr>
+          <p:cNvPr id="25" name="Text 23"/>
+          <p:cNvSpPr/>
+          <p:nvPr/>
+        </p:nvSpPr>
+        <p:spPr>
+          <a:xfrm>
+            <a:off x="3840480" y="3191256"/>
+            <a:ext cx="868680" cy="292608"/>
+          </a:xfrm>
+          <a:prstGeom prst="rect">
+            <a:avLst/>
+          </a:prstGeom>
+          <a:noFill/>
+          <a:ln/>
+        </p:spPr>
+        <p:txBody>
+          <a:bodyPr wrap="square" lIns="0" tIns="0" rIns="0" bIns="0" rtlCol="0" anchor="ctr"/>
+          <a:lstStyle/>
+          <a:p>
+            <a:pPr indent="0" marL="0">
+              <a:buNone/>
+            </a:pPr>
+            <a:r>
+              <a:rPr lang="en-US" sz="1050" dirty="0">
+                <a:solidFill>
+                  <a:srgbClr val="0F172A"/>
+                </a:solidFill>
+                <a:latin typeface="Consolas" pitchFamily="34" charset="0"/>
+                <a:ea typeface="Consolas" pitchFamily="34" charset="-122"/>
+                <a:cs typeface="Consolas" pitchFamily="34" charset="-120"/>
+              </a:rPr>
+              <a:t>&lt;10⁻⁵</a:t>
+            </a:r>
+            <a:endParaRPr lang="en-US" sz="1050" dirty="0"/>
+          </a:p>
+        </p:txBody>
+      </p:sp>
+      <p:sp>
+        <p:nvSpPr>
+          <p:cNvPr id="26" name="Text 24"/>
+          <p:cNvSpPr/>
+          <p:nvPr/>
+        </p:nvSpPr>
+        <p:spPr>
+          <a:xfrm>
+            <a:off x="4709160" y="3191256"/>
+            <a:ext cx="640080" cy="292608"/>
+          </a:xfrm>
+          <a:prstGeom prst="rect">
+            <a:avLst/>
+          </a:prstGeom>
+          <a:noFill/>
+          <a:ln/>
+        </p:spPr>
+        <p:txBody>
+          <a:bodyPr wrap="square" lIns="0" tIns="0" rIns="0" bIns="0" rtlCol="0" anchor="ctr"/>
+          <a:lstStyle/>
+          <a:p>
+            <a:pPr indent="0" marL="0">
+              <a:buNone/>
+            </a:pPr>
+            <a:r>
+              <a:rPr lang="en-US" sz="1050" b="1" dirty="0">
+                <a:solidFill>
+                  <a:srgbClr val="F59E0B"/>
+                </a:solidFill>
+                <a:latin typeface="Consolas" pitchFamily="34" charset="0"/>
+                <a:ea typeface="Consolas" pitchFamily="34" charset="-122"/>
+                <a:cs typeface="Consolas" pitchFamily="34" charset="-120"/>
+              </a:rPr>
+              <a:t>***</a:t>
+            </a:r>
+            <a:endParaRPr lang="en-US" sz="1050" dirty="0"/>
+          </a:p>
+        </p:txBody>
+      </p:sp>
+      <p:sp>
+        <p:nvSpPr>
+          <p:cNvPr id="27" name="Text 25"/>
+          <p:cNvSpPr/>
+          <p:nvPr/>
+        </p:nvSpPr>
+        <p:spPr>
+          <a:xfrm>
+            <a:off x="640080" y="4160520"/>
+            <a:ext cx="4572000" cy="274320"/>
+          </a:xfrm>
+          <a:prstGeom prst="rect">
+            <a:avLst/>
+          </a:prstGeom>
+          <a:noFill/>
+          <a:ln/>
+        </p:spPr>
+        <p:txBody>
+          <a:bodyPr wrap="square" lIns="0" tIns="0" rIns="0" bIns="0" rtlCol="0" anchor="ctr"/>
+          <a:lstStyle/>
+          <a:p>
+            <a:pPr indent="0" marL="0">
+              <a:buNone/>
+            </a:pPr>
+            <a:r>
+              <a:rPr lang="en-US" sz="900" i="1" dirty="0">
+                <a:solidFill>
+                  <a:srgbClr val="64748B"/>
+                </a:solidFill>
+                <a:latin typeface="Calibri" pitchFamily="34" charset="0"/>
+                <a:ea typeface="Calibri" pitchFamily="34" charset="-122"/>
+                <a:cs typeface="Calibri" pitchFamily="34" charset="-120"/>
+              </a:rPr>
+              <a:t>Signifikanz-Codes:  *** p&lt;0.001 · ** p&lt;0.01 · * p&lt;0.05</a:t>
+            </a:r>
+            <a:endParaRPr lang="en-US" sz="900" dirty="0"/>
+          </a:p>
+        </p:txBody>
+      </p:sp>
+      <p:sp>
+        <p:nvSpPr>
+          <p:cNvPr id="28" name="Shape 26"/>
+          <p:cNvSpPr/>
+          <p:nvPr/>
+        </p:nvSpPr>
+        <p:spPr>
+          <a:xfrm>
+            <a:off x="5486400" y="1508760"/>
+            <a:ext cx="3200400" cy="3108960"/>
+          </a:xfrm>
+          <a:prstGeom prst="rect">
+            <a:avLst/>
+          </a:prstGeom>
+          <a:solidFill>
+            <a:srgbClr val="FFFFFF"/>
+          </a:solidFill>
+          <a:ln w="9525">
+            <a:solidFill>
+              <a:srgbClr val="E2E8F0"/>
+            </a:solidFill>
+            <a:prstDash val="solid"/>
+          </a:ln>
+          <a:effectLst>
+            <a:outerShdw sx="100000" sy="100000" kx="0" ky="0" algn="bl" rotWithShape="0" blurRad="101600" dist="12700" dir="5400000">
+              <a:srgbClr val="94A3B8">
+                <a:alpha val="12000"/>
+              </a:srgbClr>
+            </a:outerShdw>
+          </a:effectLst>
+        </p:spPr>
+      </p:sp>
+      <p:sp>
+        <p:nvSpPr>
+          <p:cNvPr id="29" name="Shape 27"/>
+          <p:cNvSpPr/>
+          <p:nvPr/>
+        </p:nvSpPr>
+        <p:spPr>
+          <a:xfrm>
+            <a:off x="5486400" y="1508760"/>
+            <a:ext cx="3200400" cy="54864"/>
+          </a:xfrm>
+          <a:prstGeom prst="rect">
+            <a:avLst/>
+          </a:prstGeom>
+          <a:solidFill>
+            <a:srgbClr val="1C7293"/>
+          </a:solidFill>
+          <a:ln w="12700">
+            <a:solidFill>
+              <a:srgbClr val="1C7293"/>
+            </a:solidFill>
+            <a:prstDash val="solid"/>
+          </a:ln>
+        </p:spPr>
+      </p:sp>
+      <p:sp>
+        <p:nvSpPr>
+          <p:cNvPr id="30" name="Text 28"/>
+          <p:cNvSpPr/>
+          <p:nvPr/>
+        </p:nvSpPr>
+        <p:spPr>
+          <a:xfrm>
+            <a:off x="5669280" y="1645920"/>
+            <a:ext cx="2926080" cy="320040"/>
+          </a:xfrm>
+          <a:prstGeom prst="rect">
+            <a:avLst/>
+          </a:prstGeom>
+          <a:noFill/>
+          <a:ln/>
+        </p:spPr>
+        <p:txBody>
+          <a:bodyPr wrap="square" lIns="0" tIns="0" rIns="0" bIns="0" rtlCol="0" anchor="ctr"/>
+          <a:lstStyle/>
+          <a:p>
+            <a:pPr indent="0" marL="0">
+              <a:buNone/>
+            </a:pPr>
+            <a:r>
+              <a:rPr lang="en-US" sz="1300" b="1" dirty="0">
+                <a:solidFill>
+                  <a:srgbClr val="1C7293"/>
+                </a:solidFill>
+                <a:latin typeface="Trebuchet MS" pitchFamily="34" charset="0"/>
+                <a:ea typeface="Trebuchet MS" pitchFamily="34" charset="-122"/>
+                <a:cs typeface="Trebuchet MS" pitchFamily="34" charset="-120"/>
+              </a:rPr>
+              <a:t>Was das bedeutet</a:t>
+            </a:r>
+            <a:endParaRPr lang="en-US" sz="1300" dirty="0"/>
+          </a:p>
+        </p:txBody>
+      </p:sp>
+      <p:sp>
+        <p:nvSpPr>
+          <p:cNvPr id="31" name="Text 29"/>
+          <p:cNvSpPr/>
+          <p:nvPr/>
+        </p:nvSpPr>
+        <p:spPr>
+          <a:xfrm>
+            <a:off x="5669280" y="2057400"/>
+            <a:ext cx="2926080" cy="2468880"/>
+          </a:xfrm>
+          <a:prstGeom prst="rect">
+            <a:avLst/>
+          </a:prstGeom>
+          <a:noFill/>
+          <a:ln/>
+        </p:spPr>
+        <p:txBody>
+          <a:bodyPr wrap="square" lIns="0" tIns="0" rIns="0" bIns="0" rtlCol="0" anchor="ctr"/>
+          <a:lstStyle/>
+          <a:p>
+            <a:pPr indent="0" marL="0">
+              <a:buNone/>
+            </a:pPr>
+            <a:r>
+              <a:rPr lang="en-US" sz="1000" b="1" dirty="0">
+                <a:solidFill>
+                  <a:srgbClr val="1A9850"/>
+                </a:solidFill>
+                <a:latin typeface="Calibri" pitchFamily="34" charset="0"/>
+                <a:ea typeface="Calibri" pitchFamily="34" charset="-122"/>
+                <a:cs typeface="Calibri" pitchFamily="34" charset="-120"/>
+              </a:rPr>
+              <a:t>H1 robust</a:t>
+            </a:r>
+            <a:endParaRPr lang="en-US" sz="1000" dirty="0"/>
+          </a:p>
+          <a:p>
+            <a:pPr indent="0" marL="0">
+              <a:buNone/>
+            </a:pPr>
+            <a:r>
+              <a:rPr lang="en-US" sz="1000" dirty="0">
+                <a:solidFill>
+                  <a:srgbClr val="0F172A"/>
+                </a:solidFill>
+                <a:latin typeface="Calibri" pitchFamily="34" charset="0"/>
+                <a:ea typeface="Calibri" pitchFamily="34" charset="-122"/>
+                <a:cs typeface="Calibri" pitchFamily="34" charset="-120"/>
+              </a:rPr>
+              <a:t>Distanz hochsignifikant nach Kontrolle.</a:t>
+            </a:r>
+            <a:endParaRPr lang="en-US" sz="1000" dirty="0"/>
+          </a:p>
+          <a:p>
+            <a:pPr indent="0" marL="0">
+              <a:buNone/>
+            </a:pPr>
+            <a:r>
+              <a:rPr lang="en-US" sz="1000" dirty="0">
+                <a:solidFill>
+                  <a:srgbClr val="0F172A"/>
+                </a:solidFill>
+                <a:latin typeface="Calibri" pitchFamily="34" charset="0"/>
+                <a:ea typeface="Calibri" pitchFamily="34" charset="-122"/>
+                <a:cs typeface="Calibri" pitchFamily="34" charset="-120"/>
+              </a:rPr>
+              <a:t> </a:t>
+            </a:r>
+            <a:endParaRPr lang="en-US" sz="1000" dirty="0"/>
+          </a:p>
+          <a:p>
+            <a:pPr indent="0" marL="0">
+              <a:buNone/>
+            </a:pPr>
+            <a:r>
+              <a:rPr lang="en-US" sz="1000" b="1" dirty="0">
+                <a:solidFill>
+                  <a:srgbClr val="1A9850"/>
+                </a:solidFill>
+                <a:latin typeface="Calibri" pitchFamily="34" charset="0"/>
+                <a:ea typeface="Calibri" pitchFamily="34" charset="-122"/>
+                <a:cs typeface="Calibri" pitchFamily="34" charset="-120"/>
+              </a:rPr>
+              <a:t>Topografie ist Co-Treiber</a:t>
+            </a:r>
+            <a:endParaRPr lang="en-US" sz="1000" dirty="0"/>
+          </a:p>
+          <a:p>
+            <a:pPr indent="0" marL="0">
+              <a:buNone/>
+            </a:pPr>
+            <a:r>
+              <a:rPr lang="en-US" sz="1000" dirty="0">
+                <a:solidFill>
+                  <a:srgbClr val="0F172A"/>
+                </a:solidFill>
+                <a:latin typeface="Calibri" pitchFamily="34" charset="0"/>
+                <a:ea typeface="Calibri" pitchFamily="34" charset="-122"/>
+                <a:cs typeface="Calibri" pitchFamily="34" charset="-120"/>
+              </a:rPr>
+              <a:t>Höher = niedrigerer Score (β = −0.10).</a:t>
+            </a:r>
+            <a:endParaRPr lang="en-US" sz="1000" dirty="0"/>
+          </a:p>
+          <a:p>
+            <a:pPr indent="0" marL="0">
+              <a:buNone/>
+            </a:pPr>
+            <a:r>
+              <a:rPr lang="en-US" sz="1000" dirty="0">
+                <a:solidFill>
+                  <a:srgbClr val="0F172A"/>
+                </a:solidFill>
+                <a:latin typeface="Calibri" pitchFamily="34" charset="0"/>
+                <a:ea typeface="Calibri" pitchFamily="34" charset="-122"/>
+                <a:cs typeface="Calibri" pitchFamily="34" charset="-120"/>
+              </a:rPr>
+              <a:t> </a:t>
+            </a:r>
+            <a:endParaRPr lang="en-US" sz="1000" dirty="0"/>
+          </a:p>
+          <a:p>
+            <a:pPr indent="0" marL="0">
+              <a:buNone/>
+            </a:pPr>
+            <a:r>
+              <a:rPr lang="en-US" sz="1000" b="1" dirty="0">
+                <a:solidFill>
+                  <a:srgbClr val="065A82"/>
+                </a:solidFill>
+                <a:latin typeface="Calibri" pitchFamily="34" charset="0"/>
+                <a:ea typeface="Calibri" pitchFamily="34" charset="-122"/>
+                <a:cs typeface="Calibri" pitchFamily="34" charset="-120"/>
+              </a:rPr>
+              <a:t>Gewichts-robust</a:t>
+            </a:r>
+            <a:endParaRPr lang="en-US" sz="1000" dirty="0"/>
+          </a:p>
+          <a:p>
+            <a:pPr indent="0" marL="0">
+              <a:buNone/>
+            </a:pPr>
+            <a:r>
+              <a:rPr lang="en-US" sz="1000" dirty="0">
+                <a:solidFill>
+                  <a:srgbClr val="0F172A"/>
+                </a:solidFill>
+                <a:latin typeface="Calibri" pitchFamily="34" charset="0"/>
+                <a:ea typeface="Calibri" pitchFamily="34" charset="-122"/>
+                <a:cs typeface="Calibri" pitchFamily="34" charset="-120"/>
+              </a:rPr>
+              <a:t>Spearman ρ &gt; 0.98 in allen Szenarien.</a:t>
+            </a:r>
+            <a:endParaRPr lang="en-US" sz="1000" dirty="0"/>
+          </a:p>
+          <a:p>
+            <a:pPr indent="0" marL="0">
+              <a:buNone/>
+            </a:pPr>
+            <a:r>
+              <a:rPr lang="en-US" sz="1000" dirty="0">
+                <a:solidFill>
+                  <a:srgbClr val="0F172A"/>
+                </a:solidFill>
+                <a:latin typeface="Calibri" pitchFamily="34" charset="0"/>
+                <a:ea typeface="Calibri" pitchFamily="34" charset="-122"/>
+                <a:cs typeface="Calibri" pitchFamily="34" charset="-120"/>
+              </a:rPr>
+              <a:t> </a:t>
+            </a:r>
+            <a:endParaRPr lang="en-US" sz="1000" dirty="0"/>
+          </a:p>
+          <a:p>
+            <a:pPr indent="0" marL="0">
+              <a:buNone/>
+            </a:pPr>
+            <a:r>
+              <a:rPr lang="en-US" sz="1000" b="1" dirty="0">
+                <a:solidFill>
+                  <a:srgbClr val="065A82"/>
+                </a:solidFill>
+                <a:latin typeface="Calibri" pitchFamily="34" charset="0"/>
+                <a:ea typeface="Calibri" pitchFamily="34" charset="-122"/>
+                <a:cs typeface="Calibri" pitchFamily="34" charset="-120"/>
+              </a:rPr>
+              <a:t>Distanz-Approximation valid</a:t>
+            </a:r>
+            <a:endParaRPr lang="en-US" sz="1000" dirty="0"/>
+          </a:p>
+          <a:p>
+            <a:pPr indent="0" marL="0">
+              <a:buNone/>
+            </a:pPr>
+            <a:r>
+              <a:rPr lang="en-US" sz="1000" dirty="0">
+                <a:solidFill>
+                  <a:srgbClr val="0F172A"/>
+                </a:solidFill>
+                <a:latin typeface="Calibri" pitchFamily="34" charset="0"/>
+                <a:ea typeface="Calibri" pitchFamily="34" charset="-122"/>
+                <a:cs typeface="Calibri" pitchFamily="34" charset="-120"/>
+              </a:rPr>
+              <a:t>Luftlinie vs. Strassennetz: r = 0.988.</a:t>
+            </a:r>
+            <a:endParaRPr lang="en-US" sz="1000" dirty="0"/>
+          </a:p>
+        </p:txBody>
+      </p:sp>
+      <p:sp>
+        <p:nvSpPr>
+          <p:cNvPr id="32" name="Text 30"/>
+          <p:cNvSpPr/>
+          <p:nvPr/>
+        </p:nvSpPr>
+        <p:spPr>
+          <a:xfrm>
+            <a:off x="365760" y="4846320"/>
+            <a:ext cx="7315200" cy="228600"/>
+          </a:xfrm>
+          <a:prstGeom prst="rect">
+            <a:avLst/>
+          </a:prstGeom>
+          <a:noFill/>
+          <a:ln/>
+        </p:spPr>
+        <p:txBody>
+          <a:bodyPr wrap="square" lIns="0" tIns="0" rIns="0" bIns="0" rtlCol="0" anchor="ctr"/>
+          <a:lstStyle/>
+          <a:p>
+            <a:pPr algn="l" indent="0" marL="0">
+              <a:buNone/>
+            </a:pPr>
+            <a:r>
+              <a:rPr lang="en-US" sz="900" dirty="0">
+                <a:solidFill>
+                  <a:srgbClr val="64748B"/>
+                </a:solidFill>
+                <a:latin typeface="Calibri" pitchFamily="34" charset="0"/>
+                <a:ea typeface="Calibri" pitchFamily="34" charset="-122"/>
+                <a:cs typeface="Calibri" pitchFamily="34" charset="-120"/>
+              </a:rPr>
+              <a:t>OLS-Regression mit statsmodels · Daten: reports/robustness_data.csv</a:t>
+            </a:r>
+            <a:endParaRPr lang="en-US" sz="900" dirty="0"/>
+          </a:p>
+        </p:txBody>
+      </p:sp>
+      <p:sp>
+        <p:nvSpPr>
+          <p:cNvPr id="33" name="Text 31"/>
+          <p:cNvSpPr/>
+          <p:nvPr/>
+        </p:nvSpPr>
+        <p:spPr>
+          <a:xfrm>
+            <a:off x="8229600" y="4846320"/>
+            <a:ext cx="822960" cy="228600"/>
+          </a:xfrm>
+          <a:prstGeom prst="rect">
+            <a:avLst/>
+          </a:prstGeom>
+          <a:noFill/>
+          <a:ln/>
+        </p:spPr>
+        <p:txBody>
+          <a:bodyPr wrap="square" lIns="0" tIns="0" rIns="0" bIns="0" rtlCol="0" anchor="ctr"/>
+          <a:lstStyle/>
+          <a:p>
+            <a:pPr algn="r" indent="0" marL="0">
+              <a:buNone/>
+            </a:pPr>
+            <a:r>
+              <a:rPr lang="en-US" sz="900" dirty="0">
+                <a:solidFill>
+                  <a:srgbClr val="64748B"/>
+                </a:solidFill>
+                <a:latin typeface="Calibri" pitchFamily="34" charset="0"/>
+                <a:ea typeface="Calibri" pitchFamily="34" charset="-122"/>
+                <a:cs typeface="Calibri" pitchFamily="34" charset="-120"/>
+              </a:rPr>
+              <a:t>17 / 19</a:t>
+            </a:r>
+            <a:endParaRPr lang="en-US" sz="900" dirty="0"/>
+          </a:p>
+        </p:txBody>
+      </p:sp>
+    </p:spTree>
+  </p:cSld>
+  <p:clrMapOvr>
+    <a:masterClrMapping/>
+  </p:clrMapOvr>
+</p:sld>
+</file>
+
+<file path=ppt/slides/slide18.xml><?xml version="1.0" encoding="utf-8"?>
+<p:sld xmlns:a="http://schemas.openxmlformats.org/drawingml/2006/main" xmlns:r="http://schemas.openxmlformats.org/officeDocument/2006/relationships" xmlns:p="http://schemas.openxmlformats.org/presentationml/2006/main">
+  <p:cSld name="Slide 18">
+    <p:bg>
+      <p:bgPr>
+        <a:solidFill>
+          <a:srgbClr val="FFFFFF"/>
+        </a:solidFill>
+      </p:bgPr>
+    </p:bg>
+    <p:spTree>
+      <p:nvGrpSpPr>
+        <p:cNvPr id="1" name=""/>
+        <p:cNvGrpSpPr/>
+        <p:nvPr/>
+      </p:nvGrpSpPr>
+      <p:grpSpPr>
+        <a:xfrm>
+          <a:off x="0" y="0"/>
+          <a:ext cx="0" cy="0"/>
+          <a:chOff x="0" y="0"/>
+          <a:chExt cx="0" cy="0"/>
+        </a:xfrm>
+      </p:grpSpPr>
+      <p:sp>
+        <p:nvSpPr>
+          <p:cNvPr id="2" name="Text 0"/>
+          <p:cNvSpPr/>
+          <p:nvPr/>
+        </p:nvSpPr>
+        <p:spPr>
+          <a:xfrm>
+            <a:off x="365760" y="274320"/>
+            <a:ext cx="4572000" cy="274320"/>
+          </a:xfrm>
+          <a:prstGeom prst="rect">
+            <a:avLst/>
+          </a:prstGeom>
+          <a:noFill/>
+          <a:ln/>
+        </p:spPr>
+        <p:txBody>
+          <a:bodyPr wrap="square" lIns="0" tIns="0" rIns="0" bIns="0" rtlCol="0" anchor="ctr"/>
+          <a:lstStyle/>
+          <a:p>
+            <a:pPr indent="0" marL="0">
+              <a:buNone/>
+            </a:pPr>
+            <a:r>
+              <a:rPr lang="en-US" sz="1100" b="1" spc="400" kern="0" dirty="0">
+                <a:solidFill>
+                  <a:srgbClr val="1C7293"/>
+                </a:solidFill>
+                <a:latin typeface="Trebuchet MS" pitchFamily="34" charset="0"/>
+                <a:ea typeface="Trebuchet MS" pitchFamily="34" charset="-122"/>
+                <a:cs typeface="Trebuchet MS" pitchFamily="34" charset="-120"/>
+              </a:rPr>
+              <a:t>SCHLUSS · 1/2</a:t>
+            </a:r>
+            <a:endParaRPr lang="en-US" sz="1100" dirty="0"/>
+          </a:p>
+        </p:txBody>
+      </p:sp>
+      <p:sp>
+        <p:nvSpPr>
+          <p:cNvPr id="3" name="Text 1"/>
+          <p:cNvSpPr/>
+          <p:nvPr/>
+        </p:nvSpPr>
+        <p:spPr>
+          <a:xfrm>
+            <a:off x="365760" y="594360"/>
+            <a:ext cx="8412480" cy="640080"/>
+          </a:xfrm>
+          <a:prstGeom prst="rect">
+            <a:avLst/>
+          </a:prstGeom>
+          <a:noFill/>
+          <a:ln/>
+        </p:spPr>
+        <p:txBody>
+          <a:bodyPr wrap="square" lIns="0" tIns="0" rIns="0" bIns="0" rtlCol="0" anchor="ctr"/>
+          <a:lstStyle/>
+          <a:p>
+            <a:pPr indent="0" marL="0">
+              <a:buNone/>
+            </a:pPr>
+            <a:r>
+              <a:rPr lang="en-US" sz="3000" b="1" dirty="0">
+                <a:solidFill>
+                  <a:srgbClr val="0F172A"/>
+                </a:solidFill>
+                <a:latin typeface="Trebuchet MS" pitchFamily="34" charset="0"/>
+                <a:ea typeface="Trebuchet MS" pitchFamily="34" charset="-122"/>
+                <a:cs typeface="Trebuchet MS" pitchFamily="34" charset="-120"/>
+              </a:rPr>
+              <a:t>Limitationen unseres Modells</a:t>
+            </a:r>
+            <a:endParaRPr lang="en-US" sz="3000" dirty="0"/>
+          </a:p>
+        </p:txBody>
+      </p:sp>
+      <p:sp>
+        <p:nvSpPr>
+          <p:cNvPr id="4" name="Shape 2"/>
+          <p:cNvSpPr/>
+          <p:nvPr/>
+        </p:nvSpPr>
+        <p:spPr>
+          <a:xfrm>
+            <a:off x="457200" y="1554480"/>
+            <a:ext cx="4023360" cy="1371600"/>
+          </a:xfrm>
+          <a:prstGeom prst="rect">
+            <a:avLst/>
+          </a:prstGeom>
+          <a:solidFill>
+            <a:srgbClr val="FFFFFF"/>
+          </a:solidFill>
+          <a:ln w="9525">
+            <a:solidFill>
+              <a:srgbClr val="E2E8F0"/>
+            </a:solidFill>
+            <a:prstDash val="solid"/>
+          </a:ln>
+          <a:effectLst>
+            <a:outerShdw sx="100000" sy="100000" kx="0" ky="0" algn="bl" rotWithShape="0" blurRad="101600" dist="12700" dir="5400000">
+              <a:srgbClr val="94A3B8">
+                <a:alpha val="12000"/>
+              </a:srgbClr>
+            </a:outerShdw>
+          </a:effectLst>
+        </p:spPr>
+      </p:sp>
+      <p:sp>
+        <p:nvSpPr>
+          <p:cNvPr id="5" name="Shape 3"/>
+          <p:cNvSpPr/>
+          <p:nvPr/>
+        </p:nvSpPr>
+        <p:spPr>
+          <a:xfrm>
+            <a:off x="457200" y="1554480"/>
+            <a:ext cx="4023360" cy="54864"/>
+          </a:xfrm>
+          <a:prstGeom prst="rect">
+            <a:avLst/>
+          </a:prstGeom>
+          <a:solidFill>
+            <a:srgbClr val="D73027"/>
+          </a:solidFill>
+          <a:ln w="12700">
+            <a:solidFill>
+              <a:srgbClr val="D73027"/>
+            </a:solidFill>
+            <a:prstDash val="solid"/>
+          </a:ln>
+        </p:spPr>
+      </p:sp>
+      <p:sp>
+        <p:nvSpPr>
+          <p:cNvPr id="6" name="Text 4"/>
+          <p:cNvSpPr/>
+          <p:nvPr/>
+        </p:nvSpPr>
+        <p:spPr>
+          <a:xfrm>
+            <a:off x="640080" y="1719072"/>
+            <a:ext cx="3657600" cy="365760"/>
+          </a:xfrm>
+          <a:prstGeom prst="rect">
+            <a:avLst/>
+          </a:prstGeom>
+          <a:noFill/>
+          <a:ln/>
+        </p:spPr>
+        <p:txBody>
+          <a:bodyPr wrap="square" lIns="0" tIns="0" rIns="0" bIns="0" rtlCol="0" anchor="ctr"/>
+          <a:lstStyle/>
+          <a:p>
+            <a:pPr indent="0" marL="0">
+              <a:buNone/>
+            </a:pPr>
+            <a:r>
+              <a:rPr lang="en-US" sz="1400" b="1" dirty="0">
+                <a:solidFill>
+                  <a:srgbClr val="D73027"/>
+                </a:solidFill>
+                <a:latin typeface="Trebuchet MS" pitchFamily="34" charset="0"/>
+                <a:ea typeface="Trebuchet MS" pitchFamily="34" charset="-122"/>
+                <a:cs typeface="Trebuchet MS" pitchFamily="34" charset="-120"/>
+              </a:rPr>
+              <a:t>Datenqualität OSM</a:t>
+            </a:r>
+            <a:endParaRPr lang="en-US" sz="1400" dirty="0"/>
+          </a:p>
+        </p:txBody>
+      </p:sp>
+      <p:sp>
+        <p:nvSpPr>
+          <p:cNvPr id="7" name="Text 5"/>
+          <p:cNvSpPr/>
+          <p:nvPr/>
+        </p:nvSpPr>
+        <p:spPr>
+          <a:xfrm>
+            <a:off x="640080" y="2103120"/>
+            <a:ext cx="3657600" cy="777240"/>
+          </a:xfrm>
+          <a:prstGeom prst="rect">
+            <a:avLst/>
+          </a:prstGeom>
+          <a:noFill/>
+          <a:ln/>
+        </p:spPr>
+        <p:txBody>
+          <a:bodyPr wrap="square" lIns="0" tIns="0" rIns="0" bIns="0" rtlCol="0" anchor="ctr"/>
+          <a:lstStyle/>
+          <a:p>
+            <a:pPr indent="0" marL="0">
+              <a:buNone/>
+            </a:pPr>
+            <a:r>
+              <a:rPr lang="en-US" sz="1100" dirty="0">
+                <a:solidFill>
+                  <a:srgbClr val="0F172A"/>
+                </a:solidFill>
+                <a:latin typeface="Calibri" pitchFamily="34" charset="0"/>
+                <a:ea typeface="Calibri" pitchFamily="34" charset="-122"/>
+                <a:cs typeface="Calibri" pitchFamily="34" charset="-120"/>
+              </a:rPr>
+              <a:t>Kleine, unmappte Geschäfte fehlen. Annahme: Verzerrung gering, weil Geschäfte ähnlicher Klassifikation OSM-mässig konsistent sind.</a:t>
+            </a:r>
+            <a:endParaRPr lang="en-US" sz="1100" dirty="0"/>
+          </a:p>
+        </p:txBody>
+      </p:sp>
+      <p:sp>
+        <p:nvSpPr>
+          <p:cNvPr id="8" name="Shape 6"/>
+          <p:cNvSpPr/>
+          <p:nvPr/>
+        </p:nvSpPr>
+        <p:spPr>
+          <a:xfrm>
+            <a:off x="4663440" y="1554480"/>
+            <a:ext cx="4023360" cy="1371600"/>
+          </a:xfrm>
+          <a:prstGeom prst="rect">
+            <a:avLst/>
+          </a:prstGeom>
+          <a:solidFill>
+            <a:srgbClr val="FFFFFF"/>
+          </a:solidFill>
+          <a:ln w="9525">
+            <a:solidFill>
+              <a:srgbClr val="E2E8F0"/>
+            </a:solidFill>
+            <a:prstDash val="solid"/>
+          </a:ln>
+          <a:effectLst>
+            <a:outerShdw sx="100000" sy="100000" kx="0" ky="0" algn="bl" rotWithShape="0" blurRad="101600" dist="12700" dir="5400000">
+              <a:srgbClr val="94A3B8">
+                <a:alpha val="12000"/>
+              </a:srgbClr>
+            </a:outerShdw>
+          </a:effectLst>
+        </p:spPr>
+      </p:sp>
+      <p:sp>
+        <p:nvSpPr>
+          <p:cNvPr id="9" name="Shape 7"/>
+          <p:cNvSpPr/>
+          <p:nvPr/>
+        </p:nvSpPr>
+        <p:spPr>
+          <a:xfrm>
+            <a:off x="4663440" y="1554480"/>
+            <a:ext cx="4023360" cy="54864"/>
+          </a:xfrm>
+          <a:prstGeom prst="rect">
+            <a:avLst/>
+          </a:prstGeom>
+          <a:solidFill>
+            <a:srgbClr val="D73027"/>
+          </a:solidFill>
+          <a:ln w="12700">
+            <a:solidFill>
+              <a:srgbClr val="D73027"/>
+            </a:solidFill>
+            <a:prstDash val="solid"/>
+          </a:ln>
+        </p:spPr>
+      </p:sp>
+      <p:sp>
+        <p:nvSpPr>
+          <p:cNvPr id="10" name="Text 8"/>
+          <p:cNvSpPr/>
+          <p:nvPr/>
+        </p:nvSpPr>
+        <p:spPr>
+          <a:xfrm>
+            <a:off x="4846320" y="1719072"/>
+            <a:ext cx="3657600" cy="365760"/>
+          </a:xfrm>
+          <a:prstGeom prst="rect">
+            <a:avLst/>
+          </a:prstGeom>
+          <a:noFill/>
+          <a:ln/>
+        </p:spPr>
+        <p:txBody>
+          <a:bodyPr wrap="square" lIns="0" tIns="0" rIns="0" bIns="0" rtlCol="0" anchor="ctr"/>
+          <a:lstStyle/>
+          <a:p>
+            <a:pPr indent="0" marL="0">
+              <a:buNone/>
+            </a:pPr>
+            <a:r>
+              <a:rPr lang="en-US" sz="1400" b="1" dirty="0">
+                <a:solidFill>
+                  <a:srgbClr val="D73027"/>
+                </a:solidFill>
+                <a:latin typeface="Trebuchet MS" pitchFamily="34" charset="0"/>
+                <a:ea typeface="Trebuchet MS" pitchFamily="34" charset="-122"/>
+                <a:cs typeface="Trebuchet MS" pitchFamily="34" charset="-120"/>
+              </a:rPr>
+              <a:t>Topografie-Approximation</a:t>
+            </a:r>
+            <a:endParaRPr lang="en-US" sz="1400" dirty="0"/>
+          </a:p>
+        </p:txBody>
+      </p:sp>
+      <p:sp>
+        <p:nvSpPr>
+          <p:cNvPr id="11" name="Text 9"/>
+          <p:cNvSpPr/>
+          <p:nvPr/>
+        </p:nvSpPr>
+        <p:spPr>
+          <a:xfrm>
+            <a:off x="4846320" y="2103120"/>
+            <a:ext cx="3657600" cy="777240"/>
+          </a:xfrm>
+          <a:prstGeom prst="rect">
+            <a:avLst/>
+          </a:prstGeom>
+          <a:noFill/>
+          <a:ln/>
+        </p:spPr>
+        <p:txBody>
+          <a:bodyPr wrap="square" lIns="0" tIns="0" rIns="0" bIns="0" rtlCol="0" anchor="ctr"/>
+          <a:lstStyle/>
+          <a:p>
+            <a:pPr indent="0" marL="0">
+              <a:buNone/>
+            </a:pPr>
+            <a:r>
+              <a:rPr lang="en-US" sz="1100" dirty="0">
+                <a:solidFill>
+                  <a:srgbClr val="0F172A"/>
+                </a:solidFill>
+                <a:latin typeface="Calibri" pitchFamily="34" charset="0"/>
+                <a:ea typeface="Calibri" pitchFamily="34" charset="-122"/>
+                <a:cs typeface="Calibri" pitchFamily="34" charset="-120"/>
+              </a:rPr>
+              <a:t>Open-Elevation-API zum Auswertungszeitpunkt down — Höhen via N-Koordinaten approximiert. Mit DEM-Daten von swisstopo wäre der Höhen-Confounder belastbarer testbar.</a:t>
+            </a:r>
+            <a:endParaRPr lang="en-US" sz="1100" dirty="0"/>
+          </a:p>
+        </p:txBody>
+      </p:sp>
+      <p:sp>
+        <p:nvSpPr>
+          <p:cNvPr id="12" name="Shape 10"/>
+          <p:cNvSpPr/>
+          <p:nvPr/>
+        </p:nvSpPr>
+        <p:spPr>
+          <a:xfrm>
+            <a:off x="457200" y="3063240"/>
+            <a:ext cx="4023360" cy="1371600"/>
+          </a:xfrm>
+          <a:prstGeom prst="rect">
+            <a:avLst/>
+          </a:prstGeom>
+          <a:solidFill>
+            <a:srgbClr val="FFFFFF"/>
+          </a:solidFill>
+          <a:ln w="9525">
+            <a:solidFill>
+              <a:srgbClr val="E2E8F0"/>
+            </a:solidFill>
+            <a:prstDash val="solid"/>
+          </a:ln>
+          <a:effectLst>
+            <a:outerShdw sx="100000" sy="100000" kx="0" ky="0" algn="bl" rotWithShape="0" blurRad="101600" dist="12700" dir="5400000">
+              <a:srgbClr val="94A3B8">
+                <a:alpha val="12000"/>
+              </a:srgbClr>
+            </a:outerShdw>
+          </a:effectLst>
+        </p:spPr>
+      </p:sp>
+      <p:sp>
+        <p:nvSpPr>
+          <p:cNvPr id="13" name="Shape 11"/>
+          <p:cNvSpPr/>
+          <p:nvPr/>
+        </p:nvSpPr>
+        <p:spPr>
+          <a:xfrm>
+            <a:off x="457200" y="3063240"/>
+            <a:ext cx="4023360" cy="54864"/>
+          </a:xfrm>
+          <a:prstGeom prst="rect">
+            <a:avLst/>
+          </a:prstGeom>
+          <a:solidFill>
+            <a:srgbClr val="D73027"/>
+          </a:solidFill>
+          <a:ln w="12700">
+            <a:solidFill>
+              <a:srgbClr val="D73027"/>
+            </a:solidFill>
+            <a:prstDash val="solid"/>
+          </a:ln>
+        </p:spPr>
+      </p:sp>
+      <p:sp>
+        <p:nvSpPr>
+          <p:cNvPr id="14" name="Text 12"/>
+          <p:cNvSpPr/>
+          <p:nvPr/>
+        </p:nvSpPr>
+        <p:spPr>
+          <a:xfrm>
+            <a:off x="640080" y="3227832"/>
+            <a:ext cx="3657600" cy="365760"/>
+          </a:xfrm>
+          <a:prstGeom prst="rect">
+            <a:avLst/>
+          </a:prstGeom>
+          <a:noFill/>
+          <a:ln/>
+        </p:spPr>
+        <p:txBody>
+          <a:bodyPr wrap="square" lIns="0" tIns="0" rIns="0" bIns="0" rtlCol="0" anchor="ctr"/>
+          <a:lstStyle/>
+          <a:p>
+            <a:pPr indent="0" marL="0">
+              <a:buNone/>
+            </a:pPr>
+            <a:r>
+              <a:rPr lang="en-US" sz="1400" b="1" dirty="0">
+                <a:solidFill>
+                  <a:srgbClr val="D73027"/>
+                </a:solidFill>
+                <a:latin typeface="Trebuchet MS" pitchFamily="34" charset="0"/>
+                <a:ea typeface="Trebuchet MS" pitchFamily="34" charset="-122"/>
+                <a:cs typeface="Trebuchet MS" pitchFamily="34" charset="-120"/>
+              </a:rPr>
+              <a:t>Single-City-Befund</a:t>
+            </a:r>
+            <a:endParaRPr lang="en-US" sz="1400" dirty="0"/>
+          </a:p>
+        </p:txBody>
+      </p:sp>
+      <p:sp>
+        <p:nvSpPr>
+          <p:cNvPr id="15" name="Text 13"/>
+          <p:cNvSpPr/>
+          <p:nvPr/>
+        </p:nvSpPr>
+        <p:spPr>
+          <a:xfrm>
+            <a:off x="640080" y="3611880"/>
+            <a:ext cx="3657600" cy="777240"/>
+          </a:xfrm>
+          <a:prstGeom prst="rect">
+            <a:avLst/>
+          </a:prstGeom>
+          <a:noFill/>
+          <a:ln/>
+        </p:spPr>
+        <p:txBody>
+          <a:bodyPr wrap="square" lIns="0" tIns="0" rIns="0" bIns="0" rtlCol="0" anchor="ctr"/>
+          <a:lstStyle/>
+          <a:p>
+            <a:pPr indent="0" marL="0">
+              <a:buNone/>
+            </a:pPr>
+            <a:r>
+              <a:rPr lang="en-US" sz="1100" dirty="0">
+                <a:solidFill>
+                  <a:srgbClr val="0F172A"/>
+                </a:solidFill>
+                <a:latin typeface="Calibri" pitchFamily="34" charset="0"/>
+                <a:ea typeface="Calibri" pitchFamily="34" charset="-122"/>
+                <a:cs typeface="Calibri" pitchFamily="34" charset="-120"/>
+              </a:rPr>
+              <a:t>H2-Falsifikation (keine Wüsten) gilt für Zürich; die 15-Min-Stadt-Methodik ist nicht stadt-spezifisch und sollte für externe Validität auf weitere Städte angewendet werden.</a:t>
+            </a:r>
+            <a:endParaRPr lang="en-US" sz="1100" dirty="0"/>
+          </a:p>
+        </p:txBody>
+      </p:sp>
+      <p:sp>
+        <p:nvSpPr>
+          <p:cNvPr id="16" name="Shape 14"/>
+          <p:cNvSpPr/>
+          <p:nvPr/>
+        </p:nvSpPr>
+        <p:spPr>
+          <a:xfrm>
+            <a:off x="4663440" y="3063240"/>
+            <a:ext cx="4023360" cy="1371600"/>
+          </a:xfrm>
+          <a:prstGeom prst="rect">
+            <a:avLst/>
+          </a:prstGeom>
+          <a:solidFill>
+            <a:srgbClr val="FFFFFF"/>
+          </a:solidFill>
+          <a:ln w="9525">
+            <a:solidFill>
+              <a:srgbClr val="E2E8F0"/>
+            </a:solidFill>
+            <a:prstDash val="solid"/>
+          </a:ln>
+          <a:effectLst>
+            <a:outerShdw sx="100000" sy="100000" kx="0" ky="0" algn="bl" rotWithShape="0" blurRad="101600" dist="12700" dir="5400000">
+              <a:srgbClr val="94A3B8">
+                <a:alpha val="12000"/>
+              </a:srgbClr>
+            </a:outerShdw>
+          </a:effectLst>
+        </p:spPr>
+      </p:sp>
+      <p:sp>
+        <p:nvSpPr>
+          <p:cNvPr id="17" name="Shape 15"/>
+          <p:cNvSpPr/>
+          <p:nvPr/>
+        </p:nvSpPr>
+        <p:spPr>
+          <a:xfrm>
+            <a:off x="4663440" y="3063240"/>
+            <a:ext cx="4023360" cy="54864"/>
+          </a:xfrm>
+          <a:prstGeom prst="rect">
+            <a:avLst/>
+          </a:prstGeom>
+          <a:solidFill>
+            <a:srgbClr val="D73027"/>
+          </a:solidFill>
+          <a:ln w="12700">
+            <a:solidFill>
+              <a:srgbClr val="D73027"/>
+            </a:solidFill>
+            <a:prstDash val="solid"/>
+          </a:ln>
+        </p:spPr>
+      </p:sp>
+      <p:sp>
+        <p:nvSpPr>
+          <p:cNvPr id="18" name="Text 16"/>
+          <p:cNvSpPr/>
+          <p:nvPr/>
+        </p:nvSpPr>
+        <p:spPr>
+          <a:xfrm>
+            <a:off x="4846320" y="3227832"/>
+            <a:ext cx="3657600" cy="365760"/>
+          </a:xfrm>
+          <a:prstGeom prst="rect">
+            <a:avLst/>
+          </a:prstGeom>
+          <a:noFill/>
+          <a:ln/>
+        </p:spPr>
+        <p:txBody>
+          <a:bodyPr wrap="square" lIns="0" tIns="0" rIns="0" bIns="0" rtlCol="0" anchor="ctr"/>
+          <a:lstStyle/>
+          <a:p>
+            <a:pPr indent="0" marL="0">
+              <a:buNone/>
+            </a:pPr>
+            <a:r>
+              <a:rPr lang="en-US" sz="1400" b="1" dirty="0">
+                <a:solidFill>
+                  <a:srgbClr val="D73027"/>
+                </a:solidFill>
+                <a:latin typeface="Trebuchet MS" pitchFamily="34" charset="0"/>
+                <a:ea typeface="Trebuchet MS" pitchFamily="34" charset="-122"/>
+                <a:cs typeface="Trebuchet MS" pitchFamily="34" charset="-120"/>
+              </a:rPr>
+              <a:t>Mietpreis-Confounder</a:t>
+            </a:r>
+            <a:endParaRPr lang="en-US" sz="1400" dirty="0"/>
+          </a:p>
+        </p:txBody>
+      </p:sp>
+      <p:sp>
+        <p:nvSpPr>
+          <p:cNvPr id="19" name="Text 17"/>
+          <p:cNvSpPr/>
+          <p:nvPr/>
+        </p:nvSpPr>
+        <p:spPr>
+          <a:xfrm>
+            <a:off x="4846320" y="3611880"/>
+            <a:ext cx="3657600" cy="777240"/>
+          </a:xfrm>
+          <a:prstGeom prst="rect">
+            <a:avLst/>
+          </a:prstGeom>
+          <a:noFill/>
+          <a:ln/>
+        </p:spPr>
+        <p:txBody>
+          <a:bodyPr wrap="square" lIns="0" tIns="0" rIns="0" bIns="0" rtlCol="0" anchor="ctr"/>
+          <a:lstStyle/>
+          <a:p>
+            <a:pPr indent="0" marL="0">
+              <a:buNone/>
+            </a:pPr>
+            <a:r>
+              <a:rPr lang="en-US" sz="1100" dirty="0">
+                <a:solidFill>
+                  <a:srgbClr val="0F172A"/>
+                </a:solidFill>
+                <a:latin typeface="Calibri" pitchFamily="34" charset="0"/>
+                <a:ea typeface="Calibri" pitchFamily="34" charset="-122"/>
+                <a:cs typeface="Calibri" pitchFamily="34" charset="-120"/>
+              </a:rPr>
+              <a:t>Premium-Wohnlagen wie Hottingen, Seefeld zeigen hohe Mieten trotz niedrigerer Score-Werte — andere Form von Lagequalität (ruhig, grün) als unsere fussläufige Mischnutzungs-Definition.</a:t>
+            </a:r>
+            <a:endParaRPr lang="en-US" sz="1100" dirty="0"/>
+          </a:p>
+        </p:txBody>
+      </p:sp>
+      <p:sp>
+        <p:nvSpPr>
+          <p:cNvPr id="20" name="Text 18"/>
+          <p:cNvSpPr/>
+          <p:nvPr/>
+        </p:nvSpPr>
+        <p:spPr>
+          <a:xfrm>
+            <a:off x="8229600" y="4846320"/>
+            <a:ext cx="822960" cy="228600"/>
+          </a:xfrm>
+          <a:prstGeom prst="rect">
+            <a:avLst/>
+          </a:prstGeom>
+          <a:noFill/>
+          <a:ln/>
+        </p:spPr>
+        <p:txBody>
+          <a:bodyPr wrap="square" lIns="0" tIns="0" rIns="0" bIns="0" rtlCol="0" anchor="ctr"/>
+          <a:lstStyle/>
+          <a:p>
+            <a:pPr algn="r" indent="0" marL="0">
+              <a:buNone/>
+            </a:pPr>
+            <a:r>
+              <a:rPr lang="en-US" sz="900" dirty="0">
+                <a:solidFill>
+                  <a:srgbClr val="64748B"/>
+                </a:solidFill>
+                <a:latin typeface="Calibri" pitchFamily="34" charset="0"/>
+                <a:ea typeface="Calibri" pitchFamily="34" charset="-122"/>
+                <a:cs typeface="Calibri" pitchFamily="34" charset="-120"/>
+              </a:rPr>
+              <a:t>18 / 19</a:t>
+            </a:r>
+            <a:endParaRPr lang="en-US" sz="900" dirty="0"/>
+          </a:p>
+        </p:txBody>
+      </p:sp>
+    </p:spTree>
+  </p:cSld>
+  <p:clrMapOvr>
+    <a:masterClrMapping/>
+  </p:clrMapOvr>
+</p:sld>
+</file>
+
+<file path=ppt/slides/slide19.xml><?xml version="1.0" encoding="utf-8"?>
+<p:sld xmlns:a="http://schemas.openxmlformats.org/drawingml/2006/main" xmlns:r="http://schemas.openxmlformats.org/officeDocument/2006/relationships" xmlns:p="http://schemas.openxmlformats.org/presentationml/2006/main">
+  <p:cSld name="Slide 19">
     <p:bg>
       <p:bgPr>
         <a:solidFill>
@@ -9575,7 +11632,7 @@
                 <a:ea typeface="Calibri" pitchFamily="34" charset="-122"/>
                 <a:cs typeface="Calibri" pitchFamily="34" charset="-120"/>
               </a:rPr>
-              <a:t>17 / 17</a:t>
+              <a:t>19 / 19</a:t>
             </a:r>
             <a:endParaRPr lang="en-US" sz="900" dirty="0"/>
           </a:p>
@@ -10381,7 +12438,7 @@
                 <a:ea typeface="Calibri" pitchFamily="34" charset="-122"/>
                 <a:cs typeface="Calibri" pitchFamily="34" charset="-120"/>
               </a:rPr>
-              <a:t>2 / 17</a:t>
+              <a:t>2 / 19</a:t>
             </a:r>
             <a:endParaRPr lang="en-US" sz="900" dirty="0"/>
           </a:p>
@@ -11763,7 +13820,7 @@
                 <a:ea typeface="Calibri" pitchFamily="34" charset="-122"/>
                 <a:cs typeface="Calibri" pitchFamily="34" charset="-120"/>
               </a:rPr>
-              <a:t>3 / 17</a:t>
+              <a:t>3 / 19</a:t>
             </a:r>
             <a:endParaRPr lang="en-US" sz="900" dirty="0"/>
           </a:p>
@@ -12390,7 +14447,7 @@
                 <a:ea typeface="Trebuchet MS" pitchFamily="34" charset="-122"/>
                 <a:cs typeface="Trebuchet MS" pitchFamily="34" charset="-120"/>
               </a:rPr>
-              <a:t>44</a:t>
+              <a:t>34 / 34</a:t>
             </a:r>
             <a:endParaRPr lang="en-US" sz="4400" dirty="0"/>
           </a:p>
@@ -12457,7 +14514,7 @@
                 <a:ea typeface="Calibri" pitchFamily="34" charset="-122"/>
                 <a:cs typeface="Calibri" pitchFamily="34" charset="-120"/>
               </a:rPr>
-              <a:t>Quartiere in Zürich mit gültigem Score (Range 8 – 93)</a:t>
+              <a:t>offizielle Stadt-Zürich-Quartiere mit Score (Range 9 – 92)</a:t>
             </a:r>
             <a:endParaRPr lang="en-US" sz="1050" dirty="0"/>
           </a:p>
@@ -12496,7 +14553,7 @@
                 <a:ea typeface="Calibri" pitchFamily="34" charset="-122"/>
                 <a:cs typeface="Calibri" pitchFamily="34" charset="-120"/>
               </a:rPr>
-              <a:t>4 / 17</a:t>
+              <a:t>4 / 19</a:t>
             </a:r>
             <a:endParaRPr lang="en-US" sz="900" dirty="0"/>
           </a:p>
@@ -12915,7 +14972,7 @@
                 <a:ea typeface="Calibri" pitchFamily="34" charset="-122"/>
                 <a:cs typeface="Calibri" pitchFamily="34" charset="-120"/>
               </a:rPr>
-              <a:t>5 / 17</a:t>
+              <a:t>5 / 19</a:t>
             </a:r>
             <a:endParaRPr lang="en-US" sz="900" dirty="0"/>
           </a:p>
@@ -13263,7 +15320,7 @@
                 <a:ea typeface="Calibri" pitchFamily="34" charset="-122"/>
                 <a:cs typeface="Calibri" pitchFamily="34" charset="-120"/>
               </a:rPr>
-              <a:t>Test: Pearson- &amp; Spearman-Korrelation Score × Distanz HB (n = 44 Quartiere)</a:t>
+              <a:t>Test: Pearson- &amp; Spearman-Korrelation Score × Distanz HB (n = 34 Quartiere)</a:t>
             </a:r>
             <a:endParaRPr lang="en-US" sz="1050" dirty="0"/>
           </a:p>
@@ -13423,7 +15480,7 @@
                 <a:ea typeface="Trebuchet MS" pitchFamily="34" charset="-122"/>
                 <a:cs typeface="Trebuchet MS" pitchFamily="34" charset="-120"/>
               </a:rPr>
-              <a:t>Peripherie-Effekt</a:t>
+              <a:t>Wüsteneffekt</a:t>
             </a:r>
             <a:endParaRPr lang="en-US" sz="1600" dirty="0"/>
           </a:p>
@@ -13462,7 +15519,7 @@
                 <a:ea typeface="Calibri" pitchFamily="34" charset="-122"/>
                 <a:cs typeface="Calibri" pitchFamily="34" charset="-120"/>
               </a:rPr>
-              <a:t>Es gibt Quartiere mit überwiegender Wohnnutzung in der Peripherie, deren Score im untersten Quartil liegt — strukturelle Versorgungslücken.</a:t>
+              <a:t>Es gibt Quartiere mit hoher Bevölkerungsdichte und niedrigem Score — strukturelle Versorgungs-Wüsten.</a:t>
             </a:r>
             <a:endParaRPr lang="en-US" sz="1200" dirty="0"/>
           </a:p>
@@ -13501,7 +15558,7 @@
                 <a:ea typeface="Calibri" pitchFamily="34" charset="-122"/>
                 <a:cs typeface="Calibri" pitchFamily="34" charset="-120"/>
               </a:rPr>
-              <a:t>Test: Identifikation der Flop-Quartiere &amp; qualitative Lage-Analyse</a:t>
+              <a:t>Test: Schwellenwert-Test: Dichte &gt; P75 UND Score-P25 ≤ P25 (BFS STATPOP 2024)</a:t>
             </a:r>
             <a:endParaRPr lang="en-US" sz="1050" dirty="0"/>
           </a:p>
@@ -13540,7 +15597,7 @@
                 <a:ea typeface="Calibri" pitchFamily="34" charset="-122"/>
                 <a:cs typeface="Calibri" pitchFamily="34" charset="-120"/>
               </a:rPr>
-              <a:t>6 / 17</a:t>
+              <a:t>6 / 19</a:t>
             </a:r>
             <a:endParaRPr lang="en-US" sz="900" dirty="0"/>
           </a:p>
@@ -15407,7 +17464,7 @@
                 <a:ea typeface="Calibri" pitchFamily="34" charset="-122"/>
                 <a:cs typeface="Calibri" pitchFamily="34" charset="-120"/>
               </a:rPr>
-              <a:t>7 / 17</a:t>
+              <a:t>7 / 19</a:t>
             </a:r>
             <a:endParaRPr lang="en-US" sz="900" dirty="0"/>
           </a:p>
@@ -16366,7 +18423,7 @@
                 <a:ea typeface="Calibri" pitchFamily="34" charset="-122"/>
                 <a:cs typeface="Calibri" pitchFamily="34" charset="-120"/>
               </a:rPr>
-              <a:t>8 / 17</a:t>
+              <a:t>8 / 19</a:t>
             </a:r>
             <a:endParaRPr lang="en-US" sz="900" dirty="0"/>
           </a:p>
@@ -17385,7 +19442,7 @@
                 <a:ea typeface="Calibri" pitchFamily="34" charset="-122"/>
                 <a:cs typeface="Calibri" pitchFamily="34" charset="-120"/>
               </a:rPr>
-              <a:t>9 / 17</a:t>
+              <a:t>9 / 19</a:t>
             </a:r>
             <a:endParaRPr lang="en-US" sz="900" dirty="0"/>
           </a:p>

--- a/reports/zh15min_slides.pptx
+++ b/reports/zh15min_slides.pptx
@@ -3074,7 +3074,7 @@
                 <a:ea typeface="Trebuchet MS" pitchFamily="34" charset="-122"/>
                 <a:cs typeface="Trebuchet MS" pitchFamily="34" charset="-120"/>
               </a:rPr>
-              <a:t>Pipeline — sieben Notebooks</a:t>
+              <a:t>Pipeline — neun Notebooks</a:t>
             </a:r>
             <a:endParaRPr lang="en-US" sz="3000" dirty="0"/>
           </a:p>
@@ -3088,7 +3088,7 @@
         </p:nvSpPr>
         <p:spPr>
           <a:xfrm>
-            <a:off x="457200" y="1783080"/>
+            <a:off x="457200" y="1645920"/>
             <a:ext cx="8229600" cy="54864"/>
           </a:xfrm>
           <a:prstGeom prst="rect">
@@ -3113,7 +3113,7 @@
         </p:nvSpPr>
         <p:spPr>
           <a:xfrm>
-            <a:off x="502920" y="1920240"/>
+            <a:off x="502920" y="1737360"/>
             <a:ext cx="292608" cy="292608"/>
           </a:xfrm>
           <a:prstGeom prst="ellipse">
@@ -3138,7 +3138,7 @@
         </p:nvSpPr>
         <p:spPr>
           <a:xfrm>
-            <a:off x="502920" y="1920240"/>
+            <a:off x="502920" y="1737360"/>
             <a:ext cx="292608" cy="292608"/>
           </a:xfrm>
           <a:prstGeom prst="rect">
@@ -3177,7 +3177,7 @@
         </p:nvSpPr>
         <p:spPr>
           <a:xfrm>
-            <a:off x="960120" y="1920240"/>
+            <a:off x="960120" y="1737360"/>
             <a:ext cx="7680960" cy="292608"/>
           </a:xfrm>
           <a:prstGeom prst="rect">
@@ -3216,7 +3216,7 @@
         </p:nvSpPr>
         <p:spPr>
           <a:xfrm>
-            <a:off x="502920" y="2304288"/>
+            <a:off x="502920" y="2066544"/>
             <a:ext cx="292608" cy="292608"/>
           </a:xfrm>
           <a:prstGeom prst="ellipse">
@@ -3241,7 +3241,7 @@
         </p:nvSpPr>
         <p:spPr>
           <a:xfrm>
-            <a:off x="502920" y="2304288"/>
+            <a:off x="502920" y="2066544"/>
             <a:ext cx="292608" cy="292608"/>
           </a:xfrm>
           <a:prstGeom prst="rect">
@@ -3280,7 +3280,7 @@
         </p:nvSpPr>
         <p:spPr>
           <a:xfrm>
-            <a:off x="960120" y="2304288"/>
+            <a:off x="960120" y="2066544"/>
             <a:ext cx="7680960" cy="292608"/>
           </a:xfrm>
           <a:prstGeom prst="rect">
@@ -3305,7 +3305,7 @@
                 <a:ea typeface="Calibri" pitchFamily="34" charset="-122"/>
                 <a:cs typeface="Calibri" pitchFamily="34" charset="-120"/>
               </a:rPr>
-              <a:t>Walking-Graph + Quartier-Polygone (OSM admin_level=10)</a:t>
+              <a:t>Walking-Graph + STATPOP + Stadt-Zürich-Quartiere (WFS)</a:t>
             </a:r>
             <a:endParaRPr lang="en-US" sz="1300" dirty="0"/>
           </a:p>
@@ -3319,7 +3319,7 @@
         </p:nvSpPr>
         <p:spPr>
           <a:xfrm>
-            <a:off x="502920" y="2688336"/>
+            <a:off x="502920" y="2395728"/>
             <a:ext cx="292608" cy="292608"/>
           </a:xfrm>
           <a:prstGeom prst="ellipse">
@@ -3344,7 +3344,7 @@
         </p:nvSpPr>
         <p:spPr>
           <a:xfrm>
-            <a:off x="502920" y="2688336"/>
+            <a:off x="502920" y="2395728"/>
             <a:ext cx="292608" cy="292608"/>
           </a:xfrm>
           <a:prstGeom prst="rect">
@@ -3383,7 +3383,7 @@
         </p:nvSpPr>
         <p:spPr>
           <a:xfrm>
-            <a:off x="960120" y="2688336"/>
+            <a:off x="960120" y="2395728"/>
             <a:ext cx="7680960" cy="292608"/>
           </a:xfrm>
           <a:prstGeom prst="rect">
@@ -3408,7 +3408,7 @@
                 <a:ea typeface="Calibri" pitchFamily="34" charset="-122"/>
                 <a:cs typeface="Calibri" pitchFamily="34" charset="-120"/>
               </a:rPr>
-              <a:t>Alles in PostGIS (Schema zh15min) importieren</a:t>
+              <a:t>Höhen-Anreicherung des Walking-Graphs (SwissALTI3D)</a:t>
             </a:r>
             <a:endParaRPr lang="en-US" sz="1300" dirty="0"/>
           </a:p>
@@ -3422,7 +3422,7 @@
         </p:nvSpPr>
         <p:spPr>
           <a:xfrm>
-            <a:off x="502920" y="3072384"/>
+            <a:off x="502920" y="2724912"/>
             <a:ext cx="292608" cy="292608"/>
           </a:xfrm>
           <a:prstGeom prst="ellipse">
@@ -3447,7 +3447,7 @@
         </p:nvSpPr>
         <p:spPr>
           <a:xfrm>
-            <a:off x="502920" y="3072384"/>
+            <a:off x="502920" y="2724912"/>
             <a:ext cx="292608" cy="292608"/>
           </a:xfrm>
           <a:prstGeom prst="rect">
@@ -3486,7 +3486,7 @@
         </p:nvSpPr>
         <p:spPr>
           <a:xfrm>
-            <a:off x="960120" y="3072384"/>
+            <a:off x="960120" y="2724912"/>
             <a:ext cx="7680960" cy="292608"/>
           </a:xfrm>
           <a:prstGeom prst="rect">
@@ -3511,7 +3511,7 @@
                 <a:ea typeface="Calibri" pitchFamily="34" charset="-122"/>
                 <a:cs typeface="Calibri" pitchFamily="34" charset="-120"/>
               </a:rPr>
-              <a:t>Demo-Isochronen + Hex-Gitter (200 m Apothem)</a:t>
+              <a:t>Alles in PostGIS (Schema zh15min) importieren</a:t>
             </a:r>
             <a:endParaRPr lang="en-US" sz="1300" dirty="0"/>
           </a:p>
@@ -3525,7 +3525,7 @@
         </p:nvSpPr>
         <p:spPr>
           <a:xfrm>
-            <a:off x="502920" y="3456432"/>
+            <a:off x="502920" y="3054096"/>
             <a:ext cx="292608" cy="292608"/>
           </a:xfrm>
           <a:prstGeom prst="ellipse">
@@ -3550,7 +3550,7 @@
         </p:nvSpPr>
         <p:spPr>
           <a:xfrm>
-            <a:off x="502920" y="3456432"/>
+            <a:off x="502920" y="3054096"/>
             <a:ext cx="292608" cy="292608"/>
           </a:xfrm>
           <a:prstGeom prst="rect">
@@ -3589,7 +3589,7 @@
         </p:nvSpPr>
         <p:spPr>
           <a:xfrm>
-            <a:off x="960120" y="3456432"/>
+            <a:off x="960120" y="3054096"/>
             <a:ext cx="7680960" cy="292608"/>
           </a:xfrm>
           <a:prstGeom prst="rect">
@@ -3614,7 +3614,7 @@
                 <a:ea typeface="Calibri" pitchFamily="34" charset="-122"/>
                 <a:cs typeface="Calibri" pitchFamily="34" charset="-120"/>
               </a:rPr>
-              <a:t>Score-Berechnung (KDTree-beschleunigt)</a:t>
+              <a:t>Demo-Isochronen + Hex-Gitter (200 m Apothem)</a:t>
             </a:r>
             <a:endParaRPr lang="en-US" sz="1300" dirty="0"/>
           </a:p>
@@ -3628,7 +3628,7 @@
         </p:nvSpPr>
         <p:spPr>
           <a:xfrm>
-            <a:off x="502920" y="3840480"/>
+            <a:off x="502920" y="3383280"/>
             <a:ext cx="292608" cy="292608"/>
           </a:xfrm>
           <a:prstGeom prst="ellipse">
@@ -3653,7 +3653,7 @@
         </p:nvSpPr>
         <p:spPr>
           <a:xfrm>
-            <a:off x="502920" y="3840480"/>
+            <a:off x="502920" y="3383280"/>
             <a:ext cx="292608" cy="292608"/>
           </a:xfrm>
           <a:prstGeom prst="rect">
@@ -3692,7 +3692,7 @@
         </p:nvSpPr>
         <p:spPr>
           <a:xfrm>
-            <a:off x="960120" y="3840480"/>
+            <a:off x="960120" y="3383280"/>
             <a:ext cx="7680960" cy="292608"/>
           </a:xfrm>
           <a:prstGeom prst="rect">
@@ -3717,7 +3717,7 @@
                 <a:ea typeface="Calibri" pitchFamily="34" charset="-122"/>
                 <a:cs typeface="Calibri" pitchFamily="34" charset="-120"/>
               </a:rPr>
-              <a:t>Hypothesen-Test (Score × Distanz HB) + Versorgungslücken</a:t>
+              <a:t>Score-Berechnung (KDTree-beschleunigt)</a:t>
             </a:r>
             <a:endParaRPr lang="en-US" sz="1300" dirty="0"/>
           </a:p>
@@ -3731,7 +3731,7 @@
         </p:nvSpPr>
         <p:spPr>
           <a:xfrm>
-            <a:off x="502920" y="4224528"/>
+            <a:off x="502920" y="3712464"/>
             <a:ext cx="292608" cy="292608"/>
           </a:xfrm>
           <a:prstGeom prst="ellipse">
@@ -3756,7 +3756,7 @@
         </p:nvSpPr>
         <p:spPr>
           <a:xfrm>
-            <a:off x="502920" y="4224528"/>
+            <a:off x="502920" y="3712464"/>
             <a:ext cx="292608" cy="292608"/>
           </a:xfrm>
           <a:prstGeom prst="rect">
@@ -3795,7 +3795,7 @@
         </p:nvSpPr>
         <p:spPr>
           <a:xfrm>
-            <a:off x="960120" y="4224528"/>
+            <a:off x="960120" y="3712464"/>
             <a:ext cx="7680960" cy="292608"/>
           </a:xfrm>
           <a:prstGeom prst="rect">
@@ -3820,7 +3820,7 @@
                 <a:ea typeface="Calibri" pitchFamily="34" charset="-122"/>
                 <a:cs typeface="Calibri" pitchFamily="34" charset="-120"/>
               </a:rPr>
-              <a:t>Folium-Karte + Slide-Figuren</a:t>
+              <a:t>Hypothesen-Test + Versorgungslücken + Robustness Check</a:t>
             </a:r>
             <a:endParaRPr lang="en-US" sz="1300" dirty="0"/>
           </a:p>
@@ -3828,37 +3828,243 @@
       </p:sp>
       <p:sp>
         <p:nvSpPr>
-          <p:cNvPr id="26" name="Text 24"/>
-          <p:cNvSpPr/>
-          <p:nvPr/>
-        </p:nvSpPr>
-        <p:spPr>
-          <a:xfrm>
-            <a:off x="365760" y="4846320"/>
-            <a:ext cx="7315200" cy="228600"/>
-          </a:xfrm>
-          <a:prstGeom prst="rect">
-            <a:avLst/>
-          </a:prstGeom>
-          <a:noFill/>
-          <a:ln/>
-        </p:spPr>
-        <p:txBody>
-          <a:bodyPr wrap="square" lIns="0" tIns="0" rIns="0" bIns="0" rtlCol="0" anchor="ctr"/>
-          <a:lstStyle/>
-          <a:p>
-            <a:pPr algn="l" indent="0" marL="0">
-              <a:buNone/>
-            </a:pPr>
-            <a:r>
-              <a:rPr lang="en-US" sz="900" dirty="0">
-                <a:solidFill>
-                  <a:srgbClr val="64748B"/>
+          <p:cNvPr id="26" name="Shape 24"/>
+          <p:cNvSpPr/>
+          <p:nvPr/>
+        </p:nvSpPr>
+        <p:spPr>
+          <a:xfrm>
+            <a:off x="502920" y="4041648"/>
+            <a:ext cx="292608" cy="292608"/>
+          </a:xfrm>
+          <a:prstGeom prst="ellipse">
+            <a:avLst/>
+          </a:prstGeom>
+          <a:solidFill>
+            <a:srgbClr val="065A82"/>
+          </a:solidFill>
+          <a:ln w="12700">
+            <a:solidFill>
+              <a:srgbClr val="065A82"/>
+            </a:solidFill>
+            <a:prstDash val="solid"/>
+          </a:ln>
+        </p:spPr>
+      </p:sp>
+      <p:sp>
+        <p:nvSpPr>
+          <p:cNvPr id="27" name="Text 25"/>
+          <p:cNvSpPr/>
+          <p:nvPr/>
+        </p:nvSpPr>
+        <p:spPr>
+          <a:xfrm>
+            <a:off x="502920" y="4041648"/>
+            <a:ext cx="292608" cy="292608"/>
+          </a:xfrm>
+          <a:prstGeom prst="rect">
+            <a:avLst/>
+          </a:prstGeom>
+          <a:noFill/>
+          <a:ln/>
+        </p:spPr>
+        <p:txBody>
+          <a:bodyPr wrap="square" lIns="0" tIns="0" rIns="0" bIns="0" rtlCol="0" anchor="ctr"/>
+          <a:lstStyle/>
+          <a:p>
+            <a:pPr algn="ctr" indent="0" marL="0">
+              <a:buNone/>
+            </a:pPr>
+            <a:r>
+              <a:rPr lang="en-US" sz="1100" b="1" dirty="0">
+                <a:solidFill>
+                  <a:srgbClr val="FFFFFF"/>
+                </a:solidFill>
+                <a:latin typeface="Trebuchet MS" pitchFamily="34" charset="0"/>
+                <a:ea typeface="Trebuchet MS" pitchFamily="34" charset="-122"/>
+                <a:cs typeface="Trebuchet MS" pitchFamily="34" charset="-120"/>
+              </a:rPr>
+              <a:t>8</a:t>
+            </a:r>
+            <a:endParaRPr lang="en-US" sz="1100" dirty="0"/>
+          </a:p>
+        </p:txBody>
+      </p:sp>
+      <p:sp>
+        <p:nvSpPr>
+          <p:cNvPr id="28" name="Text 26"/>
+          <p:cNvSpPr/>
+          <p:nvPr/>
+        </p:nvSpPr>
+        <p:spPr>
+          <a:xfrm>
+            <a:off x="960120" y="4041648"/>
+            <a:ext cx="7680960" cy="292608"/>
+          </a:xfrm>
+          <a:prstGeom prst="rect">
+            <a:avLst/>
+          </a:prstGeom>
+          <a:noFill/>
+          <a:ln/>
+        </p:spPr>
+        <p:txBody>
+          <a:bodyPr wrap="square" lIns="0" tIns="0" rIns="0" bIns="0" rtlCol="0" anchor="ctr"/>
+          <a:lstStyle/>
+          <a:p>
+            <a:pPr indent="0" marL="0">
+              <a:buNone/>
+            </a:pPr>
+            <a:r>
+              <a:rPr lang="en-US" sz="1300" dirty="0">
+                <a:solidFill>
+                  <a:srgbClr val="0F172A"/>
                 </a:solidFill>
                 <a:latin typeface="Calibri" pitchFamily="34" charset="0"/>
                 <a:ea typeface="Calibri" pitchFamily="34" charset="-122"/>
                 <a:cs typeface="Calibri" pitchFamily="34" charset="-120"/>
               </a:rPr>
+              <a:t>Topografischer Score (Tobler) + Δ-Vergleich</a:t>
+            </a:r>
+            <a:endParaRPr lang="en-US" sz="1300" dirty="0"/>
+          </a:p>
+        </p:txBody>
+      </p:sp>
+      <p:sp>
+        <p:nvSpPr>
+          <p:cNvPr id="29" name="Shape 27"/>
+          <p:cNvSpPr/>
+          <p:nvPr/>
+        </p:nvSpPr>
+        <p:spPr>
+          <a:xfrm>
+            <a:off x="502920" y="4370832"/>
+            <a:ext cx="292608" cy="292608"/>
+          </a:xfrm>
+          <a:prstGeom prst="ellipse">
+            <a:avLst/>
+          </a:prstGeom>
+          <a:solidFill>
+            <a:srgbClr val="065A82"/>
+          </a:solidFill>
+          <a:ln w="12700">
+            <a:solidFill>
+              <a:srgbClr val="065A82"/>
+            </a:solidFill>
+            <a:prstDash val="solid"/>
+          </a:ln>
+        </p:spPr>
+      </p:sp>
+      <p:sp>
+        <p:nvSpPr>
+          <p:cNvPr id="30" name="Text 28"/>
+          <p:cNvSpPr/>
+          <p:nvPr/>
+        </p:nvSpPr>
+        <p:spPr>
+          <a:xfrm>
+            <a:off x="502920" y="4370832"/>
+            <a:ext cx="292608" cy="292608"/>
+          </a:xfrm>
+          <a:prstGeom prst="rect">
+            <a:avLst/>
+          </a:prstGeom>
+          <a:noFill/>
+          <a:ln/>
+        </p:spPr>
+        <p:txBody>
+          <a:bodyPr wrap="square" lIns="0" tIns="0" rIns="0" bIns="0" rtlCol="0" anchor="ctr"/>
+          <a:lstStyle/>
+          <a:p>
+            <a:pPr algn="ctr" indent="0" marL="0">
+              <a:buNone/>
+            </a:pPr>
+            <a:r>
+              <a:rPr lang="en-US" sz="1100" b="1" dirty="0">
+                <a:solidFill>
+                  <a:srgbClr val="FFFFFF"/>
+                </a:solidFill>
+                <a:latin typeface="Trebuchet MS" pitchFamily="34" charset="0"/>
+                <a:ea typeface="Trebuchet MS" pitchFamily="34" charset="-122"/>
+                <a:cs typeface="Trebuchet MS" pitchFamily="34" charset="-120"/>
+              </a:rPr>
+              <a:t>9</a:t>
+            </a:r>
+            <a:endParaRPr lang="en-US" sz="1100" dirty="0"/>
+          </a:p>
+        </p:txBody>
+      </p:sp>
+      <p:sp>
+        <p:nvSpPr>
+          <p:cNvPr id="31" name="Text 29"/>
+          <p:cNvSpPr/>
+          <p:nvPr/>
+        </p:nvSpPr>
+        <p:spPr>
+          <a:xfrm>
+            <a:off x="960120" y="4370832"/>
+            <a:ext cx="7680960" cy="292608"/>
+          </a:xfrm>
+          <a:prstGeom prst="rect">
+            <a:avLst/>
+          </a:prstGeom>
+          <a:noFill/>
+          <a:ln/>
+        </p:spPr>
+        <p:txBody>
+          <a:bodyPr wrap="square" lIns="0" tIns="0" rIns="0" bIns="0" rtlCol="0" anchor="ctr"/>
+          <a:lstStyle/>
+          <a:p>
+            <a:pPr indent="0" marL="0">
+              <a:buNone/>
+            </a:pPr>
+            <a:r>
+              <a:rPr lang="en-US" sz="1300" dirty="0">
+                <a:solidFill>
+                  <a:srgbClr val="0F172A"/>
+                </a:solidFill>
+                <a:latin typeface="Calibri" pitchFamily="34" charset="0"/>
+                <a:ea typeface="Calibri" pitchFamily="34" charset="-122"/>
+                <a:cs typeface="Calibri" pitchFamily="34" charset="-120"/>
+              </a:rPr>
+              <a:t>Folium-Karte + Slide-Figuren</a:t>
+            </a:r>
+            <a:endParaRPr lang="en-US" sz="1300" dirty="0"/>
+          </a:p>
+        </p:txBody>
+      </p:sp>
+      <p:sp>
+        <p:nvSpPr>
+          <p:cNvPr id="32" name="Text 30"/>
+          <p:cNvSpPr/>
+          <p:nvPr/>
+        </p:nvSpPr>
+        <p:spPr>
+          <a:xfrm>
+            <a:off x="365760" y="4846320"/>
+            <a:ext cx="7315200" cy="228600"/>
+          </a:xfrm>
+          <a:prstGeom prst="rect">
+            <a:avLst/>
+          </a:prstGeom>
+          <a:noFill/>
+          <a:ln/>
+        </p:spPr>
+        <p:txBody>
+          <a:bodyPr wrap="square" lIns="0" tIns="0" rIns="0" bIns="0" rtlCol="0" anchor="ctr"/>
+          <a:lstStyle/>
+          <a:p>
+            <a:pPr algn="l" indent="0" marL="0">
+              <a:buNone/>
+            </a:pPr>
+            <a:r>
+              <a:rPr lang="en-US" sz="900" dirty="0">
+                <a:solidFill>
+                  <a:srgbClr val="64748B"/>
+                </a:solidFill>
+                <a:latin typeface="Calibri" pitchFamily="34" charset="0"/>
+                <a:ea typeface="Calibri" pitchFamily="34" charset="-122"/>
+                <a:cs typeface="Calibri" pitchFamily="34" charset="-120"/>
+              </a:rPr>
               <a:t>Reproduzierbar via docker compose up -d  &amp;  jupyter lab notebooks/</a:t>
             </a:r>
             <a:endParaRPr lang="en-US" sz="900" dirty="0"/>
@@ -3867,7 +4073,7 @@
       </p:sp>
       <p:sp>
         <p:nvSpPr>
-          <p:cNvPr id="27" name="Text 25"/>
+          <p:cNvPr id="33" name="Text 31"/>
           <p:cNvSpPr/>
           <p:nvPr/>
         </p:nvSpPr>
@@ -10036,7 +10242,7 @@
                 <a:ea typeface="Trebuchet MS" pitchFamily="34" charset="-122"/>
                 <a:cs typeface="Trebuchet MS" pitchFamily="34" charset="-120"/>
               </a:rPr>
-              <a:t>Multi-Variate-Regression  (n = 34, R² = 0.86)</a:t>
+              <a:t>Multi-Variate-Regression  (n = 34, R² = 0.91)</a:t>
             </a:r>
             <a:endParaRPr lang="en-US" sz="1300" dirty="0"/>
           </a:p>
@@ -10051,7 +10257,7 @@
         <p:spPr>
           <a:xfrm>
             <a:off x="640080" y="2057400"/>
-            <a:ext cx="1463040" cy="274320"/>
+            <a:ext cx="1554480" cy="274320"/>
           </a:xfrm>
           <a:prstGeom prst="rect">
             <a:avLst/>
@@ -10089,7 +10295,7 @@
         </p:nvSpPr>
         <p:spPr>
           <a:xfrm>
-            <a:off x="2103120" y="2057400"/>
+            <a:off x="2194560" y="2057400"/>
             <a:ext cx="868680" cy="274320"/>
           </a:xfrm>
           <a:prstGeom prst="rect">
@@ -10128,7 +10334,7 @@
         </p:nvSpPr>
         <p:spPr>
           <a:xfrm>
-            <a:off x="2971800" y="2057400"/>
+            <a:off x="3063240" y="2057400"/>
             <a:ext cx="868680" cy="274320"/>
           </a:xfrm>
           <a:prstGeom prst="rect">
@@ -10167,8 +10373,8 @@
         </p:nvSpPr>
         <p:spPr>
           <a:xfrm>
-            <a:off x="3840480" y="2057400"/>
-            <a:ext cx="868680" cy="274320"/>
+            <a:off x="3931920" y="2057400"/>
+            <a:ext cx="914400" cy="274320"/>
           </a:xfrm>
           <a:prstGeom prst="rect">
             <a:avLst/>
@@ -10206,8 +10412,8 @@
         </p:nvSpPr>
         <p:spPr>
           <a:xfrm>
-            <a:off x="4709160" y="2057400"/>
-            <a:ext cx="640080" cy="274320"/>
+            <a:off x="4846320" y="2057400"/>
+            <a:ext cx="548640" cy="274320"/>
           </a:xfrm>
           <a:prstGeom prst="rect">
             <a:avLst/>
@@ -10246,7 +10452,7 @@
         <p:spPr>
           <a:xfrm>
             <a:off x="640080" y="2423160"/>
-            <a:ext cx="1463040" cy="292608"/>
+            <a:ext cx="1554480" cy="292608"/>
           </a:xfrm>
           <a:prstGeom prst="rect">
             <a:avLst/>
@@ -10284,7 +10490,7 @@
         </p:nvSpPr>
         <p:spPr>
           <a:xfrm>
-            <a:off x="2103120" y="2423160"/>
+            <a:off x="2194560" y="2423160"/>
             <a:ext cx="868680" cy="292608"/>
           </a:xfrm>
           <a:prstGeom prst="rect">
@@ -10323,7 +10529,7 @@
         </p:nvSpPr>
         <p:spPr>
           <a:xfrm>
-            <a:off x="2971800" y="2423160"/>
+            <a:off x="3063240" y="2423160"/>
             <a:ext cx="868680" cy="292608"/>
           </a:xfrm>
           <a:prstGeom prst="rect">
@@ -10348,7 +10554,7 @@
                 <a:ea typeface="Consolas" pitchFamily="34" charset="-122"/>
                 <a:cs typeface="Consolas" pitchFamily="34" charset="-120"/>
               </a:rPr>
-              <a:t>−9.28</a:t>
+              <a:t>−9.52</a:t>
             </a:r>
             <a:endParaRPr lang="en-US" sz="1050" dirty="0"/>
           </a:p>
@@ -10362,8 +10568,8 @@
         </p:nvSpPr>
         <p:spPr>
           <a:xfrm>
-            <a:off x="3840480" y="2423160"/>
-            <a:ext cx="868680" cy="292608"/>
+            <a:off x="3931920" y="2423160"/>
+            <a:ext cx="914400" cy="292608"/>
           </a:xfrm>
           <a:prstGeom prst="rect">
             <a:avLst/>
@@ -10387,7 +10593,7 @@
                 <a:ea typeface="Consolas" pitchFamily="34" charset="-122"/>
                 <a:cs typeface="Consolas" pitchFamily="34" charset="-120"/>
               </a:rPr>
-              <a:t>&lt;10⁻⁵</a:t>
+              <a:t>&lt;10⁻⁶</a:t>
             </a:r>
             <a:endParaRPr lang="en-US" sz="1050" dirty="0"/>
           </a:p>
@@ -10401,8 +10607,8 @@
         </p:nvSpPr>
         <p:spPr>
           <a:xfrm>
-            <a:off x="4709160" y="2423160"/>
-            <a:ext cx="640080" cy="292608"/>
+            <a:off x="4846320" y="2423160"/>
+            <a:ext cx="548640" cy="292608"/>
           </a:xfrm>
           <a:prstGeom prst="rect">
             <a:avLst/>
@@ -10441,7 +10647,7 @@
         <p:spPr>
           <a:xfrm>
             <a:off x="640080" y="2807208"/>
-            <a:ext cx="1463040" cy="292608"/>
+            <a:ext cx="1554480" cy="292608"/>
           </a:xfrm>
           <a:prstGeom prst="rect">
             <a:avLst/>
@@ -10465,7 +10671,7 @@
                 <a:ea typeface="Calibri" pitchFamily="34" charset="-122"/>
                 <a:cs typeface="Calibri" pitchFamily="34" charset="-120"/>
               </a:rPr>
-              <a:t>Höhe (approx)</a:t>
+              <a:t>Höhe (SwissALTI3D)</a:t>
             </a:r>
             <a:endParaRPr lang="en-US" sz="1100" dirty="0"/>
           </a:p>
@@ -10479,7 +10685,7 @@
         </p:nvSpPr>
         <p:spPr>
           <a:xfrm>
-            <a:off x="2103120" y="2807208"/>
+            <a:off x="2194560" y="2807208"/>
             <a:ext cx="868680" cy="292608"/>
           </a:xfrm>
           <a:prstGeom prst="rect">
@@ -10504,7 +10710,7 @@
                 <a:ea typeface="Consolas" pitchFamily="34" charset="-122"/>
                 <a:cs typeface="Consolas" pitchFamily="34" charset="-120"/>
               </a:rPr>
-              <a:t>−0.04</a:t>
+              <a:t>−0.60</a:t>
             </a:r>
             <a:endParaRPr lang="en-US" sz="1050" dirty="0"/>
           </a:p>
@@ -10518,7 +10724,7 @@
         </p:nvSpPr>
         <p:spPr>
           <a:xfrm>
-            <a:off x="2971800" y="2807208"/>
+            <a:off x="3063240" y="2807208"/>
             <a:ext cx="868680" cy="292608"/>
           </a:xfrm>
           <a:prstGeom prst="rect">
@@ -10543,7 +10749,7 @@
                 <a:ea typeface="Consolas" pitchFamily="34" charset="-122"/>
                 <a:cs typeface="Consolas" pitchFamily="34" charset="-120"/>
               </a:rPr>
-              <a:t>+0.03</a:t>
+              <a:t>−0.107</a:t>
             </a:r>
             <a:endParaRPr lang="en-US" sz="1050" dirty="0"/>
           </a:p>
@@ -10557,8 +10763,8 @@
         </p:nvSpPr>
         <p:spPr>
           <a:xfrm>
-            <a:off x="3840480" y="2807208"/>
-            <a:ext cx="868680" cy="292608"/>
+            <a:off x="3931920" y="2807208"/>
+            <a:ext cx="914400" cy="292608"/>
           </a:xfrm>
           <a:prstGeom prst="rect">
             <a:avLst/>
@@ -10582,7 +10788,7 @@
                 <a:ea typeface="Consolas" pitchFamily="34" charset="-122"/>
                 <a:cs typeface="Consolas" pitchFamily="34" charset="-120"/>
               </a:rPr>
-              <a:t>0.640</a:t>
+              <a:t>&lt;10⁻³</a:t>
             </a:r>
             <a:endParaRPr lang="en-US" sz="1050" dirty="0"/>
           </a:p>
@@ -10596,8 +10802,8 @@
         </p:nvSpPr>
         <p:spPr>
           <a:xfrm>
-            <a:off x="4709160" y="2807208"/>
-            <a:ext cx="640080" cy="292608"/>
+            <a:off x="4846320" y="2807208"/>
+            <a:ext cx="548640" cy="292608"/>
           </a:xfrm>
           <a:prstGeom prst="rect">
             <a:avLst/>
@@ -10615,13 +10821,13 @@
             <a:r>
               <a:rPr lang="en-US" sz="1050" b="1" dirty="0">
                 <a:solidFill>
-                  <a:srgbClr val="64748B"/>
+                  <a:srgbClr val="1A9850"/>
                 </a:solidFill>
                 <a:latin typeface="Consolas" pitchFamily="34" charset="0"/>
                 <a:ea typeface="Consolas" pitchFamily="34" charset="-122"/>
                 <a:cs typeface="Consolas" pitchFamily="34" charset="-120"/>
               </a:rPr>
-              <a:t>n.s.</a:t>
+              <a:t>***</a:t>
             </a:r>
             <a:endParaRPr lang="en-US" sz="1050" dirty="0"/>
           </a:p>
@@ -10636,7 +10842,7 @@
         <p:spPr>
           <a:xfrm>
             <a:off x="640080" y="3191256"/>
-            <a:ext cx="1463040" cy="292608"/>
+            <a:ext cx="1554480" cy="292608"/>
           </a:xfrm>
           <a:prstGeom prst="rect">
             <a:avLst/>
@@ -10674,7 +10880,7 @@
         </p:nvSpPr>
         <p:spPr>
           <a:xfrm>
-            <a:off x="2103120" y="3191256"/>
+            <a:off x="2194560" y="3191256"/>
             <a:ext cx="868680" cy="292608"/>
           </a:xfrm>
           <a:prstGeom prst="rect">
@@ -10713,7 +10919,7 @@
         </p:nvSpPr>
         <p:spPr>
           <a:xfrm>
-            <a:off x="2971800" y="3191256"/>
+            <a:off x="3063240" y="3191256"/>
             <a:ext cx="868680" cy="292608"/>
           </a:xfrm>
           <a:prstGeom prst="rect">
@@ -10738,7 +10944,7 @@
                 <a:ea typeface="Consolas" pitchFamily="34" charset="-122"/>
                 <a:cs typeface="Consolas" pitchFamily="34" charset="-120"/>
               </a:rPr>
-              <a:t>+0.10</a:t>
+              <a:t>+0.069</a:t>
             </a:r>
             <a:endParaRPr lang="en-US" sz="1050" dirty="0"/>
           </a:p>
@@ -10752,8 +10958,8 @@
         </p:nvSpPr>
         <p:spPr>
           <a:xfrm>
-            <a:off x="3840480" y="3191256"/>
-            <a:ext cx="868680" cy="292608"/>
+            <a:off x="3931920" y="3191256"/>
+            <a:ext cx="914400" cy="292608"/>
           </a:xfrm>
           <a:prstGeom prst="rect">
             <a:avLst/>
@@ -10777,7 +10983,7 @@
                 <a:ea typeface="Consolas" pitchFamily="34" charset="-122"/>
                 <a:cs typeface="Consolas" pitchFamily="34" charset="-120"/>
               </a:rPr>
-              <a:t>&lt;10⁻⁵</a:t>
+              <a:t>&lt;10⁻⁴</a:t>
             </a:r>
             <a:endParaRPr lang="en-US" sz="1050" dirty="0"/>
           </a:p>
@@ -10791,8 +10997,8 @@
         </p:nvSpPr>
         <p:spPr>
           <a:xfrm>
-            <a:off x="4709160" y="3191256"/>
-            <a:ext cx="640080" cy="292608"/>
+            <a:off x="4846320" y="3191256"/>
+            <a:ext cx="548640" cy="292608"/>
           </a:xfrm>
           <a:prstGeom prst="rect">
             <a:avLst/>
@@ -11007,7 +11213,7 @@
                 <a:ea typeface="Calibri" pitchFamily="34" charset="-122"/>
                 <a:cs typeface="Calibri" pitchFamily="34" charset="-120"/>
               </a:rPr>
-              <a:t>Distanz hochsignifikant nach Kontrolle.</a:t>
+              <a:t>Distanz hochsignifikant nach Kontrolle (β = −9.52).</a:t>
             </a:r>
             <a:endParaRPr lang="en-US" sz="1000" dirty="0"/>
           </a:p>
@@ -11058,7 +11264,7 @@
                 <a:ea typeface="Calibri" pitchFamily="34" charset="-122"/>
                 <a:cs typeface="Calibri" pitchFamily="34" charset="-120"/>
               </a:rPr>
-              <a:t>Höher = niedrigerer Score (β = −0.10).</a:t>
+              <a:t>SwissALTI3D-Höhen: höher = niedrigerer Score (β = −0.107).</a:t>
             </a:r>
             <a:endParaRPr lang="en-US" sz="1000" dirty="0"/>
           </a:p>
@@ -11579,7 +11785,7 @@
                 <a:ea typeface="Trebuchet MS" pitchFamily="34" charset="-122"/>
                 <a:cs typeface="Trebuchet MS" pitchFamily="34" charset="-120"/>
               </a:rPr>
-              <a:t>Topografie-Approximation</a:t>
+              <a:t>Tobler-Modell-Annahme</a:t>
             </a:r>
             <a:endParaRPr lang="en-US" sz="1400" dirty="0"/>
           </a:p>
@@ -11618,7 +11824,7 @@
                 <a:ea typeface="Calibri" pitchFamily="34" charset="-122"/>
                 <a:cs typeface="Calibri" pitchFamily="34" charset="-120"/>
               </a:rPr>
-              <a:t>Open-Elevation-API zum Auswertungszeitpunkt down — Höhen via N-Koordinaten approximiert. Mit DEM-Daten von swisstopo wäre der Höhen-Confounder belastbarer testbar.</a:t>
+              <a:t>Die Tobler-Hiking-Funktion ist auf Wandern in offenem Gelände kalibriert (Tobler 1993), nicht auf städtisches Gehen mit Ampeln und Querstrassen. Der relative Unterschied flat vs. topografisch (Slide 13) bleibt aber aussagekräftig.</a:t>
             </a:r>
             <a:endParaRPr lang="en-US" sz="1100" dirty="0"/>
           </a:p>
@@ -16705,7 +16911,7 @@
                 <a:ea typeface="Trebuchet MS" pitchFamily="34" charset="-122"/>
                 <a:cs typeface="Trebuchet MS" pitchFamily="34" charset="-120"/>
               </a:rPr>
-              <a:t>Daten — sieben Quellen, ein Modell</a:t>
+              <a:t>Daten — acht Quellen, ein Modell</a:t>
             </a:r>
             <a:endParaRPr lang="en-US" sz="3000" dirty="0"/>
           </a:p>
@@ -17580,7 +17786,7 @@
                           <a:ea typeface="Calibri" pitchFamily="34" charset="-122"/>
                           <a:cs typeface="Calibri" pitchFamily="34" charset="-120"/>
                         </a:rPr>
-                        <a:t>OSM admin_level=10</a:t>
+                        <a:t>BFS STATPOP 2023</a:t>
                       </a:r>
                       <a:endParaRPr lang="en-US" sz="1150" dirty="0">
                         <a:latin typeface="Calibri" charset="0"/>
@@ -17648,7 +17854,7 @@
                           <a:ea typeface="Calibri" pitchFamily="34" charset="-122"/>
                           <a:cs typeface="Calibri" pitchFamily="34" charset="-120"/>
                         </a:rPr>
-                        <a:t>Quartier-Polygone (44 mit Score)</a:t>
+                        <a:t>Bevölkerungsdichte (Hektar-Raster)</a:t>
                       </a:r>
                       <a:endParaRPr lang="en-US" sz="1150" dirty="0">
                         <a:latin typeface="Calibri" charset="0"/>
@@ -17716,7 +17922,625 @@
                           <a:ea typeface="Calibri" pitchFamily="34" charset="-122"/>
                           <a:cs typeface="Calibri" pitchFamily="34" charset="-120"/>
                         </a:rPr>
-                        <a:t>ODbL</a:t>
+                        <a:t>Open Data BFS</a:t>
+                      </a:r>
+                      <a:endParaRPr lang="en-US" sz="1150" dirty="0">
+                        <a:latin typeface="Calibri" charset="0"/>
+                        <a:ea typeface="Calibri" charset="0"/>
+                        <a:cs typeface="Calibri" charset="0"/>
+                      </a:endParaRPr>
+                    </a:p>
+                  </a:txBody>
+                  <a:tcPr marL="91440" marR="91440" marT="45720" marB="45720">
+                    <a:lnL w="6350" cap="flat" cmpd="sng" algn="ctr">
+                      <a:solidFill>
+                        <a:srgbClr val="E2E8F0"/>
+                      </a:solidFill>
+                      <a:prstDash val="solid"/>
+                      <a:round/>
+                      <a:headEnd type="none" w="med" len="med"/>
+                      <a:tailEnd type="none" w="med" len="med"/>
+                    </a:lnL>
+                    <a:lnR w="6350" cap="flat" cmpd="sng" algn="ctr">
+                      <a:solidFill>
+                        <a:srgbClr val="E2E8F0"/>
+                      </a:solidFill>
+                      <a:prstDash val="solid"/>
+                      <a:round/>
+                      <a:headEnd type="none" w="med" len="med"/>
+                      <a:tailEnd type="none" w="med" len="med"/>
+                    </a:lnR>
+                    <a:lnT w="6350" cap="flat" cmpd="sng" algn="ctr">
+                      <a:solidFill>
+                        <a:srgbClr val="E2E8F0"/>
+                      </a:solidFill>
+                      <a:prstDash val="solid"/>
+                      <a:round/>
+                      <a:headEnd type="none" w="med" len="med"/>
+                      <a:tailEnd type="none" w="med" len="med"/>
+                    </a:lnT>
+                    <a:lnB w="6350" cap="flat" cmpd="sng" algn="ctr">
+                      <a:solidFill>
+                        <a:srgbClr val="E2E8F0"/>
+                      </a:solidFill>
+                      <a:prstDash val="solid"/>
+                      <a:round/>
+                      <a:headEnd type="none" w="med" len="med"/>
+                      <a:tailEnd type="none" w="med" len="med"/>
+                    </a:lnB>
+                    <a:solidFill>
+                      <a:srgbClr val="FFFFFF"/>
+                    </a:solidFill>
+                  </a:tcPr>
+                </a:tc>
+              </a:tr>
+              <a:tr h="384048">
+                <a:tc>
+                  <a:txBody>
+                    <a:bodyPr/>
+                    <a:lstStyle/>
+                    <a:p>
+                      <a:pPr algn="l" indent="0" marL="0">
+                        <a:buNone/>
+                      </a:pPr>
+                      <a:r>
+                        <a:rPr lang="en-US" sz="1150" dirty="0">
+                          <a:solidFill>
+                            <a:srgbClr val="0F172A"/>
+                          </a:solidFill>
+                          <a:latin typeface="Calibri" pitchFamily="34" charset="0"/>
+                          <a:ea typeface="Calibri" pitchFamily="34" charset="-122"/>
+                          <a:cs typeface="Calibri" pitchFamily="34" charset="-120"/>
+                        </a:rPr>
+                        <a:t>Stadt Zürich Open Data</a:t>
+                      </a:r>
+                      <a:endParaRPr lang="en-US" sz="1150" dirty="0">
+                        <a:latin typeface="Calibri" charset="0"/>
+                        <a:ea typeface="Calibri" charset="0"/>
+                        <a:cs typeface="Calibri" charset="0"/>
+                      </a:endParaRPr>
+                    </a:p>
+                  </a:txBody>
+                  <a:tcPr marL="91440" marR="91440" marT="45720" marB="45720">
+                    <a:lnL w="6350" cap="flat" cmpd="sng" algn="ctr">
+                      <a:solidFill>
+                        <a:srgbClr val="E2E8F0"/>
+                      </a:solidFill>
+                      <a:prstDash val="solid"/>
+                      <a:round/>
+                      <a:headEnd type="none" w="med" len="med"/>
+                      <a:tailEnd type="none" w="med" len="med"/>
+                    </a:lnL>
+                    <a:lnR w="6350" cap="flat" cmpd="sng" algn="ctr">
+                      <a:solidFill>
+                        <a:srgbClr val="E2E8F0"/>
+                      </a:solidFill>
+                      <a:prstDash val="solid"/>
+                      <a:round/>
+                      <a:headEnd type="none" w="med" len="med"/>
+                      <a:tailEnd type="none" w="med" len="med"/>
+                    </a:lnR>
+                    <a:lnT w="6350" cap="flat" cmpd="sng" algn="ctr">
+                      <a:solidFill>
+                        <a:srgbClr val="E2E8F0"/>
+                      </a:solidFill>
+                      <a:prstDash val="solid"/>
+                      <a:round/>
+                      <a:headEnd type="none" w="med" len="med"/>
+                      <a:tailEnd type="none" w="med" len="med"/>
+                    </a:lnT>
+                    <a:lnB w="6350" cap="flat" cmpd="sng" algn="ctr">
+                      <a:solidFill>
+                        <a:srgbClr val="E2E8F0"/>
+                      </a:solidFill>
+                      <a:prstDash val="solid"/>
+                      <a:round/>
+                      <a:headEnd type="none" w="med" len="med"/>
+                      <a:tailEnd type="none" w="med" len="med"/>
+                    </a:lnB>
+                    <a:solidFill>
+                      <a:srgbClr val="FFFFFF"/>
+                    </a:solidFill>
+                  </a:tcPr>
+                </a:tc>
+                <a:tc>
+                  <a:txBody>
+                    <a:bodyPr/>
+                    <a:lstStyle/>
+                    <a:p>
+                      <a:pPr algn="l" indent="0" marL="0">
+                        <a:buNone/>
+                      </a:pPr>
+                      <a:r>
+                        <a:rPr lang="en-US" sz="1150" dirty="0">
+                          <a:solidFill>
+                            <a:srgbClr val="0F172A"/>
+                          </a:solidFill>
+                          <a:latin typeface="Calibri" pitchFamily="34" charset="0"/>
+                          <a:ea typeface="Calibri" pitchFamily="34" charset="-122"/>
+                          <a:cs typeface="Calibri" pitchFamily="34" charset="-120"/>
+                        </a:rPr>
+                        <a:t>34 offizielle Quartiere + Mietpreis-Index</a:t>
+                      </a:r>
+                      <a:endParaRPr lang="en-US" sz="1150" dirty="0">
+                        <a:latin typeface="Calibri" charset="0"/>
+                        <a:ea typeface="Calibri" charset="0"/>
+                        <a:cs typeface="Calibri" charset="0"/>
+                      </a:endParaRPr>
+                    </a:p>
+                  </a:txBody>
+                  <a:tcPr marL="91440" marR="91440" marT="45720" marB="45720">
+                    <a:lnL w="6350" cap="flat" cmpd="sng" algn="ctr">
+                      <a:solidFill>
+                        <a:srgbClr val="E2E8F0"/>
+                      </a:solidFill>
+                      <a:prstDash val="solid"/>
+                      <a:round/>
+                      <a:headEnd type="none" w="med" len="med"/>
+                      <a:tailEnd type="none" w="med" len="med"/>
+                    </a:lnL>
+                    <a:lnR w="6350" cap="flat" cmpd="sng" algn="ctr">
+                      <a:solidFill>
+                        <a:srgbClr val="E2E8F0"/>
+                      </a:solidFill>
+                      <a:prstDash val="solid"/>
+                      <a:round/>
+                      <a:headEnd type="none" w="med" len="med"/>
+                      <a:tailEnd type="none" w="med" len="med"/>
+                    </a:lnR>
+                    <a:lnT w="6350" cap="flat" cmpd="sng" algn="ctr">
+                      <a:solidFill>
+                        <a:srgbClr val="E2E8F0"/>
+                      </a:solidFill>
+                      <a:prstDash val="solid"/>
+                      <a:round/>
+                      <a:headEnd type="none" w="med" len="med"/>
+                      <a:tailEnd type="none" w="med" len="med"/>
+                    </a:lnT>
+                    <a:lnB w="6350" cap="flat" cmpd="sng" algn="ctr">
+                      <a:solidFill>
+                        <a:srgbClr val="E2E8F0"/>
+                      </a:solidFill>
+                      <a:prstDash val="solid"/>
+                      <a:round/>
+                      <a:headEnd type="none" w="med" len="med"/>
+                      <a:tailEnd type="none" w="med" len="med"/>
+                    </a:lnB>
+                    <a:solidFill>
+                      <a:srgbClr val="FFFFFF"/>
+                    </a:solidFill>
+                  </a:tcPr>
+                </a:tc>
+                <a:tc>
+                  <a:txBody>
+                    <a:bodyPr/>
+                    <a:lstStyle/>
+                    <a:p>
+                      <a:pPr algn="l" indent="0" marL="0">
+                        <a:buNone/>
+                      </a:pPr>
+                      <a:r>
+                        <a:rPr lang="en-US" sz="1150" dirty="0">
+                          <a:solidFill>
+                            <a:srgbClr val="0F172A"/>
+                          </a:solidFill>
+                          <a:latin typeface="Calibri" pitchFamily="34" charset="0"/>
+                          <a:ea typeface="Calibri" pitchFamily="34" charset="-122"/>
+                          <a:cs typeface="Calibri" pitchFamily="34" charset="-120"/>
+                        </a:rPr>
+                        <a:t>CC BY 4.0</a:t>
+                      </a:r>
+                      <a:endParaRPr lang="en-US" sz="1150" dirty="0">
+                        <a:latin typeface="Calibri" charset="0"/>
+                        <a:ea typeface="Calibri" charset="0"/>
+                        <a:cs typeface="Calibri" charset="0"/>
+                      </a:endParaRPr>
+                    </a:p>
+                  </a:txBody>
+                  <a:tcPr marL="91440" marR="91440" marT="45720" marB="45720">
+                    <a:lnL w="6350" cap="flat" cmpd="sng" algn="ctr">
+                      <a:solidFill>
+                        <a:srgbClr val="E2E8F0"/>
+                      </a:solidFill>
+                      <a:prstDash val="solid"/>
+                      <a:round/>
+                      <a:headEnd type="none" w="med" len="med"/>
+                      <a:tailEnd type="none" w="med" len="med"/>
+                    </a:lnL>
+                    <a:lnR w="6350" cap="flat" cmpd="sng" algn="ctr">
+                      <a:solidFill>
+                        <a:srgbClr val="E2E8F0"/>
+                      </a:solidFill>
+                      <a:prstDash val="solid"/>
+                      <a:round/>
+                      <a:headEnd type="none" w="med" len="med"/>
+                      <a:tailEnd type="none" w="med" len="med"/>
+                    </a:lnR>
+                    <a:lnT w="6350" cap="flat" cmpd="sng" algn="ctr">
+                      <a:solidFill>
+                        <a:srgbClr val="E2E8F0"/>
+                      </a:solidFill>
+                      <a:prstDash val="solid"/>
+                      <a:round/>
+                      <a:headEnd type="none" w="med" len="med"/>
+                      <a:tailEnd type="none" w="med" len="med"/>
+                    </a:lnT>
+                    <a:lnB w="6350" cap="flat" cmpd="sng" algn="ctr">
+                      <a:solidFill>
+                        <a:srgbClr val="E2E8F0"/>
+                      </a:solidFill>
+                      <a:prstDash val="solid"/>
+                      <a:round/>
+                      <a:headEnd type="none" w="med" len="med"/>
+                      <a:tailEnd type="none" w="med" len="med"/>
+                    </a:lnB>
+                    <a:solidFill>
+                      <a:srgbClr val="FFFFFF"/>
+                    </a:solidFill>
+                  </a:tcPr>
+                </a:tc>
+              </a:tr>
+              <a:tr h="384048">
+                <a:tc>
+                  <a:txBody>
+                    <a:bodyPr/>
+                    <a:lstStyle/>
+                    <a:p>
+                      <a:pPr algn="l" indent="0" marL="0">
+                        <a:buNone/>
+                      </a:pPr>
+                      <a:r>
+                        <a:rPr lang="en-US" sz="1150" dirty="0">
+                          <a:solidFill>
+                            <a:srgbClr val="0F172A"/>
+                          </a:solidFill>
+                          <a:latin typeface="Calibri" pitchFamily="34" charset="0"/>
+                          <a:ea typeface="Calibri" pitchFamily="34" charset="-122"/>
+                          <a:cs typeface="Calibri" pitchFamily="34" charset="-120"/>
+                        </a:rPr>
+                        <a:t>swisstopo SwissALTI3D</a:t>
+                      </a:r>
+                      <a:endParaRPr lang="en-US" sz="1150" dirty="0">
+                        <a:latin typeface="Calibri" charset="0"/>
+                        <a:ea typeface="Calibri" charset="0"/>
+                        <a:cs typeface="Calibri" charset="0"/>
+                      </a:endParaRPr>
+                    </a:p>
+                  </a:txBody>
+                  <a:tcPr marL="91440" marR="91440" marT="45720" marB="45720">
+                    <a:lnL w="6350" cap="flat" cmpd="sng" algn="ctr">
+                      <a:solidFill>
+                        <a:srgbClr val="E2E8F0"/>
+                      </a:solidFill>
+                      <a:prstDash val="solid"/>
+                      <a:round/>
+                      <a:headEnd type="none" w="med" len="med"/>
+                      <a:tailEnd type="none" w="med" len="med"/>
+                    </a:lnL>
+                    <a:lnR w="6350" cap="flat" cmpd="sng" algn="ctr">
+                      <a:solidFill>
+                        <a:srgbClr val="E2E8F0"/>
+                      </a:solidFill>
+                      <a:prstDash val="solid"/>
+                      <a:round/>
+                      <a:headEnd type="none" w="med" len="med"/>
+                      <a:tailEnd type="none" w="med" len="med"/>
+                    </a:lnR>
+                    <a:lnT w="6350" cap="flat" cmpd="sng" algn="ctr">
+                      <a:solidFill>
+                        <a:srgbClr val="E2E8F0"/>
+                      </a:solidFill>
+                      <a:prstDash val="solid"/>
+                      <a:round/>
+                      <a:headEnd type="none" w="med" len="med"/>
+                      <a:tailEnd type="none" w="med" len="med"/>
+                    </a:lnT>
+                    <a:lnB w="6350" cap="flat" cmpd="sng" algn="ctr">
+                      <a:solidFill>
+                        <a:srgbClr val="E2E8F0"/>
+                      </a:solidFill>
+                      <a:prstDash val="solid"/>
+                      <a:round/>
+                      <a:headEnd type="none" w="med" len="med"/>
+                      <a:tailEnd type="none" w="med" len="med"/>
+                    </a:lnB>
+                    <a:solidFill>
+                      <a:srgbClr val="FFFFFF"/>
+                    </a:solidFill>
+                  </a:tcPr>
+                </a:tc>
+                <a:tc>
+                  <a:txBody>
+                    <a:bodyPr/>
+                    <a:lstStyle/>
+                    <a:p>
+                      <a:pPr algn="l" indent="0" marL="0">
+                        <a:buNone/>
+                      </a:pPr>
+                      <a:r>
+                        <a:rPr lang="en-US" sz="1150" dirty="0">
+                          <a:solidFill>
+                            <a:srgbClr val="0F172A"/>
+                          </a:solidFill>
+                          <a:latin typeface="Calibri" pitchFamily="34" charset="0"/>
+                          <a:ea typeface="Calibri" pitchFamily="34" charset="-122"/>
+                          <a:cs typeface="Calibri" pitchFamily="34" charset="-120"/>
+                        </a:rPr>
+                        <a:t>Höhenmodell 2 m für Tobler-Erweiterung</a:t>
+                      </a:r>
+                      <a:endParaRPr lang="en-US" sz="1150" dirty="0">
+                        <a:latin typeface="Calibri" charset="0"/>
+                        <a:ea typeface="Calibri" charset="0"/>
+                        <a:cs typeface="Calibri" charset="0"/>
+                      </a:endParaRPr>
+                    </a:p>
+                  </a:txBody>
+                  <a:tcPr marL="91440" marR="91440" marT="45720" marB="45720">
+                    <a:lnL w="6350" cap="flat" cmpd="sng" algn="ctr">
+                      <a:solidFill>
+                        <a:srgbClr val="E2E8F0"/>
+                      </a:solidFill>
+                      <a:prstDash val="solid"/>
+                      <a:round/>
+                      <a:headEnd type="none" w="med" len="med"/>
+                      <a:tailEnd type="none" w="med" len="med"/>
+                    </a:lnL>
+                    <a:lnR w="6350" cap="flat" cmpd="sng" algn="ctr">
+                      <a:solidFill>
+                        <a:srgbClr val="E2E8F0"/>
+                      </a:solidFill>
+                      <a:prstDash val="solid"/>
+                      <a:round/>
+                      <a:headEnd type="none" w="med" len="med"/>
+                      <a:tailEnd type="none" w="med" len="med"/>
+                    </a:lnR>
+                    <a:lnT w="6350" cap="flat" cmpd="sng" algn="ctr">
+                      <a:solidFill>
+                        <a:srgbClr val="E2E8F0"/>
+                      </a:solidFill>
+                      <a:prstDash val="solid"/>
+                      <a:round/>
+                      <a:headEnd type="none" w="med" len="med"/>
+                      <a:tailEnd type="none" w="med" len="med"/>
+                    </a:lnT>
+                    <a:lnB w="6350" cap="flat" cmpd="sng" algn="ctr">
+                      <a:solidFill>
+                        <a:srgbClr val="E2E8F0"/>
+                      </a:solidFill>
+                      <a:prstDash val="solid"/>
+                      <a:round/>
+                      <a:headEnd type="none" w="med" len="med"/>
+                      <a:tailEnd type="none" w="med" len="med"/>
+                    </a:lnB>
+                    <a:solidFill>
+                      <a:srgbClr val="FFFFFF"/>
+                    </a:solidFill>
+                  </a:tcPr>
+                </a:tc>
+                <a:tc>
+                  <a:txBody>
+                    <a:bodyPr/>
+                    <a:lstStyle/>
+                    <a:p>
+                      <a:pPr algn="l" indent="0" marL="0">
+                        <a:buNone/>
+                      </a:pPr>
+                      <a:r>
+                        <a:rPr lang="en-US" sz="1150" dirty="0">
+                          <a:solidFill>
+                            <a:srgbClr val="0F172A"/>
+                          </a:solidFill>
+                          <a:latin typeface="Calibri" pitchFamily="34" charset="0"/>
+                          <a:ea typeface="Calibri" pitchFamily="34" charset="-122"/>
+                          <a:cs typeface="Calibri" pitchFamily="34" charset="-120"/>
+                        </a:rPr>
+                        <a:t>swisstopo OGD</a:t>
+                      </a:r>
+                      <a:endParaRPr lang="en-US" sz="1150" dirty="0">
+                        <a:latin typeface="Calibri" charset="0"/>
+                        <a:ea typeface="Calibri" charset="0"/>
+                        <a:cs typeface="Calibri" charset="0"/>
+                      </a:endParaRPr>
+                    </a:p>
+                  </a:txBody>
+                  <a:tcPr marL="91440" marR="91440" marT="45720" marB="45720">
+                    <a:lnL w="6350" cap="flat" cmpd="sng" algn="ctr">
+                      <a:solidFill>
+                        <a:srgbClr val="E2E8F0"/>
+                      </a:solidFill>
+                      <a:prstDash val="solid"/>
+                      <a:round/>
+                      <a:headEnd type="none" w="med" len="med"/>
+                      <a:tailEnd type="none" w="med" len="med"/>
+                    </a:lnL>
+                    <a:lnR w="6350" cap="flat" cmpd="sng" algn="ctr">
+                      <a:solidFill>
+                        <a:srgbClr val="E2E8F0"/>
+                      </a:solidFill>
+                      <a:prstDash val="solid"/>
+                      <a:round/>
+                      <a:headEnd type="none" w="med" len="med"/>
+                      <a:tailEnd type="none" w="med" len="med"/>
+                    </a:lnR>
+                    <a:lnT w="6350" cap="flat" cmpd="sng" algn="ctr">
+                      <a:solidFill>
+                        <a:srgbClr val="E2E8F0"/>
+                      </a:solidFill>
+                      <a:prstDash val="solid"/>
+                      <a:round/>
+                      <a:headEnd type="none" w="med" len="med"/>
+                      <a:tailEnd type="none" w="med" len="med"/>
+                    </a:lnT>
+                    <a:lnB w="6350" cap="flat" cmpd="sng" algn="ctr">
+                      <a:solidFill>
+                        <a:srgbClr val="E2E8F0"/>
+                      </a:solidFill>
+                      <a:prstDash val="solid"/>
+                      <a:round/>
+                      <a:headEnd type="none" w="med" len="med"/>
+                      <a:tailEnd type="none" w="med" len="med"/>
+                    </a:lnB>
+                    <a:solidFill>
+                      <a:srgbClr val="FFFFFF"/>
+                    </a:solidFill>
+                  </a:tcPr>
+                </a:tc>
+              </a:tr>
+              <a:tr h="384048">
+                <a:tc>
+                  <a:txBody>
+                    <a:bodyPr/>
+                    <a:lstStyle/>
+                    <a:p>
+                      <a:pPr algn="l" indent="0" marL="0">
+                        <a:buNone/>
+                      </a:pPr>
+                      <a:r>
+                        <a:rPr lang="en-US" sz="1150" dirty="0">
+                          <a:solidFill>
+                            <a:srgbClr val="0F172A"/>
+                          </a:solidFill>
+                          <a:latin typeface="Calibri" pitchFamily="34" charset="0"/>
+                          <a:ea typeface="Calibri" pitchFamily="34" charset="-122"/>
+                          <a:cs typeface="Calibri" pitchFamily="34" charset="-120"/>
+                        </a:rPr>
+                        <a:t>swisstopo TileMap</a:t>
+                      </a:r>
+                      <a:endParaRPr lang="en-US" sz="1150" dirty="0">
+                        <a:latin typeface="Calibri" charset="0"/>
+                        <a:ea typeface="Calibri" charset="0"/>
+                        <a:cs typeface="Calibri" charset="0"/>
+                      </a:endParaRPr>
+                    </a:p>
+                  </a:txBody>
+                  <a:tcPr marL="91440" marR="91440" marT="45720" marB="45720">
+                    <a:lnL w="6350" cap="flat" cmpd="sng" algn="ctr">
+                      <a:solidFill>
+                        <a:srgbClr val="E2E8F0"/>
+                      </a:solidFill>
+                      <a:prstDash val="solid"/>
+                      <a:round/>
+                      <a:headEnd type="none" w="med" len="med"/>
+                      <a:tailEnd type="none" w="med" len="med"/>
+                    </a:lnL>
+                    <a:lnR w="6350" cap="flat" cmpd="sng" algn="ctr">
+                      <a:solidFill>
+                        <a:srgbClr val="E2E8F0"/>
+                      </a:solidFill>
+                      <a:prstDash val="solid"/>
+                      <a:round/>
+                      <a:headEnd type="none" w="med" len="med"/>
+                      <a:tailEnd type="none" w="med" len="med"/>
+                    </a:lnR>
+                    <a:lnT w="6350" cap="flat" cmpd="sng" algn="ctr">
+                      <a:solidFill>
+                        <a:srgbClr val="E2E8F0"/>
+                      </a:solidFill>
+                      <a:prstDash val="solid"/>
+                      <a:round/>
+                      <a:headEnd type="none" w="med" len="med"/>
+                      <a:tailEnd type="none" w="med" len="med"/>
+                    </a:lnT>
+                    <a:lnB w="6350" cap="flat" cmpd="sng" algn="ctr">
+                      <a:solidFill>
+                        <a:srgbClr val="E2E8F0"/>
+                      </a:solidFill>
+                      <a:prstDash val="solid"/>
+                      <a:round/>
+                      <a:headEnd type="none" w="med" len="med"/>
+                      <a:tailEnd type="none" w="med" len="med"/>
+                    </a:lnB>
+                    <a:solidFill>
+                      <a:srgbClr val="FFFFFF"/>
+                    </a:solidFill>
+                  </a:tcPr>
+                </a:tc>
+                <a:tc>
+                  <a:txBody>
+                    <a:bodyPr/>
+                    <a:lstStyle/>
+                    <a:p>
+                      <a:pPr algn="l" indent="0" marL="0">
+                        <a:buNone/>
+                      </a:pPr>
+                      <a:r>
+                        <a:rPr lang="en-US" sz="1150" dirty="0">
+                          <a:solidFill>
+                            <a:srgbClr val="0F172A"/>
+                          </a:solidFill>
+                          <a:latin typeface="Calibri" pitchFamily="34" charset="0"/>
+                          <a:ea typeface="Calibri" pitchFamily="34" charset="-122"/>
+                          <a:cs typeface="Calibri" pitchFamily="34" charset="-120"/>
+                        </a:rPr>
+                        <a:t>Hintergrundkarten (Folium-Tiles)</a:t>
+                      </a:r>
+                      <a:endParaRPr lang="en-US" sz="1150" dirty="0">
+                        <a:latin typeface="Calibri" charset="0"/>
+                        <a:ea typeface="Calibri" charset="0"/>
+                        <a:cs typeface="Calibri" charset="0"/>
+                      </a:endParaRPr>
+                    </a:p>
+                  </a:txBody>
+                  <a:tcPr marL="91440" marR="91440" marT="45720" marB="45720">
+                    <a:lnL w="6350" cap="flat" cmpd="sng" algn="ctr">
+                      <a:solidFill>
+                        <a:srgbClr val="E2E8F0"/>
+                      </a:solidFill>
+                      <a:prstDash val="solid"/>
+                      <a:round/>
+                      <a:headEnd type="none" w="med" len="med"/>
+                      <a:tailEnd type="none" w="med" len="med"/>
+                    </a:lnL>
+                    <a:lnR w="6350" cap="flat" cmpd="sng" algn="ctr">
+                      <a:solidFill>
+                        <a:srgbClr val="E2E8F0"/>
+                      </a:solidFill>
+                      <a:prstDash val="solid"/>
+                      <a:round/>
+                      <a:headEnd type="none" w="med" len="med"/>
+                      <a:tailEnd type="none" w="med" len="med"/>
+                    </a:lnR>
+                    <a:lnT w="6350" cap="flat" cmpd="sng" algn="ctr">
+                      <a:solidFill>
+                        <a:srgbClr val="E2E8F0"/>
+                      </a:solidFill>
+                      <a:prstDash val="solid"/>
+                      <a:round/>
+                      <a:headEnd type="none" w="med" len="med"/>
+                      <a:tailEnd type="none" w="med" len="med"/>
+                    </a:lnT>
+                    <a:lnB w="6350" cap="flat" cmpd="sng" algn="ctr">
+                      <a:solidFill>
+                        <a:srgbClr val="E2E8F0"/>
+                      </a:solidFill>
+                      <a:prstDash val="solid"/>
+                      <a:round/>
+                      <a:headEnd type="none" w="med" len="med"/>
+                      <a:tailEnd type="none" w="med" len="med"/>
+                    </a:lnB>
+                    <a:solidFill>
+                      <a:srgbClr val="FFFFFF"/>
+                    </a:solidFill>
+                  </a:tcPr>
+                </a:tc>
+                <a:tc>
+                  <a:txBody>
+                    <a:bodyPr/>
+                    <a:lstStyle/>
+                    <a:p>
+                      <a:pPr algn="l" indent="0" marL="0">
+                        <a:buNone/>
+                      </a:pPr>
+                      <a:r>
+                        <a:rPr lang="en-US" sz="1150" dirty="0">
+                          <a:solidFill>
+                            <a:srgbClr val="0F172A"/>
+                          </a:solidFill>
+                          <a:latin typeface="Calibri" pitchFamily="34" charset="0"/>
+                          <a:ea typeface="Calibri" pitchFamily="34" charset="-122"/>
+                          <a:cs typeface="Calibri" pitchFamily="34" charset="-120"/>
+                        </a:rPr>
+                        <a:t>swisstopo Terms</a:t>
                       </a:r>
                       <a:endParaRPr lang="en-US" sz="1150" dirty="0">
                         <a:latin typeface="Calibri" charset="0"/>
@@ -17854,7 +18678,7 @@
                           <a:ea typeface="Calibri" pitchFamily="34" charset="-122"/>
                           <a:cs typeface="Calibri" pitchFamily="34" charset="-120"/>
                         </a:rPr>
-                        <a:t>Distanz-Referenz für H1-Test</a:t>
+                        <a:t>Distanz-Referenz für H1a-Test</a:t>
                       </a:r>
                       <a:endParaRPr lang="en-US" sz="1150" dirty="0">
                         <a:latin typeface="Calibri" charset="0"/>
@@ -17923,418 +18747,6 @@
                           <a:cs typeface="Calibri" pitchFamily="34" charset="-120"/>
                         </a:rPr>
                         <a:t>—</a:t>
-                      </a:r>
-                      <a:endParaRPr lang="en-US" sz="1150" dirty="0">
-                        <a:latin typeface="Calibri" charset="0"/>
-                        <a:ea typeface="Calibri" charset="0"/>
-                        <a:cs typeface="Calibri" charset="0"/>
-                      </a:endParaRPr>
-                    </a:p>
-                  </a:txBody>
-                  <a:tcPr marL="91440" marR="91440" marT="45720" marB="45720">
-                    <a:lnL w="6350" cap="flat" cmpd="sng" algn="ctr">
-                      <a:solidFill>
-                        <a:srgbClr val="E2E8F0"/>
-                      </a:solidFill>
-                      <a:prstDash val="solid"/>
-                      <a:round/>
-                      <a:headEnd type="none" w="med" len="med"/>
-                      <a:tailEnd type="none" w="med" len="med"/>
-                    </a:lnL>
-                    <a:lnR w="6350" cap="flat" cmpd="sng" algn="ctr">
-                      <a:solidFill>
-                        <a:srgbClr val="E2E8F0"/>
-                      </a:solidFill>
-                      <a:prstDash val="solid"/>
-                      <a:round/>
-                      <a:headEnd type="none" w="med" len="med"/>
-                      <a:tailEnd type="none" w="med" len="med"/>
-                    </a:lnR>
-                    <a:lnT w="6350" cap="flat" cmpd="sng" algn="ctr">
-                      <a:solidFill>
-                        <a:srgbClr val="E2E8F0"/>
-                      </a:solidFill>
-                      <a:prstDash val="solid"/>
-                      <a:round/>
-                      <a:headEnd type="none" w="med" len="med"/>
-                      <a:tailEnd type="none" w="med" len="med"/>
-                    </a:lnT>
-                    <a:lnB w="6350" cap="flat" cmpd="sng" algn="ctr">
-                      <a:solidFill>
-                        <a:srgbClr val="E2E8F0"/>
-                      </a:solidFill>
-                      <a:prstDash val="solid"/>
-                      <a:round/>
-                      <a:headEnd type="none" w="med" len="med"/>
-                      <a:tailEnd type="none" w="med" len="med"/>
-                    </a:lnB>
-                    <a:solidFill>
-                      <a:srgbClr val="FFFFFF"/>
-                    </a:solidFill>
-                  </a:tcPr>
-                </a:tc>
-              </a:tr>
-              <a:tr h="384048">
-                <a:tc>
-                  <a:txBody>
-                    <a:bodyPr/>
-                    <a:lstStyle/>
-                    <a:p>
-                      <a:pPr algn="l" indent="0" marL="0">
-                        <a:buNone/>
-                      </a:pPr>
-                      <a:r>
-                        <a:rPr lang="en-US" sz="1150" dirty="0">
-                          <a:solidFill>
-                            <a:srgbClr val="0F172A"/>
-                          </a:solidFill>
-                          <a:latin typeface="Calibri" pitchFamily="34" charset="0"/>
-                          <a:ea typeface="Calibri" pitchFamily="34" charset="-122"/>
-                          <a:cs typeface="Calibri" pitchFamily="34" charset="-120"/>
-                        </a:rPr>
-                        <a:t>Open-Elevation API</a:t>
-                      </a:r>
-                      <a:endParaRPr lang="en-US" sz="1150" dirty="0">
-                        <a:latin typeface="Calibri" charset="0"/>
-                        <a:ea typeface="Calibri" charset="0"/>
-                        <a:cs typeface="Calibri" charset="0"/>
-                      </a:endParaRPr>
-                    </a:p>
-                  </a:txBody>
-                  <a:tcPr marL="91440" marR="91440" marT="45720" marB="45720">
-                    <a:lnL w="6350" cap="flat" cmpd="sng" algn="ctr">
-                      <a:solidFill>
-                        <a:srgbClr val="E2E8F0"/>
-                      </a:solidFill>
-                      <a:prstDash val="solid"/>
-                      <a:round/>
-                      <a:headEnd type="none" w="med" len="med"/>
-                      <a:tailEnd type="none" w="med" len="med"/>
-                    </a:lnL>
-                    <a:lnR w="6350" cap="flat" cmpd="sng" algn="ctr">
-                      <a:solidFill>
-                        <a:srgbClr val="E2E8F0"/>
-                      </a:solidFill>
-                      <a:prstDash val="solid"/>
-                      <a:round/>
-                      <a:headEnd type="none" w="med" len="med"/>
-                      <a:tailEnd type="none" w="med" len="med"/>
-                    </a:lnR>
-                    <a:lnT w="6350" cap="flat" cmpd="sng" algn="ctr">
-                      <a:solidFill>
-                        <a:srgbClr val="E2E8F0"/>
-                      </a:solidFill>
-                      <a:prstDash val="solid"/>
-                      <a:round/>
-                      <a:headEnd type="none" w="med" len="med"/>
-                      <a:tailEnd type="none" w="med" len="med"/>
-                    </a:lnT>
-                    <a:lnB w="6350" cap="flat" cmpd="sng" algn="ctr">
-                      <a:solidFill>
-                        <a:srgbClr val="E2E8F0"/>
-                      </a:solidFill>
-                      <a:prstDash val="solid"/>
-                      <a:round/>
-                      <a:headEnd type="none" w="med" len="med"/>
-                      <a:tailEnd type="none" w="med" len="med"/>
-                    </a:lnB>
-                    <a:solidFill>
-                      <a:srgbClr val="FFFFFF"/>
-                    </a:solidFill>
-                  </a:tcPr>
-                </a:tc>
-                <a:tc>
-                  <a:txBody>
-                    <a:bodyPr/>
-                    <a:lstStyle/>
-                    <a:p>
-                      <a:pPr algn="l" indent="0" marL="0">
-                        <a:buNone/>
-                      </a:pPr>
-                      <a:r>
-                        <a:rPr lang="en-US" sz="1150" dirty="0">
-                          <a:solidFill>
-                            <a:srgbClr val="0F172A"/>
-                          </a:solidFill>
-                          <a:latin typeface="Calibri" pitchFamily="34" charset="0"/>
-                          <a:ea typeface="Calibri" pitchFamily="34" charset="-122"/>
-                          <a:cs typeface="Calibri" pitchFamily="34" charset="-120"/>
-                        </a:rPr>
-                        <a:t>Höhe für Robustness Check (Confounder)</a:t>
-                      </a:r>
-                      <a:endParaRPr lang="en-US" sz="1150" dirty="0">
-                        <a:latin typeface="Calibri" charset="0"/>
-                        <a:ea typeface="Calibri" charset="0"/>
-                        <a:cs typeface="Calibri" charset="0"/>
-                      </a:endParaRPr>
-                    </a:p>
-                  </a:txBody>
-                  <a:tcPr marL="91440" marR="91440" marT="45720" marB="45720">
-                    <a:lnL w="6350" cap="flat" cmpd="sng" algn="ctr">
-                      <a:solidFill>
-                        <a:srgbClr val="E2E8F0"/>
-                      </a:solidFill>
-                      <a:prstDash val="solid"/>
-                      <a:round/>
-                      <a:headEnd type="none" w="med" len="med"/>
-                      <a:tailEnd type="none" w="med" len="med"/>
-                    </a:lnL>
-                    <a:lnR w="6350" cap="flat" cmpd="sng" algn="ctr">
-                      <a:solidFill>
-                        <a:srgbClr val="E2E8F0"/>
-                      </a:solidFill>
-                      <a:prstDash val="solid"/>
-                      <a:round/>
-                      <a:headEnd type="none" w="med" len="med"/>
-                      <a:tailEnd type="none" w="med" len="med"/>
-                    </a:lnR>
-                    <a:lnT w="6350" cap="flat" cmpd="sng" algn="ctr">
-                      <a:solidFill>
-                        <a:srgbClr val="E2E8F0"/>
-                      </a:solidFill>
-                      <a:prstDash val="solid"/>
-                      <a:round/>
-                      <a:headEnd type="none" w="med" len="med"/>
-                      <a:tailEnd type="none" w="med" len="med"/>
-                    </a:lnT>
-                    <a:lnB w="6350" cap="flat" cmpd="sng" algn="ctr">
-                      <a:solidFill>
-                        <a:srgbClr val="E2E8F0"/>
-                      </a:solidFill>
-                      <a:prstDash val="solid"/>
-                      <a:round/>
-                      <a:headEnd type="none" w="med" len="med"/>
-                      <a:tailEnd type="none" w="med" len="med"/>
-                    </a:lnB>
-                    <a:solidFill>
-                      <a:srgbClr val="FFFFFF"/>
-                    </a:solidFill>
-                  </a:tcPr>
-                </a:tc>
-                <a:tc>
-                  <a:txBody>
-                    <a:bodyPr/>
-                    <a:lstStyle/>
-                    <a:p>
-                      <a:pPr algn="l" indent="0" marL="0">
-                        <a:buNone/>
-                      </a:pPr>
-                      <a:r>
-                        <a:rPr lang="en-US" sz="1150" dirty="0">
-                          <a:solidFill>
-                            <a:srgbClr val="0F172A"/>
-                          </a:solidFill>
-                          <a:latin typeface="Calibri" pitchFamily="34" charset="0"/>
-                          <a:ea typeface="Calibri" pitchFamily="34" charset="-122"/>
-                          <a:cs typeface="Calibri" pitchFamily="34" charset="-120"/>
-                        </a:rPr>
-                        <a:t>CC0</a:t>
-                      </a:r>
-                      <a:endParaRPr lang="en-US" sz="1150" dirty="0">
-                        <a:latin typeface="Calibri" charset="0"/>
-                        <a:ea typeface="Calibri" charset="0"/>
-                        <a:cs typeface="Calibri" charset="0"/>
-                      </a:endParaRPr>
-                    </a:p>
-                  </a:txBody>
-                  <a:tcPr marL="91440" marR="91440" marT="45720" marB="45720">
-                    <a:lnL w="6350" cap="flat" cmpd="sng" algn="ctr">
-                      <a:solidFill>
-                        <a:srgbClr val="E2E8F0"/>
-                      </a:solidFill>
-                      <a:prstDash val="solid"/>
-                      <a:round/>
-                      <a:headEnd type="none" w="med" len="med"/>
-                      <a:tailEnd type="none" w="med" len="med"/>
-                    </a:lnL>
-                    <a:lnR w="6350" cap="flat" cmpd="sng" algn="ctr">
-                      <a:solidFill>
-                        <a:srgbClr val="E2E8F0"/>
-                      </a:solidFill>
-                      <a:prstDash val="solid"/>
-                      <a:round/>
-                      <a:headEnd type="none" w="med" len="med"/>
-                      <a:tailEnd type="none" w="med" len="med"/>
-                    </a:lnR>
-                    <a:lnT w="6350" cap="flat" cmpd="sng" algn="ctr">
-                      <a:solidFill>
-                        <a:srgbClr val="E2E8F0"/>
-                      </a:solidFill>
-                      <a:prstDash val="solid"/>
-                      <a:round/>
-                      <a:headEnd type="none" w="med" len="med"/>
-                      <a:tailEnd type="none" w="med" len="med"/>
-                    </a:lnT>
-                    <a:lnB w="6350" cap="flat" cmpd="sng" algn="ctr">
-                      <a:solidFill>
-                        <a:srgbClr val="E2E8F0"/>
-                      </a:solidFill>
-                      <a:prstDash val="solid"/>
-                      <a:round/>
-                      <a:headEnd type="none" w="med" len="med"/>
-                      <a:tailEnd type="none" w="med" len="med"/>
-                    </a:lnB>
-                    <a:solidFill>
-                      <a:srgbClr val="FFFFFF"/>
-                    </a:solidFill>
-                  </a:tcPr>
-                </a:tc>
-              </a:tr>
-              <a:tr h="384048">
-                <a:tc>
-                  <a:txBody>
-                    <a:bodyPr/>
-                    <a:lstStyle/>
-                    <a:p>
-                      <a:pPr algn="l" indent="0" marL="0">
-                        <a:buNone/>
-                      </a:pPr>
-                      <a:r>
-                        <a:rPr lang="en-US" sz="1150" dirty="0">
-                          <a:solidFill>
-                            <a:srgbClr val="0F172A"/>
-                          </a:solidFill>
-                          <a:latin typeface="Calibri" pitchFamily="34" charset="0"/>
-                          <a:ea typeface="Calibri" pitchFamily="34" charset="-122"/>
-                          <a:cs typeface="Calibri" pitchFamily="34" charset="-120"/>
-                        </a:rPr>
-                        <a:t>swisstopo / GeoAdmin</a:t>
-                      </a:r>
-                      <a:endParaRPr lang="en-US" sz="1150" dirty="0">
-                        <a:latin typeface="Calibri" charset="0"/>
-                        <a:ea typeface="Calibri" charset="0"/>
-                        <a:cs typeface="Calibri" charset="0"/>
-                      </a:endParaRPr>
-                    </a:p>
-                  </a:txBody>
-                  <a:tcPr marL="91440" marR="91440" marT="45720" marB="45720">
-                    <a:lnL w="6350" cap="flat" cmpd="sng" algn="ctr">
-                      <a:solidFill>
-                        <a:srgbClr val="E2E8F0"/>
-                      </a:solidFill>
-                      <a:prstDash val="solid"/>
-                      <a:round/>
-                      <a:headEnd type="none" w="med" len="med"/>
-                      <a:tailEnd type="none" w="med" len="med"/>
-                    </a:lnL>
-                    <a:lnR w="6350" cap="flat" cmpd="sng" algn="ctr">
-                      <a:solidFill>
-                        <a:srgbClr val="E2E8F0"/>
-                      </a:solidFill>
-                      <a:prstDash val="solid"/>
-                      <a:round/>
-                      <a:headEnd type="none" w="med" len="med"/>
-                      <a:tailEnd type="none" w="med" len="med"/>
-                    </a:lnR>
-                    <a:lnT w="6350" cap="flat" cmpd="sng" algn="ctr">
-                      <a:solidFill>
-                        <a:srgbClr val="E2E8F0"/>
-                      </a:solidFill>
-                      <a:prstDash val="solid"/>
-                      <a:round/>
-                      <a:headEnd type="none" w="med" len="med"/>
-                      <a:tailEnd type="none" w="med" len="med"/>
-                    </a:lnT>
-                    <a:lnB w="6350" cap="flat" cmpd="sng" algn="ctr">
-                      <a:solidFill>
-                        <a:srgbClr val="E2E8F0"/>
-                      </a:solidFill>
-                      <a:prstDash val="solid"/>
-                      <a:round/>
-                      <a:headEnd type="none" w="med" len="med"/>
-                      <a:tailEnd type="none" w="med" len="med"/>
-                    </a:lnB>
-                    <a:solidFill>
-                      <a:srgbClr val="FFFFFF"/>
-                    </a:solidFill>
-                  </a:tcPr>
-                </a:tc>
-                <a:tc>
-                  <a:txBody>
-                    <a:bodyPr/>
-                    <a:lstStyle/>
-                    <a:p>
-                      <a:pPr algn="l" indent="0" marL="0">
-                        <a:buNone/>
-                      </a:pPr>
-                      <a:r>
-                        <a:rPr lang="en-US" sz="1150" dirty="0">
-                          <a:solidFill>
-                            <a:srgbClr val="0F172A"/>
-                          </a:solidFill>
-                          <a:latin typeface="Calibri" pitchFamily="34" charset="0"/>
-                          <a:ea typeface="Calibri" pitchFamily="34" charset="-122"/>
-                          <a:cs typeface="Calibri" pitchFamily="34" charset="-120"/>
-                        </a:rPr>
-                        <a:t>Hintergrundkarten (Folium-Tiles)</a:t>
-                      </a:r>
-                      <a:endParaRPr lang="en-US" sz="1150" dirty="0">
-                        <a:latin typeface="Calibri" charset="0"/>
-                        <a:ea typeface="Calibri" charset="0"/>
-                        <a:cs typeface="Calibri" charset="0"/>
-                      </a:endParaRPr>
-                    </a:p>
-                  </a:txBody>
-                  <a:tcPr marL="91440" marR="91440" marT="45720" marB="45720">
-                    <a:lnL w="6350" cap="flat" cmpd="sng" algn="ctr">
-                      <a:solidFill>
-                        <a:srgbClr val="E2E8F0"/>
-                      </a:solidFill>
-                      <a:prstDash val="solid"/>
-                      <a:round/>
-                      <a:headEnd type="none" w="med" len="med"/>
-                      <a:tailEnd type="none" w="med" len="med"/>
-                    </a:lnL>
-                    <a:lnR w="6350" cap="flat" cmpd="sng" algn="ctr">
-                      <a:solidFill>
-                        <a:srgbClr val="E2E8F0"/>
-                      </a:solidFill>
-                      <a:prstDash val="solid"/>
-                      <a:round/>
-                      <a:headEnd type="none" w="med" len="med"/>
-                      <a:tailEnd type="none" w="med" len="med"/>
-                    </a:lnR>
-                    <a:lnT w="6350" cap="flat" cmpd="sng" algn="ctr">
-                      <a:solidFill>
-                        <a:srgbClr val="E2E8F0"/>
-                      </a:solidFill>
-                      <a:prstDash val="solid"/>
-                      <a:round/>
-                      <a:headEnd type="none" w="med" len="med"/>
-                      <a:tailEnd type="none" w="med" len="med"/>
-                    </a:lnT>
-                    <a:lnB w="6350" cap="flat" cmpd="sng" algn="ctr">
-                      <a:solidFill>
-                        <a:srgbClr val="E2E8F0"/>
-                      </a:solidFill>
-                      <a:prstDash val="solid"/>
-                      <a:round/>
-                      <a:headEnd type="none" w="med" len="med"/>
-                      <a:tailEnd type="none" w="med" len="med"/>
-                    </a:lnB>
-                    <a:solidFill>
-                      <a:srgbClr val="FFFFFF"/>
-                    </a:solidFill>
-                  </a:tcPr>
-                </a:tc>
-                <a:tc>
-                  <a:txBody>
-                    <a:bodyPr/>
-                    <a:lstStyle/>
-                    <a:p>
-                      <a:pPr algn="l" indent="0" marL="0">
-                        <a:buNone/>
-                      </a:pPr>
-                      <a:r>
-                        <a:rPr lang="en-US" sz="1150" dirty="0">
-                          <a:solidFill>
-                            <a:srgbClr val="0F172A"/>
-                          </a:solidFill>
-                          <a:latin typeface="Calibri" pitchFamily="34" charset="0"/>
-                          <a:ea typeface="Calibri" pitchFamily="34" charset="-122"/>
-                          <a:cs typeface="Calibri" pitchFamily="34" charset="-120"/>
-                        </a:rPr>
-                        <a:t>swisstopo Terms</a:t>
                       </a:r>
                       <a:endParaRPr lang="en-US" sz="1150" dirty="0">
                         <a:latin typeface="Calibri" charset="0"/>

--- a/reports/zh15min_slides.pptx
+++ b/reports/zh15min_slides.pptx
@@ -6053,7 +6053,7 @@
                 <a:ea typeface="Trebuchet MS" pitchFamily="34" charset="-122"/>
                 <a:cs typeface="Trebuchet MS" pitchFamily="34" charset="-120"/>
               </a:rPr>
-              <a:t>Hypothesen-Test</a:t>
+              <a:t>Hypothesen-Test — H1, H1a, H2</a:t>
             </a:r>
             <a:endParaRPr lang="en-US" sz="3000" dirty="0"/>
           </a:p>
@@ -6067,8 +6067,8 @@
         </p:nvSpPr>
         <p:spPr>
           <a:xfrm>
-            <a:off x="457200" y="1508760"/>
-            <a:ext cx="4114800" cy="3108960"/>
+            <a:off x="365760" y="1417320"/>
+            <a:ext cx="2743200" cy="3246120"/>
           </a:xfrm>
           <a:prstGeom prst="rect">
             <a:avLst/>
@@ -6099,8 +6099,8 @@
         </p:nvSpPr>
         <p:spPr>
           <a:xfrm>
-            <a:off x="457200" y="1508760"/>
-            <a:ext cx="4114800" cy="54864"/>
+            <a:off x="365760" y="1417320"/>
+            <a:ext cx="2743200" cy="54864"/>
           </a:xfrm>
           <a:prstGeom prst="rect">
             <a:avLst/>
@@ -6124,24 +6124,24 @@
         </p:nvSpPr>
         <p:spPr>
           <a:xfrm>
-            <a:off x="640080" y="1691640"/>
-            <a:ext cx="3749040" cy="365760"/>
-          </a:xfrm>
-          <a:prstGeom prst="rect">
-            <a:avLst/>
-          </a:prstGeom>
-          <a:noFill/>
-          <a:ln/>
-        </p:spPr>
-        <p:txBody>
-          <a:bodyPr wrap="square" lIns="0" tIns="0" rIns="0" bIns="0" rtlCol="0" anchor="ctr"/>
-          <a:lstStyle/>
-          <a:p>
-            <a:pPr indent="0" marL="0">
-              <a:buNone/>
-            </a:pPr>
-            <a:r>
-              <a:rPr lang="en-US" sz="1600" b="1" dirty="0">
+            <a:off x="502920" y="1572768"/>
+            <a:ext cx="2468880" cy="320040"/>
+          </a:xfrm>
+          <a:prstGeom prst="rect">
+            <a:avLst/>
+          </a:prstGeom>
+          <a:noFill/>
+          <a:ln/>
+        </p:spPr>
+        <p:txBody>
+          <a:bodyPr wrap="square" lIns="0" tIns="0" rIns="0" bIns="0" rtlCol="0" anchor="ctr"/>
+          <a:lstStyle/>
+          <a:p>
+            <a:pPr indent="0" marL="0">
+              <a:buNone/>
+            </a:pPr>
+            <a:r>
+              <a:rPr lang="en-US" sz="1200" b="1" dirty="0">
                 <a:solidFill>
                   <a:srgbClr val="065A82"/>
                 </a:solidFill>
@@ -6149,9 +6149,9 @@
                 <a:ea typeface="Trebuchet MS" pitchFamily="34" charset="-122"/>
                 <a:cs typeface="Trebuchet MS" pitchFamily="34" charset="-120"/>
               </a:rPr>
-              <a:t>H1 — Score ↔ Zentralität</a:t>
-            </a:r>
-            <a:endParaRPr lang="en-US" sz="1600" dirty="0"/>
+              <a:t>H1 — Score ↔ Mietpreis</a:t>
+            </a:r>
+            <a:endParaRPr lang="en-US" sz="1200" dirty="0"/>
           </a:p>
         </p:txBody>
       </p:sp>
@@ -6163,8 +6163,8 @@
         </p:nvSpPr>
         <p:spPr>
           <a:xfrm>
-            <a:off x="457200" y="2240280"/>
-            <a:ext cx="4114800" cy="594360"/>
+            <a:off x="365760" y="1993392"/>
+            <a:ext cx="2743200" cy="534924"/>
           </a:xfrm>
           <a:prstGeom prst="rect">
             <a:avLst/>
@@ -6188,7 +6188,7 @@
                 <a:ea typeface="Trebuchet MS" pitchFamily="34" charset="-122"/>
                 <a:cs typeface="Trebuchet MS" pitchFamily="34" charset="-120"/>
               </a:rPr>
-              <a:t>ρ = −0.81</a:t>
+              <a:t>ρ = +0.56</a:t>
             </a:r>
             <a:endParaRPr lang="en-US" sz="4400" dirty="0"/>
           </a:p>
@@ -6202,8 +6202,8 @@
         </p:nvSpPr>
         <p:spPr>
           <a:xfrm>
-            <a:off x="457200" y="2834640"/>
-            <a:ext cx="4114800" cy="320040"/>
+            <a:off x="365760" y="2528316"/>
+            <a:ext cx="2743200" cy="288036"/>
           </a:xfrm>
           <a:prstGeom prst="rect">
             <a:avLst/>
@@ -6227,7 +6227,7 @@
                 <a:ea typeface="Calibri" pitchFamily="34" charset="-122"/>
                 <a:cs typeface="Calibri" pitchFamily="34" charset="-120"/>
               </a:rPr>
-              <a:t>Spearman, n = 34, p &lt; 10⁻⁸</a:t>
+              <a:t>Spearman, n=34, p&lt;10⁻³</a:t>
             </a:r>
             <a:endParaRPr lang="en-US" sz="1100" dirty="0"/>
           </a:p>
@@ -6241,24 +6241,24 @@
         </p:nvSpPr>
         <p:spPr>
           <a:xfrm>
-            <a:off x="640080" y="3291840"/>
-            <a:ext cx="3749040" cy="1188720"/>
-          </a:xfrm>
-          <a:prstGeom prst="rect">
-            <a:avLst/>
-          </a:prstGeom>
-          <a:noFill/>
-          <a:ln/>
-        </p:spPr>
-        <p:txBody>
-          <a:bodyPr wrap="square" lIns="0" tIns="0" rIns="0" bIns="0" rtlCol="0" anchor="ctr"/>
-          <a:lstStyle/>
-          <a:p>
-            <a:pPr indent="0" marL="0">
-              <a:buNone/>
-            </a:pPr>
-            <a:r>
-              <a:rPr lang="en-US" sz="1100" dirty="0">
+            <a:off x="502920" y="2907792"/>
+            <a:ext cx="2468880" cy="1691640"/>
+          </a:xfrm>
+          <a:prstGeom prst="rect">
+            <a:avLst/>
+          </a:prstGeom>
+          <a:noFill/>
+          <a:ln/>
+        </p:spPr>
+        <p:txBody>
+          <a:bodyPr wrap="square" lIns="0" tIns="0" rIns="0" bIns="0" rtlCol="0" anchor="ctr"/>
+          <a:lstStyle/>
+          <a:p>
+            <a:pPr indent="0" marL="0">
+              <a:buNone/>
+            </a:pPr>
+            <a:r>
+              <a:rPr lang="en-US" sz="950" dirty="0">
                 <a:solidFill>
                   <a:srgbClr val="0F172A"/>
                 </a:solidFill>
@@ -6266,9 +6266,9 @@
                 <a:ea typeface="Calibri" pitchFamily="34" charset="-122"/>
                 <a:cs typeface="Calibri" pitchFamily="34" charset="-120"/>
               </a:rPr>
-              <a:t>Stützt H1 hochsignifikant: je weiter vom HB, desto niedriger der Score. Pearson r = −0.84 mit p &lt; 10⁻⁹. Zusatz-Test mit Stadt-Zürich-Mietpreisen 2024 ist jetzt ebenfalls signifikant (ρ = +0.56, p &lt; 0.001) — Konvergenz beider Validierungen.</a:t>
-            </a:r>
-            <a:endParaRPr lang="en-US" sz="1100" dirty="0"/>
+              <a:t>Stützt H1: höherer Score ↔ höherer Median-Mietpreis (Pearson r = +0.56, p ≈ 5·10⁻⁴). Lindenhof, Rathaus mit hohen Score- UND hohen Miet-Werten; Leimbach, Witikon mit beiden tief.</a:t>
+            </a:r>
+            <a:endParaRPr lang="en-US" sz="950" dirty="0"/>
           </a:p>
         </p:txBody>
       </p:sp>
@@ -6280,8 +6280,8 @@
         </p:nvSpPr>
         <p:spPr>
           <a:xfrm>
-            <a:off x="4617720" y="1508760"/>
-            <a:ext cx="4114800" cy="3108960"/>
+            <a:off x="3200400" y="1417320"/>
+            <a:ext cx="2743200" cy="3246120"/>
           </a:xfrm>
           <a:prstGeom prst="rect">
             <a:avLst/>
@@ -6312,8 +6312,221 @@
         </p:nvSpPr>
         <p:spPr>
           <a:xfrm>
-            <a:off x="4617720" y="1508760"/>
-            <a:ext cx="4114800" cy="54864"/>
+            <a:off x="3200400" y="1417320"/>
+            <a:ext cx="2743200" cy="54864"/>
+          </a:xfrm>
+          <a:prstGeom prst="rect">
+            <a:avLst/>
+          </a:prstGeom>
+          <a:solidFill>
+            <a:srgbClr val="1C7293"/>
+          </a:solidFill>
+          <a:ln w="12700">
+            <a:solidFill>
+              <a:srgbClr val="1C7293"/>
+            </a:solidFill>
+            <a:prstDash val="solid"/>
+          </a:ln>
+        </p:spPr>
+      </p:sp>
+      <p:sp>
+        <p:nvSpPr>
+          <p:cNvPr id="12" name="Text 10"/>
+          <p:cNvSpPr/>
+          <p:nvPr/>
+        </p:nvSpPr>
+        <p:spPr>
+          <a:xfrm>
+            <a:off x="3337560" y="1572768"/>
+            <a:ext cx="2468880" cy="320040"/>
+          </a:xfrm>
+          <a:prstGeom prst="rect">
+            <a:avLst/>
+          </a:prstGeom>
+          <a:noFill/>
+          <a:ln/>
+        </p:spPr>
+        <p:txBody>
+          <a:bodyPr wrap="square" lIns="0" tIns="0" rIns="0" bIns="0" rtlCol="0" anchor="ctr"/>
+          <a:lstStyle/>
+          <a:p>
+            <a:pPr indent="0" marL="0">
+              <a:buNone/>
+            </a:pPr>
+            <a:r>
+              <a:rPr lang="en-US" sz="1200" b="1" dirty="0">
+                <a:solidFill>
+                  <a:srgbClr val="1C7293"/>
+                </a:solidFill>
+                <a:latin typeface="Trebuchet MS" pitchFamily="34" charset="0"/>
+                <a:ea typeface="Trebuchet MS" pitchFamily="34" charset="-122"/>
+                <a:cs typeface="Trebuchet MS" pitchFamily="34" charset="-120"/>
+              </a:rPr>
+              <a:t>H1a — Score ↔ HB-Distanz</a:t>
+            </a:r>
+            <a:endParaRPr lang="en-US" sz="1200" dirty="0"/>
+          </a:p>
+        </p:txBody>
+      </p:sp>
+      <p:sp>
+        <p:nvSpPr>
+          <p:cNvPr id="13" name="Text 11"/>
+          <p:cNvSpPr/>
+          <p:nvPr/>
+        </p:nvSpPr>
+        <p:spPr>
+          <a:xfrm>
+            <a:off x="3200400" y="1993392"/>
+            <a:ext cx="2743200" cy="534924"/>
+          </a:xfrm>
+          <a:prstGeom prst="rect">
+            <a:avLst/>
+          </a:prstGeom>
+          <a:noFill/>
+          <a:ln/>
+        </p:spPr>
+        <p:txBody>
+          <a:bodyPr wrap="square" lIns="0" tIns="0" rIns="0" bIns="0" rtlCol="0" anchor="b"/>
+          <a:lstStyle/>
+          <a:p>
+            <a:pPr algn="ctr" indent="0" marL="0">
+              <a:buNone/>
+            </a:pPr>
+            <a:r>
+              <a:rPr lang="en-US" sz="4400" b="1" dirty="0">
+                <a:solidFill>
+                  <a:srgbClr val="1C7293"/>
+                </a:solidFill>
+                <a:latin typeface="Trebuchet MS" pitchFamily="34" charset="0"/>
+                <a:ea typeface="Trebuchet MS" pitchFamily="34" charset="-122"/>
+                <a:cs typeface="Trebuchet MS" pitchFamily="34" charset="-120"/>
+              </a:rPr>
+              <a:t>ρ = −0.81</a:t>
+            </a:r>
+            <a:endParaRPr lang="en-US" sz="4400" dirty="0"/>
+          </a:p>
+        </p:txBody>
+      </p:sp>
+      <p:sp>
+        <p:nvSpPr>
+          <p:cNvPr id="14" name="Text 12"/>
+          <p:cNvSpPr/>
+          <p:nvPr/>
+        </p:nvSpPr>
+        <p:spPr>
+          <a:xfrm>
+            <a:off x="3200400" y="2528316"/>
+            <a:ext cx="2743200" cy="288036"/>
+          </a:xfrm>
+          <a:prstGeom prst="rect">
+            <a:avLst/>
+          </a:prstGeom>
+          <a:noFill/>
+          <a:ln/>
+        </p:spPr>
+        <p:txBody>
+          <a:bodyPr wrap="square" lIns="0" tIns="0" rIns="0" bIns="0" rtlCol="0" anchor="t"/>
+          <a:lstStyle/>
+          <a:p>
+            <a:pPr algn="ctr" indent="0" marL="0">
+              <a:buNone/>
+            </a:pPr>
+            <a:r>
+              <a:rPr lang="en-US" sz="1100" dirty="0">
+                <a:solidFill>
+                  <a:srgbClr val="64748B"/>
+                </a:solidFill>
+                <a:latin typeface="Calibri" pitchFamily="34" charset="0"/>
+                <a:ea typeface="Calibri" pitchFamily="34" charset="-122"/>
+                <a:cs typeface="Calibri" pitchFamily="34" charset="-120"/>
+              </a:rPr>
+              <a:t>Spearman, n=34, p&lt;10⁻⁸</a:t>
+            </a:r>
+            <a:endParaRPr lang="en-US" sz="1100" dirty="0"/>
+          </a:p>
+        </p:txBody>
+      </p:sp>
+      <p:sp>
+        <p:nvSpPr>
+          <p:cNvPr id="15" name="Text 13"/>
+          <p:cNvSpPr/>
+          <p:nvPr/>
+        </p:nvSpPr>
+        <p:spPr>
+          <a:xfrm>
+            <a:off x="3337560" y="2907792"/>
+            <a:ext cx="2468880" cy="1691640"/>
+          </a:xfrm>
+          <a:prstGeom prst="rect">
+            <a:avLst/>
+          </a:prstGeom>
+          <a:noFill/>
+          <a:ln/>
+        </p:spPr>
+        <p:txBody>
+          <a:bodyPr wrap="square" lIns="0" tIns="0" rIns="0" bIns="0" rtlCol="0" anchor="ctr"/>
+          <a:lstStyle/>
+          <a:p>
+            <a:pPr indent="0" marL="0">
+              <a:buNone/>
+            </a:pPr>
+            <a:r>
+              <a:rPr lang="en-US" sz="950" dirty="0">
+                <a:solidFill>
+                  <a:srgbClr val="0F172A"/>
+                </a:solidFill>
+                <a:latin typeface="Calibri" pitchFamily="34" charset="0"/>
+                <a:ea typeface="Calibri" pitchFamily="34" charset="-122"/>
+                <a:cs typeface="Calibri" pitchFamily="34" charset="-120"/>
+              </a:rPr>
+              <a:t>Stützt H1a hochsignifikant: je weiter vom HB, desto niedriger der Score. Pearson r = −0.84, p &lt; 10⁻⁹. Konvergenz beider H1-Tests bestätigt das Zentralitäts-Muster ohne Markt-Confounder.</a:t>
+            </a:r>
+            <a:endParaRPr lang="en-US" sz="950" dirty="0"/>
+          </a:p>
+        </p:txBody>
+      </p:sp>
+      <p:sp>
+        <p:nvSpPr>
+          <p:cNvPr id="16" name="Shape 14"/>
+          <p:cNvSpPr/>
+          <p:nvPr/>
+        </p:nvSpPr>
+        <p:spPr>
+          <a:xfrm>
+            <a:off x="6035040" y="1417320"/>
+            <a:ext cx="2743200" cy="3246120"/>
+          </a:xfrm>
+          <a:prstGeom prst="rect">
+            <a:avLst/>
+          </a:prstGeom>
+          <a:solidFill>
+            <a:srgbClr val="FFFFFF"/>
+          </a:solidFill>
+          <a:ln w="9525">
+            <a:solidFill>
+              <a:srgbClr val="E2E8F0"/>
+            </a:solidFill>
+            <a:prstDash val="solid"/>
+          </a:ln>
+          <a:effectLst>
+            <a:outerShdw sx="100000" sy="100000" kx="0" ky="0" algn="bl" rotWithShape="0" blurRad="101600" dist="12700" dir="5400000">
+              <a:srgbClr val="94A3B8">
+                <a:alpha val="12000"/>
+              </a:srgbClr>
+            </a:outerShdw>
+          </a:effectLst>
+        </p:spPr>
+      </p:sp>
+      <p:sp>
+        <p:nvSpPr>
+          <p:cNvPr id="17" name="Shape 15"/>
+          <p:cNvSpPr/>
+          <p:nvPr/>
+        </p:nvSpPr>
+        <p:spPr>
+          <a:xfrm>
+            <a:off x="6035040" y="1417320"/>
+            <a:ext cx="2743200" cy="54864"/>
           </a:xfrm>
           <a:prstGeom prst="rect">
             <a:avLst/>
@@ -6331,30 +6544,30 @@
       </p:sp>
       <p:sp>
         <p:nvSpPr>
-          <p:cNvPr id="12" name="Text 10"/>
-          <p:cNvSpPr/>
-          <p:nvPr/>
-        </p:nvSpPr>
-        <p:spPr>
-          <a:xfrm>
-            <a:off x="4800600" y="1691640"/>
-            <a:ext cx="3749040" cy="365760"/>
-          </a:xfrm>
-          <a:prstGeom prst="rect">
-            <a:avLst/>
-          </a:prstGeom>
-          <a:noFill/>
-          <a:ln/>
-        </p:spPr>
-        <p:txBody>
-          <a:bodyPr wrap="square" lIns="0" tIns="0" rIns="0" bIns="0" rtlCol="0" anchor="ctr"/>
-          <a:lstStyle/>
-          <a:p>
-            <a:pPr indent="0" marL="0">
-              <a:buNone/>
-            </a:pPr>
-            <a:r>
-              <a:rPr lang="en-US" sz="1600" b="1" dirty="0">
+          <p:cNvPr id="18" name="Text 16"/>
+          <p:cNvSpPr/>
+          <p:nvPr/>
+        </p:nvSpPr>
+        <p:spPr>
+          <a:xfrm>
+            <a:off x="6172200" y="1572768"/>
+            <a:ext cx="2468880" cy="320040"/>
+          </a:xfrm>
+          <a:prstGeom prst="rect">
+            <a:avLst/>
+          </a:prstGeom>
+          <a:noFill/>
+          <a:ln/>
+        </p:spPr>
+        <p:txBody>
+          <a:bodyPr wrap="square" lIns="0" tIns="0" rIns="0" bIns="0" rtlCol="0" anchor="ctr"/>
+          <a:lstStyle/>
+          <a:p>
+            <a:pPr indent="0" marL="0">
+              <a:buNone/>
+            </a:pPr>
+            <a:r>
+              <a:rPr lang="en-US" sz="1200" b="1" dirty="0">
                 <a:solidFill>
                   <a:srgbClr val="1A9850"/>
                 </a:solidFill>
@@ -6364,20 +6577,20 @@
               </a:rPr>
               <a:t>H2 — Wüsteneffekt widerlegt</a:t>
             </a:r>
-            <a:endParaRPr lang="en-US" sz="1600" dirty="0"/>
-          </a:p>
-        </p:txBody>
-      </p:sp>
-      <p:sp>
-        <p:nvSpPr>
-          <p:cNvPr id="13" name="Text 11"/>
-          <p:cNvSpPr/>
-          <p:nvPr/>
-        </p:nvSpPr>
-        <p:spPr>
-          <a:xfrm>
-            <a:off x="4617720" y="2240280"/>
-            <a:ext cx="4114800" cy="594360"/>
+            <a:endParaRPr lang="en-US" sz="1200" dirty="0"/>
+          </a:p>
+        </p:txBody>
+      </p:sp>
+      <p:sp>
+        <p:nvSpPr>
+          <p:cNvPr id="19" name="Text 17"/>
+          <p:cNvSpPr/>
+          <p:nvPr/>
+        </p:nvSpPr>
+        <p:spPr>
+          <a:xfrm>
+            <a:off x="6035040" y="1993392"/>
+            <a:ext cx="2743200" cy="534924"/>
           </a:xfrm>
           <a:prstGeom prst="rect">
             <a:avLst/>
@@ -6409,14 +6622,14 @@
       </p:sp>
       <p:sp>
         <p:nvSpPr>
-          <p:cNvPr id="14" name="Text 12"/>
-          <p:cNvSpPr/>
-          <p:nvPr/>
-        </p:nvSpPr>
-        <p:spPr>
-          <a:xfrm>
-            <a:off x="4617720" y="2834640"/>
-            <a:ext cx="4114800" cy="320040"/>
+          <p:cNvPr id="20" name="Text 18"/>
+          <p:cNvSpPr/>
+          <p:nvPr/>
+        </p:nvSpPr>
+        <p:spPr>
+          <a:xfrm>
+            <a:off x="6035040" y="2528316"/>
+            <a:ext cx="2743200" cy="288036"/>
           </a:xfrm>
           <a:prstGeom prst="rect">
             <a:avLst/>
@@ -6440,7 +6653,7 @@
                 <a:ea typeface="Calibri" pitchFamily="34" charset="-122"/>
                 <a:cs typeface="Calibri" pitchFamily="34" charset="-120"/>
               </a:rPr>
-              <a:t>Quartiere mit Dichte &gt; P75 UND Score-P25 ≤ P25</a:t>
+              <a:t>Dichte &gt; P75 ∧ Score-P25 ≤ P25</a:t>
             </a:r>
             <a:endParaRPr lang="en-US" sz="1100" dirty="0"/>
           </a:p>
@@ -6448,30 +6661,30 @@
       </p:sp>
       <p:sp>
         <p:nvSpPr>
-          <p:cNvPr id="15" name="Text 13"/>
-          <p:cNvSpPr/>
-          <p:nvPr/>
-        </p:nvSpPr>
-        <p:spPr>
-          <a:xfrm>
-            <a:off x="4800600" y="3291840"/>
-            <a:ext cx="3749040" cy="1188720"/>
-          </a:xfrm>
-          <a:prstGeom prst="rect">
-            <a:avLst/>
-          </a:prstGeom>
-          <a:noFill/>
-          <a:ln/>
-        </p:spPr>
-        <p:txBody>
-          <a:bodyPr wrap="square" lIns="0" tIns="0" rIns="0" bIns="0" rtlCol="0" anchor="ctr"/>
-          <a:lstStyle/>
-          <a:p>
-            <a:pPr indent="0" marL="0">
-              <a:buNone/>
-            </a:pPr>
-            <a:r>
-              <a:rPr lang="en-US" sz="1100" dirty="0">
+          <p:cNvPr id="21" name="Text 19"/>
+          <p:cNvSpPr/>
+          <p:nvPr/>
+        </p:nvSpPr>
+        <p:spPr>
+          <a:xfrm>
+            <a:off x="6172200" y="2907792"/>
+            <a:ext cx="2468880" cy="1691640"/>
+          </a:xfrm>
+          <a:prstGeom prst="rect">
+            <a:avLst/>
+          </a:prstGeom>
+          <a:noFill/>
+          <a:ln/>
+        </p:spPr>
+        <p:txBody>
+          <a:bodyPr wrap="square" lIns="0" tIns="0" rIns="0" bIns="0" rtlCol="0" anchor="ctr"/>
+          <a:lstStyle/>
+          <a:p>
+            <a:pPr indent="0" marL="0">
+              <a:buNone/>
+            </a:pPr>
+            <a:r>
+              <a:rPr lang="en-US" sz="950" dirty="0">
                 <a:solidFill>
                   <a:srgbClr val="0F172A"/>
                 </a:solidFill>
@@ -6479,15 +6692,15 @@
                 <a:ea typeface="Calibri" pitchFamily="34" charset="-122"/>
                 <a:cs typeface="Calibri" pitchFamily="34" charset="-120"/>
               </a:rPr>
-              <a:t>Quantitativer Test mit STATPOP-Bevölkerungsdichte: kein Quartier erfüllt beide Schwellen. Zürichs Stadtstruktur ist konsistent — keine US-typischen 'food deserts'. Periphere Quartiere haben tiefen Score (5 mit &lt; 20), aber dort wohnen auch wenige Menschen.</a:t>
-            </a:r>
-            <a:endParaRPr lang="en-US" sz="1100" dirty="0"/>
-          </a:p>
-        </p:txBody>
-      </p:sp>
-      <p:sp>
-        <p:nvSpPr>
-          <p:cNvPr id="16" name="Text 14"/>
+              <a:t>Kein Quartier erfüllt beide Schwellen. Zürichs Stadtstruktur ist konsistent — keine US-typischen 'food deserts'. Periphere Quartiere haben tiefen Score (5 &lt; 20), dort wohnen aber auch wenige Menschen.</a:t>
+            </a:r>
+            <a:endParaRPr lang="en-US" sz="950" dirty="0"/>
+          </a:p>
+        </p:txBody>
+      </p:sp>
+      <p:sp>
+        <p:nvSpPr>
+          <p:cNvPr id="22" name="Text 20"/>
           <p:cNvSpPr/>
           <p:nvPr/>
         </p:nvSpPr>
@@ -6526,7 +6739,7 @@
       </p:sp>
       <p:sp>
         <p:nvSpPr>
-          <p:cNvPr id="17" name="Text 15"/>
+          <p:cNvPr id="23" name="Text 21"/>
           <p:cNvSpPr/>
           <p:nvPr/>
         </p:nvSpPr>
@@ -11366,7 +11579,7 @@
                 <a:ea typeface="Calibri" pitchFamily="34" charset="-122"/>
                 <a:cs typeface="Calibri" pitchFamily="34" charset="-120"/>
               </a:rPr>
-              <a:t>Luftlinie vs. Strassennetz: r = 0.988.</a:t>
+              <a:t>Luftlinie vs. Strassennetz: r = 0.991.</a:t>
             </a:r>
             <a:endParaRPr lang="en-US" sz="1000" dirty="0"/>
           </a:p>
@@ -16286,7 +16499,7 @@
                 <a:ea typeface="Trebuchet MS" pitchFamily="34" charset="-122"/>
                 <a:cs typeface="Trebuchet MS" pitchFamily="34" charset="-120"/>
               </a:rPr>
-              <a:t>Zwei testbare Hypothesen</a:t>
+              <a:t>Drei testbare Hypothesen</a:t>
             </a:r>
             <a:endParaRPr lang="en-US" sz="3000" dirty="0"/>
           </a:p>
@@ -16300,8 +16513,8 @@
         </p:nvSpPr>
         <p:spPr>
           <a:xfrm>
-            <a:off x="457200" y="1554480"/>
-            <a:ext cx="8229600" cy="1280160"/>
+            <a:off x="457200" y="1463040"/>
+            <a:ext cx="8229600" cy="1005840"/>
           </a:xfrm>
           <a:prstGeom prst="rect">
             <a:avLst/>
@@ -16332,7 +16545,7 @@
         </p:nvSpPr>
         <p:spPr>
           <a:xfrm>
-            <a:off x="457200" y="1554480"/>
+            <a:off x="457200" y="1463040"/>
             <a:ext cx="8229600" cy="54864"/>
           </a:xfrm>
           <a:prstGeom prst="rect">
@@ -16357,8 +16570,8 @@
         </p:nvSpPr>
         <p:spPr>
           <a:xfrm>
-            <a:off x="640080" y="1810512"/>
-            <a:ext cx="777240" cy="777240"/>
+            <a:off x="640080" y="1627632"/>
+            <a:ext cx="685800" cy="685800"/>
           </a:xfrm>
           <a:prstGeom prst="ellipse">
             <a:avLst/>
@@ -16382,8 +16595,8 @@
         </p:nvSpPr>
         <p:spPr>
           <a:xfrm>
-            <a:off x="640080" y="1810512"/>
-            <a:ext cx="777240" cy="777240"/>
+            <a:off x="640080" y="1627632"/>
+            <a:ext cx="685800" cy="685800"/>
           </a:xfrm>
           <a:prstGeom prst="rect">
             <a:avLst/>
@@ -16399,7 +16612,7 @@
               <a:buNone/>
             </a:pPr>
             <a:r>
-              <a:rPr lang="en-US" sz="2200" b="1" dirty="0">
+              <a:rPr lang="en-US" sz="1800" b="1" dirty="0">
                 <a:solidFill>
                   <a:srgbClr val="FFFFFF"/>
                 </a:solidFill>
@@ -16409,7 +16622,7 @@
               </a:rPr>
               <a:t>H1</a:t>
             </a:r>
-            <a:endParaRPr lang="en-US" sz="2200" dirty="0"/>
+            <a:endParaRPr lang="en-US" sz="1800" dirty="0"/>
           </a:p>
         </p:txBody>
       </p:sp>
@@ -16421,24 +16634,24 @@
         </p:nvSpPr>
         <p:spPr>
           <a:xfrm>
-            <a:off x="1554480" y="1737360"/>
-            <a:ext cx="6949440" cy="365760"/>
-          </a:xfrm>
-          <a:prstGeom prst="rect">
-            <a:avLst/>
-          </a:prstGeom>
-          <a:noFill/>
-          <a:ln/>
-        </p:spPr>
-        <p:txBody>
-          <a:bodyPr wrap="square" lIns="0" tIns="0" rIns="0" bIns="0" rtlCol="0" anchor="ctr"/>
-          <a:lstStyle/>
-          <a:p>
-            <a:pPr indent="0" marL="0">
-              <a:buNone/>
-            </a:pPr>
-            <a:r>
-              <a:rPr lang="en-US" sz="1600" b="1" dirty="0">
+            <a:off x="1463040" y="1591056"/>
+            <a:ext cx="7040880" cy="292608"/>
+          </a:xfrm>
+          <a:prstGeom prst="rect">
+            <a:avLst/>
+          </a:prstGeom>
+          <a:noFill/>
+          <a:ln/>
+        </p:spPr>
+        <p:txBody>
+          <a:bodyPr wrap="square" lIns="0" tIns="0" rIns="0" bIns="0" rtlCol="0" anchor="ctr"/>
+          <a:lstStyle/>
+          <a:p>
+            <a:pPr indent="0" marL="0">
+              <a:buNone/>
+            </a:pPr>
+            <a:r>
+              <a:rPr lang="en-US" sz="1400" b="1" dirty="0">
                 <a:solidFill>
                   <a:srgbClr val="0F172A"/>
                 </a:solidFill>
@@ -16446,9 +16659,9 @@
                 <a:ea typeface="Trebuchet MS" pitchFamily="34" charset="-122"/>
                 <a:cs typeface="Trebuchet MS" pitchFamily="34" charset="-120"/>
               </a:rPr>
-              <a:t>Score korreliert mit Zentralität</a:t>
-            </a:r>
-            <a:endParaRPr lang="en-US" sz="1600" dirty="0"/>
+              <a:t>Score ↔ Mietpreis</a:t>
+            </a:r>
+            <a:endParaRPr lang="en-US" sz="1400" dirty="0"/>
           </a:p>
         </p:txBody>
       </p:sp>
@@ -16460,24 +16673,24 @@
         </p:nvSpPr>
         <p:spPr>
           <a:xfrm>
-            <a:off x="1554480" y="2103120"/>
-            <a:ext cx="6949440" cy="457200"/>
-          </a:xfrm>
-          <a:prstGeom prst="rect">
-            <a:avLst/>
-          </a:prstGeom>
-          <a:noFill/>
-          <a:ln/>
-        </p:spPr>
-        <p:txBody>
-          <a:bodyPr wrap="square" lIns="0" tIns="0" rIns="0" bIns="0" rtlCol="0" anchor="ctr"/>
-          <a:lstStyle/>
-          <a:p>
-            <a:pPr indent="0" marL="0">
-              <a:buNone/>
-            </a:pPr>
-            <a:r>
-              <a:rPr lang="en-US" sz="1200" dirty="0">
+            <a:off x="1463040" y="1865376"/>
+            <a:ext cx="7040880" cy="365760"/>
+          </a:xfrm>
+          <a:prstGeom prst="rect">
+            <a:avLst/>
+          </a:prstGeom>
+          <a:noFill/>
+          <a:ln/>
+        </p:spPr>
+        <p:txBody>
+          <a:bodyPr wrap="square" lIns="0" tIns="0" rIns="0" bIns="0" rtlCol="0" anchor="ctr"/>
+          <a:lstStyle/>
+          <a:p>
+            <a:pPr indent="0" marL="0">
+              <a:buNone/>
+            </a:pPr>
+            <a:r>
+              <a:rPr lang="en-US" sz="1050" dirty="0">
                 <a:solidFill>
                   <a:srgbClr val="0F172A"/>
                 </a:solidFill>
@@ -16485,9 +16698,9 @@
                 <a:ea typeface="Calibri" pitchFamily="34" charset="-122"/>
                 <a:cs typeface="Calibri" pitchFamily="34" charset="-120"/>
               </a:rPr>
-              <a:t>Quartiere mit grösserer Distanz zum Hauptbahnhof haben einen niedrigeren 15-Min-Score — zentrale Lage bedeutet bessere Erreichbarkeit.</a:t>
-            </a:r>
-            <a:endParaRPr lang="en-US" sz="1200" dirty="0"/>
+              <a:t>Quartiere mit höherem 15-Min-Score haben höhere Median-Mietpreise — Erreichbarkeit übersetzt sich in Standortwert.</a:t>
+            </a:r>
+            <a:endParaRPr lang="en-US" sz="1050" dirty="0"/>
           </a:p>
         </p:txBody>
       </p:sp>
@@ -16499,24 +16712,24 @@
         </p:nvSpPr>
         <p:spPr>
           <a:xfrm>
-            <a:off x="1554480" y="2514600"/>
-            <a:ext cx="6949440" cy="274320"/>
-          </a:xfrm>
-          <a:prstGeom prst="rect">
-            <a:avLst/>
-          </a:prstGeom>
-          <a:noFill/>
-          <a:ln/>
-        </p:spPr>
-        <p:txBody>
-          <a:bodyPr wrap="square" lIns="0" tIns="0" rIns="0" bIns="0" rtlCol="0" anchor="ctr"/>
-          <a:lstStyle/>
-          <a:p>
-            <a:pPr indent="0" marL="0">
-              <a:buNone/>
-            </a:pPr>
-            <a:r>
-              <a:rPr lang="en-US" sz="1050" i="1" dirty="0">
+            <a:off x="1463040" y="2212848"/>
+            <a:ext cx="7040880" cy="228600"/>
+          </a:xfrm>
+          <a:prstGeom prst="rect">
+            <a:avLst/>
+          </a:prstGeom>
+          <a:noFill/>
+          <a:ln/>
+        </p:spPr>
+        <p:txBody>
+          <a:bodyPr wrap="square" lIns="0" tIns="0" rIns="0" bIns="0" rtlCol="0" anchor="ctr"/>
+          <a:lstStyle/>
+          <a:p>
+            <a:pPr indent="0" marL="0">
+              <a:buNone/>
+            </a:pPr>
+            <a:r>
+              <a:rPr lang="en-US" sz="950" i="1" dirty="0">
                 <a:solidFill>
                   <a:srgbClr val="64748B"/>
                 </a:solidFill>
@@ -16524,9 +16737,9 @@
                 <a:ea typeface="Calibri" pitchFamily="34" charset="-122"/>
                 <a:cs typeface="Calibri" pitchFamily="34" charset="-120"/>
               </a:rPr>
-              <a:t>Test: Pearson- &amp; Spearman-Korrelation Score × Distanz HB (n = 34 Quartiere)</a:t>
-            </a:r>
-            <a:endParaRPr lang="en-US" sz="1050" dirty="0"/>
+              <a:t>Test: Pearson + Spearman Score × Median-Mietpreis (Stadt Zürich Open Data, n = 34)</a:t>
+            </a:r>
+            <a:endParaRPr lang="en-US" sz="950" dirty="0"/>
           </a:p>
         </p:txBody>
       </p:sp>
@@ -16538,8 +16751,8 @@
         </p:nvSpPr>
         <p:spPr>
           <a:xfrm>
-            <a:off x="457200" y="2971800"/>
-            <a:ext cx="8229600" cy="1280160"/>
+            <a:off x="457200" y="2560320"/>
+            <a:ext cx="8229600" cy="1005840"/>
           </a:xfrm>
           <a:prstGeom prst="rect">
             <a:avLst/>
@@ -16570,7 +16783,245 @@
         </p:nvSpPr>
         <p:spPr>
           <a:xfrm>
-            <a:off x="457200" y="2971800"/>
+            <a:off x="457200" y="2560320"/>
+            <a:ext cx="8229600" cy="54864"/>
+          </a:xfrm>
+          <a:prstGeom prst="rect">
+            <a:avLst/>
+          </a:prstGeom>
+          <a:solidFill>
+            <a:srgbClr val="1C7293"/>
+          </a:solidFill>
+          <a:ln w="12700">
+            <a:solidFill>
+              <a:srgbClr val="1C7293"/>
+            </a:solidFill>
+            <a:prstDash val="solid"/>
+          </a:ln>
+        </p:spPr>
+      </p:sp>
+      <p:sp>
+        <p:nvSpPr>
+          <p:cNvPr id="13" name="Shape 11"/>
+          <p:cNvSpPr/>
+          <p:nvPr/>
+        </p:nvSpPr>
+        <p:spPr>
+          <a:xfrm>
+            <a:off x="640080" y="2724912"/>
+            <a:ext cx="685800" cy="685800"/>
+          </a:xfrm>
+          <a:prstGeom prst="ellipse">
+            <a:avLst/>
+          </a:prstGeom>
+          <a:solidFill>
+            <a:srgbClr val="1C7293"/>
+          </a:solidFill>
+          <a:ln w="12700">
+            <a:solidFill>
+              <a:srgbClr val="1C7293"/>
+            </a:solidFill>
+            <a:prstDash val="solid"/>
+          </a:ln>
+        </p:spPr>
+      </p:sp>
+      <p:sp>
+        <p:nvSpPr>
+          <p:cNvPr id="14" name="Text 12"/>
+          <p:cNvSpPr/>
+          <p:nvPr/>
+        </p:nvSpPr>
+        <p:spPr>
+          <a:xfrm>
+            <a:off x="640080" y="2724912"/>
+            <a:ext cx="685800" cy="685800"/>
+          </a:xfrm>
+          <a:prstGeom prst="rect">
+            <a:avLst/>
+          </a:prstGeom>
+          <a:noFill/>
+          <a:ln/>
+        </p:spPr>
+        <p:txBody>
+          <a:bodyPr wrap="square" lIns="0" tIns="0" rIns="0" bIns="0" rtlCol="0" anchor="ctr"/>
+          <a:lstStyle/>
+          <a:p>
+            <a:pPr algn="ctr" indent="0" marL="0">
+              <a:buNone/>
+            </a:pPr>
+            <a:r>
+              <a:rPr lang="en-US" sz="1800" b="1" dirty="0">
+                <a:solidFill>
+                  <a:srgbClr val="FFFFFF"/>
+                </a:solidFill>
+                <a:latin typeface="Trebuchet MS" pitchFamily="34" charset="0"/>
+                <a:ea typeface="Trebuchet MS" pitchFamily="34" charset="-122"/>
+                <a:cs typeface="Trebuchet MS" pitchFamily="34" charset="-120"/>
+              </a:rPr>
+              <a:t>H1a</a:t>
+            </a:r>
+            <a:endParaRPr lang="en-US" sz="1800" dirty="0"/>
+          </a:p>
+        </p:txBody>
+      </p:sp>
+      <p:sp>
+        <p:nvSpPr>
+          <p:cNvPr id="15" name="Text 13"/>
+          <p:cNvSpPr/>
+          <p:nvPr/>
+        </p:nvSpPr>
+        <p:spPr>
+          <a:xfrm>
+            <a:off x="1463040" y="2688336"/>
+            <a:ext cx="7040880" cy="292608"/>
+          </a:xfrm>
+          <a:prstGeom prst="rect">
+            <a:avLst/>
+          </a:prstGeom>
+          <a:noFill/>
+          <a:ln/>
+        </p:spPr>
+        <p:txBody>
+          <a:bodyPr wrap="square" lIns="0" tIns="0" rIns="0" bIns="0" rtlCol="0" anchor="ctr"/>
+          <a:lstStyle/>
+          <a:p>
+            <a:pPr indent="0" marL="0">
+              <a:buNone/>
+            </a:pPr>
+            <a:r>
+              <a:rPr lang="en-US" sz="1400" b="1" dirty="0">
+                <a:solidFill>
+                  <a:srgbClr val="0F172A"/>
+                </a:solidFill>
+                <a:latin typeface="Trebuchet MS" pitchFamily="34" charset="0"/>
+                <a:ea typeface="Trebuchet MS" pitchFamily="34" charset="-122"/>
+                <a:cs typeface="Trebuchet MS" pitchFamily="34" charset="-120"/>
+              </a:rPr>
+              <a:t>Zentralitäts-Robustness</a:t>
+            </a:r>
+            <a:endParaRPr lang="en-US" sz="1400" dirty="0"/>
+          </a:p>
+        </p:txBody>
+      </p:sp>
+      <p:sp>
+        <p:nvSpPr>
+          <p:cNvPr id="16" name="Text 14"/>
+          <p:cNvSpPr/>
+          <p:nvPr/>
+        </p:nvSpPr>
+        <p:spPr>
+          <a:xfrm>
+            <a:off x="1463040" y="2962656"/>
+            <a:ext cx="7040880" cy="365760"/>
+          </a:xfrm>
+          <a:prstGeom prst="rect">
+            <a:avLst/>
+          </a:prstGeom>
+          <a:noFill/>
+          <a:ln/>
+        </p:spPr>
+        <p:txBody>
+          <a:bodyPr wrap="square" lIns="0" tIns="0" rIns="0" bIns="0" rtlCol="0" anchor="ctr"/>
+          <a:lstStyle/>
+          <a:p>
+            <a:pPr indent="0" marL="0">
+              <a:buNone/>
+            </a:pPr>
+            <a:r>
+              <a:rPr lang="en-US" sz="1050" dirty="0">
+                <a:solidFill>
+                  <a:srgbClr val="0F172A"/>
+                </a:solidFill>
+                <a:latin typeface="Calibri" pitchFamily="34" charset="0"/>
+                <a:ea typeface="Calibri" pitchFamily="34" charset="-122"/>
+                <a:cs typeface="Calibri" pitchFamily="34" charset="-120"/>
+              </a:rPr>
+              <a:t>Quartiere mit grösserer HB-Distanz haben einen niedrigeren Score — methodisch sauberer Proxy ohne Marktdaten-Confounder.</a:t>
+            </a:r>
+            <a:endParaRPr lang="en-US" sz="1050" dirty="0"/>
+          </a:p>
+        </p:txBody>
+      </p:sp>
+      <p:sp>
+        <p:nvSpPr>
+          <p:cNvPr id="17" name="Text 15"/>
+          <p:cNvSpPr/>
+          <p:nvPr/>
+        </p:nvSpPr>
+        <p:spPr>
+          <a:xfrm>
+            <a:off x="1463040" y="3310128"/>
+            <a:ext cx="7040880" cy="228600"/>
+          </a:xfrm>
+          <a:prstGeom prst="rect">
+            <a:avLst/>
+          </a:prstGeom>
+          <a:noFill/>
+          <a:ln/>
+        </p:spPr>
+        <p:txBody>
+          <a:bodyPr wrap="square" lIns="0" tIns="0" rIns="0" bIns="0" rtlCol="0" anchor="ctr"/>
+          <a:lstStyle/>
+          <a:p>
+            <a:pPr indent="0" marL="0">
+              <a:buNone/>
+            </a:pPr>
+            <a:r>
+              <a:rPr lang="en-US" sz="950" i="1" dirty="0">
+                <a:solidFill>
+                  <a:srgbClr val="64748B"/>
+                </a:solidFill>
+                <a:latin typeface="Calibri" pitchFamily="34" charset="0"/>
+                <a:ea typeface="Calibri" pitchFamily="34" charset="-122"/>
+                <a:cs typeface="Calibri" pitchFamily="34" charset="-120"/>
+              </a:rPr>
+              <a:t>Test: Pearson + Spearman Score × Distanz HB (LV95-Centroide, n = 34)</a:t>
+            </a:r>
+            <a:endParaRPr lang="en-US" sz="950" dirty="0"/>
+          </a:p>
+        </p:txBody>
+      </p:sp>
+      <p:sp>
+        <p:nvSpPr>
+          <p:cNvPr id="18" name="Shape 16"/>
+          <p:cNvSpPr/>
+          <p:nvPr/>
+        </p:nvSpPr>
+        <p:spPr>
+          <a:xfrm>
+            <a:off x="457200" y="3657600"/>
+            <a:ext cx="8229600" cy="1005840"/>
+          </a:xfrm>
+          <a:prstGeom prst="rect">
+            <a:avLst/>
+          </a:prstGeom>
+          <a:solidFill>
+            <a:srgbClr val="FFFFFF"/>
+          </a:solidFill>
+          <a:ln w="9525">
+            <a:solidFill>
+              <a:srgbClr val="E2E8F0"/>
+            </a:solidFill>
+            <a:prstDash val="solid"/>
+          </a:ln>
+          <a:effectLst>
+            <a:outerShdw sx="100000" sy="100000" kx="0" ky="0" algn="bl" rotWithShape="0" blurRad="101600" dist="12700" dir="5400000">
+              <a:srgbClr val="94A3B8">
+                <a:alpha val="12000"/>
+              </a:srgbClr>
+            </a:outerShdw>
+          </a:effectLst>
+        </p:spPr>
+      </p:sp>
+      <p:sp>
+        <p:nvSpPr>
+          <p:cNvPr id="19" name="Shape 17"/>
+          <p:cNvSpPr/>
+          <p:nvPr/>
+        </p:nvSpPr>
+        <p:spPr>
+          <a:xfrm>
+            <a:off x="457200" y="3657600"/>
             <a:ext cx="8229600" cy="54864"/>
           </a:xfrm>
           <a:prstGeom prst="rect">
@@ -16589,14 +17040,14 @@
       </p:sp>
       <p:sp>
         <p:nvSpPr>
-          <p:cNvPr id="13" name="Shape 11"/>
-          <p:cNvSpPr/>
-          <p:nvPr/>
-        </p:nvSpPr>
-        <p:spPr>
-          <a:xfrm>
-            <a:off x="640080" y="3227832"/>
-            <a:ext cx="777240" cy="777240"/>
+          <p:cNvPr id="20" name="Shape 18"/>
+          <p:cNvSpPr/>
+          <p:nvPr/>
+        </p:nvSpPr>
+        <p:spPr>
+          <a:xfrm>
+            <a:off x="640080" y="3822192"/>
+            <a:ext cx="685800" cy="685800"/>
           </a:xfrm>
           <a:prstGeom prst="ellipse">
             <a:avLst/>
@@ -16614,14 +17065,14 @@
       </p:sp>
       <p:sp>
         <p:nvSpPr>
-          <p:cNvPr id="14" name="Text 12"/>
-          <p:cNvSpPr/>
-          <p:nvPr/>
-        </p:nvSpPr>
-        <p:spPr>
-          <a:xfrm>
-            <a:off x="640080" y="3227832"/>
-            <a:ext cx="777240" cy="777240"/>
+          <p:cNvPr id="21" name="Text 19"/>
+          <p:cNvSpPr/>
+          <p:nvPr/>
+        </p:nvSpPr>
+        <p:spPr>
+          <a:xfrm>
+            <a:off x="640080" y="3822192"/>
+            <a:ext cx="685800" cy="685800"/>
           </a:xfrm>
           <a:prstGeom prst="rect">
             <a:avLst/>
@@ -16637,7 +17088,7 @@
               <a:buNone/>
             </a:pPr>
             <a:r>
-              <a:rPr lang="en-US" sz="2200" b="1" dirty="0">
+              <a:rPr lang="en-US" sz="1800" b="1" dirty="0">
                 <a:solidFill>
                   <a:srgbClr val="FFFFFF"/>
                 </a:solidFill>
@@ -16647,36 +17098,36 @@
               </a:rPr>
               <a:t>H2</a:t>
             </a:r>
-            <a:endParaRPr lang="en-US" sz="2200" dirty="0"/>
-          </a:p>
-        </p:txBody>
-      </p:sp>
-      <p:sp>
-        <p:nvSpPr>
-          <p:cNvPr id="15" name="Text 13"/>
-          <p:cNvSpPr/>
-          <p:nvPr/>
-        </p:nvSpPr>
-        <p:spPr>
-          <a:xfrm>
-            <a:off x="1554480" y="3154680"/>
-            <a:ext cx="6949440" cy="365760"/>
-          </a:xfrm>
-          <a:prstGeom prst="rect">
-            <a:avLst/>
-          </a:prstGeom>
-          <a:noFill/>
-          <a:ln/>
-        </p:spPr>
-        <p:txBody>
-          <a:bodyPr wrap="square" lIns="0" tIns="0" rIns="0" bIns="0" rtlCol="0" anchor="ctr"/>
-          <a:lstStyle/>
-          <a:p>
-            <a:pPr indent="0" marL="0">
-              <a:buNone/>
-            </a:pPr>
-            <a:r>
-              <a:rPr lang="en-US" sz="1600" b="1" dirty="0">
+            <a:endParaRPr lang="en-US" sz="1800" dirty="0"/>
+          </a:p>
+        </p:txBody>
+      </p:sp>
+      <p:sp>
+        <p:nvSpPr>
+          <p:cNvPr id="22" name="Text 20"/>
+          <p:cNvSpPr/>
+          <p:nvPr/>
+        </p:nvSpPr>
+        <p:spPr>
+          <a:xfrm>
+            <a:off x="1463040" y="3785616"/>
+            <a:ext cx="7040880" cy="292608"/>
+          </a:xfrm>
+          <a:prstGeom prst="rect">
+            <a:avLst/>
+          </a:prstGeom>
+          <a:noFill/>
+          <a:ln/>
+        </p:spPr>
+        <p:txBody>
+          <a:bodyPr wrap="square" lIns="0" tIns="0" rIns="0" bIns="0" rtlCol="0" anchor="ctr"/>
+          <a:lstStyle/>
+          <a:p>
+            <a:pPr indent="0" marL="0">
+              <a:buNone/>
+            </a:pPr>
+            <a:r>
+              <a:rPr lang="en-US" sz="1400" b="1" dirty="0">
                 <a:solidFill>
                   <a:srgbClr val="0F172A"/>
                 </a:solidFill>
@@ -16686,36 +17137,36 @@
               </a:rPr>
               <a:t>Wüsteneffekt</a:t>
             </a:r>
-            <a:endParaRPr lang="en-US" sz="1600" dirty="0"/>
-          </a:p>
-        </p:txBody>
-      </p:sp>
-      <p:sp>
-        <p:nvSpPr>
-          <p:cNvPr id="16" name="Text 14"/>
-          <p:cNvSpPr/>
-          <p:nvPr/>
-        </p:nvSpPr>
-        <p:spPr>
-          <a:xfrm>
-            <a:off x="1554480" y="3520440"/>
-            <a:ext cx="6949440" cy="457200"/>
-          </a:xfrm>
-          <a:prstGeom prst="rect">
-            <a:avLst/>
-          </a:prstGeom>
-          <a:noFill/>
-          <a:ln/>
-        </p:spPr>
-        <p:txBody>
-          <a:bodyPr wrap="square" lIns="0" tIns="0" rIns="0" bIns="0" rtlCol="0" anchor="ctr"/>
-          <a:lstStyle/>
-          <a:p>
-            <a:pPr indent="0" marL="0">
-              <a:buNone/>
-            </a:pPr>
-            <a:r>
-              <a:rPr lang="en-US" sz="1200" dirty="0">
+            <a:endParaRPr lang="en-US" sz="1400" dirty="0"/>
+          </a:p>
+        </p:txBody>
+      </p:sp>
+      <p:sp>
+        <p:nvSpPr>
+          <p:cNvPr id="23" name="Text 21"/>
+          <p:cNvSpPr/>
+          <p:nvPr/>
+        </p:nvSpPr>
+        <p:spPr>
+          <a:xfrm>
+            <a:off x="1463040" y="4059936"/>
+            <a:ext cx="7040880" cy="365760"/>
+          </a:xfrm>
+          <a:prstGeom prst="rect">
+            <a:avLst/>
+          </a:prstGeom>
+          <a:noFill/>
+          <a:ln/>
+        </p:spPr>
+        <p:txBody>
+          <a:bodyPr wrap="square" lIns="0" tIns="0" rIns="0" bIns="0" rtlCol="0" anchor="ctr"/>
+          <a:lstStyle/>
+          <a:p>
+            <a:pPr indent="0" marL="0">
+              <a:buNone/>
+            </a:pPr>
+            <a:r>
+              <a:rPr lang="en-US" sz="1050" dirty="0">
                 <a:solidFill>
                   <a:srgbClr val="0F172A"/>
                 </a:solidFill>
@@ -16725,36 +17176,36 @@
               </a:rPr>
               <a:t>Es gibt Quartiere mit hoher Bevölkerungsdichte und niedrigem Score — strukturelle Versorgungs-Wüsten.</a:t>
             </a:r>
-            <a:endParaRPr lang="en-US" sz="1200" dirty="0"/>
-          </a:p>
-        </p:txBody>
-      </p:sp>
-      <p:sp>
-        <p:nvSpPr>
-          <p:cNvPr id="17" name="Text 15"/>
-          <p:cNvSpPr/>
-          <p:nvPr/>
-        </p:nvSpPr>
-        <p:spPr>
-          <a:xfrm>
-            <a:off x="1554480" y="3931920"/>
-            <a:ext cx="6949440" cy="274320"/>
-          </a:xfrm>
-          <a:prstGeom prst="rect">
-            <a:avLst/>
-          </a:prstGeom>
-          <a:noFill/>
-          <a:ln/>
-        </p:spPr>
-        <p:txBody>
-          <a:bodyPr wrap="square" lIns="0" tIns="0" rIns="0" bIns="0" rtlCol="0" anchor="ctr"/>
-          <a:lstStyle/>
-          <a:p>
-            <a:pPr indent="0" marL="0">
-              <a:buNone/>
-            </a:pPr>
-            <a:r>
-              <a:rPr lang="en-US" sz="1050" i="1" dirty="0">
+            <a:endParaRPr lang="en-US" sz="1050" dirty="0"/>
+          </a:p>
+        </p:txBody>
+      </p:sp>
+      <p:sp>
+        <p:nvSpPr>
+          <p:cNvPr id="24" name="Text 22"/>
+          <p:cNvSpPr/>
+          <p:nvPr/>
+        </p:nvSpPr>
+        <p:spPr>
+          <a:xfrm>
+            <a:off x="1463040" y="4407408"/>
+            <a:ext cx="7040880" cy="228600"/>
+          </a:xfrm>
+          <a:prstGeom prst="rect">
+            <a:avLst/>
+          </a:prstGeom>
+          <a:noFill/>
+          <a:ln/>
+        </p:spPr>
+        <p:txBody>
+          <a:bodyPr wrap="square" lIns="0" tIns="0" rIns="0" bIns="0" rtlCol="0" anchor="ctr"/>
+          <a:lstStyle/>
+          <a:p>
+            <a:pPr indent="0" marL="0">
+              <a:buNone/>
+            </a:pPr>
+            <a:r>
+              <a:rPr lang="en-US" sz="950" i="1" dirty="0">
                 <a:solidFill>
                   <a:srgbClr val="64748B"/>
                 </a:solidFill>
@@ -16762,15 +17213,15 @@
                 <a:ea typeface="Calibri" pitchFamily="34" charset="-122"/>
                 <a:cs typeface="Calibri" pitchFamily="34" charset="-120"/>
               </a:rPr>
-              <a:t>Test: Schwellenwert-Test: Dichte &gt; P75 UND Score-P25 ≤ P25 (BFS STATPOP 2024)</a:t>
-            </a:r>
-            <a:endParaRPr lang="en-US" sz="1050" dirty="0"/>
-          </a:p>
-        </p:txBody>
-      </p:sp>
-      <p:sp>
-        <p:nvSpPr>
-          <p:cNvPr id="18" name="Text 16"/>
+              <a:t>Test: Schwellenwert-Test: Dichte &gt; P75 UND Score-P25 ≤ P25 (BFS STATPOP 2023)</a:t>
+            </a:r>
+            <a:endParaRPr lang="en-US" sz="950" dirty="0"/>
+          </a:p>
+        </p:txBody>
+      </p:sp>
+      <p:sp>
+        <p:nvSpPr>
+          <p:cNvPr id="25" name="Text 23"/>
           <p:cNvSpPr/>
           <p:nvPr/>
         </p:nvSpPr>

--- a/reports/zh15min_slides.pptx
+++ b/reports/zh15min_slides.pptx
@@ -2780,7 +2780,7 @@
                 <a:ea typeface="Calibri" pitchFamily="34" charset="-122"/>
                 <a:cs typeface="Calibri" pitchFamily="34" charset="-120"/>
               </a:rPr>
-              <a:t>Mitglied 1 · Mitglied 2 · Mitglied 3</a:t>
+              <a:t>Memis Sanir · Andrea Callegari · Ioannis Organtzidis</a:t>
             </a:r>
             <a:endParaRPr lang="en-US" sz="1300" dirty="0"/>
           </a:p>
@@ -13777,7 +13777,7 @@
                 <a:ea typeface="Calibri" pitchFamily="34" charset="-122"/>
                 <a:cs typeface="Calibri" pitchFamily="34" charset="-120"/>
               </a:rPr>
-              <a:t>Repository · github.com/&lt;gruppe&gt;/zh15min   ·   Live-Demo: docker compose up -d</a:t>
+              <a:t>Repository · github.com/sanirmem/zh15min   ·   Live-Demo: docker compose up -d</a:t>
             </a:r>
             <a:endParaRPr lang="en-US" sz="1200" dirty="0"/>
           </a:p>

--- a/reports/zh15min_slides.pptx
+++ b/reports/zh15min_slides.pptx
@@ -4956,7 +4956,7 @@
                 <a:ea typeface="Calibri" pitchFamily="34" charset="-122"/>
                 <a:cs typeface="Calibri" pitchFamily="34" charset="-120"/>
               </a:rPr>
-              <a:t>QGIS 3.44 + PostGIS-Verbindung — neue POIs lassen sich live einsetzen, der Score reagiert dynamisch.</a:t>
+              <a:t>QGIS 3.40 LTR + PostGIS-Verbindung — neue POIs lassen sich live einsetzen, der Score reagiert dynamisch.</a:t>
             </a:r>
             <a:endParaRPr lang="en-US" sz="1050" dirty="0"/>
           </a:p>
@@ -6692,7 +6692,7 @@
                 <a:ea typeface="Calibri" pitchFamily="34" charset="-122"/>
                 <a:cs typeface="Calibri" pitchFamily="34" charset="-120"/>
               </a:rPr>
-              <a:t>Kein Quartier erfüllt beide Schwellen. Zürichs Stadtstruktur ist konsistent — keine US-typischen 'food deserts'. Periphere Quartiere haben tiefen Score (5 &lt; 20), dort wohnen aber auch wenige Menschen.</a:t>
+              <a:t>Kein Quartier erfüllt beide Schwellen. Zürichs Stadtstruktur ist konsistent — keine US-typischen 'food deserts'. Periphere Quartiere haben tiefen Score (&lt; 20), dort wohnen aber auch wenige Menschen.</a:t>
             </a:r>
             <a:endParaRPr lang="en-US" sz="950" dirty="0"/>
           </a:p>
@@ -8329,7 +8329,7 @@
                 <a:ea typeface="Calibri" pitchFamily="34" charset="-122"/>
                 <a:cs typeface="Calibri" pitchFamily="34" charset="-120"/>
               </a:rPr>
-              <a:t>Clustering der 28 Quartiere auf den </a:t>
+              <a:t>Clustering der 34 Quartiere auf den </a:t>
             </a:r>
             <a:pPr indent="0" marL="0">
               <a:buNone/>
@@ -9805,7 +9805,7 @@
                 <a:ea typeface="Calibri" pitchFamily="34" charset="-122"/>
                 <a:cs typeface="Calibri" pitchFamily="34" charset="-120"/>
               </a:rPr>
-              <a:t> — Zentralität ist der dominante Treiber. Multi-Variate-Modell erklärt 86 % der Score-Varianz.</a:t>
+              <a:t> — Zentralität ist der dominante Treiber. Multi-Variate-Modell erklärt 91 % der Score-Varianz.</a:t>
             </a:r>
             <a:endParaRPr lang="en-US" sz="1400" dirty="0"/>
           </a:p>
@@ -10359,7 +10359,7 @@
                 <a:ea typeface="Trebuchet MS" pitchFamily="34" charset="-122"/>
                 <a:cs typeface="Trebuchet MS" pitchFamily="34" charset="-120"/>
               </a:rPr>
-              <a:t>Robustness Check — H1 hält stand</a:t>
+              <a:t>Robustness Check — Modell hält stand</a:t>
             </a:r>
             <a:endParaRPr lang="en-US" sz="3000" dirty="0"/>
           </a:p>
@@ -11409,7 +11409,7 @@
                 <a:ea typeface="Calibri" pitchFamily="34" charset="-122"/>
                 <a:cs typeface="Calibri" pitchFamily="34" charset="-120"/>
               </a:rPr>
-              <a:t>H1 robust</a:t>
+              <a:t>H1a robust</a:t>
             </a:r>
             <a:endParaRPr lang="en-US" sz="1000" dirty="0"/>
           </a:p>
@@ -11426,7 +11426,7 @@
                 <a:ea typeface="Calibri" pitchFamily="34" charset="-122"/>
                 <a:cs typeface="Calibri" pitchFamily="34" charset="-120"/>
               </a:rPr>
-              <a:t>Distanz hochsignifikant nach Kontrolle (β = −9.52).</a:t>
+              <a:t>Distanz HB hochsignifikant nach Kontrolle (β = −9.52).</a:t>
             </a:r>
             <a:endParaRPr lang="en-US" sz="1000" dirty="0"/>
           </a:p>

--- a/reports/zh15min_slides.pptx
+++ b/reports/zh15min_slides.pptx
@@ -4389,7 +4389,7 @@
                 <a:ea typeface="Calibri" pitchFamily="34" charset="-122"/>
                 <a:cs typeface="Calibri" pitchFamily="34" charset="-120"/>
               </a:rPr>
-              <a:t>Lindenhof, Werd, Rathaus, City — Kern-Innenstadt mit maximaler Funktionsmischung</a:t>
+              <a:t>Lindenhof, Werd, Rathaus, Langstrasse, City — Kern-Innenstadt mit maximaler Funktionsmischung</a:t>
             </a:r>
             <a:endParaRPr lang="en-US" sz="1050" dirty="0"/>
           </a:p>
@@ -4423,7 +4423,7 @@
                 <a:ea typeface="Calibri" pitchFamily="34" charset="-122"/>
                 <a:cs typeface="Calibri" pitchFamily="34" charset="-120"/>
               </a:rPr>
-              <a:t>Mittelfeld (30 – 60)</a:t>
+              <a:t>Mittelfeld (40 – 70)</a:t>
             </a:r>
             <a:endParaRPr lang="en-US" sz="1050" dirty="0"/>
           </a:p>
@@ -4440,7 +4440,7 @@
                 <a:ea typeface="Calibri" pitchFamily="34" charset="-122"/>
                 <a:cs typeface="Calibri" pitchFamily="34" charset="-120"/>
               </a:rPr>
-              <a:t>Sihlfeld, Wipkingen, Enge — Wohnviertel mit guter ÖV-Anbindung</a:t>
+              <a:t>Sihlfeld, Hard, Oerlikon, Enge — Wohnviertel mit guter ÖV-Anbindung</a:t>
             </a:r>
             <a:endParaRPr lang="en-US" sz="1050" dirty="0"/>
           </a:p>
@@ -4491,7 +4491,7 @@
                 <a:ea typeface="Calibri" pitchFamily="34" charset="-122"/>
                 <a:cs typeface="Calibri" pitchFamily="34" charset="-120"/>
               </a:rPr>
-              <a:t>Leimbach, Witikon, Hirzenbach, Affoltern — Stadtperipherie und Hangwohnen</a:t>
+              <a:t>Leimbach, Witikon, Hirzenbach, Affoltern, Friesenberg — Stadtperipherie und Hangwohnen</a:t>
             </a:r>
             <a:endParaRPr lang="en-US" sz="1050" dirty="0"/>
           </a:p>
@@ -5294,7 +5294,7 @@
               <a:buNone/>
             </a:pPr>
             <a:r>
-              <a:rPr lang="en-US" sz="1000" dirty="0">
+              <a:rPr lang="en-US" sz="950" dirty="0">
                 <a:solidFill>
                   <a:srgbClr val="0F172A"/>
                 </a:solidFill>
@@ -5302,13 +5302,13 @@
                 <a:ea typeface="Courier New" pitchFamily="34" charset="-122"/>
                 <a:cs typeface="Courier New" pitchFamily="34" charset="-120"/>
               </a:rPr>
-              <a:t>Oberstrass  </a:t>
-            </a:r>
-            <a:pPr indent="0" marL="0">
-              <a:buNone/>
-            </a:pPr>
-            <a:r>
-              <a:rPr lang="en-US" sz="1000" b="1" dirty="0">
+              <a:t>Oberstrass   </a:t>
+            </a:r>
+            <a:pPr indent="0" marL="0">
+              <a:buNone/>
+            </a:pPr>
+            <a:r>
+              <a:rPr lang="en-US" sz="950" b="1" dirty="0">
                 <a:solidFill>
                   <a:srgbClr val="D73027"/>
                 </a:solidFill>
@@ -5318,14 +5318,14 @@
               </a:rPr>
               <a:t>−13.8</a:t>
             </a:r>
-            <a:endParaRPr lang="en-US" sz="1000" dirty="0"/>
-          </a:p>
-          <a:p>
-            <a:pPr indent="0" marL="0">
-              <a:buNone/>
-            </a:pPr>
-            <a:r>
-              <a:rPr lang="en-US" sz="1000" dirty="0">
+            <a:endParaRPr lang="en-US" sz="950" dirty="0"/>
+          </a:p>
+          <a:p>
+            <a:pPr indent="0" marL="0">
+              <a:buNone/>
+            </a:pPr>
+            <a:r>
+              <a:rPr lang="en-US" sz="950" dirty="0">
                 <a:solidFill>
                   <a:srgbClr val="0F172A"/>
                 </a:solidFill>
@@ -5333,13 +5333,13 @@
                 <a:ea typeface="Courier New" pitchFamily="34" charset="-122"/>
                 <a:cs typeface="Courier New" pitchFamily="34" charset="-120"/>
               </a:rPr>
-              <a:t>Fluntern    </a:t>
-            </a:r>
-            <a:pPr indent="0" marL="0">
-              <a:buNone/>
-            </a:pPr>
-            <a:r>
-              <a:rPr lang="en-US" sz="1000" b="1" dirty="0">
+              <a:t>Fluntern     </a:t>
+            </a:r>
+            <a:pPr indent="0" marL="0">
+              <a:buNone/>
+            </a:pPr>
+            <a:r>
+              <a:rPr lang="en-US" sz="950" b="1" dirty="0">
                 <a:solidFill>
                   <a:srgbClr val="D73027"/>
                 </a:solidFill>
@@ -5349,14 +5349,14 @@
               </a:rPr>
               <a:t>−11.2</a:t>
             </a:r>
-            <a:endParaRPr lang="en-US" sz="1000" dirty="0"/>
-          </a:p>
-          <a:p>
-            <a:pPr indent="0" marL="0">
-              <a:buNone/>
-            </a:pPr>
-            <a:r>
-              <a:rPr lang="en-US" sz="1000" dirty="0">
+            <a:endParaRPr lang="en-US" sz="950" dirty="0"/>
+          </a:p>
+          <a:p>
+            <a:pPr indent="0" marL="0">
+              <a:buNone/>
+            </a:pPr>
+            <a:r>
+              <a:rPr lang="en-US" sz="950" dirty="0">
                 <a:solidFill>
                   <a:srgbClr val="0F172A"/>
                 </a:solidFill>
@@ -5364,13 +5364,13 @@
                 <a:ea typeface="Courier New" pitchFamily="34" charset="-122"/>
                 <a:cs typeface="Courier New" pitchFamily="34" charset="-120"/>
               </a:rPr>
-              <a:t>Alt-Wiedikon</a:t>
-            </a:r>
-            <a:pPr indent="0" marL="0">
-              <a:buNone/>
-            </a:pPr>
-            <a:r>
-              <a:rPr lang="en-US" sz="1000" b="1" dirty="0">
+              <a:t>Gewerbeschule </a:t>
+            </a:r>
+            <a:pPr indent="0" marL="0">
+              <a:buNone/>
+            </a:pPr>
+            <a:r>
+              <a:rPr lang="en-US" sz="950" b="1" dirty="0">
                 <a:solidFill>
                   <a:srgbClr val="D73027"/>
                 </a:solidFill>
@@ -5378,16 +5378,16 @@
                 <a:ea typeface="Courier New" pitchFamily="34" charset="-122"/>
                 <a:cs typeface="Courier New" pitchFamily="34" charset="-120"/>
               </a:rPr>
-              <a:t> −8.1</a:t>
-            </a:r>
-            <a:endParaRPr lang="en-US" sz="1000" dirty="0"/>
-          </a:p>
-          <a:p>
-            <a:pPr indent="0" marL="0">
-              <a:buNone/>
-            </a:pPr>
-            <a:r>
-              <a:rPr lang="en-US" sz="1000" dirty="0">
+              <a:t>−10.1</a:t>
+            </a:r>
+            <a:endParaRPr lang="en-US" sz="950" dirty="0"/>
+          </a:p>
+          <a:p>
+            <a:pPr indent="0" marL="0">
+              <a:buNone/>
+            </a:pPr>
+            <a:r>
+              <a:rPr lang="en-US" sz="950" dirty="0">
                 <a:solidFill>
                   <a:srgbClr val="0F172A"/>
                 </a:solidFill>
@@ -5395,13 +5395,13 @@
                 <a:ea typeface="Courier New" pitchFamily="34" charset="-122"/>
                 <a:cs typeface="Courier New" pitchFamily="34" charset="-120"/>
               </a:rPr>
-              <a:t>Wipkingen   </a:t>
-            </a:r>
-            <a:pPr indent="0" marL="0">
-              <a:buNone/>
-            </a:pPr>
-            <a:r>
-              <a:rPr lang="en-US" sz="1000" b="1" dirty="0">
+              <a:t>Alt-Wiedikon </a:t>
+            </a:r>
+            <a:pPr indent="0" marL="0">
+              <a:buNone/>
+            </a:pPr>
+            <a:r>
+              <a:rPr lang="en-US" sz="950" b="1" dirty="0">
                 <a:solidFill>
                   <a:srgbClr val="D73027"/>
                 </a:solidFill>
@@ -5409,9 +5409,40 @@
                 <a:ea typeface="Courier New" pitchFamily="34" charset="-122"/>
                 <a:cs typeface="Courier New" pitchFamily="34" charset="-120"/>
               </a:rPr>
+              <a:t> −8.1</a:t>
+            </a:r>
+            <a:endParaRPr lang="en-US" sz="950" dirty="0"/>
+          </a:p>
+          <a:p>
+            <a:pPr indent="0" marL="0">
+              <a:buNone/>
+            </a:pPr>
+            <a:r>
+              <a:rPr lang="en-US" sz="950" dirty="0">
+                <a:solidFill>
+                  <a:srgbClr val="0F172A"/>
+                </a:solidFill>
+                <a:latin typeface="Courier New" pitchFamily="34" charset="0"/>
+                <a:ea typeface="Courier New" pitchFamily="34" charset="-122"/>
+                <a:cs typeface="Courier New" pitchFamily="34" charset="-120"/>
+              </a:rPr>
+              <a:t>Wipkingen    </a:t>
+            </a:r>
+            <a:pPr indent="0" marL="0">
+              <a:buNone/>
+            </a:pPr>
+            <a:r>
+              <a:rPr lang="en-US" sz="950" b="1" dirty="0">
+                <a:solidFill>
+                  <a:srgbClr val="D73027"/>
+                </a:solidFill>
+                <a:latin typeface="Courier New" pitchFamily="34" charset="0"/>
+                <a:ea typeface="Courier New" pitchFamily="34" charset="-122"/>
+                <a:cs typeface="Courier New" pitchFamily="34" charset="-120"/>
+              </a:rPr>
               <a:t> −8.0</a:t>
             </a:r>
-            <a:endParaRPr lang="en-US" sz="1000" dirty="0"/>
+            <a:endParaRPr lang="en-US" sz="950" dirty="0"/>
           </a:p>
         </p:txBody>
       </p:sp>
@@ -5479,7 +5510,7 @@
               <a:buNone/>
             </a:pPr>
             <a:r>
-              <a:rPr lang="en-US" sz="1000" dirty="0">
+              <a:rPr lang="en-US" sz="950" dirty="0">
                 <a:solidFill>
                   <a:srgbClr val="0F172A"/>
                 </a:solidFill>
@@ -5487,13 +5518,13 @@
                 <a:ea typeface="Courier New" pitchFamily="34" charset="-122"/>
                 <a:cs typeface="Courier New" pitchFamily="34" charset="-120"/>
               </a:rPr>
-              <a:t>Mühlebach   </a:t>
-            </a:r>
-            <a:pPr indent="0" marL="0">
-              <a:buNone/>
-            </a:pPr>
-            <a:r>
-              <a:rPr lang="en-US" sz="1000" b="1" dirty="0">
+              <a:t>Mühlebach    </a:t>
+            </a:r>
+            <a:pPr indent="0" marL="0">
+              <a:buNone/>
+            </a:pPr>
+            <a:r>
+              <a:rPr lang="en-US" sz="950" b="1" dirty="0">
                 <a:solidFill>
                   <a:srgbClr val="1A9850"/>
                 </a:solidFill>
@@ -5503,14 +5534,14 @@
               </a:rPr>
               <a:t>+8.5</a:t>
             </a:r>
-            <a:endParaRPr lang="en-US" sz="1000" dirty="0"/>
-          </a:p>
-          <a:p>
-            <a:pPr indent="0" marL="0">
-              <a:buNone/>
-            </a:pPr>
-            <a:r>
-              <a:rPr lang="en-US" sz="1000" dirty="0">
+            <a:endParaRPr lang="en-US" sz="950" dirty="0"/>
+          </a:p>
+          <a:p>
+            <a:pPr indent="0" marL="0">
+              <a:buNone/>
+            </a:pPr>
+            <a:r>
+              <a:rPr lang="en-US" sz="950" dirty="0">
                 <a:solidFill>
                   <a:srgbClr val="0F172A"/>
                 </a:solidFill>
@@ -5518,13 +5549,13 @@
                 <a:ea typeface="Courier New" pitchFamily="34" charset="-122"/>
                 <a:cs typeface="Courier New" pitchFamily="34" charset="-120"/>
               </a:rPr>
-              <a:t>Seefeld     </a:t>
-            </a:r>
-            <a:pPr indent="0" marL="0">
-              <a:buNone/>
-            </a:pPr>
-            <a:r>
-              <a:rPr lang="en-US" sz="1000" b="1" dirty="0">
+              <a:t>Seefeld      </a:t>
+            </a:r>
+            <a:pPr indent="0" marL="0">
+              <a:buNone/>
+            </a:pPr>
+            <a:r>
+              <a:rPr lang="en-US" sz="950" b="1" dirty="0">
                 <a:solidFill>
                   <a:srgbClr val="1A9850"/>
                 </a:solidFill>
@@ -5534,14 +5565,14 @@
               </a:rPr>
               <a:t>+6.3</a:t>
             </a:r>
-            <a:endParaRPr lang="en-US" sz="1000" dirty="0"/>
-          </a:p>
-          <a:p>
-            <a:pPr indent="0" marL="0">
-              <a:buNone/>
-            </a:pPr>
-            <a:r>
-              <a:rPr lang="en-US" sz="1000" dirty="0">
+            <a:endParaRPr lang="en-US" sz="950" dirty="0"/>
+          </a:p>
+          <a:p>
+            <a:pPr indent="0" marL="0">
+              <a:buNone/>
+            </a:pPr>
+            <a:r>
+              <a:rPr lang="en-US" sz="950" dirty="0">
                 <a:solidFill>
                   <a:srgbClr val="0F172A"/>
                 </a:solidFill>
@@ -5549,13 +5580,13 @@
                 <a:ea typeface="Courier New" pitchFamily="34" charset="-122"/>
                 <a:cs typeface="Courier New" pitchFamily="34" charset="-120"/>
               </a:rPr>
-              <a:t>Oerlikon    </a:t>
-            </a:r>
-            <a:pPr indent="0" marL="0">
-              <a:buNone/>
-            </a:pPr>
-            <a:r>
-              <a:rPr lang="en-US" sz="1000" b="1" dirty="0">
+              <a:t>Oerlikon     </a:t>
+            </a:r>
+            <a:pPr indent="0" marL="0">
+              <a:buNone/>
+            </a:pPr>
+            <a:r>
+              <a:rPr lang="en-US" sz="950" b="1" dirty="0">
                 <a:solidFill>
                   <a:srgbClr val="1A9850"/>
                 </a:solidFill>
@@ -5565,14 +5596,14 @@
               </a:rPr>
               <a:t>+4.4</a:t>
             </a:r>
-            <a:endParaRPr lang="en-US" sz="1000" dirty="0"/>
-          </a:p>
-          <a:p>
-            <a:pPr indent="0" marL="0">
-              <a:buNone/>
-            </a:pPr>
-            <a:r>
-              <a:rPr lang="en-US" sz="1000" dirty="0">
+            <a:endParaRPr lang="en-US" sz="950" dirty="0"/>
+          </a:p>
+          <a:p>
+            <a:pPr indent="0" marL="0">
+              <a:buNone/>
+            </a:pPr>
+            <a:r>
+              <a:rPr lang="en-US" sz="950" dirty="0">
                 <a:solidFill>
                   <a:srgbClr val="0F172A"/>
                 </a:solidFill>
@@ -5580,13 +5611,13 @@
                 <a:ea typeface="Courier New" pitchFamily="34" charset="-122"/>
                 <a:cs typeface="Courier New" pitchFamily="34" charset="-120"/>
               </a:rPr>
-              <a:t>Werd        </a:t>
-            </a:r>
-            <a:pPr indent="0" marL="0">
-              <a:buNone/>
-            </a:pPr>
-            <a:r>
-              <a:rPr lang="en-US" sz="1000" b="1" dirty="0">
+              <a:t>Werd         </a:t>
+            </a:r>
+            <a:pPr indent="0" marL="0">
+              <a:buNone/>
+            </a:pPr>
+            <a:r>
+              <a:rPr lang="en-US" sz="950" b="1" dirty="0">
                 <a:solidFill>
                   <a:srgbClr val="1A9850"/>
                 </a:solidFill>
@@ -5596,7 +5627,38 @@
               </a:rPr>
               <a:t>+3.0</a:t>
             </a:r>
-            <a:endParaRPr lang="en-US" sz="1000" dirty="0"/>
+            <a:endParaRPr lang="en-US" sz="950" dirty="0"/>
+          </a:p>
+          <a:p>
+            <a:pPr indent="0" marL="0">
+              <a:buNone/>
+            </a:pPr>
+            <a:r>
+              <a:rPr lang="en-US" sz="950" dirty="0">
+                <a:solidFill>
+                  <a:srgbClr val="0F172A"/>
+                </a:solidFill>
+                <a:latin typeface="Courier New" pitchFamily="34" charset="0"/>
+                <a:ea typeface="Courier New" pitchFamily="34" charset="-122"/>
+                <a:cs typeface="Courier New" pitchFamily="34" charset="-120"/>
+              </a:rPr>
+              <a:t>Sihlfeld     </a:t>
+            </a:r>
+            <a:pPr indent="0" marL="0">
+              <a:buNone/>
+            </a:pPr>
+            <a:r>
+              <a:rPr lang="en-US" sz="950" b="1" dirty="0">
+                <a:solidFill>
+                  <a:srgbClr val="1A9850"/>
+                </a:solidFill>
+                <a:latin typeface="Courier New" pitchFamily="34" charset="0"/>
+                <a:ea typeface="Courier New" pitchFamily="34" charset="-122"/>
+                <a:cs typeface="Courier New" pitchFamily="34" charset="-120"/>
+              </a:rPr>
+              <a:t>+2.7</a:t>
+            </a:r>
+            <a:endParaRPr lang="en-US" sz="950" dirty="0"/>
           </a:p>
         </p:txBody>
       </p:sp>
@@ -9071,7 +9133,7 @@
                 <a:ea typeface="Trebuchet MS" pitchFamily="34" charset="-122"/>
                 <a:cs typeface="Trebuchet MS" pitchFamily="34" charset="-120"/>
               </a:rPr>
-              <a:t>Stadtnord-Rand</a:t>
+              <a:t>Grünraum-dominiert</a:t>
             </a:r>
             <a:endParaRPr lang="en-US" sz="1350" dirty="0"/>
           </a:p>
@@ -9188,7 +9250,7 @@
                 <a:ea typeface="Calibri" pitchFamily="34" charset="-122"/>
                 <a:cs typeface="Calibri" pitchFamily="34" charset="-120"/>
               </a:rPr>
-              <a:t>Erholung-positiv, alle anderen Funktionen tief.</a:t>
+              <a:t>Erholung hoch (⌀ 0.63) · alle anderen Funktionen tief — Wald-/Parknähe statt zentraler Versorgung.</a:t>
             </a:r>
             <a:endParaRPr lang="en-US" sz="1000" dirty="0"/>
           </a:p>

--- a/reports/zh15min_slides.pptx
+++ b/reports/zh15min_slides.pptx
@@ -4,6 +4,9 @@
   <p:sldMasterIdLst>
     <p:sldMasterId id="2147483648" r:id="rId1"/>
   </p:sldMasterIdLst>
+  <p:notesMasterIdLst>
+    <p:notesMasterId r:id="rId22"/>
+  </p:notesMasterIdLst>
   <p:sldIdLst>
     <p:sldId id="256" r:id="rId2"/>
     <p:sldId id="257" r:id="rId3"/>
@@ -26,10 +29,7 @@
     <p:sldId id="274" r:id="rId20"/>
     <p:sldId id="275" r:id="rId21"/>
   </p:sldIdLst>
-  <p:notesMasterIdLst>
-    <p:notesMasterId r:id="rId22"/>
-  </p:notesMasterIdLst>
-  <p:sldSz cx="9144000" cy="5143500"/>
+  <p:sldSz cx="9144000" cy="5143500" type="screen16x9"/>
   <p:notesSz cx="5143500" cy="9144000"/>
   <p:defaultTextStyle>
     <a:lvl1pPr marL="0" algn="l" defTabSz="914400" rtl="0" eaLnBrk="1" latinLnBrk="0" hangingPunct="1">
@@ -123,6 +123,11 @@
       </a:defRPr>
     </a:lvl9pPr>
   </p:defaultTextStyle>
+  <p:extLst>
+    <p:ext uri="{EFAFB233-063F-42B5-8137-9DF3F51BA10A}">
+      <p15:sldGuideLst xmlns:p15="http://schemas.microsoft.com/office/powerpoint/2012/main"/>
+    </p:ext>
+  </p:extLst>
 </p:presentation>
 </file>
 
@@ -148,234 +153,10 @@
           <a:chExt cx="0" cy="0"/>
         </a:xfrm>
       </p:grpSpPr>
-      <p:sp>
-        <p:nvSpPr>
-          <p:cNvPr id="2" name="Header Placeholder 1"/>
-          <p:cNvSpPr>
-            <a:spLocks noGrp="1"/>
-          </p:cNvSpPr>
-          <p:nvPr>
-            <p:ph type="hdr" sz="quarter"/>
-          </p:nvPr>
-        </p:nvSpPr>
-        <p:spPr>
-          <a:xfrm>
-            <a:off x="0" y="0"/>
-            <a:ext cx="2971800" cy="458788"/>
-          </a:xfrm>
-          <a:prstGeom prst="rect">
-            <a:avLst/>
-          </a:prstGeom>
-        </p:spPr>
-        <p:txBody>
-          <a:bodyPr vert="horz" lIns="91440" tIns="45720" rIns="91440" bIns="45720" rtlCol="0"/>
-          <a:lstStyle>
-            <a:lvl1pPr algn="l">
-              <a:defRPr sz="1200"/>
-            </a:lvl1pPr>
-          </a:lstStyle>
-          <a:p>
-            <a:endParaRPr lang="en-US"/>
-          </a:p>
-        </p:txBody>
-      </p:sp>
-      <p:sp>
-        <p:nvSpPr>
-          <p:cNvPr id="3" name="Date Placeholder 2"/>
-          <p:cNvSpPr>
-            <a:spLocks noGrp="1"/>
-          </p:cNvSpPr>
-          <p:nvPr>
-            <p:ph type="dt" idx="1"/>
-          </p:nvPr>
-        </p:nvSpPr>
-        <p:spPr>
-          <a:xfrm>
-            <a:off x="3884613" y="0"/>
-            <a:ext cx="2971800" cy="458788"/>
-          </a:xfrm>
-          <a:prstGeom prst="rect">
-            <a:avLst/>
-          </a:prstGeom>
-        </p:spPr>
-        <p:txBody>
-          <a:bodyPr vert="horz" lIns="91440" tIns="45720" rIns="91440" bIns="45720" rtlCol="0"/>
-          <a:lstStyle>
-            <a:lvl1pPr algn="r">
-              <a:defRPr sz="1200"/>
-            </a:lvl1pPr>
-          </a:lstStyle>
-          <a:p>
-            <a:fld id="{5282F153-3F37-0F45-9E97-73ACFA13230C}" type="datetimeFigureOut">
-              <a:rPr lang="en-US"/>
-              <a:t>7/23/19</a:t>
-            </a:fld>
-            <a:endParaRPr lang="en-US"/>
-          </a:p>
-        </p:txBody>
-      </p:sp>
-      <p:sp>
-        <p:nvSpPr>
-          <p:cNvPr id="4" name="Slide Image Placeholder 3"/>
-          <p:cNvSpPr>
-            <a:spLocks noGrp="1" noRot="1" noChangeAspect="1"/>
-          </p:cNvSpPr>
-          <p:nvPr>
-            <p:ph type="sldImg" idx="2"/>
-          </p:nvPr>
-        </p:nvSpPr>
-        <p:spPr>
-          <a:xfrm>
-            <a:off x="685800" y="1143000"/>
-            <a:ext cx="5486400" cy="3086100"/>
-          </a:xfrm>
-          <a:prstGeom prst="rect">
-            <a:avLst/>
-          </a:prstGeom>
-          <a:noFill/>
-          <a:ln w="12700">
-            <a:solidFill>
-              <a:prstClr val="black"/>
-            </a:solidFill>
-          </a:ln>
-        </p:spPr>
-        <p:txBody>
-          <a:bodyPr vert="horz" lIns="91440" tIns="45720" rIns="91440" bIns="45720" rtlCol="0" anchor="ctr"/>
-          <a:lstStyle/>
-          <a:p>
-            <a:endParaRPr lang="en-US"/>
-          </a:p>
-        </p:txBody>
-      </p:sp>
-      <p:sp>
-        <p:nvSpPr>
-          <p:cNvPr id="5" name="Notes Placeholder 4"/>
-          <p:cNvSpPr>
-            <a:spLocks noGrp="1"/>
-          </p:cNvSpPr>
-          <p:nvPr>
-            <p:ph type="body" sz="quarter" idx="3"/>
-          </p:nvPr>
-        </p:nvSpPr>
-        <p:spPr>
-          <a:xfrm>
-            <a:off x="685800" y="4400550"/>
-            <a:ext cx="5486400" cy="3600450"/>
-          </a:xfrm>
-          <a:prstGeom prst="rect">
-            <a:avLst/>
-          </a:prstGeom>
-        </p:spPr>
-        <p:txBody>
-          <a:bodyPr vert="horz" lIns="91440" tIns="45720" rIns="91440" bIns="45720" rtlCol="0"/>
-          <a:lstStyle/>
-          <a:p>
-            <a:pPr lvl="0"/>
-            <a:r>
-              <a:rPr lang="en-US"/>
-              <a:t>Click to edit Master text styles</a:t>
-            </a:r>
-          </a:p>
-          <a:p>
-            <a:pPr lvl="1"/>
-            <a:r>
-              <a:rPr lang="en-US"/>
-              <a:t>Second level</a:t>
-            </a:r>
-          </a:p>
-          <a:p>
-            <a:pPr lvl="2"/>
-            <a:r>
-              <a:rPr lang="en-US"/>
-              <a:t>Third level</a:t>
-            </a:r>
-          </a:p>
-          <a:p>
-            <a:pPr lvl="3"/>
-            <a:r>
-              <a:rPr lang="en-US"/>
-              <a:t>Fourth level</a:t>
-            </a:r>
-          </a:p>
-          <a:p>
-            <a:pPr lvl="4"/>
-            <a:r>
-              <a:rPr lang="en-US"/>
-              <a:t>Fifth level</a:t>
-            </a:r>
-          </a:p>
-        </p:txBody>
-      </p:sp>
-      <p:sp>
-        <p:nvSpPr>
-          <p:cNvPr id="6" name="Footer Placeholder 5"/>
-          <p:cNvSpPr>
-            <a:spLocks noGrp="1"/>
-          </p:cNvSpPr>
-          <p:nvPr>
-            <p:ph type="ftr" sz="quarter" idx="4"/>
-          </p:nvPr>
-        </p:nvSpPr>
-        <p:spPr>
-          <a:xfrm>
-            <a:off x="0" y="8685213"/>
-            <a:ext cx="2971800" cy="458787"/>
-          </a:xfrm>
-          <a:prstGeom prst="rect">
-            <a:avLst/>
-          </a:prstGeom>
-        </p:spPr>
-        <p:txBody>
-          <a:bodyPr vert="horz" lIns="91440" tIns="45720" rIns="91440" bIns="45720" rtlCol="0" anchor="b"/>
-          <a:lstStyle>
-            <a:lvl1pPr algn="l">
-              <a:defRPr sz="1200"/>
-            </a:lvl1pPr>
-          </a:lstStyle>
-          <a:p>
-            <a:endParaRPr lang="en-US"/>
-          </a:p>
-        </p:txBody>
-      </p:sp>
-      <p:sp>
-        <p:nvSpPr>
-          <p:cNvPr id="7" name="Slide Number Placeholder 6"/>
-          <p:cNvSpPr>
-            <a:spLocks noGrp="1"/>
-          </p:cNvSpPr>
-          <p:nvPr>
-            <p:ph type="sldNum" sz="quarter" idx="5"/>
-          </p:nvPr>
-        </p:nvSpPr>
-        <p:spPr>
-          <a:xfrm>
-            <a:off x="3884613" y="8685213"/>
-            <a:ext cx="2971800" cy="458787"/>
-          </a:xfrm>
-          <a:prstGeom prst="rect">
-            <a:avLst/>
-          </a:prstGeom>
-        </p:spPr>
-        <p:txBody>
-          <a:bodyPr vert="horz" lIns="91440" tIns="45720" rIns="91440" bIns="45720" rtlCol="0" anchor="b"/>
-          <a:lstStyle>
-            <a:lvl1pPr algn="r">
-              <a:defRPr sz="1200"/>
-            </a:lvl1pPr>
-          </a:lstStyle>
-          <a:p>
-            <a:fld id="{CE5E9CC1-C706-0F49-92D6-E571CC5EEA8F}" type="slidenum">
-              <a:rPr lang="en-US"/>
-              <a:t>‹#›</a:t>
-            </a:fld>
-            <a:endParaRPr lang="en-US"/>
-          </a:p>
-        </p:txBody>
-      </p:sp>
     </p:spTree>
     <p:extLst>
       <p:ext uri="{BB962C8B-B14F-4D97-AF65-F5344CB8AC3E}">
-        <p14:creationId xmlns:p14="http://schemas.microsoft.com/office/powerpoint/2010/main" val="1024086991"/>
+        <p14:creationId xmlns:p14="http://schemas.microsoft.com/office/powerpoint/2010/main" val="3570066395"/>
       </p:ext>
     </p:extLst>
   </p:cSld>
@@ -519,10 +300,6 @@
           <a:bodyPr/>
           <a:lstStyle/>
           <a:p>
-            <a:r>
-              <a:rPr lang="en-US" dirty="0"/>
-              <a:t/>
-            </a:r>
             <a:endParaRPr lang="en-US" dirty="0"/>
           </a:p>
         </p:txBody>
@@ -607,10 +384,6 @@
           <a:bodyPr/>
           <a:lstStyle/>
           <a:p>
-            <a:r>
-              <a:rPr lang="en-US" dirty="0"/>
-              <a:t/>
-            </a:r>
             <a:endParaRPr lang="en-US" dirty="0"/>
           </a:p>
         </p:txBody>
@@ -695,10 +468,6 @@
           <a:bodyPr/>
           <a:lstStyle/>
           <a:p>
-            <a:r>
-              <a:rPr lang="en-US" dirty="0"/>
-              <a:t/>
-            </a:r>
             <a:endParaRPr lang="en-US" dirty="0"/>
           </a:p>
         </p:txBody>
@@ -783,10 +552,6 @@
           <a:bodyPr/>
           <a:lstStyle/>
           <a:p>
-            <a:r>
-              <a:rPr lang="en-US" dirty="0"/>
-              <a:t/>
-            </a:r>
             <a:endParaRPr lang="en-US" dirty="0"/>
           </a:p>
         </p:txBody>
@@ -871,10 +636,6 @@
           <a:bodyPr/>
           <a:lstStyle/>
           <a:p>
-            <a:r>
-              <a:rPr lang="en-US" dirty="0"/>
-              <a:t/>
-            </a:r>
             <a:endParaRPr lang="en-US" dirty="0"/>
           </a:p>
         </p:txBody>
@@ -959,10 +720,6 @@
           <a:bodyPr/>
           <a:lstStyle/>
           <a:p>
-            <a:r>
-              <a:rPr lang="en-US" dirty="0"/>
-              <a:t/>
-            </a:r>
             <a:endParaRPr lang="en-US" dirty="0"/>
           </a:p>
         </p:txBody>
@@ -1047,10 +804,6 @@
           <a:bodyPr/>
           <a:lstStyle/>
           <a:p>
-            <a:r>
-              <a:rPr lang="en-US" dirty="0"/>
-              <a:t/>
-            </a:r>
             <a:endParaRPr lang="en-US" dirty="0"/>
           </a:p>
         </p:txBody>
@@ -1135,10 +888,6 @@
           <a:bodyPr/>
           <a:lstStyle/>
           <a:p>
-            <a:r>
-              <a:rPr lang="en-US" dirty="0"/>
-              <a:t/>
-            </a:r>
             <a:endParaRPr lang="en-US" dirty="0"/>
           </a:p>
         </p:txBody>
@@ -1223,10 +972,6 @@
           <a:bodyPr/>
           <a:lstStyle/>
           <a:p>
-            <a:r>
-              <a:rPr lang="en-US" dirty="0"/>
-              <a:t/>
-            </a:r>
             <a:endParaRPr lang="en-US" dirty="0"/>
           </a:p>
         </p:txBody>
@@ -1311,10 +1056,6 @@
           <a:bodyPr/>
           <a:lstStyle/>
           <a:p>
-            <a:r>
-              <a:rPr lang="en-US" dirty="0"/>
-              <a:t/>
-            </a:r>
             <a:endParaRPr lang="en-US" dirty="0"/>
           </a:p>
         </p:txBody>
@@ -1399,10 +1140,6 @@
           <a:bodyPr/>
           <a:lstStyle/>
           <a:p>
-            <a:r>
-              <a:rPr lang="en-US" dirty="0"/>
-              <a:t/>
-            </a:r>
             <a:endParaRPr lang="en-US" dirty="0"/>
           </a:p>
         </p:txBody>
@@ -1487,10 +1224,6 @@
           <a:bodyPr/>
           <a:lstStyle/>
           <a:p>
-            <a:r>
-              <a:rPr lang="en-US" dirty="0"/>
-              <a:t/>
-            </a:r>
             <a:endParaRPr lang="en-US" dirty="0"/>
           </a:p>
         </p:txBody>
@@ -1575,10 +1308,6 @@
           <a:bodyPr/>
           <a:lstStyle/>
           <a:p>
-            <a:r>
-              <a:rPr lang="en-US" dirty="0"/>
-              <a:t/>
-            </a:r>
             <a:endParaRPr lang="en-US" dirty="0"/>
           </a:p>
         </p:txBody>
@@ -1663,10 +1392,6 @@
           <a:bodyPr/>
           <a:lstStyle/>
           <a:p>
-            <a:r>
-              <a:rPr lang="en-US" dirty="0"/>
-              <a:t/>
-            </a:r>
             <a:endParaRPr lang="en-US" dirty="0"/>
           </a:p>
         </p:txBody>
@@ -1751,10 +1476,6 @@
           <a:bodyPr/>
           <a:lstStyle/>
           <a:p>
-            <a:r>
-              <a:rPr lang="en-US" dirty="0"/>
-              <a:t/>
-            </a:r>
             <a:endParaRPr lang="en-US" dirty="0"/>
           </a:p>
         </p:txBody>
@@ -1839,10 +1560,6 @@
           <a:bodyPr/>
           <a:lstStyle/>
           <a:p>
-            <a:r>
-              <a:rPr lang="en-US" dirty="0"/>
-              <a:t/>
-            </a:r>
             <a:endParaRPr lang="en-US" dirty="0"/>
           </a:p>
         </p:txBody>
@@ -1927,10 +1644,6 @@
           <a:bodyPr/>
           <a:lstStyle/>
           <a:p>
-            <a:r>
-              <a:rPr lang="en-US" dirty="0"/>
-              <a:t/>
-            </a:r>
             <a:endParaRPr lang="en-US" dirty="0"/>
           </a:p>
         </p:txBody>
@@ -2015,10 +1728,6 @@
           <a:bodyPr/>
           <a:lstStyle/>
           <a:p>
-            <a:r>
-              <a:rPr lang="en-US" dirty="0"/>
-              <a:t/>
-            </a:r>
             <a:endParaRPr lang="en-US" dirty="0"/>
           </a:p>
         </p:txBody>
@@ -2103,10 +1812,6 @@
           <a:bodyPr/>
           <a:lstStyle/>
           <a:p>
-            <a:r>
-              <a:rPr lang="en-US" dirty="0"/>
-              <a:t/>
-            </a:r>
             <a:endParaRPr lang="en-US" dirty="0"/>
           </a:p>
         </p:txBody>
@@ -2191,10 +1896,6 @@
           <a:bodyPr/>
           <a:lstStyle/>
           <a:p>
-            <a:r>
-              <a:rPr lang="en-US" dirty="0"/>
-              <a:t/>
-            </a:r>
             <a:endParaRPr lang="en-US" dirty="0"/>
           </a:p>
         </p:txBody>
@@ -2268,6 +1969,11 @@
 <file path=ppt/slideMasters/slideMaster1.xml><?xml version="1.0" encoding="utf-8"?>
 <p:sldMaster xmlns:a="http://schemas.openxmlformats.org/drawingml/2006/main" xmlns:r="http://schemas.openxmlformats.org/officeDocument/2006/relationships" xmlns:p="http://schemas.openxmlformats.org/presentationml/2006/main">
   <p:cSld>
+    <p:bg>
+      <p:bgRef idx="1001">
+        <a:schemeClr val="bg1"/>
+      </p:bgRef>
+    </p:bg>
     <p:spTree>
       <p:nvGrpSpPr>
         <p:cNvPr id="1" name=""/>
@@ -2550,6 +2256,7 @@
         <a:solidFill>
           <a:srgbClr val="21295C"/>
         </a:solidFill>
+        <a:effectLst/>
       </p:bgPr>
     </p:bg>
     <p:spTree>
@@ -2590,6 +2297,13 @@
             <a:prstDash val="solid"/>
           </a:ln>
         </p:spPr>
+        <p:txBody>
+          <a:bodyPr/>
+          <a:lstStyle/>
+          <a:p>
+            <a:endParaRPr lang="en-US"/>
+          </a:p>
+        </p:txBody>
       </p:sp>
       <p:sp>
         <p:nvSpPr>
@@ -2612,11 +2326,11 @@
           <a:bodyPr wrap="square" lIns="0" tIns="0" rIns="0" bIns="0" rtlCol="0" anchor="ctr"/>
           <a:lstStyle/>
           <a:p>
-            <a:pPr indent="0" marL="0">
-              <a:buNone/>
-            </a:pPr>
-            <a:r>
-              <a:rPr lang="en-US" sz="1100" spc="300" kern="0" dirty="0">
+            <a:pPr marL="0" indent="0">
+              <a:buNone/>
+            </a:pPr>
+            <a:r>
+              <a:rPr lang="en-US" sz="1100" kern="0" spc="300" dirty="0">
                 <a:solidFill>
                   <a:srgbClr val="CBD5E1"/>
                 </a:solidFill>
@@ -2651,7 +2365,7 @@
           <a:bodyPr wrap="square" lIns="0" tIns="0" rIns="0" bIns="0" rtlCol="0" anchor="ctr"/>
           <a:lstStyle/>
           <a:p>
-            <a:pPr indent="0" marL="0">
+            <a:pPr marL="0" indent="0">
               <a:buNone/>
             </a:pPr>
             <a:r>
@@ -2690,7 +2404,7 @@
           <a:bodyPr wrap="square" lIns="0" tIns="0" rIns="0" bIns="0" rtlCol="0" anchor="ctr"/>
           <a:lstStyle/>
           <a:p>
-            <a:pPr indent="0" marL="0">
+            <a:pPr marL="0" indent="0">
               <a:buNone/>
             </a:pPr>
             <a:r>
@@ -2732,6 +2446,13 @@
             <a:prstDash val="solid"/>
           </a:ln>
         </p:spPr>
+        <p:txBody>
+          <a:bodyPr/>
+          <a:lstStyle/>
+          <a:p>
+            <a:endParaRPr lang="en-US"/>
+          </a:p>
+        </p:txBody>
       </p:sp>
       <p:sp>
         <p:nvSpPr>
@@ -2754,7 +2475,7 @@
           <a:bodyPr wrap="square" lIns="0" tIns="0" rIns="0" bIns="0" rtlCol="0" anchor="ctr"/>
           <a:lstStyle/>
           <a:p>
-            <a:pPr indent="0" marL="0">
+            <a:pPr marL="0" indent="0">
               <a:buNone/>
             </a:pPr>
             <a:r>
@@ -2768,9 +2489,6 @@
               </a:rPr>
               <a:t>Gruppe: </a:t>
             </a:r>
-            <a:pPr indent="0" marL="0">
-              <a:buNone/>
-            </a:pPr>
             <a:r>
               <a:rPr lang="en-US" sz="1300" dirty="0">
                 <a:solidFill>
@@ -2807,7 +2525,7 @@
           <a:bodyPr wrap="square" lIns="0" tIns="0" rIns="0" bIns="0" rtlCol="0" anchor="ctr"/>
           <a:lstStyle/>
           <a:p>
-            <a:pPr indent="0" marL="0">
+            <a:pPr marL="0" indent="0">
               <a:buNone/>
             </a:pPr>
             <a:r>
@@ -2821,9 +2539,6 @@
               </a:rPr>
               <a:t>Modul: </a:t>
             </a:r>
-            <a:pPr indent="0" marL="0">
-              <a:buNone/>
-            </a:pPr>
             <a:r>
               <a:rPr lang="en-US" sz="1300" dirty="0">
                 <a:solidFill>
@@ -2860,7 +2575,7 @@
           <a:bodyPr wrap="square" lIns="0" tIns="0" rIns="0" bIns="0" rtlCol="0" anchor="ctr"/>
           <a:lstStyle/>
           <a:p>
-            <a:pPr indent="0" marL="0">
+            <a:pPr marL="0" indent="0">
               <a:buNone/>
             </a:pPr>
             <a:r>
@@ -2874,9 +2589,6 @@
               </a:rPr>
               <a:t>Datum: </a:t>
             </a:r>
-            <a:pPr indent="0" marL="0">
-              <a:buNone/>
-            </a:pPr>
             <a:r>
               <a:rPr lang="en-US" sz="1300" dirty="0">
                 <a:solidFill>
@@ -2913,7 +2625,7 @@
           <a:bodyPr wrap="square" lIns="0" tIns="0" rIns="0" bIns="0" rtlCol="0" anchor="ctr"/>
           <a:lstStyle/>
           <a:p>
-            <a:pPr algn="l" indent="0" marL="0">
+            <a:pPr marL="0" indent="0" algn="l">
               <a:buNone/>
             </a:pPr>
             <a:r>
@@ -2952,7 +2664,7 @@
           <a:bodyPr wrap="square" lIns="0" tIns="0" rIns="0" bIns="0" rtlCol="0" anchor="ctr"/>
           <a:lstStyle/>
           <a:p>
-            <a:pPr algn="r" indent="0" marL="0">
+            <a:pPr marL="0" indent="0" algn="r">
               <a:buNone/>
             </a:pPr>
             <a:r>
@@ -2986,6 +2698,7 @@
         <a:solidFill>
           <a:srgbClr val="FFFFFF"/>
         </a:solidFill>
+        <a:effectLst/>
       </p:bgPr>
     </p:bg>
     <p:spTree>
@@ -3023,11 +2736,11 @@
           <a:bodyPr wrap="square" lIns="0" tIns="0" rIns="0" bIns="0" rtlCol="0" anchor="ctr"/>
           <a:lstStyle/>
           <a:p>
-            <a:pPr indent="0" marL="0">
-              <a:buNone/>
-            </a:pPr>
-            <a:r>
-              <a:rPr lang="en-US" sz="1100" b="1" spc="400" kern="0" dirty="0">
+            <a:pPr marL="0" indent="0">
+              <a:buNone/>
+            </a:pPr>
+            <a:r>
+              <a:rPr lang="en-US" sz="1100" b="1" kern="0" spc="400" dirty="0">
                 <a:solidFill>
                   <a:srgbClr val="1C7293"/>
                 </a:solidFill>
@@ -3062,7 +2775,7 @@
           <a:bodyPr wrap="square" lIns="0" tIns="0" rIns="0" bIns="0" rtlCol="0" anchor="ctr"/>
           <a:lstStyle/>
           <a:p>
-            <a:pPr indent="0" marL="0">
+            <a:pPr marL="0" indent="0">
               <a:buNone/>
             </a:pPr>
             <a:r>
@@ -3104,6 +2817,13 @@
             <a:prstDash val="solid"/>
           </a:ln>
         </p:spPr>
+        <p:txBody>
+          <a:bodyPr/>
+          <a:lstStyle/>
+          <a:p>
+            <a:endParaRPr lang="en-US"/>
+          </a:p>
+        </p:txBody>
       </p:sp>
       <p:sp>
         <p:nvSpPr>
@@ -3129,6 +2849,13 @@
             <a:prstDash val="solid"/>
           </a:ln>
         </p:spPr>
+        <p:txBody>
+          <a:bodyPr/>
+          <a:lstStyle/>
+          <a:p>
+            <a:endParaRPr lang="en-US"/>
+          </a:p>
+        </p:txBody>
       </p:sp>
       <p:sp>
         <p:nvSpPr>
@@ -3151,7 +2878,7 @@
           <a:bodyPr wrap="square" lIns="0" tIns="0" rIns="0" bIns="0" rtlCol="0" anchor="ctr"/>
           <a:lstStyle/>
           <a:p>
-            <a:pPr algn="ctr" indent="0" marL="0">
+            <a:pPr marL="0" indent="0" algn="ctr">
               <a:buNone/>
             </a:pPr>
             <a:r>
@@ -3190,7 +2917,7 @@
           <a:bodyPr wrap="square" lIns="0" tIns="0" rIns="0" bIns="0" rtlCol="0" anchor="ctr"/>
           <a:lstStyle/>
           <a:p>
-            <a:pPr indent="0" marL="0">
+            <a:pPr marL="0" indent="0">
               <a:buNone/>
             </a:pPr>
             <a:r>
@@ -3232,6 +2959,13 @@
             <a:prstDash val="solid"/>
           </a:ln>
         </p:spPr>
+        <p:txBody>
+          <a:bodyPr/>
+          <a:lstStyle/>
+          <a:p>
+            <a:endParaRPr lang="en-US"/>
+          </a:p>
+        </p:txBody>
       </p:sp>
       <p:sp>
         <p:nvSpPr>
@@ -3254,7 +2988,7 @@
           <a:bodyPr wrap="square" lIns="0" tIns="0" rIns="0" bIns="0" rtlCol="0" anchor="ctr"/>
           <a:lstStyle/>
           <a:p>
-            <a:pPr algn="ctr" indent="0" marL="0">
+            <a:pPr marL="0" indent="0" algn="ctr">
               <a:buNone/>
             </a:pPr>
             <a:r>
@@ -3293,7 +3027,7 @@
           <a:bodyPr wrap="square" lIns="0" tIns="0" rIns="0" bIns="0" rtlCol="0" anchor="ctr"/>
           <a:lstStyle/>
           <a:p>
-            <a:pPr indent="0" marL="0">
+            <a:pPr marL="0" indent="0">
               <a:buNone/>
             </a:pPr>
             <a:r>
@@ -3335,6 +3069,13 @@
             <a:prstDash val="solid"/>
           </a:ln>
         </p:spPr>
+        <p:txBody>
+          <a:bodyPr/>
+          <a:lstStyle/>
+          <a:p>
+            <a:endParaRPr lang="en-US"/>
+          </a:p>
+        </p:txBody>
       </p:sp>
       <p:sp>
         <p:nvSpPr>
@@ -3357,7 +3098,7 @@
           <a:bodyPr wrap="square" lIns="0" tIns="0" rIns="0" bIns="0" rtlCol="0" anchor="ctr"/>
           <a:lstStyle/>
           <a:p>
-            <a:pPr algn="ctr" indent="0" marL="0">
+            <a:pPr marL="0" indent="0" algn="ctr">
               <a:buNone/>
             </a:pPr>
             <a:r>
@@ -3396,7 +3137,7 @@
           <a:bodyPr wrap="square" lIns="0" tIns="0" rIns="0" bIns="0" rtlCol="0" anchor="ctr"/>
           <a:lstStyle/>
           <a:p>
-            <a:pPr indent="0" marL="0">
+            <a:pPr marL="0" indent="0">
               <a:buNone/>
             </a:pPr>
             <a:r>
@@ -3438,6 +3179,13 @@
             <a:prstDash val="solid"/>
           </a:ln>
         </p:spPr>
+        <p:txBody>
+          <a:bodyPr/>
+          <a:lstStyle/>
+          <a:p>
+            <a:endParaRPr lang="en-US"/>
+          </a:p>
+        </p:txBody>
       </p:sp>
       <p:sp>
         <p:nvSpPr>
@@ -3460,7 +3208,7 @@
           <a:bodyPr wrap="square" lIns="0" tIns="0" rIns="0" bIns="0" rtlCol="0" anchor="ctr"/>
           <a:lstStyle/>
           <a:p>
-            <a:pPr algn="ctr" indent="0" marL="0">
+            <a:pPr marL="0" indent="0" algn="ctr">
               <a:buNone/>
             </a:pPr>
             <a:r>
@@ -3499,7 +3247,7 @@
           <a:bodyPr wrap="square" lIns="0" tIns="0" rIns="0" bIns="0" rtlCol="0" anchor="ctr"/>
           <a:lstStyle/>
           <a:p>
-            <a:pPr indent="0" marL="0">
+            <a:pPr marL="0" indent="0">
               <a:buNone/>
             </a:pPr>
             <a:r>
@@ -3541,6 +3289,13 @@
             <a:prstDash val="solid"/>
           </a:ln>
         </p:spPr>
+        <p:txBody>
+          <a:bodyPr/>
+          <a:lstStyle/>
+          <a:p>
+            <a:endParaRPr lang="en-US"/>
+          </a:p>
+        </p:txBody>
       </p:sp>
       <p:sp>
         <p:nvSpPr>
@@ -3563,7 +3318,7 @@
           <a:bodyPr wrap="square" lIns="0" tIns="0" rIns="0" bIns="0" rtlCol="0" anchor="ctr"/>
           <a:lstStyle/>
           <a:p>
-            <a:pPr algn="ctr" indent="0" marL="0">
+            <a:pPr marL="0" indent="0" algn="ctr">
               <a:buNone/>
             </a:pPr>
             <a:r>
@@ -3602,7 +3357,7 @@
           <a:bodyPr wrap="square" lIns="0" tIns="0" rIns="0" bIns="0" rtlCol="0" anchor="ctr"/>
           <a:lstStyle/>
           <a:p>
-            <a:pPr indent="0" marL="0">
+            <a:pPr marL="0" indent="0">
               <a:buNone/>
             </a:pPr>
             <a:r>
@@ -3644,6 +3399,13 @@
             <a:prstDash val="solid"/>
           </a:ln>
         </p:spPr>
+        <p:txBody>
+          <a:bodyPr/>
+          <a:lstStyle/>
+          <a:p>
+            <a:endParaRPr lang="en-US"/>
+          </a:p>
+        </p:txBody>
       </p:sp>
       <p:sp>
         <p:nvSpPr>
@@ -3666,7 +3428,7 @@
           <a:bodyPr wrap="square" lIns="0" tIns="0" rIns="0" bIns="0" rtlCol="0" anchor="ctr"/>
           <a:lstStyle/>
           <a:p>
-            <a:pPr algn="ctr" indent="0" marL="0">
+            <a:pPr marL="0" indent="0" algn="ctr">
               <a:buNone/>
             </a:pPr>
             <a:r>
@@ -3705,7 +3467,7 @@
           <a:bodyPr wrap="square" lIns="0" tIns="0" rIns="0" bIns="0" rtlCol="0" anchor="ctr"/>
           <a:lstStyle/>
           <a:p>
-            <a:pPr indent="0" marL="0">
+            <a:pPr marL="0" indent="0">
               <a:buNone/>
             </a:pPr>
             <a:r>
@@ -3747,6 +3509,13 @@
             <a:prstDash val="solid"/>
           </a:ln>
         </p:spPr>
+        <p:txBody>
+          <a:bodyPr/>
+          <a:lstStyle/>
+          <a:p>
+            <a:endParaRPr lang="en-US"/>
+          </a:p>
+        </p:txBody>
       </p:sp>
       <p:sp>
         <p:nvSpPr>
@@ -3769,7 +3538,7 @@
           <a:bodyPr wrap="square" lIns="0" tIns="0" rIns="0" bIns="0" rtlCol="0" anchor="ctr"/>
           <a:lstStyle/>
           <a:p>
-            <a:pPr algn="ctr" indent="0" marL="0">
+            <a:pPr marL="0" indent="0" algn="ctr">
               <a:buNone/>
             </a:pPr>
             <a:r>
@@ -3808,7 +3577,7 @@
           <a:bodyPr wrap="square" lIns="0" tIns="0" rIns="0" bIns="0" rtlCol="0" anchor="ctr"/>
           <a:lstStyle/>
           <a:p>
-            <a:pPr indent="0" marL="0">
+            <a:pPr marL="0" indent="0">
               <a:buNone/>
             </a:pPr>
             <a:r>
@@ -3850,6 +3619,13 @@
             <a:prstDash val="solid"/>
           </a:ln>
         </p:spPr>
+        <p:txBody>
+          <a:bodyPr/>
+          <a:lstStyle/>
+          <a:p>
+            <a:endParaRPr lang="en-US"/>
+          </a:p>
+        </p:txBody>
       </p:sp>
       <p:sp>
         <p:nvSpPr>
@@ -3872,7 +3648,7 @@
           <a:bodyPr wrap="square" lIns="0" tIns="0" rIns="0" bIns="0" rtlCol="0" anchor="ctr"/>
           <a:lstStyle/>
           <a:p>
-            <a:pPr algn="ctr" indent="0" marL="0">
+            <a:pPr marL="0" indent="0" algn="ctr">
               <a:buNone/>
             </a:pPr>
             <a:r>
@@ -3911,7 +3687,7 @@
           <a:bodyPr wrap="square" lIns="0" tIns="0" rIns="0" bIns="0" rtlCol="0" anchor="ctr"/>
           <a:lstStyle/>
           <a:p>
-            <a:pPr indent="0" marL="0">
+            <a:pPr marL="0" indent="0">
               <a:buNone/>
             </a:pPr>
             <a:r>
@@ -3953,6 +3729,13 @@
             <a:prstDash val="solid"/>
           </a:ln>
         </p:spPr>
+        <p:txBody>
+          <a:bodyPr/>
+          <a:lstStyle/>
+          <a:p>
+            <a:endParaRPr lang="en-US"/>
+          </a:p>
+        </p:txBody>
       </p:sp>
       <p:sp>
         <p:nvSpPr>
@@ -3975,7 +3758,7 @@
           <a:bodyPr wrap="square" lIns="0" tIns="0" rIns="0" bIns="0" rtlCol="0" anchor="ctr"/>
           <a:lstStyle/>
           <a:p>
-            <a:pPr algn="ctr" indent="0" marL="0">
+            <a:pPr marL="0" indent="0" algn="ctr">
               <a:buNone/>
             </a:pPr>
             <a:r>
@@ -4014,7 +3797,7 @@
           <a:bodyPr wrap="square" lIns="0" tIns="0" rIns="0" bIns="0" rtlCol="0" anchor="ctr"/>
           <a:lstStyle/>
           <a:p>
-            <a:pPr indent="0" marL="0">
+            <a:pPr marL="0" indent="0">
               <a:buNone/>
             </a:pPr>
             <a:r>
@@ -4053,7 +3836,7 @@
           <a:bodyPr wrap="square" lIns="0" tIns="0" rIns="0" bIns="0" rtlCol="0" anchor="ctr"/>
           <a:lstStyle/>
           <a:p>
-            <a:pPr algn="l" indent="0" marL="0">
+            <a:pPr marL="0" indent="0" algn="l">
               <a:buNone/>
             </a:pPr>
             <a:r>
@@ -4092,7 +3875,7 @@
           <a:bodyPr wrap="square" lIns="0" tIns="0" rIns="0" bIns="0" rtlCol="0" anchor="ctr"/>
           <a:lstStyle/>
           <a:p>
-            <a:pPr algn="r" indent="0" marL="0">
+            <a:pPr marL="0" indent="0" algn="r">
               <a:buNone/>
             </a:pPr>
             <a:r>
@@ -4126,6 +3909,7 @@
         <a:solidFill>
           <a:srgbClr val="FFFFFF"/>
         </a:solidFill>
+        <a:effectLst/>
       </p:bgPr>
     </p:bg>
     <p:spTree>
@@ -4163,11 +3947,11 @@
           <a:bodyPr wrap="square" lIns="0" tIns="0" rIns="0" bIns="0" rtlCol="0" anchor="ctr"/>
           <a:lstStyle/>
           <a:p>
-            <a:pPr indent="0" marL="0">
-              <a:buNone/>
-            </a:pPr>
-            <a:r>
-              <a:rPr lang="en-US" sz="1100" b="1" spc="400" kern="0" dirty="0">
+            <a:pPr marL="0" indent="0">
+              <a:buNone/>
+            </a:pPr>
+            <a:r>
+              <a:rPr lang="en-US" sz="1100" b="1" kern="0" spc="400" dirty="0">
                 <a:solidFill>
                   <a:srgbClr val="1C7293"/>
                 </a:solidFill>
@@ -4202,7 +3986,7 @@
           <a:bodyPr wrap="square" lIns="0" tIns="0" rIns="0" bIns="0" rtlCol="0" anchor="ctr"/>
           <a:lstStyle/>
           <a:p>
-            <a:pPr indent="0" marL="0">
+            <a:pPr marL="0" indent="0">
               <a:buNone/>
             </a:pPr>
             <a:r>
@@ -4222,15 +4006,15 @@
       </p:sp>
       <p:pic>
         <p:nvPicPr>
-          <p:cNvPr id="4" name="Image 0" descr="/sessions/intelligent-practical-clarke/mnt/Einsatz von Geodaten in Marketing/reports/figures/score_map.png">    </p:cNvPr>
+          <p:cNvPr id="4" name="Image 0" descr="/sessions/intelligent-practical-clarke/mnt/Einsatz von Geodaten in Marketing/reports/figures/score_map.png"/>
           <p:cNvPicPr>
             <a:picLocks noChangeAspect="1"/>
           </p:cNvPicPr>
           <p:nvPr/>
         </p:nvPicPr>
         <p:blipFill>
-          <a:blip r:embed="rId1"/>
-          <a:srcRect l="0" r="0" t="0" b="0"/>
+          <a:blip r:embed="rId3"/>
+          <a:srcRect/>
           <a:stretch/>
         </p:blipFill>
         <p:spPr>
@@ -4267,13 +4051,20 @@
             <a:prstDash val="solid"/>
           </a:ln>
           <a:effectLst>
-            <a:outerShdw sx="100000" sy="100000" kx="0" ky="0" algn="bl" rotWithShape="0" blurRad="101600" dist="12700" dir="5400000">
+            <a:outerShdw blurRad="101600" dist="12700" dir="5400000" algn="bl" rotWithShape="0">
               <a:srgbClr val="94A3B8">
                 <a:alpha val="12000"/>
               </a:srgbClr>
             </a:outerShdw>
           </a:effectLst>
         </p:spPr>
+        <p:txBody>
+          <a:bodyPr/>
+          <a:lstStyle/>
+          <a:p>
+            <a:endParaRPr lang="en-US"/>
+          </a:p>
+        </p:txBody>
       </p:sp>
       <p:sp>
         <p:nvSpPr>
@@ -4299,6 +4090,13 @@
             <a:prstDash val="solid"/>
           </a:ln>
         </p:spPr>
+        <p:txBody>
+          <a:bodyPr/>
+          <a:lstStyle/>
+          <a:p>
+            <a:endParaRPr lang="en-US"/>
+          </a:p>
+        </p:txBody>
       </p:sp>
       <p:sp>
         <p:nvSpPr>
@@ -4321,7 +4119,7 @@
           <a:bodyPr wrap="square" lIns="0" tIns="0" rIns="0" bIns="0" rtlCol="0" anchor="ctr"/>
           <a:lstStyle/>
           <a:p>
-            <a:pPr indent="0" marL="0">
+            <a:pPr marL="0" indent="0">
               <a:buNone/>
             </a:pPr>
             <a:r>
@@ -4360,7 +4158,7 @@
           <a:bodyPr wrap="square" lIns="0" tIns="0" rIns="0" bIns="0" rtlCol="0" anchor="ctr"/>
           <a:lstStyle/>
           <a:p>
-            <a:pPr indent="0" marL="0">
+            <a:pPr marL="0" indent="0">
               <a:buNone/>
             </a:pPr>
             <a:r>
@@ -4377,7 +4175,7 @@
             <a:endParaRPr lang="en-US" sz="1050" dirty="0"/>
           </a:p>
           <a:p>
-            <a:pPr indent="0" marL="0">
+            <a:pPr marL="0" indent="0">
               <a:buNone/>
             </a:pPr>
             <a:r>
@@ -4394,7 +4192,7 @@
             <a:endParaRPr lang="en-US" sz="1050" dirty="0"/>
           </a:p>
           <a:p>
-            <a:pPr indent="0" marL="0">
+            <a:pPr marL="0" indent="0">
               <a:buNone/>
             </a:pPr>
             <a:r>
@@ -4411,7 +4209,7 @@
             <a:endParaRPr lang="en-US" sz="1050" dirty="0"/>
           </a:p>
           <a:p>
-            <a:pPr indent="0" marL="0">
+            <a:pPr marL="0" indent="0">
               <a:buNone/>
             </a:pPr>
             <a:r>
@@ -4428,7 +4226,7 @@
             <a:endParaRPr lang="en-US" sz="1050" dirty="0"/>
           </a:p>
           <a:p>
-            <a:pPr indent="0" marL="0">
+            <a:pPr marL="0" indent="0">
               <a:buNone/>
             </a:pPr>
             <a:r>
@@ -4445,7 +4243,7 @@
             <a:endParaRPr lang="en-US" sz="1050" dirty="0"/>
           </a:p>
           <a:p>
-            <a:pPr indent="0" marL="0">
+            <a:pPr marL="0" indent="0">
               <a:buNone/>
             </a:pPr>
             <a:r>
@@ -4462,7 +4260,7 @@
             <a:endParaRPr lang="en-US" sz="1050" dirty="0"/>
           </a:p>
           <a:p>
-            <a:pPr indent="0" marL="0">
+            <a:pPr marL="0" indent="0">
               <a:buNone/>
             </a:pPr>
             <a:r>
@@ -4479,7 +4277,7 @@
             <a:endParaRPr lang="en-US" sz="1050" dirty="0"/>
           </a:p>
           <a:p>
-            <a:pPr indent="0" marL="0">
+            <a:pPr marL="0" indent="0">
               <a:buNone/>
             </a:pPr>
             <a:r>
@@ -4518,7 +4316,7 @@
           <a:bodyPr wrap="square" lIns="0" tIns="0" rIns="0" bIns="0" rtlCol="0" anchor="ctr"/>
           <a:lstStyle/>
           <a:p>
-            <a:pPr algn="l" indent="0" marL="0">
+            <a:pPr marL="0" indent="0" algn="l">
               <a:buNone/>
             </a:pPr>
             <a:r>
@@ -4557,7 +4355,7 @@
           <a:bodyPr wrap="square" lIns="0" tIns="0" rIns="0" bIns="0" rtlCol="0" anchor="ctr"/>
           <a:lstStyle/>
           <a:p>
-            <a:pPr algn="r" indent="0" marL="0">
+            <a:pPr marL="0" indent="0" algn="r">
               <a:buNone/>
             </a:pPr>
             <a:r>
@@ -4591,6 +4389,7 @@
         <a:solidFill>
           <a:srgbClr val="FFFFFF"/>
         </a:solidFill>
+        <a:effectLst/>
       </p:bgPr>
     </p:bg>
     <p:spTree>
@@ -4628,11 +4427,11 @@
           <a:bodyPr wrap="square" lIns="0" tIns="0" rIns="0" bIns="0" rtlCol="0" anchor="ctr"/>
           <a:lstStyle/>
           <a:p>
-            <a:pPr indent="0" marL="0">
-              <a:buNone/>
-            </a:pPr>
-            <a:r>
-              <a:rPr lang="en-US" sz="1100" b="1" spc="400" kern="0" dirty="0">
+            <a:pPr marL="0" indent="0">
+              <a:buNone/>
+            </a:pPr>
+            <a:r>
+              <a:rPr lang="en-US" sz="1100" b="1" kern="0" spc="400" dirty="0">
                 <a:solidFill>
                   <a:srgbClr val="1C7293"/>
                 </a:solidFill>
@@ -4667,7 +4466,7 @@
           <a:bodyPr wrap="square" lIns="0" tIns="0" rIns="0" bIns="0" rtlCol="0" anchor="ctr"/>
           <a:lstStyle/>
           <a:p>
-            <a:pPr indent="0" marL="0">
+            <a:pPr marL="0" indent="0">
               <a:buNone/>
             </a:pPr>
             <a:r>
@@ -4687,15 +4486,15 @@
       </p:sp>
       <p:pic>
         <p:nvPicPr>
-          <p:cNvPr id="4" name="Image 0" descr="/sessions/intelligent-practical-clarke/mnt/Einsatz von Geodaten in Marketing/reports/figures/qgis_3d_score.png">    </p:cNvPr>
+          <p:cNvPr id="4" name="Image 0" descr="/sessions/intelligent-practical-clarke/mnt/Einsatz von Geodaten in Marketing/reports/figures/qgis_3d_score.png"/>
           <p:cNvPicPr>
             <a:picLocks noChangeAspect="1"/>
           </p:cNvPicPr>
           <p:nvPr/>
         </p:nvPicPr>
         <p:blipFill>
-          <a:blip r:embed="rId1"/>
-          <a:srcRect l="0" r="0" t="0" b="0"/>
+          <a:blip r:embed="rId3"/>
+          <a:srcRect/>
           <a:stretch/>
         </p:blipFill>
         <p:spPr>
@@ -4732,13 +4531,20 @@
             <a:prstDash val="solid"/>
           </a:ln>
           <a:effectLst>
-            <a:outerShdw sx="100000" sy="100000" kx="0" ky="0" algn="bl" rotWithShape="0" blurRad="101600" dist="12700" dir="5400000">
+            <a:outerShdw blurRad="101600" dist="12700" dir="5400000" algn="bl" rotWithShape="0">
               <a:srgbClr val="94A3B8">
                 <a:alpha val="12000"/>
               </a:srgbClr>
             </a:outerShdw>
           </a:effectLst>
         </p:spPr>
+        <p:txBody>
+          <a:bodyPr/>
+          <a:lstStyle/>
+          <a:p>
+            <a:endParaRPr lang="en-US"/>
+          </a:p>
+        </p:txBody>
       </p:sp>
       <p:sp>
         <p:nvSpPr>
@@ -4764,6 +4570,13 @@
             <a:prstDash val="solid"/>
           </a:ln>
         </p:spPr>
+        <p:txBody>
+          <a:bodyPr/>
+          <a:lstStyle/>
+          <a:p>
+            <a:endParaRPr lang="en-US"/>
+          </a:p>
+        </p:txBody>
       </p:sp>
       <p:sp>
         <p:nvSpPr>
@@ -4786,7 +4599,7 @@
           <a:bodyPr wrap="square" lIns="0" tIns="0" rIns="0" bIns="0" rtlCol="0" anchor="ctr"/>
           <a:lstStyle/>
           <a:p>
-            <a:pPr indent="0" marL="0">
+            <a:pPr marL="0" indent="0">
               <a:buNone/>
             </a:pPr>
             <a:r>
@@ -4825,7 +4638,7 @@
           <a:bodyPr wrap="square" lIns="0" tIns="0" rIns="0" bIns="0" rtlCol="0" anchor="ctr"/>
           <a:lstStyle/>
           <a:p>
-            <a:pPr indent="0" marL="0">
+            <a:pPr marL="0" indent="0">
               <a:buNone/>
             </a:pPr>
             <a:r>
@@ -4842,7 +4655,7 @@
             <a:endParaRPr lang="en-US" sz="1050" dirty="0"/>
           </a:p>
           <a:p>
-            <a:pPr indent="0" marL="0">
+            <a:pPr marL="0" indent="0">
               <a:buNone/>
             </a:pPr>
             <a:r>
@@ -4859,7 +4672,7 @@
             <a:endParaRPr lang="en-US" sz="1050" dirty="0"/>
           </a:p>
           <a:p>
-            <a:pPr indent="0" marL="0">
+            <a:pPr marL="0" indent="0">
               <a:buNone/>
             </a:pPr>
             <a:r>
@@ -4876,7 +4689,7 @@
             <a:endParaRPr lang="en-US" sz="1050" dirty="0"/>
           </a:p>
           <a:p>
-            <a:pPr indent="0" marL="0">
+            <a:pPr marL="0" indent="0">
               <a:buNone/>
             </a:pPr>
             <a:r>
@@ -4893,7 +4706,7 @@
             <a:endParaRPr lang="en-US" sz="1050" dirty="0"/>
           </a:p>
           <a:p>
-            <a:pPr indent="0" marL="0">
+            <a:pPr marL="0" indent="0">
               <a:buNone/>
             </a:pPr>
             <a:r>
@@ -4910,7 +4723,7 @@
             <a:endParaRPr lang="en-US" sz="1050" dirty="0"/>
           </a:p>
           <a:p>
-            <a:pPr indent="0" marL="0">
+            <a:pPr marL="0" indent="0">
               <a:buNone/>
             </a:pPr>
             <a:r>
@@ -4927,7 +4740,7 @@
             <a:endParaRPr lang="en-US" sz="1050" dirty="0"/>
           </a:p>
           <a:p>
-            <a:pPr indent="0" marL="0">
+            <a:pPr marL="0" indent="0">
               <a:buNone/>
             </a:pPr>
             <a:r>
@@ -4944,7 +4757,7 @@
             <a:endParaRPr lang="en-US" sz="1050" dirty="0"/>
           </a:p>
           <a:p>
-            <a:pPr indent="0" marL="0">
+            <a:pPr marL="0" indent="0">
               <a:buNone/>
             </a:pPr>
             <a:r>
@@ -4983,7 +4796,7 @@
           <a:bodyPr wrap="square" lIns="0" tIns="0" rIns="0" bIns="0" rtlCol="0" anchor="ctr"/>
           <a:lstStyle/>
           <a:p>
-            <a:pPr algn="l" indent="0" marL="0">
+            <a:pPr marL="0" indent="0" algn="l">
               <a:buNone/>
             </a:pPr>
             <a:r>
@@ -5022,7 +4835,7 @@
           <a:bodyPr wrap="square" lIns="0" tIns="0" rIns="0" bIns="0" rtlCol="0" anchor="ctr"/>
           <a:lstStyle/>
           <a:p>
-            <a:pPr algn="r" indent="0" marL="0">
+            <a:pPr marL="0" indent="0" algn="r">
               <a:buNone/>
             </a:pPr>
             <a:r>
@@ -5056,6 +4869,7 @@
         <a:solidFill>
           <a:srgbClr val="FFFFFF"/>
         </a:solidFill>
+        <a:effectLst/>
       </p:bgPr>
     </p:bg>
     <p:spTree>
@@ -5093,11 +4907,11 @@
           <a:bodyPr wrap="square" lIns="0" tIns="0" rIns="0" bIns="0" rtlCol="0" anchor="ctr"/>
           <a:lstStyle/>
           <a:p>
-            <a:pPr indent="0" marL="0">
-              <a:buNone/>
-            </a:pPr>
-            <a:r>
-              <a:rPr lang="en-US" sz="1100" b="1" spc="400" kern="0" dirty="0">
+            <a:pPr marL="0" indent="0">
+              <a:buNone/>
+            </a:pPr>
+            <a:r>
+              <a:rPr lang="en-US" sz="1100" b="1" kern="0" spc="400" dirty="0">
                 <a:solidFill>
                   <a:srgbClr val="1C7293"/>
                 </a:solidFill>
@@ -5132,7 +4946,7 @@
           <a:bodyPr wrap="square" lIns="0" tIns="0" rIns="0" bIns="0" rtlCol="0" anchor="ctr"/>
           <a:lstStyle/>
           <a:p>
-            <a:pPr indent="0" marL="0">
+            <a:pPr marL="0" indent="0">
               <a:buNone/>
             </a:pPr>
             <a:r>
@@ -5152,15 +4966,15 @@
       </p:sp>
       <p:pic>
         <p:nvPicPr>
-          <p:cNvPr id="4" name="Image 0" descr="/sessions/intelligent-practical-clarke/mnt/Einsatz von Geodaten in Marketing/reports/figures/score_flat_vs_topo.png">    </p:cNvPr>
+          <p:cNvPr id="4" name="Image 0" descr="/sessions/intelligent-practical-clarke/mnt/Einsatz von Geodaten in Marketing/reports/figures/score_flat_vs_topo.png"/>
           <p:cNvPicPr>
             <a:picLocks noChangeAspect="1"/>
           </p:cNvPicPr>
           <p:nvPr/>
         </p:nvPicPr>
         <p:blipFill>
-          <a:blip r:embed="rId1"/>
-          <a:srcRect l="0" r="0" t="0" b="0"/>
+          <a:blip r:embed="rId3"/>
+          <a:srcRect/>
           <a:stretch/>
         </p:blipFill>
         <p:spPr>
@@ -5197,13 +5011,20 @@
             <a:prstDash val="solid"/>
           </a:ln>
           <a:effectLst>
-            <a:outerShdw sx="100000" sy="100000" kx="0" ky="0" algn="bl" rotWithShape="0" blurRad="101600" dist="12700" dir="5400000">
+            <a:outerShdw blurRad="101600" dist="12700" dir="5400000" algn="bl" rotWithShape="0">
               <a:srgbClr val="94A3B8">
                 <a:alpha val="12000"/>
               </a:srgbClr>
             </a:outerShdw>
           </a:effectLst>
         </p:spPr>
+        <p:txBody>
+          <a:bodyPr/>
+          <a:lstStyle/>
+          <a:p>
+            <a:endParaRPr lang="en-US"/>
+          </a:p>
+        </p:txBody>
       </p:sp>
       <p:sp>
         <p:nvSpPr>
@@ -5229,6 +5050,13 @@
             <a:prstDash val="solid"/>
           </a:ln>
         </p:spPr>
+        <p:txBody>
+          <a:bodyPr/>
+          <a:lstStyle/>
+          <a:p>
+            <a:endParaRPr lang="en-US"/>
+          </a:p>
+        </p:txBody>
       </p:sp>
       <p:sp>
         <p:nvSpPr>
@@ -5251,7 +5079,7 @@
           <a:bodyPr wrap="square" lIns="0" tIns="0" rIns="0" bIns="0" rtlCol="0" anchor="ctr"/>
           <a:lstStyle/>
           <a:p>
-            <a:pPr indent="0" marL="0">
+            <a:pPr marL="0" indent="0">
               <a:buNone/>
             </a:pPr>
             <a:r>
@@ -5290,7 +5118,7 @@
           <a:bodyPr wrap="square" lIns="0" tIns="0" rIns="0" bIns="0" rtlCol="0" anchor="ctr"/>
           <a:lstStyle/>
           <a:p>
-            <a:pPr indent="0" marL="0">
+            <a:pPr marL="0" indent="0">
               <a:buNone/>
             </a:pPr>
             <a:r>
@@ -5304,9 +5132,6 @@
               </a:rPr>
               <a:t>Oberstrass   </a:t>
             </a:r>
-            <a:pPr indent="0" marL="0">
-              <a:buNone/>
-            </a:pPr>
             <a:r>
               <a:rPr lang="en-US" sz="950" b="1" dirty="0">
                 <a:solidFill>
@@ -5321,7 +5146,7 @@
             <a:endParaRPr lang="en-US" sz="950" dirty="0"/>
           </a:p>
           <a:p>
-            <a:pPr indent="0" marL="0">
+            <a:pPr marL="0" indent="0">
               <a:buNone/>
             </a:pPr>
             <a:r>
@@ -5335,9 +5160,6 @@
               </a:rPr>
               <a:t>Fluntern     </a:t>
             </a:r>
-            <a:pPr indent="0" marL="0">
-              <a:buNone/>
-            </a:pPr>
             <a:r>
               <a:rPr lang="en-US" sz="950" b="1" dirty="0">
                 <a:solidFill>
@@ -5352,7 +5174,7 @@
             <a:endParaRPr lang="en-US" sz="950" dirty="0"/>
           </a:p>
           <a:p>
-            <a:pPr indent="0" marL="0">
+            <a:pPr marL="0" indent="0">
               <a:buNone/>
             </a:pPr>
             <a:r>
@@ -5366,9 +5188,6 @@
               </a:rPr>
               <a:t>Gewerbeschule </a:t>
             </a:r>
-            <a:pPr indent="0" marL="0">
-              <a:buNone/>
-            </a:pPr>
             <a:r>
               <a:rPr lang="en-US" sz="950" b="1" dirty="0">
                 <a:solidFill>
@@ -5383,7 +5202,7 @@
             <a:endParaRPr lang="en-US" sz="950" dirty="0"/>
           </a:p>
           <a:p>
-            <a:pPr indent="0" marL="0">
+            <a:pPr marL="0" indent="0">
               <a:buNone/>
             </a:pPr>
             <a:r>
@@ -5397,9 +5216,6 @@
               </a:rPr>
               <a:t>Alt-Wiedikon </a:t>
             </a:r>
-            <a:pPr indent="0" marL="0">
-              <a:buNone/>
-            </a:pPr>
             <a:r>
               <a:rPr lang="en-US" sz="950" b="1" dirty="0">
                 <a:solidFill>
@@ -5414,7 +5230,7 @@
             <a:endParaRPr lang="en-US" sz="950" dirty="0"/>
           </a:p>
           <a:p>
-            <a:pPr indent="0" marL="0">
+            <a:pPr marL="0" indent="0">
               <a:buNone/>
             </a:pPr>
             <a:r>
@@ -5428,9 +5244,6 @@
               </a:rPr>
               <a:t>Wipkingen    </a:t>
             </a:r>
-            <a:pPr indent="0" marL="0">
-              <a:buNone/>
-            </a:pPr>
             <a:r>
               <a:rPr lang="en-US" sz="950" b="1" dirty="0">
                 <a:solidFill>
@@ -5467,7 +5280,7 @@
           <a:bodyPr wrap="square" lIns="0" tIns="0" rIns="0" bIns="0" rtlCol="0" anchor="ctr"/>
           <a:lstStyle/>
           <a:p>
-            <a:pPr indent="0" marL="0">
+            <a:pPr marL="0" indent="0">
               <a:buNone/>
             </a:pPr>
             <a:r>
@@ -5506,7 +5319,7 @@
           <a:bodyPr wrap="square" lIns="0" tIns="0" rIns="0" bIns="0" rtlCol="0" anchor="ctr"/>
           <a:lstStyle/>
           <a:p>
-            <a:pPr indent="0" marL="0">
+            <a:pPr marL="0" indent="0">
               <a:buNone/>
             </a:pPr>
             <a:r>
@@ -5520,9 +5333,6 @@
               </a:rPr>
               <a:t>Mühlebach    </a:t>
             </a:r>
-            <a:pPr indent="0" marL="0">
-              <a:buNone/>
-            </a:pPr>
             <a:r>
               <a:rPr lang="en-US" sz="950" b="1" dirty="0">
                 <a:solidFill>
@@ -5537,7 +5347,7 @@
             <a:endParaRPr lang="en-US" sz="950" dirty="0"/>
           </a:p>
           <a:p>
-            <a:pPr indent="0" marL="0">
+            <a:pPr marL="0" indent="0">
               <a:buNone/>
             </a:pPr>
             <a:r>
@@ -5551,9 +5361,6 @@
               </a:rPr>
               <a:t>Seefeld      </a:t>
             </a:r>
-            <a:pPr indent="0" marL="0">
-              <a:buNone/>
-            </a:pPr>
             <a:r>
               <a:rPr lang="en-US" sz="950" b="1" dirty="0">
                 <a:solidFill>
@@ -5568,7 +5375,7 @@
             <a:endParaRPr lang="en-US" sz="950" dirty="0"/>
           </a:p>
           <a:p>
-            <a:pPr indent="0" marL="0">
+            <a:pPr marL="0" indent="0">
               <a:buNone/>
             </a:pPr>
             <a:r>
@@ -5582,9 +5389,6 @@
               </a:rPr>
               <a:t>Oerlikon     </a:t>
             </a:r>
-            <a:pPr indent="0" marL="0">
-              <a:buNone/>
-            </a:pPr>
             <a:r>
               <a:rPr lang="en-US" sz="950" b="1" dirty="0">
                 <a:solidFill>
@@ -5599,7 +5403,7 @@
             <a:endParaRPr lang="en-US" sz="950" dirty="0"/>
           </a:p>
           <a:p>
-            <a:pPr indent="0" marL="0">
+            <a:pPr marL="0" indent="0">
               <a:buNone/>
             </a:pPr>
             <a:r>
@@ -5613,9 +5417,6 @@
               </a:rPr>
               <a:t>Werd         </a:t>
             </a:r>
-            <a:pPr indent="0" marL="0">
-              <a:buNone/>
-            </a:pPr>
             <a:r>
               <a:rPr lang="en-US" sz="950" b="1" dirty="0">
                 <a:solidFill>
@@ -5630,7 +5431,7 @@
             <a:endParaRPr lang="en-US" sz="950" dirty="0"/>
           </a:p>
           <a:p>
-            <a:pPr indent="0" marL="0">
+            <a:pPr marL="0" indent="0">
               <a:buNone/>
             </a:pPr>
             <a:r>
@@ -5644,9 +5445,6 @@
               </a:rPr>
               <a:t>Sihlfeld     </a:t>
             </a:r>
-            <a:pPr indent="0" marL="0">
-              <a:buNone/>
-            </a:pPr>
             <a:r>
               <a:rPr lang="en-US" sz="950" b="1" dirty="0">
                 <a:solidFill>
@@ -5686,13 +5484,20 @@
             <a:prstDash val="solid"/>
           </a:ln>
           <a:effectLst>
-            <a:outerShdw sx="100000" sy="100000" kx="0" ky="0" algn="bl" rotWithShape="0" blurRad="101600" dist="12700" dir="5400000">
+            <a:outerShdw blurRad="101600" dist="12700" dir="5400000" algn="bl" rotWithShape="0">
               <a:srgbClr val="94A3B8">
                 <a:alpha val="12000"/>
               </a:srgbClr>
             </a:outerShdw>
           </a:effectLst>
         </p:spPr>
+        <p:txBody>
+          <a:bodyPr/>
+          <a:lstStyle/>
+          <a:p>
+            <a:endParaRPr lang="en-US"/>
+          </a:p>
+        </p:txBody>
       </p:sp>
       <p:sp>
         <p:nvSpPr>
@@ -5718,6 +5523,13 @@
             <a:prstDash val="solid"/>
           </a:ln>
         </p:spPr>
+        <p:txBody>
+          <a:bodyPr/>
+          <a:lstStyle/>
+          <a:p>
+            <a:endParaRPr lang="en-US"/>
+          </a:p>
+        </p:txBody>
       </p:sp>
       <p:sp>
         <p:nvSpPr>
@@ -5740,7 +5552,7 @@
           <a:bodyPr wrap="square" lIns="0" tIns="0" rIns="0" bIns="0" rtlCol="0" anchor="ctr"/>
           <a:lstStyle/>
           <a:p>
-            <a:pPr indent="0" marL="0">
+            <a:pPr marL="0" indent="0">
               <a:buNone/>
             </a:pPr>
             <a:r>
@@ -5779,7 +5591,7 @@
           <a:bodyPr wrap="square" lIns="0" tIns="0" rIns="0" bIns="0" rtlCol="0" anchor="ctr"/>
           <a:lstStyle/>
           <a:p>
-            <a:pPr indent="0" marL="0">
+            <a:pPr marL="0" indent="0">
               <a:buNone/>
             </a:pPr>
             <a:r>
@@ -5796,7 +5608,7 @@
             <a:endParaRPr lang="en-US" sz="1000" dirty="0"/>
           </a:p>
           <a:p>
-            <a:pPr indent="0" marL="0">
+            <a:pPr marL="0" indent="0">
               <a:buNone/>
             </a:pPr>
             <a:r>
@@ -5813,7 +5625,7 @@
             <a:endParaRPr lang="en-US" sz="1000" dirty="0"/>
           </a:p>
           <a:p>
-            <a:pPr indent="0" marL="0">
+            <a:pPr marL="0" indent="0">
               <a:buNone/>
             </a:pPr>
             <a:r>
@@ -5830,7 +5642,7 @@
             <a:endParaRPr lang="en-US" sz="1000" dirty="0"/>
           </a:p>
           <a:p>
-            <a:pPr indent="0" marL="0">
+            <a:pPr marL="0" indent="0">
               <a:buNone/>
             </a:pPr>
             <a:r>
@@ -5847,7 +5659,7 @@
             <a:endParaRPr lang="en-US" sz="1000" dirty="0"/>
           </a:p>
           <a:p>
-            <a:pPr indent="0" marL="0">
+            <a:pPr marL="0" indent="0">
               <a:buNone/>
             </a:pPr>
             <a:r>
@@ -5864,7 +5676,7 @@
             <a:endParaRPr lang="en-US" sz="1000" dirty="0"/>
           </a:p>
           <a:p>
-            <a:pPr indent="0" marL="0">
+            <a:pPr marL="0" indent="0">
               <a:buNone/>
             </a:pPr>
             <a:r>
@@ -5881,7 +5693,7 @@
             <a:endParaRPr lang="en-US" sz="1000" dirty="0"/>
           </a:p>
           <a:p>
-            <a:pPr indent="0" marL="0">
+            <a:pPr marL="0" indent="0">
               <a:buNone/>
             </a:pPr>
             <a:r>
@@ -5898,7 +5710,7 @@
             <a:endParaRPr lang="en-US" sz="1000" dirty="0"/>
           </a:p>
           <a:p>
-            <a:pPr indent="0" marL="0">
+            <a:pPr marL="0" indent="0">
               <a:buNone/>
             </a:pPr>
             <a:r>
@@ -5915,7 +5727,7 @@
             <a:endParaRPr lang="en-US" sz="1000" dirty="0"/>
           </a:p>
           <a:p>
-            <a:pPr indent="0" marL="0">
+            <a:pPr marL="0" indent="0">
               <a:buNone/>
             </a:pPr>
             <a:r>
@@ -5954,7 +5766,7 @@
           <a:bodyPr wrap="square" lIns="0" tIns="0" rIns="0" bIns="0" rtlCol="0" anchor="ctr"/>
           <a:lstStyle/>
           <a:p>
-            <a:pPr algn="l" indent="0" marL="0">
+            <a:pPr marL="0" indent="0" algn="l">
               <a:buNone/>
             </a:pPr>
             <a:r>
@@ -5993,7 +5805,7 @@
           <a:bodyPr wrap="square" lIns="0" tIns="0" rIns="0" bIns="0" rtlCol="0" anchor="ctr"/>
           <a:lstStyle/>
           <a:p>
-            <a:pPr algn="r" indent="0" marL="0">
+            <a:pPr marL="0" indent="0" algn="r">
               <a:buNone/>
             </a:pPr>
             <a:r>
@@ -6027,6 +5839,7 @@
         <a:solidFill>
           <a:srgbClr val="FFFFFF"/>
         </a:solidFill>
+        <a:effectLst/>
       </p:bgPr>
     </p:bg>
     <p:spTree>
@@ -6064,11 +5877,11 @@
           <a:bodyPr wrap="square" lIns="0" tIns="0" rIns="0" bIns="0" rtlCol="0" anchor="ctr"/>
           <a:lstStyle/>
           <a:p>
-            <a:pPr indent="0" marL="0">
-              <a:buNone/>
-            </a:pPr>
-            <a:r>
-              <a:rPr lang="en-US" sz="1100" b="1" spc="400" kern="0" dirty="0">
+            <a:pPr marL="0" indent="0">
+              <a:buNone/>
+            </a:pPr>
+            <a:r>
+              <a:rPr lang="en-US" sz="1100" b="1" kern="0" spc="400" dirty="0">
                 <a:solidFill>
                   <a:srgbClr val="1C7293"/>
                 </a:solidFill>
@@ -6103,7 +5916,7 @@
           <a:bodyPr wrap="square" lIns="0" tIns="0" rIns="0" bIns="0" rtlCol="0" anchor="ctr"/>
           <a:lstStyle/>
           <a:p>
-            <a:pPr indent="0" marL="0">
+            <a:pPr marL="0" indent="0">
               <a:buNone/>
             </a:pPr>
             <a:r>
@@ -6145,13 +5958,20 @@
             <a:prstDash val="solid"/>
           </a:ln>
           <a:effectLst>
-            <a:outerShdw sx="100000" sy="100000" kx="0" ky="0" algn="bl" rotWithShape="0" blurRad="101600" dist="12700" dir="5400000">
+            <a:outerShdw blurRad="101600" dist="12700" dir="5400000" algn="bl" rotWithShape="0">
               <a:srgbClr val="94A3B8">
                 <a:alpha val="12000"/>
               </a:srgbClr>
             </a:outerShdw>
           </a:effectLst>
         </p:spPr>
+        <p:txBody>
+          <a:bodyPr/>
+          <a:lstStyle/>
+          <a:p>
+            <a:endParaRPr lang="en-US"/>
+          </a:p>
+        </p:txBody>
       </p:sp>
       <p:sp>
         <p:nvSpPr>
@@ -6177,6 +5997,13 @@
             <a:prstDash val="solid"/>
           </a:ln>
         </p:spPr>
+        <p:txBody>
+          <a:bodyPr/>
+          <a:lstStyle/>
+          <a:p>
+            <a:endParaRPr lang="en-US"/>
+          </a:p>
+        </p:txBody>
       </p:sp>
       <p:sp>
         <p:nvSpPr>
@@ -6199,7 +6026,7 @@
           <a:bodyPr wrap="square" lIns="0" tIns="0" rIns="0" bIns="0" rtlCol="0" anchor="ctr"/>
           <a:lstStyle/>
           <a:p>
-            <a:pPr indent="0" marL="0">
+            <a:pPr marL="0" indent="0">
               <a:buNone/>
             </a:pPr>
             <a:r>
@@ -6238,7 +6065,7 @@
           <a:bodyPr wrap="square" lIns="0" tIns="0" rIns="0" bIns="0" rtlCol="0" anchor="b"/>
           <a:lstStyle/>
           <a:p>
-            <a:pPr algn="ctr" indent="0" marL="0">
+            <a:pPr marL="0" indent="0" algn="ctr">
               <a:buNone/>
             </a:pPr>
             <a:r>
@@ -6277,7 +6104,7 @@
           <a:bodyPr wrap="square" lIns="0" tIns="0" rIns="0" bIns="0" rtlCol="0" anchor="t"/>
           <a:lstStyle/>
           <a:p>
-            <a:pPr algn="ctr" indent="0" marL="0">
+            <a:pPr marL="0" indent="0" algn="ctr">
               <a:buNone/>
             </a:pPr>
             <a:r>
@@ -6316,7 +6143,7 @@
           <a:bodyPr wrap="square" lIns="0" tIns="0" rIns="0" bIns="0" rtlCol="0" anchor="ctr"/>
           <a:lstStyle/>
           <a:p>
-            <a:pPr indent="0" marL="0">
+            <a:pPr marL="0" indent="0">
               <a:buNone/>
             </a:pPr>
             <a:r>
@@ -6358,13 +6185,20 @@
             <a:prstDash val="solid"/>
           </a:ln>
           <a:effectLst>
-            <a:outerShdw sx="100000" sy="100000" kx="0" ky="0" algn="bl" rotWithShape="0" blurRad="101600" dist="12700" dir="5400000">
+            <a:outerShdw blurRad="101600" dist="12700" dir="5400000" algn="bl" rotWithShape="0">
               <a:srgbClr val="94A3B8">
                 <a:alpha val="12000"/>
               </a:srgbClr>
             </a:outerShdw>
           </a:effectLst>
         </p:spPr>
+        <p:txBody>
+          <a:bodyPr/>
+          <a:lstStyle/>
+          <a:p>
+            <a:endParaRPr lang="en-US"/>
+          </a:p>
+        </p:txBody>
       </p:sp>
       <p:sp>
         <p:nvSpPr>
@@ -6390,6 +6224,13 @@
             <a:prstDash val="solid"/>
           </a:ln>
         </p:spPr>
+        <p:txBody>
+          <a:bodyPr/>
+          <a:lstStyle/>
+          <a:p>
+            <a:endParaRPr lang="en-US"/>
+          </a:p>
+        </p:txBody>
       </p:sp>
       <p:sp>
         <p:nvSpPr>
@@ -6412,7 +6253,7 @@
           <a:bodyPr wrap="square" lIns="0" tIns="0" rIns="0" bIns="0" rtlCol="0" anchor="ctr"/>
           <a:lstStyle/>
           <a:p>
-            <a:pPr indent="0" marL="0">
+            <a:pPr marL="0" indent="0">
               <a:buNone/>
             </a:pPr>
             <a:r>
@@ -6451,7 +6292,7 @@
           <a:bodyPr wrap="square" lIns="0" tIns="0" rIns="0" bIns="0" rtlCol="0" anchor="b"/>
           <a:lstStyle/>
           <a:p>
-            <a:pPr algn="ctr" indent="0" marL="0">
+            <a:pPr marL="0" indent="0" algn="ctr">
               <a:buNone/>
             </a:pPr>
             <a:r>
@@ -6490,7 +6331,7 @@
           <a:bodyPr wrap="square" lIns="0" tIns="0" rIns="0" bIns="0" rtlCol="0" anchor="t"/>
           <a:lstStyle/>
           <a:p>
-            <a:pPr algn="ctr" indent="0" marL="0">
+            <a:pPr marL="0" indent="0" algn="ctr">
               <a:buNone/>
             </a:pPr>
             <a:r>
@@ -6529,7 +6370,7 @@
           <a:bodyPr wrap="square" lIns="0" tIns="0" rIns="0" bIns="0" rtlCol="0" anchor="ctr"/>
           <a:lstStyle/>
           <a:p>
-            <a:pPr indent="0" marL="0">
+            <a:pPr marL="0" indent="0">
               <a:buNone/>
             </a:pPr>
             <a:r>
@@ -6571,13 +6412,20 @@
             <a:prstDash val="solid"/>
           </a:ln>
           <a:effectLst>
-            <a:outerShdw sx="100000" sy="100000" kx="0" ky="0" algn="bl" rotWithShape="0" blurRad="101600" dist="12700" dir="5400000">
+            <a:outerShdw blurRad="101600" dist="12700" dir="5400000" algn="bl" rotWithShape="0">
               <a:srgbClr val="94A3B8">
                 <a:alpha val="12000"/>
               </a:srgbClr>
             </a:outerShdw>
           </a:effectLst>
         </p:spPr>
+        <p:txBody>
+          <a:bodyPr/>
+          <a:lstStyle/>
+          <a:p>
+            <a:endParaRPr lang="en-US"/>
+          </a:p>
+        </p:txBody>
       </p:sp>
       <p:sp>
         <p:nvSpPr>
@@ -6603,6 +6451,13 @@
             <a:prstDash val="solid"/>
           </a:ln>
         </p:spPr>
+        <p:txBody>
+          <a:bodyPr/>
+          <a:lstStyle/>
+          <a:p>
+            <a:endParaRPr lang="en-US"/>
+          </a:p>
+        </p:txBody>
       </p:sp>
       <p:sp>
         <p:nvSpPr>
@@ -6625,7 +6480,7 @@
           <a:bodyPr wrap="square" lIns="0" tIns="0" rIns="0" bIns="0" rtlCol="0" anchor="ctr"/>
           <a:lstStyle/>
           <a:p>
-            <a:pPr indent="0" marL="0">
+            <a:pPr marL="0" indent="0">
               <a:buNone/>
             </a:pPr>
             <a:r>
@@ -6664,7 +6519,7 @@
           <a:bodyPr wrap="square" lIns="0" tIns="0" rIns="0" bIns="0" rtlCol="0" anchor="b"/>
           <a:lstStyle/>
           <a:p>
-            <a:pPr algn="ctr" indent="0" marL="0">
+            <a:pPr marL="0" indent="0" algn="ctr">
               <a:buNone/>
             </a:pPr>
             <a:r>
@@ -6703,7 +6558,7 @@
           <a:bodyPr wrap="square" lIns="0" tIns="0" rIns="0" bIns="0" rtlCol="0" anchor="t"/>
           <a:lstStyle/>
           <a:p>
-            <a:pPr algn="ctr" indent="0" marL="0">
+            <a:pPr marL="0" indent="0" algn="ctr">
               <a:buNone/>
             </a:pPr>
             <a:r>
@@ -6742,7 +6597,7 @@
           <a:bodyPr wrap="square" lIns="0" tIns="0" rIns="0" bIns="0" rtlCol="0" anchor="ctr"/>
           <a:lstStyle/>
           <a:p>
-            <a:pPr indent="0" marL="0">
+            <a:pPr marL="0" indent="0">
               <a:buNone/>
             </a:pPr>
             <a:r>
@@ -6781,7 +6636,7 @@
           <a:bodyPr wrap="square" lIns="0" tIns="0" rIns="0" bIns="0" rtlCol="0" anchor="ctr"/>
           <a:lstStyle/>
           <a:p>
-            <a:pPr algn="l" indent="0" marL="0">
+            <a:pPr marL="0" indent="0" algn="l">
               <a:buNone/>
             </a:pPr>
             <a:r>
@@ -6820,7 +6675,7 @@
           <a:bodyPr wrap="square" lIns="0" tIns="0" rIns="0" bIns="0" rtlCol="0" anchor="ctr"/>
           <a:lstStyle/>
           <a:p>
-            <a:pPr algn="r" indent="0" marL="0">
+            <a:pPr marL="0" indent="0" algn="r">
               <a:buNone/>
             </a:pPr>
             <a:r>
@@ -6854,6 +6709,7 @@
         <a:solidFill>
           <a:srgbClr val="FFFFFF"/>
         </a:solidFill>
+        <a:effectLst/>
       </p:bgPr>
     </p:bg>
     <p:spTree>
@@ -6891,11 +6747,11 @@
           <a:bodyPr wrap="square" lIns="0" tIns="0" rIns="0" bIns="0" rtlCol="0" anchor="ctr"/>
           <a:lstStyle/>
           <a:p>
-            <a:pPr indent="0" marL="0">
-              <a:buNone/>
-            </a:pPr>
-            <a:r>
-              <a:rPr lang="en-US" sz="1100" b="1" spc="400" kern="0" dirty="0">
+            <a:pPr marL="0" indent="0">
+              <a:buNone/>
+            </a:pPr>
+            <a:r>
+              <a:rPr lang="en-US" sz="1100" b="1" kern="0" spc="400" dirty="0">
                 <a:solidFill>
                   <a:srgbClr val="1C7293"/>
                 </a:solidFill>
@@ -6930,7 +6786,7 @@
           <a:bodyPr wrap="square" lIns="0" tIns="0" rIns="0" bIns="0" rtlCol="0" anchor="ctr"/>
           <a:lstStyle/>
           <a:p>
-            <a:pPr indent="0" marL="0">
+            <a:pPr marL="0" indent="0">
               <a:buNone/>
             </a:pPr>
             <a:r>
@@ -6972,13 +6828,20 @@
             <a:prstDash val="solid"/>
           </a:ln>
           <a:effectLst>
-            <a:outerShdw sx="100000" sy="100000" kx="0" ky="0" algn="bl" rotWithShape="0" blurRad="101600" dist="12700" dir="5400000">
+            <a:outerShdw blurRad="101600" dist="12700" dir="5400000" algn="bl" rotWithShape="0">
               <a:srgbClr val="94A3B8">
                 <a:alpha val="12000"/>
               </a:srgbClr>
             </a:outerShdw>
           </a:effectLst>
         </p:spPr>
+        <p:txBody>
+          <a:bodyPr/>
+          <a:lstStyle/>
+          <a:p>
+            <a:endParaRPr lang="en-US"/>
+          </a:p>
+        </p:txBody>
       </p:sp>
       <p:sp>
         <p:nvSpPr>
@@ -7004,6 +6867,13 @@
             <a:prstDash val="solid"/>
           </a:ln>
         </p:spPr>
+        <p:txBody>
+          <a:bodyPr/>
+          <a:lstStyle/>
+          <a:p>
+            <a:endParaRPr lang="en-US"/>
+          </a:p>
+        </p:txBody>
       </p:sp>
       <p:sp>
         <p:nvSpPr>
@@ -7026,7 +6896,7 @@
           <a:bodyPr wrap="square" lIns="0" tIns="0" rIns="0" bIns="0" rtlCol="0" anchor="ctr"/>
           <a:lstStyle/>
           <a:p>
-            <a:pPr indent="0" marL="0">
+            <a:pPr marL="0" indent="0">
               <a:buNone/>
             </a:pPr>
             <a:r>
@@ -7065,7 +6935,7 @@
           <a:bodyPr wrap="square" lIns="0" tIns="0" rIns="0" bIns="0" rtlCol="0" anchor="ctr"/>
           <a:lstStyle/>
           <a:p>
-            <a:pPr indent="0" marL="0">
+            <a:pPr marL="0" indent="0">
               <a:buNone/>
             </a:pPr>
             <a:r>
@@ -7107,6 +6977,13 @@
             <a:prstDash val="solid"/>
           </a:ln>
         </p:spPr>
+        <p:txBody>
+          <a:bodyPr/>
+          <a:lstStyle/>
+          <a:p>
+            <a:endParaRPr lang="en-US"/>
+          </a:p>
+        </p:txBody>
       </p:sp>
       <p:sp>
         <p:nvSpPr>
@@ -7129,7 +7006,7 @@
           <a:bodyPr wrap="square" lIns="0" tIns="0" rIns="0" bIns="0" rtlCol="0" anchor="ctr"/>
           <a:lstStyle/>
           <a:p>
-            <a:pPr indent="0" marL="0">
+            <a:pPr marL="0" indent="0">
               <a:buNone/>
             </a:pPr>
             <a:r>
@@ -7168,7 +7045,7 @@
           <a:bodyPr wrap="square" lIns="0" tIns="0" rIns="0" bIns="0" rtlCol="0" anchor="ctr"/>
           <a:lstStyle/>
           <a:p>
-            <a:pPr indent="0" marL="0">
+            <a:pPr marL="0" indent="0">
               <a:buNone/>
             </a:pPr>
             <a:r>
@@ -7210,6 +7087,13 @@
             <a:prstDash val="solid"/>
           </a:ln>
         </p:spPr>
+        <p:txBody>
+          <a:bodyPr/>
+          <a:lstStyle/>
+          <a:p>
+            <a:endParaRPr lang="en-US"/>
+          </a:p>
+        </p:txBody>
       </p:sp>
       <p:sp>
         <p:nvSpPr>
@@ -7232,7 +7116,7 @@
           <a:bodyPr wrap="square" lIns="0" tIns="0" rIns="0" bIns="0" rtlCol="0" anchor="ctr"/>
           <a:lstStyle/>
           <a:p>
-            <a:pPr indent="0" marL="0">
+            <a:pPr marL="0" indent="0">
               <a:buNone/>
             </a:pPr>
             <a:r>
@@ -7271,7 +7155,7 @@
           <a:bodyPr wrap="square" lIns="0" tIns="0" rIns="0" bIns="0" rtlCol="0" anchor="ctr"/>
           <a:lstStyle/>
           <a:p>
-            <a:pPr indent="0" marL="0">
+            <a:pPr marL="0" indent="0">
               <a:buNone/>
             </a:pPr>
             <a:r>
@@ -7313,6 +7197,13 @@
             <a:prstDash val="solid"/>
           </a:ln>
         </p:spPr>
+        <p:txBody>
+          <a:bodyPr/>
+          <a:lstStyle/>
+          <a:p>
+            <a:endParaRPr lang="en-US"/>
+          </a:p>
+        </p:txBody>
       </p:sp>
       <p:sp>
         <p:nvSpPr>
@@ -7335,7 +7226,7 @@
           <a:bodyPr wrap="square" lIns="0" tIns="0" rIns="0" bIns="0" rtlCol="0" anchor="ctr"/>
           <a:lstStyle/>
           <a:p>
-            <a:pPr indent="0" marL="0">
+            <a:pPr marL="0" indent="0">
               <a:buNone/>
             </a:pPr>
             <a:r>
@@ -7374,7 +7265,7 @@
           <a:bodyPr wrap="square" lIns="0" tIns="0" rIns="0" bIns="0" rtlCol="0" anchor="ctr"/>
           <a:lstStyle/>
           <a:p>
-            <a:pPr indent="0" marL="0">
+            <a:pPr marL="0" indent="0">
               <a:buNone/>
             </a:pPr>
             <a:r>
@@ -7416,6 +7307,13 @@
             <a:prstDash val="solid"/>
           </a:ln>
         </p:spPr>
+        <p:txBody>
+          <a:bodyPr/>
+          <a:lstStyle/>
+          <a:p>
+            <a:endParaRPr lang="en-US"/>
+          </a:p>
+        </p:txBody>
       </p:sp>
       <p:sp>
         <p:nvSpPr>
@@ -7438,7 +7336,7 @@
           <a:bodyPr wrap="square" lIns="0" tIns="0" rIns="0" bIns="0" rtlCol="0" anchor="ctr"/>
           <a:lstStyle/>
           <a:p>
-            <a:pPr indent="0" marL="0">
+            <a:pPr marL="0" indent="0">
               <a:buNone/>
             </a:pPr>
             <a:r>
@@ -7477,7 +7375,7 @@
           <a:bodyPr wrap="square" lIns="0" tIns="0" rIns="0" bIns="0" rtlCol="0" anchor="ctr"/>
           <a:lstStyle/>
           <a:p>
-            <a:pPr indent="0" marL="0">
+            <a:pPr marL="0" indent="0">
               <a:buNone/>
             </a:pPr>
             <a:r>
@@ -7519,6 +7417,13 @@
             <a:prstDash val="solid"/>
           </a:ln>
         </p:spPr>
+        <p:txBody>
+          <a:bodyPr/>
+          <a:lstStyle/>
+          <a:p>
+            <a:endParaRPr lang="en-US"/>
+          </a:p>
+        </p:txBody>
       </p:sp>
       <p:sp>
         <p:nvSpPr>
@@ -7541,7 +7446,7 @@
           <a:bodyPr wrap="square" lIns="0" tIns="0" rIns="0" bIns="0" rtlCol="0" anchor="ctr"/>
           <a:lstStyle/>
           <a:p>
-            <a:pPr indent="0" marL="0">
+            <a:pPr marL="0" indent="0">
               <a:buNone/>
             </a:pPr>
             <a:r>
@@ -7583,13 +7488,20 @@
             <a:prstDash val="solid"/>
           </a:ln>
           <a:effectLst>
-            <a:outerShdw sx="100000" sy="100000" kx="0" ky="0" algn="bl" rotWithShape="0" blurRad="101600" dist="12700" dir="5400000">
+            <a:outerShdw blurRad="101600" dist="12700" dir="5400000" algn="bl" rotWithShape="0">
               <a:srgbClr val="94A3B8">
                 <a:alpha val="12000"/>
               </a:srgbClr>
             </a:outerShdw>
           </a:effectLst>
         </p:spPr>
+        <p:txBody>
+          <a:bodyPr/>
+          <a:lstStyle/>
+          <a:p>
+            <a:endParaRPr lang="en-US"/>
+          </a:p>
+        </p:txBody>
       </p:sp>
       <p:sp>
         <p:nvSpPr>
@@ -7615,6 +7527,13 @@
             <a:prstDash val="solid"/>
           </a:ln>
         </p:spPr>
+        <p:txBody>
+          <a:bodyPr/>
+          <a:lstStyle/>
+          <a:p>
+            <a:endParaRPr lang="en-US"/>
+          </a:p>
+        </p:txBody>
       </p:sp>
       <p:sp>
         <p:nvSpPr>
@@ -7637,7 +7556,7 @@
           <a:bodyPr wrap="square" lIns="0" tIns="0" rIns="0" bIns="0" rtlCol="0" anchor="ctr"/>
           <a:lstStyle/>
           <a:p>
-            <a:pPr indent="0" marL="0">
+            <a:pPr marL="0" indent="0">
               <a:buNone/>
             </a:pPr>
             <a:r>
@@ -7676,7 +7595,7 @@
           <a:bodyPr wrap="square" lIns="0" tIns="0" rIns="0" bIns="0" rtlCol="0" anchor="ctr"/>
           <a:lstStyle/>
           <a:p>
-            <a:pPr indent="0" marL="0">
+            <a:pPr marL="0" indent="0">
               <a:buNone/>
             </a:pPr>
             <a:r>
@@ -7718,6 +7637,13 @@
             <a:prstDash val="solid"/>
           </a:ln>
         </p:spPr>
+        <p:txBody>
+          <a:bodyPr/>
+          <a:lstStyle/>
+          <a:p>
+            <a:endParaRPr lang="en-US"/>
+          </a:p>
+        </p:txBody>
       </p:sp>
       <p:sp>
         <p:nvSpPr>
@@ -7740,7 +7666,7 @@
           <a:bodyPr wrap="square" lIns="0" tIns="0" rIns="0" bIns="0" rtlCol="0" anchor="ctr"/>
           <a:lstStyle/>
           <a:p>
-            <a:pPr indent="0" marL="0">
+            <a:pPr marL="0" indent="0">
               <a:buNone/>
             </a:pPr>
             <a:r>
@@ -7779,7 +7705,7 @@
           <a:bodyPr wrap="square" lIns="0" tIns="0" rIns="0" bIns="0" rtlCol="0" anchor="ctr"/>
           <a:lstStyle/>
           <a:p>
-            <a:pPr indent="0" marL="0">
+            <a:pPr marL="0" indent="0">
               <a:buNone/>
             </a:pPr>
             <a:r>
@@ -7821,6 +7747,13 @@
             <a:prstDash val="solid"/>
           </a:ln>
         </p:spPr>
+        <p:txBody>
+          <a:bodyPr/>
+          <a:lstStyle/>
+          <a:p>
+            <a:endParaRPr lang="en-US"/>
+          </a:p>
+        </p:txBody>
       </p:sp>
       <p:sp>
         <p:nvSpPr>
@@ -7843,7 +7776,7 @@
           <a:bodyPr wrap="square" lIns="0" tIns="0" rIns="0" bIns="0" rtlCol="0" anchor="ctr"/>
           <a:lstStyle/>
           <a:p>
-            <a:pPr indent="0" marL="0">
+            <a:pPr marL="0" indent="0">
               <a:buNone/>
             </a:pPr>
             <a:r>
@@ -7882,7 +7815,7 @@
           <a:bodyPr wrap="square" lIns="0" tIns="0" rIns="0" bIns="0" rtlCol="0" anchor="ctr"/>
           <a:lstStyle/>
           <a:p>
-            <a:pPr indent="0" marL="0">
+            <a:pPr marL="0" indent="0">
               <a:buNone/>
             </a:pPr>
             <a:r>
@@ -7924,6 +7857,13 @@
             <a:prstDash val="solid"/>
           </a:ln>
         </p:spPr>
+        <p:txBody>
+          <a:bodyPr/>
+          <a:lstStyle/>
+          <a:p>
+            <a:endParaRPr lang="en-US"/>
+          </a:p>
+        </p:txBody>
       </p:sp>
       <p:sp>
         <p:nvSpPr>
@@ -7946,7 +7886,7 @@
           <a:bodyPr wrap="square" lIns="0" tIns="0" rIns="0" bIns="0" rtlCol="0" anchor="ctr"/>
           <a:lstStyle/>
           <a:p>
-            <a:pPr indent="0" marL="0">
+            <a:pPr marL="0" indent="0">
               <a:buNone/>
             </a:pPr>
             <a:r>
@@ -7985,7 +7925,7 @@
           <a:bodyPr wrap="square" lIns="0" tIns="0" rIns="0" bIns="0" rtlCol="0" anchor="ctr"/>
           <a:lstStyle/>
           <a:p>
-            <a:pPr indent="0" marL="0">
+            <a:pPr marL="0" indent="0">
               <a:buNone/>
             </a:pPr>
             <a:r>
@@ -8027,6 +7967,13 @@
             <a:prstDash val="solid"/>
           </a:ln>
         </p:spPr>
+        <p:txBody>
+          <a:bodyPr/>
+          <a:lstStyle/>
+          <a:p>
+            <a:endParaRPr lang="en-US"/>
+          </a:p>
+        </p:txBody>
       </p:sp>
       <p:sp>
         <p:nvSpPr>
@@ -8049,7 +7996,7 @@
           <a:bodyPr wrap="square" lIns="0" tIns="0" rIns="0" bIns="0" rtlCol="0" anchor="ctr"/>
           <a:lstStyle/>
           <a:p>
-            <a:pPr indent="0" marL="0">
+            <a:pPr marL="0" indent="0">
               <a:buNone/>
             </a:pPr>
             <a:r>
@@ -8088,7 +8035,7 @@
           <a:bodyPr wrap="square" lIns="0" tIns="0" rIns="0" bIns="0" rtlCol="0" anchor="ctr"/>
           <a:lstStyle/>
           <a:p>
-            <a:pPr indent="0" marL="0">
+            <a:pPr marL="0" indent="0">
               <a:buNone/>
             </a:pPr>
             <a:r>
@@ -8130,6 +8077,13 @@
             <a:prstDash val="solid"/>
           </a:ln>
         </p:spPr>
+        <p:txBody>
+          <a:bodyPr/>
+          <a:lstStyle/>
+          <a:p>
+            <a:endParaRPr lang="en-US"/>
+          </a:p>
+        </p:txBody>
       </p:sp>
       <p:sp>
         <p:nvSpPr>
@@ -8152,7 +8106,7 @@
           <a:bodyPr wrap="square" lIns="0" tIns="0" rIns="0" bIns="0" rtlCol="0" anchor="ctr"/>
           <a:lstStyle/>
           <a:p>
-            <a:pPr indent="0" marL="0">
+            <a:pPr marL="0" indent="0">
               <a:buNone/>
             </a:pPr>
             <a:r>
@@ -8191,7 +8145,7 @@
           <a:bodyPr wrap="square" lIns="0" tIns="0" rIns="0" bIns="0" rtlCol="0" anchor="ctr"/>
           <a:lstStyle/>
           <a:p>
-            <a:pPr algn="l" indent="0" marL="0">
+            <a:pPr marL="0" indent="0" algn="l">
               <a:buNone/>
             </a:pPr>
             <a:r>
@@ -8230,7 +8184,7 @@
           <a:bodyPr wrap="square" lIns="0" tIns="0" rIns="0" bIns="0" rtlCol="0" anchor="ctr"/>
           <a:lstStyle/>
           <a:p>
-            <a:pPr algn="r" indent="0" marL="0">
+            <a:pPr marL="0" indent="0" algn="r">
               <a:buNone/>
             </a:pPr>
             <a:r>
@@ -8264,6 +8218,7 @@
         <a:solidFill>
           <a:srgbClr val="FFFFFF"/>
         </a:solidFill>
+        <a:effectLst/>
       </p:bgPr>
     </p:bg>
     <p:spTree>
@@ -8301,11 +8256,11 @@
           <a:bodyPr wrap="square" lIns="0" tIns="0" rIns="0" bIns="0" rtlCol="0" anchor="ctr"/>
           <a:lstStyle/>
           <a:p>
-            <a:pPr indent="0" marL="0">
-              <a:buNone/>
-            </a:pPr>
-            <a:r>
-              <a:rPr lang="en-US" sz="1100" b="1" spc="400" kern="0" dirty="0">
+            <a:pPr marL="0" indent="0">
+              <a:buNone/>
+            </a:pPr>
+            <a:r>
+              <a:rPr lang="en-US" sz="1100" b="1" kern="0" spc="400" dirty="0">
                 <a:solidFill>
                   <a:srgbClr val="1C7293"/>
                 </a:solidFill>
@@ -8340,7 +8295,7 @@
           <a:bodyPr wrap="square" lIns="0" tIns="0" rIns="0" bIns="0" rtlCol="0" anchor="ctr"/>
           <a:lstStyle/>
           <a:p>
-            <a:pPr indent="0" marL="0">
+            <a:pPr marL="0" indent="0">
               <a:buNone/>
             </a:pPr>
             <a:r>
@@ -8379,7 +8334,7 @@
           <a:bodyPr wrap="square" lIns="0" tIns="0" rIns="0" bIns="0" rtlCol="0" anchor="ctr"/>
           <a:lstStyle/>
           <a:p>
-            <a:pPr indent="0" marL="0">
+            <a:pPr marL="0" indent="0">
               <a:buNone/>
             </a:pPr>
             <a:r>
@@ -8393,9 +8348,6 @@
               </a:rPr>
               <a:t>Clustering der 34 Quartiere auf den </a:t>
             </a:r>
-            <a:pPr indent="0" marL="0">
-              <a:buNone/>
-            </a:pPr>
             <a:r>
               <a:rPr lang="en-US" sz="1300" b="1" dirty="0">
                 <a:solidFill>
@@ -8407,9 +8359,6 @@
               </a:rPr>
               <a:t>sechs Kategorie-Erreichbarkeiten</a:t>
             </a:r>
-            <a:pPr indent="0" marL="0">
-              <a:buNone/>
-            </a:pPr>
             <a:r>
               <a:rPr lang="en-US" sz="1300" dirty="0">
                 <a:solidFill>
@@ -8449,13 +8398,20 @@
             <a:prstDash val="solid"/>
           </a:ln>
           <a:effectLst>
-            <a:outerShdw sx="100000" sy="100000" kx="0" ky="0" algn="bl" rotWithShape="0" blurRad="101600" dist="12700" dir="5400000">
+            <a:outerShdw blurRad="101600" dist="12700" dir="5400000" algn="bl" rotWithShape="0">
               <a:srgbClr val="94A3B8">
                 <a:alpha val="12000"/>
               </a:srgbClr>
             </a:outerShdw>
           </a:effectLst>
         </p:spPr>
+        <p:txBody>
+          <a:bodyPr/>
+          <a:lstStyle/>
+          <a:p>
+            <a:endParaRPr lang="en-US"/>
+          </a:p>
+        </p:txBody>
       </p:sp>
       <p:sp>
         <p:nvSpPr>
@@ -8481,6 +8437,13 @@
             <a:prstDash val="solid"/>
           </a:ln>
         </p:spPr>
+        <p:txBody>
+          <a:bodyPr/>
+          <a:lstStyle/>
+          <a:p>
+            <a:endParaRPr lang="en-US"/>
+          </a:p>
+        </p:txBody>
       </p:sp>
       <p:sp>
         <p:nvSpPr>
@@ -8506,6 +8469,13 @@
             <a:prstDash val="solid"/>
           </a:ln>
         </p:spPr>
+        <p:txBody>
+          <a:bodyPr/>
+          <a:lstStyle/>
+          <a:p>
+            <a:endParaRPr lang="en-US"/>
+          </a:p>
+        </p:txBody>
       </p:sp>
       <p:sp>
         <p:nvSpPr>
@@ -8528,7 +8498,7 @@
           <a:bodyPr wrap="square" lIns="0" tIns="0" rIns="0" bIns="0" rtlCol="0" anchor="ctr"/>
           <a:lstStyle/>
           <a:p>
-            <a:pPr algn="ctr" indent="0" marL="0">
+            <a:pPr marL="0" indent="0" algn="ctr">
               <a:buNone/>
             </a:pPr>
             <a:r>
@@ -8567,7 +8537,7 @@
           <a:bodyPr wrap="square" lIns="0" tIns="0" rIns="0" bIns="0" rtlCol="0" anchor="ctr"/>
           <a:lstStyle/>
           <a:p>
-            <a:pPr indent="0" marL="0">
+            <a:pPr marL="0" indent="0">
               <a:buNone/>
             </a:pPr>
             <a:r>
@@ -8593,20 +8563,20 @@
         </p:nvSpPr>
         <p:spPr>
           <a:xfrm>
-            <a:off x="3703320" y="2176272"/>
-            <a:ext cx="731520" cy="292608"/>
-          </a:xfrm>
-          <a:prstGeom prst="rect">
-            <a:avLst/>
-          </a:prstGeom>
-          <a:noFill/>
-          <a:ln/>
-        </p:spPr>
-        <p:txBody>
-          <a:bodyPr wrap="square" lIns="0" tIns="0" rIns="0" bIns="0" rtlCol="0" anchor="ctr"/>
-          <a:lstStyle/>
-          <a:p>
-            <a:pPr algn="r" indent="0" marL="0">
+            <a:off x="3521122" y="2176272"/>
+            <a:ext cx="913718" cy="292608"/>
+          </a:xfrm>
+          <a:prstGeom prst="rect">
+            <a:avLst/>
+          </a:prstGeom>
+          <a:noFill/>
+          <a:ln/>
+        </p:spPr>
+        <p:txBody>
+          <a:bodyPr wrap="square" lIns="0" tIns="0" rIns="0" bIns="0" rtlCol="0" anchor="ctr"/>
+          <a:lstStyle/>
+          <a:p>
+            <a:pPr marL="0" indent="0" algn="r">
               <a:buNone/>
             </a:pPr>
             <a:r>
@@ -8645,7 +8615,7 @@
           <a:bodyPr wrap="square" lIns="0" tIns="0" rIns="0" bIns="0" rtlCol="0" anchor="ctr"/>
           <a:lstStyle/>
           <a:p>
-            <a:pPr indent="0" marL="0">
+            <a:pPr marL="0" indent="0">
               <a:buNone/>
             </a:pPr>
             <a:r>
@@ -8684,7 +8654,7 @@
           <a:bodyPr wrap="square" lIns="0" tIns="0" rIns="0" bIns="0" rtlCol="0" anchor="ctr"/>
           <a:lstStyle/>
           <a:p>
-            <a:pPr indent="0" marL="0">
+            <a:pPr marL="0" indent="0">
               <a:buNone/>
             </a:pPr>
             <a:r>
@@ -8726,13 +8696,20 @@
             <a:prstDash val="solid"/>
           </a:ln>
           <a:effectLst>
-            <a:outerShdw sx="100000" sy="100000" kx="0" ky="0" algn="bl" rotWithShape="0" blurRad="101600" dist="12700" dir="5400000">
+            <a:outerShdw blurRad="101600" dist="12700" dir="5400000" algn="bl" rotWithShape="0">
               <a:srgbClr val="94A3B8">
                 <a:alpha val="12000"/>
               </a:srgbClr>
             </a:outerShdw>
           </a:effectLst>
         </p:spPr>
+        <p:txBody>
+          <a:bodyPr/>
+          <a:lstStyle/>
+          <a:p>
+            <a:endParaRPr lang="en-US"/>
+          </a:p>
+        </p:txBody>
       </p:sp>
       <p:sp>
         <p:nvSpPr>
@@ -8758,6 +8735,13 @@
             <a:prstDash val="solid"/>
           </a:ln>
         </p:spPr>
+        <p:txBody>
+          <a:bodyPr/>
+          <a:lstStyle/>
+          <a:p>
+            <a:endParaRPr lang="en-US"/>
+          </a:p>
+        </p:txBody>
       </p:sp>
       <p:sp>
         <p:nvSpPr>
@@ -8783,6 +8767,13 @@
             <a:prstDash val="solid"/>
           </a:ln>
         </p:spPr>
+        <p:txBody>
+          <a:bodyPr/>
+          <a:lstStyle/>
+          <a:p>
+            <a:endParaRPr lang="en-US"/>
+          </a:p>
+        </p:txBody>
       </p:sp>
       <p:sp>
         <p:nvSpPr>
@@ -8805,7 +8796,7 @@
           <a:bodyPr wrap="square" lIns="0" tIns="0" rIns="0" bIns="0" rtlCol="0" anchor="ctr"/>
           <a:lstStyle/>
           <a:p>
-            <a:pPr algn="ctr" indent="0" marL="0">
+            <a:pPr marL="0" indent="0" algn="ctr">
               <a:buNone/>
             </a:pPr>
             <a:r>
@@ -8844,7 +8835,7 @@
           <a:bodyPr wrap="square" lIns="0" tIns="0" rIns="0" bIns="0" rtlCol="0" anchor="ctr"/>
           <a:lstStyle/>
           <a:p>
-            <a:pPr indent="0" marL="0">
+            <a:pPr marL="0" indent="0">
               <a:buNone/>
             </a:pPr>
             <a:r>
@@ -8870,20 +8861,20 @@
         </p:nvSpPr>
         <p:spPr>
           <a:xfrm>
-            <a:off x="7909560" y="2176272"/>
-            <a:ext cx="731520" cy="292608"/>
-          </a:xfrm>
-          <a:prstGeom prst="rect">
-            <a:avLst/>
-          </a:prstGeom>
-          <a:noFill/>
-          <a:ln/>
-        </p:spPr>
-        <p:txBody>
-          <a:bodyPr wrap="square" lIns="0" tIns="0" rIns="0" bIns="0" rtlCol="0" anchor="ctr"/>
-          <a:lstStyle/>
-          <a:p>
-            <a:pPr algn="r" indent="0" marL="0">
+            <a:off x="7724633" y="2176272"/>
+            <a:ext cx="916447" cy="292608"/>
+          </a:xfrm>
+          <a:prstGeom prst="rect">
+            <a:avLst/>
+          </a:prstGeom>
+          <a:noFill/>
+          <a:ln/>
+        </p:spPr>
+        <p:txBody>
+          <a:bodyPr wrap="square" lIns="0" tIns="0" rIns="0" bIns="0" rtlCol="0" anchor="ctr"/>
+          <a:lstStyle/>
+          <a:p>
+            <a:pPr marL="0" indent="0" algn="r">
               <a:buNone/>
             </a:pPr>
             <a:r>
@@ -8922,7 +8913,7 @@
           <a:bodyPr wrap="square" lIns="0" tIns="0" rIns="0" bIns="0" rtlCol="0" anchor="ctr"/>
           <a:lstStyle/>
           <a:p>
-            <a:pPr indent="0" marL="0">
+            <a:pPr marL="0" indent="0">
               <a:buNone/>
             </a:pPr>
             <a:r>
@@ -8961,7 +8952,7 @@
           <a:bodyPr wrap="square" lIns="0" tIns="0" rIns="0" bIns="0" rtlCol="0" anchor="ctr"/>
           <a:lstStyle/>
           <a:p>
-            <a:pPr indent="0" marL="0">
+            <a:pPr marL="0" indent="0">
               <a:buNone/>
             </a:pPr>
             <a:r>
@@ -9003,13 +8994,20 @@
             <a:prstDash val="solid"/>
           </a:ln>
           <a:effectLst>
-            <a:outerShdw sx="100000" sy="100000" kx="0" ky="0" algn="bl" rotWithShape="0" blurRad="101600" dist="12700" dir="5400000">
+            <a:outerShdw blurRad="101600" dist="12700" dir="5400000" algn="bl" rotWithShape="0">
               <a:srgbClr val="94A3B8">
                 <a:alpha val="12000"/>
               </a:srgbClr>
             </a:outerShdw>
           </a:effectLst>
         </p:spPr>
+        <p:txBody>
+          <a:bodyPr/>
+          <a:lstStyle/>
+          <a:p>
+            <a:endParaRPr lang="en-US"/>
+          </a:p>
+        </p:txBody>
       </p:sp>
       <p:sp>
         <p:nvSpPr>
@@ -9035,6 +9033,13 @@
             <a:prstDash val="solid"/>
           </a:ln>
         </p:spPr>
+        <p:txBody>
+          <a:bodyPr/>
+          <a:lstStyle/>
+          <a:p>
+            <a:endParaRPr lang="en-US"/>
+          </a:p>
+        </p:txBody>
       </p:sp>
       <p:sp>
         <p:nvSpPr>
@@ -9060,6 +9065,13 @@
             <a:prstDash val="solid"/>
           </a:ln>
         </p:spPr>
+        <p:txBody>
+          <a:bodyPr/>
+          <a:lstStyle/>
+          <a:p>
+            <a:endParaRPr lang="en-US"/>
+          </a:p>
+        </p:txBody>
       </p:sp>
       <p:sp>
         <p:nvSpPr>
@@ -9082,7 +9094,7 @@
           <a:bodyPr wrap="square" lIns="0" tIns="0" rIns="0" bIns="0" rtlCol="0" anchor="ctr"/>
           <a:lstStyle/>
           <a:p>
-            <a:pPr algn="ctr" indent="0" marL="0">
+            <a:pPr marL="0" indent="0" algn="ctr">
               <a:buNone/>
             </a:pPr>
             <a:r>
@@ -9121,7 +9133,7 @@
           <a:bodyPr wrap="square" lIns="0" tIns="0" rIns="0" bIns="0" rtlCol="0" anchor="ctr"/>
           <a:lstStyle/>
           <a:p>
-            <a:pPr indent="0" marL="0">
+            <a:pPr marL="0" indent="0">
               <a:buNone/>
             </a:pPr>
             <a:r>
@@ -9147,20 +9159,20 @@
         </p:nvSpPr>
         <p:spPr>
           <a:xfrm>
-            <a:off x="3703320" y="3502152"/>
-            <a:ext cx="731520" cy="292608"/>
-          </a:xfrm>
-          <a:prstGeom prst="rect">
-            <a:avLst/>
-          </a:prstGeom>
-          <a:noFill/>
-          <a:ln/>
-        </p:spPr>
-        <p:txBody>
-          <a:bodyPr wrap="square" lIns="0" tIns="0" rIns="0" bIns="0" rtlCol="0" anchor="ctr"/>
-          <a:lstStyle/>
-          <a:p>
-            <a:pPr algn="r" indent="0" marL="0">
+            <a:off x="3521122" y="3502152"/>
+            <a:ext cx="913718" cy="292608"/>
+          </a:xfrm>
+          <a:prstGeom prst="rect">
+            <a:avLst/>
+          </a:prstGeom>
+          <a:noFill/>
+          <a:ln/>
+        </p:spPr>
+        <p:txBody>
+          <a:bodyPr wrap="square" lIns="0" tIns="0" rIns="0" bIns="0" rtlCol="0" anchor="ctr"/>
+          <a:lstStyle/>
+          <a:p>
+            <a:pPr marL="0" indent="0" algn="r">
               <a:buNone/>
             </a:pPr>
             <a:r>
@@ -9199,7 +9211,7 @@
           <a:bodyPr wrap="square" lIns="0" tIns="0" rIns="0" bIns="0" rtlCol="0" anchor="ctr"/>
           <a:lstStyle/>
           <a:p>
-            <a:pPr indent="0" marL="0">
+            <a:pPr marL="0" indent="0">
               <a:buNone/>
             </a:pPr>
             <a:r>
@@ -9238,7 +9250,7 @@
           <a:bodyPr wrap="square" lIns="0" tIns="0" rIns="0" bIns="0" rtlCol="0" anchor="ctr"/>
           <a:lstStyle/>
           <a:p>
-            <a:pPr indent="0" marL="0">
+            <a:pPr marL="0" indent="0">
               <a:buNone/>
             </a:pPr>
             <a:r>
@@ -9280,13 +9292,20 @@
             <a:prstDash val="solid"/>
           </a:ln>
           <a:effectLst>
-            <a:outerShdw sx="100000" sy="100000" kx="0" ky="0" algn="bl" rotWithShape="0" blurRad="101600" dist="12700" dir="5400000">
+            <a:outerShdw blurRad="101600" dist="12700" dir="5400000" algn="bl" rotWithShape="0">
               <a:srgbClr val="94A3B8">
                 <a:alpha val="12000"/>
               </a:srgbClr>
             </a:outerShdw>
           </a:effectLst>
         </p:spPr>
+        <p:txBody>
+          <a:bodyPr/>
+          <a:lstStyle/>
+          <a:p>
+            <a:endParaRPr lang="en-US"/>
+          </a:p>
+        </p:txBody>
       </p:sp>
       <p:sp>
         <p:nvSpPr>
@@ -9312,6 +9331,13 @@
             <a:prstDash val="solid"/>
           </a:ln>
         </p:spPr>
+        <p:txBody>
+          <a:bodyPr/>
+          <a:lstStyle/>
+          <a:p>
+            <a:endParaRPr lang="en-US"/>
+          </a:p>
+        </p:txBody>
       </p:sp>
       <p:sp>
         <p:nvSpPr>
@@ -9337,6 +9363,13 @@
             <a:prstDash val="solid"/>
           </a:ln>
         </p:spPr>
+        <p:txBody>
+          <a:bodyPr/>
+          <a:lstStyle/>
+          <a:p>
+            <a:endParaRPr lang="en-US"/>
+          </a:p>
+        </p:txBody>
       </p:sp>
       <p:sp>
         <p:nvSpPr>
@@ -9359,7 +9392,7 @@
           <a:bodyPr wrap="square" lIns="0" tIns="0" rIns="0" bIns="0" rtlCol="0" anchor="ctr"/>
           <a:lstStyle/>
           <a:p>
-            <a:pPr algn="ctr" indent="0" marL="0">
+            <a:pPr marL="0" indent="0" algn="ctr">
               <a:buNone/>
             </a:pPr>
             <a:r>
@@ -9398,7 +9431,7 @@
           <a:bodyPr wrap="square" lIns="0" tIns="0" rIns="0" bIns="0" rtlCol="0" anchor="ctr"/>
           <a:lstStyle/>
           <a:p>
-            <a:pPr indent="0" marL="0">
+            <a:pPr marL="0" indent="0">
               <a:buNone/>
             </a:pPr>
             <a:r>
@@ -9424,20 +9457,20 @@
         </p:nvSpPr>
         <p:spPr>
           <a:xfrm>
-            <a:off x="7909560" y="3502152"/>
-            <a:ext cx="731520" cy="292608"/>
-          </a:xfrm>
-          <a:prstGeom prst="rect">
-            <a:avLst/>
-          </a:prstGeom>
-          <a:noFill/>
-          <a:ln/>
-        </p:spPr>
-        <p:txBody>
-          <a:bodyPr wrap="square" lIns="0" tIns="0" rIns="0" bIns="0" rtlCol="0" anchor="ctr"/>
-          <a:lstStyle/>
-          <a:p>
-            <a:pPr algn="r" indent="0" marL="0">
+            <a:off x="7680960" y="3502152"/>
+            <a:ext cx="960120" cy="292608"/>
+          </a:xfrm>
+          <a:prstGeom prst="rect">
+            <a:avLst/>
+          </a:prstGeom>
+          <a:noFill/>
+          <a:ln/>
+        </p:spPr>
+        <p:txBody>
+          <a:bodyPr wrap="square" lIns="0" tIns="0" rIns="0" bIns="0" rtlCol="0" anchor="ctr"/>
+          <a:lstStyle/>
+          <a:p>
+            <a:pPr marL="0" indent="0" algn="r">
               <a:buNone/>
             </a:pPr>
             <a:r>
@@ -9476,7 +9509,7 @@
           <a:bodyPr wrap="square" lIns="0" tIns="0" rIns="0" bIns="0" rtlCol="0" anchor="ctr"/>
           <a:lstStyle/>
           <a:p>
-            <a:pPr indent="0" marL="0">
+            <a:pPr marL="0" indent="0">
               <a:buNone/>
             </a:pPr>
             <a:r>
@@ -9515,7 +9548,7 @@
           <a:bodyPr wrap="square" lIns="0" tIns="0" rIns="0" bIns="0" rtlCol="0" anchor="ctr"/>
           <a:lstStyle/>
           <a:p>
-            <a:pPr indent="0" marL="0">
+            <a:pPr marL="0" indent="0">
               <a:buNone/>
             </a:pPr>
             <a:r>
@@ -9554,7 +9587,7 @@
           <a:bodyPr wrap="square" lIns="0" tIns="0" rIns="0" bIns="0" rtlCol="0" anchor="ctr"/>
           <a:lstStyle/>
           <a:p>
-            <a:pPr algn="l" indent="0" marL="0">
+            <a:pPr marL="0" indent="0" algn="l">
               <a:buNone/>
             </a:pPr>
             <a:r>
@@ -9593,7 +9626,7 @@
           <a:bodyPr wrap="square" lIns="0" tIns="0" rIns="0" bIns="0" rtlCol="0" anchor="ctr"/>
           <a:lstStyle/>
           <a:p>
-            <a:pPr algn="r" indent="0" marL="0">
+            <a:pPr marL="0" indent="0" algn="r">
               <a:buNone/>
             </a:pPr>
             <a:r>
@@ -9627,6 +9660,7 @@
         <a:solidFill>
           <a:srgbClr val="FFFFFF"/>
         </a:solidFill>
+        <a:effectLst/>
       </p:bgPr>
     </p:bg>
     <p:spTree>
@@ -9664,11 +9698,11 @@
           <a:bodyPr wrap="square" lIns="0" tIns="0" rIns="0" bIns="0" rtlCol="0" anchor="ctr"/>
           <a:lstStyle/>
           <a:p>
-            <a:pPr indent="0" marL="0">
-              <a:buNone/>
-            </a:pPr>
-            <a:r>
-              <a:rPr lang="en-US" sz="1100" b="1" spc="400" kern="0" dirty="0">
+            <a:pPr marL="0" indent="0">
+              <a:buNone/>
+            </a:pPr>
+            <a:r>
+              <a:rPr lang="en-US" sz="1100" b="1" kern="0" spc="400" dirty="0">
                 <a:solidFill>
                   <a:srgbClr val="1C7293"/>
                 </a:solidFill>
@@ -9703,7 +9737,7 @@
           <a:bodyPr wrap="square" lIns="0" tIns="0" rIns="0" bIns="0" rtlCol="0" anchor="ctr"/>
           <a:lstStyle/>
           <a:p>
-            <a:pPr indent="0" marL="0">
+            <a:pPr marL="0" indent="0">
               <a:buNone/>
             </a:pPr>
             <a:r>
@@ -9745,13 +9779,20 @@
             <a:prstDash val="solid"/>
           </a:ln>
           <a:effectLst>
-            <a:outerShdw sx="100000" sy="100000" kx="0" ky="0" algn="bl" rotWithShape="0" blurRad="101600" dist="12700" dir="5400000">
+            <a:outerShdw blurRad="101600" dist="12700" dir="5400000" algn="bl" rotWithShape="0">
               <a:srgbClr val="94A3B8">
                 <a:alpha val="12000"/>
               </a:srgbClr>
             </a:outerShdw>
           </a:effectLst>
         </p:spPr>
+        <p:txBody>
+          <a:bodyPr/>
+          <a:lstStyle/>
+          <a:p>
+            <a:endParaRPr lang="en-US"/>
+          </a:p>
+        </p:txBody>
       </p:sp>
       <p:sp>
         <p:nvSpPr>
@@ -9777,6 +9818,13 @@
             <a:prstDash val="solid"/>
           </a:ln>
         </p:spPr>
+        <p:txBody>
+          <a:bodyPr/>
+          <a:lstStyle/>
+          <a:p>
+            <a:endParaRPr lang="en-US"/>
+          </a:p>
+        </p:txBody>
       </p:sp>
       <p:sp>
         <p:nvSpPr>
@@ -9799,7 +9847,7 @@
           <a:bodyPr wrap="square" lIns="0" tIns="0" rIns="0" bIns="0" rtlCol="0" anchor="ctr"/>
           <a:lstStyle/>
           <a:p>
-            <a:pPr indent="0" marL="0">
+            <a:pPr marL="0" indent="0">
               <a:buNone/>
             </a:pPr>
             <a:r>
@@ -9813,9 +9861,6 @@
               </a:rPr>
               <a:t>Die grössten Lücken zwischen Wohnen und täglicher Infrastruktur </a:t>
             </a:r>
-            <a:pPr indent="0" marL="0">
-              <a:buNone/>
-            </a:pPr>
             <a:r>
               <a:rPr lang="en-US" sz="1400" b="1" dirty="0">
                 <a:solidFill>
@@ -9827,9 +9872,6 @@
               </a:rPr>
               <a:t>liegen in der Stadtperipherie</a:t>
             </a:r>
-            <a:pPr indent="0" marL="0">
-              <a:buNone/>
-            </a:pPr>
             <a:r>
               <a:rPr lang="en-US" sz="1400" dirty="0">
                 <a:solidFill>
@@ -9841,9 +9883,6 @@
               </a:rPr>
               <a:t> (Leimbach, Witikon, Hirzenbach, Affoltern, Friesenberg) — über 80 Score-Punkte Abstand zum Zentrum. Die Korrelation Score × Distanz zum HB beträgt </a:t>
             </a:r>
-            <a:pPr indent="0" marL="0">
-              <a:buNone/>
-            </a:pPr>
             <a:r>
               <a:rPr lang="en-US" sz="1400" b="1" dirty="0">
                 <a:solidFill>
@@ -9855,9 +9894,6 @@
               </a:rPr>
               <a:t>ρ = −0.81 (p &lt; 10⁻⁸)</a:t>
             </a:r>
-            <a:pPr indent="0" marL="0">
-              <a:buNone/>
-            </a:pPr>
             <a:r>
               <a:rPr lang="en-US" sz="1400" dirty="0">
                 <a:solidFill>
@@ -9897,13 +9933,20 @@
             <a:prstDash val="solid"/>
           </a:ln>
           <a:effectLst>
-            <a:outerShdw sx="100000" sy="100000" kx="0" ky="0" algn="bl" rotWithShape="0" blurRad="101600" dist="12700" dir="5400000">
+            <a:outerShdw blurRad="101600" dist="12700" dir="5400000" algn="bl" rotWithShape="0">
               <a:srgbClr val="94A3B8">
                 <a:alpha val="12000"/>
               </a:srgbClr>
             </a:outerShdw>
           </a:effectLst>
         </p:spPr>
+        <p:txBody>
+          <a:bodyPr/>
+          <a:lstStyle/>
+          <a:p>
+            <a:endParaRPr lang="en-US"/>
+          </a:p>
+        </p:txBody>
       </p:sp>
       <p:sp>
         <p:nvSpPr>
@@ -9929,6 +9972,13 @@
             <a:prstDash val="solid"/>
           </a:ln>
         </p:spPr>
+        <p:txBody>
+          <a:bodyPr/>
+          <a:lstStyle/>
+          <a:p>
+            <a:endParaRPr lang="en-US"/>
+          </a:p>
+        </p:txBody>
       </p:sp>
       <p:sp>
         <p:nvSpPr>
@@ -9951,7 +10001,7 @@
           <a:bodyPr wrap="square" lIns="0" tIns="0" rIns="0" bIns="0" rtlCol="0" anchor="ctr"/>
           <a:lstStyle/>
           <a:p>
-            <a:pPr indent="0" marL="0">
+            <a:pPr marL="0" indent="0">
               <a:buNone/>
             </a:pPr>
             <a:r>
@@ -9990,7 +10040,7 @@
           <a:bodyPr wrap="square" lIns="0" tIns="0" rIns="0" bIns="0" rtlCol="0" anchor="ctr"/>
           <a:lstStyle/>
           <a:p>
-            <a:pPr indent="0" marL="0">
+            <a:pPr marL="0" indent="0">
               <a:buNone/>
             </a:pPr>
             <a:r>
@@ -10032,13 +10082,20 @@
             <a:prstDash val="solid"/>
           </a:ln>
           <a:effectLst>
-            <a:outerShdw sx="100000" sy="100000" kx="0" ky="0" algn="bl" rotWithShape="0" blurRad="101600" dist="12700" dir="5400000">
+            <a:outerShdw blurRad="101600" dist="12700" dir="5400000" algn="bl" rotWithShape="0">
               <a:srgbClr val="94A3B8">
                 <a:alpha val="12000"/>
               </a:srgbClr>
             </a:outerShdw>
           </a:effectLst>
         </p:spPr>
+        <p:txBody>
+          <a:bodyPr/>
+          <a:lstStyle/>
+          <a:p>
+            <a:endParaRPr lang="en-US"/>
+          </a:p>
+        </p:txBody>
       </p:sp>
       <p:sp>
         <p:nvSpPr>
@@ -10064,6 +10121,13 @@
             <a:prstDash val="solid"/>
           </a:ln>
         </p:spPr>
+        <p:txBody>
+          <a:bodyPr/>
+          <a:lstStyle/>
+          <a:p>
+            <a:endParaRPr lang="en-US"/>
+          </a:p>
+        </p:txBody>
       </p:sp>
       <p:sp>
         <p:nvSpPr>
@@ -10086,7 +10150,7 @@
           <a:bodyPr wrap="square" lIns="0" tIns="0" rIns="0" bIns="0" rtlCol="0" anchor="ctr"/>
           <a:lstStyle/>
           <a:p>
-            <a:pPr indent="0" marL="0">
+            <a:pPr marL="0" indent="0">
               <a:buNone/>
             </a:pPr>
             <a:r>
@@ -10125,7 +10189,7 @@
           <a:bodyPr wrap="square" lIns="0" tIns="0" rIns="0" bIns="0" rtlCol="0" anchor="ctr"/>
           <a:lstStyle/>
           <a:p>
-            <a:pPr indent="0" marL="0">
+            <a:pPr marL="0" indent="0">
               <a:buNone/>
             </a:pPr>
             <a:r>
@@ -10167,13 +10231,20 @@
             <a:prstDash val="solid"/>
           </a:ln>
           <a:effectLst>
-            <a:outerShdw sx="100000" sy="100000" kx="0" ky="0" algn="bl" rotWithShape="0" blurRad="101600" dist="12700" dir="5400000">
+            <a:outerShdw blurRad="101600" dist="12700" dir="5400000" algn="bl" rotWithShape="0">
               <a:srgbClr val="94A3B8">
                 <a:alpha val="12000"/>
               </a:srgbClr>
             </a:outerShdw>
           </a:effectLst>
         </p:spPr>
+        <p:txBody>
+          <a:bodyPr/>
+          <a:lstStyle/>
+          <a:p>
+            <a:endParaRPr lang="en-US"/>
+          </a:p>
+        </p:txBody>
       </p:sp>
       <p:sp>
         <p:nvSpPr>
@@ -10199,6 +10270,13 @@
             <a:prstDash val="solid"/>
           </a:ln>
         </p:spPr>
+        <p:txBody>
+          <a:bodyPr/>
+          <a:lstStyle/>
+          <a:p>
+            <a:endParaRPr lang="en-US"/>
+          </a:p>
+        </p:txBody>
       </p:sp>
       <p:sp>
         <p:nvSpPr>
@@ -10221,7 +10299,7 @@
           <a:bodyPr wrap="square" lIns="0" tIns="0" rIns="0" bIns="0" rtlCol="0" anchor="ctr"/>
           <a:lstStyle/>
           <a:p>
-            <a:pPr indent="0" marL="0">
+            <a:pPr marL="0" indent="0">
               <a:buNone/>
             </a:pPr>
             <a:r>
@@ -10260,7 +10338,7 @@
           <a:bodyPr wrap="square" lIns="0" tIns="0" rIns="0" bIns="0" rtlCol="0" anchor="ctr"/>
           <a:lstStyle/>
           <a:p>
-            <a:pPr indent="0" marL="0">
+            <a:pPr marL="0" indent="0">
               <a:buNone/>
             </a:pPr>
             <a:r>
@@ -10299,7 +10377,7 @@
           <a:bodyPr wrap="square" lIns="0" tIns="0" rIns="0" bIns="0" rtlCol="0" anchor="ctr"/>
           <a:lstStyle/>
           <a:p>
-            <a:pPr algn="r" indent="0" marL="0">
+            <a:pPr marL="0" indent="0" algn="r">
               <a:buNone/>
             </a:pPr>
             <a:r>
@@ -10333,6 +10411,7 @@
         <a:solidFill>
           <a:srgbClr val="FFFFFF"/>
         </a:solidFill>
+        <a:effectLst/>
       </p:bgPr>
     </p:bg>
     <p:spTree>
@@ -10370,11 +10449,11 @@
           <a:bodyPr wrap="square" lIns="0" tIns="0" rIns="0" bIns="0" rtlCol="0" anchor="ctr"/>
           <a:lstStyle/>
           <a:p>
-            <a:pPr indent="0" marL="0">
-              <a:buNone/>
-            </a:pPr>
-            <a:r>
-              <a:rPr lang="en-US" sz="1100" b="1" spc="400" kern="0" dirty="0">
+            <a:pPr marL="0" indent="0">
+              <a:buNone/>
+            </a:pPr>
+            <a:r>
+              <a:rPr lang="en-US" sz="1100" b="1" kern="0" spc="400" dirty="0">
                 <a:solidFill>
                   <a:srgbClr val="1C7293"/>
                 </a:solidFill>
@@ -10409,7 +10488,7 @@
           <a:bodyPr wrap="square" lIns="0" tIns="0" rIns="0" bIns="0" rtlCol="0" anchor="ctr"/>
           <a:lstStyle/>
           <a:p>
-            <a:pPr indent="0" marL="0">
+            <a:pPr marL="0" indent="0">
               <a:buNone/>
             </a:pPr>
             <a:r>
@@ -10451,13 +10530,20 @@
             <a:prstDash val="solid"/>
           </a:ln>
           <a:effectLst>
-            <a:outerShdw sx="100000" sy="100000" kx="0" ky="0" algn="bl" rotWithShape="0" blurRad="101600" dist="12700" dir="5400000">
+            <a:outerShdw blurRad="101600" dist="12700" dir="5400000" algn="bl" rotWithShape="0">
               <a:srgbClr val="94A3B8">
                 <a:alpha val="12000"/>
               </a:srgbClr>
             </a:outerShdw>
           </a:effectLst>
         </p:spPr>
+        <p:txBody>
+          <a:bodyPr/>
+          <a:lstStyle/>
+          <a:p>
+            <a:endParaRPr lang="en-US"/>
+          </a:p>
+        </p:txBody>
       </p:sp>
       <p:sp>
         <p:nvSpPr>
@@ -10483,6 +10569,13 @@
             <a:prstDash val="solid"/>
           </a:ln>
         </p:spPr>
+        <p:txBody>
+          <a:bodyPr/>
+          <a:lstStyle/>
+          <a:p>
+            <a:endParaRPr lang="en-US"/>
+          </a:p>
+        </p:txBody>
       </p:sp>
       <p:sp>
         <p:nvSpPr>
@@ -10505,7 +10598,7 @@
           <a:bodyPr wrap="square" lIns="0" tIns="0" rIns="0" bIns="0" rtlCol="0" anchor="ctr"/>
           <a:lstStyle/>
           <a:p>
-            <a:pPr indent="0" marL="0">
+            <a:pPr marL="0" indent="0">
               <a:buNone/>
             </a:pPr>
             <a:r>
@@ -10544,7 +10637,7 @@
           <a:bodyPr wrap="square" lIns="0" tIns="0" rIns="0" bIns="0" rtlCol="0" anchor="ctr"/>
           <a:lstStyle/>
           <a:p>
-            <a:pPr indent="0" marL="0">
+            <a:pPr marL="0" indent="0">
               <a:buNone/>
             </a:pPr>
             <a:r>
@@ -10583,7 +10676,7 @@
           <a:bodyPr wrap="square" lIns="0" tIns="0" rIns="0" bIns="0" rtlCol="0" anchor="ctr"/>
           <a:lstStyle/>
           <a:p>
-            <a:pPr indent="0" marL="0">
+            <a:pPr marL="0" indent="0">
               <a:buNone/>
             </a:pPr>
             <a:r>
@@ -10622,7 +10715,7 @@
           <a:bodyPr wrap="square" lIns="0" tIns="0" rIns="0" bIns="0" rtlCol="0" anchor="ctr"/>
           <a:lstStyle/>
           <a:p>
-            <a:pPr indent="0" marL="0">
+            <a:pPr marL="0" indent="0">
               <a:buNone/>
             </a:pPr>
             <a:r>
@@ -10661,7 +10754,7 @@
           <a:bodyPr wrap="square" lIns="0" tIns="0" rIns="0" bIns="0" rtlCol="0" anchor="ctr"/>
           <a:lstStyle/>
           <a:p>
-            <a:pPr indent="0" marL="0">
+            <a:pPr marL="0" indent="0">
               <a:buNone/>
             </a:pPr>
             <a:r>
@@ -10700,7 +10793,7 @@
           <a:bodyPr wrap="square" lIns="0" tIns="0" rIns="0" bIns="0" rtlCol="0" anchor="ctr"/>
           <a:lstStyle/>
           <a:p>
-            <a:pPr indent="0" marL="0">
+            <a:pPr marL="0" indent="0">
               <a:buNone/>
             </a:pPr>
             <a:r>
@@ -10739,7 +10832,7 @@
           <a:bodyPr wrap="square" lIns="0" tIns="0" rIns="0" bIns="0" rtlCol="0" anchor="ctr"/>
           <a:lstStyle/>
           <a:p>
-            <a:pPr indent="0" marL="0">
+            <a:pPr marL="0" indent="0">
               <a:buNone/>
             </a:pPr>
             <a:r>
@@ -10778,7 +10871,7 @@
           <a:bodyPr wrap="square" lIns="0" tIns="0" rIns="0" bIns="0" rtlCol="0" anchor="ctr"/>
           <a:lstStyle/>
           <a:p>
-            <a:pPr indent="0" marL="0">
+            <a:pPr marL="0" indent="0">
               <a:buNone/>
             </a:pPr>
             <a:r>
@@ -10817,7 +10910,7 @@
           <a:bodyPr wrap="square" lIns="0" tIns="0" rIns="0" bIns="0" rtlCol="0" anchor="ctr"/>
           <a:lstStyle/>
           <a:p>
-            <a:pPr indent="0" marL="0">
+            <a:pPr marL="0" indent="0">
               <a:buNone/>
             </a:pPr>
             <a:r>
@@ -10856,7 +10949,7 @@
           <a:bodyPr wrap="square" lIns="0" tIns="0" rIns="0" bIns="0" rtlCol="0" anchor="ctr"/>
           <a:lstStyle/>
           <a:p>
-            <a:pPr indent="0" marL="0">
+            <a:pPr marL="0" indent="0">
               <a:buNone/>
             </a:pPr>
             <a:r>
@@ -10895,7 +10988,7 @@
           <a:bodyPr wrap="square" lIns="0" tIns="0" rIns="0" bIns="0" rtlCol="0" anchor="ctr"/>
           <a:lstStyle/>
           <a:p>
-            <a:pPr indent="0" marL="0">
+            <a:pPr marL="0" indent="0">
               <a:buNone/>
             </a:pPr>
             <a:r>
@@ -10934,7 +11027,7 @@
           <a:bodyPr wrap="square" lIns="0" tIns="0" rIns="0" bIns="0" rtlCol="0" anchor="ctr"/>
           <a:lstStyle/>
           <a:p>
-            <a:pPr indent="0" marL="0">
+            <a:pPr marL="0" indent="0">
               <a:buNone/>
             </a:pPr>
             <a:r>
@@ -10973,7 +11066,7 @@
           <a:bodyPr wrap="square" lIns="0" tIns="0" rIns="0" bIns="0" rtlCol="0" anchor="ctr"/>
           <a:lstStyle/>
           <a:p>
-            <a:pPr indent="0" marL="0">
+            <a:pPr marL="0" indent="0">
               <a:buNone/>
             </a:pPr>
             <a:r>
@@ -11012,7 +11105,7 @@
           <a:bodyPr wrap="square" lIns="0" tIns="0" rIns="0" bIns="0" rtlCol="0" anchor="ctr"/>
           <a:lstStyle/>
           <a:p>
-            <a:pPr indent="0" marL="0">
+            <a:pPr marL="0" indent="0">
               <a:buNone/>
             </a:pPr>
             <a:r>
@@ -11051,7 +11144,7 @@
           <a:bodyPr wrap="square" lIns="0" tIns="0" rIns="0" bIns="0" rtlCol="0" anchor="ctr"/>
           <a:lstStyle/>
           <a:p>
-            <a:pPr indent="0" marL="0">
+            <a:pPr marL="0" indent="0">
               <a:buNone/>
             </a:pPr>
             <a:r>
@@ -11090,7 +11183,7 @@
           <a:bodyPr wrap="square" lIns="0" tIns="0" rIns="0" bIns="0" rtlCol="0" anchor="ctr"/>
           <a:lstStyle/>
           <a:p>
-            <a:pPr indent="0" marL="0">
+            <a:pPr marL="0" indent="0">
               <a:buNone/>
             </a:pPr>
             <a:r>
@@ -11129,7 +11222,7 @@
           <a:bodyPr wrap="square" lIns="0" tIns="0" rIns="0" bIns="0" rtlCol="0" anchor="ctr"/>
           <a:lstStyle/>
           <a:p>
-            <a:pPr indent="0" marL="0">
+            <a:pPr marL="0" indent="0">
               <a:buNone/>
             </a:pPr>
             <a:r>
@@ -11168,7 +11261,7 @@
           <a:bodyPr wrap="square" lIns="0" tIns="0" rIns="0" bIns="0" rtlCol="0" anchor="ctr"/>
           <a:lstStyle/>
           <a:p>
-            <a:pPr indent="0" marL="0">
+            <a:pPr marL="0" indent="0">
               <a:buNone/>
             </a:pPr>
             <a:r>
@@ -11207,7 +11300,7 @@
           <a:bodyPr wrap="square" lIns="0" tIns="0" rIns="0" bIns="0" rtlCol="0" anchor="ctr"/>
           <a:lstStyle/>
           <a:p>
-            <a:pPr indent="0" marL="0">
+            <a:pPr marL="0" indent="0">
               <a:buNone/>
             </a:pPr>
             <a:r>
@@ -11246,7 +11339,7 @@
           <a:bodyPr wrap="square" lIns="0" tIns="0" rIns="0" bIns="0" rtlCol="0" anchor="ctr"/>
           <a:lstStyle/>
           <a:p>
-            <a:pPr indent="0" marL="0">
+            <a:pPr marL="0" indent="0">
               <a:buNone/>
             </a:pPr>
             <a:r>
@@ -11285,7 +11378,7 @@
           <a:bodyPr wrap="square" lIns="0" tIns="0" rIns="0" bIns="0" rtlCol="0" anchor="ctr"/>
           <a:lstStyle/>
           <a:p>
-            <a:pPr indent="0" marL="0">
+            <a:pPr marL="0" indent="0">
               <a:buNone/>
             </a:pPr>
             <a:r>
@@ -11324,7 +11417,7 @@
           <a:bodyPr wrap="square" lIns="0" tIns="0" rIns="0" bIns="0" rtlCol="0" anchor="ctr"/>
           <a:lstStyle/>
           <a:p>
-            <a:pPr indent="0" marL="0">
+            <a:pPr marL="0" indent="0">
               <a:buNone/>
             </a:pPr>
             <a:r>
@@ -11366,13 +11459,20 @@
             <a:prstDash val="solid"/>
           </a:ln>
           <a:effectLst>
-            <a:outerShdw sx="100000" sy="100000" kx="0" ky="0" algn="bl" rotWithShape="0" blurRad="101600" dist="12700" dir="5400000">
+            <a:outerShdw blurRad="101600" dist="12700" dir="5400000" algn="bl" rotWithShape="0">
               <a:srgbClr val="94A3B8">
                 <a:alpha val="12000"/>
               </a:srgbClr>
             </a:outerShdw>
           </a:effectLst>
         </p:spPr>
+        <p:txBody>
+          <a:bodyPr/>
+          <a:lstStyle/>
+          <a:p>
+            <a:endParaRPr lang="en-US"/>
+          </a:p>
+        </p:txBody>
       </p:sp>
       <p:sp>
         <p:nvSpPr>
@@ -11398,6 +11498,13 @@
             <a:prstDash val="solid"/>
           </a:ln>
         </p:spPr>
+        <p:txBody>
+          <a:bodyPr/>
+          <a:lstStyle/>
+          <a:p>
+            <a:endParaRPr lang="en-US"/>
+          </a:p>
+        </p:txBody>
       </p:sp>
       <p:sp>
         <p:nvSpPr>
@@ -11420,7 +11527,7 @@
           <a:bodyPr wrap="square" lIns="0" tIns="0" rIns="0" bIns="0" rtlCol="0" anchor="ctr"/>
           <a:lstStyle/>
           <a:p>
-            <a:pPr indent="0" marL="0">
+            <a:pPr marL="0" indent="0">
               <a:buNone/>
             </a:pPr>
             <a:r>
@@ -11459,7 +11566,7 @@
           <a:bodyPr wrap="square" lIns="0" tIns="0" rIns="0" bIns="0" rtlCol="0" anchor="ctr"/>
           <a:lstStyle/>
           <a:p>
-            <a:pPr indent="0" marL="0">
+            <a:pPr marL="0" indent="0">
               <a:buNone/>
             </a:pPr>
             <a:r>
@@ -11476,7 +11583,7 @@
             <a:endParaRPr lang="en-US" sz="1000" dirty="0"/>
           </a:p>
           <a:p>
-            <a:pPr indent="0" marL="0">
+            <a:pPr marL="0" indent="0">
               <a:buNone/>
             </a:pPr>
             <a:r>
@@ -11493,7 +11600,7 @@
             <a:endParaRPr lang="en-US" sz="1000" dirty="0"/>
           </a:p>
           <a:p>
-            <a:pPr indent="0" marL="0">
+            <a:pPr marL="0" indent="0">
               <a:buNone/>
             </a:pPr>
             <a:r>
@@ -11510,7 +11617,7 @@
             <a:endParaRPr lang="en-US" sz="1000" dirty="0"/>
           </a:p>
           <a:p>
-            <a:pPr indent="0" marL="0">
+            <a:pPr marL="0" indent="0">
               <a:buNone/>
             </a:pPr>
             <a:r>
@@ -11527,7 +11634,7 @@
             <a:endParaRPr lang="en-US" sz="1000" dirty="0"/>
           </a:p>
           <a:p>
-            <a:pPr indent="0" marL="0">
+            <a:pPr marL="0" indent="0">
               <a:buNone/>
             </a:pPr>
             <a:r>
@@ -11544,7 +11651,7 @@
             <a:endParaRPr lang="en-US" sz="1000" dirty="0"/>
           </a:p>
           <a:p>
-            <a:pPr indent="0" marL="0">
+            <a:pPr marL="0" indent="0">
               <a:buNone/>
             </a:pPr>
             <a:r>
@@ -11561,7 +11668,7 @@
             <a:endParaRPr lang="en-US" sz="1000" dirty="0"/>
           </a:p>
           <a:p>
-            <a:pPr indent="0" marL="0">
+            <a:pPr marL="0" indent="0">
               <a:buNone/>
             </a:pPr>
             <a:r>
@@ -11578,7 +11685,7 @@
             <a:endParaRPr lang="en-US" sz="1000" dirty="0"/>
           </a:p>
           <a:p>
-            <a:pPr indent="0" marL="0">
+            <a:pPr marL="0" indent="0">
               <a:buNone/>
             </a:pPr>
             <a:r>
@@ -11595,7 +11702,7 @@
             <a:endParaRPr lang="en-US" sz="1000" dirty="0"/>
           </a:p>
           <a:p>
-            <a:pPr indent="0" marL="0">
+            <a:pPr marL="0" indent="0">
               <a:buNone/>
             </a:pPr>
             <a:r>
@@ -11612,7 +11719,7 @@
             <a:endParaRPr lang="en-US" sz="1000" dirty="0"/>
           </a:p>
           <a:p>
-            <a:pPr indent="0" marL="0">
+            <a:pPr marL="0" indent="0">
               <a:buNone/>
             </a:pPr>
             <a:r>
@@ -11629,7 +11736,7 @@
             <a:endParaRPr lang="en-US" sz="1000" dirty="0"/>
           </a:p>
           <a:p>
-            <a:pPr indent="0" marL="0">
+            <a:pPr marL="0" indent="0">
               <a:buNone/>
             </a:pPr>
             <a:r>
@@ -11668,7 +11775,7 @@
           <a:bodyPr wrap="square" lIns="0" tIns="0" rIns="0" bIns="0" rtlCol="0" anchor="ctr"/>
           <a:lstStyle/>
           <a:p>
-            <a:pPr algn="l" indent="0" marL="0">
+            <a:pPr marL="0" indent="0" algn="l">
               <a:buNone/>
             </a:pPr>
             <a:r>
@@ -11707,7 +11814,7 @@
           <a:bodyPr wrap="square" lIns="0" tIns="0" rIns="0" bIns="0" rtlCol="0" anchor="ctr"/>
           <a:lstStyle/>
           <a:p>
-            <a:pPr algn="r" indent="0" marL="0">
+            <a:pPr marL="0" indent="0" algn="r">
               <a:buNone/>
             </a:pPr>
             <a:r>
@@ -11741,6 +11848,7 @@
         <a:solidFill>
           <a:srgbClr val="FFFFFF"/>
         </a:solidFill>
+        <a:effectLst/>
       </p:bgPr>
     </p:bg>
     <p:spTree>
@@ -11778,11 +11886,11 @@
           <a:bodyPr wrap="square" lIns="0" tIns="0" rIns="0" bIns="0" rtlCol="0" anchor="ctr"/>
           <a:lstStyle/>
           <a:p>
-            <a:pPr indent="0" marL="0">
-              <a:buNone/>
-            </a:pPr>
-            <a:r>
-              <a:rPr lang="en-US" sz="1100" b="1" spc="400" kern="0" dirty="0">
+            <a:pPr marL="0" indent="0">
+              <a:buNone/>
+            </a:pPr>
+            <a:r>
+              <a:rPr lang="en-US" sz="1100" b="1" kern="0" spc="400" dirty="0">
                 <a:solidFill>
                   <a:srgbClr val="1C7293"/>
                 </a:solidFill>
@@ -11817,7 +11925,7 @@
           <a:bodyPr wrap="square" lIns="0" tIns="0" rIns="0" bIns="0" rtlCol="0" anchor="ctr"/>
           <a:lstStyle/>
           <a:p>
-            <a:pPr indent="0" marL="0">
+            <a:pPr marL="0" indent="0">
               <a:buNone/>
             </a:pPr>
             <a:r>
@@ -11859,13 +11967,20 @@
             <a:prstDash val="solid"/>
           </a:ln>
           <a:effectLst>
-            <a:outerShdw sx="100000" sy="100000" kx="0" ky="0" algn="bl" rotWithShape="0" blurRad="101600" dist="12700" dir="5400000">
+            <a:outerShdw blurRad="101600" dist="12700" dir="5400000" algn="bl" rotWithShape="0">
               <a:srgbClr val="94A3B8">
                 <a:alpha val="12000"/>
               </a:srgbClr>
             </a:outerShdw>
           </a:effectLst>
         </p:spPr>
+        <p:txBody>
+          <a:bodyPr/>
+          <a:lstStyle/>
+          <a:p>
+            <a:endParaRPr lang="en-US"/>
+          </a:p>
+        </p:txBody>
       </p:sp>
       <p:sp>
         <p:nvSpPr>
@@ -11891,6 +12006,13 @@
             <a:prstDash val="solid"/>
           </a:ln>
         </p:spPr>
+        <p:txBody>
+          <a:bodyPr/>
+          <a:lstStyle/>
+          <a:p>
+            <a:endParaRPr lang="en-US"/>
+          </a:p>
+        </p:txBody>
       </p:sp>
       <p:sp>
         <p:nvSpPr>
@@ -11913,7 +12035,7 @@
           <a:bodyPr wrap="square" lIns="0" tIns="0" rIns="0" bIns="0" rtlCol="0" anchor="ctr"/>
           <a:lstStyle/>
           <a:p>
-            <a:pPr indent="0" marL="0">
+            <a:pPr marL="0" indent="0">
               <a:buNone/>
             </a:pPr>
             <a:r>
@@ -11952,7 +12074,7 @@
           <a:bodyPr wrap="square" lIns="0" tIns="0" rIns="0" bIns="0" rtlCol="0" anchor="ctr"/>
           <a:lstStyle/>
           <a:p>
-            <a:pPr indent="0" marL="0">
+            <a:pPr marL="0" indent="0">
               <a:buNone/>
             </a:pPr>
             <a:r>
@@ -11994,13 +12116,20 @@
             <a:prstDash val="solid"/>
           </a:ln>
           <a:effectLst>
-            <a:outerShdw sx="100000" sy="100000" kx="0" ky="0" algn="bl" rotWithShape="0" blurRad="101600" dist="12700" dir="5400000">
+            <a:outerShdw blurRad="101600" dist="12700" dir="5400000" algn="bl" rotWithShape="0">
               <a:srgbClr val="94A3B8">
                 <a:alpha val="12000"/>
               </a:srgbClr>
             </a:outerShdw>
           </a:effectLst>
         </p:spPr>
+        <p:txBody>
+          <a:bodyPr/>
+          <a:lstStyle/>
+          <a:p>
+            <a:endParaRPr lang="en-US"/>
+          </a:p>
+        </p:txBody>
       </p:sp>
       <p:sp>
         <p:nvSpPr>
@@ -12026,6 +12155,13 @@
             <a:prstDash val="solid"/>
           </a:ln>
         </p:spPr>
+        <p:txBody>
+          <a:bodyPr/>
+          <a:lstStyle/>
+          <a:p>
+            <a:endParaRPr lang="en-US"/>
+          </a:p>
+        </p:txBody>
       </p:sp>
       <p:sp>
         <p:nvSpPr>
@@ -12048,7 +12184,7 @@
           <a:bodyPr wrap="square" lIns="0" tIns="0" rIns="0" bIns="0" rtlCol="0" anchor="ctr"/>
           <a:lstStyle/>
           <a:p>
-            <a:pPr indent="0" marL="0">
+            <a:pPr marL="0" indent="0">
               <a:buNone/>
             </a:pPr>
             <a:r>
@@ -12087,7 +12223,7 @@
           <a:bodyPr wrap="square" lIns="0" tIns="0" rIns="0" bIns="0" rtlCol="0" anchor="ctr"/>
           <a:lstStyle/>
           <a:p>
-            <a:pPr indent="0" marL="0">
+            <a:pPr marL="0" indent="0">
               <a:buNone/>
             </a:pPr>
             <a:r>
@@ -12129,13 +12265,20 @@
             <a:prstDash val="solid"/>
           </a:ln>
           <a:effectLst>
-            <a:outerShdw sx="100000" sy="100000" kx="0" ky="0" algn="bl" rotWithShape="0" blurRad="101600" dist="12700" dir="5400000">
+            <a:outerShdw blurRad="101600" dist="12700" dir="5400000" algn="bl" rotWithShape="0">
               <a:srgbClr val="94A3B8">
                 <a:alpha val="12000"/>
               </a:srgbClr>
             </a:outerShdw>
           </a:effectLst>
         </p:spPr>
+        <p:txBody>
+          <a:bodyPr/>
+          <a:lstStyle/>
+          <a:p>
+            <a:endParaRPr lang="en-US"/>
+          </a:p>
+        </p:txBody>
       </p:sp>
       <p:sp>
         <p:nvSpPr>
@@ -12161,6 +12304,13 @@
             <a:prstDash val="solid"/>
           </a:ln>
         </p:spPr>
+        <p:txBody>
+          <a:bodyPr/>
+          <a:lstStyle/>
+          <a:p>
+            <a:endParaRPr lang="en-US"/>
+          </a:p>
+        </p:txBody>
       </p:sp>
       <p:sp>
         <p:nvSpPr>
@@ -12183,7 +12333,7 @@
           <a:bodyPr wrap="square" lIns="0" tIns="0" rIns="0" bIns="0" rtlCol="0" anchor="ctr"/>
           <a:lstStyle/>
           <a:p>
-            <a:pPr indent="0" marL="0">
+            <a:pPr marL="0" indent="0">
               <a:buNone/>
             </a:pPr>
             <a:r>
@@ -12222,7 +12372,7 @@
           <a:bodyPr wrap="square" lIns="0" tIns="0" rIns="0" bIns="0" rtlCol="0" anchor="ctr"/>
           <a:lstStyle/>
           <a:p>
-            <a:pPr indent="0" marL="0">
+            <a:pPr marL="0" indent="0">
               <a:buNone/>
             </a:pPr>
             <a:r>
@@ -12264,13 +12414,20 @@
             <a:prstDash val="solid"/>
           </a:ln>
           <a:effectLst>
-            <a:outerShdw sx="100000" sy="100000" kx="0" ky="0" algn="bl" rotWithShape="0" blurRad="101600" dist="12700" dir="5400000">
+            <a:outerShdw blurRad="101600" dist="12700" dir="5400000" algn="bl" rotWithShape="0">
               <a:srgbClr val="94A3B8">
                 <a:alpha val="12000"/>
               </a:srgbClr>
             </a:outerShdw>
           </a:effectLst>
         </p:spPr>
+        <p:txBody>
+          <a:bodyPr/>
+          <a:lstStyle/>
+          <a:p>
+            <a:endParaRPr lang="en-US"/>
+          </a:p>
+        </p:txBody>
       </p:sp>
       <p:sp>
         <p:nvSpPr>
@@ -12296,6 +12453,13 @@
             <a:prstDash val="solid"/>
           </a:ln>
         </p:spPr>
+        <p:txBody>
+          <a:bodyPr/>
+          <a:lstStyle/>
+          <a:p>
+            <a:endParaRPr lang="en-US"/>
+          </a:p>
+        </p:txBody>
       </p:sp>
       <p:sp>
         <p:nvSpPr>
@@ -12318,7 +12482,7 @@
           <a:bodyPr wrap="square" lIns="0" tIns="0" rIns="0" bIns="0" rtlCol="0" anchor="ctr"/>
           <a:lstStyle/>
           <a:p>
-            <a:pPr indent="0" marL="0">
+            <a:pPr marL="0" indent="0">
               <a:buNone/>
             </a:pPr>
             <a:r>
@@ -12357,7 +12521,7 @@
           <a:bodyPr wrap="square" lIns="0" tIns="0" rIns="0" bIns="0" rtlCol="0" anchor="ctr"/>
           <a:lstStyle/>
           <a:p>
-            <a:pPr indent="0" marL="0">
+            <a:pPr marL="0" indent="0">
               <a:buNone/>
             </a:pPr>
             <a:r>
@@ -12396,7 +12560,7 @@
           <a:bodyPr wrap="square" lIns="0" tIns="0" rIns="0" bIns="0" rtlCol="0" anchor="ctr"/>
           <a:lstStyle/>
           <a:p>
-            <a:pPr algn="r" indent="0" marL="0">
+            <a:pPr marL="0" indent="0" algn="r">
               <a:buNone/>
             </a:pPr>
             <a:r>
@@ -12430,6 +12594,7 @@
         <a:solidFill>
           <a:srgbClr val="FFFFFF"/>
         </a:solidFill>
+        <a:effectLst/>
       </p:bgPr>
     </p:bg>
     <p:spTree>
@@ -12467,11 +12632,11 @@
           <a:bodyPr wrap="square" lIns="0" tIns="0" rIns="0" bIns="0" rtlCol="0" anchor="ctr"/>
           <a:lstStyle/>
           <a:p>
-            <a:pPr indent="0" marL="0">
-              <a:buNone/>
-            </a:pPr>
-            <a:r>
-              <a:rPr lang="en-US" sz="1100" b="1" spc="400" kern="0" dirty="0">
+            <a:pPr marL="0" indent="0">
+              <a:buNone/>
+            </a:pPr>
+            <a:r>
+              <a:rPr lang="en-US" sz="1100" b="1" kern="0" spc="400" dirty="0">
                 <a:solidFill>
                   <a:srgbClr val="1C7293"/>
                 </a:solidFill>
@@ -12506,7 +12671,7 @@
           <a:bodyPr wrap="square" lIns="0" tIns="0" rIns="0" bIns="0" rtlCol="0" anchor="ctr"/>
           <a:lstStyle/>
           <a:p>
-            <a:pPr indent="0" marL="0">
+            <a:pPr marL="0" indent="0">
               <a:buNone/>
             </a:pPr>
             <a:r>
@@ -12548,6 +12713,13 @@
             <a:prstDash val="solid"/>
           </a:ln>
         </p:spPr>
+        <p:txBody>
+          <a:bodyPr/>
+          <a:lstStyle/>
+          <a:p>
+            <a:endParaRPr lang="en-US"/>
+          </a:p>
+        </p:txBody>
       </p:sp>
       <p:sp>
         <p:nvSpPr>
@@ -12570,7 +12742,7 @@
           <a:bodyPr wrap="square" lIns="0" tIns="0" rIns="0" bIns="0" rtlCol="0" anchor="ctr"/>
           <a:lstStyle/>
           <a:p>
-            <a:pPr algn="ctr" indent="0" marL="0">
+            <a:pPr marL="0" indent="0" algn="ctr">
               <a:buNone/>
             </a:pPr>
             <a:r>
@@ -12609,7 +12781,7 @@
           <a:bodyPr wrap="square" lIns="0" tIns="0" rIns="0" bIns="0" rtlCol="0" anchor="ctr"/>
           <a:lstStyle/>
           <a:p>
-            <a:pPr indent="0" marL="0">
+            <a:pPr marL="0" indent="0">
               <a:buNone/>
             </a:pPr>
             <a:r>
@@ -12651,6 +12823,13 @@
             <a:prstDash val="solid"/>
           </a:ln>
         </p:spPr>
+        <p:txBody>
+          <a:bodyPr/>
+          <a:lstStyle/>
+          <a:p>
+            <a:endParaRPr lang="en-US"/>
+          </a:p>
+        </p:txBody>
       </p:sp>
       <p:sp>
         <p:nvSpPr>
@@ -12673,7 +12852,7 @@
           <a:bodyPr wrap="square" lIns="0" tIns="0" rIns="0" bIns="0" rtlCol="0" anchor="ctr"/>
           <a:lstStyle/>
           <a:p>
-            <a:pPr algn="ctr" indent="0" marL="0">
+            <a:pPr marL="0" indent="0" algn="ctr">
               <a:buNone/>
             </a:pPr>
             <a:r>
@@ -12712,7 +12891,7 @@
           <a:bodyPr wrap="square" lIns="0" tIns="0" rIns="0" bIns="0" rtlCol="0" anchor="ctr"/>
           <a:lstStyle/>
           <a:p>
-            <a:pPr indent="0" marL="0">
+            <a:pPr marL="0" indent="0">
               <a:buNone/>
             </a:pPr>
             <a:r>
@@ -12754,6 +12933,13 @@
             <a:prstDash val="solid"/>
           </a:ln>
         </p:spPr>
+        <p:txBody>
+          <a:bodyPr/>
+          <a:lstStyle/>
+          <a:p>
+            <a:endParaRPr lang="en-US"/>
+          </a:p>
+        </p:txBody>
       </p:sp>
       <p:sp>
         <p:nvSpPr>
@@ -12776,7 +12962,7 @@
           <a:bodyPr wrap="square" lIns="0" tIns="0" rIns="0" bIns="0" rtlCol="0" anchor="ctr"/>
           <a:lstStyle/>
           <a:p>
-            <a:pPr algn="ctr" indent="0" marL="0">
+            <a:pPr marL="0" indent="0" algn="ctr">
               <a:buNone/>
             </a:pPr>
             <a:r>
@@ -12815,7 +13001,7 @@
           <a:bodyPr wrap="square" lIns="0" tIns="0" rIns="0" bIns="0" rtlCol="0" anchor="ctr"/>
           <a:lstStyle/>
           <a:p>
-            <a:pPr indent="0" marL="0">
+            <a:pPr marL="0" indent="0">
               <a:buNone/>
             </a:pPr>
             <a:r>
@@ -12857,6 +13043,13 @@
             <a:prstDash val="solid"/>
           </a:ln>
         </p:spPr>
+        <p:txBody>
+          <a:bodyPr/>
+          <a:lstStyle/>
+          <a:p>
+            <a:endParaRPr lang="en-US"/>
+          </a:p>
+        </p:txBody>
       </p:sp>
       <p:sp>
         <p:nvSpPr>
@@ -12879,7 +13072,7 @@
           <a:bodyPr wrap="square" lIns="0" tIns="0" rIns="0" bIns="0" rtlCol="0" anchor="ctr"/>
           <a:lstStyle/>
           <a:p>
-            <a:pPr algn="ctr" indent="0" marL="0">
+            <a:pPr marL="0" indent="0" algn="ctr">
               <a:buNone/>
             </a:pPr>
             <a:r>
@@ -12918,7 +13111,7 @@
           <a:bodyPr wrap="square" lIns="0" tIns="0" rIns="0" bIns="0" rtlCol="0" anchor="ctr"/>
           <a:lstStyle/>
           <a:p>
-            <a:pPr indent="0" marL="0">
+            <a:pPr marL="0" indent="0">
               <a:buNone/>
             </a:pPr>
             <a:r>
@@ -12960,6 +13153,13 @@
             <a:prstDash val="solid"/>
           </a:ln>
         </p:spPr>
+        <p:txBody>
+          <a:bodyPr/>
+          <a:lstStyle/>
+          <a:p>
+            <a:endParaRPr lang="en-US"/>
+          </a:p>
+        </p:txBody>
       </p:sp>
       <p:sp>
         <p:nvSpPr>
@@ -12982,7 +13182,7 @@
           <a:bodyPr wrap="square" lIns="0" tIns="0" rIns="0" bIns="0" rtlCol="0" anchor="ctr"/>
           <a:lstStyle/>
           <a:p>
-            <a:pPr algn="ctr" indent="0" marL="0">
+            <a:pPr marL="0" indent="0" algn="ctr">
               <a:buNone/>
             </a:pPr>
             <a:r>
@@ -13021,7 +13221,7 @@
           <a:bodyPr wrap="square" lIns="0" tIns="0" rIns="0" bIns="0" rtlCol="0" anchor="ctr"/>
           <a:lstStyle/>
           <a:p>
-            <a:pPr indent="0" marL="0">
+            <a:pPr marL="0" indent="0">
               <a:buNone/>
             </a:pPr>
             <a:r>
@@ -13063,6 +13263,13 @@
             <a:prstDash val="solid"/>
           </a:ln>
         </p:spPr>
+        <p:txBody>
+          <a:bodyPr/>
+          <a:lstStyle/>
+          <a:p>
+            <a:endParaRPr lang="en-US"/>
+          </a:p>
+        </p:txBody>
       </p:sp>
       <p:sp>
         <p:nvSpPr>
@@ -13085,7 +13292,7 @@
           <a:bodyPr wrap="square" lIns="0" tIns="0" rIns="0" bIns="0" rtlCol="0" anchor="ctr"/>
           <a:lstStyle/>
           <a:p>
-            <a:pPr algn="ctr" indent="0" marL="0">
+            <a:pPr marL="0" indent="0" algn="ctr">
               <a:buNone/>
             </a:pPr>
             <a:r>
@@ -13124,7 +13331,7 @@
           <a:bodyPr wrap="square" lIns="0" tIns="0" rIns="0" bIns="0" rtlCol="0" anchor="ctr"/>
           <a:lstStyle/>
           <a:p>
-            <a:pPr indent="0" marL="0">
+            <a:pPr marL="0" indent="0">
               <a:buNone/>
             </a:pPr>
             <a:r>
@@ -13163,7 +13370,7 @@
           <a:bodyPr wrap="square" lIns="0" tIns="0" rIns="0" bIns="0" rtlCol="0" anchor="ctr"/>
           <a:lstStyle/>
           <a:p>
-            <a:pPr algn="l" indent="0" marL="0">
+            <a:pPr marL="0" indent="0" algn="l">
               <a:buNone/>
             </a:pPr>
             <a:r>
@@ -13202,7 +13409,7 @@
           <a:bodyPr wrap="square" lIns="0" tIns="0" rIns="0" bIns="0" rtlCol="0" anchor="ctr"/>
           <a:lstStyle/>
           <a:p>
-            <a:pPr algn="r" indent="0" marL="0">
+            <a:pPr marL="0" indent="0" algn="r">
               <a:buNone/>
             </a:pPr>
             <a:r>
@@ -13236,6 +13443,7 @@
         <a:solidFill>
           <a:srgbClr val="21295C"/>
         </a:solidFill>
+        <a:effectLst/>
       </p:bgPr>
     </p:bg>
     <p:spTree>
@@ -13273,11 +13481,11 @@
           <a:bodyPr wrap="square" lIns="0" tIns="0" rIns="0" bIns="0" rtlCol="0" anchor="ctr"/>
           <a:lstStyle/>
           <a:p>
-            <a:pPr indent="0" marL="0">
-              <a:buNone/>
-            </a:pPr>
-            <a:r>
-              <a:rPr lang="en-US" sz="1100" b="1" spc="400" kern="0" dirty="0">
+            <a:pPr marL="0" indent="0">
+              <a:buNone/>
+            </a:pPr>
+            <a:r>
+              <a:rPr lang="en-US" sz="1100" b="1" kern="0" spc="400" dirty="0">
                 <a:solidFill>
                   <a:srgbClr val="1C7293"/>
                 </a:solidFill>
@@ -13312,7 +13520,7 @@
           <a:bodyPr wrap="square" lIns="0" tIns="0" rIns="0" bIns="0" rtlCol="0" anchor="ctr"/>
           <a:lstStyle/>
           <a:p>
-            <a:pPr indent="0" marL="0">
+            <a:pPr marL="0" indent="0">
               <a:buNone/>
             </a:pPr>
             <a:r>
@@ -13354,6 +13562,13 @@
             <a:prstDash val="solid"/>
           </a:ln>
         </p:spPr>
+        <p:txBody>
+          <a:bodyPr/>
+          <a:lstStyle/>
+          <a:p>
+            <a:endParaRPr lang="en-US"/>
+          </a:p>
+        </p:txBody>
       </p:sp>
       <p:sp>
         <p:nvSpPr>
@@ -13376,7 +13591,7 @@
           <a:bodyPr wrap="square" lIns="0" tIns="0" rIns="0" bIns="0" rtlCol="0" anchor="ctr"/>
           <a:lstStyle/>
           <a:p>
-            <a:pPr algn="ctr" indent="0" marL="0">
+            <a:pPr marL="0" indent="0" algn="ctr">
               <a:buNone/>
             </a:pPr>
             <a:r>
@@ -13415,7 +13630,7 @@
           <a:bodyPr wrap="square" lIns="0" tIns="0" rIns="0" bIns="0" rtlCol="0" anchor="ctr"/>
           <a:lstStyle/>
           <a:p>
-            <a:pPr indent="0" marL="0">
+            <a:pPr marL="0" indent="0">
               <a:buNone/>
             </a:pPr>
             <a:r>
@@ -13457,6 +13672,13 @@
             <a:prstDash val="solid"/>
           </a:ln>
         </p:spPr>
+        <p:txBody>
+          <a:bodyPr/>
+          <a:lstStyle/>
+          <a:p>
+            <a:endParaRPr lang="en-US"/>
+          </a:p>
+        </p:txBody>
       </p:sp>
       <p:sp>
         <p:nvSpPr>
@@ -13479,7 +13701,7 @@
           <a:bodyPr wrap="square" lIns="0" tIns="0" rIns="0" bIns="0" rtlCol="0" anchor="ctr"/>
           <a:lstStyle/>
           <a:p>
-            <a:pPr algn="ctr" indent="0" marL="0">
+            <a:pPr marL="0" indent="0" algn="ctr">
               <a:buNone/>
             </a:pPr>
             <a:r>
@@ -13518,7 +13740,7 @@
           <a:bodyPr wrap="square" lIns="0" tIns="0" rIns="0" bIns="0" rtlCol="0" anchor="ctr"/>
           <a:lstStyle/>
           <a:p>
-            <a:pPr indent="0" marL="0">
+            <a:pPr marL="0" indent="0">
               <a:buNone/>
             </a:pPr>
             <a:r>
@@ -13560,6 +13782,13 @@
             <a:prstDash val="solid"/>
           </a:ln>
         </p:spPr>
+        <p:txBody>
+          <a:bodyPr/>
+          <a:lstStyle/>
+          <a:p>
+            <a:endParaRPr lang="en-US"/>
+          </a:p>
+        </p:txBody>
       </p:sp>
       <p:sp>
         <p:nvSpPr>
@@ -13582,7 +13811,7 @@
           <a:bodyPr wrap="square" lIns="0" tIns="0" rIns="0" bIns="0" rtlCol="0" anchor="ctr"/>
           <a:lstStyle/>
           <a:p>
-            <a:pPr algn="ctr" indent="0" marL="0">
+            <a:pPr marL="0" indent="0" algn="ctr">
               <a:buNone/>
             </a:pPr>
             <a:r>
@@ -13621,7 +13850,7 @@
           <a:bodyPr wrap="square" lIns="0" tIns="0" rIns="0" bIns="0" rtlCol="0" anchor="ctr"/>
           <a:lstStyle/>
           <a:p>
-            <a:pPr indent="0" marL="0">
+            <a:pPr marL="0" indent="0">
               <a:buNone/>
             </a:pPr>
             <a:r>
@@ -13663,6 +13892,13 @@
             <a:prstDash val="solid"/>
           </a:ln>
         </p:spPr>
+        <p:txBody>
+          <a:bodyPr/>
+          <a:lstStyle/>
+          <a:p>
+            <a:endParaRPr lang="en-US"/>
+          </a:p>
+        </p:txBody>
       </p:sp>
       <p:sp>
         <p:nvSpPr>
@@ -13685,7 +13921,7 @@
           <a:bodyPr wrap="square" lIns="0" tIns="0" rIns="0" bIns="0" rtlCol="0" anchor="ctr"/>
           <a:lstStyle/>
           <a:p>
-            <a:pPr algn="ctr" indent="0" marL="0">
+            <a:pPr marL="0" indent="0" algn="ctr">
               <a:buNone/>
             </a:pPr>
             <a:r>
@@ -13724,7 +13960,7 @@
           <a:bodyPr wrap="square" lIns="0" tIns="0" rIns="0" bIns="0" rtlCol="0" anchor="ctr"/>
           <a:lstStyle/>
           <a:p>
-            <a:pPr indent="0" marL="0">
+            <a:pPr marL="0" indent="0">
               <a:buNone/>
             </a:pPr>
             <a:r>
@@ -13766,6 +14002,13 @@
             <a:prstDash val="solid"/>
           </a:ln>
         </p:spPr>
+        <p:txBody>
+          <a:bodyPr/>
+          <a:lstStyle/>
+          <a:p>
+            <a:endParaRPr lang="en-US"/>
+          </a:p>
+        </p:txBody>
       </p:sp>
       <p:sp>
         <p:nvSpPr>
@@ -13788,11 +14031,11 @@
           <a:bodyPr wrap="square" lIns="0" tIns="0" rIns="0" bIns="0" rtlCol="0" anchor="ctr"/>
           <a:lstStyle/>
           <a:p>
-            <a:pPr indent="0" marL="0">
-              <a:buNone/>
-            </a:pPr>
-            <a:r>
-              <a:rPr lang="en-US" sz="2600" b="1" dirty="0">
+            <a:pPr marL="0" indent="0">
+              <a:buNone/>
+            </a:pPr>
+            <a:r>
+              <a:rPr lang="en-US" sz="2600" b="1" dirty="0" err="1">
                 <a:solidFill>
                   <a:srgbClr val="FFFFFF"/>
                 </a:solidFill>
@@ -13800,7 +14043,62 @@
                 <a:ea typeface="Trebuchet MS" pitchFamily="34" charset="-122"/>
                 <a:cs typeface="Trebuchet MS" pitchFamily="34" charset="-120"/>
               </a:rPr>
-              <a:t>Vielen Dank — Fragen &amp; Diskussion</a:t>
+              <a:t>Vielen</a:t>
+            </a:r>
+            <a:r>
+              <a:rPr lang="en-US" sz="2600" b="1" dirty="0">
+                <a:solidFill>
+                  <a:srgbClr val="FFFFFF"/>
+                </a:solidFill>
+                <a:latin typeface="Trebuchet MS" pitchFamily="34" charset="0"/>
+                <a:ea typeface="Trebuchet MS" pitchFamily="34" charset="-122"/>
+                <a:cs typeface="Trebuchet MS" pitchFamily="34" charset="-120"/>
+              </a:rPr>
+              <a:t> Dank für </a:t>
+            </a:r>
+            <a:r>
+              <a:rPr lang="en-US" sz="2600" b="1" dirty="0" err="1">
+                <a:solidFill>
+                  <a:srgbClr val="FFFFFF"/>
+                </a:solidFill>
+                <a:latin typeface="Trebuchet MS" pitchFamily="34" charset="0"/>
+                <a:ea typeface="Trebuchet MS" pitchFamily="34" charset="-122"/>
+                <a:cs typeface="Trebuchet MS" pitchFamily="34" charset="-120"/>
+              </a:rPr>
+              <a:t>eure</a:t>
+            </a:r>
+            <a:r>
+              <a:rPr lang="en-US" sz="2600" b="1" dirty="0">
+                <a:solidFill>
+                  <a:srgbClr val="FFFFFF"/>
+                </a:solidFill>
+                <a:latin typeface="Trebuchet MS" pitchFamily="34" charset="0"/>
+                <a:ea typeface="Trebuchet MS" pitchFamily="34" charset="-122"/>
+                <a:cs typeface="Trebuchet MS" pitchFamily="34" charset="-120"/>
+              </a:rPr>
+              <a:t> </a:t>
+            </a:r>
+            <a:r>
+              <a:rPr lang="en-US" sz="2600" b="1" dirty="0" err="1">
+                <a:solidFill>
+                  <a:srgbClr val="FFFFFF"/>
+                </a:solidFill>
+                <a:latin typeface="Trebuchet MS" pitchFamily="34" charset="0"/>
+                <a:ea typeface="Trebuchet MS" pitchFamily="34" charset="-122"/>
+                <a:cs typeface="Trebuchet MS" pitchFamily="34" charset="-120"/>
+              </a:rPr>
+              <a:t>Aufmerksamkeit</a:t>
+            </a:r>
+            <a:r>
+              <a:rPr lang="en-US" sz="2600" b="1" dirty="0">
+                <a:solidFill>
+                  <a:srgbClr val="FFFFFF"/>
+                </a:solidFill>
+                <a:latin typeface="Trebuchet MS" pitchFamily="34" charset="0"/>
+                <a:ea typeface="Trebuchet MS" pitchFamily="34" charset="-122"/>
+                <a:cs typeface="Trebuchet MS" pitchFamily="34" charset="-120"/>
+              </a:rPr>
+              <a:t>!</a:t>
             </a:r>
             <a:endParaRPr lang="en-US" sz="2600" dirty="0"/>
           </a:p>
@@ -13827,7 +14125,7 @@
           <a:bodyPr wrap="square" lIns="0" tIns="0" rIns="0" bIns="0" rtlCol="0" anchor="ctr"/>
           <a:lstStyle/>
           <a:p>
-            <a:pPr indent="0" marL="0">
+            <a:pPr marL="0" indent="0">
               <a:buNone/>
             </a:pPr>
             <a:r>
@@ -13839,7 +14137,7 @@
                 <a:ea typeface="Calibri" pitchFamily="34" charset="-122"/>
                 <a:cs typeface="Calibri" pitchFamily="34" charset="-120"/>
               </a:rPr>
-              <a:t>Repository · github.com/sanirmem/zh15min   ·   Live-Demo: docker compose up -d</a:t>
+              <a:t>Repository · github.com/sanirmem/zh15min</a:t>
             </a:r>
             <a:endParaRPr lang="en-US" sz="1200" dirty="0"/>
           </a:p>
@@ -13866,7 +14164,7 @@
           <a:bodyPr wrap="square" lIns="0" tIns="0" rIns="0" bIns="0" rtlCol="0" anchor="ctr"/>
           <a:lstStyle/>
           <a:p>
-            <a:pPr algn="l" indent="0" marL="0">
+            <a:pPr marL="0" indent="0" algn="l">
               <a:buNone/>
             </a:pPr>
             <a:r>
@@ -13905,7 +14203,7 @@
           <a:bodyPr wrap="square" lIns="0" tIns="0" rIns="0" bIns="0" rtlCol="0" anchor="ctr"/>
           <a:lstStyle/>
           <a:p>
-            <a:pPr algn="r" indent="0" marL="0">
+            <a:pPr marL="0" indent="0" algn="r">
               <a:buNone/>
             </a:pPr>
             <a:r>
@@ -13939,6 +14237,7 @@
         <a:solidFill>
           <a:srgbClr val="FFFFFF"/>
         </a:solidFill>
+        <a:effectLst/>
       </p:bgPr>
     </p:bg>
     <p:spTree>
@@ -13976,11 +14275,11 @@
           <a:bodyPr wrap="square" lIns="0" tIns="0" rIns="0" bIns="0" rtlCol="0" anchor="ctr"/>
           <a:lstStyle/>
           <a:p>
-            <a:pPr indent="0" marL="0">
-              <a:buNone/>
-            </a:pPr>
-            <a:r>
-              <a:rPr lang="en-US" sz="1100" b="1" spc="400" kern="0" dirty="0">
+            <a:pPr marL="0" indent="0">
+              <a:buNone/>
+            </a:pPr>
+            <a:r>
+              <a:rPr lang="en-US" sz="1100" b="1" kern="0" spc="400" dirty="0">
                 <a:solidFill>
                   <a:srgbClr val="1C7293"/>
                 </a:solidFill>
@@ -14015,7 +14314,7 @@
           <a:bodyPr wrap="square" lIns="0" tIns="0" rIns="0" bIns="0" rtlCol="0" anchor="ctr"/>
           <a:lstStyle/>
           <a:p>
-            <a:pPr indent="0" marL="0">
+            <a:pPr marL="0" indent="0">
               <a:buNone/>
             </a:pPr>
             <a:r>
@@ -14057,13 +14356,20 @@
             <a:prstDash val="solid"/>
           </a:ln>
           <a:effectLst>
-            <a:outerShdw sx="100000" sy="100000" kx="0" ky="0" algn="bl" rotWithShape="0" blurRad="101600" dist="12700" dir="5400000">
+            <a:outerShdw blurRad="101600" dist="12700" dir="5400000" algn="bl" rotWithShape="0">
               <a:srgbClr val="94A3B8">
                 <a:alpha val="12000"/>
               </a:srgbClr>
             </a:outerShdw>
           </a:effectLst>
         </p:spPr>
+        <p:txBody>
+          <a:bodyPr/>
+          <a:lstStyle/>
+          <a:p>
+            <a:endParaRPr lang="en-US"/>
+          </a:p>
+        </p:txBody>
       </p:sp>
       <p:sp>
         <p:nvSpPr>
@@ -14089,6 +14395,13 @@
             <a:prstDash val="solid"/>
           </a:ln>
         </p:spPr>
+        <p:txBody>
+          <a:bodyPr/>
+          <a:lstStyle/>
+          <a:p>
+            <a:endParaRPr lang="en-US"/>
+          </a:p>
+        </p:txBody>
       </p:sp>
       <p:sp>
         <p:nvSpPr>
@@ -14114,6 +14427,13 @@
             <a:prstDash val="solid"/>
           </a:ln>
         </p:spPr>
+        <p:txBody>
+          <a:bodyPr/>
+          <a:lstStyle/>
+          <a:p>
+            <a:endParaRPr lang="en-US"/>
+          </a:p>
+        </p:txBody>
       </p:sp>
       <p:sp>
         <p:nvSpPr>
@@ -14136,7 +14456,7 @@
           <a:bodyPr wrap="square" lIns="0" tIns="0" rIns="0" bIns="0" rtlCol="0" anchor="ctr"/>
           <a:lstStyle/>
           <a:p>
-            <a:pPr algn="ctr" indent="0" marL="0">
+            <a:pPr marL="0" indent="0" algn="ctr">
               <a:buNone/>
             </a:pPr>
             <a:r>
@@ -14175,7 +14495,7 @@
           <a:bodyPr wrap="square" lIns="0" tIns="0" rIns="0" bIns="0" rtlCol="0" anchor="ctr"/>
           <a:lstStyle/>
           <a:p>
-            <a:pPr indent="0" marL="0">
+            <a:pPr marL="0" indent="0">
               <a:buNone/>
             </a:pPr>
             <a:r>
@@ -14214,7 +14534,7 @@
           <a:bodyPr wrap="square" lIns="0" tIns="0" rIns="0" bIns="0" rtlCol="0" anchor="ctr"/>
           <a:lstStyle/>
           <a:p>
-            <a:pPr indent="0" marL="0">
+            <a:pPr marL="0" indent="0">
               <a:buNone/>
             </a:pPr>
             <a:r>
@@ -14256,13 +14576,20 @@
             <a:prstDash val="solid"/>
           </a:ln>
           <a:effectLst>
-            <a:outerShdw sx="100000" sy="100000" kx="0" ky="0" algn="bl" rotWithShape="0" blurRad="101600" dist="12700" dir="5400000">
+            <a:outerShdw blurRad="101600" dist="12700" dir="5400000" algn="bl" rotWithShape="0">
               <a:srgbClr val="94A3B8">
                 <a:alpha val="12000"/>
               </a:srgbClr>
             </a:outerShdw>
           </a:effectLst>
         </p:spPr>
+        <p:txBody>
+          <a:bodyPr/>
+          <a:lstStyle/>
+          <a:p>
+            <a:endParaRPr lang="en-US"/>
+          </a:p>
+        </p:txBody>
       </p:sp>
       <p:sp>
         <p:nvSpPr>
@@ -14288,6 +14615,13 @@
             <a:prstDash val="solid"/>
           </a:ln>
         </p:spPr>
+        <p:txBody>
+          <a:bodyPr/>
+          <a:lstStyle/>
+          <a:p>
+            <a:endParaRPr lang="en-US"/>
+          </a:p>
+        </p:txBody>
       </p:sp>
       <p:sp>
         <p:nvSpPr>
@@ -14313,6 +14647,13 @@
             <a:prstDash val="solid"/>
           </a:ln>
         </p:spPr>
+        <p:txBody>
+          <a:bodyPr/>
+          <a:lstStyle/>
+          <a:p>
+            <a:endParaRPr lang="en-US"/>
+          </a:p>
+        </p:txBody>
       </p:sp>
       <p:sp>
         <p:nvSpPr>
@@ -14335,7 +14676,7 @@
           <a:bodyPr wrap="square" lIns="0" tIns="0" rIns="0" bIns="0" rtlCol="0" anchor="ctr"/>
           <a:lstStyle/>
           <a:p>
-            <a:pPr algn="ctr" indent="0" marL="0">
+            <a:pPr marL="0" indent="0" algn="ctr">
               <a:buNone/>
             </a:pPr>
             <a:r>
@@ -14374,7 +14715,7 @@
           <a:bodyPr wrap="square" lIns="0" tIns="0" rIns="0" bIns="0" rtlCol="0" anchor="ctr"/>
           <a:lstStyle/>
           <a:p>
-            <a:pPr indent="0" marL="0">
+            <a:pPr marL="0" indent="0">
               <a:buNone/>
             </a:pPr>
             <a:r>
@@ -14413,7 +14754,7 @@
           <a:bodyPr wrap="square" lIns="0" tIns="0" rIns="0" bIns="0" rtlCol="0" anchor="ctr"/>
           <a:lstStyle/>
           <a:p>
-            <a:pPr indent="0" marL="0">
+            <a:pPr marL="0" indent="0">
               <a:buNone/>
             </a:pPr>
             <a:r>
@@ -14455,13 +14796,20 @@
             <a:prstDash val="solid"/>
           </a:ln>
           <a:effectLst>
-            <a:outerShdw sx="100000" sy="100000" kx="0" ky="0" algn="bl" rotWithShape="0" blurRad="101600" dist="12700" dir="5400000">
+            <a:outerShdw blurRad="101600" dist="12700" dir="5400000" algn="bl" rotWithShape="0">
               <a:srgbClr val="94A3B8">
                 <a:alpha val="12000"/>
               </a:srgbClr>
             </a:outerShdw>
           </a:effectLst>
         </p:spPr>
+        <p:txBody>
+          <a:bodyPr/>
+          <a:lstStyle/>
+          <a:p>
+            <a:endParaRPr lang="en-US"/>
+          </a:p>
+        </p:txBody>
       </p:sp>
       <p:sp>
         <p:nvSpPr>
@@ -14487,6 +14835,13 @@
             <a:prstDash val="solid"/>
           </a:ln>
         </p:spPr>
+        <p:txBody>
+          <a:bodyPr/>
+          <a:lstStyle/>
+          <a:p>
+            <a:endParaRPr lang="en-US"/>
+          </a:p>
+        </p:txBody>
       </p:sp>
       <p:sp>
         <p:nvSpPr>
@@ -14512,6 +14867,13 @@
             <a:prstDash val="solid"/>
           </a:ln>
         </p:spPr>
+        <p:txBody>
+          <a:bodyPr/>
+          <a:lstStyle/>
+          <a:p>
+            <a:endParaRPr lang="en-US"/>
+          </a:p>
+        </p:txBody>
       </p:sp>
       <p:sp>
         <p:nvSpPr>
@@ -14534,7 +14896,7 @@
           <a:bodyPr wrap="square" lIns="0" tIns="0" rIns="0" bIns="0" rtlCol="0" anchor="ctr"/>
           <a:lstStyle/>
           <a:p>
-            <a:pPr algn="ctr" indent="0" marL="0">
+            <a:pPr marL="0" indent="0" algn="ctr">
               <a:buNone/>
             </a:pPr>
             <a:r>
@@ -14573,7 +14935,7 @@
           <a:bodyPr wrap="square" lIns="0" tIns="0" rIns="0" bIns="0" rtlCol="0" anchor="ctr"/>
           <a:lstStyle/>
           <a:p>
-            <a:pPr indent="0" marL="0">
+            <a:pPr marL="0" indent="0">
               <a:buNone/>
             </a:pPr>
             <a:r>
@@ -14612,7 +14974,7 @@
           <a:bodyPr wrap="square" lIns="0" tIns="0" rIns="0" bIns="0" rtlCol="0" anchor="ctr"/>
           <a:lstStyle/>
           <a:p>
-            <a:pPr indent="0" marL="0">
+            <a:pPr marL="0" indent="0">
               <a:buNone/>
             </a:pPr>
             <a:r>
@@ -14654,13 +15016,20 @@
             <a:prstDash val="solid"/>
           </a:ln>
           <a:effectLst>
-            <a:outerShdw sx="100000" sy="100000" kx="0" ky="0" algn="bl" rotWithShape="0" blurRad="101600" dist="12700" dir="5400000">
+            <a:outerShdw blurRad="101600" dist="12700" dir="5400000" algn="bl" rotWithShape="0">
               <a:srgbClr val="94A3B8">
                 <a:alpha val="12000"/>
               </a:srgbClr>
             </a:outerShdw>
           </a:effectLst>
         </p:spPr>
+        <p:txBody>
+          <a:bodyPr/>
+          <a:lstStyle/>
+          <a:p>
+            <a:endParaRPr lang="en-US"/>
+          </a:p>
+        </p:txBody>
       </p:sp>
       <p:sp>
         <p:nvSpPr>
@@ -14686,6 +15055,13 @@
             <a:prstDash val="solid"/>
           </a:ln>
         </p:spPr>
+        <p:txBody>
+          <a:bodyPr/>
+          <a:lstStyle/>
+          <a:p>
+            <a:endParaRPr lang="en-US"/>
+          </a:p>
+        </p:txBody>
       </p:sp>
       <p:sp>
         <p:nvSpPr>
@@ -14711,6 +15087,13 @@
             <a:prstDash val="solid"/>
           </a:ln>
         </p:spPr>
+        <p:txBody>
+          <a:bodyPr/>
+          <a:lstStyle/>
+          <a:p>
+            <a:endParaRPr lang="en-US"/>
+          </a:p>
+        </p:txBody>
       </p:sp>
       <p:sp>
         <p:nvSpPr>
@@ -14733,7 +15116,7 @@
           <a:bodyPr wrap="square" lIns="0" tIns="0" rIns="0" bIns="0" rtlCol="0" anchor="ctr"/>
           <a:lstStyle/>
           <a:p>
-            <a:pPr algn="ctr" indent="0" marL="0">
+            <a:pPr marL="0" indent="0" algn="ctr">
               <a:buNone/>
             </a:pPr>
             <a:r>
@@ -14772,7 +15155,7 @@
           <a:bodyPr wrap="square" lIns="0" tIns="0" rIns="0" bIns="0" rtlCol="0" anchor="ctr"/>
           <a:lstStyle/>
           <a:p>
-            <a:pPr indent="0" marL="0">
+            <a:pPr marL="0" indent="0">
               <a:buNone/>
             </a:pPr>
             <a:r>
@@ -14811,7 +15194,7 @@
           <a:bodyPr wrap="square" lIns="0" tIns="0" rIns="0" bIns="0" rtlCol="0" anchor="ctr"/>
           <a:lstStyle/>
           <a:p>
-            <a:pPr indent="0" marL="0">
+            <a:pPr marL="0" indent="0">
               <a:buNone/>
             </a:pPr>
             <a:r>
@@ -14853,13 +15236,20 @@
             <a:prstDash val="solid"/>
           </a:ln>
           <a:effectLst>
-            <a:outerShdw sx="100000" sy="100000" kx="0" ky="0" algn="bl" rotWithShape="0" blurRad="101600" dist="12700" dir="5400000">
+            <a:outerShdw blurRad="101600" dist="12700" dir="5400000" algn="bl" rotWithShape="0">
               <a:srgbClr val="94A3B8">
                 <a:alpha val="12000"/>
               </a:srgbClr>
             </a:outerShdw>
           </a:effectLst>
         </p:spPr>
+        <p:txBody>
+          <a:bodyPr/>
+          <a:lstStyle/>
+          <a:p>
+            <a:endParaRPr lang="en-US"/>
+          </a:p>
+        </p:txBody>
       </p:sp>
       <p:sp>
         <p:nvSpPr>
@@ -14885,6 +15275,13 @@
             <a:prstDash val="solid"/>
           </a:ln>
         </p:spPr>
+        <p:txBody>
+          <a:bodyPr/>
+          <a:lstStyle/>
+          <a:p>
+            <a:endParaRPr lang="en-US"/>
+          </a:p>
+        </p:txBody>
       </p:sp>
       <p:sp>
         <p:nvSpPr>
@@ -14910,6 +15307,13 @@
             <a:prstDash val="solid"/>
           </a:ln>
         </p:spPr>
+        <p:txBody>
+          <a:bodyPr/>
+          <a:lstStyle/>
+          <a:p>
+            <a:endParaRPr lang="en-US"/>
+          </a:p>
+        </p:txBody>
       </p:sp>
       <p:sp>
         <p:nvSpPr>
@@ -14932,7 +15336,7 @@
           <a:bodyPr wrap="square" lIns="0" tIns="0" rIns="0" bIns="0" rtlCol="0" anchor="ctr"/>
           <a:lstStyle/>
           <a:p>
-            <a:pPr algn="ctr" indent="0" marL="0">
+            <a:pPr marL="0" indent="0" algn="ctr">
               <a:buNone/>
             </a:pPr>
             <a:r>
@@ -14971,7 +15375,7 @@
           <a:bodyPr wrap="square" lIns="0" tIns="0" rIns="0" bIns="0" rtlCol="0" anchor="ctr"/>
           <a:lstStyle/>
           <a:p>
-            <a:pPr indent="0" marL="0">
+            <a:pPr marL="0" indent="0">
               <a:buNone/>
             </a:pPr>
             <a:r>
@@ -15010,7 +15414,7 @@
           <a:bodyPr wrap="square" lIns="0" tIns="0" rIns="0" bIns="0" rtlCol="0" anchor="ctr"/>
           <a:lstStyle/>
           <a:p>
-            <a:pPr indent="0" marL="0">
+            <a:pPr marL="0" indent="0">
               <a:buNone/>
             </a:pPr>
             <a:r>
@@ -15052,13 +15456,20 @@
             <a:prstDash val="solid"/>
           </a:ln>
           <a:effectLst>
-            <a:outerShdw sx="100000" sy="100000" kx="0" ky="0" algn="bl" rotWithShape="0" blurRad="101600" dist="12700" dir="5400000">
+            <a:outerShdw blurRad="101600" dist="12700" dir="5400000" algn="bl" rotWithShape="0">
               <a:srgbClr val="94A3B8">
                 <a:alpha val="12000"/>
               </a:srgbClr>
             </a:outerShdw>
           </a:effectLst>
         </p:spPr>
+        <p:txBody>
+          <a:bodyPr/>
+          <a:lstStyle/>
+          <a:p>
+            <a:endParaRPr lang="en-US"/>
+          </a:p>
+        </p:txBody>
       </p:sp>
       <p:sp>
         <p:nvSpPr>
@@ -15084,6 +15495,13 @@
             <a:prstDash val="solid"/>
           </a:ln>
         </p:spPr>
+        <p:txBody>
+          <a:bodyPr/>
+          <a:lstStyle/>
+          <a:p>
+            <a:endParaRPr lang="en-US"/>
+          </a:p>
+        </p:txBody>
       </p:sp>
       <p:sp>
         <p:nvSpPr>
@@ -15109,6 +15527,13 @@
             <a:prstDash val="solid"/>
           </a:ln>
         </p:spPr>
+        <p:txBody>
+          <a:bodyPr/>
+          <a:lstStyle/>
+          <a:p>
+            <a:endParaRPr lang="en-US"/>
+          </a:p>
+        </p:txBody>
       </p:sp>
       <p:sp>
         <p:nvSpPr>
@@ -15131,7 +15556,7 @@
           <a:bodyPr wrap="square" lIns="0" tIns="0" rIns="0" bIns="0" rtlCol="0" anchor="ctr"/>
           <a:lstStyle/>
           <a:p>
-            <a:pPr algn="ctr" indent="0" marL="0">
+            <a:pPr marL="0" indent="0" algn="ctr">
               <a:buNone/>
             </a:pPr>
             <a:r>
@@ -15170,7 +15595,7 @@
           <a:bodyPr wrap="square" lIns="0" tIns="0" rIns="0" bIns="0" rtlCol="0" anchor="ctr"/>
           <a:lstStyle/>
           <a:p>
-            <a:pPr indent="0" marL="0">
+            <a:pPr marL="0" indent="0">
               <a:buNone/>
             </a:pPr>
             <a:r>
@@ -15209,7 +15634,7 @@
           <a:bodyPr wrap="square" lIns="0" tIns="0" rIns="0" bIns="0" rtlCol="0" anchor="ctr"/>
           <a:lstStyle/>
           <a:p>
-            <a:pPr indent="0" marL="0">
+            <a:pPr marL="0" indent="0">
               <a:buNone/>
             </a:pPr>
             <a:r>
@@ -15248,7 +15673,7 @@
           <a:bodyPr wrap="square" lIns="0" tIns="0" rIns="0" bIns="0" rtlCol="0" anchor="ctr"/>
           <a:lstStyle/>
           <a:p>
-            <a:pPr algn="l" indent="0" marL="0">
+            <a:pPr marL="0" indent="0" algn="l">
               <a:buNone/>
             </a:pPr>
             <a:r>
@@ -15287,7 +15712,7 @@
           <a:bodyPr wrap="square" lIns="0" tIns="0" rIns="0" bIns="0" rtlCol="0" anchor="ctr"/>
           <a:lstStyle/>
           <a:p>
-            <a:pPr algn="r" indent="0" marL="0">
+            <a:pPr marL="0" indent="0" algn="r">
               <a:buNone/>
             </a:pPr>
             <a:r>
@@ -15321,6 +15746,7 @@
         <a:solidFill>
           <a:srgbClr val="FFFFFF"/>
         </a:solidFill>
+        <a:effectLst/>
       </p:bgPr>
     </p:bg>
     <p:spTree>
@@ -15358,11 +15784,11 @@
           <a:bodyPr wrap="square" lIns="0" tIns="0" rIns="0" bIns="0" rtlCol="0" anchor="ctr"/>
           <a:lstStyle/>
           <a:p>
-            <a:pPr indent="0" marL="0">
-              <a:buNone/>
-            </a:pPr>
-            <a:r>
-              <a:rPr lang="en-US" sz="1100" b="1" spc="400" kern="0" dirty="0">
+            <a:pPr marL="0" indent="0">
+              <a:buNone/>
+            </a:pPr>
+            <a:r>
+              <a:rPr lang="en-US" sz="1100" b="1" kern="0" spc="400" dirty="0">
                 <a:solidFill>
                   <a:srgbClr val="1C7293"/>
                 </a:solidFill>
@@ -15397,7 +15823,7 @@
           <a:bodyPr wrap="square" lIns="0" tIns="0" rIns="0" bIns="0" rtlCol="0" anchor="ctr"/>
           <a:lstStyle/>
           <a:p>
-            <a:pPr indent="0" marL="0">
+            <a:pPr marL="0" indent="0">
               <a:buNone/>
             </a:pPr>
             <a:r>
@@ -15436,7 +15862,7 @@
           <a:bodyPr wrap="square" lIns="0" tIns="0" rIns="0" bIns="0" rtlCol="0" anchor="ctr"/>
           <a:lstStyle/>
           <a:p>
-            <a:pPr indent="0" marL="0">
+            <a:pPr marL="0" indent="0">
               <a:buNone/>
             </a:pPr>
             <a:r>
@@ -15450,9 +15876,6 @@
               </a:rPr>
               <a:t>Die </a:t>
             </a:r>
-            <a:pPr indent="0" marL="0">
-              <a:buNone/>
-            </a:pPr>
             <a:r>
               <a:rPr lang="en-US" sz="1600" b="1" dirty="0">
                 <a:solidFill>
@@ -15464,9 +15887,6 @@
               </a:rPr>
               <a:t>15-Minuten-Stadt</a:t>
             </a:r>
-            <a:pPr indent="0" marL="0">
-              <a:buNone/>
-            </a:pPr>
             <a:r>
               <a:rPr lang="en-US" sz="1600" dirty="0">
                 <a:solidFill>
@@ -15478,9 +15898,6 @@
               </a:rPr>
               <a:t> (Moreno 2021) ist heute Leitbild moderner Stadtplanung — und wird zunehmend zum </a:t>
             </a:r>
-            <a:pPr indent="0" marL="0">
-              <a:buNone/>
-            </a:pPr>
             <a:r>
               <a:rPr lang="en-US" sz="1600" b="1" dirty="0">
                 <a:solidFill>
@@ -15492,9 +15909,6 @@
               </a:rPr>
               <a:t>harten Wertfaktor</a:t>
             </a:r>
-            <a:pPr indent="0" marL="0">
-              <a:buNone/>
-            </a:pPr>
             <a:r>
               <a:rPr lang="en-US" sz="1600" dirty="0">
                 <a:solidFill>
@@ -15534,13 +15948,20 @@
             <a:prstDash val="solid"/>
           </a:ln>
           <a:effectLst>
-            <a:outerShdw sx="100000" sy="100000" kx="0" ky="0" algn="bl" rotWithShape="0" blurRad="101600" dist="12700" dir="5400000">
+            <a:outerShdw blurRad="101600" dist="12700" dir="5400000" algn="bl" rotWithShape="0">
               <a:srgbClr val="94A3B8">
                 <a:alpha val="12000"/>
               </a:srgbClr>
             </a:outerShdw>
           </a:effectLst>
         </p:spPr>
+        <p:txBody>
+          <a:bodyPr/>
+          <a:lstStyle/>
+          <a:p>
+            <a:endParaRPr lang="en-US"/>
+          </a:p>
+        </p:txBody>
       </p:sp>
       <p:sp>
         <p:nvSpPr>
@@ -15566,6 +15987,13 @@
             <a:prstDash val="solid"/>
           </a:ln>
         </p:spPr>
+        <p:txBody>
+          <a:bodyPr/>
+          <a:lstStyle/>
+          <a:p>
+            <a:endParaRPr lang="en-US"/>
+          </a:p>
+        </p:txBody>
       </p:sp>
       <p:sp>
         <p:nvSpPr>
@@ -15588,7 +16016,7 @@
           <a:bodyPr wrap="square" lIns="0" tIns="0" rIns="0" bIns="0" rtlCol="0" anchor="b"/>
           <a:lstStyle/>
           <a:p>
-            <a:pPr algn="ctr" indent="0" marL="0">
+            <a:pPr marL="0" indent="0" algn="ctr">
               <a:buNone/>
             </a:pPr>
             <a:r>
@@ -15627,7 +16055,7 @@
           <a:bodyPr wrap="square" lIns="0" tIns="0" rIns="0" bIns="0" rtlCol="0" anchor="t"/>
           <a:lstStyle/>
           <a:p>
-            <a:pPr algn="ctr" indent="0" marL="0">
+            <a:pPr marL="0" indent="0" algn="ctr">
               <a:buNone/>
             </a:pPr>
             <a:endParaRPr lang="en-US" sz="1100" dirty="0"/>
@@ -15655,7 +16083,7 @@
           <a:bodyPr wrap="square" lIns="0" tIns="0" rIns="0" bIns="0" rtlCol="0" anchor="ctr"/>
           <a:lstStyle/>
           <a:p>
-            <a:pPr algn="ctr" indent="0" marL="0">
+            <a:pPr marL="0" indent="0" algn="ctr">
               <a:buNone/>
             </a:pPr>
             <a:r>
@@ -15697,13 +16125,20 @@
             <a:prstDash val="solid"/>
           </a:ln>
           <a:effectLst>
-            <a:outerShdw sx="100000" sy="100000" kx="0" ky="0" algn="bl" rotWithShape="0" blurRad="101600" dist="12700" dir="5400000">
+            <a:outerShdw blurRad="101600" dist="12700" dir="5400000" algn="bl" rotWithShape="0">
               <a:srgbClr val="94A3B8">
                 <a:alpha val="12000"/>
               </a:srgbClr>
             </a:outerShdw>
           </a:effectLst>
         </p:spPr>
+        <p:txBody>
+          <a:bodyPr/>
+          <a:lstStyle/>
+          <a:p>
+            <a:endParaRPr lang="en-US"/>
+          </a:p>
+        </p:txBody>
       </p:sp>
       <p:sp>
         <p:nvSpPr>
@@ -15729,6 +16164,13 @@
             <a:prstDash val="solid"/>
           </a:ln>
         </p:spPr>
+        <p:txBody>
+          <a:bodyPr/>
+          <a:lstStyle/>
+          <a:p>
+            <a:endParaRPr lang="en-US"/>
+          </a:p>
+        </p:txBody>
       </p:sp>
       <p:sp>
         <p:nvSpPr>
@@ -15751,7 +16193,7 @@
           <a:bodyPr wrap="square" lIns="0" tIns="0" rIns="0" bIns="0" rtlCol="0" anchor="b"/>
           <a:lstStyle/>
           <a:p>
-            <a:pPr algn="ctr" indent="0" marL="0">
+            <a:pPr marL="0" indent="0" algn="ctr">
               <a:buNone/>
             </a:pPr>
             <a:r>
@@ -15790,7 +16232,7 @@
           <a:bodyPr wrap="square" lIns="0" tIns="0" rIns="0" bIns="0" rtlCol="0" anchor="t"/>
           <a:lstStyle/>
           <a:p>
-            <a:pPr algn="ctr" indent="0" marL="0">
+            <a:pPr marL="0" indent="0" algn="ctr">
               <a:buNone/>
             </a:pPr>
             <a:endParaRPr lang="en-US" sz="1100" dirty="0"/>
@@ -15818,7 +16260,7 @@
           <a:bodyPr wrap="square" lIns="0" tIns="0" rIns="0" bIns="0" rtlCol="0" anchor="ctr"/>
           <a:lstStyle/>
           <a:p>
-            <a:pPr algn="ctr" indent="0" marL="0">
+            <a:pPr marL="0" indent="0" algn="ctr">
               <a:buNone/>
             </a:pPr>
             <a:r>
@@ -15860,13 +16302,20 @@
             <a:prstDash val="solid"/>
           </a:ln>
           <a:effectLst>
-            <a:outerShdw sx="100000" sy="100000" kx="0" ky="0" algn="bl" rotWithShape="0" blurRad="101600" dist="12700" dir="5400000">
+            <a:outerShdw blurRad="101600" dist="12700" dir="5400000" algn="bl" rotWithShape="0">
               <a:srgbClr val="94A3B8">
                 <a:alpha val="12000"/>
               </a:srgbClr>
             </a:outerShdw>
           </a:effectLst>
         </p:spPr>
+        <p:txBody>
+          <a:bodyPr/>
+          <a:lstStyle/>
+          <a:p>
+            <a:endParaRPr lang="en-US"/>
+          </a:p>
+        </p:txBody>
       </p:sp>
       <p:sp>
         <p:nvSpPr>
@@ -15892,6 +16341,13 @@
             <a:prstDash val="solid"/>
           </a:ln>
         </p:spPr>
+        <p:txBody>
+          <a:bodyPr/>
+          <a:lstStyle/>
+          <a:p>
+            <a:endParaRPr lang="en-US"/>
+          </a:p>
+        </p:txBody>
       </p:sp>
       <p:sp>
         <p:nvSpPr>
@@ -15914,7 +16370,7 @@
           <a:bodyPr wrap="square" lIns="0" tIns="0" rIns="0" bIns="0" rtlCol="0" anchor="b"/>
           <a:lstStyle/>
           <a:p>
-            <a:pPr algn="ctr" indent="0" marL="0">
+            <a:pPr marL="0" indent="0" algn="ctr">
               <a:buNone/>
             </a:pPr>
             <a:r>
@@ -15953,7 +16409,7 @@
           <a:bodyPr wrap="square" lIns="0" tIns="0" rIns="0" bIns="0" rtlCol="0" anchor="t"/>
           <a:lstStyle/>
           <a:p>
-            <a:pPr algn="ctr" indent="0" marL="0">
+            <a:pPr marL="0" indent="0" algn="ctr">
               <a:buNone/>
             </a:pPr>
             <a:endParaRPr lang="en-US" sz="1100" dirty="0"/>
@@ -15981,7 +16437,7 @@
           <a:bodyPr wrap="square" lIns="0" tIns="0" rIns="0" bIns="0" rtlCol="0" anchor="ctr"/>
           <a:lstStyle/>
           <a:p>
-            <a:pPr algn="ctr" indent="0" marL="0">
+            <a:pPr marL="0" indent="0" algn="ctr">
               <a:buNone/>
             </a:pPr>
             <a:r>
@@ -16020,7 +16476,7 @@
           <a:bodyPr wrap="square" lIns="0" tIns="0" rIns="0" bIns="0" rtlCol="0" anchor="ctr"/>
           <a:lstStyle/>
           <a:p>
-            <a:pPr algn="r" indent="0" marL="0">
+            <a:pPr marL="0" indent="0" algn="r">
               <a:buNone/>
             </a:pPr>
             <a:r>
@@ -16054,6 +16510,7 @@
         <a:solidFill>
           <a:srgbClr val="FFFFFF"/>
         </a:solidFill>
+        <a:effectLst/>
       </p:bgPr>
     </p:bg>
     <p:spTree>
@@ -16091,11 +16548,11 @@
           <a:bodyPr wrap="square" lIns="0" tIns="0" rIns="0" bIns="0" rtlCol="0" anchor="ctr"/>
           <a:lstStyle/>
           <a:p>
-            <a:pPr indent="0" marL="0">
-              <a:buNone/>
-            </a:pPr>
-            <a:r>
-              <a:rPr lang="en-US" sz="1100" b="1" spc="400" kern="0" dirty="0">
+            <a:pPr marL="0" indent="0">
+              <a:buNone/>
+            </a:pPr>
+            <a:r>
+              <a:rPr lang="en-US" sz="1100" b="1" kern="0" spc="400" dirty="0">
                 <a:solidFill>
                   <a:srgbClr val="1C7293"/>
                 </a:solidFill>
@@ -16130,7 +16587,7 @@
           <a:bodyPr wrap="square" lIns="0" tIns="0" rIns="0" bIns="0" rtlCol="0" anchor="ctr"/>
           <a:lstStyle/>
           <a:p>
-            <a:pPr indent="0" marL="0">
+            <a:pPr marL="0" indent="0">
               <a:buNone/>
             </a:pPr>
             <a:r>
@@ -16172,13 +16629,20 @@
             <a:prstDash val="solid"/>
           </a:ln>
           <a:effectLst>
-            <a:outerShdw sx="100000" sy="100000" kx="0" ky="0" algn="bl" rotWithShape="0" blurRad="101600" dist="12700" dir="5400000">
+            <a:outerShdw blurRad="101600" dist="12700" dir="5400000" algn="bl" rotWithShape="0">
               <a:srgbClr val="94A3B8">
                 <a:alpha val="12000"/>
               </a:srgbClr>
             </a:outerShdw>
           </a:effectLst>
         </p:spPr>
+        <p:txBody>
+          <a:bodyPr/>
+          <a:lstStyle/>
+          <a:p>
+            <a:endParaRPr lang="en-US"/>
+          </a:p>
+        </p:txBody>
       </p:sp>
       <p:sp>
         <p:nvSpPr>
@@ -16204,6 +16668,13 @@
             <a:prstDash val="solid"/>
           </a:ln>
         </p:spPr>
+        <p:txBody>
+          <a:bodyPr/>
+          <a:lstStyle/>
+          <a:p>
+            <a:endParaRPr lang="en-US"/>
+          </a:p>
+        </p:txBody>
       </p:sp>
       <p:sp>
         <p:nvSpPr>
@@ -16226,7 +16697,7 @@
           <a:bodyPr wrap="square" lIns="0" tIns="0" rIns="0" bIns="0" rtlCol="0" anchor="ctr"/>
           <a:lstStyle/>
           <a:p>
-            <a:pPr indent="0" marL="0">
+            <a:pPr marL="0" indent="0">
               <a:buNone/>
             </a:pPr>
             <a:r>
@@ -16265,7 +16736,7 @@
           <a:bodyPr wrap="square" lIns="0" tIns="0" rIns="0" bIns="0" rtlCol="0" anchor="ctr"/>
           <a:lstStyle/>
           <a:p>
-            <a:pPr indent="0" marL="0">
+            <a:pPr marL="0" indent="0">
               <a:buNone/>
             </a:pPr>
             <a:r>
@@ -16307,13 +16778,20 @@
             <a:prstDash val="solid"/>
           </a:ln>
           <a:effectLst>
-            <a:outerShdw sx="100000" sy="100000" kx="0" ky="0" algn="bl" rotWithShape="0" blurRad="101600" dist="12700" dir="5400000">
+            <a:outerShdw blurRad="101600" dist="12700" dir="5400000" algn="bl" rotWithShape="0">
               <a:srgbClr val="94A3B8">
                 <a:alpha val="12000"/>
               </a:srgbClr>
             </a:outerShdw>
           </a:effectLst>
         </p:spPr>
+        <p:txBody>
+          <a:bodyPr/>
+          <a:lstStyle/>
+          <a:p>
+            <a:endParaRPr lang="en-US"/>
+          </a:p>
+        </p:txBody>
       </p:sp>
       <p:sp>
         <p:nvSpPr>
@@ -16339,6 +16817,13 @@
             <a:prstDash val="solid"/>
           </a:ln>
         </p:spPr>
+        <p:txBody>
+          <a:bodyPr/>
+          <a:lstStyle/>
+          <a:p>
+            <a:endParaRPr lang="en-US"/>
+          </a:p>
+        </p:txBody>
       </p:sp>
       <p:sp>
         <p:nvSpPr>
@@ -16361,7 +16846,7 @@
           <a:bodyPr wrap="square" lIns="0" tIns="0" rIns="0" bIns="0" rtlCol="0" anchor="ctr"/>
           <a:lstStyle/>
           <a:p>
-            <a:pPr indent="0" marL="0">
+            <a:pPr marL="0" indent="0">
               <a:buNone/>
             </a:pPr>
             <a:r>
@@ -16400,7 +16885,7 @@
           <a:bodyPr wrap="square" lIns="0" tIns="0" rIns="0" bIns="0" rtlCol="0" anchor="ctr"/>
           <a:lstStyle/>
           <a:p>
-            <a:pPr indent="0" marL="0">
+            <a:pPr marL="0" indent="0">
               <a:buNone/>
             </a:pPr>
             <a:r>
@@ -16439,7 +16924,7 @@
           <a:bodyPr wrap="square" lIns="0" tIns="0" rIns="0" bIns="0" rtlCol="0" anchor="ctr"/>
           <a:lstStyle/>
           <a:p>
-            <a:pPr algn="r" indent="0" marL="0">
+            <a:pPr marL="0" indent="0" algn="r">
               <a:buNone/>
             </a:pPr>
             <a:r>
@@ -16473,6 +16958,7 @@
         <a:solidFill>
           <a:srgbClr val="FFFFFF"/>
         </a:solidFill>
+        <a:effectLst/>
       </p:bgPr>
     </p:bg>
     <p:spTree>
@@ -16510,11 +16996,11 @@
           <a:bodyPr wrap="square" lIns="0" tIns="0" rIns="0" bIns="0" rtlCol="0" anchor="ctr"/>
           <a:lstStyle/>
           <a:p>
-            <a:pPr indent="0" marL="0">
-              <a:buNone/>
-            </a:pPr>
-            <a:r>
-              <a:rPr lang="en-US" sz="1100" b="1" spc="400" kern="0" dirty="0">
+            <a:pPr marL="0" indent="0">
+              <a:buNone/>
+            </a:pPr>
+            <a:r>
+              <a:rPr lang="en-US" sz="1100" b="1" kern="0" spc="400" dirty="0">
                 <a:solidFill>
                   <a:srgbClr val="1C7293"/>
                 </a:solidFill>
@@ -16549,7 +17035,7 @@
           <a:bodyPr wrap="square" lIns="0" tIns="0" rIns="0" bIns="0" rtlCol="0" anchor="ctr"/>
           <a:lstStyle/>
           <a:p>
-            <a:pPr indent="0" marL="0">
+            <a:pPr marL="0" indent="0">
               <a:buNone/>
             </a:pPr>
             <a:r>
@@ -16591,13 +17077,20 @@
             <a:prstDash val="solid"/>
           </a:ln>
           <a:effectLst>
-            <a:outerShdw sx="100000" sy="100000" kx="0" ky="0" algn="bl" rotWithShape="0" blurRad="101600" dist="12700" dir="5400000">
+            <a:outerShdw blurRad="101600" dist="12700" dir="5400000" algn="bl" rotWithShape="0">
               <a:srgbClr val="94A3B8">
                 <a:alpha val="12000"/>
               </a:srgbClr>
             </a:outerShdw>
           </a:effectLst>
         </p:spPr>
+        <p:txBody>
+          <a:bodyPr/>
+          <a:lstStyle/>
+          <a:p>
+            <a:endParaRPr lang="en-US"/>
+          </a:p>
+        </p:txBody>
       </p:sp>
       <p:sp>
         <p:nvSpPr>
@@ -16623,6 +17116,13 @@
             <a:prstDash val="solid"/>
           </a:ln>
         </p:spPr>
+        <p:txBody>
+          <a:bodyPr/>
+          <a:lstStyle/>
+          <a:p>
+            <a:endParaRPr lang="en-US"/>
+          </a:p>
+        </p:txBody>
       </p:sp>
       <p:sp>
         <p:nvSpPr>
@@ -16648,6 +17148,13 @@
             <a:prstDash val="solid"/>
           </a:ln>
         </p:spPr>
+        <p:txBody>
+          <a:bodyPr/>
+          <a:lstStyle/>
+          <a:p>
+            <a:endParaRPr lang="en-US"/>
+          </a:p>
+        </p:txBody>
       </p:sp>
       <p:sp>
         <p:nvSpPr>
@@ -16670,7 +17177,7 @@
           <a:bodyPr wrap="square" lIns="0" tIns="0" rIns="0" bIns="0" rtlCol="0" anchor="ctr"/>
           <a:lstStyle/>
           <a:p>
-            <a:pPr algn="ctr" indent="0" marL="0">
+            <a:pPr marL="0" indent="0" algn="ctr">
               <a:buNone/>
             </a:pPr>
             <a:r>
@@ -16709,7 +17216,7 @@
           <a:bodyPr wrap="square" lIns="0" tIns="0" rIns="0" bIns="0" rtlCol="0" anchor="ctr"/>
           <a:lstStyle/>
           <a:p>
-            <a:pPr indent="0" marL="0">
+            <a:pPr marL="0" indent="0">
               <a:buNone/>
             </a:pPr>
             <a:r>
@@ -16748,7 +17255,7 @@
           <a:bodyPr wrap="square" lIns="0" tIns="0" rIns="0" bIns="0" rtlCol="0" anchor="ctr"/>
           <a:lstStyle/>
           <a:p>
-            <a:pPr indent="0" marL="0">
+            <a:pPr marL="0" indent="0">
               <a:buNone/>
             </a:pPr>
             <a:r>
@@ -16787,7 +17294,7 @@
           <a:bodyPr wrap="square" lIns="0" tIns="0" rIns="0" bIns="0" rtlCol="0" anchor="ctr"/>
           <a:lstStyle/>
           <a:p>
-            <a:pPr indent="0" marL="0">
+            <a:pPr marL="0" indent="0">
               <a:buNone/>
             </a:pPr>
             <a:r>
@@ -16829,13 +17336,20 @@
             <a:prstDash val="solid"/>
           </a:ln>
           <a:effectLst>
-            <a:outerShdw sx="100000" sy="100000" kx="0" ky="0" algn="bl" rotWithShape="0" blurRad="101600" dist="12700" dir="5400000">
+            <a:outerShdw blurRad="101600" dist="12700" dir="5400000" algn="bl" rotWithShape="0">
               <a:srgbClr val="94A3B8">
                 <a:alpha val="12000"/>
               </a:srgbClr>
             </a:outerShdw>
           </a:effectLst>
         </p:spPr>
+        <p:txBody>
+          <a:bodyPr/>
+          <a:lstStyle/>
+          <a:p>
+            <a:endParaRPr lang="en-US"/>
+          </a:p>
+        </p:txBody>
       </p:sp>
       <p:sp>
         <p:nvSpPr>
@@ -16861,6 +17375,13 @@
             <a:prstDash val="solid"/>
           </a:ln>
         </p:spPr>
+        <p:txBody>
+          <a:bodyPr/>
+          <a:lstStyle/>
+          <a:p>
+            <a:endParaRPr lang="en-US"/>
+          </a:p>
+        </p:txBody>
       </p:sp>
       <p:sp>
         <p:nvSpPr>
@@ -16886,6 +17407,13 @@
             <a:prstDash val="solid"/>
           </a:ln>
         </p:spPr>
+        <p:txBody>
+          <a:bodyPr/>
+          <a:lstStyle/>
+          <a:p>
+            <a:endParaRPr lang="en-US"/>
+          </a:p>
+        </p:txBody>
       </p:sp>
       <p:sp>
         <p:nvSpPr>
@@ -16908,7 +17436,7 @@
           <a:bodyPr wrap="square" lIns="0" tIns="0" rIns="0" bIns="0" rtlCol="0" anchor="ctr"/>
           <a:lstStyle/>
           <a:p>
-            <a:pPr algn="ctr" indent="0" marL="0">
+            <a:pPr marL="0" indent="0" algn="ctr">
               <a:buNone/>
             </a:pPr>
             <a:r>
@@ -16947,7 +17475,7 @@
           <a:bodyPr wrap="square" lIns="0" tIns="0" rIns="0" bIns="0" rtlCol="0" anchor="ctr"/>
           <a:lstStyle/>
           <a:p>
-            <a:pPr indent="0" marL="0">
+            <a:pPr marL="0" indent="0">
               <a:buNone/>
             </a:pPr>
             <a:r>
@@ -16986,7 +17514,7 @@
           <a:bodyPr wrap="square" lIns="0" tIns="0" rIns="0" bIns="0" rtlCol="0" anchor="ctr"/>
           <a:lstStyle/>
           <a:p>
-            <a:pPr indent="0" marL="0">
+            <a:pPr marL="0" indent="0">
               <a:buNone/>
             </a:pPr>
             <a:r>
@@ -17025,7 +17553,7 @@
           <a:bodyPr wrap="square" lIns="0" tIns="0" rIns="0" bIns="0" rtlCol="0" anchor="ctr"/>
           <a:lstStyle/>
           <a:p>
-            <a:pPr indent="0" marL="0">
+            <a:pPr marL="0" indent="0">
               <a:buNone/>
             </a:pPr>
             <a:r>
@@ -17067,13 +17595,20 @@
             <a:prstDash val="solid"/>
           </a:ln>
           <a:effectLst>
-            <a:outerShdw sx="100000" sy="100000" kx="0" ky="0" algn="bl" rotWithShape="0" blurRad="101600" dist="12700" dir="5400000">
+            <a:outerShdw blurRad="101600" dist="12700" dir="5400000" algn="bl" rotWithShape="0">
               <a:srgbClr val="94A3B8">
                 <a:alpha val="12000"/>
               </a:srgbClr>
             </a:outerShdw>
           </a:effectLst>
         </p:spPr>
+        <p:txBody>
+          <a:bodyPr/>
+          <a:lstStyle/>
+          <a:p>
+            <a:endParaRPr lang="en-US"/>
+          </a:p>
+        </p:txBody>
       </p:sp>
       <p:sp>
         <p:nvSpPr>
@@ -17099,6 +17634,13 @@
             <a:prstDash val="solid"/>
           </a:ln>
         </p:spPr>
+        <p:txBody>
+          <a:bodyPr/>
+          <a:lstStyle/>
+          <a:p>
+            <a:endParaRPr lang="en-US"/>
+          </a:p>
+        </p:txBody>
       </p:sp>
       <p:sp>
         <p:nvSpPr>
@@ -17124,6 +17666,13 @@
             <a:prstDash val="solid"/>
           </a:ln>
         </p:spPr>
+        <p:txBody>
+          <a:bodyPr/>
+          <a:lstStyle/>
+          <a:p>
+            <a:endParaRPr lang="en-US"/>
+          </a:p>
+        </p:txBody>
       </p:sp>
       <p:sp>
         <p:nvSpPr>
@@ -17146,7 +17695,7 @@
           <a:bodyPr wrap="square" lIns="0" tIns="0" rIns="0" bIns="0" rtlCol="0" anchor="ctr"/>
           <a:lstStyle/>
           <a:p>
-            <a:pPr algn="ctr" indent="0" marL="0">
+            <a:pPr marL="0" indent="0" algn="ctr">
               <a:buNone/>
             </a:pPr>
             <a:r>
@@ -17185,7 +17734,7 @@
           <a:bodyPr wrap="square" lIns="0" tIns="0" rIns="0" bIns="0" rtlCol="0" anchor="ctr"/>
           <a:lstStyle/>
           <a:p>
-            <a:pPr indent="0" marL="0">
+            <a:pPr marL="0" indent="0">
               <a:buNone/>
             </a:pPr>
             <a:r>
@@ -17224,7 +17773,7 @@
           <a:bodyPr wrap="square" lIns="0" tIns="0" rIns="0" bIns="0" rtlCol="0" anchor="ctr"/>
           <a:lstStyle/>
           <a:p>
-            <a:pPr indent="0" marL="0">
+            <a:pPr marL="0" indent="0">
               <a:buNone/>
             </a:pPr>
             <a:r>
@@ -17263,7 +17812,7 @@
           <a:bodyPr wrap="square" lIns="0" tIns="0" rIns="0" bIns="0" rtlCol="0" anchor="ctr"/>
           <a:lstStyle/>
           <a:p>
-            <a:pPr indent="0" marL="0">
+            <a:pPr marL="0" indent="0">
               <a:buNone/>
             </a:pPr>
             <a:r>
@@ -17302,7 +17851,7 @@
           <a:bodyPr wrap="square" lIns="0" tIns="0" rIns="0" bIns="0" rtlCol="0" anchor="ctr"/>
           <a:lstStyle/>
           <a:p>
-            <a:pPr algn="r" indent="0" marL="0">
+            <a:pPr marL="0" indent="0" algn="r">
               <a:buNone/>
             </a:pPr>
             <a:r>
@@ -17336,6 +17885,7 @@
         <a:solidFill>
           <a:srgbClr val="FFFFFF"/>
         </a:solidFill>
+        <a:effectLst/>
       </p:bgPr>
     </p:bg>
     <p:spTree>
@@ -17373,11 +17923,11 @@
           <a:bodyPr wrap="square" lIns="0" tIns="0" rIns="0" bIns="0" rtlCol="0" anchor="ctr"/>
           <a:lstStyle/>
           <a:p>
-            <a:pPr indent="0" marL="0">
-              <a:buNone/>
-            </a:pPr>
-            <a:r>
-              <a:rPr lang="en-US" sz="1100" b="1" spc="400" kern="0" dirty="0">
+            <a:pPr marL="0" indent="0">
+              <a:buNone/>
+            </a:pPr>
+            <a:r>
+              <a:rPr lang="en-US" sz="1100" b="1" kern="0" spc="400" dirty="0">
                 <a:solidFill>
                   <a:srgbClr val="1C7293"/>
                 </a:solidFill>
@@ -17412,7 +17962,7 @@
           <a:bodyPr wrap="square" lIns="0" tIns="0" rIns="0" bIns="0" rtlCol="0" anchor="ctr"/>
           <a:lstStyle/>
           <a:p>
-            <a:pPr indent="0" marL="0">
+            <a:pPr marL="0" indent="0">
               <a:buNone/>
             </a:pPr>
             <a:r>
@@ -17446,16 +17996,34 @@
         </p:nvGraphicFramePr>
         <p:xfrm>
           <a:off x="457200" y="1554480"/>
-          <a:ext cx="8229600" cy="914400"/>
+          <a:ext cx="8229600" cy="3456432"/>
         </p:xfrm>
         <a:graphic>
           <a:graphicData uri="http://schemas.openxmlformats.org/drawingml/2006/table">
             <a:tbl>
               <a:tblPr/>
               <a:tblGrid>
-                <a:gridCol w="3108960"/>
-                <a:gridCol w="3657600"/>
-                <a:gridCol w="1463040"/>
+                <a:gridCol w="3108960">
+                  <a:extLst>
+                    <a:ext uri="{9D8B030D-6E8A-4147-A177-3AD203B41FA5}">
+                      <a16:colId xmlns:a16="http://schemas.microsoft.com/office/drawing/2014/main" val="20000"/>
+                    </a:ext>
+                  </a:extLst>
+                </a:gridCol>
+                <a:gridCol w="3657600">
+                  <a:extLst>
+                    <a:ext uri="{9D8B030D-6E8A-4147-A177-3AD203B41FA5}">
+                      <a16:colId xmlns:a16="http://schemas.microsoft.com/office/drawing/2014/main" val="20001"/>
+                    </a:ext>
+                  </a:extLst>
+                </a:gridCol>
+                <a:gridCol w="1463040">
+                  <a:extLst>
+                    <a:ext uri="{9D8B030D-6E8A-4147-A177-3AD203B41FA5}">
+                      <a16:colId xmlns:a16="http://schemas.microsoft.com/office/drawing/2014/main" val="20002"/>
+                    </a:ext>
+                  </a:extLst>
+                </a:gridCol>
               </a:tblGrid>
               <a:tr h="384048">
                 <a:tc>
@@ -17463,7 +18031,7 @@
                     <a:bodyPr/>
                     <a:lstStyle/>
                     <a:p>
-                      <a:pPr algn="l" indent="0" marL="0">
+                      <a:pPr marL="0" indent="0" algn="l">
                         <a:buNone/>
                       </a:pPr>
                       <a:r>
@@ -17484,7 +18052,7 @@
                       </a:endParaRPr>
                     </a:p>
                   </a:txBody>
-                  <a:tcPr marL="91440" marR="91440" marT="45720" marB="45720">
+                  <a:tcPr>
                     <a:lnL w="6350" cap="flat" cmpd="sng" algn="ctr">
                       <a:solidFill>
                         <a:srgbClr val="E2E8F0"/>
@@ -17531,7 +18099,7 @@
                     <a:bodyPr/>
                     <a:lstStyle/>
                     <a:p>
-                      <a:pPr algn="l" indent="0" marL="0">
+                      <a:pPr marL="0" indent="0" algn="l">
                         <a:buNone/>
                       </a:pPr>
                       <a:r>
@@ -17552,7 +18120,7 @@
                       </a:endParaRPr>
                     </a:p>
                   </a:txBody>
-                  <a:tcPr marL="91440" marR="91440" marT="45720" marB="45720">
+                  <a:tcPr>
                     <a:lnL w="6350" cap="flat" cmpd="sng" algn="ctr">
                       <a:solidFill>
                         <a:srgbClr val="E2E8F0"/>
@@ -17599,7 +18167,7 @@
                     <a:bodyPr/>
                     <a:lstStyle/>
                     <a:p>
-                      <a:pPr algn="l" indent="0" marL="0">
+                      <a:pPr marL="0" indent="0" algn="l">
                         <a:buNone/>
                       </a:pPr>
                       <a:r>
@@ -17620,7 +18188,7 @@
                       </a:endParaRPr>
                     </a:p>
                   </a:txBody>
-                  <a:tcPr marL="91440" marR="91440" marT="45720" marB="45720">
+                  <a:tcPr>
                     <a:lnL w="6350" cap="flat" cmpd="sng" algn="ctr">
                       <a:solidFill>
                         <a:srgbClr val="E2E8F0"/>
@@ -17662,6 +18230,11 @@
                     </a:solidFill>
                   </a:tcPr>
                 </a:tc>
+                <a:extLst>
+                  <a:ext uri="{0D108BD9-81ED-4DB2-BD59-A6C34878D82A}">
+                    <a16:rowId xmlns:a16="http://schemas.microsoft.com/office/drawing/2014/main" val="10000"/>
+                  </a:ext>
+                </a:extLst>
               </a:tr>
               <a:tr h="384048">
                 <a:tc>
@@ -17669,7 +18242,7 @@
                     <a:bodyPr/>
                     <a:lstStyle/>
                     <a:p>
-                      <a:pPr algn="l" indent="0" marL="0">
+                      <a:pPr marL="0" indent="0" algn="l">
                         <a:buNone/>
                       </a:pPr>
                       <a:r>
@@ -17690,7 +18263,7 @@
                       </a:endParaRPr>
                     </a:p>
                   </a:txBody>
-                  <a:tcPr marL="91440" marR="91440" marT="45720" marB="45720">
+                  <a:tcPr>
                     <a:lnL w="6350" cap="flat" cmpd="sng" algn="ctr">
                       <a:solidFill>
                         <a:srgbClr val="E2E8F0"/>
@@ -17737,7 +18310,7 @@
                     <a:bodyPr/>
                     <a:lstStyle/>
                     <a:p>
-                      <a:pPr algn="l" indent="0" marL="0">
+                      <a:pPr marL="0" indent="0" algn="l">
                         <a:buNone/>
                       </a:pPr>
                       <a:r>
@@ -17758,7 +18331,7 @@
                       </a:endParaRPr>
                     </a:p>
                   </a:txBody>
-                  <a:tcPr marL="91440" marR="91440" marT="45720" marB="45720">
+                  <a:tcPr>
                     <a:lnL w="6350" cap="flat" cmpd="sng" algn="ctr">
                       <a:solidFill>
                         <a:srgbClr val="E2E8F0"/>
@@ -17805,7 +18378,7 @@
                     <a:bodyPr/>
                     <a:lstStyle/>
                     <a:p>
-                      <a:pPr algn="l" indent="0" marL="0">
+                      <a:pPr marL="0" indent="0" algn="l">
                         <a:buNone/>
                       </a:pPr>
                       <a:r>
@@ -17826,7 +18399,7 @@
                       </a:endParaRPr>
                     </a:p>
                   </a:txBody>
-                  <a:tcPr marL="91440" marR="91440" marT="45720" marB="45720">
+                  <a:tcPr>
                     <a:lnL w="6350" cap="flat" cmpd="sng" algn="ctr">
                       <a:solidFill>
                         <a:srgbClr val="E2E8F0"/>
@@ -17868,6 +18441,11 @@
                     </a:solidFill>
                   </a:tcPr>
                 </a:tc>
+                <a:extLst>
+                  <a:ext uri="{0D108BD9-81ED-4DB2-BD59-A6C34878D82A}">
+                    <a16:rowId xmlns:a16="http://schemas.microsoft.com/office/drawing/2014/main" val="10001"/>
+                  </a:ext>
+                </a:extLst>
               </a:tr>
               <a:tr h="384048">
                 <a:tc>
@@ -17875,7 +18453,7 @@
                     <a:bodyPr/>
                     <a:lstStyle/>
                     <a:p>
-                      <a:pPr algn="l" indent="0" marL="0">
+                      <a:pPr marL="0" indent="0" algn="l">
                         <a:buNone/>
                       </a:pPr>
                       <a:r>
@@ -17896,7 +18474,7 @@
                       </a:endParaRPr>
                     </a:p>
                   </a:txBody>
-                  <a:tcPr marL="91440" marR="91440" marT="45720" marB="45720">
+                  <a:tcPr>
                     <a:lnL w="6350" cap="flat" cmpd="sng" algn="ctr">
                       <a:solidFill>
                         <a:srgbClr val="E2E8F0"/>
@@ -17943,7 +18521,7 @@
                     <a:bodyPr/>
                     <a:lstStyle/>
                     <a:p>
-                      <a:pPr algn="l" indent="0" marL="0">
+                      <a:pPr marL="0" indent="0" algn="l">
                         <a:buNone/>
                       </a:pPr>
                       <a:r>
@@ -17964,7 +18542,7 @@
                       </a:endParaRPr>
                     </a:p>
                   </a:txBody>
-                  <a:tcPr marL="91440" marR="91440" marT="45720" marB="45720">
+                  <a:tcPr>
                     <a:lnL w="6350" cap="flat" cmpd="sng" algn="ctr">
                       <a:solidFill>
                         <a:srgbClr val="E2E8F0"/>
@@ -18011,7 +18589,7 @@
                     <a:bodyPr/>
                     <a:lstStyle/>
                     <a:p>
-                      <a:pPr algn="l" indent="0" marL="0">
+                      <a:pPr marL="0" indent="0" algn="l">
                         <a:buNone/>
                       </a:pPr>
                       <a:r>
@@ -18032,7 +18610,7 @@
                       </a:endParaRPr>
                     </a:p>
                   </a:txBody>
-                  <a:tcPr marL="91440" marR="91440" marT="45720" marB="45720">
+                  <a:tcPr>
                     <a:lnL w="6350" cap="flat" cmpd="sng" algn="ctr">
                       <a:solidFill>
                         <a:srgbClr val="E2E8F0"/>
@@ -18074,6 +18652,11 @@
                     </a:solidFill>
                   </a:tcPr>
                 </a:tc>
+                <a:extLst>
+                  <a:ext uri="{0D108BD9-81ED-4DB2-BD59-A6C34878D82A}">
+                    <a16:rowId xmlns:a16="http://schemas.microsoft.com/office/drawing/2014/main" val="10002"/>
+                  </a:ext>
+                </a:extLst>
               </a:tr>
               <a:tr h="384048">
                 <a:tc>
@@ -18081,7 +18664,7 @@
                     <a:bodyPr/>
                     <a:lstStyle/>
                     <a:p>
-                      <a:pPr algn="l" indent="0" marL="0">
+                      <a:pPr marL="0" indent="0" algn="l">
                         <a:buNone/>
                       </a:pPr>
                       <a:r>
@@ -18102,7 +18685,7 @@
                       </a:endParaRPr>
                     </a:p>
                   </a:txBody>
-                  <a:tcPr marL="91440" marR="91440" marT="45720" marB="45720">
+                  <a:tcPr>
                     <a:lnL w="6350" cap="flat" cmpd="sng" algn="ctr">
                       <a:solidFill>
                         <a:srgbClr val="E2E8F0"/>
@@ -18149,7 +18732,7 @@
                     <a:bodyPr/>
                     <a:lstStyle/>
                     <a:p>
-                      <a:pPr algn="l" indent="0" marL="0">
+                      <a:pPr marL="0" indent="0" algn="l">
                         <a:buNone/>
                       </a:pPr>
                       <a:r>
@@ -18170,7 +18753,7 @@
                       </a:endParaRPr>
                     </a:p>
                   </a:txBody>
-                  <a:tcPr marL="91440" marR="91440" marT="45720" marB="45720">
+                  <a:tcPr>
                     <a:lnL w="6350" cap="flat" cmpd="sng" algn="ctr">
                       <a:solidFill>
                         <a:srgbClr val="E2E8F0"/>
@@ -18217,7 +18800,7 @@
                     <a:bodyPr/>
                     <a:lstStyle/>
                     <a:p>
-                      <a:pPr algn="l" indent="0" marL="0">
+                      <a:pPr marL="0" indent="0" algn="l">
                         <a:buNone/>
                       </a:pPr>
                       <a:r>
@@ -18238,7 +18821,7 @@
                       </a:endParaRPr>
                     </a:p>
                   </a:txBody>
-                  <a:tcPr marL="91440" marR="91440" marT="45720" marB="45720">
+                  <a:tcPr>
                     <a:lnL w="6350" cap="flat" cmpd="sng" algn="ctr">
                       <a:solidFill>
                         <a:srgbClr val="E2E8F0"/>
@@ -18280,6 +18863,11 @@
                     </a:solidFill>
                   </a:tcPr>
                 </a:tc>
+                <a:extLst>
+                  <a:ext uri="{0D108BD9-81ED-4DB2-BD59-A6C34878D82A}">
+                    <a16:rowId xmlns:a16="http://schemas.microsoft.com/office/drawing/2014/main" val="10003"/>
+                  </a:ext>
+                </a:extLst>
               </a:tr>
               <a:tr h="384048">
                 <a:tc>
@@ -18287,7 +18875,7 @@
                     <a:bodyPr/>
                     <a:lstStyle/>
                     <a:p>
-                      <a:pPr algn="l" indent="0" marL="0">
+                      <a:pPr marL="0" indent="0" algn="l">
                         <a:buNone/>
                       </a:pPr>
                       <a:r>
@@ -18308,7 +18896,7 @@
                       </a:endParaRPr>
                     </a:p>
                   </a:txBody>
-                  <a:tcPr marL="91440" marR="91440" marT="45720" marB="45720">
+                  <a:tcPr>
                     <a:lnL w="6350" cap="flat" cmpd="sng" algn="ctr">
                       <a:solidFill>
                         <a:srgbClr val="E2E8F0"/>
@@ -18355,7 +18943,7 @@
                     <a:bodyPr/>
                     <a:lstStyle/>
                     <a:p>
-                      <a:pPr algn="l" indent="0" marL="0">
+                      <a:pPr marL="0" indent="0" algn="l">
                         <a:buNone/>
                       </a:pPr>
                       <a:r>
@@ -18376,7 +18964,7 @@
                       </a:endParaRPr>
                     </a:p>
                   </a:txBody>
-                  <a:tcPr marL="91440" marR="91440" marT="45720" marB="45720">
+                  <a:tcPr>
                     <a:lnL w="6350" cap="flat" cmpd="sng" algn="ctr">
                       <a:solidFill>
                         <a:srgbClr val="E2E8F0"/>
@@ -18423,7 +19011,7 @@
                     <a:bodyPr/>
                     <a:lstStyle/>
                     <a:p>
-                      <a:pPr algn="l" indent="0" marL="0">
+                      <a:pPr marL="0" indent="0" algn="l">
                         <a:buNone/>
                       </a:pPr>
                       <a:r>
@@ -18444,7 +19032,7 @@
                       </a:endParaRPr>
                     </a:p>
                   </a:txBody>
-                  <a:tcPr marL="91440" marR="91440" marT="45720" marB="45720">
+                  <a:tcPr>
                     <a:lnL w="6350" cap="flat" cmpd="sng" algn="ctr">
                       <a:solidFill>
                         <a:srgbClr val="E2E8F0"/>
@@ -18486,6 +19074,11 @@
                     </a:solidFill>
                   </a:tcPr>
                 </a:tc>
+                <a:extLst>
+                  <a:ext uri="{0D108BD9-81ED-4DB2-BD59-A6C34878D82A}">
+                    <a16:rowId xmlns:a16="http://schemas.microsoft.com/office/drawing/2014/main" val="10004"/>
+                  </a:ext>
+                </a:extLst>
               </a:tr>
               <a:tr h="384048">
                 <a:tc>
@@ -18493,7 +19086,7 @@
                     <a:bodyPr/>
                     <a:lstStyle/>
                     <a:p>
-                      <a:pPr algn="l" indent="0" marL="0">
+                      <a:pPr marL="0" indent="0" algn="l">
                         <a:buNone/>
                       </a:pPr>
                       <a:r>
@@ -18514,7 +19107,7 @@
                       </a:endParaRPr>
                     </a:p>
                   </a:txBody>
-                  <a:tcPr marL="91440" marR="91440" marT="45720" marB="45720">
+                  <a:tcPr>
                     <a:lnL w="6350" cap="flat" cmpd="sng" algn="ctr">
                       <a:solidFill>
                         <a:srgbClr val="E2E8F0"/>
@@ -18561,7 +19154,7 @@
                     <a:bodyPr/>
                     <a:lstStyle/>
                     <a:p>
-                      <a:pPr algn="l" indent="0" marL="0">
+                      <a:pPr marL="0" indent="0" algn="l">
                         <a:buNone/>
                       </a:pPr>
                       <a:r>
@@ -18582,7 +19175,7 @@
                       </a:endParaRPr>
                     </a:p>
                   </a:txBody>
-                  <a:tcPr marL="91440" marR="91440" marT="45720" marB="45720">
+                  <a:tcPr>
                     <a:lnL w="6350" cap="flat" cmpd="sng" algn="ctr">
                       <a:solidFill>
                         <a:srgbClr val="E2E8F0"/>
@@ -18629,7 +19222,7 @@
                     <a:bodyPr/>
                     <a:lstStyle/>
                     <a:p>
-                      <a:pPr algn="l" indent="0" marL="0">
+                      <a:pPr marL="0" indent="0" algn="l">
                         <a:buNone/>
                       </a:pPr>
                       <a:r>
@@ -18650,7 +19243,7 @@
                       </a:endParaRPr>
                     </a:p>
                   </a:txBody>
-                  <a:tcPr marL="91440" marR="91440" marT="45720" marB="45720">
+                  <a:tcPr>
                     <a:lnL w="6350" cap="flat" cmpd="sng" algn="ctr">
                       <a:solidFill>
                         <a:srgbClr val="E2E8F0"/>
@@ -18692,6 +19285,11 @@
                     </a:solidFill>
                   </a:tcPr>
                 </a:tc>
+                <a:extLst>
+                  <a:ext uri="{0D108BD9-81ED-4DB2-BD59-A6C34878D82A}">
+                    <a16:rowId xmlns:a16="http://schemas.microsoft.com/office/drawing/2014/main" val="10005"/>
+                  </a:ext>
+                </a:extLst>
               </a:tr>
               <a:tr h="384048">
                 <a:tc>
@@ -18699,7 +19297,7 @@
                     <a:bodyPr/>
                     <a:lstStyle/>
                     <a:p>
-                      <a:pPr algn="l" indent="0" marL="0">
+                      <a:pPr marL="0" indent="0" algn="l">
                         <a:buNone/>
                       </a:pPr>
                       <a:r>
@@ -18720,7 +19318,7 @@
                       </a:endParaRPr>
                     </a:p>
                   </a:txBody>
-                  <a:tcPr marL="91440" marR="91440" marT="45720" marB="45720">
+                  <a:tcPr>
                     <a:lnL w="6350" cap="flat" cmpd="sng" algn="ctr">
                       <a:solidFill>
                         <a:srgbClr val="E2E8F0"/>
@@ -18767,7 +19365,7 @@
                     <a:bodyPr/>
                     <a:lstStyle/>
                     <a:p>
-                      <a:pPr algn="l" indent="0" marL="0">
+                      <a:pPr marL="0" indent="0" algn="l">
                         <a:buNone/>
                       </a:pPr>
                       <a:r>
@@ -18788,7 +19386,7 @@
                       </a:endParaRPr>
                     </a:p>
                   </a:txBody>
-                  <a:tcPr marL="91440" marR="91440" marT="45720" marB="45720">
+                  <a:tcPr>
                     <a:lnL w="6350" cap="flat" cmpd="sng" algn="ctr">
                       <a:solidFill>
                         <a:srgbClr val="E2E8F0"/>
@@ -18835,7 +19433,7 @@
                     <a:bodyPr/>
                     <a:lstStyle/>
                     <a:p>
-                      <a:pPr algn="l" indent="0" marL="0">
+                      <a:pPr marL="0" indent="0" algn="l">
                         <a:buNone/>
                       </a:pPr>
                       <a:r>
@@ -18856,7 +19454,7 @@
                       </a:endParaRPr>
                     </a:p>
                   </a:txBody>
-                  <a:tcPr marL="91440" marR="91440" marT="45720" marB="45720">
+                  <a:tcPr>
                     <a:lnL w="6350" cap="flat" cmpd="sng" algn="ctr">
                       <a:solidFill>
                         <a:srgbClr val="E2E8F0"/>
@@ -18898,6 +19496,11 @@
                     </a:solidFill>
                   </a:tcPr>
                 </a:tc>
+                <a:extLst>
+                  <a:ext uri="{0D108BD9-81ED-4DB2-BD59-A6C34878D82A}">
+                    <a16:rowId xmlns:a16="http://schemas.microsoft.com/office/drawing/2014/main" val="10006"/>
+                  </a:ext>
+                </a:extLst>
               </a:tr>
               <a:tr h="384048">
                 <a:tc>
@@ -18905,7 +19508,7 @@
                     <a:bodyPr/>
                     <a:lstStyle/>
                     <a:p>
-                      <a:pPr algn="l" indent="0" marL="0">
+                      <a:pPr marL="0" indent="0" algn="l">
                         <a:buNone/>
                       </a:pPr>
                       <a:r>
@@ -18926,7 +19529,7 @@
                       </a:endParaRPr>
                     </a:p>
                   </a:txBody>
-                  <a:tcPr marL="91440" marR="91440" marT="45720" marB="45720">
+                  <a:tcPr>
                     <a:lnL w="6350" cap="flat" cmpd="sng" algn="ctr">
                       <a:solidFill>
                         <a:srgbClr val="E2E8F0"/>
@@ -18973,7 +19576,7 @@
                     <a:bodyPr/>
                     <a:lstStyle/>
                     <a:p>
-                      <a:pPr algn="l" indent="0" marL="0">
+                      <a:pPr marL="0" indent="0" algn="l">
                         <a:buNone/>
                       </a:pPr>
                       <a:r>
@@ -18994,7 +19597,7 @@
                       </a:endParaRPr>
                     </a:p>
                   </a:txBody>
-                  <a:tcPr marL="91440" marR="91440" marT="45720" marB="45720">
+                  <a:tcPr>
                     <a:lnL w="6350" cap="flat" cmpd="sng" algn="ctr">
                       <a:solidFill>
                         <a:srgbClr val="E2E8F0"/>
@@ -19041,7 +19644,7 @@
                     <a:bodyPr/>
                     <a:lstStyle/>
                     <a:p>
-                      <a:pPr algn="l" indent="0" marL="0">
+                      <a:pPr marL="0" indent="0" algn="l">
                         <a:buNone/>
                       </a:pPr>
                       <a:r>
@@ -19062,7 +19665,7 @@
                       </a:endParaRPr>
                     </a:p>
                   </a:txBody>
-                  <a:tcPr marL="91440" marR="91440" marT="45720" marB="45720">
+                  <a:tcPr>
                     <a:lnL w="6350" cap="flat" cmpd="sng" algn="ctr">
                       <a:solidFill>
                         <a:srgbClr val="E2E8F0"/>
@@ -19104,6 +19707,11 @@
                     </a:solidFill>
                   </a:tcPr>
                 </a:tc>
+                <a:extLst>
+                  <a:ext uri="{0D108BD9-81ED-4DB2-BD59-A6C34878D82A}">
+                    <a16:rowId xmlns:a16="http://schemas.microsoft.com/office/drawing/2014/main" val="10007"/>
+                  </a:ext>
+                </a:extLst>
               </a:tr>
               <a:tr h="384048">
                 <a:tc>
@@ -19111,7 +19719,7 @@
                     <a:bodyPr/>
                     <a:lstStyle/>
                     <a:p>
-                      <a:pPr algn="l" indent="0" marL="0">
+                      <a:pPr marL="0" indent="0" algn="l">
                         <a:buNone/>
                       </a:pPr>
                       <a:r>
@@ -19132,7 +19740,7 @@
                       </a:endParaRPr>
                     </a:p>
                   </a:txBody>
-                  <a:tcPr marL="91440" marR="91440" marT="45720" marB="45720">
+                  <a:tcPr>
                     <a:lnL w="6350" cap="flat" cmpd="sng" algn="ctr">
                       <a:solidFill>
                         <a:srgbClr val="E2E8F0"/>
@@ -19179,7 +19787,7 @@
                     <a:bodyPr/>
                     <a:lstStyle/>
                     <a:p>
-                      <a:pPr algn="l" indent="0" marL="0">
+                      <a:pPr marL="0" indent="0" algn="l">
                         <a:buNone/>
                       </a:pPr>
                       <a:r>
@@ -19200,7 +19808,7 @@
                       </a:endParaRPr>
                     </a:p>
                   </a:txBody>
-                  <a:tcPr marL="91440" marR="91440" marT="45720" marB="45720">
+                  <a:tcPr>
                     <a:lnL w="6350" cap="flat" cmpd="sng" algn="ctr">
                       <a:solidFill>
                         <a:srgbClr val="E2E8F0"/>
@@ -19247,7 +19855,7 @@
                     <a:bodyPr/>
                     <a:lstStyle/>
                     <a:p>
-                      <a:pPr algn="l" indent="0" marL="0">
+                      <a:pPr marL="0" indent="0" algn="l">
                         <a:buNone/>
                       </a:pPr>
                       <a:r>
@@ -19268,7 +19876,7 @@
                       </a:endParaRPr>
                     </a:p>
                   </a:txBody>
-                  <a:tcPr marL="91440" marR="91440" marT="45720" marB="45720">
+                  <a:tcPr>
                     <a:lnL w="6350" cap="flat" cmpd="sng" algn="ctr">
                       <a:solidFill>
                         <a:srgbClr val="E2E8F0"/>
@@ -19310,6 +19918,11 @@
                     </a:solidFill>
                   </a:tcPr>
                 </a:tc>
+                <a:extLst>
+                  <a:ext uri="{0D108BD9-81ED-4DB2-BD59-A6C34878D82A}">
+                    <a16:rowId xmlns:a16="http://schemas.microsoft.com/office/drawing/2014/main" val="10008"/>
+                  </a:ext>
+                </a:extLst>
               </a:tr>
             </a:tbl>
           </a:graphicData>
@@ -19336,7 +19949,7 @@
           <a:bodyPr wrap="square" lIns="0" tIns="0" rIns="0" bIns="0" rtlCol="0" anchor="ctr"/>
           <a:lstStyle/>
           <a:p>
-            <a:pPr algn="l" indent="0" marL="0">
+            <a:pPr marL="0" indent="0" algn="l">
               <a:buNone/>
             </a:pPr>
             <a:r>
@@ -19375,7 +19988,7 @@
           <a:bodyPr wrap="square" lIns="0" tIns="0" rIns="0" bIns="0" rtlCol="0" anchor="ctr"/>
           <a:lstStyle/>
           <a:p>
-            <a:pPr algn="r" indent="0" marL="0">
+            <a:pPr marL="0" indent="0" algn="r">
               <a:buNone/>
             </a:pPr>
             <a:r>
@@ -19409,6 +20022,7 @@
         <a:solidFill>
           <a:srgbClr val="FFFFFF"/>
         </a:solidFill>
+        <a:effectLst/>
       </p:bgPr>
     </p:bg>
     <p:spTree>
@@ -19446,11 +20060,11 @@
           <a:bodyPr wrap="square" lIns="0" tIns="0" rIns="0" bIns="0" rtlCol="0" anchor="ctr"/>
           <a:lstStyle/>
           <a:p>
-            <a:pPr indent="0" marL="0">
-              <a:buNone/>
-            </a:pPr>
-            <a:r>
-              <a:rPr lang="en-US" sz="1100" b="1" spc="400" kern="0" dirty="0">
+            <a:pPr marL="0" indent="0">
+              <a:buNone/>
+            </a:pPr>
+            <a:r>
+              <a:rPr lang="en-US" sz="1100" b="1" kern="0" spc="400" dirty="0">
                 <a:solidFill>
                   <a:srgbClr val="1C7293"/>
                 </a:solidFill>
@@ -19485,7 +20099,7 @@
           <a:bodyPr wrap="square" lIns="0" tIns="0" rIns="0" bIns="0" rtlCol="0" anchor="ctr"/>
           <a:lstStyle/>
           <a:p>
-            <a:pPr indent="0" marL="0">
+            <a:pPr marL="0" indent="0">
               <a:buNone/>
             </a:pPr>
             <a:r>
@@ -19527,13 +20141,20 @@
             <a:prstDash val="solid"/>
           </a:ln>
           <a:effectLst>
-            <a:outerShdw sx="100000" sy="100000" kx="0" ky="0" algn="bl" rotWithShape="0" blurRad="101600" dist="12700" dir="5400000">
+            <a:outerShdw blurRad="101600" dist="12700" dir="5400000" algn="bl" rotWithShape="0">
               <a:srgbClr val="94A3B8">
                 <a:alpha val="12000"/>
               </a:srgbClr>
             </a:outerShdw>
           </a:effectLst>
         </p:spPr>
+        <p:txBody>
+          <a:bodyPr/>
+          <a:lstStyle/>
+          <a:p>
+            <a:endParaRPr lang="en-US"/>
+          </a:p>
+        </p:txBody>
       </p:sp>
       <p:sp>
         <p:nvSpPr>
@@ -19559,6 +20180,13 @@
             <a:prstDash val="solid"/>
           </a:ln>
         </p:spPr>
+        <p:txBody>
+          <a:bodyPr/>
+          <a:lstStyle/>
+          <a:p>
+            <a:endParaRPr lang="en-US"/>
+          </a:p>
+        </p:txBody>
       </p:sp>
       <p:sp>
         <p:nvSpPr>
@@ -19581,7 +20209,7 @@
           <a:bodyPr wrap="square" lIns="0" tIns="0" rIns="0" bIns="0" rtlCol="0" anchor="ctr"/>
           <a:lstStyle/>
           <a:p>
-            <a:pPr indent="0" marL="0">
+            <a:pPr marL="0" indent="0">
               <a:buNone/>
             </a:pPr>
             <a:r>
@@ -19620,7 +20248,7 @@
           <a:bodyPr wrap="square" lIns="0" tIns="0" rIns="0" bIns="0" rtlCol="0" anchor="ctr"/>
           <a:lstStyle/>
           <a:p>
-            <a:pPr indent="0" marL="0">
+            <a:pPr marL="0" indent="0">
               <a:buNone/>
             </a:pPr>
             <a:r>
@@ -19662,13 +20290,20 @@
             <a:prstDash val="solid"/>
           </a:ln>
           <a:effectLst>
-            <a:outerShdw sx="100000" sy="100000" kx="0" ky="0" algn="bl" rotWithShape="0" blurRad="101600" dist="12700" dir="5400000">
+            <a:outerShdw blurRad="101600" dist="12700" dir="5400000" algn="bl" rotWithShape="0">
               <a:srgbClr val="94A3B8">
                 <a:alpha val="12000"/>
               </a:srgbClr>
             </a:outerShdw>
           </a:effectLst>
         </p:spPr>
+        <p:txBody>
+          <a:bodyPr/>
+          <a:lstStyle/>
+          <a:p>
+            <a:endParaRPr lang="en-US"/>
+          </a:p>
+        </p:txBody>
       </p:sp>
       <p:sp>
         <p:nvSpPr>
@@ -19694,6 +20329,13 @@
             <a:prstDash val="solid"/>
           </a:ln>
         </p:spPr>
+        <p:txBody>
+          <a:bodyPr/>
+          <a:lstStyle/>
+          <a:p>
+            <a:endParaRPr lang="en-US"/>
+          </a:p>
+        </p:txBody>
       </p:sp>
       <p:sp>
         <p:nvSpPr>
@@ -19716,7 +20358,7 @@
           <a:bodyPr wrap="square" lIns="0" tIns="0" rIns="0" bIns="0" rtlCol="0" anchor="ctr"/>
           <a:lstStyle/>
           <a:p>
-            <a:pPr indent="0" marL="0">
+            <a:pPr marL="0" indent="0">
               <a:buNone/>
             </a:pPr>
             <a:r>
@@ -19755,7 +20397,7 @@
           <a:bodyPr wrap="square" lIns="0" tIns="0" rIns="0" bIns="0" rtlCol="0" anchor="ctr"/>
           <a:lstStyle/>
           <a:p>
-            <a:pPr indent="0" marL="0">
+            <a:pPr marL="0" indent="0">
               <a:buNone/>
             </a:pPr>
             <a:r>
@@ -19797,13 +20439,20 @@
             <a:prstDash val="solid"/>
           </a:ln>
           <a:effectLst>
-            <a:outerShdw sx="100000" sy="100000" kx="0" ky="0" algn="bl" rotWithShape="0" blurRad="101600" dist="12700" dir="5400000">
+            <a:outerShdw blurRad="101600" dist="12700" dir="5400000" algn="bl" rotWithShape="0">
               <a:srgbClr val="94A3B8">
                 <a:alpha val="12000"/>
               </a:srgbClr>
             </a:outerShdw>
           </a:effectLst>
         </p:spPr>
+        <p:txBody>
+          <a:bodyPr/>
+          <a:lstStyle/>
+          <a:p>
+            <a:endParaRPr lang="en-US"/>
+          </a:p>
+        </p:txBody>
       </p:sp>
       <p:sp>
         <p:nvSpPr>
@@ -19829,6 +20478,13 @@
             <a:prstDash val="solid"/>
           </a:ln>
         </p:spPr>
+        <p:txBody>
+          <a:bodyPr/>
+          <a:lstStyle/>
+          <a:p>
+            <a:endParaRPr lang="en-US"/>
+          </a:p>
+        </p:txBody>
       </p:sp>
       <p:sp>
         <p:nvSpPr>
@@ -19851,7 +20507,7 @@
           <a:bodyPr wrap="square" lIns="0" tIns="0" rIns="0" bIns="0" rtlCol="0" anchor="ctr"/>
           <a:lstStyle/>
           <a:p>
-            <a:pPr indent="0" marL="0">
+            <a:pPr marL="0" indent="0">
               <a:buNone/>
             </a:pPr>
             <a:r>
@@ -19890,7 +20546,7 @@
           <a:bodyPr wrap="square" lIns="0" tIns="0" rIns="0" bIns="0" rtlCol="0" anchor="ctr"/>
           <a:lstStyle/>
           <a:p>
-            <a:pPr indent="0" marL="0">
+            <a:pPr marL="0" indent="0">
               <a:buNone/>
             </a:pPr>
             <a:r>
@@ -19932,13 +20588,20 @@
             <a:prstDash val="solid"/>
           </a:ln>
           <a:effectLst>
-            <a:outerShdw sx="100000" sy="100000" kx="0" ky="0" algn="bl" rotWithShape="0" blurRad="101600" dist="12700" dir="5400000">
+            <a:outerShdw blurRad="101600" dist="12700" dir="5400000" algn="bl" rotWithShape="0">
               <a:srgbClr val="94A3B8">
                 <a:alpha val="12000"/>
               </a:srgbClr>
             </a:outerShdw>
           </a:effectLst>
         </p:spPr>
+        <p:txBody>
+          <a:bodyPr/>
+          <a:lstStyle/>
+          <a:p>
+            <a:endParaRPr lang="en-US"/>
+          </a:p>
+        </p:txBody>
       </p:sp>
       <p:sp>
         <p:nvSpPr>
@@ -19964,6 +20627,13 @@
             <a:prstDash val="solid"/>
           </a:ln>
         </p:spPr>
+        <p:txBody>
+          <a:bodyPr/>
+          <a:lstStyle/>
+          <a:p>
+            <a:endParaRPr lang="en-US"/>
+          </a:p>
+        </p:txBody>
       </p:sp>
       <p:sp>
         <p:nvSpPr>
@@ -19986,7 +20656,7 @@
           <a:bodyPr wrap="square" lIns="0" tIns="0" rIns="0" bIns="0" rtlCol="0" anchor="ctr"/>
           <a:lstStyle/>
           <a:p>
-            <a:pPr indent="0" marL="0">
+            <a:pPr marL="0" indent="0">
               <a:buNone/>
             </a:pPr>
             <a:r>
@@ -20025,7 +20695,7 @@
           <a:bodyPr wrap="square" lIns="0" tIns="0" rIns="0" bIns="0" rtlCol="0" anchor="ctr"/>
           <a:lstStyle/>
           <a:p>
-            <a:pPr indent="0" marL="0">
+            <a:pPr marL="0" indent="0">
               <a:buNone/>
             </a:pPr>
             <a:r>
@@ -20067,13 +20737,20 @@
             <a:prstDash val="solid"/>
           </a:ln>
           <a:effectLst>
-            <a:outerShdw sx="100000" sy="100000" kx="0" ky="0" algn="bl" rotWithShape="0" blurRad="101600" dist="12700" dir="5400000">
+            <a:outerShdw blurRad="101600" dist="12700" dir="5400000" algn="bl" rotWithShape="0">
               <a:srgbClr val="94A3B8">
                 <a:alpha val="12000"/>
               </a:srgbClr>
             </a:outerShdw>
           </a:effectLst>
         </p:spPr>
+        <p:txBody>
+          <a:bodyPr/>
+          <a:lstStyle/>
+          <a:p>
+            <a:endParaRPr lang="en-US"/>
+          </a:p>
+        </p:txBody>
       </p:sp>
       <p:sp>
         <p:nvSpPr>
@@ -20099,6 +20776,13 @@
             <a:prstDash val="solid"/>
           </a:ln>
         </p:spPr>
+        <p:txBody>
+          <a:bodyPr/>
+          <a:lstStyle/>
+          <a:p>
+            <a:endParaRPr lang="en-US"/>
+          </a:p>
+        </p:txBody>
       </p:sp>
       <p:sp>
         <p:nvSpPr>
@@ -20121,7 +20805,7 @@
           <a:bodyPr wrap="square" lIns="0" tIns="0" rIns="0" bIns="0" rtlCol="0" anchor="ctr"/>
           <a:lstStyle/>
           <a:p>
-            <a:pPr indent="0" marL="0">
+            <a:pPr marL="0" indent="0">
               <a:buNone/>
             </a:pPr>
             <a:r>
@@ -20160,7 +20844,7 @@
           <a:bodyPr wrap="square" lIns="0" tIns="0" rIns="0" bIns="0" rtlCol="0" anchor="ctr"/>
           <a:lstStyle/>
           <a:p>
-            <a:pPr indent="0" marL="0">
+            <a:pPr marL="0" indent="0">
               <a:buNone/>
             </a:pPr>
             <a:r>
@@ -20202,13 +20886,20 @@
             <a:prstDash val="solid"/>
           </a:ln>
           <a:effectLst>
-            <a:outerShdw sx="100000" sy="100000" kx="0" ky="0" algn="bl" rotWithShape="0" blurRad="101600" dist="12700" dir="5400000">
+            <a:outerShdw blurRad="101600" dist="12700" dir="5400000" algn="bl" rotWithShape="0">
               <a:srgbClr val="94A3B8">
                 <a:alpha val="12000"/>
               </a:srgbClr>
             </a:outerShdw>
           </a:effectLst>
         </p:spPr>
+        <p:txBody>
+          <a:bodyPr/>
+          <a:lstStyle/>
+          <a:p>
+            <a:endParaRPr lang="en-US"/>
+          </a:p>
+        </p:txBody>
       </p:sp>
       <p:sp>
         <p:nvSpPr>
@@ -20234,6 +20925,13 @@
             <a:prstDash val="solid"/>
           </a:ln>
         </p:spPr>
+        <p:txBody>
+          <a:bodyPr/>
+          <a:lstStyle/>
+          <a:p>
+            <a:endParaRPr lang="en-US"/>
+          </a:p>
+        </p:txBody>
       </p:sp>
       <p:sp>
         <p:nvSpPr>
@@ -20256,7 +20954,7 @@
           <a:bodyPr wrap="square" lIns="0" tIns="0" rIns="0" bIns="0" rtlCol="0" anchor="ctr"/>
           <a:lstStyle/>
           <a:p>
-            <a:pPr indent="0" marL="0">
+            <a:pPr marL="0" indent="0">
               <a:buNone/>
             </a:pPr>
             <a:r>
@@ -20295,7 +20993,7 @@
           <a:bodyPr wrap="square" lIns="0" tIns="0" rIns="0" bIns="0" rtlCol="0" anchor="ctr"/>
           <a:lstStyle/>
           <a:p>
-            <a:pPr indent="0" marL="0">
+            <a:pPr marL="0" indent="0">
               <a:buNone/>
             </a:pPr>
             <a:r>
@@ -20334,7 +21032,7 @@
           <a:bodyPr wrap="square" lIns="0" tIns="0" rIns="0" bIns="0" rtlCol="0" anchor="ctr"/>
           <a:lstStyle/>
           <a:p>
-            <a:pPr algn="r" indent="0" marL="0">
+            <a:pPr marL="0" indent="0" algn="r">
               <a:buNone/>
             </a:pPr>
             <a:r>
@@ -20368,6 +21066,7 @@
         <a:solidFill>
           <a:srgbClr val="FFFFFF"/>
         </a:solidFill>
+        <a:effectLst/>
       </p:bgPr>
     </p:bg>
     <p:spTree>
@@ -20405,11 +21104,11 @@
           <a:bodyPr wrap="square" lIns="0" tIns="0" rIns="0" bIns="0" rtlCol="0" anchor="ctr"/>
           <a:lstStyle/>
           <a:p>
-            <a:pPr indent="0" marL="0">
-              <a:buNone/>
-            </a:pPr>
-            <a:r>
-              <a:rPr lang="en-US" sz="1100" b="1" spc="400" kern="0" dirty="0">
+            <a:pPr marL="0" indent="0">
+              <a:buNone/>
+            </a:pPr>
+            <a:r>
+              <a:rPr lang="en-US" sz="1100" b="1" kern="0" spc="400" dirty="0">
                 <a:solidFill>
                   <a:srgbClr val="1C7293"/>
                 </a:solidFill>
@@ -20444,7 +21143,7 @@
           <a:bodyPr wrap="square" lIns="0" tIns="0" rIns="0" bIns="0" rtlCol="0" anchor="ctr"/>
           <a:lstStyle/>
           <a:p>
-            <a:pPr indent="0" marL="0">
+            <a:pPr marL="0" indent="0">
               <a:buNone/>
             </a:pPr>
             <a:r>
@@ -20486,13 +21185,20 @@
             <a:prstDash val="solid"/>
           </a:ln>
           <a:effectLst>
-            <a:outerShdw sx="100000" sy="100000" kx="0" ky="0" algn="bl" rotWithShape="0" blurRad="101600" dist="12700" dir="5400000">
+            <a:outerShdw blurRad="101600" dist="12700" dir="5400000" algn="bl" rotWithShape="0">
               <a:srgbClr val="94A3B8">
                 <a:alpha val="12000"/>
               </a:srgbClr>
             </a:outerShdw>
           </a:effectLst>
         </p:spPr>
+        <p:txBody>
+          <a:bodyPr/>
+          <a:lstStyle/>
+          <a:p>
+            <a:endParaRPr lang="en-US"/>
+          </a:p>
+        </p:txBody>
       </p:sp>
       <p:sp>
         <p:nvSpPr>
@@ -20518,6 +21224,13 @@
             <a:prstDash val="solid"/>
           </a:ln>
         </p:spPr>
+        <p:txBody>
+          <a:bodyPr/>
+          <a:lstStyle/>
+          <a:p>
+            <a:endParaRPr lang="en-US"/>
+          </a:p>
+        </p:txBody>
       </p:sp>
       <p:sp>
         <p:nvSpPr>
@@ -20540,7 +21253,7 @@
           <a:bodyPr wrap="square" lIns="0" tIns="0" rIns="0" bIns="0" rtlCol="0" anchor="ctr"/>
           <a:lstStyle/>
           <a:p>
-            <a:pPr indent="0" marL="0">
+            <a:pPr marL="0" indent="0">
               <a:buNone/>
             </a:pPr>
             <a:r>
@@ -20579,7 +21292,7 @@
           <a:bodyPr wrap="square" lIns="0" tIns="0" rIns="0" bIns="0" rtlCol="0" anchor="ctr"/>
           <a:lstStyle/>
           <a:p>
-            <a:pPr indent="0" marL="0">
+            <a:pPr marL="0" indent="0">
               <a:buNone/>
             </a:pPr>
             <a:r>
@@ -20618,7 +21331,7 @@
           <a:bodyPr wrap="square" lIns="0" tIns="0" rIns="0" bIns="0" rtlCol="0" anchor="ctr"/>
           <a:lstStyle/>
           <a:p>
-            <a:pPr indent="0" marL="0">
+            <a:pPr marL="0" indent="0">
               <a:buNone/>
             </a:pPr>
             <a:r>
@@ -20657,7 +21370,7 @@
           <a:bodyPr wrap="square" lIns="0" tIns="0" rIns="0" bIns="0" rtlCol="0" anchor="ctr"/>
           <a:lstStyle/>
           <a:p>
-            <a:pPr indent="0" marL="0">
+            <a:pPr marL="0" indent="0">
               <a:buNone/>
             </a:pPr>
             <a:r>
@@ -20699,6 +21412,13 @@
             <a:prstDash val="solid"/>
           </a:ln>
         </p:spPr>
+        <p:txBody>
+          <a:bodyPr/>
+          <a:lstStyle/>
+          <a:p>
+            <a:endParaRPr lang="en-US"/>
+          </a:p>
+        </p:txBody>
       </p:sp>
       <p:sp>
         <p:nvSpPr>
@@ -20721,7 +21441,7 @@
           <a:bodyPr wrap="square" lIns="0" tIns="0" rIns="0" bIns="0" rtlCol="0" anchor="ctr"/>
           <a:lstStyle/>
           <a:p>
-            <a:pPr algn="ctr" indent="0" marL="0">
+            <a:pPr marL="0" indent="0" algn="ctr">
               <a:buNone/>
             </a:pPr>
             <a:r>
@@ -20760,7 +21480,7 @@
           <a:bodyPr wrap="square" lIns="0" tIns="0" rIns="0" bIns="0" rtlCol="0" anchor="ctr"/>
           <a:lstStyle/>
           <a:p>
-            <a:pPr algn="ctr" indent="0" marL="0">
+            <a:pPr marL="0" indent="0" algn="ctr">
               <a:buNone/>
             </a:pPr>
             <a:r>
@@ -20802,6 +21522,13 @@
             <a:prstDash val="solid"/>
           </a:ln>
         </p:spPr>
+        <p:txBody>
+          <a:bodyPr/>
+          <a:lstStyle/>
+          <a:p>
+            <a:endParaRPr lang="en-US"/>
+          </a:p>
+        </p:txBody>
       </p:sp>
       <p:sp>
         <p:nvSpPr>
@@ -20824,7 +21551,7 @@
           <a:bodyPr wrap="square" lIns="0" tIns="0" rIns="0" bIns="0" rtlCol="0" anchor="ctr"/>
           <a:lstStyle/>
           <a:p>
-            <a:pPr algn="ctr" indent="0" marL="0">
+            <a:pPr marL="0" indent="0" algn="ctr">
               <a:buNone/>
             </a:pPr>
             <a:r>
@@ -20863,7 +21590,7 @@
           <a:bodyPr wrap="square" lIns="0" tIns="0" rIns="0" bIns="0" rtlCol="0" anchor="ctr"/>
           <a:lstStyle/>
           <a:p>
-            <a:pPr algn="ctr" indent="0" marL="0">
+            <a:pPr marL="0" indent="0" algn="ctr">
               <a:buNone/>
             </a:pPr>
             <a:r>
@@ -20905,6 +21632,13 @@
             <a:prstDash val="solid"/>
           </a:ln>
         </p:spPr>
+        <p:txBody>
+          <a:bodyPr/>
+          <a:lstStyle/>
+          <a:p>
+            <a:endParaRPr lang="en-US"/>
+          </a:p>
+        </p:txBody>
       </p:sp>
       <p:sp>
         <p:nvSpPr>
@@ -20927,7 +21661,7 @@
           <a:bodyPr wrap="square" lIns="0" tIns="0" rIns="0" bIns="0" rtlCol="0" anchor="ctr"/>
           <a:lstStyle/>
           <a:p>
-            <a:pPr algn="ctr" indent="0" marL="0">
+            <a:pPr marL="0" indent="0" algn="ctr">
               <a:buNone/>
             </a:pPr>
             <a:r>
@@ -20966,7 +21700,7 @@
           <a:bodyPr wrap="square" lIns="0" tIns="0" rIns="0" bIns="0" rtlCol="0" anchor="ctr"/>
           <a:lstStyle/>
           <a:p>
-            <a:pPr algn="ctr" indent="0" marL="0">
+            <a:pPr marL="0" indent="0" algn="ctr">
               <a:buNone/>
             </a:pPr>
             <a:r>
@@ -21008,6 +21742,13 @@
             <a:prstDash val="solid"/>
           </a:ln>
         </p:spPr>
+        <p:txBody>
+          <a:bodyPr/>
+          <a:lstStyle/>
+          <a:p>
+            <a:endParaRPr lang="en-US"/>
+          </a:p>
+        </p:txBody>
       </p:sp>
       <p:sp>
         <p:nvSpPr>
@@ -21030,7 +21771,7 @@
           <a:bodyPr wrap="square" lIns="0" tIns="0" rIns="0" bIns="0" rtlCol="0" anchor="ctr"/>
           <a:lstStyle/>
           <a:p>
-            <a:pPr algn="ctr" indent="0" marL="0">
+            <a:pPr marL="0" indent="0" algn="ctr">
               <a:buNone/>
             </a:pPr>
             <a:r>
@@ -21069,7 +21810,7 @@
           <a:bodyPr wrap="square" lIns="0" tIns="0" rIns="0" bIns="0" rtlCol="0" anchor="ctr"/>
           <a:lstStyle/>
           <a:p>
-            <a:pPr algn="ctr" indent="0" marL="0">
+            <a:pPr marL="0" indent="0" algn="ctr">
               <a:buNone/>
             </a:pPr>
             <a:r>
@@ -21111,6 +21852,13 @@
             <a:prstDash val="solid"/>
           </a:ln>
         </p:spPr>
+        <p:txBody>
+          <a:bodyPr/>
+          <a:lstStyle/>
+          <a:p>
+            <a:endParaRPr lang="en-US"/>
+          </a:p>
+        </p:txBody>
       </p:sp>
       <p:sp>
         <p:nvSpPr>
@@ -21133,7 +21881,7 @@
           <a:bodyPr wrap="square" lIns="0" tIns="0" rIns="0" bIns="0" rtlCol="0" anchor="ctr"/>
           <a:lstStyle/>
           <a:p>
-            <a:pPr algn="ctr" indent="0" marL="0">
+            <a:pPr marL="0" indent="0" algn="ctr">
               <a:buNone/>
             </a:pPr>
             <a:r>
@@ -21172,7 +21920,7 @@
           <a:bodyPr wrap="square" lIns="0" tIns="0" rIns="0" bIns="0" rtlCol="0" anchor="ctr"/>
           <a:lstStyle/>
           <a:p>
-            <a:pPr algn="ctr" indent="0" marL="0">
+            <a:pPr marL="0" indent="0" algn="ctr">
               <a:buNone/>
             </a:pPr>
             <a:r>
@@ -21214,6 +21962,13 @@
             <a:prstDash val="solid"/>
           </a:ln>
         </p:spPr>
+        <p:txBody>
+          <a:bodyPr/>
+          <a:lstStyle/>
+          <a:p>
+            <a:endParaRPr lang="en-US"/>
+          </a:p>
+        </p:txBody>
       </p:sp>
       <p:sp>
         <p:nvSpPr>
@@ -21236,7 +21991,7 @@
           <a:bodyPr wrap="square" lIns="0" tIns="0" rIns="0" bIns="0" rtlCol="0" anchor="ctr"/>
           <a:lstStyle/>
           <a:p>
-            <a:pPr algn="ctr" indent="0" marL="0">
+            <a:pPr marL="0" indent="0" algn="ctr">
               <a:buNone/>
             </a:pPr>
             <a:r>
@@ -21275,7 +22030,7 @@
           <a:bodyPr wrap="square" lIns="0" tIns="0" rIns="0" bIns="0" rtlCol="0" anchor="ctr"/>
           <a:lstStyle/>
           <a:p>
-            <a:pPr algn="ctr" indent="0" marL="0">
+            <a:pPr marL="0" indent="0" algn="ctr">
               <a:buNone/>
             </a:pPr>
             <a:r>
@@ -21314,7 +22069,7 @@
           <a:bodyPr wrap="square" lIns="0" tIns="0" rIns="0" bIns="0" rtlCol="0" anchor="ctr"/>
           <a:lstStyle/>
           <a:p>
-            <a:pPr algn="l" indent="0" marL="0">
+            <a:pPr marL="0" indent="0" algn="l">
               <a:buNone/>
             </a:pPr>
             <a:r>
@@ -21353,7 +22108,7 @@
           <a:bodyPr wrap="square" lIns="0" tIns="0" rIns="0" bIns="0" rtlCol="0" anchor="ctr"/>
           <a:lstStyle/>
           <a:p>
-            <a:pPr algn="r" indent="0" marL="0">
+            <a:pPr marL="0" indent="0" algn="r">
               <a:buNone/>
             </a:pPr>
             <a:r>
@@ -21672,4 +22427,319 @@
     </a:ext>
   </a:extLst>
 </a:theme>
+</file>
+
+<file path=ppt/theme/theme2.xml><?xml version="1.0" encoding="utf-8"?>
+<a:theme xmlns:a="http://schemas.openxmlformats.org/drawingml/2006/main" name="Office Theme">
+  <a:themeElements>
+    <a:clrScheme name="Office">
+      <a:dk1>
+        <a:sysClr val="windowText" lastClr="000000"/>
+      </a:dk1>
+      <a:lt1>
+        <a:sysClr val="window" lastClr="FFFFFF"/>
+      </a:lt1>
+      <a:dk2>
+        <a:srgbClr val="0E2841"/>
+      </a:dk2>
+      <a:lt2>
+        <a:srgbClr val="E8E8E8"/>
+      </a:lt2>
+      <a:accent1>
+        <a:srgbClr val="156082"/>
+      </a:accent1>
+      <a:accent2>
+        <a:srgbClr val="E97132"/>
+      </a:accent2>
+      <a:accent3>
+        <a:srgbClr val="196B24"/>
+      </a:accent3>
+      <a:accent4>
+        <a:srgbClr val="0F9ED5"/>
+      </a:accent4>
+      <a:accent5>
+        <a:srgbClr val="A02B93"/>
+      </a:accent5>
+      <a:accent6>
+        <a:srgbClr val="4EA72E"/>
+      </a:accent6>
+      <a:hlink>
+        <a:srgbClr val="467886"/>
+      </a:hlink>
+      <a:folHlink>
+        <a:srgbClr val="96607D"/>
+      </a:folHlink>
+    </a:clrScheme>
+    <a:fontScheme name="Office">
+      <a:majorFont>
+        <a:latin typeface="Aptos Display" panose="02110004020202020204"/>
+        <a:ea typeface=""/>
+        <a:cs typeface=""/>
+        <a:font script="Jpan" typeface="游ゴシック Light"/>
+        <a:font script="Hang" typeface="맑은 고딕"/>
+        <a:font script="Hans" typeface="等线 Light"/>
+        <a:font script="Hant" typeface="新細明體"/>
+        <a:font script="Arab" typeface="Times New Roman"/>
+        <a:font script="Hebr" typeface="Times New Roman"/>
+        <a:font script="Thai" typeface="Angsana New"/>
+        <a:font script="Ethi" typeface="Nyala"/>
+        <a:font script="Beng" typeface="Vrinda"/>
+        <a:font script="Gujr" typeface="Shruti"/>
+        <a:font script="Khmr" typeface="MoolBoran"/>
+        <a:font script="Knda" typeface="Tunga"/>
+        <a:font script="Guru" typeface="Raavi"/>
+        <a:font script="Cans" typeface="Euphemia"/>
+        <a:font script="Cher" typeface="Plantagenet Cherokee"/>
+        <a:font script="Yiii" typeface="Microsoft Yi Baiti"/>
+        <a:font script="Tibt" typeface="Microsoft Himalaya"/>
+        <a:font script="Thaa" typeface="MV Boli"/>
+        <a:font script="Deva" typeface="Mangal"/>
+        <a:font script="Telu" typeface="Gautami"/>
+        <a:font script="Taml" typeface="Latha"/>
+        <a:font script="Syrc" typeface="Estrangelo Edessa"/>
+        <a:font script="Orya" typeface="Kalinga"/>
+        <a:font script="Mlym" typeface="Kartika"/>
+        <a:font script="Laoo" typeface="DokChampa"/>
+        <a:font script="Sinh" typeface="Iskoola Pota"/>
+        <a:font script="Mong" typeface="Mongolian Baiti"/>
+        <a:font script="Viet" typeface="Times New Roman"/>
+        <a:font script="Uigh" typeface="Microsoft Uighur"/>
+        <a:font script="Geor" typeface="Sylfaen"/>
+        <a:font script="Armn" typeface="Arial"/>
+        <a:font script="Bugi" typeface="Leelawadee UI"/>
+        <a:font script="Bopo" typeface="Microsoft JhengHei"/>
+        <a:font script="Java" typeface="Javanese Text"/>
+        <a:font script="Lisu" typeface="Segoe UI"/>
+        <a:font script="Mymr" typeface="Myanmar Text"/>
+        <a:font script="Nkoo" typeface="Ebrima"/>
+        <a:font script="Olck" typeface="Nirmala UI"/>
+        <a:font script="Osma" typeface="Ebrima"/>
+        <a:font script="Phag" typeface="Phagspa"/>
+        <a:font script="Syrn" typeface="Estrangelo Edessa"/>
+        <a:font script="Syrj" typeface="Estrangelo Edessa"/>
+        <a:font script="Syre" typeface="Estrangelo Edessa"/>
+        <a:font script="Sora" typeface="Nirmala UI"/>
+        <a:font script="Tale" typeface="Microsoft Tai Le"/>
+        <a:font script="Talu" typeface="Microsoft New Tai Lue"/>
+        <a:font script="Tfng" typeface="Ebrima"/>
+      </a:majorFont>
+      <a:minorFont>
+        <a:latin typeface="Aptos" panose="02110004020202020204"/>
+        <a:ea typeface=""/>
+        <a:cs typeface=""/>
+        <a:font script="Jpan" typeface="游ゴシック"/>
+        <a:font script="Hang" typeface="맑은 고딕"/>
+        <a:font script="Hans" typeface="等线"/>
+        <a:font script="Hant" typeface="新細明體"/>
+        <a:font script="Arab" typeface="Arial"/>
+        <a:font script="Hebr" typeface="Arial"/>
+        <a:font script="Thai" typeface="Cordia New"/>
+        <a:font script="Ethi" typeface="Nyala"/>
+        <a:font script="Beng" typeface="Vrinda"/>
+        <a:font script="Gujr" typeface="Shruti"/>
+        <a:font script="Khmr" typeface="DaunPenh"/>
+        <a:font script="Knda" typeface="Tunga"/>
+        <a:font script="Guru" typeface="Raavi"/>
+        <a:font script="Cans" typeface="Euphemia"/>
+        <a:font script="Cher" typeface="Plantagenet Cherokee"/>
+        <a:font script="Yiii" typeface="Microsoft Yi Baiti"/>
+        <a:font script="Tibt" typeface="Microsoft Himalaya"/>
+        <a:font script="Thaa" typeface="MV Boli"/>
+        <a:font script="Deva" typeface="Mangal"/>
+        <a:font script="Telu" typeface="Gautami"/>
+        <a:font script="Taml" typeface="Latha"/>
+        <a:font script="Syrc" typeface="Estrangelo Edessa"/>
+        <a:font script="Orya" typeface="Kalinga"/>
+        <a:font script="Mlym" typeface="Kartika"/>
+        <a:font script="Laoo" typeface="DokChampa"/>
+        <a:font script="Sinh" typeface="Iskoola Pota"/>
+        <a:font script="Mong" typeface="Mongolian Baiti"/>
+        <a:font script="Viet" typeface="Arial"/>
+        <a:font script="Uigh" typeface="Microsoft Uighur"/>
+        <a:font script="Geor" typeface="Sylfaen"/>
+        <a:font script="Armn" typeface="Arial"/>
+        <a:font script="Bugi" typeface="Leelawadee UI"/>
+        <a:font script="Bopo" typeface="Microsoft JhengHei"/>
+        <a:font script="Java" typeface="Javanese Text"/>
+        <a:font script="Lisu" typeface="Segoe UI"/>
+        <a:font script="Mymr" typeface="Myanmar Text"/>
+        <a:font script="Nkoo" typeface="Ebrima"/>
+        <a:font script="Olck" typeface="Nirmala UI"/>
+        <a:font script="Osma" typeface="Ebrima"/>
+        <a:font script="Phag" typeface="Phagspa"/>
+        <a:font script="Syrn" typeface="Estrangelo Edessa"/>
+        <a:font script="Syrj" typeface="Estrangelo Edessa"/>
+        <a:font script="Syre" typeface="Estrangelo Edessa"/>
+        <a:font script="Sora" typeface="Nirmala UI"/>
+        <a:font script="Tale" typeface="Microsoft Tai Le"/>
+        <a:font script="Talu" typeface="Microsoft New Tai Lue"/>
+        <a:font script="Tfng" typeface="Ebrima"/>
+      </a:minorFont>
+    </a:fontScheme>
+    <a:fmtScheme name="Office">
+      <a:fillStyleLst>
+        <a:solidFill>
+          <a:schemeClr val="phClr"/>
+        </a:solidFill>
+        <a:gradFill rotWithShape="1">
+          <a:gsLst>
+            <a:gs pos="0">
+              <a:schemeClr val="phClr">
+                <a:lumMod val="110000"/>
+                <a:satMod val="105000"/>
+                <a:tint val="67000"/>
+              </a:schemeClr>
+            </a:gs>
+            <a:gs pos="50000">
+              <a:schemeClr val="phClr">
+                <a:lumMod val="105000"/>
+                <a:satMod val="103000"/>
+                <a:tint val="73000"/>
+              </a:schemeClr>
+            </a:gs>
+            <a:gs pos="100000">
+              <a:schemeClr val="phClr">
+                <a:lumMod val="105000"/>
+                <a:satMod val="109000"/>
+                <a:tint val="81000"/>
+              </a:schemeClr>
+            </a:gs>
+          </a:gsLst>
+          <a:lin ang="5400000" scaled="0"/>
+        </a:gradFill>
+        <a:gradFill rotWithShape="1">
+          <a:gsLst>
+            <a:gs pos="0">
+              <a:schemeClr val="phClr">
+                <a:satMod val="103000"/>
+                <a:lumMod val="102000"/>
+                <a:tint val="94000"/>
+              </a:schemeClr>
+            </a:gs>
+            <a:gs pos="50000">
+              <a:schemeClr val="phClr">
+                <a:satMod val="110000"/>
+                <a:lumMod val="100000"/>
+                <a:shade val="100000"/>
+              </a:schemeClr>
+            </a:gs>
+            <a:gs pos="100000">
+              <a:schemeClr val="phClr">
+                <a:lumMod val="99000"/>
+                <a:satMod val="120000"/>
+                <a:shade val="78000"/>
+              </a:schemeClr>
+            </a:gs>
+          </a:gsLst>
+          <a:lin ang="5400000" scaled="0"/>
+        </a:gradFill>
+      </a:fillStyleLst>
+      <a:lnStyleLst>
+        <a:ln w="12700" cap="flat" cmpd="sng" algn="ctr">
+          <a:solidFill>
+            <a:schemeClr val="phClr"/>
+          </a:solidFill>
+          <a:prstDash val="solid"/>
+          <a:miter lim="800000"/>
+        </a:ln>
+        <a:ln w="19050" cap="flat" cmpd="sng" algn="ctr">
+          <a:solidFill>
+            <a:schemeClr val="phClr"/>
+          </a:solidFill>
+          <a:prstDash val="solid"/>
+          <a:miter lim="800000"/>
+        </a:ln>
+        <a:ln w="25400" cap="flat" cmpd="sng" algn="ctr">
+          <a:solidFill>
+            <a:schemeClr val="phClr"/>
+          </a:solidFill>
+          <a:prstDash val="solid"/>
+          <a:miter lim="800000"/>
+        </a:ln>
+      </a:lnStyleLst>
+      <a:effectStyleLst>
+        <a:effectStyle>
+          <a:effectLst/>
+        </a:effectStyle>
+        <a:effectStyle>
+          <a:effectLst/>
+        </a:effectStyle>
+        <a:effectStyle>
+          <a:effectLst>
+            <a:outerShdw blurRad="57150" dist="19050" dir="5400000" algn="ctr" rotWithShape="0">
+              <a:srgbClr val="000000">
+                <a:alpha val="63000"/>
+              </a:srgbClr>
+            </a:outerShdw>
+          </a:effectLst>
+        </a:effectStyle>
+      </a:effectStyleLst>
+      <a:bgFillStyleLst>
+        <a:solidFill>
+          <a:schemeClr val="phClr"/>
+        </a:solidFill>
+        <a:solidFill>
+          <a:schemeClr val="phClr">
+            <a:tint val="95000"/>
+            <a:satMod val="170000"/>
+          </a:schemeClr>
+        </a:solidFill>
+        <a:gradFill rotWithShape="1">
+          <a:gsLst>
+            <a:gs pos="0">
+              <a:schemeClr val="phClr">
+                <a:tint val="93000"/>
+                <a:satMod val="150000"/>
+                <a:shade val="98000"/>
+                <a:lumMod val="102000"/>
+              </a:schemeClr>
+            </a:gs>
+            <a:gs pos="50000">
+              <a:schemeClr val="phClr">
+                <a:tint val="98000"/>
+                <a:satMod val="130000"/>
+                <a:shade val="90000"/>
+                <a:lumMod val="103000"/>
+              </a:schemeClr>
+            </a:gs>
+            <a:gs pos="100000">
+              <a:schemeClr val="phClr">
+                <a:shade val="63000"/>
+                <a:satMod val="120000"/>
+              </a:schemeClr>
+            </a:gs>
+          </a:gsLst>
+          <a:lin ang="5400000" scaled="0"/>
+        </a:gradFill>
+      </a:bgFillStyleLst>
+    </a:fmtScheme>
+  </a:themeElements>
+  <a:objectDefaults>
+    <a:lnDef>
+      <a:spPr/>
+      <a:bodyPr/>
+      <a:lstStyle/>
+      <a:style>
+        <a:lnRef idx="2">
+          <a:schemeClr val="accent1"/>
+        </a:lnRef>
+        <a:fillRef idx="0">
+          <a:schemeClr val="accent1"/>
+        </a:fillRef>
+        <a:effectRef idx="1">
+          <a:schemeClr val="accent1"/>
+        </a:effectRef>
+        <a:fontRef idx="minor">
+          <a:schemeClr val="tx1"/>
+        </a:fontRef>
+      </a:style>
+    </a:lnDef>
+  </a:objectDefaults>
+  <a:extraClrSchemeLst/>
+  <a:extLst>
+    <a:ext uri="{05A4C25C-085E-4340-85A3-A5531E510DB2}">
+      <thm15:themeFamily xmlns:thm15="http://schemas.microsoft.com/office/thememl/2012/main" name="Office Theme" id="{2E142A2C-CD16-42D6-873A-C26D2A0506FA}" vid="{1BDDFF52-6CD6-40A5-AB3C-68EB2F1E4D0A}"/>
+    </a:ext>
+  </a:extLst>
+</a:theme>
 </file>
--- a/reports/zh15min_slides.pptx
+++ b/reports/zh15min_slides.pptx
@@ -4,9 +4,6 @@
   <p:sldMasterIdLst>
     <p:sldMasterId id="2147483648" r:id="rId1"/>
   </p:sldMasterIdLst>
-  <p:notesMasterIdLst>
-    <p:notesMasterId r:id="rId22"/>
-  </p:notesMasterIdLst>
   <p:sldIdLst>
     <p:sldId id="256" r:id="rId2"/>
     <p:sldId id="257" r:id="rId3"/>
@@ -29,7 +26,10 @@
     <p:sldId id="274" r:id="rId20"/>
     <p:sldId id="275" r:id="rId21"/>
   </p:sldIdLst>
-  <p:sldSz cx="9144000" cy="5143500" type="screen16x9"/>
+  <p:notesMasterIdLst>
+    <p:notesMasterId r:id="rId22"/>
+  </p:notesMasterIdLst>
+  <p:sldSz cx="9144000" cy="5143500"/>
   <p:notesSz cx="5143500" cy="9144000"/>
   <p:defaultTextStyle>
     <a:lvl1pPr marL="0" algn="l" defTabSz="914400" rtl="0" eaLnBrk="1" latinLnBrk="0" hangingPunct="1">
@@ -123,11 +123,6 @@
       </a:defRPr>
     </a:lvl9pPr>
   </p:defaultTextStyle>
-  <p:extLst>
-    <p:ext uri="{EFAFB233-063F-42B5-8137-9DF3F51BA10A}">
-      <p15:sldGuideLst xmlns:p15="http://schemas.microsoft.com/office/powerpoint/2012/main"/>
-    </p:ext>
-  </p:extLst>
 </p:presentation>
 </file>
 
@@ -153,10 +148,234 @@
           <a:chExt cx="0" cy="0"/>
         </a:xfrm>
       </p:grpSpPr>
+      <p:sp>
+        <p:nvSpPr>
+          <p:cNvPr id="2" name="Header Placeholder 1"/>
+          <p:cNvSpPr>
+            <a:spLocks noGrp="1"/>
+          </p:cNvSpPr>
+          <p:nvPr>
+            <p:ph type="hdr" sz="quarter"/>
+          </p:nvPr>
+        </p:nvSpPr>
+        <p:spPr>
+          <a:xfrm>
+            <a:off x="0" y="0"/>
+            <a:ext cx="2971800" cy="458788"/>
+          </a:xfrm>
+          <a:prstGeom prst="rect">
+            <a:avLst/>
+          </a:prstGeom>
+        </p:spPr>
+        <p:txBody>
+          <a:bodyPr vert="horz" lIns="91440" tIns="45720" rIns="91440" bIns="45720" rtlCol="0"/>
+          <a:lstStyle>
+            <a:lvl1pPr algn="l">
+              <a:defRPr sz="1200"/>
+            </a:lvl1pPr>
+          </a:lstStyle>
+          <a:p>
+            <a:endParaRPr lang="en-US"/>
+          </a:p>
+        </p:txBody>
+      </p:sp>
+      <p:sp>
+        <p:nvSpPr>
+          <p:cNvPr id="3" name="Date Placeholder 2"/>
+          <p:cNvSpPr>
+            <a:spLocks noGrp="1"/>
+          </p:cNvSpPr>
+          <p:nvPr>
+            <p:ph type="dt" idx="1"/>
+          </p:nvPr>
+        </p:nvSpPr>
+        <p:spPr>
+          <a:xfrm>
+            <a:off x="3884613" y="0"/>
+            <a:ext cx="2971800" cy="458788"/>
+          </a:xfrm>
+          <a:prstGeom prst="rect">
+            <a:avLst/>
+          </a:prstGeom>
+        </p:spPr>
+        <p:txBody>
+          <a:bodyPr vert="horz" lIns="91440" tIns="45720" rIns="91440" bIns="45720" rtlCol="0"/>
+          <a:lstStyle>
+            <a:lvl1pPr algn="r">
+              <a:defRPr sz="1200"/>
+            </a:lvl1pPr>
+          </a:lstStyle>
+          <a:p>
+            <a:fld id="{5282F153-3F37-0F45-9E97-73ACFA13230C}" type="datetimeFigureOut">
+              <a:rPr lang="en-US"/>
+              <a:t>7/23/19</a:t>
+            </a:fld>
+            <a:endParaRPr lang="en-US"/>
+          </a:p>
+        </p:txBody>
+      </p:sp>
+      <p:sp>
+        <p:nvSpPr>
+          <p:cNvPr id="4" name="Slide Image Placeholder 3"/>
+          <p:cNvSpPr>
+            <a:spLocks noGrp="1" noRot="1" noChangeAspect="1"/>
+          </p:cNvSpPr>
+          <p:nvPr>
+            <p:ph type="sldImg" idx="2"/>
+          </p:nvPr>
+        </p:nvSpPr>
+        <p:spPr>
+          <a:xfrm>
+            <a:off x="685800" y="1143000"/>
+            <a:ext cx="5486400" cy="3086100"/>
+          </a:xfrm>
+          <a:prstGeom prst="rect">
+            <a:avLst/>
+          </a:prstGeom>
+          <a:noFill/>
+          <a:ln w="12700">
+            <a:solidFill>
+              <a:prstClr val="black"/>
+            </a:solidFill>
+          </a:ln>
+        </p:spPr>
+        <p:txBody>
+          <a:bodyPr vert="horz" lIns="91440" tIns="45720" rIns="91440" bIns="45720" rtlCol="0" anchor="ctr"/>
+          <a:lstStyle/>
+          <a:p>
+            <a:endParaRPr lang="en-US"/>
+          </a:p>
+        </p:txBody>
+      </p:sp>
+      <p:sp>
+        <p:nvSpPr>
+          <p:cNvPr id="5" name="Notes Placeholder 4"/>
+          <p:cNvSpPr>
+            <a:spLocks noGrp="1"/>
+          </p:cNvSpPr>
+          <p:nvPr>
+            <p:ph type="body" sz="quarter" idx="3"/>
+          </p:nvPr>
+        </p:nvSpPr>
+        <p:spPr>
+          <a:xfrm>
+            <a:off x="685800" y="4400550"/>
+            <a:ext cx="5486400" cy="3600450"/>
+          </a:xfrm>
+          <a:prstGeom prst="rect">
+            <a:avLst/>
+          </a:prstGeom>
+        </p:spPr>
+        <p:txBody>
+          <a:bodyPr vert="horz" lIns="91440" tIns="45720" rIns="91440" bIns="45720" rtlCol="0"/>
+          <a:lstStyle/>
+          <a:p>
+            <a:pPr lvl="0"/>
+            <a:r>
+              <a:rPr lang="en-US"/>
+              <a:t>Click to edit Master text styles</a:t>
+            </a:r>
+          </a:p>
+          <a:p>
+            <a:pPr lvl="1"/>
+            <a:r>
+              <a:rPr lang="en-US"/>
+              <a:t>Second level</a:t>
+            </a:r>
+          </a:p>
+          <a:p>
+            <a:pPr lvl="2"/>
+            <a:r>
+              <a:rPr lang="en-US"/>
+              <a:t>Third level</a:t>
+            </a:r>
+          </a:p>
+          <a:p>
+            <a:pPr lvl="3"/>
+            <a:r>
+              <a:rPr lang="en-US"/>
+              <a:t>Fourth level</a:t>
+            </a:r>
+          </a:p>
+          <a:p>
+            <a:pPr lvl="4"/>
+            <a:r>
+              <a:rPr lang="en-US"/>
+              <a:t>Fifth level</a:t>
+            </a:r>
+          </a:p>
+        </p:txBody>
+      </p:sp>
+      <p:sp>
+        <p:nvSpPr>
+          <p:cNvPr id="6" name="Footer Placeholder 5"/>
+          <p:cNvSpPr>
+            <a:spLocks noGrp="1"/>
+          </p:cNvSpPr>
+          <p:nvPr>
+            <p:ph type="ftr" sz="quarter" idx="4"/>
+          </p:nvPr>
+        </p:nvSpPr>
+        <p:spPr>
+          <a:xfrm>
+            <a:off x="0" y="8685213"/>
+            <a:ext cx="2971800" cy="458787"/>
+          </a:xfrm>
+          <a:prstGeom prst="rect">
+            <a:avLst/>
+          </a:prstGeom>
+        </p:spPr>
+        <p:txBody>
+          <a:bodyPr vert="horz" lIns="91440" tIns="45720" rIns="91440" bIns="45720" rtlCol="0" anchor="b"/>
+          <a:lstStyle>
+            <a:lvl1pPr algn="l">
+              <a:defRPr sz="1200"/>
+            </a:lvl1pPr>
+          </a:lstStyle>
+          <a:p>
+            <a:endParaRPr lang="en-US"/>
+          </a:p>
+        </p:txBody>
+      </p:sp>
+      <p:sp>
+        <p:nvSpPr>
+          <p:cNvPr id="7" name="Slide Number Placeholder 6"/>
+          <p:cNvSpPr>
+            <a:spLocks noGrp="1"/>
+          </p:cNvSpPr>
+          <p:nvPr>
+            <p:ph type="sldNum" sz="quarter" idx="5"/>
+          </p:nvPr>
+        </p:nvSpPr>
+        <p:spPr>
+          <a:xfrm>
+            <a:off x="3884613" y="8685213"/>
+            <a:ext cx="2971800" cy="458787"/>
+          </a:xfrm>
+          <a:prstGeom prst="rect">
+            <a:avLst/>
+          </a:prstGeom>
+        </p:spPr>
+        <p:txBody>
+          <a:bodyPr vert="horz" lIns="91440" tIns="45720" rIns="91440" bIns="45720" rtlCol="0" anchor="b"/>
+          <a:lstStyle>
+            <a:lvl1pPr algn="r">
+              <a:defRPr sz="1200"/>
+            </a:lvl1pPr>
+          </a:lstStyle>
+          <a:p>
+            <a:fld id="{CE5E9CC1-C706-0F49-92D6-E571CC5EEA8F}" type="slidenum">
+              <a:rPr lang="en-US"/>
+              <a:t>‹#›</a:t>
+            </a:fld>
+            <a:endParaRPr lang="en-US"/>
+          </a:p>
+        </p:txBody>
+      </p:sp>
     </p:spTree>
     <p:extLst>
       <p:ext uri="{BB962C8B-B14F-4D97-AF65-F5344CB8AC3E}">
-        <p14:creationId xmlns:p14="http://schemas.microsoft.com/office/powerpoint/2010/main" val="3570066395"/>
+        <p14:creationId xmlns:p14="http://schemas.microsoft.com/office/powerpoint/2010/main" val="1024086991"/>
       </p:ext>
     </p:extLst>
   </p:cSld>
@@ -300,6 +519,10 @@
           <a:bodyPr/>
           <a:lstStyle/>
           <a:p>
+            <a:r>
+              <a:rPr lang="en-US" dirty="0"/>
+              <a:t/>
+            </a:r>
             <a:endParaRPr lang="en-US" dirty="0"/>
           </a:p>
         </p:txBody>
@@ -384,6 +607,10 @@
           <a:bodyPr/>
           <a:lstStyle/>
           <a:p>
+            <a:r>
+              <a:rPr lang="en-US" dirty="0"/>
+              <a:t/>
+            </a:r>
             <a:endParaRPr lang="en-US" dirty="0"/>
           </a:p>
         </p:txBody>
@@ -468,6 +695,10 @@
           <a:bodyPr/>
           <a:lstStyle/>
           <a:p>
+            <a:r>
+              <a:rPr lang="en-US" dirty="0"/>
+              <a:t/>
+            </a:r>
             <a:endParaRPr lang="en-US" dirty="0"/>
           </a:p>
         </p:txBody>
@@ -552,6 +783,10 @@
           <a:bodyPr/>
           <a:lstStyle/>
           <a:p>
+            <a:r>
+              <a:rPr lang="en-US" dirty="0"/>
+              <a:t/>
+            </a:r>
             <a:endParaRPr lang="en-US" dirty="0"/>
           </a:p>
         </p:txBody>
@@ -636,6 +871,10 @@
           <a:bodyPr/>
           <a:lstStyle/>
           <a:p>
+            <a:r>
+              <a:rPr lang="en-US" dirty="0"/>
+              <a:t/>
+            </a:r>
             <a:endParaRPr lang="en-US" dirty="0"/>
           </a:p>
         </p:txBody>
@@ -720,6 +959,10 @@
           <a:bodyPr/>
           <a:lstStyle/>
           <a:p>
+            <a:r>
+              <a:rPr lang="en-US" dirty="0"/>
+              <a:t/>
+            </a:r>
             <a:endParaRPr lang="en-US" dirty="0"/>
           </a:p>
         </p:txBody>
@@ -804,6 +1047,10 @@
           <a:bodyPr/>
           <a:lstStyle/>
           <a:p>
+            <a:r>
+              <a:rPr lang="en-US" dirty="0"/>
+              <a:t/>
+            </a:r>
             <a:endParaRPr lang="en-US" dirty="0"/>
           </a:p>
         </p:txBody>
@@ -888,6 +1135,10 @@
           <a:bodyPr/>
           <a:lstStyle/>
           <a:p>
+            <a:r>
+              <a:rPr lang="en-US" dirty="0"/>
+              <a:t/>
+            </a:r>
             <a:endParaRPr lang="en-US" dirty="0"/>
           </a:p>
         </p:txBody>
@@ -972,6 +1223,10 @@
           <a:bodyPr/>
           <a:lstStyle/>
           <a:p>
+            <a:r>
+              <a:rPr lang="en-US" dirty="0"/>
+              <a:t/>
+            </a:r>
             <a:endParaRPr lang="en-US" dirty="0"/>
           </a:p>
         </p:txBody>
@@ -1056,6 +1311,10 @@
           <a:bodyPr/>
           <a:lstStyle/>
           <a:p>
+            <a:r>
+              <a:rPr lang="en-US" dirty="0"/>
+              <a:t/>
+            </a:r>
             <a:endParaRPr lang="en-US" dirty="0"/>
           </a:p>
         </p:txBody>
@@ -1140,6 +1399,10 @@
           <a:bodyPr/>
           <a:lstStyle/>
           <a:p>
+            <a:r>
+              <a:rPr lang="en-US" dirty="0"/>
+              <a:t/>
+            </a:r>
             <a:endParaRPr lang="en-US" dirty="0"/>
           </a:p>
         </p:txBody>
@@ -1224,6 +1487,10 @@
           <a:bodyPr/>
           <a:lstStyle/>
           <a:p>
+            <a:r>
+              <a:rPr lang="en-US" dirty="0"/>
+              <a:t/>
+            </a:r>
             <a:endParaRPr lang="en-US" dirty="0"/>
           </a:p>
         </p:txBody>
@@ -1308,6 +1575,10 @@
           <a:bodyPr/>
           <a:lstStyle/>
           <a:p>
+            <a:r>
+              <a:rPr lang="en-US" dirty="0"/>
+              <a:t/>
+            </a:r>
             <a:endParaRPr lang="en-US" dirty="0"/>
           </a:p>
         </p:txBody>
@@ -1392,6 +1663,10 @@
           <a:bodyPr/>
           <a:lstStyle/>
           <a:p>
+            <a:r>
+              <a:rPr lang="en-US" dirty="0"/>
+              <a:t/>
+            </a:r>
             <a:endParaRPr lang="en-US" dirty="0"/>
           </a:p>
         </p:txBody>
@@ -1476,6 +1751,10 @@
           <a:bodyPr/>
           <a:lstStyle/>
           <a:p>
+            <a:r>
+              <a:rPr lang="en-US" dirty="0"/>
+              <a:t/>
+            </a:r>
             <a:endParaRPr lang="en-US" dirty="0"/>
           </a:p>
         </p:txBody>
@@ -1560,6 +1839,10 @@
           <a:bodyPr/>
           <a:lstStyle/>
           <a:p>
+            <a:r>
+              <a:rPr lang="en-US" dirty="0"/>
+              <a:t/>
+            </a:r>
             <a:endParaRPr lang="en-US" dirty="0"/>
           </a:p>
         </p:txBody>
@@ -1644,6 +1927,10 @@
           <a:bodyPr/>
           <a:lstStyle/>
           <a:p>
+            <a:r>
+              <a:rPr lang="en-US" dirty="0"/>
+              <a:t/>
+            </a:r>
             <a:endParaRPr lang="en-US" dirty="0"/>
           </a:p>
         </p:txBody>
@@ -1728,6 +2015,10 @@
           <a:bodyPr/>
           <a:lstStyle/>
           <a:p>
+            <a:r>
+              <a:rPr lang="en-US" dirty="0"/>
+              <a:t/>
+            </a:r>
             <a:endParaRPr lang="en-US" dirty="0"/>
           </a:p>
         </p:txBody>
@@ -1812,6 +2103,10 @@
           <a:bodyPr/>
           <a:lstStyle/>
           <a:p>
+            <a:r>
+              <a:rPr lang="en-US" dirty="0"/>
+              <a:t/>
+            </a:r>
             <a:endParaRPr lang="en-US" dirty="0"/>
           </a:p>
         </p:txBody>
@@ -1896,6 +2191,10 @@
           <a:bodyPr/>
           <a:lstStyle/>
           <a:p>
+            <a:r>
+              <a:rPr lang="en-US" dirty="0"/>
+              <a:t/>
+            </a:r>
             <a:endParaRPr lang="en-US" dirty="0"/>
           </a:p>
         </p:txBody>
@@ -1969,11 +2268,6 @@
 <file path=ppt/slideMasters/slideMaster1.xml><?xml version="1.0" encoding="utf-8"?>
 <p:sldMaster xmlns:a="http://schemas.openxmlformats.org/drawingml/2006/main" xmlns:r="http://schemas.openxmlformats.org/officeDocument/2006/relationships" xmlns:p="http://schemas.openxmlformats.org/presentationml/2006/main">
   <p:cSld>
-    <p:bg>
-      <p:bgRef idx="1001">
-        <a:schemeClr val="bg1"/>
-      </p:bgRef>
-    </p:bg>
     <p:spTree>
       <p:nvGrpSpPr>
         <p:cNvPr id="1" name=""/>
@@ -2256,7 +2550,6 @@
         <a:solidFill>
           <a:srgbClr val="21295C"/>
         </a:solidFill>
-        <a:effectLst/>
       </p:bgPr>
     </p:bg>
     <p:spTree>
@@ -2297,13 +2590,6 @@
             <a:prstDash val="solid"/>
           </a:ln>
         </p:spPr>
-        <p:txBody>
-          <a:bodyPr/>
-          <a:lstStyle/>
-          <a:p>
-            <a:endParaRPr lang="en-US"/>
-          </a:p>
-        </p:txBody>
       </p:sp>
       <p:sp>
         <p:nvSpPr>
@@ -2326,11 +2612,11 @@
           <a:bodyPr wrap="square" lIns="0" tIns="0" rIns="0" bIns="0" rtlCol="0" anchor="ctr"/>
           <a:lstStyle/>
           <a:p>
-            <a:pPr marL="0" indent="0">
-              <a:buNone/>
-            </a:pPr>
-            <a:r>
-              <a:rPr lang="en-US" sz="1100" kern="0" spc="300" dirty="0">
+            <a:pPr indent="0" marL="0">
+              <a:buNone/>
+            </a:pPr>
+            <a:r>
+              <a:rPr lang="en-US" sz="1100" spc="300" kern="0" dirty="0">
                 <a:solidFill>
                   <a:srgbClr val="CBD5E1"/>
                 </a:solidFill>
@@ -2365,7 +2651,7 @@
           <a:bodyPr wrap="square" lIns="0" tIns="0" rIns="0" bIns="0" rtlCol="0" anchor="ctr"/>
           <a:lstStyle/>
           <a:p>
-            <a:pPr marL="0" indent="0">
+            <a:pPr indent="0" marL="0">
               <a:buNone/>
             </a:pPr>
             <a:r>
@@ -2404,7 +2690,7 @@
           <a:bodyPr wrap="square" lIns="0" tIns="0" rIns="0" bIns="0" rtlCol="0" anchor="ctr"/>
           <a:lstStyle/>
           <a:p>
-            <a:pPr marL="0" indent="0">
+            <a:pPr indent="0" marL="0">
               <a:buNone/>
             </a:pPr>
             <a:r>
@@ -2446,13 +2732,6 @@
             <a:prstDash val="solid"/>
           </a:ln>
         </p:spPr>
-        <p:txBody>
-          <a:bodyPr/>
-          <a:lstStyle/>
-          <a:p>
-            <a:endParaRPr lang="en-US"/>
-          </a:p>
-        </p:txBody>
       </p:sp>
       <p:sp>
         <p:nvSpPr>
@@ -2475,7 +2754,7 @@
           <a:bodyPr wrap="square" lIns="0" tIns="0" rIns="0" bIns="0" rtlCol="0" anchor="ctr"/>
           <a:lstStyle/>
           <a:p>
-            <a:pPr marL="0" indent="0">
+            <a:pPr indent="0" marL="0">
               <a:buNone/>
             </a:pPr>
             <a:r>
@@ -2489,6 +2768,9 @@
               </a:rPr>
               <a:t>Gruppe: </a:t>
             </a:r>
+            <a:pPr indent="0" marL="0">
+              <a:buNone/>
+            </a:pPr>
             <a:r>
               <a:rPr lang="en-US" sz="1300" dirty="0">
                 <a:solidFill>
@@ -2525,7 +2807,7 @@
           <a:bodyPr wrap="square" lIns="0" tIns="0" rIns="0" bIns="0" rtlCol="0" anchor="ctr"/>
           <a:lstStyle/>
           <a:p>
-            <a:pPr marL="0" indent="0">
+            <a:pPr indent="0" marL="0">
               <a:buNone/>
             </a:pPr>
             <a:r>
@@ -2539,6 +2821,9 @@
               </a:rPr>
               <a:t>Modul: </a:t>
             </a:r>
+            <a:pPr indent="0" marL="0">
+              <a:buNone/>
+            </a:pPr>
             <a:r>
               <a:rPr lang="en-US" sz="1300" dirty="0">
                 <a:solidFill>
@@ -2575,7 +2860,7 @@
           <a:bodyPr wrap="square" lIns="0" tIns="0" rIns="0" bIns="0" rtlCol="0" anchor="ctr"/>
           <a:lstStyle/>
           <a:p>
-            <a:pPr marL="0" indent="0">
+            <a:pPr indent="0" marL="0">
               <a:buNone/>
             </a:pPr>
             <a:r>
@@ -2589,6 +2874,9 @@
               </a:rPr>
               <a:t>Datum: </a:t>
             </a:r>
+            <a:pPr indent="0" marL="0">
+              <a:buNone/>
+            </a:pPr>
             <a:r>
               <a:rPr lang="en-US" sz="1300" dirty="0">
                 <a:solidFill>
@@ -2625,7 +2913,7 @@
           <a:bodyPr wrap="square" lIns="0" tIns="0" rIns="0" bIns="0" rtlCol="0" anchor="ctr"/>
           <a:lstStyle/>
           <a:p>
-            <a:pPr marL="0" indent="0" algn="l">
+            <a:pPr algn="l" indent="0" marL="0">
               <a:buNone/>
             </a:pPr>
             <a:r>
@@ -2664,7 +2952,7 @@
           <a:bodyPr wrap="square" lIns="0" tIns="0" rIns="0" bIns="0" rtlCol="0" anchor="ctr"/>
           <a:lstStyle/>
           <a:p>
-            <a:pPr marL="0" indent="0" algn="r">
+            <a:pPr algn="r" indent="0" marL="0">
               <a:buNone/>
             </a:pPr>
             <a:r>
@@ -2698,7 +2986,6 @@
         <a:solidFill>
           <a:srgbClr val="FFFFFF"/>
         </a:solidFill>
-        <a:effectLst/>
       </p:bgPr>
     </p:bg>
     <p:spTree>
@@ -2736,11 +3023,11 @@
           <a:bodyPr wrap="square" lIns="0" tIns="0" rIns="0" bIns="0" rtlCol="0" anchor="ctr"/>
           <a:lstStyle/>
           <a:p>
-            <a:pPr marL="0" indent="0">
-              <a:buNone/>
-            </a:pPr>
-            <a:r>
-              <a:rPr lang="en-US" sz="1100" b="1" kern="0" spc="400" dirty="0">
+            <a:pPr indent="0" marL="0">
+              <a:buNone/>
+            </a:pPr>
+            <a:r>
+              <a:rPr lang="en-US" sz="1100" b="1" spc="400" kern="0" dirty="0">
                 <a:solidFill>
                   <a:srgbClr val="1C7293"/>
                 </a:solidFill>
@@ -2775,7 +3062,7 @@
           <a:bodyPr wrap="square" lIns="0" tIns="0" rIns="0" bIns="0" rtlCol="0" anchor="ctr"/>
           <a:lstStyle/>
           <a:p>
-            <a:pPr marL="0" indent="0">
+            <a:pPr indent="0" marL="0">
               <a:buNone/>
             </a:pPr>
             <a:r>
@@ -2817,13 +3104,6 @@
             <a:prstDash val="solid"/>
           </a:ln>
         </p:spPr>
-        <p:txBody>
-          <a:bodyPr/>
-          <a:lstStyle/>
-          <a:p>
-            <a:endParaRPr lang="en-US"/>
-          </a:p>
-        </p:txBody>
       </p:sp>
       <p:sp>
         <p:nvSpPr>
@@ -2849,13 +3129,6 @@
             <a:prstDash val="solid"/>
           </a:ln>
         </p:spPr>
-        <p:txBody>
-          <a:bodyPr/>
-          <a:lstStyle/>
-          <a:p>
-            <a:endParaRPr lang="en-US"/>
-          </a:p>
-        </p:txBody>
       </p:sp>
       <p:sp>
         <p:nvSpPr>
@@ -2878,7 +3151,7 @@
           <a:bodyPr wrap="square" lIns="0" tIns="0" rIns="0" bIns="0" rtlCol="0" anchor="ctr"/>
           <a:lstStyle/>
           <a:p>
-            <a:pPr marL="0" indent="0" algn="ctr">
+            <a:pPr algn="ctr" indent="0" marL="0">
               <a:buNone/>
             </a:pPr>
             <a:r>
@@ -2917,7 +3190,7 @@
           <a:bodyPr wrap="square" lIns="0" tIns="0" rIns="0" bIns="0" rtlCol="0" anchor="ctr"/>
           <a:lstStyle/>
           <a:p>
-            <a:pPr marL="0" indent="0">
+            <a:pPr indent="0" marL="0">
               <a:buNone/>
             </a:pPr>
             <a:r>
@@ -2959,13 +3232,6 @@
             <a:prstDash val="solid"/>
           </a:ln>
         </p:spPr>
-        <p:txBody>
-          <a:bodyPr/>
-          <a:lstStyle/>
-          <a:p>
-            <a:endParaRPr lang="en-US"/>
-          </a:p>
-        </p:txBody>
       </p:sp>
       <p:sp>
         <p:nvSpPr>
@@ -2988,7 +3254,7 @@
           <a:bodyPr wrap="square" lIns="0" tIns="0" rIns="0" bIns="0" rtlCol="0" anchor="ctr"/>
           <a:lstStyle/>
           <a:p>
-            <a:pPr marL="0" indent="0" algn="ctr">
+            <a:pPr algn="ctr" indent="0" marL="0">
               <a:buNone/>
             </a:pPr>
             <a:r>
@@ -3027,7 +3293,7 @@
           <a:bodyPr wrap="square" lIns="0" tIns="0" rIns="0" bIns="0" rtlCol="0" anchor="ctr"/>
           <a:lstStyle/>
           <a:p>
-            <a:pPr marL="0" indent="0">
+            <a:pPr indent="0" marL="0">
               <a:buNone/>
             </a:pPr>
             <a:r>
@@ -3069,13 +3335,6 @@
             <a:prstDash val="solid"/>
           </a:ln>
         </p:spPr>
-        <p:txBody>
-          <a:bodyPr/>
-          <a:lstStyle/>
-          <a:p>
-            <a:endParaRPr lang="en-US"/>
-          </a:p>
-        </p:txBody>
       </p:sp>
       <p:sp>
         <p:nvSpPr>
@@ -3098,7 +3357,7 @@
           <a:bodyPr wrap="square" lIns="0" tIns="0" rIns="0" bIns="0" rtlCol="0" anchor="ctr"/>
           <a:lstStyle/>
           <a:p>
-            <a:pPr marL="0" indent="0" algn="ctr">
+            <a:pPr algn="ctr" indent="0" marL="0">
               <a:buNone/>
             </a:pPr>
             <a:r>
@@ -3137,7 +3396,7 @@
           <a:bodyPr wrap="square" lIns="0" tIns="0" rIns="0" bIns="0" rtlCol="0" anchor="ctr"/>
           <a:lstStyle/>
           <a:p>
-            <a:pPr marL="0" indent="0">
+            <a:pPr indent="0" marL="0">
               <a:buNone/>
             </a:pPr>
             <a:r>
@@ -3179,13 +3438,6 @@
             <a:prstDash val="solid"/>
           </a:ln>
         </p:spPr>
-        <p:txBody>
-          <a:bodyPr/>
-          <a:lstStyle/>
-          <a:p>
-            <a:endParaRPr lang="en-US"/>
-          </a:p>
-        </p:txBody>
       </p:sp>
       <p:sp>
         <p:nvSpPr>
@@ -3208,7 +3460,7 @@
           <a:bodyPr wrap="square" lIns="0" tIns="0" rIns="0" bIns="0" rtlCol="0" anchor="ctr"/>
           <a:lstStyle/>
           <a:p>
-            <a:pPr marL="0" indent="0" algn="ctr">
+            <a:pPr algn="ctr" indent="0" marL="0">
               <a:buNone/>
             </a:pPr>
             <a:r>
@@ -3247,7 +3499,7 @@
           <a:bodyPr wrap="square" lIns="0" tIns="0" rIns="0" bIns="0" rtlCol="0" anchor="ctr"/>
           <a:lstStyle/>
           <a:p>
-            <a:pPr marL="0" indent="0">
+            <a:pPr indent="0" marL="0">
               <a:buNone/>
             </a:pPr>
             <a:r>
@@ -3289,13 +3541,6 @@
             <a:prstDash val="solid"/>
           </a:ln>
         </p:spPr>
-        <p:txBody>
-          <a:bodyPr/>
-          <a:lstStyle/>
-          <a:p>
-            <a:endParaRPr lang="en-US"/>
-          </a:p>
-        </p:txBody>
       </p:sp>
       <p:sp>
         <p:nvSpPr>
@@ -3318,7 +3563,7 @@
           <a:bodyPr wrap="square" lIns="0" tIns="0" rIns="0" bIns="0" rtlCol="0" anchor="ctr"/>
           <a:lstStyle/>
           <a:p>
-            <a:pPr marL="0" indent="0" algn="ctr">
+            <a:pPr algn="ctr" indent="0" marL="0">
               <a:buNone/>
             </a:pPr>
             <a:r>
@@ -3357,7 +3602,7 @@
           <a:bodyPr wrap="square" lIns="0" tIns="0" rIns="0" bIns="0" rtlCol="0" anchor="ctr"/>
           <a:lstStyle/>
           <a:p>
-            <a:pPr marL="0" indent="0">
+            <a:pPr indent="0" marL="0">
               <a:buNone/>
             </a:pPr>
             <a:r>
@@ -3399,13 +3644,6 @@
             <a:prstDash val="solid"/>
           </a:ln>
         </p:spPr>
-        <p:txBody>
-          <a:bodyPr/>
-          <a:lstStyle/>
-          <a:p>
-            <a:endParaRPr lang="en-US"/>
-          </a:p>
-        </p:txBody>
       </p:sp>
       <p:sp>
         <p:nvSpPr>
@@ -3428,7 +3666,7 @@
           <a:bodyPr wrap="square" lIns="0" tIns="0" rIns="0" bIns="0" rtlCol="0" anchor="ctr"/>
           <a:lstStyle/>
           <a:p>
-            <a:pPr marL="0" indent="0" algn="ctr">
+            <a:pPr algn="ctr" indent="0" marL="0">
               <a:buNone/>
             </a:pPr>
             <a:r>
@@ -3467,7 +3705,7 @@
           <a:bodyPr wrap="square" lIns="0" tIns="0" rIns="0" bIns="0" rtlCol="0" anchor="ctr"/>
           <a:lstStyle/>
           <a:p>
-            <a:pPr marL="0" indent="0">
+            <a:pPr indent="0" marL="0">
               <a:buNone/>
             </a:pPr>
             <a:r>
@@ -3509,13 +3747,6 @@
             <a:prstDash val="solid"/>
           </a:ln>
         </p:spPr>
-        <p:txBody>
-          <a:bodyPr/>
-          <a:lstStyle/>
-          <a:p>
-            <a:endParaRPr lang="en-US"/>
-          </a:p>
-        </p:txBody>
       </p:sp>
       <p:sp>
         <p:nvSpPr>
@@ -3538,7 +3769,7 @@
           <a:bodyPr wrap="square" lIns="0" tIns="0" rIns="0" bIns="0" rtlCol="0" anchor="ctr"/>
           <a:lstStyle/>
           <a:p>
-            <a:pPr marL="0" indent="0" algn="ctr">
+            <a:pPr algn="ctr" indent="0" marL="0">
               <a:buNone/>
             </a:pPr>
             <a:r>
@@ -3577,7 +3808,7 @@
           <a:bodyPr wrap="square" lIns="0" tIns="0" rIns="0" bIns="0" rtlCol="0" anchor="ctr"/>
           <a:lstStyle/>
           <a:p>
-            <a:pPr marL="0" indent="0">
+            <a:pPr indent="0" marL="0">
               <a:buNone/>
             </a:pPr>
             <a:r>
@@ -3619,13 +3850,6 @@
             <a:prstDash val="solid"/>
           </a:ln>
         </p:spPr>
-        <p:txBody>
-          <a:bodyPr/>
-          <a:lstStyle/>
-          <a:p>
-            <a:endParaRPr lang="en-US"/>
-          </a:p>
-        </p:txBody>
       </p:sp>
       <p:sp>
         <p:nvSpPr>
@@ -3648,7 +3872,7 @@
           <a:bodyPr wrap="square" lIns="0" tIns="0" rIns="0" bIns="0" rtlCol="0" anchor="ctr"/>
           <a:lstStyle/>
           <a:p>
-            <a:pPr marL="0" indent="0" algn="ctr">
+            <a:pPr algn="ctr" indent="0" marL="0">
               <a:buNone/>
             </a:pPr>
             <a:r>
@@ -3687,7 +3911,7 @@
           <a:bodyPr wrap="square" lIns="0" tIns="0" rIns="0" bIns="0" rtlCol="0" anchor="ctr"/>
           <a:lstStyle/>
           <a:p>
-            <a:pPr marL="0" indent="0">
+            <a:pPr indent="0" marL="0">
               <a:buNone/>
             </a:pPr>
             <a:r>
@@ -3729,13 +3953,6 @@
             <a:prstDash val="solid"/>
           </a:ln>
         </p:spPr>
-        <p:txBody>
-          <a:bodyPr/>
-          <a:lstStyle/>
-          <a:p>
-            <a:endParaRPr lang="en-US"/>
-          </a:p>
-        </p:txBody>
       </p:sp>
       <p:sp>
         <p:nvSpPr>
@@ -3758,7 +3975,7 @@
           <a:bodyPr wrap="square" lIns="0" tIns="0" rIns="0" bIns="0" rtlCol="0" anchor="ctr"/>
           <a:lstStyle/>
           <a:p>
-            <a:pPr marL="0" indent="0" algn="ctr">
+            <a:pPr algn="ctr" indent="0" marL="0">
               <a:buNone/>
             </a:pPr>
             <a:r>
@@ -3797,7 +4014,7 @@
           <a:bodyPr wrap="square" lIns="0" tIns="0" rIns="0" bIns="0" rtlCol="0" anchor="ctr"/>
           <a:lstStyle/>
           <a:p>
-            <a:pPr marL="0" indent="0">
+            <a:pPr indent="0" marL="0">
               <a:buNone/>
             </a:pPr>
             <a:r>
@@ -3836,7 +4053,7 @@
           <a:bodyPr wrap="square" lIns="0" tIns="0" rIns="0" bIns="0" rtlCol="0" anchor="ctr"/>
           <a:lstStyle/>
           <a:p>
-            <a:pPr marL="0" indent="0" algn="l">
+            <a:pPr algn="l" indent="0" marL="0">
               <a:buNone/>
             </a:pPr>
             <a:r>
@@ -3875,7 +4092,7 @@
           <a:bodyPr wrap="square" lIns="0" tIns="0" rIns="0" bIns="0" rtlCol="0" anchor="ctr"/>
           <a:lstStyle/>
           <a:p>
-            <a:pPr marL="0" indent="0" algn="r">
+            <a:pPr algn="r" indent="0" marL="0">
               <a:buNone/>
             </a:pPr>
             <a:r>
@@ -3909,7 +4126,6 @@
         <a:solidFill>
           <a:srgbClr val="FFFFFF"/>
         </a:solidFill>
-        <a:effectLst/>
       </p:bgPr>
     </p:bg>
     <p:spTree>
@@ -3947,11 +4163,11 @@
           <a:bodyPr wrap="square" lIns="0" tIns="0" rIns="0" bIns="0" rtlCol="0" anchor="ctr"/>
           <a:lstStyle/>
           <a:p>
-            <a:pPr marL="0" indent="0">
-              <a:buNone/>
-            </a:pPr>
-            <a:r>
-              <a:rPr lang="en-US" sz="1100" b="1" kern="0" spc="400" dirty="0">
+            <a:pPr indent="0" marL="0">
+              <a:buNone/>
+            </a:pPr>
+            <a:r>
+              <a:rPr lang="en-US" sz="1100" b="1" spc="400" kern="0" dirty="0">
                 <a:solidFill>
                   <a:srgbClr val="1C7293"/>
                 </a:solidFill>
@@ -3986,7 +4202,7 @@
           <a:bodyPr wrap="square" lIns="0" tIns="0" rIns="0" bIns="0" rtlCol="0" anchor="ctr"/>
           <a:lstStyle/>
           <a:p>
-            <a:pPr marL="0" indent="0">
+            <a:pPr indent="0" marL="0">
               <a:buNone/>
             </a:pPr>
             <a:r>
@@ -4006,15 +4222,15 @@
       </p:sp>
       <p:pic>
         <p:nvPicPr>
-          <p:cNvPr id="4" name="Image 0" descr="/sessions/intelligent-practical-clarke/mnt/Einsatz von Geodaten in Marketing/reports/figures/score_map.png"/>
+          <p:cNvPr id="4" name="Image 0" descr="/sessions/intelligent-practical-clarke/mnt/Einsatz von Geodaten in Marketing/reports/figures/score_map.png">    </p:cNvPr>
           <p:cNvPicPr>
             <a:picLocks noChangeAspect="1"/>
           </p:cNvPicPr>
           <p:nvPr/>
         </p:nvPicPr>
         <p:blipFill>
-          <a:blip r:embed="rId3"/>
-          <a:srcRect/>
+          <a:blip r:embed="rId1"/>
+          <a:srcRect l="0" r="0" t="0" b="0"/>
           <a:stretch/>
         </p:blipFill>
         <p:spPr>
@@ -4051,20 +4267,13 @@
             <a:prstDash val="solid"/>
           </a:ln>
           <a:effectLst>
-            <a:outerShdw blurRad="101600" dist="12700" dir="5400000" algn="bl" rotWithShape="0">
+            <a:outerShdw sx="100000" sy="100000" kx="0" ky="0" algn="bl" rotWithShape="0" blurRad="101600" dist="12700" dir="5400000">
               <a:srgbClr val="94A3B8">
                 <a:alpha val="12000"/>
               </a:srgbClr>
             </a:outerShdw>
           </a:effectLst>
         </p:spPr>
-        <p:txBody>
-          <a:bodyPr/>
-          <a:lstStyle/>
-          <a:p>
-            <a:endParaRPr lang="en-US"/>
-          </a:p>
-        </p:txBody>
       </p:sp>
       <p:sp>
         <p:nvSpPr>
@@ -4090,13 +4299,6 @@
             <a:prstDash val="solid"/>
           </a:ln>
         </p:spPr>
-        <p:txBody>
-          <a:bodyPr/>
-          <a:lstStyle/>
-          <a:p>
-            <a:endParaRPr lang="en-US"/>
-          </a:p>
-        </p:txBody>
       </p:sp>
       <p:sp>
         <p:nvSpPr>
@@ -4119,7 +4321,7 @@
           <a:bodyPr wrap="square" lIns="0" tIns="0" rIns="0" bIns="0" rtlCol="0" anchor="ctr"/>
           <a:lstStyle/>
           <a:p>
-            <a:pPr marL="0" indent="0">
+            <a:pPr indent="0" marL="0">
               <a:buNone/>
             </a:pPr>
             <a:r>
@@ -4158,7 +4360,7 @@
           <a:bodyPr wrap="square" lIns="0" tIns="0" rIns="0" bIns="0" rtlCol="0" anchor="ctr"/>
           <a:lstStyle/>
           <a:p>
-            <a:pPr marL="0" indent="0">
+            <a:pPr indent="0" marL="0">
               <a:buNone/>
             </a:pPr>
             <a:r>
@@ -4175,7 +4377,7 @@
             <a:endParaRPr lang="en-US" sz="1050" dirty="0"/>
           </a:p>
           <a:p>
-            <a:pPr marL="0" indent="0">
+            <a:pPr indent="0" marL="0">
               <a:buNone/>
             </a:pPr>
             <a:r>
@@ -4192,7 +4394,7 @@
             <a:endParaRPr lang="en-US" sz="1050" dirty="0"/>
           </a:p>
           <a:p>
-            <a:pPr marL="0" indent="0">
+            <a:pPr indent="0" marL="0">
               <a:buNone/>
             </a:pPr>
             <a:r>
@@ -4209,7 +4411,7 @@
             <a:endParaRPr lang="en-US" sz="1050" dirty="0"/>
           </a:p>
           <a:p>
-            <a:pPr marL="0" indent="0">
+            <a:pPr indent="0" marL="0">
               <a:buNone/>
             </a:pPr>
             <a:r>
@@ -4226,7 +4428,7 @@
             <a:endParaRPr lang="en-US" sz="1050" dirty="0"/>
           </a:p>
           <a:p>
-            <a:pPr marL="0" indent="0">
+            <a:pPr indent="0" marL="0">
               <a:buNone/>
             </a:pPr>
             <a:r>
@@ -4243,7 +4445,7 @@
             <a:endParaRPr lang="en-US" sz="1050" dirty="0"/>
           </a:p>
           <a:p>
-            <a:pPr marL="0" indent="0">
+            <a:pPr indent="0" marL="0">
               <a:buNone/>
             </a:pPr>
             <a:r>
@@ -4260,7 +4462,7 @@
             <a:endParaRPr lang="en-US" sz="1050" dirty="0"/>
           </a:p>
           <a:p>
-            <a:pPr marL="0" indent="0">
+            <a:pPr indent="0" marL="0">
               <a:buNone/>
             </a:pPr>
             <a:r>
@@ -4277,7 +4479,7 @@
             <a:endParaRPr lang="en-US" sz="1050" dirty="0"/>
           </a:p>
           <a:p>
-            <a:pPr marL="0" indent="0">
+            <a:pPr indent="0" marL="0">
               <a:buNone/>
             </a:pPr>
             <a:r>
@@ -4316,7 +4518,7 @@
           <a:bodyPr wrap="square" lIns="0" tIns="0" rIns="0" bIns="0" rtlCol="0" anchor="ctr"/>
           <a:lstStyle/>
           <a:p>
-            <a:pPr marL="0" indent="0" algn="l">
+            <a:pPr algn="l" indent="0" marL="0">
               <a:buNone/>
             </a:pPr>
             <a:r>
@@ -4355,7 +4557,7 @@
           <a:bodyPr wrap="square" lIns="0" tIns="0" rIns="0" bIns="0" rtlCol="0" anchor="ctr"/>
           <a:lstStyle/>
           <a:p>
-            <a:pPr marL="0" indent="0" algn="r">
+            <a:pPr algn="r" indent="0" marL="0">
               <a:buNone/>
             </a:pPr>
             <a:r>
@@ -4389,7 +4591,6 @@
         <a:solidFill>
           <a:srgbClr val="FFFFFF"/>
         </a:solidFill>
-        <a:effectLst/>
       </p:bgPr>
     </p:bg>
     <p:spTree>
@@ -4427,11 +4628,11 @@
           <a:bodyPr wrap="square" lIns="0" tIns="0" rIns="0" bIns="0" rtlCol="0" anchor="ctr"/>
           <a:lstStyle/>
           <a:p>
-            <a:pPr marL="0" indent="0">
-              <a:buNone/>
-            </a:pPr>
-            <a:r>
-              <a:rPr lang="en-US" sz="1100" b="1" kern="0" spc="400" dirty="0">
+            <a:pPr indent="0" marL="0">
+              <a:buNone/>
+            </a:pPr>
+            <a:r>
+              <a:rPr lang="en-US" sz="1100" b="1" spc="400" kern="0" dirty="0">
                 <a:solidFill>
                   <a:srgbClr val="1C7293"/>
                 </a:solidFill>
@@ -4466,7 +4667,7 @@
           <a:bodyPr wrap="square" lIns="0" tIns="0" rIns="0" bIns="0" rtlCol="0" anchor="ctr"/>
           <a:lstStyle/>
           <a:p>
-            <a:pPr marL="0" indent="0">
+            <a:pPr indent="0" marL="0">
               <a:buNone/>
             </a:pPr>
             <a:r>
@@ -4486,15 +4687,15 @@
       </p:sp>
       <p:pic>
         <p:nvPicPr>
-          <p:cNvPr id="4" name="Image 0" descr="/sessions/intelligent-practical-clarke/mnt/Einsatz von Geodaten in Marketing/reports/figures/qgis_3d_score.png"/>
+          <p:cNvPr id="4" name="Image 0" descr="/sessions/intelligent-practical-clarke/mnt/Einsatz von Geodaten in Marketing/reports/figures/qgis_3d_score.png">    </p:cNvPr>
           <p:cNvPicPr>
             <a:picLocks noChangeAspect="1"/>
           </p:cNvPicPr>
           <p:nvPr/>
         </p:nvPicPr>
         <p:blipFill>
-          <a:blip r:embed="rId3"/>
-          <a:srcRect/>
+          <a:blip r:embed="rId1"/>
+          <a:srcRect l="0" r="0" t="0" b="0"/>
           <a:stretch/>
         </p:blipFill>
         <p:spPr>
@@ -4531,20 +4732,13 @@
             <a:prstDash val="solid"/>
           </a:ln>
           <a:effectLst>
-            <a:outerShdw blurRad="101600" dist="12700" dir="5400000" algn="bl" rotWithShape="0">
+            <a:outerShdw sx="100000" sy="100000" kx="0" ky="0" algn="bl" rotWithShape="0" blurRad="101600" dist="12700" dir="5400000">
               <a:srgbClr val="94A3B8">
                 <a:alpha val="12000"/>
               </a:srgbClr>
             </a:outerShdw>
           </a:effectLst>
         </p:spPr>
-        <p:txBody>
-          <a:bodyPr/>
-          <a:lstStyle/>
-          <a:p>
-            <a:endParaRPr lang="en-US"/>
-          </a:p>
-        </p:txBody>
       </p:sp>
       <p:sp>
         <p:nvSpPr>
@@ -4570,13 +4764,6 @@
             <a:prstDash val="solid"/>
           </a:ln>
         </p:spPr>
-        <p:txBody>
-          <a:bodyPr/>
-          <a:lstStyle/>
-          <a:p>
-            <a:endParaRPr lang="en-US"/>
-          </a:p>
-        </p:txBody>
       </p:sp>
       <p:sp>
         <p:nvSpPr>
@@ -4599,7 +4786,7 @@
           <a:bodyPr wrap="square" lIns="0" tIns="0" rIns="0" bIns="0" rtlCol="0" anchor="ctr"/>
           <a:lstStyle/>
           <a:p>
-            <a:pPr marL="0" indent="0">
+            <a:pPr indent="0" marL="0">
               <a:buNone/>
             </a:pPr>
             <a:r>
@@ -4638,7 +4825,7 @@
           <a:bodyPr wrap="square" lIns="0" tIns="0" rIns="0" bIns="0" rtlCol="0" anchor="ctr"/>
           <a:lstStyle/>
           <a:p>
-            <a:pPr marL="0" indent="0">
+            <a:pPr indent="0" marL="0">
               <a:buNone/>
             </a:pPr>
             <a:r>
@@ -4655,7 +4842,7 @@
             <a:endParaRPr lang="en-US" sz="1050" dirty="0"/>
           </a:p>
           <a:p>
-            <a:pPr marL="0" indent="0">
+            <a:pPr indent="0" marL="0">
               <a:buNone/>
             </a:pPr>
             <a:r>
@@ -4672,7 +4859,7 @@
             <a:endParaRPr lang="en-US" sz="1050" dirty="0"/>
           </a:p>
           <a:p>
-            <a:pPr marL="0" indent="0">
+            <a:pPr indent="0" marL="0">
               <a:buNone/>
             </a:pPr>
             <a:r>
@@ -4689,7 +4876,7 @@
             <a:endParaRPr lang="en-US" sz="1050" dirty="0"/>
           </a:p>
           <a:p>
-            <a:pPr marL="0" indent="0">
+            <a:pPr indent="0" marL="0">
               <a:buNone/>
             </a:pPr>
             <a:r>
@@ -4706,7 +4893,7 @@
             <a:endParaRPr lang="en-US" sz="1050" dirty="0"/>
           </a:p>
           <a:p>
-            <a:pPr marL="0" indent="0">
+            <a:pPr indent="0" marL="0">
               <a:buNone/>
             </a:pPr>
             <a:r>
@@ -4723,7 +4910,7 @@
             <a:endParaRPr lang="en-US" sz="1050" dirty="0"/>
           </a:p>
           <a:p>
-            <a:pPr marL="0" indent="0">
+            <a:pPr indent="0" marL="0">
               <a:buNone/>
             </a:pPr>
             <a:r>
@@ -4740,7 +4927,7 @@
             <a:endParaRPr lang="en-US" sz="1050" dirty="0"/>
           </a:p>
           <a:p>
-            <a:pPr marL="0" indent="0">
+            <a:pPr indent="0" marL="0">
               <a:buNone/>
             </a:pPr>
             <a:r>
@@ -4757,7 +4944,7 @@
             <a:endParaRPr lang="en-US" sz="1050" dirty="0"/>
           </a:p>
           <a:p>
-            <a:pPr marL="0" indent="0">
+            <a:pPr indent="0" marL="0">
               <a:buNone/>
             </a:pPr>
             <a:r>
@@ -4796,7 +4983,7 @@
           <a:bodyPr wrap="square" lIns="0" tIns="0" rIns="0" bIns="0" rtlCol="0" anchor="ctr"/>
           <a:lstStyle/>
           <a:p>
-            <a:pPr marL="0" indent="0" algn="l">
+            <a:pPr algn="l" indent="0" marL="0">
               <a:buNone/>
             </a:pPr>
             <a:r>
@@ -4835,7 +5022,7 @@
           <a:bodyPr wrap="square" lIns="0" tIns="0" rIns="0" bIns="0" rtlCol="0" anchor="ctr"/>
           <a:lstStyle/>
           <a:p>
-            <a:pPr marL="0" indent="0" algn="r">
+            <a:pPr algn="r" indent="0" marL="0">
               <a:buNone/>
             </a:pPr>
             <a:r>
@@ -4869,7 +5056,6 @@
         <a:solidFill>
           <a:srgbClr val="FFFFFF"/>
         </a:solidFill>
-        <a:effectLst/>
       </p:bgPr>
     </p:bg>
     <p:spTree>
@@ -4907,11 +5093,11 @@
           <a:bodyPr wrap="square" lIns="0" tIns="0" rIns="0" bIns="0" rtlCol="0" anchor="ctr"/>
           <a:lstStyle/>
           <a:p>
-            <a:pPr marL="0" indent="0">
-              <a:buNone/>
-            </a:pPr>
-            <a:r>
-              <a:rPr lang="en-US" sz="1100" b="1" kern="0" spc="400" dirty="0">
+            <a:pPr indent="0" marL="0">
+              <a:buNone/>
+            </a:pPr>
+            <a:r>
+              <a:rPr lang="en-US" sz="1100" b="1" spc="400" kern="0" dirty="0">
                 <a:solidFill>
                   <a:srgbClr val="1C7293"/>
                 </a:solidFill>
@@ -4946,7 +5132,7 @@
           <a:bodyPr wrap="square" lIns="0" tIns="0" rIns="0" bIns="0" rtlCol="0" anchor="ctr"/>
           <a:lstStyle/>
           <a:p>
-            <a:pPr marL="0" indent="0">
+            <a:pPr indent="0" marL="0">
               <a:buNone/>
             </a:pPr>
             <a:r>
@@ -4966,15 +5152,15 @@
       </p:sp>
       <p:pic>
         <p:nvPicPr>
-          <p:cNvPr id="4" name="Image 0" descr="/sessions/intelligent-practical-clarke/mnt/Einsatz von Geodaten in Marketing/reports/figures/score_flat_vs_topo.png"/>
+          <p:cNvPr id="4" name="Image 0" descr="/sessions/intelligent-practical-clarke/mnt/Einsatz von Geodaten in Marketing/reports/figures/score_flat_vs_topo.png">    </p:cNvPr>
           <p:cNvPicPr>
             <a:picLocks noChangeAspect="1"/>
           </p:cNvPicPr>
           <p:nvPr/>
         </p:nvPicPr>
         <p:blipFill>
-          <a:blip r:embed="rId3"/>
-          <a:srcRect/>
+          <a:blip r:embed="rId1"/>
+          <a:srcRect l="0" r="0" t="0" b="0"/>
           <a:stretch/>
         </p:blipFill>
         <p:spPr>
@@ -5011,20 +5197,13 @@
             <a:prstDash val="solid"/>
           </a:ln>
           <a:effectLst>
-            <a:outerShdw blurRad="101600" dist="12700" dir="5400000" algn="bl" rotWithShape="0">
+            <a:outerShdw sx="100000" sy="100000" kx="0" ky="0" algn="bl" rotWithShape="0" blurRad="101600" dist="12700" dir="5400000">
               <a:srgbClr val="94A3B8">
                 <a:alpha val="12000"/>
               </a:srgbClr>
             </a:outerShdw>
           </a:effectLst>
         </p:spPr>
-        <p:txBody>
-          <a:bodyPr/>
-          <a:lstStyle/>
-          <a:p>
-            <a:endParaRPr lang="en-US"/>
-          </a:p>
-        </p:txBody>
       </p:sp>
       <p:sp>
         <p:nvSpPr>
@@ -5050,13 +5229,6 @@
             <a:prstDash val="solid"/>
           </a:ln>
         </p:spPr>
-        <p:txBody>
-          <a:bodyPr/>
-          <a:lstStyle/>
-          <a:p>
-            <a:endParaRPr lang="en-US"/>
-          </a:p>
-        </p:txBody>
       </p:sp>
       <p:sp>
         <p:nvSpPr>
@@ -5079,7 +5251,7 @@
           <a:bodyPr wrap="square" lIns="0" tIns="0" rIns="0" bIns="0" rtlCol="0" anchor="ctr"/>
           <a:lstStyle/>
           <a:p>
-            <a:pPr marL="0" indent="0">
+            <a:pPr indent="0" marL="0">
               <a:buNone/>
             </a:pPr>
             <a:r>
@@ -5118,7 +5290,7 @@
           <a:bodyPr wrap="square" lIns="0" tIns="0" rIns="0" bIns="0" rtlCol="0" anchor="ctr"/>
           <a:lstStyle/>
           <a:p>
-            <a:pPr marL="0" indent="0">
+            <a:pPr indent="0" marL="0">
               <a:buNone/>
             </a:pPr>
             <a:r>
@@ -5132,6 +5304,9 @@
               </a:rPr>
               <a:t>Oberstrass   </a:t>
             </a:r>
+            <a:pPr indent="0" marL="0">
+              <a:buNone/>
+            </a:pPr>
             <a:r>
               <a:rPr lang="en-US" sz="950" b="1" dirty="0">
                 <a:solidFill>
@@ -5146,7 +5321,7 @@
             <a:endParaRPr lang="en-US" sz="950" dirty="0"/>
           </a:p>
           <a:p>
-            <a:pPr marL="0" indent="0">
+            <a:pPr indent="0" marL="0">
               <a:buNone/>
             </a:pPr>
             <a:r>
@@ -5160,6 +5335,9 @@
               </a:rPr>
               <a:t>Fluntern     </a:t>
             </a:r>
+            <a:pPr indent="0" marL="0">
+              <a:buNone/>
+            </a:pPr>
             <a:r>
               <a:rPr lang="en-US" sz="950" b="1" dirty="0">
                 <a:solidFill>
@@ -5174,7 +5352,7 @@
             <a:endParaRPr lang="en-US" sz="950" dirty="0"/>
           </a:p>
           <a:p>
-            <a:pPr marL="0" indent="0">
+            <a:pPr indent="0" marL="0">
               <a:buNone/>
             </a:pPr>
             <a:r>
@@ -5188,6 +5366,9 @@
               </a:rPr>
               <a:t>Gewerbeschule </a:t>
             </a:r>
+            <a:pPr indent="0" marL="0">
+              <a:buNone/>
+            </a:pPr>
             <a:r>
               <a:rPr lang="en-US" sz="950" b="1" dirty="0">
                 <a:solidFill>
@@ -5202,7 +5383,7 @@
             <a:endParaRPr lang="en-US" sz="950" dirty="0"/>
           </a:p>
           <a:p>
-            <a:pPr marL="0" indent="0">
+            <a:pPr indent="0" marL="0">
               <a:buNone/>
             </a:pPr>
             <a:r>
@@ -5216,6 +5397,9 @@
               </a:rPr>
               <a:t>Alt-Wiedikon </a:t>
             </a:r>
+            <a:pPr indent="0" marL="0">
+              <a:buNone/>
+            </a:pPr>
             <a:r>
               <a:rPr lang="en-US" sz="950" b="1" dirty="0">
                 <a:solidFill>
@@ -5230,7 +5414,7 @@
             <a:endParaRPr lang="en-US" sz="950" dirty="0"/>
           </a:p>
           <a:p>
-            <a:pPr marL="0" indent="0">
+            <a:pPr indent="0" marL="0">
               <a:buNone/>
             </a:pPr>
             <a:r>
@@ -5244,6 +5428,9 @@
               </a:rPr>
               <a:t>Wipkingen    </a:t>
             </a:r>
+            <a:pPr indent="0" marL="0">
+              <a:buNone/>
+            </a:pPr>
             <a:r>
               <a:rPr lang="en-US" sz="950" b="1" dirty="0">
                 <a:solidFill>
@@ -5280,7 +5467,7 @@
           <a:bodyPr wrap="square" lIns="0" tIns="0" rIns="0" bIns="0" rtlCol="0" anchor="ctr"/>
           <a:lstStyle/>
           <a:p>
-            <a:pPr marL="0" indent="0">
+            <a:pPr indent="0" marL="0">
               <a:buNone/>
             </a:pPr>
             <a:r>
@@ -5319,7 +5506,7 @@
           <a:bodyPr wrap="square" lIns="0" tIns="0" rIns="0" bIns="0" rtlCol="0" anchor="ctr"/>
           <a:lstStyle/>
           <a:p>
-            <a:pPr marL="0" indent="0">
+            <a:pPr indent="0" marL="0">
               <a:buNone/>
             </a:pPr>
             <a:r>
@@ -5333,6 +5520,9 @@
               </a:rPr>
               <a:t>Mühlebach    </a:t>
             </a:r>
+            <a:pPr indent="0" marL="0">
+              <a:buNone/>
+            </a:pPr>
             <a:r>
               <a:rPr lang="en-US" sz="950" b="1" dirty="0">
                 <a:solidFill>
@@ -5347,7 +5537,7 @@
             <a:endParaRPr lang="en-US" sz="950" dirty="0"/>
           </a:p>
           <a:p>
-            <a:pPr marL="0" indent="0">
+            <a:pPr indent="0" marL="0">
               <a:buNone/>
             </a:pPr>
             <a:r>
@@ -5361,6 +5551,9 @@
               </a:rPr>
               <a:t>Seefeld      </a:t>
             </a:r>
+            <a:pPr indent="0" marL="0">
+              <a:buNone/>
+            </a:pPr>
             <a:r>
               <a:rPr lang="en-US" sz="950" b="1" dirty="0">
                 <a:solidFill>
@@ -5375,7 +5568,7 @@
             <a:endParaRPr lang="en-US" sz="950" dirty="0"/>
           </a:p>
           <a:p>
-            <a:pPr marL="0" indent="0">
+            <a:pPr indent="0" marL="0">
               <a:buNone/>
             </a:pPr>
             <a:r>
@@ -5389,6 +5582,9 @@
               </a:rPr>
               <a:t>Oerlikon     </a:t>
             </a:r>
+            <a:pPr indent="0" marL="0">
+              <a:buNone/>
+            </a:pPr>
             <a:r>
               <a:rPr lang="en-US" sz="950" b="1" dirty="0">
                 <a:solidFill>
@@ -5403,7 +5599,7 @@
             <a:endParaRPr lang="en-US" sz="950" dirty="0"/>
           </a:p>
           <a:p>
-            <a:pPr marL="0" indent="0">
+            <a:pPr indent="0" marL="0">
               <a:buNone/>
             </a:pPr>
             <a:r>
@@ -5417,6 +5613,9 @@
               </a:rPr>
               <a:t>Werd         </a:t>
             </a:r>
+            <a:pPr indent="0" marL="0">
+              <a:buNone/>
+            </a:pPr>
             <a:r>
               <a:rPr lang="en-US" sz="950" b="1" dirty="0">
                 <a:solidFill>
@@ -5431,7 +5630,7 @@
             <a:endParaRPr lang="en-US" sz="950" dirty="0"/>
           </a:p>
           <a:p>
-            <a:pPr marL="0" indent="0">
+            <a:pPr indent="0" marL="0">
               <a:buNone/>
             </a:pPr>
             <a:r>
@@ -5445,6 +5644,9 @@
               </a:rPr>
               <a:t>Sihlfeld     </a:t>
             </a:r>
+            <a:pPr indent="0" marL="0">
+              <a:buNone/>
+            </a:pPr>
             <a:r>
               <a:rPr lang="en-US" sz="950" b="1" dirty="0">
                 <a:solidFill>
@@ -5484,20 +5686,13 @@
             <a:prstDash val="solid"/>
           </a:ln>
           <a:effectLst>
-            <a:outerShdw blurRad="101600" dist="12700" dir="5400000" algn="bl" rotWithShape="0">
+            <a:outerShdw sx="100000" sy="100000" kx="0" ky="0" algn="bl" rotWithShape="0" blurRad="101600" dist="12700" dir="5400000">
               <a:srgbClr val="94A3B8">
                 <a:alpha val="12000"/>
               </a:srgbClr>
             </a:outerShdw>
           </a:effectLst>
         </p:spPr>
-        <p:txBody>
-          <a:bodyPr/>
-          <a:lstStyle/>
-          <a:p>
-            <a:endParaRPr lang="en-US"/>
-          </a:p>
-        </p:txBody>
       </p:sp>
       <p:sp>
         <p:nvSpPr>
@@ -5523,13 +5718,6 @@
             <a:prstDash val="solid"/>
           </a:ln>
         </p:spPr>
-        <p:txBody>
-          <a:bodyPr/>
-          <a:lstStyle/>
-          <a:p>
-            <a:endParaRPr lang="en-US"/>
-          </a:p>
-        </p:txBody>
       </p:sp>
       <p:sp>
         <p:nvSpPr>
@@ -5552,7 +5740,7 @@
           <a:bodyPr wrap="square" lIns="0" tIns="0" rIns="0" bIns="0" rtlCol="0" anchor="ctr"/>
           <a:lstStyle/>
           <a:p>
-            <a:pPr marL="0" indent="0">
+            <a:pPr indent="0" marL="0">
               <a:buNone/>
             </a:pPr>
             <a:r>
@@ -5591,7 +5779,7 @@
           <a:bodyPr wrap="square" lIns="0" tIns="0" rIns="0" bIns="0" rtlCol="0" anchor="ctr"/>
           <a:lstStyle/>
           <a:p>
-            <a:pPr marL="0" indent="0">
+            <a:pPr indent="0" marL="0">
               <a:buNone/>
             </a:pPr>
             <a:r>
@@ -5608,7 +5796,7 @@
             <a:endParaRPr lang="en-US" sz="1000" dirty="0"/>
           </a:p>
           <a:p>
-            <a:pPr marL="0" indent="0">
+            <a:pPr indent="0" marL="0">
               <a:buNone/>
             </a:pPr>
             <a:r>
@@ -5625,7 +5813,7 @@
             <a:endParaRPr lang="en-US" sz="1000" dirty="0"/>
           </a:p>
           <a:p>
-            <a:pPr marL="0" indent="0">
+            <a:pPr indent="0" marL="0">
               <a:buNone/>
             </a:pPr>
             <a:r>
@@ -5642,7 +5830,7 @@
             <a:endParaRPr lang="en-US" sz="1000" dirty="0"/>
           </a:p>
           <a:p>
-            <a:pPr marL="0" indent="0">
+            <a:pPr indent="0" marL="0">
               <a:buNone/>
             </a:pPr>
             <a:r>
@@ -5659,7 +5847,7 @@
             <a:endParaRPr lang="en-US" sz="1000" dirty="0"/>
           </a:p>
           <a:p>
-            <a:pPr marL="0" indent="0">
+            <a:pPr indent="0" marL="0">
               <a:buNone/>
             </a:pPr>
             <a:r>
@@ -5676,7 +5864,7 @@
             <a:endParaRPr lang="en-US" sz="1000" dirty="0"/>
           </a:p>
           <a:p>
-            <a:pPr marL="0" indent="0">
+            <a:pPr indent="0" marL="0">
               <a:buNone/>
             </a:pPr>
             <a:r>
@@ -5693,7 +5881,7 @@
             <a:endParaRPr lang="en-US" sz="1000" dirty="0"/>
           </a:p>
           <a:p>
-            <a:pPr marL="0" indent="0">
+            <a:pPr indent="0" marL="0">
               <a:buNone/>
             </a:pPr>
             <a:r>
@@ -5710,7 +5898,7 @@
             <a:endParaRPr lang="en-US" sz="1000" dirty="0"/>
           </a:p>
           <a:p>
-            <a:pPr marL="0" indent="0">
+            <a:pPr indent="0" marL="0">
               <a:buNone/>
             </a:pPr>
             <a:r>
@@ -5727,7 +5915,7 @@
             <a:endParaRPr lang="en-US" sz="1000" dirty="0"/>
           </a:p>
           <a:p>
-            <a:pPr marL="0" indent="0">
+            <a:pPr indent="0" marL="0">
               <a:buNone/>
             </a:pPr>
             <a:r>
@@ -5766,7 +5954,7 @@
           <a:bodyPr wrap="square" lIns="0" tIns="0" rIns="0" bIns="0" rtlCol="0" anchor="ctr"/>
           <a:lstStyle/>
           <a:p>
-            <a:pPr marL="0" indent="0" algn="l">
+            <a:pPr algn="l" indent="0" marL="0">
               <a:buNone/>
             </a:pPr>
             <a:r>
@@ -5805,7 +5993,7 @@
           <a:bodyPr wrap="square" lIns="0" tIns="0" rIns="0" bIns="0" rtlCol="0" anchor="ctr"/>
           <a:lstStyle/>
           <a:p>
-            <a:pPr marL="0" indent="0" algn="r">
+            <a:pPr algn="r" indent="0" marL="0">
               <a:buNone/>
             </a:pPr>
             <a:r>
@@ -5839,7 +6027,6 @@
         <a:solidFill>
           <a:srgbClr val="FFFFFF"/>
         </a:solidFill>
-        <a:effectLst/>
       </p:bgPr>
     </p:bg>
     <p:spTree>
@@ -5877,11 +6064,11 @@
           <a:bodyPr wrap="square" lIns="0" tIns="0" rIns="0" bIns="0" rtlCol="0" anchor="ctr"/>
           <a:lstStyle/>
           <a:p>
-            <a:pPr marL="0" indent="0">
-              <a:buNone/>
-            </a:pPr>
-            <a:r>
-              <a:rPr lang="en-US" sz="1100" b="1" kern="0" spc="400" dirty="0">
+            <a:pPr indent="0" marL="0">
+              <a:buNone/>
+            </a:pPr>
+            <a:r>
+              <a:rPr lang="en-US" sz="1100" b="1" spc="400" kern="0" dirty="0">
                 <a:solidFill>
                   <a:srgbClr val="1C7293"/>
                 </a:solidFill>
@@ -5916,7 +6103,7 @@
           <a:bodyPr wrap="square" lIns="0" tIns="0" rIns="0" bIns="0" rtlCol="0" anchor="ctr"/>
           <a:lstStyle/>
           <a:p>
-            <a:pPr marL="0" indent="0">
+            <a:pPr indent="0" marL="0">
               <a:buNone/>
             </a:pPr>
             <a:r>
@@ -5958,20 +6145,13 @@
             <a:prstDash val="solid"/>
           </a:ln>
           <a:effectLst>
-            <a:outerShdw blurRad="101600" dist="12700" dir="5400000" algn="bl" rotWithShape="0">
+            <a:outerShdw sx="100000" sy="100000" kx="0" ky="0" algn="bl" rotWithShape="0" blurRad="101600" dist="12700" dir="5400000">
               <a:srgbClr val="94A3B8">
                 <a:alpha val="12000"/>
               </a:srgbClr>
             </a:outerShdw>
           </a:effectLst>
         </p:spPr>
-        <p:txBody>
-          <a:bodyPr/>
-          <a:lstStyle/>
-          <a:p>
-            <a:endParaRPr lang="en-US"/>
-          </a:p>
-        </p:txBody>
       </p:sp>
       <p:sp>
         <p:nvSpPr>
@@ -5997,13 +6177,6 @@
             <a:prstDash val="solid"/>
           </a:ln>
         </p:spPr>
-        <p:txBody>
-          <a:bodyPr/>
-          <a:lstStyle/>
-          <a:p>
-            <a:endParaRPr lang="en-US"/>
-          </a:p>
-        </p:txBody>
       </p:sp>
       <p:sp>
         <p:nvSpPr>
@@ -6026,7 +6199,7 @@
           <a:bodyPr wrap="square" lIns="0" tIns="0" rIns="0" bIns="0" rtlCol="0" anchor="ctr"/>
           <a:lstStyle/>
           <a:p>
-            <a:pPr marL="0" indent="0">
+            <a:pPr indent="0" marL="0">
               <a:buNone/>
             </a:pPr>
             <a:r>
@@ -6065,7 +6238,7 @@
           <a:bodyPr wrap="square" lIns="0" tIns="0" rIns="0" bIns="0" rtlCol="0" anchor="b"/>
           <a:lstStyle/>
           <a:p>
-            <a:pPr marL="0" indent="0" algn="ctr">
+            <a:pPr algn="ctr" indent="0" marL="0">
               <a:buNone/>
             </a:pPr>
             <a:r>
@@ -6104,7 +6277,7 @@
           <a:bodyPr wrap="square" lIns="0" tIns="0" rIns="0" bIns="0" rtlCol="0" anchor="t"/>
           <a:lstStyle/>
           <a:p>
-            <a:pPr marL="0" indent="0" algn="ctr">
+            <a:pPr algn="ctr" indent="0" marL="0">
               <a:buNone/>
             </a:pPr>
             <a:r>
@@ -6143,7 +6316,7 @@
           <a:bodyPr wrap="square" lIns="0" tIns="0" rIns="0" bIns="0" rtlCol="0" anchor="ctr"/>
           <a:lstStyle/>
           <a:p>
-            <a:pPr marL="0" indent="0">
+            <a:pPr indent="0" marL="0">
               <a:buNone/>
             </a:pPr>
             <a:r>
@@ -6185,20 +6358,13 @@
             <a:prstDash val="solid"/>
           </a:ln>
           <a:effectLst>
-            <a:outerShdw blurRad="101600" dist="12700" dir="5400000" algn="bl" rotWithShape="0">
+            <a:outerShdw sx="100000" sy="100000" kx="0" ky="0" algn="bl" rotWithShape="0" blurRad="101600" dist="12700" dir="5400000">
               <a:srgbClr val="94A3B8">
                 <a:alpha val="12000"/>
               </a:srgbClr>
             </a:outerShdw>
           </a:effectLst>
         </p:spPr>
-        <p:txBody>
-          <a:bodyPr/>
-          <a:lstStyle/>
-          <a:p>
-            <a:endParaRPr lang="en-US"/>
-          </a:p>
-        </p:txBody>
       </p:sp>
       <p:sp>
         <p:nvSpPr>
@@ -6224,13 +6390,6 @@
             <a:prstDash val="solid"/>
           </a:ln>
         </p:spPr>
-        <p:txBody>
-          <a:bodyPr/>
-          <a:lstStyle/>
-          <a:p>
-            <a:endParaRPr lang="en-US"/>
-          </a:p>
-        </p:txBody>
       </p:sp>
       <p:sp>
         <p:nvSpPr>
@@ -6253,7 +6412,7 @@
           <a:bodyPr wrap="square" lIns="0" tIns="0" rIns="0" bIns="0" rtlCol="0" anchor="ctr"/>
           <a:lstStyle/>
           <a:p>
-            <a:pPr marL="0" indent="0">
+            <a:pPr indent="0" marL="0">
               <a:buNone/>
             </a:pPr>
             <a:r>
@@ -6292,7 +6451,7 @@
           <a:bodyPr wrap="square" lIns="0" tIns="0" rIns="0" bIns="0" rtlCol="0" anchor="b"/>
           <a:lstStyle/>
           <a:p>
-            <a:pPr marL="0" indent="0" algn="ctr">
+            <a:pPr algn="ctr" indent="0" marL="0">
               <a:buNone/>
             </a:pPr>
             <a:r>
@@ -6331,7 +6490,7 @@
           <a:bodyPr wrap="square" lIns="0" tIns="0" rIns="0" bIns="0" rtlCol="0" anchor="t"/>
           <a:lstStyle/>
           <a:p>
-            <a:pPr marL="0" indent="0" algn="ctr">
+            <a:pPr algn="ctr" indent="0" marL="0">
               <a:buNone/>
             </a:pPr>
             <a:r>
@@ -6370,7 +6529,7 @@
           <a:bodyPr wrap="square" lIns="0" tIns="0" rIns="0" bIns="0" rtlCol="0" anchor="ctr"/>
           <a:lstStyle/>
           <a:p>
-            <a:pPr marL="0" indent="0">
+            <a:pPr indent="0" marL="0">
               <a:buNone/>
             </a:pPr>
             <a:r>
@@ -6412,20 +6571,13 @@
             <a:prstDash val="solid"/>
           </a:ln>
           <a:effectLst>
-            <a:outerShdw blurRad="101600" dist="12700" dir="5400000" algn="bl" rotWithShape="0">
+            <a:outerShdw sx="100000" sy="100000" kx="0" ky="0" algn="bl" rotWithShape="0" blurRad="101600" dist="12700" dir="5400000">
               <a:srgbClr val="94A3B8">
                 <a:alpha val="12000"/>
               </a:srgbClr>
             </a:outerShdw>
           </a:effectLst>
         </p:spPr>
-        <p:txBody>
-          <a:bodyPr/>
-          <a:lstStyle/>
-          <a:p>
-            <a:endParaRPr lang="en-US"/>
-          </a:p>
-        </p:txBody>
       </p:sp>
       <p:sp>
         <p:nvSpPr>
@@ -6451,13 +6603,6 @@
             <a:prstDash val="solid"/>
           </a:ln>
         </p:spPr>
-        <p:txBody>
-          <a:bodyPr/>
-          <a:lstStyle/>
-          <a:p>
-            <a:endParaRPr lang="en-US"/>
-          </a:p>
-        </p:txBody>
       </p:sp>
       <p:sp>
         <p:nvSpPr>
@@ -6480,7 +6625,7 @@
           <a:bodyPr wrap="square" lIns="0" tIns="0" rIns="0" bIns="0" rtlCol="0" anchor="ctr"/>
           <a:lstStyle/>
           <a:p>
-            <a:pPr marL="0" indent="0">
+            <a:pPr indent="0" marL="0">
               <a:buNone/>
             </a:pPr>
             <a:r>
@@ -6519,7 +6664,7 @@
           <a:bodyPr wrap="square" lIns="0" tIns="0" rIns="0" bIns="0" rtlCol="0" anchor="b"/>
           <a:lstStyle/>
           <a:p>
-            <a:pPr marL="0" indent="0" algn="ctr">
+            <a:pPr algn="ctr" indent="0" marL="0">
               <a:buNone/>
             </a:pPr>
             <a:r>
@@ -6558,7 +6703,7 @@
           <a:bodyPr wrap="square" lIns="0" tIns="0" rIns="0" bIns="0" rtlCol="0" anchor="t"/>
           <a:lstStyle/>
           <a:p>
-            <a:pPr marL="0" indent="0" algn="ctr">
+            <a:pPr algn="ctr" indent="0" marL="0">
               <a:buNone/>
             </a:pPr>
             <a:r>
@@ -6597,7 +6742,7 @@
           <a:bodyPr wrap="square" lIns="0" tIns="0" rIns="0" bIns="0" rtlCol="0" anchor="ctr"/>
           <a:lstStyle/>
           <a:p>
-            <a:pPr marL="0" indent="0">
+            <a:pPr indent="0" marL="0">
               <a:buNone/>
             </a:pPr>
             <a:r>
@@ -6636,7 +6781,7 @@
           <a:bodyPr wrap="square" lIns="0" tIns="0" rIns="0" bIns="0" rtlCol="0" anchor="ctr"/>
           <a:lstStyle/>
           <a:p>
-            <a:pPr marL="0" indent="0" algn="l">
+            <a:pPr algn="l" indent="0" marL="0">
               <a:buNone/>
             </a:pPr>
             <a:r>
@@ -6675,7 +6820,7 @@
           <a:bodyPr wrap="square" lIns="0" tIns="0" rIns="0" bIns="0" rtlCol="0" anchor="ctr"/>
           <a:lstStyle/>
           <a:p>
-            <a:pPr marL="0" indent="0" algn="r">
+            <a:pPr algn="r" indent="0" marL="0">
               <a:buNone/>
             </a:pPr>
             <a:r>
@@ -6709,7 +6854,6 @@
         <a:solidFill>
           <a:srgbClr val="FFFFFF"/>
         </a:solidFill>
-        <a:effectLst/>
       </p:bgPr>
     </p:bg>
     <p:spTree>
@@ -6747,11 +6891,11 @@
           <a:bodyPr wrap="square" lIns="0" tIns="0" rIns="0" bIns="0" rtlCol="0" anchor="ctr"/>
           <a:lstStyle/>
           <a:p>
-            <a:pPr marL="0" indent="0">
-              <a:buNone/>
-            </a:pPr>
-            <a:r>
-              <a:rPr lang="en-US" sz="1100" b="1" kern="0" spc="400" dirty="0">
+            <a:pPr indent="0" marL="0">
+              <a:buNone/>
+            </a:pPr>
+            <a:r>
+              <a:rPr lang="en-US" sz="1100" b="1" spc="400" kern="0" dirty="0">
                 <a:solidFill>
                   <a:srgbClr val="1C7293"/>
                 </a:solidFill>
@@ -6786,7 +6930,7 @@
           <a:bodyPr wrap="square" lIns="0" tIns="0" rIns="0" bIns="0" rtlCol="0" anchor="ctr"/>
           <a:lstStyle/>
           <a:p>
-            <a:pPr marL="0" indent="0">
+            <a:pPr indent="0" marL="0">
               <a:buNone/>
             </a:pPr>
             <a:r>
@@ -6828,20 +6972,13 @@
             <a:prstDash val="solid"/>
           </a:ln>
           <a:effectLst>
-            <a:outerShdw blurRad="101600" dist="12700" dir="5400000" algn="bl" rotWithShape="0">
+            <a:outerShdw sx="100000" sy="100000" kx="0" ky="0" algn="bl" rotWithShape="0" blurRad="101600" dist="12700" dir="5400000">
               <a:srgbClr val="94A3B8">
                 <a:alpha val="12000"/>
               </a:srgbClr>
             </a:outerShdw>
           </a:effectLst>
         </p:spPr>
-        <p:txBody>
-          <a:bodyPr/>
-          <a:lstStyle/>
-          <a:p>
-            <a:endParaRPr lang="en-US"/>
-          </a:p>
-        </p:txBody>
       </p:sp>
       <p:sp>
         <p:nvSpPr>
@@ -6867,13 +7004,6 @@
             <a:prstDash val="solid"/>
           </a:ln>
         </p:spPr>
-        <p:txBody>
-          <a:bodyPr/>
-          <a:lstStyle/>
-          <a:p>
-            <a:endParaRPr lang="en-US"/>
-          </a:p>
-        </p:txBody>
       </p:sp>
       <p:sp>
         <p:nvSpPr>
@@ -6896,7 +7026,7 @@
           <a:bodyPr wrap="square" lIns="0" tIns="0" rIns="0" bIns="0" rtlCol="0" anchor="ctr"/>
           <a:lstStyle/>
           <a:p>
-            <a:pPr marL="0" indent="0">
+            <a:pPr indent="0" marL="0">
               <a:buNone/>
             </a:pPr>
             <a:r>
@@ -6935,7 +7065,7 @@
           <a:bodyPr wrap="square" lIns="0" tIns="0" rIns="0" bIns="0" rtlCol="0" anchor="ctr"/>
           <a:lstStyle/>
           <a:p>
-            <a:pPr marL="0" indent="0">
+            <a:pPr indent="0" marL="0">
               <a:buNone/>
             </a:pPr>
             <a:r>
@@ -6977,13 +7107,6 @@
             <a:prstDash val="solid"/>
           </a:ln>
         </p:spPr>
-        <p:txBody>
-          <a:bodyPr/>
-          <a:lstStyle/>
-          <a:p>
-            <a:endParaRPr lang="en-US"/>
-          </a:p>
-        </p:txBody>
       </p:sp>
       <p:sp>
         <p:nvSpPr>
@@ -7006,7 +7129,7 @@
           <a:bodyPr wrap="square" lIns="0" tIns="0" rIns="0" bIns="0" rtlCol="0" anchor="ctr"/>
           <a:lstStyle/>
           <a:p>
-            <a:pPr marL="0" indent="0">
+            <a:pPr indent="0" marL="0">
               <a:buNone/>
             </a:pPr>
             <a:r>
@@ -7045,7 +7168,7 @@
           <a:bodyPr wrap="square" lIns="0" tIns="0" rIns="0" bIns="0" rtlCol="0" anchor="ctr"/>
           <a:lstStyle/>
           <a:p>
-            <a:pPr marL="0" indent="0">
+            <a:pPr indent="0" marL="0">
               <a:buNone/>
             </a:pPr>
             <a:r>
@@ -7087,13 +7210,6 @@
             <a:prstDash val="solid"/>
           </a:ln>
         </p:spPr>
-        <p:txBody>
-          <a:bodyPr/>
-          <a:lstStyle/>
-          <a:p>
-            <a:endParaRPr lang="en-US"/>
-          </a:p>
-        </p:txBody>
       </p:sp>
       <p:sp>
         <p:nvSpPr>
@@ -7116,7 +7232,7 @@
           <a:bodyPr wrap="square" lIns="0" tIns="0" rIns="0" bIns="0" rtlCol="0" anchor="ctr"/>
           <a:lstStyle/>
           <a:p>
-            <a:pPr marL="0" indent="0">
+            <a:pPr indent="0" marL="0">
               <a:buNone/>
             </a:pPr>
             <a:r>
@@ -7155,7 +7271,7 @@
           <a:bodyPr wrap="square" lIns="0" tIns="0" rIns="0" bIns="0" rtlCol="0" anchor="ctr"/>
           <a:lstStyle/>
           <a:p>
-            <a:pPr marL="0" indent="0">
+            <a:pPr indent="0" marL="0">
               <a:buNone/>
             </a:pPr>
             <a:r>
@@ -7197,13 +7313,6 @@
             <a:prstDash val="solid"/>
           </a:ln>
         </p:spPr>
-        <p:txBody>
-          <a:bodyPr/>
-          <a:lstStyle/>
-          <a:p>
-            <a:endParaRPr lang="en-US"/>
-          </a:p>
-        </p:txBody>
       </p:sp>
       <p:sp>
         <p:nvSpPr>
@@ -7226,7 +7335,7 @@
           <a:bodyPr wrap="square" lIns="0" tIns="0" rIns="0" bIns="0" rtlCol="0" anchor="ctr"/>
           <a:lstStyle/>
           <a:p>
-            <a:pPr marL="0" indent="0">
+            <a:pPr indent="0" marL="0">
               <a:buNone/>
             </a:pPr>
             <a:r>
@@ -7265,7 +7374,7 @@
           <a:bodyPr wrap="square" lIns="0" tIns="0" rIns="0" bIns="0" rtlCol="0" anchor="ctr"/>
           <a:lstStyle/>
           <a:p>
-            <a:pPr marL="0" indent="0">
+            <a:pPr indent="0" marL="0">
               <a:buNone/>
             </a:pPr>
             <a:r>
@@ -7307,13 +7416,6 @@
             <a:prstDash val="solid"/>
           </a:ln>
         </p:spPr>
-        <p:txBody>
-          <a:bodyPr/>
-          <a:lstStyle/>
-          <a:p>
-            <a:endParaRPr lang="en-US"/>
-          </a:p>
-        </p:txBody>
       </p:sp>
       <p:sp>
         <p:nvSpPr>
@@ -7336,7 +7438,7 @@
           <a:bodyPr wrap="square" lIns="0" tIns="0" rIns="0" bIns="0" rtlCol="0" anchor="ctr"/>
           <a:lstStyle/>
           <a:p>
-            <a:pPr marL="0" indent="0">
+            <a:pPr indent="0" marL="0">
               <a:buNone/>
             </a:pPr>
             <a:r>
@@ -7375,7 +7477,7 @@
           <a:bodyPr wrap="square" lIns="0" tIns="0" rIns="0" bIns="0" rtlCol="0" anchor="ctr"/>
           <a:lstStyle/>
           <a:p>
-            <a:pPr marL="0" indent="0">
+            <a:pPr indent="0" marL="0">
               <a:buNone/>
             </a:pPr>
             <a:r>
@@ -7417,13 +7519,6 @@
             <a:prstDash val="solid"/>
           </a:ln>
         </p:spPr>
-        <p:txBody>
-          <a:bodyPr/>
-          <a:lstStyle/>
-          <a:p>
-            <a:endParaRPr lang="en-US"/>
-          </a:p>
-        </p:txBody>
       </p:sp>
       <p:sp>
         <p:nvSpPr>
@@ -7446,7 +7541,7 @@
           <a:bodyPr wrap="square" lIns="0" tIns="0" rIns="0" bIns="0" rtlCol="0" anchor="ctr"/>
           <a:lstStyle/>
           <a:p>
-            <a:pPr marL="0" indent="0">
+            <a:pPr indent="0" marL="0">
               <a:buNone/>
             </a:pPr>
             <a:r>
@@ -7488,20 +7583,13 @@
             <a:prstDash val="solid"/>
           </a:ln>
           <a:effectLst>
-            <a:outerShdw blurRad="101600" dist="12700" dir="5400000" algn="bl" rotWithShape="0">
+            <a:outerShdw sx="100000" sy="100000" kx="0" ky="0" algn="bl" rotWithShape="0" blurRad="101600" dist="12700" dir="5400000">
               <a:srgbClr val="94A3B8">
                 <a:alpha val="12000"/>
               </a:srgbClr>
             </a:outerShdw>
           </a:effectLst>
         </p:spPr>
-        <p:txBody>
-          <a:bodyPr/>
-          <a:lstStyle/>
-          <a:p>
-            <a:endParaRPr lang="en-US"/>
-          </a:p>
-        </p:txBody>
       </p:sp>
       <p:sp>
         <p:nvSpPr>
@@ -7527,13 +7615,6 @@
             <a:prstDash val="solid"/>
           </a:ln>
         </p:spPr>
-        <p:txBody>
-          <a:bodyPr/>
-          <a:lstStyle/>
-          <a:p>
-            <a:endParaRPr lang="en-US"/>
-          </a:p>
-        </p:txBody>
       </p:sp>
       <p:sp>
         <p:nvSpPr>
@@ -7556,7 +7637,7 @@
           <a:bodyPr wrap="square" lIns="0" tIns="0" rIns="0" bIns="0" rtlCol="0" anchor="ctr"/>
           <a:lstStyle/>
           <a:p>
-            <a:pPr marL="0" indent="0">
+            <a:pPr indent="0" marL="0">
               <a:buNone/>
             </a:pPr>
             <a:r>
@@ -7595,7 +7676,7 @@
           <a:bodyPr wrap="square" lIns="0" tIns="0" rIns="0" bIns="0" rtlCol="0" anchor="ctr"/>
           <a:lstStyle/>
           <a:p>
-            <a:pPr marL="0" indent="0">
+            <a:pPr indent="0" marL="0">
               <a:buNone/>
             </a:pPr>
             <a:r>
@@ -7637,13 +7718,6 @@
             <a:prstDash val="solid"/>
           </a:ln>
         </p:spPr>
-        <p:txBody>
-          <a:bodyPr/>
-          <a:lstStyle/>
-          <a:p>
-            <a:endParaRPr lang="en-US"/>
-          </a:p>
-        </p:txBody>
       </p:sp>
       <p:sp>
         <p:nvSpPr>
@@ -7666,7 +7740,7 @@
           <a:bodyPr wrap="square" lIns="0" tIns="0" rIns="0" bIns="0" rtlCol="0" anchor="ctr"/>
           <a:lstStyle/>
           <a:p>
-            <a:pPr marL="0" indent="0">
+            <a:pPr indent="0" marL="0">
               <a:buNone/>
             </a:pPr>
             <a:r>
@@ -7705,7 +7779,7 @@
           <a:bodyPr wrap="square" lIns="0" tIns="0" rIns="0" bIns="0" rtlCol="0" anchor="ctr"/>
           <a:lstStyle/>
           <a:p>
-            <a:pPr marL="0" indent="0">
+            <a:pPr indent="0" marL="0">
               <a:buNone/>
             </a:pPr>
             <a:r>
@@ -7747,13 +7821,6 @@
             <a:prstDash val="solid"/>
           </a:ln>
         </p:spPr>
-        <p:txBody>
-          <a:bodyPr/>
-          <a:lstStyle/>
-          <a:p>
-            <a:endParaRPr lang="en-US"/>
-          </a:p>
-        </p:txBody>
       </p:sp>
       <p:sp>
         <p:nvSpPr>
@@ -7776,7 +7843,7 @@
           <a:bodyPr wrap="square" lIns="0" tIns="0" rIns="0" bIns="0" rtlCol="0" anchor="ctr"/>
           <a:lstStyle/>
           <a:p>
-            <a:pPr marL="0" indent="0">
+            <a:pPr indent="0" marL="0">
               <a:buNone/>
             </a:pPr>
             <a:r>
@@ -7815,7 +7882,7 @@
           <a:bodyPr wrap="square" lIns="0" tIns="0" rIns="0" bIns="0" rtlCol="0" anchor="ctr"/>
           <a:lstStyle/>
           <a:p>
-            <a:pPr marL="0" indent="0">
+            <a:pPr indent="0" marL="0">
               <a:buNone/>
             </a:pPr>
             <a:r>
@@ -7857,13 +7924,6 @@
             <a:prstDash val="solid"/>
           </a:ln>
         </p:spPr>
-        <p:txBody>
-          <a:bodyPr/>
-          <a:lstStyle/>
-          <a:p>
-            <a:endParaRPr lang="en-US"/>
-          </a:p>
-        </p:txBody>
       </p:sp>
       <p:sp>
         <p:nvSpPr>
@@ -7886,7 +7946,7 @@
           <a:bodyPr wrap="square" lIns="0" tIns="0" rIns="0" bIns="0" rtlCol="0" anchor="ctr"/>
           <a:lstStyle/>
           <a:p>
-            <a:pPr marL="0" indent="0">
+            <a:pPr indent="0" marL="0">
               <a:buNone/>
             </a:pPr>
             <a:r>
@@ -7925,7 +7985,7 @@
           <a:bodyPr wrap="square" lIns="0" tIns="0" rIns="0" bIns="0" rtlCol="0" anchor="ctr"/>
           <a:lstStyle/>
           <a:p>
-            <a:pPr marL="0" indent="0">
+            <a:pPr indent="0" marL="0">
               <a:buNone/>
             </a:pPr>
             <a:r>
@@ -7967,13 +8027,6 @@
             <a:prstDash val="solid"/>
           </a:ln>
         </p:spPr>
-        <p:txBody>
-          <a:bodyPr/>
-          <a:lstStyle/>
-          <a:p>
-            <a:endParaRPr lang="en-US"/>
-          </a:p>
-        </p:txBody>
       </p:sp>
       <p:sp>
         <p:nvSpPr>
@@ -7996,7 +8049,7 @@
           <a:bodyPr wrap="square" lIns="0" tIns="0" rIns="0" bIns="0" rtlCol="0" anchor="ctr"/>
           <a:lstStyle/>
           <a:p>
-            <a:pPr marL="0" indent="0">
+            <a:pPr indent="0" marL="0">
               <a:buNone/>
             </a:pPr>
             <a:r>
@@ -8035,7 +8088,7 @@
           <a:bodyPr wrap="square" lIns="0" tIns="0" rIns="0" bIns="0" rtlCol="0" anchor="ctr"/>
           <a:lstStyle/>
           <a:p>
-            <a:pPr marL="0" indent="0">
+            <a:pPr indent="0" marL="0">
               <a:buNone/>
             </a:pPr>
             <a:r>
@@ -8077,13 +8130,6 @@
             <a:prstDash val="solid"/>
           </a:ln>
         </p:spPr>
-        <p:txBody>
-          <a:bodyPr/>
-          <a:lstStyle/>
-          <a:p>
-            <a:endParaRPr lang="en-US"/>
-          </a:p>
-        </p:txBody>
       </p:sp>
       <p:sp>
         <p:nvSpPr>
@@ -8106,7 +8152,7 @@
           <a:bodyPr wrap="square" lIns="0" tIns="0" rIns="0" bIns="0" rtlCol="0" anchor="ctr"/>
           <a:lstStyle/>
           <a:p>
-            <a:pPr marL="0" indent="0">
+            <a:pPr indent="0" marL="0">
               <a:buNone/>
             </a:pPr>
             <a:r>
@@ -8145,7 +8191,7 @@
           <a:bodyPr wrap="square" lIns="0" tIns="0" rIns="0" bIns="0" rtlCol="0" anchor="ctr"/>
           <a:lstStyle/>
           <a:p>
-            <a:pPr marL="0" indent="0" algn="l">
+            <a:pPr algn="l" indent="0" marL="0">
               <a:buNone/>
             </a:pPr>
             <a:r>
@@ -8184,7 +8230,7 @@
           <a:bodyPr wrap="square" lIns="0" tIns="0" rIns="0" bIns="0" rtlCol="0" anchor="ctr"/>
           <a:lstStyle/>
           <a:p>
-            <a:pPr marL="0" indent="0" algn="r">
+            <a:pPr algn="r" indent="0" marL="0">
               <a:buNone/>
             </a:pPr>
             <a:r>
@@ -8218,7 +8264,6 @@
         <a:solidFill>
           <a:srgbClr val="FFFFFF"/>
         </a:solidFill>
-        <a:effectLst/>
       </p:bgPr>
     </p:bg>
     <p:spTree>
@@ -8256,11 +8301,11 @@
           <a:bodyPr wrap="square" lIns="0" tIns="0" rIns="0" bIns="0" rtlCol="0" anchor="ctr"/>
           <a:lstStyle/>
           <a:p>
-            <a:pPr marL="0" indent="0">
-              <a:buNone/>
-            </a:pPr>
-            <a:r>
-              <a:rPr lang="en-US" sz="1100" b="1" kern="0" spc="400" dirty="0">
+            <a:pPr indent="0" marL="0">
+              <a:buNone/>
+            </a:pPr>
+            <a:r>
+              <a:rPr lang="en-US" sz="1100" b="1" spc="400" kern="0" dirty="0">
                 <a:solidFill>
                   <a:srgbClr val="1C7293"/>
                 </a:solidFill>
@@ -8295,7 +8340,7 @@
           <a:bodyPr wrap="square" lIns="0" tIns="0" rIns="0" bIns="0" rtlCol="0" anchor="ctr"/>
           <a:lstStyle/>
           <a:p>
-            <a:pPr marL="0" indent="0">
+            <a:pPr indent="0" marL="0">
               <a:buNone/>
             </a:pPr>
             <a:r>
@@ -8334,7 +8379,7 @@
           <a:bodyPr wrap="square" lIns="0" tIns="0" rIns="0" bIns="0" rtlCol="0" anchor="ctr"/>
           <a:lstStyle/>
           <a:p>
-            <a:pPr marL="0" indent="0">
+            <a:pPr indent="0" marL="0">
               <a:buNone/>
             </a:pPr>
             <a:r>
@@ -8348,6 +8393,9 @@
               </a:rPr>
               <a:t>Clustering der 34 Quartiere auf den </a:t>
             </a:r>
+            <a:pPr indent="0" marL="0">
+              <a:buNone/>
+            </a:pPr>
             <a:r>
               <a:rPr lang="en-US" sz="1300" b="1" dirty="0">
                 <a:solidFill>
@@ -8359,6 +8407,9 @@
               </a:rPr>
               <a:t>sechs Kategorie-Erreichbarkeiten</a:t>
             </a:r>
+            <a:pPr indent="0" marL="0">
+              <a:buNone/>
+            </a:pPr>
             <a:r>
               <a:rPr lang="en-US" sz="1300" dirty="0">
                 <a:solidFill>
@@ -8398,20 +8449,13 @@
             <a:prstDash val="solid"/>
           </a:ln>
           <a:effectLst>
-            <a:outerShdw blurRad="101600" dist="12700" dir="5400000" algn="bl" rotWithShape="0">
+            <a:outerShdw sx="100000" sy="100000" kx="0" ky="0" algn="bl" rotWithShape="0" blurRad="101600" dist="12700" dir="5400000">
               <a:srgbClr val="94A3B8">
                 <a:alpha val="12000"/>
               </a:srgbClr>
             </a:outerShdw>
           </a:effectLst>
         </p:spPr>
-        <p:txBody>
-          <a:bodyPr/>
-          <a:lstStyle/>
-          <a:p>
-            <a:endParaRPr lang="en-US"/>
-          </a:p>
-        </p:txBody>
       </p:sp>
       <p:sp>
         <p:nvSpPr>
@@ -8437,13 +8481,6 @@
             <a:prstDash val="solid"/>
           </a:ln>
         </p:spPr>
-        <p:txBody>
-          <a:bodyPr/>
-          <a:lstStyle/>
-          <a:p>
-            <a:endParaRPr lang="en-US"/>
-          </a:p>
-        </p:txBody>
       </p:sp>
       <p:sp>
         <p:nvSpPr>
@@ -8469,13 +8506,6 @@
             <a:prstDash val="solid"/>
           </a:ln>
         </p:spPr>
-        <p:txBody>
-          <a:bodyPr/>
-          <a:lstStyle/>
-          <a:p>
-            <a:endParaRPr lang="en-US"/>
-          </a:p>
-        </p:txBody>
       </p:sp>
       <p:sp>
         <p:nvSpPr>
@@ -8498,7 +8528,7 @@
           <a:bodyPr wrap="square" lIns="0" tIns="0" rIns="0" bIns="0" rtlCol="0" anchor="ctr"/>
           <a:lstStyle/>
           <a:p>
-            <a:pPr marL="0" indent="0" algn="ctr">
+            <a:pPr algn="ctr" indent="0" marL="0">
               <a:buNone/>
             </a:pPr>
             <a:r>
@@ -8537,7 +8567,7 @@
           <a:bodyPr wrap="square" lIns="0" tIns="0" rIns="0" bIns="0" rtlCol="0" anchor="ctr"/>
           <a:lstStyle/>
           <a:p>
-            <a:pPr marL="0" indent="0">
+            <a:pPr indent="0" marL="0">
               <a:buNone/>
             </a:pPr>
             <a:r>
@@ -8563,20 +8593,20 @@
         </p:nvSpPr>
         <p:spPr>
           <a:xfrm>
-            <a:off x="3521122" y="2176272"/>
-            <a:ext cx="913718" cy="292608"/>
-          </a:xfrm>
-          <a:prstGeom prst="rect">
-            <a:avLst/>
-          </a:prstGeom>
-          <a:noFill/>
-          <a:ln/>
-        </p:spPr>
-        <p:txBody>
-          <a:bodyPr wrap="square" lIns="0" tIns="0" rIns="0" bIns="0" rtlCol="0" anchor="ctr"/>
-          <a:lstStyle/>
-          <a:p>
-            <a:pPr marL="0" indent="0" algn="r">
+            <a:off x="3703320" y="2176272"/>
+            <a:ext cx="731520" cy="292608"/>
+          </a:xfrm>
+          <a:prstGeom prst="rect">
+            <a:avLst/>
+          </a:prstGeom>
+          <a:noFill/>
+          <a:ln/>
+        </p:spPr>
+        <p:txBody>
+          <a:bodyPr wrap="square" lIns="0" tIns="0" rIns="0" bIns="0" rtlCol="0" anchor="ctr"/>
+          <a:lstStyle/>
+          <a:p>
+            <a:pPr algn="r" indent="0" marL="0">
               <a:buNone/>
             </a:pPr>
             <a:r>
@@ -8615,7 +8645,7 @@
           <a:bodyPr wrap="square" lIns="0" tIns="0" rIns="0" bIns="0" rtlCol="0" anchor="ctr"/>
           <a:lstStyle/>
           <a:p>
-            <a:pPr marL="0" indent="0">
+            <a:pPr indent="0" marL="0">
               <a:buNone/>
             </a:pPr>
             <a:r>
@@ -8654,7 +8684,7 @@
           <a:bodyPr wrap="square" lIns="0" tIns="0" rIns="0" bIns="0" rtlCol="0" anchor="ctr"/>
           <a:lstStyle/>
           <a:p>
-            <a:pPr marL="0" indent="0">
+            <a:pPr indent="0" marL="0">
               <a:buNone/>
             </a:pPr>
             <a:r>
@@ -8696,20 +8726,13 @@
             <a:prstDash val="solid"/>
           </a:ln>
           <a:effectLst>
-            <a:outerShdw blurRad="101600" dist="12700" dir="5400000" algn="bl" rotWithShape="0">
+            <a:outerShdw sx="100000" sy="100000" kx="0" ky="0" algn="bl" rotWithShape="0" blurRad="101600" dist="12700" dir="5400000">
               <a:srgbClr val="94A3B8">
                 <a:alpha val="12000"/>
               </a:srgbClr>
             </a:outerShdw>
           </a:effectLst>
         </p:spPr>
-        <p:txBody>
-          <a:bodyPr/>
-          <a:lstStyle/>
-          <a:p>
-            <a:endParaRPr lang="en-US"/>
-          </a:p>
-        </p:txBody>
       </p:sp>
       <p:sp>
         <p:nvSpPr>
@@ -8735,13 +8758,6 @@
             <a:prstDash val="solid"/>
           </a:ln>
         </p:spPr>
-        <p:txBody>
-          <a:bodyPr/>
-          <a:lstStyle/>
-          <a:p>
-            <a:endParaRPr lang="en-US"/>
-          </a:p>
-        </p:txBody>
       </p:sp>
       <p:sp>
         <p:nvSpPr>
@@ -8767,13 +8783,6 @@
             <a:prstDash val="solid"/>
           </a:ln>
         </p:spPr>
-        <p:txBody>
-          <a:bodyPr/>
-          <a:lstStyle/>
-          <a:p>
-            <a:endParaRPr lang="en-US"/>
-          </a:p>
-        </p:txBody>
       </p:sp>
       <p:sp>
         <p:nvSpPr>
@@ -8796,7 +8805,7 @@
           <a:bodyPr wrap="square" lIns="0" tIns="0" rIns="0" bIns="0" rtlCol="0" anchor="ctr"/>
           <a:lstStyle/>
           <a:p>
-            <a:pPr marL="0" indent="0" algn="ctr">
+            <a:pPr algn="ctr" indent="0" marL="0">
               <a:buNone/>
             </a:pPr>
             <a:r>
@@ -8835,7 +8844,7 @@
           <a:bodyPr wrap="square" lIns="0" tIns="0" rIns="0" bIns="0" rtlCol="0" anchor="ctr"/>
           <a:lstStyle/>
           <a:p>
-            <a:pPr marL="0" indent="0">
+            <a:pPr indent="0" marL="0">
               <a:buNone/>
             </a:pPr>
             <a:r>
@@ -8861,20 +8870,20 @@
         </p:nvSpPr>
         <p:spPr>
           <a:xfrm>
-            <a:off x="7724633" y="2176272"/>
-            <a:ext cx="916447" cy="292608"/>
-          </a:xfrm>
-          <a:prstGeom prst="rect">
-            <a:avLst/>
-          </a:prstGeom>
-          <a:noFill/>
-          <a:ln/>
-        </p:spPr>
-        <p:txBody>
-          <a:bodyPr wrap="square" lIns="0" tIns="0" rIns="0" bIns="0" rtlCol="0" anchor="ctr"/>
-          <a:lstStyle/>
-          <a:p>
-            <a:pPr marL="0" indent="0" algn="r">
+            <a:off x="7909560" y="2176272"/>
+            <a:ext cx="731520" cy="292608"/>
+          </a:xfrm>
+          <a:prstGeom prst="rect">
+            <a:avLst/>
+          </a:prstGeom>
+          <a:noFill/>
+          <a:ln/>
+        </p:spPr>
+        <p:txBody>
+          <a:bodyPr wrap="square" lIns="0" tIns="0" rIns="0" bIns="0" rtlCol="0" anchor="ctr"/>
+          <a:lstStyle/>
+          <a:p>
+            <a:pPr algn="r" indent="0" marL="0">
               <a:buNone/>
             </a:pPr>
             <a:r>
@@ -8913,7 +8922,7 @@
           <a:bodyPr wrap="square" lIns="0" tIns="0" rIns="0" bIns="0" rtlCol="0" anchor="ctr"/>
           <a:lstStyle/>
           <a:p>
-            <a:pPr marL="0" indent="0">
+            <a:pPr indent="0" marL="0">
               <a:buNone/>
             </a:pPr>
             <a:r>
@@ -8952,7 +8961,7 @@
           <a:bodyPr wrap="square" lIns="0" tIns="0" rIns="0" bIns="0" rtlCol="0" anchor="ctr"/>
           <a:lstStyle/>
           <a:p>
-            <a:pPr marL="0" indent="0">
+            <a:pPr indent="0" marL="0">
               <a:buNone/>
             </a:pPr>
             <a:r>
@@ -8994,20 +9003,13 @@
             <a:prstDash val="solid"/>
           </a:ln>
           <a:effectLst>
-            <a:outerShdw blurRad="101600" dist="12700" dir="5400000" algn="bl" rotWithShape="0">
+            <a:outerShdw sx="100000" sy="100000" kx="0" ky="0" algn="bl" rotWithShape="0" blurRad="101600" dist="12700" dir="5400000">
               <a:srgbClr val="94A3B8">
                 <a:alpha val="12000"/>
               </a:srgbClr>
             </a:outerShdw>
           </a:effectLst>
         </p:spPr>
-        <p:txBody>
-          <a:bodyPr/>
-          <a:lstStyle/>
-          <a:p>
-            <a:endParaRPr lang="en-US"/>
-          </a:p>
-        </p:txBody>
       </p:sp>
       <p:sp>
         <p:nvSpPr>
@@ -9033,13 +9035,6 @@
             <a:prstDash val="solid"/>
           </a:ln>
         </p:spPr>
-        <p:txBody>
-          <a:bodyPr/>
-          <a:lstStyle/>
-          <a:p>
-            <a:endParaRPr lang="en-US"/>
-          </a:p>
-        </p:txBody>
       </p:sp>
       <p:sp>
         <p:nvSpPr>
@@ -9065,13 +9060,6 @@
             <a:prstDash val="solid"/>
           </a:ln>
         </p:spPr>
-        <p:txBody>
-          <a:bodyPr/>
-          <a:lstStyle/>
-          <a:p>
-            <a:endParaRPr lang="en-US"/>
-          </a:p>
-        </p:txBody>
       </p:sp>
       <p:sp>
         <p:nvSpPr>
@@ -9094,7 +9082,7 @@
           <a:bodyPr wrap="square" lIns="0" tIns="0" rIns="0" bIns="0" rtlCol="0" anchor="ctr"/>
           <a:lstStyle/>
           <a:p>
-            <a:pPr marL="0" indent="0" algn="ctr">
+            <a:pPr algn="ctr" indent="0" marL="0">
               <a:buNone/>
             </a:pPr>
             <a:r>
@@ -9133,7 +9121,7 @@
           <a:bodyPr wrap="square" lIns="0" tIns="0" rIns="0" bIns="0" rtlCol="0" anchor="ctr"/>
           <a:lstStyle/>
           <a:p>
-            <a:pPr marL="0" indent="0">
+            <a:pPr indent="0" marL="0">
               <a:buNone/>
             </a:pPr>
             <a:r>
@@ -9159,20 +9147,20 @@
         </p:nvSpPr>
         <p:spPr>
           <a:xfrm>
-            <a:off x="3521122" y="3502152"/>
-            <a:ext cx="913718" cy="292608"/>
-          </a:xfrm>
-          <a:prstGeom prst="rect">
-            <a:avLst/>
-          </a:prstGeom>
-          <a:noFill/>
-          <a:ln/>
-        </p:spPr>
-        <p:txBody>
-          <a:bodyPr wrap="square" lIns="0" tIns="0" rIns="0" bIns="0" rtlCol="0" anchor="ctr"/>
-          <a:lstStyle/>
-          <a:p>
-            <a:pPr marL="0" indent="0" algn="r">
+            <a:off x="3703320" y="3502152"/>
+            <a:ext cx="731520" cy="292608"/>
+          </a:xfrm>
+          <a:prstGeom prst="rect">
+            <a:avLst/>
+          </a:prstGeom>
+          <a:noFill/>
+          <a:ln/>
+        </p:spPr>
+        <p:txBody>
+          <a:bodyPr wrap="square" lIns="0" tIns="0" rIns="0" bIns="0" rtlCol="0" anchor="ctr"/>
+          <a:lstStyle/>
+          <a:p>
+            <a:pPr algn="r" indent="0" marL="0">
               <a:buNone/>
             </a:pPr>
             <a:r>
@@ -9211,7 +9199,7 @@
           <a:bodyPr wrap="square" lIns="0" tIns="0" rIns="0" bIns="0" rtlCol="0" anchor="ctr"/>
           <a:lstStyle/>
           <a:p>
-            <a:pPr marL="0" indent="0">
+            <a:pPr indent="0" marL="0">
               <a:buNone/>
             </a:pPr>
             <a:r>
@@ -9250,7 +9238,7 @@
           <a:bodyPr wrap="square" lIns="0" tIns="0" rIns="0" bIns="0" rtlCol="0" anchor="ctr"/>
           <a:lstStyle/>
           <a:p>
-            <a:pPr marL="0" indent="0">
+            <a:pPr indent="0" marL="0">
               <a:buNone/>
             </a:pPr>
             <a:r>
@@ -9292,20 +9280,13 @@
             <a:prstDash val="solid"/>
           </a:ln>
           <a:effectLst>
-            <a:outerShdw blurRad="101600" dist="12700" dir="5400000" algn="bl" rotWithShape="0">
+            <a:outerShdw sx="100000" sy="100000" kx="0" ky="0" algn="bl" rotWithShape="0" blurRad="101600" dist="12700" dir="5400000">
               <a:srgbClr val="94A3B8">
                 <a:alpha val="12000"/>
               </a:srgbClr>
             </a:outerShdw>
           </a:effectLst>
         </p:spPr>
-        <p:txBody>
-          <a:bodyPr/>
-          <a:lstStyle/>
-          <a:p>
-            <a:endParaRPr lang="en-US"/>
-          </a:p>
-        </p:txBody>
       </p:sp>
       <p:sp>
         <p:nvSpPr>
@@ -9331,13 +9312,6 @@
             <a:prstDash val="solid"/>
           </a:ln>
         </p:spPr>
-        <p:txBody>
-          <a:bodyPr/>
-          <a:lstStyle/>
-          <a:p>
-            <a:endParaRPr lang="en-US"/>
-          </a:p>
-        </p:txBody>
       </p:sp>
       <p:sp>
         <p:nvSpPr>
@@ -9363,13 +9337,6 @@
             <a:prstDash val="solid"/>
           </a:ln>
         </p:spPr>
-        <p:txBody>
-          <a:bodyPr/>
-          <a:lstStyle/>
-          <a:p>
-            <a:endParaRPr lang="en-US"/>
-          </a:p>
-        </p:txBody>
       </p:sp>
       <p:sp>
         <p:nvSpPr>
@@ -9392,7 +9359,7 @@
           <a:bodyPr wrap="square" lIns="0" tIns="0" rIns="0" bIns="0" rtlCol="0" anchor="ctr"/>
           <a:lstStyle/>
           <a:p>
-            <a:pPr marL="0" indent="0" algn="ctr">
+            <a:pPr algn="ctr" indent="0" marL="0">
               <a:buNone/>
             </a:pPr>
             <a:r>
@@ -9431,7 +9398,7 @@
           <a:bodyPr wrap="square" lIns="0" tIns="0" rIns="0" bIns="0" rtlCol="0" anchor="ctr"/>
           <a:lstStyle/>
           <a:p>
-            <a:pPr marL="0" indent="0">
+            <a:pPr indent="0" marL="0">
               <a:buNone/>
             </a:pPr>
             <a:r>
@@ -9457,20 +9424,20 @@
         </p:nvSpPr>
         <p:spPr>
           <a:xfrm>
-            <a:off x="7680960" y="3502152"/>
-            <a:ext cx="960120" cy="292608"/>
-          </a:xfrm>
-          <a:prstGeom prst="rect">
-            <a:avLst/>
-          </a:prstGeom>
-          <a:noFill/>
-          <a:ln/>
-        </p:spPr>
-        <p:txBody>
-          <a:bodyPr wrap="square" lIns="0" tIns="0" rIns="0" bIns="0" rtlCol="0" anchor="ctr"/>
-          <a:lstStyle/>
-          <a:p>
-            <a:pPr marL="0" indent="0" algn="r">
+            <a:off x="7909560" y="3502152"/>
+            <a:ext cx="731520" cy="292608"/>
+          </a:xfrm>
+          <a:prstGeom prst="rect">
+            <a:avLst/>
+          </a:prstGeom>
+          <a:noFill/>
+          <a:ln/>
+        </p:spPr>
+        <p:txBody>
+          <a:bodyPr wrap="square" lIns="0" tIns="0" rIns="0" bIns="0" rtlCol="0" anchor="ctr"/>
+          <a:lstStyle/>
+          <a:p>
+            <a:pPr algn="r" indent="0" marL="0">
               <a:buNone/>
             </a:pPr>
             <a:r>
@@ -9509,7 +9476,7 @@
           <a:bodyPr wrap="square" lIns="0" tIns="0" rIns="0" bIns="0" rtlCol="0" anchor="ctr"/>
           <a:lstStyle/>
           <a:p>
-            <a:pPr marL="0" indent="0">
+            <a:pPr indent="0" marL="0">
               <a:buNone/>
             </a:pPr>
             <a:r>
@@ -9548,7 +9515,7 @@
           <a:bodyPr wrap="square" lIns="0" tIns="0" rIns="0" bIns="0" rtlCol="0" anchor="ctr"/>
           <a:lstStyle/>
           <a:p>
-            <a:pPr marL="0" indent="0">
+            <a:pPr indent="0" marL="0">
               <a:buNone/>
             </a:pPr>
             <a:r>
@@ -9587,7 +9554,7 @@
           <a:bodyPr wrap="square" lIns="0" tIns="0" rIns="0" bIns="0" rtlCol="0" anchor="ctr"/>
           <a:lstStyle/>
           <a:p>
-            <a:pPr marL="0" indent="0" algn="l">
+            <a:pPr algn="l" indent="0" marL="0">
               <a:buNone/>
             </a:pPr>
             <a:r>
@@ -9626,7 +9593,7 @@
           <a:bodyPr wrap="square" lIns="0" tIns="0" rIns="0" bIns="0" rtlCol="0" anchor="ctr"/>
           <a:lstStyle/>
           <a:p>
-            <a:pPr marL="0" indent="0" algn="r">
+            <a:pPr algn="r" indent="0" marL="0">
               <a:buNone/>
             </a:pPr>
             <a:r>
@@ -9660,7 +9627,6 @@
         <a:solidFill>
           <a:srgbClr val="FFFFFF"/>
         </a:solidFill>
-        <a:effectLst/>
       </p:bgPr>
     </p:bg>
     <p:spTree>
@@ -9698,11 +9664,11 @@
           <a:bodyPr wrap="square" lIns="0" tIns="0" rIns="0" bIns="0" rtlCol="0" anchor="ctr"/>
           <a:lstStyle/>
           <a:p>
-            <a:pPr marL="0" indent="0">
-              <a:buNone/>
-            </a:pPr>
-            <a:r>
-              <a:rPr lang="en-US" sz="1100" b="1" kern="0" spc="400" dirty="0">
+            <a:pPr indent="0" marL="0">
+              <a:buNone/>
+            </a:pPr>
+            <a:r>
+              <a:rPr lang="en-US" sz="1100" b="1" spc="400" kern="0" dirty="0">
                 <a:solidFill>
                   <a:srgbClr val="1C7293"/>
                 </a:solidFill>
@@ -9737,7 +9703,7 @@
           <a:bodyPr wrap="square" lIns="0" tIns="0" rIns="0" bIns="0" rtlCol="0" anchor="ctr"/>
           <a:lstStyle/>
           <a:p>
-            <a:pPr marL="0" indent="0">
+            <a:pPr indent="0" marL="0">
               <a:buNone/>
             </a:pPr>
             <a:r>
@@ -9779,20 +9745,13 @@
             <a:prstDash val="solid"/>
           </a:ln>
           <a:effectLst>
-            <a:outerShdw blurRad="101600" dist="12700" dir="5400000" algn="bl" rotWithShape="0">
+            <a:outerShdw sx="100000" sy="100000" kx="0" ky="0" algn="bl" rotWithShape="0" blurRad="101600" dist="12700" dir="5400000">
               <a:srgbClr val="94A3B8">
                 <a:alpha val="12000"/>
               </a:srgbClr>
             </a:outerShdw>
           </a:effectLst>
         </p:spPr>
-        <p:txBody>
-          <a:bodyPr/>
-          <a:lstStyle/>
-          <a:p>
-            <a:endParaRPr lang="en-US"/>
-          </a:p>
-        </p:txBody>
       </p:sp>
       <p:sp>
         <p:nvSpPr>
@@ -9818,13 +9777,6 @@
             <a:prstDash val="solid"/>
           </a:ln>
         </p:spPr>
-        <p:txBody>
-          <a:bodyPr/>
-          <a:lstStyle/>
-          <a:p>
-            <a:endParaRPr lang="en-US"/>
-          </a:p>
-        </p:txBody>
       </p:sp>
       <p:sp>
         <p:nvSpPr>
@@ -9847,7 +9799,7 @@
           <a:bodyPr wrap="square" lIns="0" tIns="0" rIns="0" bIns="0" rtlCol="0" anchor="ctr"/>
           <a:lstStyle/>
           <a:p>
-            <a:pPr marL="0" indent="0">
+            <a:pPr indent="0" marL="0">
               <a:buNone/>
             </a:pPr>
             <a:r>
@@ -9861,6 +9813,9 @@
               </a:rPr>
               <a:t>Die grössten Lücken zwischen Wohnen und täglicher Infrastruktur </a:t>
             </a:r>
+            <a:pPr indent="0" marL="0">
+              <a:buNone/>
+            </a:pPr>
             <a:r>
               <a:rPr lang="en-US" sz="1400" b="1" dirty="0">
                 <a:solidFill>
@@ -9872,6 +9827,9 @@
               </a:rPr>
               <a:t>liegen in der Stadtperipherie</a:t>
             </a:r>
+            <a:pPr indent="0" marL="0">
+              <a:buNone/>
+            </a:pPr>
             <a:r>
               <a:rPr lang="en-US" sz="1400" dirty="0">
                 <a:solidFill>
@@ -9883,6 +9841,9 @@
               </a:rPr>
               <a:t> (Leimbach, Witikon, Hirzenbach, Affoltern, Friesenberg) — über 80 Score-Punkte Abstand zum Zentrum. Die Korrelation Score × Distanz zum HB beträgt </a:t>
             </a:r>
+            <a:pPr indent="0" marL="0">
+              <a:buNone/>
+            </a:pPr>
             <a:r>
               <a:rPr lang="en-US" sz="1400" b="1" dirty="0">
                 <a:solidFill>
@@ -9894,6 +9855,9 @@
               </a:rPr>
               <a:t>ρ = −0.81 (p &lt; 10⁻⁸)</a:t>
             </a:r>
+            <a:pPr indent="0" marL="0">
+              <a:buNone/>
+            </a:pPr>
             <a:r>
               <a:rPr lang="en-US" sz="1400" dirty="0">
                 <a:solidFill>
@@ -9933,20 +9897,13 @@
             <a:prstDash val="solid"/>
           </a:ln>
           <a:effectLst>
-            <a:outerShdw blurRad="101600" dist="12700" dir="5400000" algn="bl" rotWithShape="0">
+            <a:outerShdw sx="100000" sy="100000" kx="0" ky="0" algn="bl" rotWithShape="0" blurRad="101600" dist="12700" dir="5400000">
               <a:srgbClr val="94A3B8">
                 <a:alpha val="12000"/>
               </a:srgbClr>
             </a:outerShdw>
           </a:effectLst>
         </p:spPr>
-        <p:txBody>
-          <a:bodyPr/>
-          <a:lstStyle/>
-          <a:p>
-            <a:endParaRPr lang="en-US"/>
-          </a:p>
-        </p:txBody>
       </p:sp>
       <p:sp>
         <p:nvSpPr>
@@ -9972,13 +9929,6 @@
             <a:prstDash val="solid"/>
           </a:ln>
         </p:spPr>
-        <p:txBody>
-          <a:bodyPr/>
-          <a:lstStyle/>
-          <a:p>
-            <a:endParaRPr lang="en-US"/>
-          </a:p>
-        </p:txBody>
       </p:sp>
       <p:sp>
         <p:nvSpPr>
@@ -10001,7 +9951,7 @@
           <a:bodyPr wrap="square" lIns="0" tIns="0" rIns="0" bIns="0" rtlCol="0" anchor="ctr"/>
           <a:lstStyle/>
           <a:p>
-            <a:pPr marL="0" indent="0">
+            <a:pPr indent="0" marL="0">
               <a:buNone/>
             </a:pPr>
             <a:r>
@@ -10040,7 +9990,7 @@
           <a:bodyPr wrap="square" lIns="0" tIns="0" rIns="0" bIns="0" rtlCol="0" anchor="ctr"/>
           <a:lstStyle/>
           <a:p>
-            <a:pPr marL="0" indent="0">
+            <a:pPr indent="0" marL="0">
               <a:buNone/>
             </a:pPr>
             <a:r>
@@ -10082,20 +10032,13 @@
             <a:prstDash val="solid"/>
           </a:ln>
           <a:effectLst>
-            <a:outerShdw blurRad="101600" dist="12700" dir="5400000" algn="bl" rotWithShape="0">
+            <a:outerShdw sx="100000" sy="100000" kx="0" ky="0" algn="bl" rotWithShape="0" blurRad="101600" dist="12700" dir="5400000">
               <a:srgbClr val="94A3B8">
                 <a:alpha val="12000"/>
               </a:srgbClr>
             </a:outerShdw>
           </a:effectLst>
         </p:spPr>
-        <p:txBody>
-          <a:bodyPr/>
-          <a:lstStyle/>
-          <a:p>
-            <a:endParaRPr lang="en-US"/>
-          </a:p>
-        </p:txBody>
       </p:sp>
       <p:sp>
         <p:nvSpPr>
@@ -10121,13 +10064,6 @@
             <a:prstDash val="solid"/>
           </a:ln>
         </p:spPr>
-        <p:txBody>
-          <a:bodyPr/>
-          <a:lstStyle/>
-          <a:p>
-            <a:endParaRPr lang="en-US"/>
-          </a:p>
-        </p:txBody>
       </p:sp>
       <p:sp>
         <p:nvSpPr>
@@ -10150,7 +10086,7 @@
           <a:bodyPr wrap="square" lIns="0" tIns="0" rIns="0" bIns="0" rtlCol="0" anchor="ctr"/>
           <a:lstStyle/>
           <a:p>
-            <a:pPr marL="0" indent="0">
+            <a:pPr indent="0" marL="0">
               <a:buNone/>
             </a:pPr>
             <a:r>
@@ -10189,7 +10125,7 @@
           <a:bodyPr wrap="square" lIns="0" tIns="0" rIns="0" bIns="0" rtlCol="0" anchor="ctr"/>
           <a:lstStyle/>
           <a:p>
-            <a:pPr marL="0" indent="0">
+            <a:pPr indent="0" marL="0">
               <a:buNone/>
             </a:pPr>
             <a:r>
@@ -10231,20 +10167,13 @@
             <a:prstDash val="solid"/>
           </a:ln>
           <a:effectLst>
-            <a:outerShdw blurRad="101600" dist="12700" dir="5400000" algn="bl" rotWithShape="0">
+            <a:outerShdw sx="100000" sy="100000" kx="0" ky="0" algn="bl" rotWithShape="0" blurRad="101600" dist="12700" dir="5400000">
               <a:srgbClr val="94A3B8">
                 <a:alpha val="12000"/>
               </a:srgbClr>
             </a:outerShdw>
           </a:effectLst>
         </p:spPr>
-        <p:txBody>
-          <a:bodyPr/>
-          <a:lstStyle/>
-          <a:p>
-            <a:endParaRPr lang="en-US"/>
-          </a:p>
-        </p:txBody>
       </p:sp>
       <p:sp>
         <p:nvSpPr>
@@ -10270,13 +10199,6 @@
             <a:prstDash val="solid"/>
           </a:ln>
         </p:spPr>
-        <p:txBody>
-          <a:bodyPr/>
-          <a:lstStyle/>
-          <a:p>
-            <a:endParaRPr lang="en-US"/>
-          </a:p>
-        </p:txBody>
       </p:sp>
       <p:sp>
         <p:nvSpPr>
@@ -10299,7 +10221,7 @@
           <a:bodyPr wrap="square" lIns="0" tIns="0" rIns="0" bIns="0" rtlCol="0" anchor="ctr"/>
           <a:lstStyle/>
           <a:p>
-            <a:pPr marL="0" indent="0">
+            <a:pPr indent="0" marL="0">
               <a:buNone/>
             </a:pPr>
             <a:r>
@@ -10338,7 +10260,7 @@
           <a:bodyPr wrap="square" lIns="0" tIns="0" rIns="0" bIns="0" rtlCol="0" anchor="ctr"/>
           <a:lstStyle/>
           <a:p>
-            <a:pPr marL="0" indent="0">
+            <a:pPr indent="0" marL="0">
               <a:buNone/>
             </a:pPr>
             <a:r>
@@ -10377,7 +10299,7 @@
           <a:bodyPr wrap="square" lIns="0" tIns="0" rIns="0" bIns="0" rtlCol="0" anchor="ctr"/>
           <a:lstStyle/>
           <a:p>
-            <a:pPr marL="0" indent="0" algn="r">
+            <a:pPr algn="r" indent="0" marL="0">
               <a:buNone/>
             </a:pPr>
             <a:r>
@@ -10411,7 +10333,6 @@
         <a:solidFill>
           <a:srgbClr val="FFFFFF"/>
         </a:solidFill>
-        <a:effectLst/>
       </p:bgPr>
     </p:bg>
     <p:spTree>
@@ -10449,11 +10370,11 @@
           <a:bodyPr wrap="square" lIns="0" tIns="0" rIns="0" bIns="0" rtlCol="0" anchor="ctr"/>
           <a:lstStyle/>
           <a:p>
-            <a:pPr marL="0" indent="0">
-              <a:buNone/>
-            </a:pPr>
-            <a:r>
-              <a:rPr lang="en-US" sz="1100" b="1" kern="0" spc="400" dirty="0">
+            <a:pPr indent="0" marL="0">
+              <a:buNone/>
+            </a:pPr>
+            <a:r>
+              <a:rPr lang="en-US" sz="1100" b="1" spc="400" kern="0" dirty="0">
                 <a:solidFill>
                   <a:srgbClr val="1C7293"/>
                 </a:solidFill>
@@ -10488,7 +10409,7 @@
           <a:bodyPr wrap="square" lIns="0" tIns="0" rIns="0" bIns="0" rtlCol="0" anchor="ctr"/>
           <a:lstStyle/>
           <a:p>
-            <a:pPr marL="0" indent="0">
+            <a:pPr indent="0" marL="0">
               <a:buNone/>
             </a:pPr>
             <a:r>
@@ -10530,20 +10451,13 @@
             <a:prstDash val="solid"/>
           </a:ln>
           <a:effectLst>
-            <a:outerShdw blurRad="101600" dist="12700" dir="5400000" algn="bl" rotWithShape="0">
+            <a:outerShdw sx="100000" sy="100000" kx="0" ky="0" algn="bl" rotWithShape="0" blurRad="101600" dist="12700" dir="5400000">
               <a:srgbClr val="94A3B8">
                 <a:alpha val="12000"/>
               </a:srgbClr>
             </a:outerShdw>
           </a:effectLst>
         </p:spPr>
-        <p:txBody>
-          <a:bodyPr/>
-          <a:lstStyle/>
-          <a:p>
-            <a:endParaRPr lang="en-US"/>
-          </a:p>
-        </p:txBody>
       </p:sp>
       <p:sp>
         <p:nvSpPr>
@@ -10569,13 +10483,6 @@
             <a:prstDash val="solid"/>
           </a:ln>
         </p:spPr>
-        <p:txBody>
-          <a:bodyPr/>
-          <a:lstStyle/>
-          <a:p>
-            <a:endParaRPr lang="en-US"/>
-          </a:p>
-        </p:txBody>
       </p:sp>
       <p:sp>
         <p:nvSpPr>
@@ -10598,7 +10505,7 @@
           <a:bodyPr wrap="square" lIns="0" tIns="0" rIns="0" bIns="0" rtlCol="0" anchor="ctr"/>
           <a:lstStyle/>
           <a:p>
-            <a:pPr marL="0" indent="0">
+            <a:pPr indent="0" marL="0">
               <a:buNone/>
             </a:pPr>
             <a:r>
@@ -10637,7 +10544,7 @@
           <a:bodyPr wrap="square" lIns="0" tIns="0" rIns="0" bIns="0" rtlCol="0" anchor="ctr"/>
           <a:lstStyle/>
           <a:p>
-            <a:pPr marL="0" indent="0">
+            <a:pPr indent="0" marL="0">
               <a:buNone/>
             </a:pPr>
             <a:r>
@@ -10676,7 +10583,7 @@
           <a:bodyPr wrap="square" lIns="0" tIns="0" rIns="0" bIns="0" rtlCol="0" anchor="ctr"/>
           <a:lstStyle/>
           <a:p>
-            <a:pPr marL="0" indent="0">
+            <a:pPr indent="0" marL="0">
               <a:buNone/>
             </a:pPr>
             <a:r>
@@ -10715,7 +10622,7 @@
           <a:bodyPr wrap="square" lIns="0" tIns="0" rIns="0" bIns="0" rtlCol="0" anchor="ctr"/>
           <a:lstStyle/>
           <a:p>
-            <a:pPr marL="0" indent="0">
+            <a:pPr indent="0" marL="0">
               <a:buNone/>
             </a:pPr>
             <a:r>
@@ -10754,7 +10661,7 @@
           <a:bodyPr wrap="square" lIns="0" tIns="0" rIns="0" bIns="0" rtlCol="0" anchor="ctr"/>
           <a:lstStyle/>
           <a:p>
-            <a:pPr marL="0" indent="0">
+            <a:pPr indent="0" marL="0">
               <a:buNone/>
             </a:pPr>
             <a:r>
@@ -10793,7 +10700,7 @@
           <a:bodyPr wrap="square" lIns="0" tIns="0" rIns="0" bIns="0" rtlCol="0" anchor="ctr"/>
           <a:lstStyle/>
           <a:p>
-            <a:pPr marL="0" indent="0">
+            <a:pPr indent="0" marL="0">
               <a:buNone/>
             </a:pPr>
             <a:r>
@@ -10832,7 +10739,7 @@
           <a:bodyPr wrap="square" lIns="0" tIns="0" rIns="0" bIns="0" rtlCol="0" anchor="ctr"/>
           <a:lstStyle/>
           <a:p>
-            <a:pPr marL="0" indent="0">
+            <a:pPr indent="0" marL="0">
               <a:buNone/>
             </a:pPr>
             <a:r>
@@ -10871,7 +10778,7 @@
           <a:bodyPr wrap="square" lIns="0" tIns="0" rIns="0" bIns="0" rtlCol="0" anchor="ctr"/>
           <a:lstStyle/>
           <a:p>
-            <a:pPr marL="0" indent="0">
+            <a:pPr indent="0" marL="0">
               <a:buNone/>
             </a:pPr>
             <a:r>
@@ -10910,7 +10817,7 @@
           <a:bodyPr wrap="square" lIns="0" tIns="0" rIns="0" bIns="0" rtlCol="0" anchor="ctr"/>
           <a:lstStyle/>
           <a:p>
-            <a:pPr marL="0" indent="0">
+            <a:pPr indent="0" marL="0">
               <a:buNone/>
             </a:pPr>
             <a:r>
@@ -10949,7 +10856,7 @@
           <a:bodyPr wrap="square" lIns="0" tIns="0" rIns="0" bIns="0" rtlCol="0" anchor="ctr"/>
           <a:lstStyle/>
           <a:p>
-            <a:pPr marL="0" indent="0">
+            <a:pPr indent="0" marL="0">
               <a:buNone/>
             </a:pPr>
             <a:r>
@@ -10988,7 +10895,7 @@
           <a:bodyPr wrap="square" lIns="0" tIns="0" rIns="0" bIns="0" rtlCol="0" anchor="ctr"/>
           <a:lstStyle/>
           <a:p>
-            <a:pPr marL="0" indent="0">
+            <a:pPr indent="0" marL="0">
               <a:buNone/>
             </a:pPr>
             <a:r>
@@ -11027,7 +10934,7 @@
           <a:bodyPr wrap="square" lIns="0" tIns="0" rIns="0" bIns="0" rtlCol="0" anchor="ctr"/>
           <a:lstStyle/>
           <a:p>
-            <a:pPr marL="0" indent="0">
+            <a:pPr indent="0" marL="0">
               <a:buNone/>
             </a:pPr>
             <a:r>
@@ -11066,7 +10973,7 @@
           <a:bodyPr wrap="square" lIns="0" tIns="0" rIns="0" bIns="0" rtlCol="0" anchor="ctr"/>
           <a:lstStyle/>
           <a:p>
-            <a:pPr marL="0" indent="0">
+            <a:pPr indent="0" marL="0">
               <a:buNone/>
             </a:pPr>
             <a:r>
@@ -11105,7 +11012,7 @@
           <a:bodyPr wrap="square" lIns="0" tIns="0" rIns="0" bIns="0" rtlCol="0" anchor="ctr"/>
           <a:lstStyle/>
           <a:p>
-            <a:pPr marL="0" indent="0">
+            <a:pPr indent="0" marL="0">
               <a:buNone/>
             </a:pPr>
             <a:r>
@@ -11144,7 +11051,7 @@
           <a:bodyPr wrap="square" lIns="0" tIns="0" rIns="0" bIns="0" rtlCol="0" anchor="ctr"/>
           <a:lstStyle/>
           <a:p>
-            <a:pPr marL="0" indent="0">
+            <a:pPr indent="0" marL="0">
               <a:buNone/>
             </a:pPr>
             <a:r>
@@ -11183,7 +11090,7 @@
           <a:bodyPr wrap="square" lIns="0" tIns="0" rIns="0" bIns="0" rtlCol="0" anchor="ctr"/>
           <a:lstStyle/>
           <a:p>
-            <a:pPr marL="0" indent="0">
+            <a:pPr indent="0" marL="0">
               <a:buNone/>
             </a:pPr>
             <a:r>
@@ -11222,7 +11129,7 @@
           <a:bodyPr wrap="square" lIns="0" tIns="0" rIns="0" bIns="0" rtlCol="0" anchor="ctr"/>
           <a:lstStyle/>
           <a:p>
-            <a:pPr marL="0" indent="0">
+            <a:pPr indent="0" marL="0">
               <a:buNone/>
             </a:pPr>
             <a:r>
@@ -11261,7 +11168,7 @@
           <a:bodyPr wrap="square" lIns="0" tIns="0" rIns="0" bIns="0" rtlCol="0" anchor="ctr"/>
           <a:lstStyle/>
           <a:p>
-            <a:pPr marL="0" indent="0">
+            <a:pPr indent="0" marL="0">
               <a:buNone/>
             </a:pPr>
             <a:r>
@@ -11300,7 +11207,7 @@
           <a:bodyPr wrap="square" lIns="0" tIns="0" rIns="0" bIns="0" rtlCol="0" anchor="ctr"/>
           <a:lstStyle/>
           <a:p>
-            <a:pPr marL="0" indent="0">
+            <a:pPr indent="0" marL="0">
               <a:buNone/>
             </a:pPr>
             <a:r>
@@ -11339,7 +11246,7 @@
           <a:bodyPr wrap="square" lIns="0" tIns="0" rIns="0" bIns="0" rtlCol="0" anchor="ctr"/>
           <a:lstStyle/>
           <a:p>
-            <a:pPr marL="0" indent="0">
+            <a:pPr indent="0" marL="0">
               <a:buNone/>
             </a:pPr>
             <a:r>
@@ -11378,7 +11285,7 @@
           <a:bodyPr wrap="square" lIns="0" tIns="0" rIns="0" bIns="0" rtlCol="0" anchor="ctr"/>
           <a:lstStyle/>
           <a:p>
-            <a:pPr marL="0" indent="0">
+            <a:pPr indent="0" marL="0">
               <a:buNone/>
             </a:pPr>
             <a:r>
@@ -11417,7 +11324,7 @@
           <a:bodyPr wrap="square" lIns="0" tIns="0" rIns="0" bIns="0" rtlCol="0" anchor="ctr"/>
           <a:lstStyle/>
           <a:p>
-            <a:pPr marL="0" indent="0">
+            <a:pPr indent="0" marL="0">
               <a:buNone/>
             </a:pPr>
             <a:r>
@@ -11459,20 +11366,13 @@
             <a:prstDash val="solid"/>
           </a:ln>
           <a:effectLst>
-            <a:outerShdw blurRad="101600" dist="12700" dir="5400000" algn="bl" rotWithShape="0">
+            <a:outerShdw sx="100000" sy="100000" kx="0" ky="0" algn="bl" rotWithShape="0" blurRad="101600" dist="12700" dir="5400000">
               <a:srgbClr val="94A3B8">
                 <a:alpha val="12000"/>
               </a:srgbClr>
             </a:outerShdw>
           </a:effectLst>
         </p:spPr>
-        <p:txBody>
-          <a:bodyPr/>
-          <a:lstStyle/>
-          <a:p>
-            <a:endParaRPr lang="en-US"/>
-          </a:p>
-        </p:txBody>
       </p:sp>
       <p:sp>
         <p:nvSpPr>
@@ -11498,13 +11398,6 @@
             <a:prstDash val="solid"/>
           </a:ln>
         </p:spPr>
-        <p:txBody>
-          <a:bodyPr/>
-          <a:lstStyle/>
-          <a:p>
-            <a:endParaRPr lang="en-US"/>
-          </a:p>
-        </p:txBody>
       </p:sp>
       <p:sp>
         <p:nvSpPr>
@@ -11527,7 +11420,7 @@
           <a:bodyPr wrap="square" lIns="0" tIns="0" rIns="0" bIns="0" rtlCol="0" anchor="ctr"/>
           <a:lstStyle/>
           <a:p>
-            <a:pPr marL="0" indent="0">
+            <a:pPr indent="0" marL="0">
               <a:buNone/>
             </a:pPr>
             <a:r>
@@ -11566,7 +11459,7 @@
           <a:bodyPr wrap="square" lIns="0" tIns="0" rIns="0" bIns="0" rtlCol="0" anchor="ctr"/>
           <a:lstStyle/>
           <a:p>
-            <a:pPr marL="0" indent="0">
+            <a:pPr indent="0" marL="0">
               <a:buNone/>
             </a:pPr>
             <a:r>
@@ -11583,7 +11476,7 @@
             <a:endParaRPr lang="en-US" sz="1000" dirty="0"/>
           </a:p>
           <a:p>
-            <a:pPr marL="0" indent="0">
+            <a:pPr indent="0" marL="0">
               <a:buNone/>
             </a:pPr>
             <a:r>
@@ -11600,7 +11493,7 @@
             <a:endParaRPr lang="en-US" sz="1000" dirty="0"/>
           </a:p>
           <a:p>
-            <a:pPr marL="0" indent="0">
+            <a:pPr indent="0" marL="0">
               <a:buNone/>
             </a:pPr>
             <a:r>
@@ -11617,7 +11510,7 @@
             <a:endParaRPr lang="en-US" sz="1000" dirty="0"/>
           </a:p>
           <a:p>
-            <a:pPr marL="0" indent="0">
+            <a:pPr indent="0" marL="0">
               <a:buNone/>
             </a:pPr>
             <a:r>
@@ -11634,7 +11527,7 @@
             <a:endParaRPr lang="en-US" sz="1000" dirty="0"/>
           </a:p>
           <a:p>
-            <a:pPr marL="0" indent="0">
+            <a:pPr indent="0" marL="0">
               <a:buNone/>
             </a:pPr>
             <a:r>
@@ -11651,7 +11544,7 @@
             <a:endParaRPr lang="en-US" sz="1000" dirty="0"/>
           </a:p>
           <a:p>
-            <a:pPr marL="0" indent="0">
+            <a:pPr indent="0" marL="0">
               <a:buNone/>
             </a:pPr>
             <a:r>
@@ -11668,7 +11561,7 @@
             <a:endParaRPr lang="en-US" sz="1000" dirty="0"/>
           </a:p>
           <a:p>
-            <a:pPr marL="0" indent="0">
+            <a:pPr indent="0" marL="0">
               <a:buNone/>
             </a:pPr>
             <a:r>
@@ -11685,7 +11578,7 @@
             <a:endParaRPr lang="en-US" sz="1000" dirty="0"/>
           </a:p>
           <a:p>
-            <a:pPr marL="0" indent="0">
+            <a:pPr indent="0" marL="0">
               <a:buNone/>
             </a:pPr>
             <a:r>
@@ -11702,7 +11595,7 @@
             <a:endParaRPr lang="en-US" sz="1000" dirty="0"/>
           </a:p>
           <a:p>
-            <a:pPr marL="0" indent="0">
+            <a:pPr indent="0" marL="0">
               <a:buNone/>
             </a:pPr>
             <a:r>
@@ -11719,7 +11612,7 @@
             <a:endParaRPr lang="en-US" sz="1000" dirty="0"/>
           </a:p>
           <a:p>
-            <a:pPr marL="0" indent="0">
+            <a:pPr indent="0" marL="0">
               <a:buNone/>
             </a:pPr>
             <a:r>
@@ -11736,7 +11629,7 @@
             <a:endParaRPr lang="en-US" sz="1000" dirty="0"/>
           </a:p>
           <a:p>
-            <a:pPr marL="0" indent="0">
+            <a:pPr indent="0" marL="0">
               <a:buNone/>
             </a:pPr>
             <a:r>
@@ -11775,7 +11668,7 @@
           <a:bodyPr wrap="square" lIns="0" tIns="0" rIns="0" bIns="0" rtlCol="0" anchor="ctr"/>
           <a:lstStyle/>
           <a:p>
-            <a:pPr marL="0" indent="0" algn="l">
+            <a:pPr algn="l" indent="0" marL="0">
               <a:buNone/>
             </a:pPr>
             <a:r>
@@ -11814,7 +11707,7 @@
           <a:bodyPr wrap="square" lIns="0" tIns="0" rIns="0" bIns="0" rtlCol="0" anchor="ctr"/>
           <a:lstStyle/>
           <a:p>
-            <a:pPr marL="0" indent="0" algn="r">
+            <a:pPr algn="r" indent="0" marL="0">
               <a:buNone/>
             </a:pPr>
             <a:r>
@@ -11848,7 +11741,6 @@
         <a:solidFill>
           <a:srgbClr val="FFFFFF"/>
         </a:solidFill>
-        <a:effectLst/>
       </p:bgPr>
     </p:bg>
     <p:spTree>
@@ -11886,11 +11778,11 @@
           <a:bodyPr wrap="square" lIns="0" tIns="0" rIns="0" bIns="0" rtlCol="0" anchor="ctr"/>
           <a:lstStyle/>
           <a:p>
-            <a:pPr marL="0" indent="0">
-              <a:buNone/>
-            </a:pPr>
-            <a:r>
-              <a:rPr lang="en-US" sz="1100" b="1" kern="0" spc="400" dirty="0">
+            <a:pPr indent="0" marL="0">
+              <a:buNone/>
+            </a:pPr>
+            <a:r>
+              <a:rPr lang="en-US" sz="1100" b="1" spc="400" kern="0" dirty="0">
                 <a:solidFill>
                   <a:srgbClr val="1C7293"/>
                 </a:solidFill>
@@ -11925,7 +11817,7 @@
           <a:bodyPr wrap="square" lIns="0" tIns="0" rIns="0" bIns="0" rtlCol="0" anchor="ctr"/>
           <a:lstStyle/>
           <a:p>
-            <a:pPr marL="0" indent="0">
+            <a:pPr indent="0" marL="0">
               <a:buNone/>
             </a:pPr>
             <a:r>
@@ -11967,20 +11859,13 @@
             <a:prstDash val="solid"/>
           </a:ln>
           <a:effectLst>
-            <a:outerShdw blurRad="101600" dist="12700" dir="5400000" algn="bl" rotWithShape="0">
+            <a:outerShdw sx="100000" sy="100000" kx="0" ky="0" algn="bl" rotWithShape="0" blurRad="101600" dist="12700" dir="5400000">
               <a:srgbClr val="94A3B8">
                 <a:alpha val="12000"/>
               </a:srgbClr>
             </a:outerShdw>
           </a:effectLst>
         </p:spPr>
-        <p:txBody>
-          <a:bodyPr/>
-          <a:lstStyle/>
-          <a:p>
-            <a:endParaRPr lang="en-US"/>
-          </a:p>
-        </p:txBody>
       </p:sp>
       <p:sp>
         <p:nvSpPr>
@@ -12006,13 +11891,6 @@
             <a:prstDash val="solid"/>
           </a:ln>
         </p:spPr>
-        <p:txBody>
-          <a:bodyPr/>
-          <a:lstStyle/>
-          <a:p>
-            <a:endParaRPr lang="en-US"/>
-          </a:p>
-        </p:txBody>
       </p:sp>
       <p:sp>
         <p:nvSpPr>
@@ -12035,7 +11913,7 @@
           <a:bodyPr wrap="square" lIns="0" tIns="0" rIns="0" bIns="0" rtlCol="0" anchor="ctr"/>
           <a:lstStyle/>
           <a:p>
-            <a:pPr marL="0" indent="0">
+            <a:pPr indent="0" marL="0">
               <a:buNone/>
             </a:pPr>
             <a:r>
@@ -12074,7 +11952,7 @@
           <a:bodyPr wrap="square" lIns="0" tIns="0" rIns="0" bIns="0" rtlCol="0" anchor="ctr"/>
           <a:lstStyle/>
           <a:p>
-            <a:pPr marL="0" indent="0">
+            <a:pPr indent="0" marL="0">
               <a:buNone/>
             </a:pPr>
             <a:r>
@@ -12116,20 +11994,13 @@
             <a:prstDash val="solid"/>
           </a:ln>
           <a:effectLst>
-            <a:outerShdw blurRad="101600" dist="12700" dir="5400000" algn="bl" rotWithShape="0">
+            <a:outerShdw sx="100000" sy="100000" kx="0" ky="0" algn="bl" rotWithShape="0" blurRad="101600" dist="12700" dir="5400000">
               <a:srgbClr val="94A3B8">
                 <a:alpha val="12000"/>
               </a:srgbClr>
             </a:outerShdw>
           </a:effectLst>
         </p:spPr>
-        <p:txBody>
-          <a:bodyPr/>
-          <a:lstStyle/>
-          <a:p>
-            <a:endParaRPr lang="en-US"/>
-          </a:p>
-        </p:txBody>
       </p:sp>
       <p:sp>
         <p:nvSpPr>
@@ -12155,13 +12026,6 @@
             <a:prstDash val="solid"/>
           </a:ln>
         </p:spPr>
-        <p:txBody>
-          <a:bodyPr/>
-          <a:lstStyle/>
-          <a:p>
-            <a:endParaRPr lang="en-US"/>
-          </a:p>
-        </p:txBody>
       </p:sp>
       <p:sp>
         <p:nvSpPr>
@@ -12184,7 +12048,7 @@
           <a:bodyPr wrap="square" lIns="0" tIns="0" rIns="0" bIns="0" rtlCol="0" anchor="ctr"/>
           <a:lstStyle/>
           <a:p>
-            <a:pPr marL="0" indent="0">
+            <a:pPr indent="0" marL="0">
               <a:buNone/>
             </a:pPr>
             <a:r>
@@ -12223,7 +12087,7 @@
           <a:bodyPr wrap="square" lIns="0" tIns="0" rIns="0" bIns="0" rtlCol="0" anchor="ctr"/>
           <a:lstStyle/>
           <a:p>
-            <a:pPr marL="0" indent="0">
+            <a:pPr indent="0" marL="0">
               <a:buNone/>
             </a:pPr>
             <a:r>
@@ -12265,20 +12129,13 @@
             <a:prstDash val="solid"/>
           </a:ln>
           <a:effectLst>
-            <a:outerShdw blurRad="101600" dist="12700" dir="5400000" algn="bl" rotWithShape="0">
+            <a:outerShdw sx="100000" sy="100000" kx="0" ky="0" algn="bl" rotWithShape="0" blurRad="101600" dist="12700" dir="5400000">
               <a:srgbClr val="94A3B8">
                 <a:alpha val="12000"/>
               </a:srgbClr>
             </a:outerShdw>
           </a:effectLst>
         </p:spPr>
-        <p:txBody>
-          <a:bodyPr/>
-          <a:lstStyle/>
-          <a:p>
-            <a:endParaRPr lang="en-US"/>
-          </a:p>
-        </p:txBody>
       </p:sp>
       <p:sp>
         <p:nvSpPr>
@@ -12304,13 +12161,6 @@
             <a:prstDash val="solid"/>
           </a:ln>
         </p:spPr>
-        <p:txBody>
-          <a:bodyPr/>
-          <a:lstStyle/>
-          <a:p>
-            <a:endParaRPr lang="en-US"/>
-          </a:p>
-        </p:txBody>
       </p:sp>
       <p:sp>
         <p:nvSpPr>
@@ -12333,7 +12183,7 @@
           <a:bodyPr wrap="square" lIns="0" tIns="0" rIns="0" bIns="0" rtlCol="0" anchor="ctr"/>
           <a:lstStyle/>
           <a:p>
-            <a:pPr marL="0" indent="0">
+            <a:pPr indent="0" marL="0">
               <a:buNone/>
             </a:pPr>
             <a:r>
@@ -12372,7 +12222,7 @@
           <a:bodyPr wrap="square" lIns="0" tIns="0" rIns="0" bIns="0" rtlCol="0" anchor="ctr"/>
           <a:lstStyle/>
           <a:p>
-            <a:pPr marL="0" indent="0">
+            <a:pPr indent="0" marL="0">
               <a:buNone/>
             </a:pPr>
             <a:r>
@@ -12414,20 +12264,13 @@
             <a:prstDash val="solid"/>
           </a:ln>
           <a:effectLst>
-            <a:outerShdw blurRad="101600" dist="12700" dir="5400000" algn="bl" rotWithShape="0">
+            <a:outerShdw sx="100000" sy="100000" kx="0" ky="0" algn="bl" rotWithShape="0" blurRad="101600" dist="12700" dir="5400000">
               <a:srgbClr val="94A3B8">
                 <a:alpha val="12000"/>
               </a:srgbClr>
             </a:outerShdw>
           </a:effectLst>
         </p:spPr>
-        <p:txBody>
-          <a:bodyPr/>
-          <a:lstStyle/>
-          <a:p>
-            <a:endParaRPr lang="en-US"/>
-          </a:p>
-        </p:txBody>
       </p:sp>
       <p:sp>
         <p:nvSpPr>
@@ -12453,13 +12296,6 @@
             <a:prstDash val="solid"/>
           </a:ln>
         </p:spPr>
-        <p:txBody>
-          <a:bodyPr/>
-          <a:lstStyle/>
-          <a:p>
-            <a:endParaRPr lang="en-US"/>
-          </a:p>
-        </p:txBody>
       </p:sp>
       <p:sp>
         <p:nvSpPr>
@@ -12482,7 +12318,7 @@
           <a:bodyPr wrap="square" lIns="0" tIns="0" rIns="0" bIns="0" rtlCol="0" anchor="ctr"/>
           <a:lstStyle/>
           <a:p>
-            <a:pPr marL="0" indent="0">
+            <a:pPr indent="0" marL="0">
               <a:buNone/>
             </a:pPr>
             <a:r>
@@ -12521,7 +12357,7 @@
           <a:bodyPr wrap="square" lIns="0" tIns="0" rIns="0" bIns="0" rtlCol="0" anchor="ctr"/>
           <a:lstStyle/>
           <a:p>
-            <a:pPr marL="0" indent="0">
+            <a:pPr indent="0" marL="0">
               <a:buNone/>
             </a:pPr>
             <a:r>
@@ -12560,7 +12396,7 @@
           <a:bodyPr wrap="square" lIns="0" tIns="0" rIns="0" bIns="0" rtlCol="0" anchor="ctr"/>
           <a:lstStyle/>
           <a:p>
-            <a:pPr marL="0" indent="0" algn="r">
+            <a:pPr algn="r" indent="0" marL="0">
               <a:buNone/>
             </a:pPr>
             <a:r>
@@ -12594,7 +12430,6 @@
         <a:solidFill>
           <a:srgbClr val="FFFFFF"/>
         </a:solidFill>
-        <a:effectLst/>
       </p:bgPr>
     </p:bg>
     <p:spTree>
@@ -12632,11 +12467,11 @@
           <a:bodyPr wrap="square" lIns="0" tIns="0" rIns="0" bIns="0" rtlCol="0" anchor="ctr"/>
           <a:lstStyle/>
           <a:p>
-            <a:pPr marL="0" indent="0">
-              <a:buNone/>
-            </a:pPr>
-            <a:r>
-              <a:rPr lang="en-US" sz="1100" b="1" kern="0" spc="400" dirty="0">
+            <a:pPr indent="0" marL="0">
+              <a:buNone/>
+            </a:pPr>
+            <a:r>
+              <a:rPr lang="en-US" sz="1100" b="1" spc="400" kern="0" dirty="0">
                 <a:solidFill>
                   <a:srgbClr val="1C7293"/>
                 </a:solidFill>
@@ -12671,7 +12506,7 @@
           <a:bodyPr wrap="square" lIns="0" tIns="0" rIns="0" bIns="0" rtlCol="0" anchor="ctr"/>
           <a:lstStyle/>
           <a:p>
-            <a:pPr marL="0" indent="0">
+            <a:pPr indent="0" marL="0">
               <a:buNone/>
             </a:pPr>
             <a:r>
@@ -12713,13 +12548,6 @@
             <a:prstDash val="solid"/>
           </a:ln>
         </p:spPr>
-        <p:txBody>
-          <a:bodyPr/>
-          <a:lstStyle/>
-          <a:p>
-            <a:endParaRPr lang="en-US"/>
-          </a:p>
-        </p:txBody>
       </p:sp>
       <p:sp>
         <p:nvSpPr>
@@ -12742,7 +12570,7 @@
           <a:bodyPr wrap="square" lIns="0" tIns="0" rIns="0" bIns="0" rtlCol="0" anchor="ctr"/>
           <a:lstStyle/>
           <a:p>
-            <a:pPr marL="0" indent="0" algn="ctr">
+            <a:pPr algn="ctr" indent="0" marL="0">
               <a:buNone/>
             </a:pPr>
             <a:r>
@@ -12781,7 +12609,7 @@
           <a:bodyPr wrap="square" lIns="0" tIns="0" rIns="0" bIns="0" rtlCol="0" anchor="ctr"/>
           <a:lstStyle/>
           <a:p>
-            <a:pPr marL="0" indent="0">
+            <a:pPr indent="0" marL="0">
               <a:buNone/>
             </a:pPr>
             <a:r>
@@ -12823,13 +12651,6 @@
             <a:prstDash val="solid"/>
           </a:ln>
         </p:spPr>
-        <p:txBody>
-          <a:bodyPr/>
-          <a:lstStyle/>
-          <a:p>
-            <a:endParaRPr lang="en-US"/>
-          </a:p>
-        </p:txBody>
       </p:sp>
       <p:sp>
         <p:nvSpPr>
@@ -12852,7 +12673,7 @@
           <a:bodyPr wrap="square" lIns="0" tIns="0" rIns="0" bIns="0" rtlCol="0" anchor="ctr"/>
           <a:lstStyle/>
           <a:p>
-            <a:pPr marL="0" indent="0" algn="ctr">
+            <a:pPr algn="ctr" indent="0" marL="0">
               <a:buNone/>
             </a:pPr>
             <a:r>
@@ -12891,7 +12712,7 @@
           <a:bodyPr wrap="square" lIns="0" tIns="0" rIns="0" bIns="0" rtlCol="0" anchor="ctr"/>
           <a:lstStyle/>
           <a:p>
-            <a:pPr marL="0" indent="0">
+            <a:pPr indent="0" marL="0">
               <a:buNone/>
             </a:pPr>
             <a:r>
@@ -12933,13 +12754,6 @@
             <a:prstDash val="solid"/>
           </a:ln>
         </p:spPr>
-        <p:txBody>
-          <a:bodyPr/>
-          <a:lstStyle/>
-          <a:p>
-            <a:endParaRPr lang="en-US"/>
-          </a:p>
-        </p:txBody>
       </p:sp>
       <p:sp>
         <p:nvSpPr>
@@ -12962,7 +12776,7 @@
           <a:bodyPr wrap="square" lIns="0" tIns="0" rIns="0" bIns="0" rtlCol="0" anchor="ctr"/>
           <a:lstStyle/>
           <a:p>
-            <a:pPr marL="0" indent="0" algn="ctr">
+            <a:pPr algn="ctr" indent="0" marL="0">
               <a:buNone/>
             </a:pPr>
             <a:r>
@@ -13001,7 +12815,7 @@
           <a:bodyPr wrap="square" lIns="0" tIns="0" rIns="0" bIns="0" rtlCol="0" anchor="ctr"/>
           <a:lstStyle/>
           <a:p>
-            <a:pPr marL="0" indent="0">
+            <a:pPr indent="0" marL="0">
               <a:buNone/>
             </a:pPr>
             <a:r>
@@ -13043,13 +12857,6 @@
             <a:prstDash val="solid"/>
           </a:ln>
         </p:spPr>
-        <p:txBody>
-          <a:bodyPr/>
-          <a:lstStyle/>
-          <a:p>
-            <a:endParaRPr lang="en-US"/>
-          </a:p>
-        </p:txBody>
       </p:sp>
       <p:sp>
         <p:nvSpPr>
@@ -13072,7 +12879,7 @@
           <a:bodyPr wrap="square" lIns="0" tIns="0" rIns="0" bIns="0" rtlCol="0" anchor="ctr"/>
           <a:lstStyle/>
           <a:p>
-            <a:pPr marL="0" indent="0" algn="ctr">
+            <a:pPr algn="ctr" indent="0" marL="0">
               <a:buNone/>
             </a:pPr>
             <a:r>
@@ -13111,7 +12918,7 @@
           <a:bodyPr wrap="square" lIns="0" tIns="0" rIns="0" bIns="0" rtlCol="0" anchor="ctr"/>
           <a:lstStyle/>
           <a:p>
-            <a:pPr marL="0" indent="0">
+            <a:pPr indent="0" marL="0">
               <a:buNone/>
             </a:pPr>
             <a:r>
@@ -13153,13 +12960,6 @@
             <a:prstDash val="solid"/>
           </a:ln>
         </p:spPr>
-        <p:txBody>
-          <a:bodyPr/>
-          <a:lstStyle/>
-          <a:p>
-            <a:endParaRPr lang="en-US"/>
-          </a:p>
-        </p:txBody>
       </p:sp>
       <p:sp>
         <p:nvSpPr>
@@ -13182,7 +12982,7 @@
           <a:bodyPr wrap="square" lIns="0" tIns="0" rIns="0" bIns="0" rtlCol="0" anchor="ctr"/>
           <a:lstStyle/>
           <a:p>
-            <a:pPr marL="0" indent="0" algn="ctr">
+            <a:pPr algn="ctr" indent="0" marL="0">
               <a:buNone/>
             </a:pPr>
             <a:r>
@@ -13221,7 +13021,7 @@
           <a:bodyPr wrap="square" lIns="0" tIns="0" rIns="0" bIns="0" rtlCol="0" anchor="ctr"/>
           <a:lstStyle/>
           <a:p>
-            <a:pPr marL="0" indent="0">
+            <a:pPr indent="0" marL="0">
               <a:buNone/>
             </a:pPr>
             <a:r>
@@ -13263,13 +13063,6 @@
             <a:prstDash val="solid"/>
           </a:ln>
         </p:spPr>
-        <p:txBody>
-          <a:bodyPr/>
-          <a:lstStyle/>
-          <a:p>
-            <a:endParaRPr lang="en-US"/>
-          </a:p>
-        </p:txBody>
       </p:sp>
       <p:sp>
         <p:nvSpPr>
@@ -13292,7 +13085,7 @@
           <a:bodyPr wrap="square" lIns="0" tIns="0" rIns="0" bIns="0" rtlCol="0" anchor="ctr"/>
           <a:lstStyle/>
           <a:p>
-            <a:pPr marL="0" indent="0" algn="ctr">
+            <a:pPr algn="ctr" indent="0" marL="0">
               <a:buNone/>
             </a:pPr>
             <a:r>
@@ -13331,7 +13124,7 @@
           <a:bodyPr wrap="square" lIns="0" tIns="0" rIns="0" bIns="0" rtlCol="0" anchor="ctr"/>
           <a:lstStyle/>
           <a:p>
-            <a:pPr marL="0" indent="0">
+            <a:pPr indent="0" marL="0">
               <a:buNone/>
             </a:pPr>
             <a:r>
@@ -13370,7 +13163,7 @@
           <a:bodyPr wrap="square" lIns="0" tIns="0" rIns="0" bIns="0" rtlCol="0" anchor="ctr"/>
           <a:lstStyle/>
           <a:p>
-            <a:pPr marL="0" indent="0" algn="l">
+            <a:pPr algn="l" indent="0" marL="0">
               <a:buNone/>
             </a:pPr>
             <a:r>
@@ -13409,7 +13202,7 @@
           <a:bodyPr wrap="square" lIns="0" tIns="0" rIns="0" bIns="0" rtlCol="0" anchor="ctr"/>
           <a:lstStyle/>
           <a:p>
-            <a:pPr marL="0" indent="0" algn="r">
+            <a:pPr algn="r" indent="0" marL="0">
               <a:buNone/>
             </a:pPr>
             <a:r>
@@ -13443,7 +13236,6 @@
         <a:solidFill>
           <a:srgbClr val="21295C"/>
         </a:solidFill>
-        <a:effectLst/>
       </p:bgPr>
     </p:bg>
     <p:spTree>
@@ -13481,11 +13273,11 @@
           <a:bodyPr wrap="square" lIns="0" tIns="0" rIns="0" bIns="0" rtlCol="0" anchor="ctr"/>
           <a:lstStyle/>
           <a:p>
-            <a:pPr marL="0" indent="0">
-              <a:buNone/>
-            </a:pPr>
-            <a:r>
-              <a:rPr lang="en-US" sz="1100" b="1" kern="0" spc="400" dirty="0">
+            <a:pPr indent="0" marL="0">
+              <a:buNone/>
+            </a:pPr>
+            <a:r>
+              <a:rPr lang="en-US" sz="1100" b="1" spc="400" kern="0" dirty="0">
                 <a:solidFill>
                   <a:srgbClr val="1C7293"/>
                 </a:solidFill>
@@ -13520,7 +13312,7 @@
           <a:bodyPr wrap="square" lIns="0" tIns="0" rIns="0" bIns="0" rtlCol="0" anchor="ctr"/>
           <a:lstStyle/>
           <a:p>
-            <a:pPr marL="0" indent="0">
+            <a:pPr indent="0" marL="0">
               <a:buNone/>
             </a:pPr>
             <a:r>
@@ -13562,13 +13354,6 @@
             <a:prstDash val="solid"/>
           </a:ln>
         </p:spPr>
-        <p:txBody>
-          <a:bodyPr/>
-          <a:lstStyle/>
-          <a:p>
-            <a:endParaRPr lang="en-US"/>
-          </a:p>
-        </p:txBody>
       </p:sp>
       <p:sp>
         <p:nvSpPr>
@@ -13591,7 +13376,7 @@
           <a:bodyPr wrap="square" lIns="0" tIns="0" rIns="0" bIns="0" rtlCol="0" anchor="ctr"/>
           <a:lstStyle/>
           <a:p>
-            <a:pPr marL="0" indent="0" algn="ctr">
+            <a:pPr algn="ctr" indent="0" marL="0">
               <a:buNone/>
             </a:pPr>
             <a:r>
@@ -13630,7 +13415,7 @@
           <a:bodyPr wrap="square" lIns="0" tIns="0" rIns="0" bIns="0" rtlCol="0" anchor="ctr"/>
           <a:lstStyle/>
           <a:p>
-            <a:pPr marL="0" indent="0">
+            <a:pPr indent="0" marL="0">
               <a:buNone/>
             </a:pPr>
             <a:r>
@@ -13672,13 +13457,6 @@
             <a:prstDash val="solid"/>
           </a:ln>
         </p:spPr>
-        <p:txBody>
-          <a:bodyPr/>
-          <a:lstStyle/>
-          <a:p>
-            <a:endParaRPr lang="en-US"/>
-          </a:p>
-        </p:txBody>
       </p:sp>
       <p:sp>
         <p:nvSpPr>
@@ -13701,7 +13479,7 @@
           <a:bodyPr wrap="square" lIns="0" tIns="0" rIns="0" bIns="0" rtlCol="0" anchor="ctr"/>
           <a:lstStyle/>
           <a:p>
-            <a:pPr marL="0" indent="0" algn="ctr">
+            <a:pPr algn="ctr" indent="0" marL="0">
               <a:buNone/>
             </a:pPr>
             <a:r>
@@ -13740,7 +13518,7 @@
           <a:bodyPr wrap="square" lIns="0" tIns="0" rIns="0" bIns="0" rtlCol="0" anchor="ctr"/>
           <a:lstStyle/>
           <a:p>
-            <a:pPr marL="0" indent="0">
+            <a:pPr indent="0" marL="0">
               <a:buNone/>
             </a:pPr>
             <a:r>
@@ -13782,13 +13560,6 @@
             <a:prstDash val="solid"/>
           </a:ln>
         </p:spPr>
-        <p:txBody>
-          <a:bodyPr/>
-          <a:lstStyle/>
-          <a:p>
-            <a:endParaRPr lang="en-US"/>
-          </a:p>
-        </p:txBody>
       </p:sp>
       <p:sp>
         <p:nvSpPr>
@@ -13811,7 +13582,7 @@
           <a:bodyPr wrap="square" lIns="0" tIns="0" rIns="0" bIns="0" rtlCol="0" anchor="ctr"/>
           <a:lstStyle/>
           <a:p>
-            <a:pPr marL="0" indent="0" algn="ctr">
+            <a:pPr algn="ctr" indent="0" marL="0">
               <a:buNone/>
             </a:pPr>
             <a:r>
@@ -13850,7 +13621,7 @@
           <a:bodyPr wrap="square" lIns="0" tIns="0" rIns="0" bIns="0" rtlCol="0" anchor="ctr"/>
           <a:lstStyle/>
           <a:p>
-            <a:pPr marL="0" indent="0">
+            <a:pPr indent="0" marL="0">
               <a:buNone/>
             </a:pPr>
             <a:r>
@@ -13892,13 +13663,6 @@
             <a:prstDash val="solid"/>
           </a:ln>
         </p:spPr>
-        <p:txBody>
-          <a:bodyPr/>
-          <a:lstStyle/>
-          <a:p>
-            <a:endParaRPr lang="en-US"/>
-          </a:p>
-        </p:txBody>
       </p:sp>
       <p:sp>
         <p:nvSpPr>
@@ -13921,7 +13685,7 @@
           <a:bodyPr wrap="square" lIns="0" tIns="0" rIns="0" bIns="0" rtlCol="0" anchor="ctr"/>
           <a:lstStyle/>
           <a:p>
-            <a:pPr marL="0" indent="0" algn="ctr">
+            <a:pPr algn="ctr" indent="0" marL="0">
               <a:buNone/>
             </a:pPr>
             <a:r>
@@ -13960,7 +13724,7 @@
           <a:bodyPr wrap="square" lIns="0" tIns="0" rIns="0" bIns="0" rtlCol="0" anchor="ctr"/>
           <a:lstStyle/>
           <a:p>
-            <a:pPr marL="0" indent="0">
+            <a:pPr indent="0" marL="0">
               <a:buNone/>
             </a:pPr>
             <a:r>
@@ -14002,13 +13766,6 @@
             <a:prstDash val="solid"/>
           </a:ln>
         </p:spPr>
-        <p:txBody>
-          <a:bodyPr/>
-          <a:lstStyle/>
-          <a:p>
-            <a:endParaRPr lang="en-US"/>
-          </a:p>
-        </p:txBody>
       </p:sp>
       <p:sp>
         <p:nvSpPr>
@@ -14031,11 +13788,11 @@
           <a:bodyPr wrap="square" lIns="0" tIns="0" rIns="0" bIns="0" rtlCol="0" anchor="ctr"/>
           <a:lstStyle/>
           <a:p>
-            <a:pPr marL="0" indent="0">
-              <a:buNone/>
-            </a:pPr>
-            <a:r>
-              <a:rPr lang="en-US" sz="2600" b="1" dirty="0" err="1">
+            <a:pPr indent="0" marL="0">
+              <a:buNone/>
+            </a:pPr>
+            <a:r>
+              <a:rPr lang="en-US" sz="2600" b="1" dirty="0">
                 <a:solidFill>
                   <a:srgbClr val="FFFFFF"/>
                 </a:solidFill>
@@ -14043,62 +13800,7 @@
                 <a:ea typeface="Trebuchet MS" pitchFamily="34" charset="-122"/>
                 <a:cs typeface="Trebuchet MS" pitchFamily="34" charset="-120"/>
               </a:rPr>
-              <a:t>Vielen</a:t>
-            </a:r>
-            <a:r>
-              <a:rPr lang="en-US" sz="2600" b="1" dirty="0">
-                <a:solidFill>
-                  <a:srgbClr val="FFFFFF"/>
-                </a:solidFill>
-                <a:latin typeface="Trebuchet MS" pitchFamily="34" charset="0"/>
-                <a:ea typeface="Trebuchet MS" pitchFamily="34" charset="-122"/>
-                <a:cs typeface="Trebuchet MS" pitchFamily="34" charset="-120"/>
-              </a:rPr>
-              <a:t> Dank für </a:t>
-            </a:r>
-            <a:r>
-              <a:rPr lang="en-US" sz="2600" b="1" dirty="0" err="1">
-                <a:solidFill>
-                  <a:srgbClr val="FFFFFF"/>
-                </a:solidFill>
-                <a:latin typeface="Trebuchet MS" pitchFamily="34" charset="0"/>
-                <a:ea typeface="Trebuchet MS" pitchFamily="34" charset="-122"/>
-                <a:cs typeface="Trebuchet MS" pitchFamily="34" charset="-120"/>
-              </a:rPr>
-              <a:t>eure</a:t>
-            </a:r>
-            <a:r>
-              <a:rPr lang="en-US" sz="2600" b="1" dirty="0">
-                <a:solidFill>
-                  <a:srgbClr val="FFFFFF"/>
-                </a:solidFill>
-                <a:latin typeface="Trebuchet MS" pitchFamily="34" charset="0"/>
-                <a:ea typeface="Trebuchet MS" pitchFamily="34" charset="-122"/>
-                <a:cs typeface="Trebuchet MS" pitchFamily="34" charset="-120"/>
-              </a:rPr>
-              <a:t> </a:t>
-            </a:r>
-            <a:r>
-              <a:rPr lang="en-US" sz="2600" b="1" dirty="0" err="1">
-                <a:solidFill>
-                  <a:srgbClr val="FFFFFF"/>
-                </a:solidFill>
-                <a:latin typeface="Trebuchet MS" pitchFamily="34" charset="0"/>
-                <a:ea typeface="Trebuchet MS" pitchFamily="34" charset="-122"/>
-                <a:cs typeface="Trebuchet MS" pitchFamily="34" charset="-120"/>
-              </a:rPr>
-              <a:t>Aufmerksamkeit</a:t>
-            </a:r>
-            <a:r>
-              <a:rPr lang="en-US" sz="2600" b="1" dirty="0">
-                <a:solidFill>
-                  <a:srgbClr val="FFFFFF"/>
-                </a:solidFill>
-                <a:latin typeface="Trebuchet MS" pitchFamily="34" charset="0"/>
-                <a:ea typeface="Trebuchet MS" pitchFamily="34" charset="-122"/>
-                <a:cs typeface="Trebuchet MS" pitchFamily="34" charset="-120"/>
-              </a:rPr>
-              <a:t>!</a:t>
+              <a:t>Vielen Dank für eure Aufmerksamkeit!</a:t>
             </a:r>
             <a:endParaRPr lang="en-US" sz="2600" dirty="0"/>
           </a:p>
@@ -14125,7 +13827,7 @@
           <a:bodyPr wrap="square" lIns="0" tIns="0" rIns="0" bIns="0" rtlCol="0" anchor="ctr"/>
           <a:lstStyle/>
           <a:p>
-            <a:pPr marL="0" indent="0">
+            <a:pPr indent="0" marL="0">
               <a:buNone/>
             </a:pPr>
             <a:r>
@@ -14164,7 +13866,7 @@
           <a:bodyPr wrap="square" lIns="0" tIns="0" rIns="0" bIns="0" rtlCol="0" anchor="ctr"/>
           <a:lstStyle/>
           <a:p>
-            <a:pPr marL="0" indent="0" algn="l">
+            <a:pPr algn="l" indent="0" marL="0">
               <a:buNone/>
             </a:pPr>
             <a:r>
@@ -14203,7 +13905,7 @@
           <a:bodyPr wrap="square" lIns="0" tIns="0" rIns="0" bIns="0" rtlCol="0" anchor="ctr"/>
           <a:lstStyle/>
           <a:p>
-            <a:pPr marL="0" indent="0" algn="r">
+            <a:pPr algn="r" indent="0" marL="0">
               <a:buNone/>
             </a:pPr>
             <a:r>
@@ -14237,7 +13939,6 @@
         <a:solidFill>
           <a:srgbClr val="FFFFFF"/>
         </a:solidFill>
-        <a:effectLst/>
       </p:bgPr>
     </p:bg>
     <p:spTree>
@@ -14275,11 +13976,11 @@
           <a:bodyPr wrap="square" lIns="0" tIns="0" rIns="0" bIns="0" rtlCol="0" anchor="ctr"/>
           <a:lstStyle/>
           <a:p>
-            <a:pPr marL="0" indent="0">
-              <a:buNone/>
-            </a:pPr>
-            <a:r>
-              <a:rPr lang="en-US" sz="1100" b="1" kern="0" spc="400" dirty="0">
+            <a:pPr indent="0" marL="0">
+              <a:buNone/>
+            </a:pPr>
+            <a:r>
+              <a:rPr lang="en-US" sz="1100" b="1" spc="400" kern="0" dirty="0">
                 <a:solidFill>
                   <a:srgbClr val="1C7293"/>
                 </a:solidFill>
@@ -14314,7 +14015,7 @@
           <a:bodyPr wrap="square" lIns="0" tIns="0" rIns="0" bIns="0" rtlCol="0" anchor="ctr"/>
           <a:lstStyle/>
           <a:p>
-            <a:pPr marL="0" indent="0">
+            <a:pPr indent="0" marL="0">
               <a:buNone/>
             </a:pPr>
             <a:r>
@@ -14356,20 +14057,13 @@
             <a:prstDash val="solid"/>
           </a:ln>
           <a:effectLst>
-            <a:outerShdw blurRad="101600" dist="12700" dir="5400000" algn="bl" rotWithShape="0">
+            <a:outerShdw sx="100000" sy="100000" kx="0" ky="0" algn="bl" rotWithShape="0" blurRad="101600" dist="12700" dir="5400000">
               <a:srgbClr val="94A3B8">
                 <a:alpha val="12000"/>
               </a:srgbClr>
             </a:outerShdw>
           </a:effectLst>
         </p:spPr>
-        <p:txBody>
-          <a:bodyPr/>
-          <a:lstStyle/>
-          <a:p>
-            <a:endParaRPr lang="en-US"/>
-          </a:p>
-        </p:txBody>
       </p:sp>
       <p:sp>
         <p:nvSpPr>
@@ -14395,13 +14089,6 @@
             <a:prstDash val="solid"/>
           </a:ln>
         </p:spPr>
-        <p:txBody>
-          <a:bodyPr/>
-          <a:lstStyle/>
-          <a:p>
-            <a:endParaRPr lang="en-US"/>
-          </a:p>
-        </p:txBody>
       </p:sp>
       <p:sp>
         <p:nvSpPr>
@@ -14427,13 +14114,6 @@
             <a:prstDash val="solid"/>
           </a:ln>
         </p:spPr>
-        <p:txBody>
-          <a:bodyPr/>
-          <a:lstStyle/>
-          <a:p>
-            <a:endParaRPr lang="en-US"/>
-          </a:p>
-        </p:txBody>
       </p:sp>
       <p:sp>
         <p:nvSpPr>
@@ -14456,7 +14136,7 @@
           <a:bodyPr wrap="square" lIns="0" tIns="0" rIns="0" bIns="0" rtlCol="0" anchor="ctr"/>
           <a:lstStyle/>
           <a:p>
-            <a:pPr marL="0" indent="0" algn="ctr">
+            <a:pPr algn="ctr" indent="0" marL="0">
               <a:buNone/>
             </a:pPr>
             <a:r>
@@ -14495,7 +14175,7 @@
           <a:bodyPr wrap="square" lIns="0" tIns="0" rIns="0" bIns="0" rtlCol="0" anchor="ctr"/>
           <a:lstStyle/>
           <a:p>
-            <a:pPr marL="0" indent="0">
+            <a:pPr indent="0" marL="0">
               <a:buNone/>
             </a:pPr>
             <a:r>
@@ -14534,7 +14214,7 @@
           <a:bodyPr wrap="square" lIns="0" tIns="0" rIns="0" bIns="0" rtlCol="0" anchor="ctr"/>
           <a:lstStyle/>
           <a:p>
-            <a:pPr marL="0" indent="0">
+            <a:pPr indent="0" marL="0">
               <a:buNone/>
             </a:pPr>
             <a:r>
@@ -14576,20 +14256,13 @@
             <a:prstDash val="solid"/>
           </a:ln>
           <a:effectLst>
-            <a:outerShdw blurRad="101600" dist="12700" dir="5400000" algn="bl" rotWithShape="0">
+            <a:outerShdw sx="100000" sy="100000" kx="0" ky="0" algn="bl" rotWithShape="0" blurRad="101600" dist="12700" dir="5400000">
               <a:srgbClr val="94A3B8">
                 <a:alpha val="12000"/>
               </a:srgbClr>
             </a:outerShdw>
           </a:effectLst>
         </p:spPr>
-        <p:txBody>
-          <a:bodyPr/>
-          <a:lstStyle/>
-          <a:p>
-            <a:endParaRPr lang="en-US"/>
-          </a:p>
-        </p:txBody>
       </p:sp>
       <p:sp>
         <p:nvSpPr>
@@ -14615,13 +14288,6 @@
             <a:prstDash val="solid"/>
           </a:ln>
         </p:spPr>
-        <p:txBody>
-          <a:bodyPr/>
-          <a:lstStyle/>
-          <a:p>
-            <a:endParaRPr lang="en-US"/>
-          </a:p>
-        </p:txBody>
       </p:sp>
       <p:sp>
         <p:nvSpPr>
@@ -14647,13 +14313,6 @@
             <a:prstDash val="solid"/>
           </a:ln>
         </p:spPr>
-        <p:txBody>
-          <a:bodyPr/>
-          <a:lstStyle/>
-          <a:p>
-            <a:endParaRPr lang="en-US"/>
-          </a:p>
-        </p:txBody>
       </p:sp>
       <p:sp>
         <p:nvSpPr>
@@ -14676,7 +14335,7 @@
           <a:bodyPr wrap="square" lIns="0" tIns="0" rIns="0" bIns="0" rtlCol="0" anchor="ctr"/>
           <a:lstStyle/>
           <a:p>
-            <a:pPr marL="0" indent="0" algn="ctr">
+            <a:pPr algn="ctr" indent="0" marL="0">
               <a:buNone/>
             </a:pPr>
             <a:r>
@@ -14715,7 +14374,7 @@
           <a:bodyPr wrap="square" lIns="0" tIns="0" rIns="0" bIns="0" rtlCol="0" anchor="ctr"/>
           <a:lstStyle/>
           <a:p>
-            <a:pPr marL="0" indent="0">
+            <a:pPr indent="0" marL="0">
               <a:buNone/>
             </a:pPr>
             <a:r>
@@ -14754,7 +14413,7 @@
           <a:bodyPr wrap="square" lIns="0" tIns="0" rIns="0" bIns="0" rtlCol="0" anchor="ctr"/>
           <a:lstStyle/>
           <a:p>
-            <a:pPr marL="0" indent="0">
+            <a:pPr indent="0" marL="0">
               <a:buNone/>
             </a:pPr>
             <a:r>
@@ -14796,20 +14455,13 @@
             <a:prstDash val="solid"/>
           </a:ln>
           <a:effectLst>
-            <a:outerShdw blurRad="101600" dist="12700" dir="5400000" algn="bl" rotWithShape="0">
+            <a:outerShdw sx="100000" sy="100000" kx="0" ky="0" algn="bl" rotWithShape="0" blurRad="101600" dist="12700" dir="5400000">
               <a:srgbClr val="94A3B8">
                 <a:alpha val="12000"/>
               </a:srgbClr>
             </a:outerShdw>
           </a:effectLst>
         </p:spPr>
-        <p:txBody>
-          <a:bodyPr/>
-          <a:lstStyle/>
-          <a:p>
-            <a:endParaRPr lang="en-US"/>
-          </a:p>
-        </p:txBody>
       </p:sp>
       <p:sp>
         <p:nvSpPr>
@@ -14835,13 +14487,6 @@
             <a:prstDash val="solid"/>
           </a:ln>
         </p:spPr>
-        <p:txBody>
-          <a:bodyPr/>
-          <a:lstStyle/>
-          <a:p>
-            <a:endParaRPr lang="en-US"/>
-          </a:p>
-        </p:txBody>
       </p:sp>
       <p:sp>
         <p:nvSpPr>
@@ -14867,13 +14512,6 @@
             <a:prstDash val="solid"/>
           </a:ln>
         </p:spPr>
-        <p:txBody>
-          <a:bodyPr/>
-          <a:lstStyle/>
-          <a:p>
-            <a:endParaRPr lang="en-US"/>
-          </a:p>
-        </p:txBody>
       </p:sp>
       <p:sp>
         <p:nvSpPr>
@@ -14896,7 +14534,7 @@
           <a:bodyPr wrap="square" lIns="0" tIns="0" rIns="0" bIns="0" rtlCol="0" anchor="ctr"/>
           <a:lstStyle/>
           <a:p>
-            <a:pPr marL="0" indent="0" algn="ctr">
+            <a:pPr algn="ctr" indent="0" marL="0">
               <a:buNone/>
             </a:pPr>
             <a:r>
@@ -14935,7 +14573,7 @@
           <a:bodyPr wrap="square" lIns="0" tIns="0" rIns="0" bIns="0" rtlCol="0" anchor="ctr"/>
           <a:lstStyle/>
           <a:p>
-            <a:pPr marL="0" indent="0">
+            <a:pPr indent="0" marL="0">
               <a:buNone/>
             </a:pPr>
             <a:r>
@@ -14974,7 +14612,7 @@
           <a:bodyPr wrap="square" lIns="0" tIns="0" rIns="0" bIns="0" rtlCol="0" anchor="ctr"/>
           <a:lstStyle/>
           <a:p>
-            <a:pPr marL="0" indent="0">
+            <a:pPr indent="0" marL="0">
               <a:buNone/>
             </a:pPr>
             <a:r>
@@ -15016,20 +14654,13 @@
             <a:prstDash val="solid"/>
           </a:ln>
           <a:effectLst>
-            <a:outerShdw blurRad="101600" dist="12700" dir="5400000" algn="bl" rotWithShape="0">
+            <a:outerShdw sx="100000" sy="100000" kx="0" ky="0" algn="bl" rotWithShape="0" blurRad="101600" dist="12700" dir="5400000">
               <a:srgbClr val="94A3B8">
                 <a:alpha val="12000"/>
               </a:srgbClr>
             </a:outerShdw>
           </a:effectLst>
         </p:spPr>
-        <p:txBody>
-          <a:bodyPr/>
-          <a:lstStyle/>
-          <a:p>
-            <a:endParaRPr lang="en-US"/>
-          </a:p>
-        </p:txBody>
       </p:sp>
       <p:sp>
         <p:nvSpPr>
@@ -15055,13 +14686,6 @@
             <a:prstDash val="solid"/>
           </a:ln>
         </p:spPr>
-        <p:txBody>
-          <a:bodyPr/>
-          <a:lstStyle/>
-          <a:p>
-            <a:endParaRPr lang="en-US"/>
-          </a:p>
-        </p:txBody>
       </p:sp>
       <p:sp>
         <p:nvSpPr>
@@ -15087,13 +14711,6 @@
             <a:prstDash val="solid"/>
           </a:ln>
         </p:spPr>
-        <p:txBody>
-          <a:bodyPr/>
-          <a:lstStyle/>
-          <a:p>
-            <a:endParaRPr lang="en-US"/>
-          </a:p>
-        </p:txBody>
       </p:sp>
       <p:sp>
         <p:nvSpPr>
@@ -15116,7 +14733,7 @@
           <a:bodyPr wrap="square" lIns="0" tIns="0" rIns="0" bIns="0" rtlCol="0" anchor="ctr"/>
           <a:lstStyle/>
           <a:p>
-            <a:pPr marL="0" indent="0" algn="ctr">
+            <a:pPr algn="ctr" indent="0" marL="0">
               <a:buNone/>
             </a:pPr>
             <a:r>
@@ -15155,7 +14772,7 @@
           <a:bodyPr wrap="square" lIns="0" tIns="0" rIns="0" bIns="0" rtlCol="0" anchor="ctr"/>
           <a:lstStyle/>
           <a:p>
-            <a:pPr marL="0" indent="0">
+            <a:pPr indent="0" marL="0">
               <a:buNone/>
             </a:pPr>
             <a:r>
@@ -15194,7 +14811,7 @@
           <a:bodyPr wrap="square" lIns="0" tIns="0" rIns="0" bIns="0" rtlCol="0" anchor="ctr"/>
           <a:lstStyle/>
           <a:p>
-            <a:pPr marL="0" indent="0">
+            <a:pPr indent="0" marL="0">
               <a:buNone/>
             </a:pPr>
             <a:r>
@@ -15236,20 +14853,13 @@
             <a:prstDash val="solid"/>
           </a:ln>
           <a:effectLst>
-            <a:outerShdw blurRad="101600" dist="12700" dir="5400000" algn="bl" rotWithShape="0">
+            <a:outerShdw sx="100000" sy="100000" kx="0" ky="0" algn="bl" rotWithShape="0" blurRad="101600" dist="12700" dir="5400000">
               <a:srgbClr val="94A3B8">
                 <a:alpha val="12000"/>
               </a:srgbClr>
             </a:outerShdw>
           </a:effectLst>
         </p:spPr>
-        <p:txBody>
-          <a:bodyPr/>
-          <a:lstStyle/>
-          <a:p>
-            <a:endParaRPr lang="en-US"/>
-          </a:p>
-        </p:txBody>
       </p:sp>
       <p:sp>
         <p:nvSpPr>
@@ -15275,13 +14885,6 @@
             <a:prstDash val="solid"/>
           </a:ln>
         </p:spPr>
-        <p:txBody>
-          <a:bodyPr/>
-          <a:lstStyle/>
-          <a:p>
-            <a:endParaRPr lang="en-US"/>
-          </a:p>
-        </p:txBody>
       </p:sp>
       <p:sp>
         <p:nvSpPr>
@@ -15307,13 +14910,6 @@
             <a:prstDash val="solid"/>
           </a:ln>
         </p:spPr>
-        <p:txBody>
-          <a:bodyPr/>
-          <a:lstStyle/>
-          <a:p>
-            <a:endParaRPr lang="en-US"/>
-          </a:p>
-        </p:txBody>
       </p:sp>
       <p:sp>
         <p:nvSpPr>
@@ -15336,7 +14932,7 @@
           <a:bodyPr wrap="square" lIns="0" tIns="0" rIns="0" bIns="0" rtlCol="0" anchor="ctr"/>
           <a:lstStyle/>
           <a:p>
-            <a:pPr marL="0" indent="0" algn="ctr">
+            <a:pPr algn="ctr" indent="0" marL="0">
               <a:buNone/>
             </a:pPr>
             <a:r>
@@ -15375,7 +14971,7 @@
           <a:bodyPr wrap="square" lIns="0" tIns="0" rIns="0" bIns="0" rtlCol="0" anchor="ctr"/>
           <a:lstStyle/>
           <a:p>
-            <a:pPr marL="0" indent="0">
+            <a:pPr indent="0" marL="0">
               <a:buNone/>
             </a:pPr>
             <a:r>
@@ -15414,7 +15010,7 @@
           <a:bodyPr wrap="square" lIns="0" tIns="0" rIns="0" bIns="0" rtlCol="0" anchor="ctr"/>
           <a:lstStyle/>
           <a:p>
-            <a:pPr marL="0" indent="0">
+            <a:pPr indent="0" marL="0">
               <a:buNone/>
             </a:pPr>
             <a:r>
@@ -15456,20 +15052,13 @@
             <a:prstDash val="solid"/>
           </a:ln>
           <a:effectLst>
-            <a:outerShdw blurRad="101600" dist="12700" dir="5400000" algn="bl" rotWithShape="0">
+            <a:outerShdw sx="100000" sy="100000" kx="0" ky="0" algn="bl" rotWithShape="0" blurRad="101600" dist="12700" dir="5400000">
               <a:srgbClr val="94A3B8">
                 <a:alpha val="12000"/>
               </a:srgbClr>
             </a:outerShdw>
           </a:effectLst>
         </p:spPr>
-        <p:txBody>
-          <a:bodyPr/>
-          <a:lstStyle/>
-          <a:p>
-            <a:endParaRPr lang="en-US"/>
-          </a:p>
-        </p:txBody>
       </p:sp>
       <p:sp>
         <p:nvSpPr>
@@ -15495,13 +15084,6 @@
             <a:prstDash val="solid"/>
           </a:ln>
         </p:spPr>
-        <p:txBody>
-          <a:bodyPr/>
-          <a:lstStyle/>
-          <a:p>
-            <a:endParaRPr lang="en-US"/>
-          </a:p>
-        </p:txBody>
       </p:sp>
       <p:sp>
         <p:nvSpPr>
@@ -15527,13 +15109,6 @@
             <a:prstDash val="solid"/>
           </a:ln>
         </p:spPr>
-        <p:txBody>
-          <a:bodyPr/>
-          <a:lstStyle/>
-          <a:p>
-            <a:endParaRPr lang="en-US"/>
-          </a:p>
-        </p:txBody>
       </p:sp>
       <p:sp>
         <p:nvSpPr>
@@ -15556,7 +15131,7 @@
           <a:bodyPr wrap="square" lIns="0" tIns="0" rIns="0" bIns="0" rtlCol="0" anchor="ctr"/>
           <a:lstStyle/>
           <a:p>
-            <a:pPr marL="0" indent="0" algn="ctr">
+            <a:pPr algn="ctr" indent="0" marL="0">
               <a:buNone/>
             </a:pPr>
             <a:r>
@@ -15595,7 +15170,7 @@
           <a:bodyPr wrap="square" lIns="0" tIns="0" rIns="0" bIns="0" rtlCol="0" anchor="ctr"/>
           <a:lstStyle/>
           <a:p>
-            <a:pPr marL="0" indent="0">
+            <a:pPr indent="0" marL="0">
               <a:buNone/>
             </a:pPr>
             <a:r>
@@ -15634,7 +15209,7 @@
           <a:bodyPr wrap="square" lIns="0" tIns="0" rIns="0" bIns="0" rtlCol="0" anchor="ctr"/>
           <a:lstStyle/>
           <a:p>
-            <a:pPr marL="0" indent="0">
+            <a:pPr indent="0" marL="0">
               <a:buNone/>
             </a:pPr>
             <a:r>
@@ -15673,7 +15248,7 @@
           <a:bodyPr wrap="square" lIns="0" tIns="0" rIns="0" bIns="0" rtlCol="0" anchor="ctr"/>
           <a:lstStyle/>
           <a:p>
-            <a:pPr marL="0" indent="0" algn="l">
+            <a:pPr algn="l" indent="0" marL="0">
               <a:buNone/>
             </a:pPr>
             <a:r>
@@ -15712,7 +15287,7 @@
           <a:bodyPr wrap="square" lIns="0" tIns="0" rIns="0" bIns="0" rtlCol="0" anchor="ctr"/>
           <a:lstStyle/>
           <a:p>
-            <a:pPr marL="0" indent="0" algn="r">
+            <a:pPr algn="r" indent="0" marL="0">
               <a:buNone/>
             </a:pPr>
             <a:r>
@@ -15746,7 +15321,6 @@
         <a:solidFill>
           <a:srgbClr val="FFFFFF"/>
         </a:solidFill>
-        <a:effectLst/>
       </p:bgPr>
     </p:bg>
     <p:spTree>
@@ -15784,11 +15358,11 @@
           <a:bodyPr wrap="square" lIns="0" tIns="0" rIns="0" bIns="0" rtlCol="0" anchor="ctr"/>
           <a:lstStyle/>
           <a:p>
-            <a:pPr marL="0" indent="0">
-              <a:buNone/>
-            </a:pPr>
-            <a:r>
-              <a:rPr lang="en-US" sz="1100" b="1" kern="0" spc="400" dirty="0">
+            <a:pPr indent="0" marL="0">
+              <a:buNone/>
+            </a:pPr>
+            <a:r>
+              <a:rPr lang="en-US" sz="1100" b="1" spc="400" kern="0" dirty="0">
                 <a:solidFill>
                   <a:srgbClr val="1C7293"/>
                 </a:solidFill>
@@ -15823,7 +15397,7 @@
           <a:bodyPr wrap="square" lIns="0" tIns="0" rIns="0" bIns="0" rtlCol="0" anchor="ctr"/>
           <a:lstStyle/>
           <a:p>
-            <a:pPr marL="0" indent="0">
+            <a:pPr indent="0" marL="0">
               <a:buNone/>
             </a:pPr>
             <a:r>
@@ -15862,7 +15436,7 @@
           <a:bodyPr wrap="square" lIns="0" tIns="0" rIns="0" bIns="0" rtlCol="0" anchor="ctr"/>
           <a:lstStyle/>
           <a:p>
-            <a:pPr marL="0" indent="0">
+            <a:pPr indent="0" marL="0">
               <a:buNone/>
             </a:pPr>
             <a:r>
@@ -15876,6 +15450,9 @@
               </a:rPr>
               <a:t>Die </a:t>
             </a:r>
+            <a:pPr indent="0" marL="0">
+              <a:buNone/>
+            </a:pPr>
             <a:r>
               <a:rPr lang="en-US" sz="1600" b="1" dirty="0">
                 <a:solidFill>
@@ -15887,6 +15464,9 @@
               </a:rPr>
               <a:t>15-Minuten-Stadt</a:t>
             </a:r>
+            <a:pPr indent="0" marL="0">
+              <a:buNone/>
+            </a:pPr>
             <a:r>
               <a:rPr lang="en-US" sz="1600" dirty="0">
                 <a:solidFill>
@@ -15898,6 +15478,9 @@
               </a:rPr>
               <a:t> (Moreno 2021) ist heute Leitbild moderner Stadtplanung — und wird zunehmend zum </a:t>
             </a:r>
+            <a:pPr indent="0" marL="0">
+              <a:buNone/>
+            </a:pPr>
             <a:r>
               <a:rPr lang="en-US" sz="1600" b="1" dirty="0">
                 <a:solidFill>
@@ -15909,6 +15492,9 @@
               </a:rPr>
               <a:t>harten Wertfaktor</a:t>
             </a:r>
+            <a:pPr indent="0" marL="0">
+              <a:buNone/>
+            </a:pPr>
             <a:r>
               <a:rPr lang="en-US" sz="1600" dirty="0">
                 <a:solidFill>
@@ -15948,20 +15534,13 @@
             <a:prstDash val="solid"/>
           </a:ln>
           <a:effectLst>
-            <a:outerShdw blurRad="101600" dist="12700" dir="5400000" algn="bl" rotWithShape="0">
+            <a:outerShdw sx="100000" sy="100000" kx="0" ky="0" algn="bl" rotWithShape="0" blurRad="101600" dist="12700" dir="5400000">
               <a:srgbClr val="94A3B8">
                 <a:alpha val="12000"/>
               </a:srgbClr>
             </a:outerShdw>
           </a:effectLst>
         </p:spPr>
-        <p:txBody>
-          <a:bodyPr/>
-          <a:lstStyle/>
-          <a:p>
-            <a:endParaRPr lang="en-US"/>
-          </a:p>
-        </p:txBody>
       </p:sp>
       <p:sp>
         <p:nvSpPr>
@@ -15987,13 +15566,6 @@
             <a:prstDash val="solid"/>
           </a:ln>
         </p:spPr>
-        <p:txBody>
-          <a:bodyPr/>
-          <a:lstStyle/>
-          <a:p>
-            <a:endParaRPr lang="en-US"/>
-          </a:p>
-        </p:txBody>
       </p:sp>
       <p:sp>
         <p:nvSpPr>
@@ -16016,7 +15588,7 @@
           <a:bodyPr wrap="square" lIns="0" tIns="0" rIns="0" bIns="0" rtlCol="0" anchor="b"/>
           <a:lstStyle/>
           <a:p>
-            <a:pPr marL="0" indent="0" algn="ctr">
+            <a:pPr algn="ctr" indent="0" marL="0">
               <a:buNone/>
             </a:pPr>
             <a:r>
@@ -16055,7 +15627,7 @@
           <a:bodyPr wrap="square" lIns="0" tIns="0" rIns="0" bIns="0" rtlCol="0" anchor="t"/>
           <a:lstStyle/>
           <a:p>
-            <a:pPr marL="0" indent="0" algn="ctr">
+            <a:pPr algn="ctr" indent="0" marL="0">
               <a:buNone/>
             </a:pPr>
             <a:endParaRPr lang="en-US" sz="1100" dirty="0"/>
@@ -16083,7 +15655,7 @@
           <a:bodyPr wrap="square" lIns="0" tIns="0" rIns="0" bIns="0" rtlCol="0" anchor="ctr"/>
           <a:lstStyle/>
           <a:p>
-            <a:pPr marL="0" indent="0" algn="ctr">
+            <a:pPr algn="ctr" indent="0" marL="0">
               <a:buNone/>
             </a:pPr>
             <a:r>
@@ -16125,20 +15697,13 @@
             <a:prstDash val="solid"/>
           </a:ln>
           <a:effectLst>
-            <a:outerShdw blurRad="101600" dist="12700" dir="5400000" algn="bl" rotWithShape="0">
+            <a:outerShdw sx="100000" sy="100000" kx="0" ky="0" algn="bl" rotWithShape="0" blurRad="101600" dist="12700" dir="5400000">
               <a:srgbClr val="94A3B8">
                 <a:alpha val="12000"/>
               </a:srgbClr>
             </a:outerShdw>
           </a:effectLst>
         </p:spPr>
-        <p:txBody>
-          <a:bodyPr/>
-          <a:lstStyle/>
-          <a:p>
-            <a:endParaRPr lang="en-US"/>
-          </a:p>
-        </p:txBody>
       </p:sp>
       <p:sp>
         <p:nvSpPr>
@@ -16164,13 +15729,6 @@
             <a:prstDash val="solid"/>
           </a:ln>
         </p:spPr>
-        <p:txBody>
-          <a:bodyPr/>
-          <a:lstStyle/>
-          <a:p>
-            <a:endParaRPr lang="en-US"/>
-          </a:p>
-        </p:txBody>
       </p:sp>
       <p:sp>
         <p:nvSpPr>
@@ -16193,7 +15751,7 @@
           <a:bodyPr wrap="square" lIns="0" tIns="0" rIns="0" bIns="0" rtlCol="0" anchor="b"/>
           <a:lstStyle/>
           <a:p>
-            <a:pPr marL="0" indent="0" algn="ctr">
+            <a:pPr algn="ctr" indent="0" marL="0">
               <a:buNone/>
             </a:pPr>
             <a:r>
@@ -16232,7 +15790,7 @@
           <a:bodyPr wrap="square" lIns="0" tIns="0" rIns="0" bIns="0" rtlCol="0" anchor="t"/>
           <a:lstStyle/>
           <a:p>
-            <a:pPr marL="0" indent="0" algn="ctr">
+            <a:pPr algn="ctr" indent="0" marL="0">
               <a:buNone/>
             </a:pPr>
             <a:endParaRPr lang="en-US" sz="1100" dirty="0"/>
@@ -16260,7 +15818,7 @@
           <a:bodyPr wrap="square" lIns="0" tIns="0" rIns="0" bIns="0" rtlCol="0" anchor="ctr"/>
           <a:lstStyle/>
           <a:p>
-            <a:pPr marL="0" indent="0" algn="ctr">
+            <a:pPr algn="ctr" indent="0" marL="0">
               <a:buNone/>
             </a:pPr>
             <a:r>
@@ -16302,20 +15860,13 @@
             <a:prstDash val="solid"/>
           </a:ln>
           <a:effectLst>
-            <a:outerShdw blurRad="101600" dist="12700" dir="5400000" algn="bl" rotWithShape="0">
+            <a:outerShdw sx="100000" sy="100000" kx="0" ky="0" algn="bl" rotWithShape="0" blurRad="101600" dist="12700" dir="5400000">
               <a:srgbClr val="94A3B8">
                 <a:alpha val="12000"/>
               </a:srgbClr>
             </a:outerShdw>
           </a:effectLst>
         </p:spPr>
-        <p:txBody>
-          <a:bodyPr/>
-          <a:lstStyle/>
-          <a:p>
-            <a:endParaRPr lang="en-US"/>
-          </a:p>
-        </p:txBody>
       </p:sp>
       <p:sp>
         <p:nvSpPr>
@@ -16341,13 +15892,6 @@
             <a:prstDash val="solid"/>
           </a:ln>
         </p:spPr>
-        <p:txBody>
-          <a:bodyPr/>
-          <a:lstStyle/>
-          <a:p>
-            <a:endParaRPr lang="en-US"/>
-          </a:p>
-        </p:txBody>
       </p:sp>
       <p:sp>
         <p:nvSpPr>
@@ -16370,7 +15914,7 @@
           <a:bodyPr wrap="square" lIns="0" tIns="0" rIns="0" bIns="0" rtlCol="0" anchor="b"/>
           <a:lstStyle/>
           <a:p>
-            <a:pPr marL="0" indent="0" algn="ctr">
+            <a:pPr algn="ctr" indent="0" marL="0">
               <a:buNone/>
             </a:pPr>
             <a:r>
@@ -16409,7 +15953,7 @@
           <a:bodyPr wrap="square" lIns="0" tIns="0" rIns="0" bIns="0" rtlCol="0" anchor="t"/>
           <a:lstStyle/>
           <a:p>
-            <a:pPr marL="0" indent="0" algn="ctr">
+            <a:pPr algn="ctr" indent="0" marL="0">
               <a:buNone/>
             </a:pPr>
             <a:endParaRPr lang="en-US" sz="1100" dirty="0"/>
@@ -16437,7 +15981,7 @@
           <a:bodyPr wrap="square" lIns="0" tIns="0" rIns="0" bIns="0" rtlCol="0" anchor="ctr"/>
           <a:lstStyle/>
           <a:p>
-            <a:pPr marL="0" indent="0" algn="ctr">
+            <a:pPr algn="ctr" indent="0" marL="0">
               <a:buNone/>
             </a:pPr>
             <a:r>
@@ -16476,7 +16020,7 @@
           <a:bodyPr wrap="square" lIns="0" tIns="0" rIns="0" bIns="0" rtlCol="0" anchor="ctr"/>
           <a:lstStyle/>
           <a:p>
-            <a:pPr marL="0" indent="0" algn="r">
+            <a:pPr algn="r" indent="0" marL="0">
               <a:buNone/>
             </a:pPr>
             <a:r>
@@ -16510,7 +16054,6 @@
         <a:solidFill>
           <a:srgbClr val="FFFFFF"/>
         </a:solidFill>
-        <a:effectLst/>
       </p:bgPr>
     </p:bg>
     <p:spTree>
@@ -16548,11 +16091,11 @@
           <a:bodyPr wrap="square" lIns="0" tIns="0" rIns="0" bIns="0" rtlCol="0" anchor="ctr"/>
           <a:lstStyle/>
           <a:p>
-            <a:pPr marL="0" indent="0">
-              <a:buNone/>
-            </a:pPr>
-            <a:r>
-              <a:rPr lang="en-US" sz="1100" b="1" kern="0" spc="400" dirty="0">
+            <a:pPr indent="0" marL="0">
+              <a:buNone/>
+            </a:pPr>
+            <a:r>
+              <a:rPr lang="en-US" sz="1100" b="1" spc="400" kern="0" dirty="0">
                 <a:solidFill>
                   <a:srgbClr val="1C7293"/>
                 </a:solidFill>
@@ -16587,7 +16130,7 @@
           <a:bodyPr wrap="square" lIns="0" tIns="0" rIns="0" bIns="0" rtlCol="0" anchor="ctr"/>
           <a:lstStyle/>
           <a:p>
-            <a:pPr marL="0" indent="0">
+            <a:pPr indent="0" marL="0">
               <a:buNone/>
             </a:pPr>
             <a:r>
@@ -16629,20 +16172,13 @@
             <a:prstDash val="solid"/>
           </a:ln>
           <a:effectLst>
-            <a:outerShdw blurRad="101600" dist="12700" dir="5400000" algn="bl" rotWithShape="0">
+            <a:outerShdw sx="100000" sy="100000" kx="0" ky="0" algn="bl" rotWithShape="0" blurRad="101600" dist="12700" dir="5400000">
               <a:srgbClr val="94A3B8">
                 <a:alpha val="12000"/>
               </a:srgbClr>
             </a:outerShdw>
           </a:effectLst>
         </p:spPr>
-        <p:txBody>
-          <a:bodyPr/>
-          <a:lstStyle/>
-          <a:p>
-            <a:endParaRPr lang="en-US"/>
-          </a:p>
-        </p:txBody>
       </p:sp>
       <p:sp>
         <p:nvSpPr>
@@ -16668,13 +16204,6 @@
             <a:prstDash val="solid"/>
           </a:ln>
         </p:spPr>
-        <p:txBody>
-          <a:bodyPr/>
-          <a:lstStyle/>
-          <a:p>
-            <a:endParaRPr lang="en-US"/>
-          </a:p>
-        </p:txBody>
       </p:sp>
       <p:sp>
         <p:nvSpPr>
@@ -16697,7 +16226,7 @@
           <a:bodyPr wrap="square" lIns="0" tIns="0" rIns="0" bIns="0" rtlCol="0" anchor="ctr"/>
           <a:lstStyle/>
           <a:p>
-            <a:pPr marL="0" indent="0">
+            <a:pPr indent="0" marL="0">
               <a:buNone/>
             </a:pPr>
             <a:r>
@@ -16736,7 +16265,7 @@
           <a:bodyPr wrap="square" lIns="0" tIns="0" rIns="0" bIns="0" rtlCol="0" anchor="ctr"/>
           <a:lstStyle/>
           <a:p>
-            <a:pPr marL="0" indent="0">
+            <a:pPr indent="0" marL="0">
               <a:buNone/>
             </a:pPr>
             <a:r>
@@ -16778,20 +16307,13 @@
             <a:prstDash val="solid"/>
           </a:ln>
           <a:effectLst>
-            <a:outerShdw blurRad="101600" dist="12700" dir="5400000" algn="bl" rotWithShape="0">
+            <a:outerShdw sx="100000" sy="100000" kx="0" ky="0" algn="bl" rotWithShape="0" blurRad="101600" dist="12700" dir="5400000">
               <a:srgbClr val="94A3B8">
                 <a:alpha val="12000"/>
               </a:srgbClr>
             </a:outerShdw>
           </a:effectLst>
         </p:spPr>
-        <p:txBody>
-          <a:bodyPr/>
-          <a:lstStyle/>
-          <a:p>
-            <a:endParaRPr lang="en-US"/>
-          </a:p>
-        </p:txBody>
       </p:sp>
       <p:sp>
         <p:nvSpPr>
@@ -16817,13 +16339,6 @@
             <a:prstDash val="solid"/>
           </a:ln>
         </p:spPr>
-        <p:txBody>
-          <a:bodyPr/>
-          <a:lstStyle/>
-          <a:p>
-            <a:endParaRPr lang="en-US"/>
-          </a:p>
-        </p:txBody>
       </p:sp>
       <p:sp>
         <p:nvSpPr>
@@ -16846,7 +16361,7 @@
           <a:bodyPr wrap="square" lIns="0" tIns="0" rIns="0" bIns="0" rtlCol="0" anchor="ctr"/>
           <a:lstStyle/>
           <a:p>
-            <a:pPr marL="0" indent="0">
+            <a:pPr indent="0" marL="0">
               <a:buNone/>
             </a:pPr>
             <a:r>
@@ -16885,7 +16400,7 @@
           <a:bodyPr wrap="square" lIns="0" tIns="0" rIns="0" bIns="0" rtlCol="0" anchor="ctr"/>
           <a:lstStyle/>
           <a:p>
-            <a:pPr marL="0" indent="0">
+            <a:pPr indent="0" marL="0">
               <a:buNone/>
             </a:pPr>
             <a:r>
@@ -16924,7 +16439,7 @@
           <a:bodyPr wrap="square" lIns="0" tIns="0" rIns="0" bIns="0" rtlCol="0" anchor="ctr"/>
           <a:lstStyle/>
           <a:p>
-            <a:pPr marL="0" indent="0" algn="r">
+            <a:pPr algn="r" indent="0" marL="0">
               <a:buNone/>
             </a:pPr>
             <a:r>
@@ -16958,7 +16473,6 @@
         <a:solidFill>
           <a:srgbClr val="FFFFFF"/>
         </a:solidFill>
-        <a:effectLst/>
       </p:bgPr>
     </p:bg>
     <p:spTree>
@@ -16996,11 +16510,11 @@
           <a:bodyPr wrap="square" lIns="0" tIns="0" rIns="0" bIns="0" rtlCol="0" anchor="ctr"/>
           <a:lstStyle/>
           <a:p>
-            <a:pPr marL="0" indent="0">
-              <a:buNone/>
-            </a:pPr>
-            <a:r>
-              <a:rPr lang="en-US" sz="1100" b="1" kern="0" spc="400" dirty="0">
+            <a:pPr indent="0" marL="0">
+              <a:buNone/>
+            </a:pPr>
+            <a:r>
+              <a:rPr lang="en-US" sz="1100" b="1" spc="400" kern="0" dirty="0">
                 <a:solidFill>
                   <a:srgbClr val="1C7293"/>
                 </a:solidFill>
@@ -17035,7 +16549,7 @@
           <a:bodyPr wrap="square" lIns="0" tIns="0" rIns="0" bIns="0" rtlCol="0" anchor="ctr"/>
           <a:lstStyle/>
           <a:p>
-            <a:pPr marL="0" indent="0">
+            <a:pPr indent="0" marL="0">
               <a:buNone/>
             </a:pPr>
             <a:r>
@@ -17077,20 +16591,13 @@
             <a:prstDash val="solid"/>
           </a:ln>
           <a:effectLst>
-            <a:outerShdw blurRad="101600" dist="12700" dir="5400000" algn="bl" rotWithShape="0">
+            <a:outerShdw sx="100000" sy="100000" kx="0" ky="0" algn="bl" rotWithShape="0" blurRad="101600" dist="12700" dir="5400000">
               <a:srgbClr val="94A3B8">
                 <a:alpha val="12000"/>
               </a:srgbClr>
             </a:outerShdw>
           </a:effectLst>
         </p:spPr>
-        <p:txBody>
-          <a:bodyPr/>
-          <a:lstStyle/>
-          <a:p>
-            <a:endParaRPr lang="en-US"/>
-          </a:p>
-        </p:txBody>
       </p:sp>
       <p:sp>
         <p:nvSpPr>
@@ -17116,13 +16623,6 @@
             <a:prstDash val="solid"/>
           </a:ln>
         </p:spPr>
-        <p:txBody>
-          <a:bodyPr/>
-          <a:lstStyle/>
-          <a:p>
-            <a:endParaRPr lang="en-US"/>
-          </a:p>
-        </p:txBody>
       </p:sp>
       <p:sp>
         <p:nvSpPr>
@@ -17148,13 +16648,6 @@
             <a:prstDash val="solid"/>
           </a:ln>
         </p:spPr>
-        <p:txBody>
-          <a:bodyPr/>
-          <a:lstStyle/>
-          <a:p>
-            <a:endParaRPr lang="en-US"/>
-          </a:p>
-        </p:txBody>
       </p:sp>
       <p:sp>
         <p:nvSpPr>
@@ -17177,7 +16670,7 @@
           <a:bodyPr wrap="square" lIns="0" tIns="0" rIns="0" bIns="0" rtlCol="0" anchor="ctr"/>
           <a:lstStyle/>
           <a:p>
-            <a:pPr marL="0" indent="0" algn="ctr">
+            <a:pPr algn="ctr" indent="0" marL="0">
               <a:buNone/>
             </a:pPr>
             <a:r>
@@ -17216,7 +16709,7 @@
           <a:bodyPr wrap="square" lIns="0" tIns="0" rIns="0" bIns="0" rtlCol="0" anchor="ctr"/>
           <a:lstStyle/>
           <a:p>
-            <a:pPr marL="0" indent="0">
+            <a:pPr indent="0" marL="0">
               <a:buNone/>
             </a:pPr>
             <a:r>
@@ -17255,7 +16748,7 @@
           <a:bodyPr wrap="square" lIns="0" tIns="0" rIns="0" bIns="0" rtlCol="0" anchor="ctr"/>
           <a:lstStyle/>
           <a:p>
-            <a:pPr marL="0" indent="0">
+            <a:pPr indent="0" marL="0">
               <a:buNone/>
             </a:pPr>
             <a:r>
@@ -17294,7 +16787,7 @@
           <a:bodyPr wrap="square" lIns="0" tIns="0" rIns="0" bIns="0" rtlCol="0" anchor="ctr"/>
           <a:lstStyle/>
           <a:p>
-            <a:pPr marL="0" indent="0">
+            <a:pPr indent="0" marL="0">
               <a:buNone/>
             </a:pPr>
             <a:r>
@@ -17336,20 +16829,13 @@
             <a:prstDash val="solid"/>
           </a:ln>
           <a:effectLst>
-            <a:outerShdw blurRad="101600" dist="12700" dir="5400000" algn="bl" rotWithShape="0">
+            <a:outerShdw sx="100000" sy="100000" kx="0" ky="0" algn="bl" rotWithShape="0" blurRad="101600" dist="12700" dir="5400000">
               <a:srgbClr val="94A3B8">
                 <a:alpha val="12000"/>
               </a:srgbClr>
             </a:outerShdw>
           </a:effectLst>
         </p:spPr>
-        <p:txBody>
-          <a:bodyPr/>
-          <a:lstStyle/>
-          <a:p>
-            <a:endParaRPr lang="en-US"/>
-          </a:p>
-        </p:txBody>
       </p:sp>
       <p:sp>
         <p:nvSpPr>
@@ -17375,13 +16861,6 @@
             <a:prstDash val="solid"/>
           </a:ln>
         </p:spPr>
-        <p:txBody>
-          <a:bodyPr/>
-          <a:lstStyle/>
-          <a:p>
-            <a:endParaRPr lang="en-US"/>
-          </a:p>
-        </p:txBody>
       </p:sp>
       <p:sp>
         <p:nvSpPr>
@@ -17407,13 +16886,6 @@
             <a:prstDash val="solid"/>
           </a:ln>
         </p:spPr>
-        <p:txBody>
-          <a:bodyPr/>
-          <a:lstStyle/>
-          <a:p>
-            <a:endParaRPr lang="en-US"/>
-          </a:p>
-        </p:txBody>
       </p:sp>
       <p:sp>
         <p:nvSpPr>
@@ -17436,7 +16908,7 @@
           <a:bodyPr wrap="square" lIns="0" tIns="0" rIns="0" bIns="0" rtlCol="0" anchor="ctr"/>
           <a:lstStyle/>
           <a:p>
-            <a:pPr marL="0" indent="0" algn="ctr">
+            <a:pPr algn="ctr" indent="0" marL="0">
               <a:buNone/>
             </a:pPr>
             <a:r>
@@ -17475,7 +16947,7 @@
           <a:bodyPr wrap="square" lIns="0" tIns="0" rIns="0" bIns="0" rtlCol="0" anchor="ctr"/>
           <a:lstStyle/>
           <a:p>
-            <a:pPr marL="0" indent="0">
+            <a:pPr indent="0" marL="0">
               <a:buNone/>
             </a:pPr>
             <a:r>
@@ -17514,7 +16986,7 @@
           <a:bodyPr wrap="square" lIns="0" tIns="0" rIns="0" bIns="0" rtlCol="0" anchor="ctr"/>
           <a:lstStyle/>
           <a:p>
-            <a:pPr marL="0" indent="0">
+            <a:pPr indent="0" marL="0">
               <a:buNone/>
             </a:pPr>
             <a:r>
@@ -17553,7 +17025,7 @@
           <a:bodyPr wrap="square" lIns="0" tIns="0" rIns="0" bIns="0" rtlCol="0" anchor="ctr"/>
           <a:lstStyle/>
           <a:p>
-            <a:pPr marL="0" indent="0">
+            <a:pPr indent="0" marL="0">
               <a:buNone/>
             </a:pPr>
             <a:r>
@@ -17595,20 +17067,13 @@
             <a:prstDash val="solid"/>
           </a:ln>
           <a:effectLst>
-            <a:outerShdw blurRad="101600" dist="12700" dir="5400000" algn="bl" rotWithShape="0">
+            <a:outerShdw sx="100000" sy="100000" kx="0" ky="0" algn="bl" rotWithShape="0" blurRad="101600" dist="12700" dir="5400000">
               <a:srgbClr val="94A3B8">
                 <a:alpha val="12000"/>
               </a:srgbClr>
             </a:outerShdw>
           </a:effectLst>
         </p:spPr>
-        <p:txBody>
-          <a:bodyPr/>
-          <a:lstStyle/>
-          <a:p>
-            <a:endParaRPr lang="en-US"/>
-          </a:p>
-        </p:txBody>
       </p:sp>
       <p:sp>
         <p:nvSpPr>
@@ -17634,13 +17099,6 @@
             <a:prstDash val="solid"/>
           </a:ln>
         </p:spPr>
-        <p:txBody>
-          <a:bodyPr/>
-          <a:lstStyle/>
-          <a:p>
-            <a:endParaRPr lang="en-US"/>
-          </a:p>
-        </p:txBody>
       </p:sp>
       <p:sp>
         <p:nvSpPr>
@@ -17666,13 +17124,6 @@
             <a:prstDash val="solid"/>
           </a:ln>
         </p:spPr>
-        <p:txBody>
-          <a:bodyPr/>
-          <a:lstStyle/>
-          <a:p>
-            <a:endParaRPr lang="en-US"/>
-          </a:p>
-        </p:txBody>
       </p:sp>
       <p:sp>
         <p:nvSpPr>
@@ -17695,7 +17146,7 @@
           <a:bodyPr wrap="square" lIns="0" tIns="0" rIns="0" bIns="0" rtlCol="0" anchor="ctr"/>
           <a:lstStyle/>
           <a:p>
-            <a:pPr marL="0" indent="0" algn="ctr">
+            <a:pPr algn="ctr" indent="0" marL="0">
               <a:buNone/>
             </a:pPr>
             <a:r>
@@ -17734,7 +17185,7 @@
           <a:bodyPr wrap="square" lIns="0" tIns="0" rIns="0" bIns="0" rtlCol="0" anchor="ctr"/>
           <a:lstStyle/>
           <a:p>
-            <a:pPr marL="0" indent="0">
+            <a:pPr indent="0" marL="0">
               <a:buNone/>
             </a:pPr>
             <a:r>
@@ -17773,7 +17224,7 @@
           <a:bodyPr wrap="square" lIns="0" tIns="0" rIns="0" bIns="0" rtlCol="0" anchor="ctr"/>
           <a:lstStyle/>
           <a:p>
-            <a:pPr marL="0" indent="0">
+            <a:pPr indent="0" marL="0">
               <a:buNone/>
             </a:pPr>
             <a:r>
@@ -17812,7 +17263,7 @@
           <a:bodyPr wrap="square" lIns="0" tIns="0" rIns="0" bIns="0" rtlCol="0" anchor="ctr"/>
           <a:lstStyle/>
           <a:p>
-            <a:pPr marL="0" indent="0">
+            <a:pPr indent="0" marL="0">
               <a:buNone/>
             </a:pPr>
             <a:r>
@@ -17851,7 +17302,7 @@
           <a:bodyPr wrap="square" lIns="0" tIns="0" rIns="0" bIns="0" rtlCol="0" anchor="ctr"/>
           <a:lstStyle/>
           <a:p>
-            <a:pPr marL="0" indent="0" algn="r">
+            <a:pPr algn="r" indent="0" marL="0">
               <a:buNone/>
             </a:pPr>
             <a:r>
@@ -17885,7 +17336,6 @@
         <a:solidFill>
           <a:srgbClr val="FFFFFF"/>
         </a:solidFill>
-        <a:effectLst/>
       </p:bgPr>
     </p:bg>
     <p:spTree>
@@ -17923,11 +17373,11 @@
           <a:bodyPr wrap="square" lIns="0" tIns="0" rIns="0" bIns="0" rtlCol="0" anchor="ctr"/>
           <a:lstStyle/>
           <a:p>
-            <a:pPr marL="0" indent="0">
-              <a:buNone/>
-            </a:pPr>
-            <a:r>
-              <a:rPr lang="en-US" sz="1100" b="1" kern="0" spc="400" dirty="0">
+            <a:pPr indent="0" marL="0">
+              <a:buNone/>
+            </a:pPr>
+            <a:r>
+              <a:rPr lang="en-US" sz="1100" b="1" spc="400" kern="0" dirty="0">
                 <a:solidFill>
                   <a:srgbClr val="1C7293"/>
                 </a:solidFill>
@@ -17962,7 +17412,7 @@
           <a:bodyPr wrap="square" lIns="0" tIns="0" rIns="0" bIns="0" rtlCol="0" anchor="ctr"/>
           <a:lstStyle/>
           <a:p>
-            <a:pPr marL="0" indent="0">
+            <a:pPr indent="0" marL="0">
               <a:buNone/>
             </a:pPr>
             <a:r>
@@ -17996,34 +17446,16 @@
         </p:nvGraphicFramePr>
         <p:xfrm>
           <a:off x="457200" y="1554480"/>
-          <a:ext cx="8229600" cy="3456432"/>
+          <a:ext cx="8229600" cy="914400"/>
         </p:xfrm>
         <a:graphic>
           <a:graphicData uri="http://schemas.openxmlformats.org/drawingml/2006/table">
             <a:tbl>
               <a:tblPr/>
               <a:tblGrid>
-                <a:gridCol w="3108960">
-                  <a:extLst>
-                    <a:ext uri="{9D8B030D-6E8A-4147-A177-3AD203B41FA5}">
-                      <a16:colId xmlns:a16="http://schemas.microsoft.com/office/drawing/2014/main" val="20000"/>
-                    </a:ext>
-                  </a:extLst>
-                </a:gridCol>
-                <a:gridCol w="3657600">
-                  <a:extLst>
-                    <a:ext uri="{9D8B030D-6E8A-4147-A177-3AD203B41FA5}">
-                      <a16:colId xmlns:a16="http://schemas.microsoft.com/office/drawing/2014/main" val="20001"/>
-                    </a:ext>
-                  </a:extLst>
-                </a:gridCol>
-                <a:gridCol w="1463040">
-                  <a:extLst>
-                    <a:ext uri="{9D8B030D-6E8A-4147-A177-3AD203B41FA5}">
-                      <a16:colId xmlns:a16="http://schemas.microsoft.com/office/drawing/2014/main" val="20002"/>
-                    </a:ext>
-                  </a:extLst>
-                </a:gridCol>
+                <a:gridCol w="3108960"/>
+                <a:gridCol w="3657600"/>
+                <a:gridCol w="1463040"/>
               </a:tblGrid>
               <a:tr h="384048">
                 <a:tc>
@@ -18031,7 +17463,7 @@
                     <a:bodyPr/>
                     <a:lstStyle/>
                     <a:p>
-                      <a:pPr marL="0" indent="0" algn="l">
+                      <a:pPr algn="l" indent="0" marL="0">
                         <a:buNone/>
                       </a:pPr>
                       <a:r>
@@ -18052,7 +17484,7 @@
                       </a:endParaRPr>
                     </a:p>
                   </a:txBody>
-                  <a:tcPr>
+                  <a:tcPr marL="91440" marR="91440" marT="45720" marB="45720">
                     <a:lnL w="6350" cap="flat" cmpd="sng" algn="ctr">
                       <a:solidFill>
                         <a:srgbClr val="E2E8F0"/>
@@ -18099,7 +17531,7 @@
                     <a:bodyPr/>
                     <a:lstStyle/>
                     <a:p>
-                      <a:pPr marL="0" indent="0" algn="l">
+                      <a:pPr algn="l" indent="0" marL="0">
                         <a:buNone/>
                       </a:pPr>
                       <a:r>
@@ -18120,7 +17552,7 @@
                       </a:endParaRPr>
                     </a:p>
                   </a:txBody>
-                  <a:tcPr>
+                  <a:tcPr marL="91440" marR="91440" marT="45720" marB="45720">
                     <a:lnL w="6350" cap="flat" cmpd="sng" algn="ctr">
                       <a:solidFill>
                         <a:srgbClr val="E2E8F0"/>
@@ -18167,7 +17599,7 @@
                     <a:bodyPr/>
                     <a:lstStyle/>
                     <a:p>
-                      <a:pPr marL="0" indent="0" algn="l">
+                      <a:pPr algn="l" indent="0" marL="0">
                         <a:buNone/>
                       </a:pPr>
                       <a:r>
@@ -18188,7 +17620,7 @@
                       </a:endParaRPr>
                     </a:p>
                   </a:txBody>
-                  <a:tcPr>
+                  <a:tcPr marL="91440" marR="91440" marT="45720" marB="45720">
                     <a:lnL w="6350" cap="flat" cmpd="sng" algn="ctr">
                       <a:solidFill>
                         <a:srgbClr val="E2E8F0"/>
@@ -18230,11 +17662,6 @@
                     </a:solidFill>
                   </a:tcPr>
                 </a:tc>
-                <a:extLst>
-                  <a:ext uri="{0D108BD9-81ED-4DB2-BD59-A6C34878D82A}">
-                    <a16:rowId xmlns:a16="http://schemas.microsoft.com/office/drawing/2014/main" val="10000"/>
-                  </a:ext>
-                </a:extLst>
               </a:tr>
               <a:tr h="384048">
                 <a:tc>
@@ -18242,7 +17669,7 @@
                     <a:bodyPr/>
                     <a:lstStyle/>
                     <a:p>
-                      <a:pPr marL="0" indent="0" algn="l">
+                      <a:pPr algn="l" indent="0" marL="0">
                         <a:buNone/>
                       </a:pPr>
                       <a:r>
@@ -18263,7 +17690,7 @@
                       </a:endParaRPr>
                     </a:p>
                   </a:txBody>
-                  <a:tcPr>
+                  <a:tcPr marL="91440" marR="91440" marT="45720" marB="45720">
                     <a:lnL w="6350" cap="flat" cmpd="sng" algn="ctr">
                       <a:solidFill>
                         <a:srgbClr val="E2E8F0"/>
@@ -18310,7 +17737,7 @@
                     <a:bodyPr/>
                     <a:lstStyle/>
                     <a:p>
-                      <a:pPr marL="0" indent="0" algn="l">
+                      <a:pPr algn="l" indent="0" marL="0">
                         <a:buNone/>
                       </a:pPr>
                       <a:r>
@@ -18331,7 +17758,7 @@
                       </a:endParaRPr>
                     </a:p>
                   </a:txBody>
-                  <a:tcPr>
+                  <a:tcPr marL="91440" marR="91440" marT="45720" marB="45720">
                     <a:lnL w="6350" cap="flat" cmpd="sng" algn="ctr">
                       <a:solidFill>
                         <a:srgbClr val="E2E8F0"/>
@@ -18378,7 +17805,7 @@
                     <a:bodyPr/>
                     <a:lstStyle/>
                     <a:p>
-                      <a:pPr marL="0" indent="0" algn="l">
+                      <a:pPr algn="l" indent="0" marL="0">
                         <a:buNone/>
                       </a:pPr>
                       <a:r>
@@ -18399,7 +17826,7 @@
                       </a:endParaRPr>
                     </a:p>
                   </a:txBody>
-                  <a:tcPr>
+                  <a:tcPr marL="91440" marR="91440" marT="45720" marB="45720">
                     <a:lnL w="6350" cap="flat" cmpd="sng" algn="ctr">
                       <a:solidFill>
                         <a:srgbClr val="E2E8F0"/>
@@ -18441,11 +17868,6 @@
                     </a:solidFill>
                   </a:tcPr>
                 </a:tc>
-                <a:extLst>
-                  <a:ext uri="{0D108BD9-81ED-4DB2-BD59-A6C34878D82A}">
-                    <a16:rowId xmlns:a16="http://schemas.microsoft.com/office/drawing/2014/main" val="10001"/>
-                  </a:ext>
-                </a:extLst>
               </a:tr>
               <a:tr h="384048">
                 <a:tc>
@@ -18453,7 +17875,7 @@
                     <a:bodyPr/>
                     <a:lstStyle/>
                     <a:p>
-                      <a:pPr marL="0" indent="0" algn="l">
+                      <a:pPr algn="l" indent="0" marL="0">
                         <a:buNone/>
                       </a:pPr>
                       <a:r>
@@ -18474,7 +17896,7 @@
                       </a:endParaRPr>
                     </a:p>
                   </a:txBody>
-                  <a:tcPr>
+                  <a:tcPr marL="91440" marR="91440" marT="45720" marB="45720">
                     <a:lnL w="6350" cap="flat" cmpd="sng" algn="ctr">
                       <a:solidFill>
                         <a:srgbClr val="E2E8F0"/>
@@ -18521,7 +17943,7 @@
                     <a:bodyPr/>
                     <a:lstStyle/>
                     <a:p>
-                      <a:pPr marL="0" indent="0" algn="l">
+                      <a:pPr algn="l" indent="0" marL="0">
                         <a:buNone/>
                       </a:pPr>
                       <a:r>
@@ -18542,7 +17964,7 @@
                       </a:endParaRPr>
                     </a:p>
                   </a:txBody>
-                  <a:tcPr>
+                  <a:tcPr marL="91440" marR="91440" marT="45720" marB="45720">
                     <a:lnL w="6350" cap="flat" cmpd="sng" algn="ctr">
                       <a:solidFill>
                         <a:srgbClr val="E2E8F0"/>
@@ -18589,7 +18011,7 @@
                     <a:bodyPr/>
                     <a:lstStyle/>
                     <a:p>
-                      <a:pPr marL="0" indent="0" algn="l">
+                      <a:pPr algn="l" indent="0" marL="0">
                         <a:buNone/>
                       </a:pPr>
                       <a:r>
@@ -18610,7 +18032,7 @@
                       </a:endParaRPr>
                     </a:p>
                   </a:txBody>
-                  <a:tcPr>
+                  <a:tcPr marL="91440" marR="91440" marT="45720" marB="45720">
                     <a:lnL w="6350" cap="flat" cmpd="sng" algn="ctr">
                       <a:solidFill>
                         <a:srgbClr val="E2E8F0"/>
@@ -18652,11 +18074,6 @@
                     </a:solidFill>
                   </a:tcPr>
                 </a:tc>
-                <a:extLst>
-                  <a:ext uri="{0D108BD9-81ED-4DB2-BD59-A6C34878D82A}">
-                    <a16:rowId xmlns:a16="http://schemas.microsoft.com/office/drawing/2014/main" val="10002"/>
-                  </a:ext>
-                </a:extLst>
               </a:tr>
               <a:tr h="384048">
                 <a:tc>
@@ -18664,7 +18081,7 @@
                     <a:bodyPr/>
                     <a:lstStyle/>
                     <a:p>
-                      <a:pPr marL="0" indent="0" algn="l">
+                      <a:pPr algn="l" indent="0" marL="0">
                         <a:buNone/>
                       </a:pPr>
                       <a:r>
@@ -18685,7 +18102,7 @@
                       </a:endParaRPr>
                     </a:p>
                   </a:txBody>
-                  <a:tcPr>
+                  <a:tcPr marL="91440" marR="91440" marT="45720" marB="45720">
                     <a:lnL w="6350" cap="flat" cmpd="sng" algn="ctr">
                       <a:solidFill>
                         <a:srgbClr val="E2E8F0"/>
@@ -18732,7 +18149,7 @@
                     <a:bodyPr/>
                     <a:lstStyle/>
                     <a:p>
-                      <a:pPr marL="0" indent="0" algn="l">
+                      <a:pPr algn="l" indent="0" marL="0">
                         <a:buNone/>
                       </a:pPr>
                       <a:r>
@@ -18753,7 +18170,7 @@
                       </a:endParaRPr>
                     </a:p>
                   </a:txBody>
-                  <a:tcPr>
+                  <a:tcPr marL="91440" marR="91440" marT="45720" marB="45720">
                     <a:lnL w="6350" cap="flat" cmpd="sng" algn="ctr">
                       <a:solidFill>
                         <a:srgbClr val="E2E8F0"/>
@@ -18800,7 +18217,7 @@
                     <a:bodyPr/>
                     <a:lstStyle/>
                     <a:p>
-                      <a:pPr marL="0" indent="0" algn="l">
+                      <a:pPr algn="l" indent="0" marL="0">
                         <a:buNone/>
                       </a:pPr>
                       <a:r>
@@ -18821,7 +18238,7 @@
                       </a:endParaRPr>
                     </a:p>
                   </a:txBody>
-                  <a:tcPr>
+                  <a:tcPr marL="91440" marR="91440" marT="45720" marB="45720">
                     <a:lnL w="6350" cap="flat" cmpd="sng" algn="ctr">
                       <a:solidFill>
                         <a:srgbClr val="E2E8F0"/>
@@ -18863,11 +18280,6 @@
                     </a:solidFill>
                   </a:tcPr>
                 </a:tc>
-                <a:extLst>
-                  <a:ext uri="{0D108BD9-81ED-4DB2-BD59-A6C34878D82A}">
-                    <a16:rowId xmlns:a16="http://schemas.microsoft.com/office/drawing/2014/main" val="10003"/>
-                  </a:ext>
-                </a:extLst>
               </a:tr>
               <a:tr h="384048">
                 <a:tc>
@@ -18875,7 +18287,7 @@
                     <a:bodyPr/>
                     <a:lstStyle/>
                     <a:p>
-                      <a:pPr marL="0" indent="0" algn="l">
+                      <a:pPr algn="l" indent="0" marL="0">
                         <a:buNone/>
                       </a:pPr>
                       <a:r>
@@ -18896,7 +18308,7 @@
                       </a:endParaRPr>
                     </a:p>
                   </a:txBody>
-                  <a:tcPr>
+                  <a:tcPr marL="91440" marR="91440" marT="45720" marB="45720">
                     <a:lnL w="6350" cap="flat" cmpd="sng" algn="ctr">
                       <a:solidFill>
                         <a:srgbClr val="E2E8F0"/>
@@ -18943,7 +18355,7 @@
                     <a:bodyPr/>
                     <a:lstStyle/>
                     <a:p>
-                      <a:pPr marL="0" indent="0" algn="l">
+                      <a:pPr algn="l" indent="0" marL="0">
                         <a:buNone/>
                       </a:pPr>
                       <a:r>
@@ -18964,7 +18376,7 @@
                       </a:endParaRPr>
                     </a:p>
                   </a:txBody>
-                  <a:tcPr>
+                  <a:tcPr marL="91440" marR="91440" marT="45720" marB="45720">
                     <a:lnL w="6350" cap="flat" cmpd="sng" algn="ctr">
                       <a:solidFill>
                         <a:srgbClr val="E2E8F0"/>
@@ -19011,7 +18423,7 @@
                     <a:bodyPr/>
                     <a:lstStyle/>
                     <a:p>
-                      <a:pPr marL="0" indent="0" algn="l">
+                      <a:pPr algn="l" indent="0" marL="0">
                         <a:buNone/>
                       </a:pPr>
                       <a:r>
@@ -19032,7 +18444,7 @@
                       </a:endParaRPr>
                     </a:p>
                   </a:txBody>
-                  <a:tcPr>
+                  <a:tcPr marL="91440" marR="91440" marT="45720" marB="45720">
                     <a:lnL w="6350" cap="flat" cmpd="sng" algn="ctr">
                       <a:solidFill>
                         <a:srgbClr val="E2E8F0"/>
@@ -19074,11 +18486,6 @@
                     </a:solidFill>
                   </a:tcPr>
                 </a:tc>
-                <a:extLst>
-                  <a:ext uri="{0D108BD9-81ED-4DB2-BD59-A6C34878D82A}">
-                    <a16:rowId xmlns:a16="http://schemas.microsoft.com/office/drawing/2014/main" val="10004"/>
-                  </a:ext>
-                </a:extLst>
               </a:tr>
               <a:tr h="384048">
                 <a:tc>
@@ -19086,7 +18493,7 @@
                     <a:bodyPr/>
                     <a:lstStyle/>
                     <a:p>
-                      <a:pPr marL="0" indent="0" algn="l">
+                      <a:pPr algn="l" indent="0" marL="0">
                         <a:buNone/>
                       </a:pPr>
                       <a:r>
@@ -19107,7 +18514,7 @@
                       </a:endParaRPr>
                     </a:p>
                   </a:txBody>
-                  <a:tcPr>
+                  <a:tcPr marL="91440" marR="91440" marT="45720" marB="45720">
                     <a:lnL w="6350" cap="flat" cmpd="sng" algn="ctr">
                       <a:solidFill>
                         <a:srgbClr val="E2E8F0"/>
@@ -19154,7 +18561,7 @@
                     <a:bodyPr/>
                     <a:lstStyle/>
                     <a:p>
-                      <a:pPr marL="0" indent="0" algn="l">
+                      <a:pPr algn="l" indent="0" marL="0">
                         <a:buNone/>
                       </a:pPr>
                       <a:r>
@@ -19175,7 +18582,7 @@
                       </a:endParaRPr>
                     </a:p>
                   </a:txBody>
-                  <a:tcPr>
+                  <a:tcPr marL="91440" marR="91440" marT="45720" marB="45720">
                     <a:lnL w="6350" cap="flat" cmpd="sng" algn="ctr">
                       <a:solidFill>
                         <a:srgbClr val="E2E8F0"/>
@@ -19222,7 +18629,7 @@
                     <a:bodyPr/>
                     <a:lstStyle/>
                     <a:p>
-                      <a:pPr marL="0" indent="0" algn="l">
+                      <a:pPr algn="l" indent="0" marL="0">
                         <a:buNone/>
                       </a:pPr>
                       <a:r>
@@ -19243,7 +18650,7 @@
                       </a:endParaRPr>
                     </a:p>
                   </a:txBody>
-                  <a:tcPr>
+                  <a:tcPr marL="91440" marR="91440" marT="45720" marB="45720">
                     <a:lnL w="6350" cap="flat" cmpd="sng" algn="ctr">
                       <a:solidFill>
                         <a:srgbClr val="E2E8F0"/>
@@ -19285,11 +18692,6 @@
                     </a:solidFill>
                   </a:tcPr>
                 </a:tc>
-                <a:extLst>
-                  <a:ext uri="{0D108BD9-81ED-4DB2-BD59-A6C34878D82A}">
-                    <a16:rowId xmlns:a16="http://schemas.microsoft.com/office/drawing/2014/main" val="10005"/>
-                  </a:ext>
-                </a:extLst>
               </a:tr>
               <a:tr h="384048">
                 <a:tc>
@@ -19297,7 +18699,7 @@
                     <a:bodyPr/>
                     <a:lstStyle/>
                     <a:p>
-                      <a:pPr marL="0" indent="0" algn="l">
+                      <a:pPr algn="l" indent="0" marL="0">
                         <a:buNone/>
                       </a:pPr>
                       <a:r>
@@ -19318,7 +18720,7 @@
                       </a:endParaRPr>
                     </a:p>
                   </a:txBody>
-                  <a:tcPr>
+                  <a:tcPr marL="91440" marR="91440" marT="45720" marB="45720">
                     <a:lnL w="6350" cap="flat" cmpd="sng" algn="ctr">
                       <a:solidFill>
                         <a:srgbClr val="E2E8F0"/>
@@ -19365,7 +18767,7 @@
                     <a:bodyPr/>
                     <a:lstStyle/>
                     <a:p>
-                      <a:pPr marL="0" indent="0" algn="l">
+                      <a:pPr algn="l" indent="0" marL="0">
                         <a:buNone/>
                       </a:pPr>
                       <a:r>
@@ -19386,7 +18788,7 @@
                       </a:endParaRPr>
                     </a:p>
                   </a:txBody>
-                  <a:tcPr>
+                  <a:tcPr marL="91440" marR="91440" marT="45720" marB="45720">
                     <a:lnL w="6350" cap="flat" cmpd="sng" algn="ctr">
                       <a:solidFill>
                         <a:srgbClr val="E2E8F0"/>
@@ -19433,7 +18835,7 @@
                     <a:bodyPr/>
                     <a:lstStyle/>
                     <a:p>
-                      <a:pPr marL="0" indent="0" algn="l">
+                      <a:pPr algn="l" indent="0" marL="0">
                         <a:buNone/>
                       </a:pPr>
                       <a:r>
@@ -19454,7 +18856,7 @@
                       </a:endParaRPr>
                     </a:p>
                   </a:txBody>
-                  <a:tcPr>
+                  <a:tcPr marL="91440" marR="91440" marT="45720" marB="45720">
                     <a:lnL w="6350" cap="flat" cmpd="sng" algn="ctr">
                       <a:solidFill>
                         <a:srgbClr val="E2E8F0"/>
@@ -19496,11 +18898,6 @@
                     </a:solidFill>
                   </a:tcPr>
                 </a:tc>
-                <a:extLst>
-                  <a:ext uri="{0D108BD9-81ED-4DB2-BD59-A6C34878D82A}">
-                    <a16:rowId xmlns:a16="http://schemas.microsoft.com/office/drawing/2014/main" val="10006"/>
-                  </a:ext>
-                </a:extLst>
               </a:tr>
               <a:tr h="384048">
                 <a:tc>
@@ -19508,7 +18905,7 @@
                     <a:bodyPr/>
                     <a:lstStyle/>
                     <a:p>
-                      <a:pPr marL="0" indent="0" algn="l">
+                      <a:pPr algn="l" indent="0" marL="0">
                         <a:buNone/>
                       </a:pPr>
                       <a:r>
@@ -19529,7 +18926,7 @@
                       </a:endParaRPr>
                     </a:p>
                   </a:txBody>
-                  <a:tcPr>
+                  <a:tcPr marL="91440" marR="91440" marT="45720" marB="45720">
                     <a:lnL w="6350" cap="flat" cmpd="sng" algn="ctr">
                       <a:solidFill>
                         <a:srgbClr val="E2E8F0"/>
@@ -19576,7 +18973,7 @@
                     <a:bodyPr/>
                     <a:lstStyle/>
                     <a:p>
-                      <a:pPr marL="0" indent="0" algn="l">
+                      <a:pPr algn="l" indent="0" marL="0">
                         <a:buNone/>
                       </a:pPr>
                       <a:r>
@@ -19597,7 +18994,7 @@
                       </a:endParaRPr>
                     </a:p>
                   </a:txBody>
-                  <a:tcPr>
+                  <a:tcPr marL="91440" marR="91440" marT="45720" marB="45720">
                     <a:lnL w="6350" cap="flat" cmpd="sng" algn="ctr">
                       <a:solidFill>
                         <a:srgbClr val="E2E8F0"/>
@@ -19644,7 +19041,7 @@
                     <a:bodyPr/>
                     <a:lstStyle/>
                     <a:p>
-                      <a:pPr marL="0" indent="0" algn="l">
+                      <a:pPr algn="l" indent="0" marL="0">
                         <a:buNone/>
                       </a:pPr>
                       <a:r>
@@ -19665,7 +19062,7 @@
                       </a:endParaRPr>
                     </a:p>
                   </a:txBody>
-                  <a:tcPr>
+                  <a:tcPr marL="91440" marR="91440" marT="45720" marB="45720">
                     <a:lnL w="6350" cap="flat" cmpd="sng" algn="ctr">
                       <a:solidFill>
                         <a:srgbClr val="E2E8F0"/>
@@ -19707,11 +19104,6 @@
                     </a:solidFill>
                   </a:tcPr>
                 </a:tc>
-                <a:extLst>
-                  <a:ext uri="{0D108BD9-81ED-4DB2-BD59-A6C34878D82A}">
-                    <a16:rowId xmlns:a16="http://schemas.microsoft.com/office/drawing/2014/main" val="10007"/>
-                  </a:ext>
-                </a:extLst>
               </a:tr>
               <a:tr h="384048">
                 <a:tc>
@@ -19719,7 +19111,7 @@
                     <a:bodyPr/>
                     <a:lstStyle/>
                     <a:p>
-                      <a:pPr marL="0" indent="0" algn="l">
+                      <a:pPr algn="l" indent="0" marL="0">
                         <a:buNone/>
                       </a:pPr>
                       <a:r>
@@ -19740,7 +19132,7 @@
                       </a:endParaRPr>
                     </a:p>
                   </a:txBody>
-                  <a:tcPr>
+                  <a:tcPr marL="91440" marR="91440" marT="45720" marB="45720">
                     <a:lnL w="6350" cap="flat" cmpd="sng" algn="ctr">
                       <a:solidFill>
                         <a:srgbClr val="E2E8F0"/>
@@ -19787,7 +19179,7 @@
                     <a:bodyPr/>
                     <a:lstStyle/>
                     <a:p>
-                      <a:pPr marL="0" indent="0" algn="l">
+                      <a:pPr algn="l" indent="0" marL="0">
                         <a:buNone/>
                       </a:pPr>
                       <a:r>
@@ -19808,7 +19200,7 @@
                       </a:endParaRPr>
                     </a:p>
                   </a:txBody>
-                  <a:tcPr>
+                  <a:tcPr marL="91440" marR="91440" marT="45720" marB="45720">
                     <a:lnL w="6350" cap="flat" cmpd="sng" algn="ctr">
                       <a:solidFill>
                         <a:srgbClr val="E2E8F0"/>
@@ -19855,7 +19247,7 @@
                     <a:bodyPr/>
                     <a:lstStyle/>
                     <a:p>
-                      <a:pPr marL="0" indent="0" algn="l">
+                      <a:pPr algn="l" indent="0" marL="0">
                         <a:buNone/>
                       </a:pPr>
                       <a:r>
@@ -19876,7 +19268,7 @@
                       </a:endParaRPr>
                     </a:p>
                   </a:txBody>
-                  <a:tcPr>
+                  <a:tcPr marL="91440" marR="91440" marT="45720" marB="45720">
                     <a:lnL w="6350" cap="flat" cmpd="sng" algn="ctr">
                       <a:solidFill>
                         <a:srgbClr val="E2E8F0"/>
@@ -19918,11 +19310,6 @@
                     </a:solidFill>
                   </a:tcPr>
                 </a:tc>
-                <a:extLst>
-                  <a:ext uri="{0D108BD9-81ED-4DB2-BD59-A6C34878D82A}">
-                    <a16:rowId xmlns:a16="http://schemas.microsoft.com/office/drawing/2014/main" val="10008"/>
-                  </a:ext>
-                </a:extLst>
               </a:tr>
             </a:tbl>
           </a:graphicData>
@@ -19949,7 +19336,7 @@
           <a:bodyPr wrap="square" lIns="0" tIns="0" rIns="0" bIns="0" rtlCol="0" anchor="ctr"/>
           <a:lstStyle/>
           <a:p>
-            <a:pPr marL="0" indent="0" algn="l">
+            <a:pPr algn="l" indent="0" marL="0">
               <a:buNone/>
             </a:pPr>
             <a:r>
@@ -19988,7 +19375,7 @@
           <a:bodyPr wrap="square" lIns="0" tIns="0" rIns="0" bIns="0" rtlCol="0" anchor="ctr"/>
           <a:lstStyle/>
           <a:p>
-            <a:pPr marL="0" indent="0" algn="r">
+            <a:pPr algn="r" indent="0" marL="0">
               <a:buNone/>
             </a:pPr>
             <a:r>
@@ -20022,7 +19409,6 @@
         <a:solidFill>
           <a:srgbClr val="FFFFFF"/>
         </a:solidFill>
-        <a:effectLst/>
       </p:bgPr>
     </p:bg>
     <p:spTree>
@@ -20060,11 +19446,11 @@
           <a:bodyPr wrap="square" lIns="0" tIns="0" rIns="0" bIns="0" rtlCol="0" anchor="ctr"/>
           <a:lstStyle/>
           <a:p>
-            <a:pPr marL="0" indent="0">
-              <a:buNone/>
-            </a:pPr>
-            <a:r>
-              <a:rPr lang="en-US" sz="1100" b="1" kern="0" spc="400" dirty="0">
+            <a:pPr indent="0" marL="0">
+              <a:buNone/>
+            </a:pPr>
+            <a:r>
+              <a:rPr lang="en-US" sz="1100" b="1" spc="400" kern="0" dirty="0">
                 <a:solidFill>
                   <a:srgbClr val="1C7293"/>
                 </a:solidFill>
@@ -20099,7 +19485,7 @@
           <a:bodyPr wrap="square" lIns="0" tIns="0" rIns="0" bIns="0" rtlCol="0" anchor="ctr"/>
           <a:lstStyle/>
           <a:p>
-            <a:pPr marL="0" indent="0">
+            <a:pPr indent="0" marL="0">
               <a:buNone/>
             </a:pPr>
             <a:r>
@@ -20141,20 +19527,13 @@
             <a:prstDash val="solid"/>
           </a:ln>
           <a:effectLst>
-            <a:outerShdw blurRad="101600" dist="12700" dir="5400000" algn="bl" rotWithShape="0">
+            <a:outerShdw sx="100000" sy="100000" kx="0" ky="0" algn="bl" rotWithShape="0" blurRad="101600" dist="12700" dir="5400000">
               <a:srgbClr val="94A3B8">
                 <a:alpha val="12000"/>
               </a:srgbClr>
             </a:outerShdw>
           </a:effectLst>
         </p:spPr>
-        <p:txBody>
-          <a:bodyPr/>
-          <a:lstStyle/>
-          <a:p>
-            <a:endParaRPr lang="en-US"/>
-          </a:p>
-        </p:txBody>
       </p:sp>
       <p:sp>
         <p:nvSpPr>
@@ -20180,13 +19559,6 @@
             <a:prstDash val="solid"/>
           </a:ln>
         </p:spPr>
-        <p:txBody>
-          <a:bodyPr/>
-          <a:lstStyle/>
-          <a:p>
-            <a:endParaRPr lang="en-US"/>
-          </a:p>
-        </p:txBody>
       </p:sp>
       <p:sp>
         <p:nvSpPr>
@@ -20209,7 +19581,7 @@
           <a:bodyPr wrap="square" lIns="0" tIns="0" rIns="0" bIns="0" rtlCol="0" anchor="ctr"/>
           <a:lstStyle/>
           <a:p>
-            <a:pPr marL="0" indent="0">
+            <a:pPr indent="0" marL="0">
               <a:buNone/>
             </a:pPr>
             <a:r>
@@ -20248,7 +19620,7 @@
           <a:bodyPr wrap="square" lIns="0" tIns="0" rIns="0" bIns="0" rtlCol="0" anchor="ctr"/>
           <a:lstStyle/>
           <a:p>
-            <a:pPr marL="0" indent="0">
+            <a:pPr indent="0" marL="0">
               <a:buNone/>
             </a:pPr>
             <a:r>
@@ -20290,20 +19662,13 @@
             <a:prstDash val="solid"/>
           </a:ln>
           <a:effectLst>
-            <a:outerShdw blurRad="101600" dist="12700" dir="5400000" algn="bl" rotWithShape="0">
+            <a:outerShdw sx="100000" sy="100000" kx="0" ky="0" algn="bl" rotWithShape="0" blurRad="101600" dist="12700" dir="5400000">
               <a:srgbClr val="94A3B8">
                 <a:alpha val="12000"/>
               </a:srgbClr>
             </a:outerShdw>
           </a:effectLst>
         </p:spPr>
-        <p:txBody>
-          <a:bodyPr/>
-          <a:lstStyle/>
-          <a:p>
-            <a:endParaRPr lang="en-US"/>
-          </a:p>
-        </p:txBody>
       </p:sp>
       <p:sp>
         <p:nvSpPr>
@@ -20329,13 +19694,6 @@
             <a:prstDash val="solid"/>
           </a:ln>
         </p:spPr>
-        <p:txBody>
-          <a:bodyPr/>
-          <a:lstStyle/>
-          <a:p>
-            <a:endParaRPr lang="en-US"/>
-          </a:p>
-        </p:txBody>
       </p:sp>
       <p:sp>
         <p:nvSpPr>
@@ -20358,7 +19716,7 @@
           <a:bodyPr wrap="square" lIns="0" tIns="0" rIns="0" bIns="0" rtlCol="0" anchor="ctr"/>
           <a:lstStyle/>
           <a:p>
-            <a:pPr marL="0" indent="0">
+            <a:pPr indent="0" marL="0">
               <a:buNone/>
             </a:pPr>
             <a:r>
@@ -20370,7 +19728,7 @@
                 <a:ea typeface="Trebuchet MS" pitchFamily="34" charset="-122"/>
                 <a:cs typeface="Trebuchet MS" pitchFamily="34" charset="-120"/>
               </a:rPr>
-              <a:t>OSMnx + NetworkX</a:t>
+              <a:t>OSMnx</a:t>
             </a:r>
             <a:endParaRPr lang="en-US" sz="1350" dirty="0"/>
           </a:p>
@@ -20397,7 +19755,7 @@
           <a:bodyPr wrap="square" lIns="0" tIns="0" rIns="0" bIns="0" rtlCol="0" anchor="ctr"/>
           <a:lstStyle/>
           <a:p>
-            <a:pPr marL="0" indent="0">
+            <a:pPr indent="0" marL="0">
               <a:buNone/>
             </a:pPr>
             <a:r>
@@ -20409,7 +19767,7 @@
                 <a:ea typeface="Calibri" pitchFamily="34" charset="-122"/>
                 <a:cs typeface="Calibri" pitchFamily="34" charset="-120"/>
               </a:rPr>
-              <a:t>Walking-Graph laden, Isochronen via ego_graph (gewichtete Gehzeit).</a:t>
+              <a:t>Overpass-API-Zugriff + Walking-Graph-Aufbau in einer Zeile.</a:t>
             </a:r>
             <a:endParaRPr lang="en-US" sz="1050" dirty="0"/>
           </a:p>
@@ -20439,20 +19797,13 @@
             <a:prstDash val="solid"/>
           </a:ln>
           <a:effectLst>
-            <a:outerShdw blurRad="101600" dist="12700" dir="5400000" algn="bl" rotWithShape="0">
+            <a:outerShdw sx="100000" sy="100000" kx="0" ky="0" algn="bl" rotWithShape="0" blurRad="101600" dist="12700" dir="5400000">
               <a:srgbClr val="94A3B8">
                 <a:alpha val="12000"/>
               </a:srgbClr>
             </a:outerShdw>
           </a:effectLst>
         </p:spPr>
-        <p:txBody>
-          <a:bodyPr/>
-          <a:lstStyle/>
-          <a:p>
-            <a:endParaRPr lang="en-US"/>
-          </a:p>
-        </p:txBody>
       </p:sp>
       <p:sp>
         <p:nvSpPr>
@@ -20478,13 +19829,6 @@
             <a:prstDash val="solid"/>
           </a:ln>
         </p:spPr>
-        <p:txBody>
-          <a:bodyPr/>
-          <a:lstStyle/>
-          <a:p>
-            <a:endParaRPr lang="en-US"/>
-          </a:p>
-        </p:txBody>
       </p:sp>
       <p:sp>
         <p:nvSpPr>
@@ -20507,7 +19851,7 @@
           <a:bodyPr wrap="square" lIns="0" tIns="0" rIns="0" bIns="0" rtlCol="0" anchor="ctr"/>
           <a:lstStyle/>
           <a:p>
-            <a:pPr marL="0" indent="0">
+            <a:pPr indent="0" marL="0">
               <a:buNone/>
             </a:pPr>
             <a:r>
@@ -20519,7 +19863,7 @@
                 <a:ea typeface="Trebuchet MS" pitchFamily="34" charset="-122"/>
                 <a:cs typeface="Trebuchet MS" pitchFamily="34" charset="-120"/>
               </a:rPr>
-              <a:t>PostGIS 3.4</a:t>
+              <a:t>NetworkX</a:t>
             </a:r>
             <a:endParaRPr lang="en-US" sz="1350" dirty="0"/>
           </a:p>
@@ -20546,7 +19890,7 @@
           <a:bodyPr wrap="square" lIns="0" tIns="0" rIns="0" bIns="0" rtlCol="0" anchor="ctr"/>
           <a:lstStyle/>
           <a:p>
-            <a:pPr marL="0" indent="0">
+            <a:pPr indent="0" marL="0">
               <a:buNone/>
             </a:pPr>
             <a:r>
@@ -20558,7 +19902,7 @@
                 <a:ea typeface="Calibri" pitchFamily="34" charset="-122"/>
                 <a:cs typeface="Calibri" pitchFamily="34" charset="-120"/>
               </a:rPr>
-              <a:t>Zentrale Speicherung, räumliche SQL-Joins, Indizes (GIST).</a:t>
+              <a:t>single_source_dijkstra für topografischen Score — 33 s für 8092 POIs.</a:t>
             </a:r>
             <a:endParaRPr lang="en-US" sz="1050" dirty="0"/>
           </a:p>
@@ -20588,20 +19932,13 @@
             <a:prstDash val="solid"/>
           </a:ln>
           <a:effectLst>
-            <a:outerShdw blurRad="101600" dist="12700" dir="5400000" algn="bl" rotWithShape="0">
+            <a:outerShdw sx="100000" sy="100000" kx="0" ky="0" algn="bl" rotWithShape="0" blurRad="101600" dist="12700" dir="5400000">
               <a:srgbClr val="94A3B8">
                 <a:alpha val="12000"/>
               </a:srgbClr>
             </a:outerShdw>
           </a:effectLst>
         </p:spPr>
-        <p:txBody>
-          <a:bodyPr/>
-          <a:lstStyle/>
-          <a:p>
-            <a:endParaRPr lang="en-US"/>
-          </a:p>
-        </p:txBody>
       </p:sp>
       <p:sp>
         <p:nvSpPr>
@@ -20627,13 +19964,6 @@
             <a:prstDash val="solid"/>
           </a:ln>
         </p:spPr>
-        <p:txBody>
-          <a:bodyPr/>
-          <a:lstStyle/>
-          <a:p>
-            <a:endParaRPr lang="en-US"/>
-          </a:p>
-        </p:txBody>
       </p:sp>
       <p:sp>
         <p:nvSpPr>
@@ -20656,7 +19986,7 @@
           <a:bodyPr wrap="square" lIns="0" tIns="0" rIns="0" bIns="0" rtlCol="0" anchor="ctr"/>
           <a:lstStyle/>
           <a:p>
-            <a:pPr marL="0" indent="0">
+            <a:pPr indent="0" marL="0">
               <a:buNone/>
             </a:pPr>
             <a:r>
@@ -20668,7 +19998,7 @@
                 <a:ea typeface="Trebuchet MS" pitchFamily="34" charset="-122"/>
                 <a:cs typeface="Trebuchet MS" pitchFamily="34" charset="-120"/>
               </a:rPr>
-              <a:t>osm2pgsql</a:t>
+              <a:t>PostGIS 3.4</a:t>
             </a:r>
             <a:endParaRPr lang="en-US" sz="1350" dirty="0"/>
           </a:p>
@@ -20695,7 +20025,7 @@
           <a:bodyPr wrap="square" lIns="0" tIns="0" rIns="0" bIns="0" rtlCol="0" anchor="ctr"/>
           <a:lstStyle/>
           <a:p>
-            <a:pPr marL="0" indent="0">
+            <a:pPr indent="0" marL="0">
               <a:buNone/>
             </a:pPr>
             <a:r>
@@ -20707,7 +20037,7 @@
                 <a:ea typeface="Calibri" pitchFamily="34" charset="-122"/>
                 <a:cs typeface="Calibri" pitchFamily="34" charset="-120"/>
               </a:rPr>
-              <a:t>Vollständiger Import des CH-PBF in planet_osm_*-Tabellen.</a:t>
+              <a:t>Zentrale Speicherung, räumliche SQL-Joins, GIST-Indizes.</a:t>
             </a:r>
             <a:endParaRPr lang="en-US" sz="1050" dirty="0"/>
           </a:p>
@@ -20737,20 +20067,13 @@
             <a:prstDash val="solid"/>
           </a:ln>
           <a:effectLst>
-            <a:outerShdw blurRad="101600" dist="12700" dir="5400000" algn="bl" rotWithShape="0">
+            <a:outerShdw sx="100000" sy="100000" kx="0" ky="0" algn="bl" rotWithShape="0" blurRad="101600" dist="12700" dir="5400000">
               <a:srgbClr val="94A3B8">
                 <a:alpha val="12000"/>
               </a:srgbClr>
             </a:outerShdw>
           </a:effectLst>
         </p:spPr>
-        <p:txBody>
-          <a:bodyPr/>
-          <a:lstStyle/>
-          <a:p>
-            <a:endParaRPr lang="en-US"/>
-          </a:p>
-        </p:txBody>
       </p:sp>
       <p:sp>
         <p:nvSpPr>
@@ -20776,13 +20099,6 @@
             <a:prstDash val="solid"/>
           </a:ln>
         </p:spPr>
-        <p:txBody>
-          <a:bodyPr/>
-          <a:lstStyle/>
-          <a:p>
-            <a:endParaRPr lang="en-US"/>
-          </a:p>
-        </p:txBody>
       </p:sp>
       <p:sp>
         <p:nvSpPr>
@@ -20805,7 +20121,7 @@
           <a:bodyPr wrap="square" lIns="0" tIns="0" rIns="0" bIns="0" rtlCol="0" anchor="ctr"/>
           <a:lstStyle/>
           <a:p>
-            <a:pPr marL="0" indent="0">
+            <a:pPr indent="0" marL="0">
               <a:buNone/>
             </a:pPr>
             <a:r>
@@ -20844,7 +20160,7 @@
           <a:bodyPr wrap="square" lIns="0" tIns="0" rIns="0" bIns="0" rtlCol="0" anchor="ctr"/>
           <a:lstStyle/>
           <a:p>
-            <a:pPr marL="0" indent="0">
+            <a:pPr indent="0" marL="0">
               <a:buNone/>
             </a:pPr>
             <a:r>
@@ -20856,7 +20172,7 @@
                 <a:ea typeface="Calibri" pitchFamily="34" charset="-122"/>
                 <a:cs typeface="Calibri" pitchFamily="34" charset="-120"/>
               </a:rPr>
-              <a:t>Distanz-Lookup für Score: O((n+m)·log n) statt O(n·m).</a:t>
+              <a:t>Distanz-Lookup für Score: 6 min naiv → &lt; 1 s, Faktor ~400.</a:t>
             </a:r>
             <a:endParaRPr lang="en-US" sz="1050" dirty="0"/>
           </a:p>
@@ -20886,20 +20202,13 @@
             <a:prstDash val="solid"/>
           </a:ln>
           <a:effectLst>
-            <a:outerShdw blurRad="101600" dist="12700" dir="5400000" algn="bl" rotWithShape="0">
+            <a:outerShdw sx="100000" sy="100000" kx="0" ky="0" algn="bl" rotWithShape="0" blurRad="101600" dist="12700" dir="5400000">
               <a:srgbClr val="94A3B8">
                 <a:alpha val="12000"/>
               </a:srgbClr>
             </a:outerShdw>
           </a:effectLst>
         </p:spPr>
-        <p:txBody>
-          <a:bodyPr/>
-          <a:lstStyle/>
-          <a:p>
-            <a:endParaRPr lang="en-US"/>
-          </a:p>
-        </p:txBody>
       </p:sp>
       <p:sp>
         <p:nvSpPr>
@@ -20925,13 +20234,6 @@
             <a:prstDash val="solid"/>
           </a:ln>
         </p:spPr>
-        <p:txBody>
-          <a:bodyPr/>
-          <a:lstStyle/>
-          <a:p>
-            <a:endParaRPr lang="en-US"/>
-          </a:p>
-        </p:txBody>
       </p:sp>
       <p:sp>
         <p:nvSpPr>
@@ -20954,7 +20256,7 @@
           <a:bodyPr wrap="square" lIns="0" tIns="0" rIns="0" bIns="0" rtlCol="0" anchor="ctr"/>
           <a:lstStyle/>
           <a:p>
-            <a:pPr marL="0" indent="0">
+            <a:pPr indent="0" marL="0">
               <a:buNone/>
             </a:pPr>
             <a:r>
@@ -20966,7 +20268,7 @@
                 <a:ea typeface="Trebuchet MS" pitchFamily="34" charset="-122"/>
                 <a:cs typeface="Trebuchet MS" pitchFamily="34" charset="-120"/>
               </a:rPr>
-              <a:t>QGIS 3.40 LTR</a:t>
+              <a:t>statsmodels</a:t>
             </a:r>
             <a:endParaRPr lang="en-US" sz="1350" dirty="0"/>
           </a:p>
@@ -20993,7 +20295,7 @@
           <a:bodyPr wrap="square" lIns="0" tIns="0" rIns="0" bIns="0" rtlCol="0" anchor="ctr"/>
           <a:lstStyle/>
           <a:p>
-            <a:pPr marL="0" indent="0">
+            <a:pPr indent="0" marL="0">
               <a:buNone/>
             </a:pPr>
             <a:r>
@@ -21005,7 +20307,7 @@
                 <a:ea typeface="Calibri" pitchFamily="34" charset="-122"/>
                 <a:cs typeface="Calibri" pitchFamily="34" charset="-120"/>
               </a:rPr>
-              <a:t>3D-Visualisierung (Score als Höhe), Print-Layout, Live-Demo.</a:t>
+              <a:t>Multivariate OLS-Regression im Robustness Check (R² = 0.91).</a:t>
             </a:r>
             <a:endParaRPr lang="en-US" sz="1050" dirty="0"/>
           </a:p>
@@ -21032,7 +20334,7 @@
           <a:bodyPr wrap="square" lIns="0" tIns="0" rIns="0" bIns="0" rtlCol="0" anchor="ctr"/>
           <a:lstStyle/>
           <a:p>
-            <a:pPr marL="0" indent="0" algn="r">
+            <a:pPr algn="r" indent="0" marL="0">
               <a:buNone/>
             </a:pPr>
             <a:r>
@@ -21066,7 +20368,6 @@
         <a:solidFill>
           <a:srgbClr val="FFFFFF"/>
         </a:solidFill>
-        <a:effectLst/>
       </p:bgPr>
     </p:bg>
     <p:spTree>
@@ -21104,11 +20405,11 @@
           <a:bodyPr wrap="square" lIns="0" tIns="0" rIns="0" bIns="0" rtlCol="0" anchor="ctr"/>
           <a:lstStyle/>
           <a:p>
-            <a:pPr marL="0" indent="0">
-              <a:buNone/>
-            </a:pPr>
-            <a:r>
-              <a:rPr lang="en-US" sz="1100" b="1" kern="0" spc="400" dirty="0">
+            <a:pPr indent="0" marL="0">
+              <a:buNone/>
+            </a:pPr>
+            <a:r>
+              <a:rPr lang="en-US" sz="1100" b="1" spc="400" kern="0" dirty="0">
                 <a:solidFill>
                   <a:srgbClr val="1C7293"/>
                 </a:solidFill>
@@ -21143,7 +20444,7 @@
           <a:bodyPr wrap="square" lIns="0" tIns="0" rIns="0" bIns="0" rtlCol="0" anchor="ctr"/>
           <a:lstStyle/>
           <a:p>
-            <a:pPr marL="0" indent="0">
+            <a:pPr indent="0" marL="0">
               <a:buNone/>
             </a:pPr>
             <a:r>
@@ -21185,20 +20486,13 @@
             <a:prstDash val="solid"/>
           </a:ln>
           <a:effectLst>
-            <a:outerShdw blurRad="101600" dist="12700" dir="5400000" algn="bl" rotWithShape="0">
+            <a:outerShdw sx="100000" sy="100000" kx="0" ky="0" algn="bl" rotWithShape="0" blurRad="101600" dist="12700" dir="5400000">
               <a:srgbClr val="94A3B8">
                 <a:alpha val="12000"/>
               </a:srgbClr>
             </a:outerShdw>
           </a:effectLst>
         </p:spPr>
-        <p:txBody>
-          <a:bodyPr/>
-          <a:lstStyle/>
-          <a:p>
-            <a:endParaRPr lang="en-US"/>
-          </a:p>
-        </p:txBody>
       </p:sp>
       <p:sp>
         <p:nvSpPr>
@@ -21224,13 +20518,6 @@
             <a:prstDash val="solid"/>
           </a:ln>
         </p:spPr>
-        <p:txBody>
-          <a:bodyPr/>
-          <a:lstStyle/>
-          <a:p>
-            <a:endParaRPr lang="en-US"/>
-          </a:p>
-        </p:txBody>
       </p:sp>
       <p:sp>
         <p:nvSpPr>
@@ -21253,7 +20540,7 @@
           <a:bodyPr wrap="square" lIns="0" tIns="0" rIns="0" bIns="0" rtlCol="0" anchor="ctr"/>
           <a:lstStyle/>
           <a:p>
-            <a:pPr marL="0" indent="0">
+            <a:pPr indent="0" marL="0">
               <a:buNone/>
             </a:pPr>
             <a:r>
@@ -21292,7 +20579,7 @@
           <a:bodyPr wrap="square" lIns="0" tIns="0" rIns="0" bIns="0" rtlCol="0" anchor="ctr"/>
           <a:lstStyle/>
           <a:p>
-            <a:pPr marL="0" indent="0">
+            <a:pPr indent="0" marL="0">
               <a:buNone/>
             </a:pPr>
             <a:r>
@@ -21331,7 +20618,7 @@
           <a:bodyPr wrap="square" lIns="0" tIns="0" rIns="0" bIns="0" rtlCol="0" anchor="ctr"/>
           <a:lstStyle/>
           <a:p>
-            <a:pPr marL="0" indent="0">
+            <a:pPr indent="0" marL="0">
               <a:buNone/>
             </a:pPr>
             <a:r>
@@ -21370,7 +20657,7 @@
           <a:bodyPr wrap="square" lIns="0" tIns="0" rIns="0" bIns="0" rtlCol="0" anchor="ctr"/>
           <a:lstStyle/>
           <a:p>
-            <a:pPr marL="0" indent="0">
+            <a:pPr indent="0" marL="0">
               <a:buNone/>
             </a:pPr>
             <a:r>
@@ -21412,13 +20699,6 @@
             <a:prstDash val="solid"/>
           </a:ln>
         </p:spPr>
-        <p:txBody>
-          <a:bodyPr/>
-          <a:lstStyle/>
-          <a:p>
-            <a:endParaRPr lang="en-US"/>
-          </a:p>
-        </p:txBody>
       </p:sp>
       <p:sp>
         <p:nvSpPr>
@@ -21441,7 +20721,7 @@
           <a:bodyPr wrap="square" lIns="0" tIns="0" rIns="0" bIns="0" rtlCol="0" anchor="ctr"/>
           <a:lstStyle/>
           <a:p>
-            <a:pPr marL="0" indent="0" algn="ctr">
+            <a:pPr algn="ctr" indent="0" marL="0">
               <a:buNone/>
             </a:pPr>
             <a:r>
@@ -21480,7 +20760,7 @@
           <a:bodyPr wrap="square" lIns="0" tIns="0" rIns="0" bIns="0" rtlCol="0" anchor="ctr"/>
           <a:lstStyle/>
           <a:p>
-            <a:pPr marL="0" indent="0" algn="ctr">
+            <a:pPr algn="ctr" indent="0" marL="0">
               <a:buNone/>
             </a:pPr>
             <a:r>
@@ -21522,13 +20802,6 @@
             <a:prstDash val="solid"/>
           </a:ln>
         </p:spPr>
-        <p:txBody>
-          <a:bodyPr/>
-          <a:lstStyle/>
-          <a:p>
-            <a:endParaRPr lang="en-US"/>
-          </a:p>
-        </p:txBody>
       </p:sp>
       <p:sp>
         <p:nvSpPr>
@@ -21551,7 +20824,7 @@
           <a:bodyPr wrap="square" lIns="0" tIns="0" rIns="0" bIns="0" rtlCol="0" anchor="ctr"/>
           <a:lstStyle/>
           <a:p>
-            <a:pPr marL="0" indent="0" algn="ctr">
+            <a:pPr algn="ctr" indent="0" marL="0">
               <a:buNone/>
             </a:pPr>
             <a:r>
@@ -21590,7 +20863,7 @@
           <a:bodyPr wrap="square" lIns="0" tIns="0" rIns="0" bIns="0" rtlCol="0" anchor="ctr"/>
           <a:lstStyle/>
           <a:p>
-            <a:pPr marL="0" indent="0" algn="ctr">
+            <a:pPr algn="ctr" indent="0" marL="0">
               <a:buNone/>
             </a:pPr>
             <a:r>
@@ -21632,13 +20905,6 @@
             <a:prstDash val="solid"/>
           </a:ln>
         </p:spPr>
-        <p:txBody>
-          <a:bodyPr/>
-          <a:lstStyle/>
-          <a:p>
-            <a:endParaRPr lang="en-US"/>
-          </a:p>
-        </p:txBody>
       </p:sp>
       <p:sp>
         <p:nvSpPr>
@@ -21661,7 +20927,7 @@
           <a:bodyPr wrap="square" lIns="0" tIns="0" rIns="0" bIns="0" rtlCol="0" anchor="ctr"/>
           <a:lstStyle/>
           <a:p>
-            <a:pPr marL="0" indent="0" algn="ctr">
+            <a:pPr algn="ctr" indent="0" marL="0">
               <a:buNone/>
             </a:pPr>
             <a:r>
@@ -21700,7 +20966,7 @@
           <a:bodyPr wrap="square" lIns="0" tIns="0" rIns="0" bIns="0" rtlCol="0" anchor="ctr"/>
           <a:lstStyle/>
           <a:p>
-            <a:pPr marL="0" indent="0" algn="ctr">
+            <a:pPr algn="ctr" indent="0" marL="0">
               <a:buNone/>
             </a:pPr>
             <a:r>
@@ -21742,13 +21008,6 @@
             <a:prstDash val="solid"/>
           </a:ln>
         </p:spPr>
-        <p:txBody>
-          <a:bodyPr/>
-          <a:lstStyle/>
-          <a:p>
-            <a:endParaRPr lang="en-US"/>
-          </a:p>
-        </p:txBody>
       </p:sp>
       <p:sp>
         <p:nvSpPr>
@@ -21771,7 +21030,7 @@
           <a:bodyPr wrap="square" lIns="0" tIns="0" rIns="0" bIns="0" rtlCol="0" anchor="ctr"/>
           <a:lstStyle/>
           <a:p>
-            <a:pPr marL="0" indent="0" algn="ctr">
+            <a:pPr algn="ctr" indent="0" marL="0">
               <a:buNone/>
             </a:pPr>
             <a:r>
@@ -21810,7 +21069,7 @@
           <a:bodyPr wrap="square" lIns="0" tIns="0" rIns="0" bIns="0" rtlCol="0" anchor="ctr"/>
           <a:lstStyle/>
           <a:p>
-            <a:pPr marL="0" indent="0" algn="ctr">
+            <a:pPr algn="ctr" indent="0" marL="0">
               <a:buNone/>
             </a:pPr>
             <a:r>
@@ -21852,13 +21111,6 @@
             <a:prstDash val="solid"/>
           </a:ln>
         </p:spPr>
-        <p:txBody>
-          <a:bodyPr/>
-          <a:lstStyle/>
-          <a:p>
-            <a:endParaRPr lang="en-US"/>
-          </a:p>
-        </p:txBody>
       </p:sp>
       <p:sp>
         <p:nvSpPr>
@@ -21881,7 +21133,7 @@
           <a:bodyPr wrap="square" lIns="0" tIns="0" rIns="0" bIns="0" rtlCol="0" anchor="ctr"/>
           <a:lstStyle/>
           <a:p>
-            <a:pPr marL="0" indent="0" algn="ctr">
+            <a:pPr algn="ctr" indent="0" marL="0">
               <a:buNone/>
             </a:pPr>
             <a:r>
@@ -21920,7 +21172,7 @@
           <a:bodyPr wrap="square" lIns="0" tIns="0" rIns="0" bIns="0" rtlCol="0" anchor="ctr"/>
           <a:lstStyle/>
           <a:p>
-            <a:pPr marL="0" indent="0" algn="ctr">
+            <a:pPr algn="ctr" indent="0" marL="0">
               <a:buNone/>
             </a:pPr>
             <a:r>
@@ -21962,13 +21214,6 @@
             <a:prstDash val="solid"/>
           </a:ln>
         </p:spPr>
-        <p:txBody>
-          <a:bodyPr/>
-          <a:lstStyle/>
-          <a:p>
-            <a:endParaRPr lang="en-US"/>
-          </a:p>
-        </p:txBody>
       </p:sp>
       <p:sp>
         <p:nvSpPr>
@@ -21991,7 +21236,7 @@
           <a:bodyPr wrap="square" lIns="0" tIns="0" rIns="0" bIns="0" rtlCol="0" anchor="ctr"/>
           <a:lstStyle/>
           <a:p>
-            <a:pPr marL="0" indent="0" algn="ctr">
+            <a:pPr algn="ctr" indent="0" marL="0">
               <a:buNone/>
             </a:pPr>
             <a:r>
@@ -22030,7 +21275,7 @@
           <a:bodyPr wrap="square" lIns="0" tIns="0" rIns="0" bIns="0" rtlCol="0" anchor="ctr"/>
           <a:lstStyle/>
           <a:p>
-            <a:pPr marL="0" indent="0" algn="ctr">
+            <a:pPr algn="ctr" indent="0" marL="0">
               <a:buNone/>
             </a:pPr>
             <a:r>
@@ -22069,7 +21314,7 @@
           <a:bodyPr wrap="square" lIns="0" tIns="0" rIns="0" bIns="0" rtlCol="0" anchor="ctr"/>
           <a:lstStyle/>
           <a:p>
-            <a:pPr marL="0" indent="0" algn="l">
+            <a:pPr algn="l" indent="0" marL="0">
               <a:buNone/>
             </a:pPr>
             <a:r>
@@ -22108,7 +21353,7 @@
           <a:bodyPr wrap="square" lIns="0" tIns="0" rIns="0" bIns="0" rtlCol="0" anchor="ctr"/>
           <a:lstStyle/>
           <a:p>
-            <a:pPr marL="0" indent="0" algn="r">
+            <a:pPr algn="r" indent="0" marL="0">
               <a:buNone/>
             </a:pPr>
             <a:r>
@@ -22427,319 +21672,4 @@
     </a:ext>
   </a:extLst>
 </a:theme>
-</file>
-
-<file path=ppt/theme/theme2.xml><?xml version="1.0" encoding="utf-8"?>
-<a:theme xmlns:a="http://schemas.openxmlformats.org/drawingml/2006/main" name="Office Theme">
-  <a:themeElements>
-    <a:clrScheme name="Office">
-      <a:dk1>
-        <a:sysClr val="windowText" lastClr="000000"/>
-      </a:dk1>
-      <a:lt1>
-        <a:sysClr val="window" lastClr="FFFFFF"/>
-      </a:lt1>
-      <a:dk2>
-        <a:srgbClr val="0E2841"/>
-      </a:dk2>
-      <a:lt2>
-        <a:srgbClr val="E8E8E8"/>
-      </a:lt2>
-      <a:accent1>
-        <a:srgbClr val="156082"/>
-      </a:accent1>
-      <a:accent2>
-        <a:srgbClr val="E97132"/>
-      </a:accent2>
-      <a:accent3>
-        <a:srgbClr val="196B24"/>
-      </a:accent3>
-      <a:accent4>
-        <a:srgbClr val="0F9ED5"/>
-      </a:accent4>
-      <a:accent5>
-        <a:srgbClr val="A02B93"/>
-      </a:accent5>
-      <a:accent6>
-        <a:srgbClr val="4EA72E"/>
-      </a:accent6>
-      <a:hlink>
-        <a:srgbClr val="467886"/>
-      </a:hlink>
-      <a:folHlink>
-        <a:srgbClr val="96607D"/>
-      </a:folHlink>
-    </a:clrScheme>
-    <a:fontScheme name="Office">
-      <a:majorFont>
-        <a:latin typeface="Aptos Display" panose="02110004020202020204"/>
-        <a:ea typeface=""/>
-        <a:cs typeface=""/>
-        <a:font script="Jpan" typeface="游ゴシック Light"/>
-        <a:font script="Hang" typeface="맑은 고딕"/>
-        <a:font script="Hans" typeface="等线 Light"/>
-        <a:font script="Hant" typeface="新細明體"/>
-        <a:font script="Arab" typeface="Times New Roman"/>
-        <a:font script="Hebr" typeface="Times New Roman"/>
-        <a:font script="Thai" typeface="Angsana New"/>
-        <a:font script="Ethi" typeface="Nyala"/>
-        <a:font script="Beng" typeface="Vrinda"/>
-        <a:font script="Gujr" typeface="Shruti"/>
-        <a:font script="Khmr" typeface="MoolBoran"/>
-        <a:font script="Knda" typeface="Tunga"/>
-        <a:font script="Guru" typeface="Raavi"/>
-        <a:font script="Cans" typeface="Euphemia"/>
-        <a:font script="Cher" typeface="Plantagenet Cherokee"/>
-        <a:font script="Yiii" typeface="Microsoft Yi Baiti"/>
-        <a:font script="Tibt" typeface="Microsoft Himalaya"/>
-        <a:font script="Thaa" typeface="MV Boli"/>
-        <a:font script="Deva" typeface="Mangal"/>
-        <a:font script="Telu" typeface="Gautami"/>
-        <a:font script="Taml" typeface="Latha"/>
-        <a:font script="Syrc" typeface="Estrangelo Edessa"/>
-        <a:font script="Orya" typeface="Kalinga"/>
-        <a:font script="Mlym" typeface="Kartika"/>
-        <a:font script="Laoo" typeface="DokChampa"/>
-        <a:font script="Sinh" typeface="Iskoola Pota"/>
-        <a:font script="Mong" typeface="Mongolian Baiti"/>
-        <a:font script="Viet" typeface="Times New Roman"/>
-        <a:font script="Uigh" typeface="Microsoft Uighur"/>
-        <a:font script="Geor" typeface="Sylfaen"/>
-        <a:font script="Armn" typeface="Arial"/>
-        <a:font script="Bugi" typeface="Leelawadee UI"/>
-        <a:font script="Bopo" typeface="Microsoft JhengHei"/>
-        <a:font script="Java" typeface="Javanese Text"/>
-        <a:font script="Lisu" typeface="Segoe UI"/>
-        <a:font script="Mymr" typeface="Myanmar Text"/>
-        <a:font script="Nkoo" typeface="Ebrima"/>
-        <a:font script="Olck" typeface="Nirmala UI"/>
-        <a:font script="Osma" typeface="Ebrima"/>
-        <a:font script="Phag" typeface="Phagspa"/>
-        <a:font script="Syrn" typeface="Estrangelo Edessa"/>
-        <a:font script="Syrj" typeface="Estrangelo Edessa"/>
-        <a:font script="Syre" typeface="Estrangelo Edessa"/>
-        <a:font script="Sora" typeface="Nirmala UI"/>
-        <a:font script="Tale" typeface="Microsoft Tai Le"/>
-        <a:font script="Talu" typeface="Microsoft New Tai Lue"/>
-        <a:font script="Tfng" typeface="Ebrima"/>
-      </a:majorFont>
-      <a:minorFont>
-        <a:latin typeface="Aptos" panose="02110004020202020204"/>
-        <a:ea typeface=""/>
-        <a:cs typeface=""/>
-        <a:font script="Jpan" typeface="游ゴシック"/>
-        <a:font script="Hang" typeface="맑은 고딕"/>
-        <a:font script="Hans" typeface="等线"/>
-        <a:font script="Hant" typeface="新細明體"/>
-        <a:font script="Arab" typeface="Arial"/>
-        <a:font script="Hebr" typeface="Arial"/>
-        <a:font script="Thai" typeface="Cordia New"/>
-        <a:font script="Ethi" typeface="Nyala"/>
-        <a:font script="Beng" typeface="Vrinda"/>
-        <a:font script="Gujr" typeface="Shruti"/>
-        <a:font script="Khmr" typeface="DaunPenh"/>
-        <a:font script="Knda" typeface="Tunga"/>
-        <a:font script="Guru" typeface="Raavi"/>
-        <a:font script="Cans" typeface="Euphemia"/>
-        <a:font script="Cher" typeface="Plantagenet Cherokee"/>
-        <a:font script="Yiii" typeface="Microsoft Yi Baiti"/>
-        <a:font script="Tibt" typeface="Microsoft Himalaya"/>
-        <a:font script="Thaa" typeface="MV Boli"/>
-        <a:font script="Deva" typeface="Mangal"/>
-        <a:font script="Telu" typeface="Gautami"/>
-        <a:font script="Taml" typeface="Latha"/>
-        <a:font script="Syrc" typeface="Estrangelo Edessa"/>
-        <a:font script="Orya" typeface="Kalinga"/>
-        <a:font script="Mlym" typeface="Kartika"/>
-        <a:font script="Laoo" typeface="DokChampa"/>
-        <a:font script="Sinh" typeface="Iskoola Pota"/>
-        <a:font script="Mong" typeface="Mongolian Baiti"/>
-        <a:font script="Viet" typeface="Arial"/>
-        <a:font script="Uigh" typeface="Microsoft Uighur"/>
-        <a:font script="Geor" typeface="Sylfaen"/>
-        <a:font script="Armn" typeface="Arial"/>
-        <a:font script="Bugi" typeface="Leelawadee UI"/>
-        <a:font script="Bopo" typeface="Microsoft JhengHei"/>
-        <a:font script="Java" typeface="Javanese Text"/>
-        <a:font script="Lisu" typeface="Segoe UI"/>
-        <a:font script="Mymr" typeface="Myanmar Text"/>
-        <a:font script="Nkoo" typeface="Ebrima"/>
-        <a:font script="Olck" typeface="Nirmala UI"/>
-        <a:font script="Osma" typeface="Ebrima"/>
-        <a:font script="Phag" typeface="Phagspa"/>
-        <a:font script="Syrn" typeface="Estrangelo Edessa"/>
-        <a:font script="Syrj" typeface="Estrangelo Edessa"/>
-        <a:font script="Syre" typeface="Estrangelo Edessa"/>
-        <a:font script="Sora" typeface="Nirmala UI"/>
-        <a:font script="Tale" typeface="Microsoft Tai Le"/>
-        <a:font script="Talu" typeface="Microsoft New Tai Lue"/>
-        <a:font script="Tfng" typeface="Ebrima"/>
-      </a:minorFont>
-    </a:fontScheme>
-    <a:fmtScheme name="Office">
-      <a:fillStyleLst>
-        <a:solidFill>
-          <a:schemeClr val="phClr"/>
-        </a:solidFill>
-        <a:gradFill rotWithShape="1">
-          <a:gsLst>
-            <a:gs pos="0">
-              <a:schemeClr val="phClr">
-                <a:lumMod val="110000"/>
-                <a:satMod val="105000"/>
-                <a:tint val="67000"/>
-              </a:schemeClr>
-            </a:gs>
-            <a:gs pos="50000">
-              <a:schemeClr val="phClr">
-                <a:lumMod val="105000"/>
-                <a:satMod val="103000"/>
-                <a:tint val="73000"/>
-              </a:schemeClr>
-            </a:gs>
-            <a:gs pos="100000">
-              <a:schemeClr val="phClr">
-                <a:lumMod val="105000"/>
-                <a:satMod val="109000"/>
-                <a:tint val="81000"/>
-              </a:schemeClr>
-            </a:gs>
-          </a:gsLst>
-          <a:lin ang="5400000" scaled="0"/>
-        </a:gradFill>
-        <a:gradFill rotWithShape="1">
-          <a:gsLst>
-            <a:gs pos="0">
-              <a:schemeClr val="phClr">
-                <a:satMod val="103000"/>
-                <a:lumMod val="102000"/>
-                <a:tint val="94000"/>
-              </a:schemeClr>
-            </a:gs>
-            <a:gs pos="50000">
-              <a:schemeClr val="phClr">
-                <a:satMod val="110000"/>
-                <a:lumMod val="100000"/>
-                <a:shade val="100000"/>
-              </a:schemeClr>
-            </a:gs>
-            <a:gs pos="100000">
-              <a:schemeClr val="phClr">
-                <a:lumMod val="99000"/>
-                <a:satMod val="120000"/>
-                <a:shade val="78000"/>
-              </a:schemeClr>
-            </a:gs>
-          </a:gsLst>
-          <a:lin ang="5400000" scaled="0"/>
-        </a:gradFill>
-      </a:fillStyleLst>
-      <a:lnStyleLst>
-        <a:ln w="12700" cap="flat" cmpd="sng" algn="ctr">
-          <a:solidFill>
-            <a:schemeClr val="phClr"/>
-          </a:solidFill>
-          <a:prstDash val="solid"/>
-          <a:miter lim="800000"/>
-        </a:ln>
-        <a:ln w="19050" cap="flat" cmpd="sng" algn="ctr">
-          <a:solidFill>
-            <a:schemeClr val="phClr"/>
-          </a:solidFill>
-          <a:prstDash val="solid"/>
-          <a:miter lim="800000"/>
-        </a:ln>
-        <a:ln w="25400" cap="flat" cmpd="sng" algn="ctr">
-          <a:solidFill>
-            <a:schemeClr val="phClr"/>
-          </a:solidFill>
-          <a:prstDash val="solid"/>
-          <a:miter lim="800000"/>
-        </a:ln>
-      </a:lnStyleLst>
-      <a:effectStyleLst>
-        <a:effectStyle>
-          <a:effectLst/>
-        </a:effectStyle>
-        <a:effectStyle>
-          <a:effectLst/>
-        </a:effectStyle>
-        <a:effectStyle>
-          <a:effectLst>
-            <a:outerShdw blurRad="57150" dist="19050" dir="5400000" algn="ctr" rotWithShape="0">
-              <a:srgbClr val="000000">
-                <a:alpha val="63000"/>
-              </a:srgbClr>
-            </a:outerShdw>
-          </a:effectLst>
-        </a:effectStyle>
-      </a:effectStyleLst>
-      <a:bgFillStyleLst>
-        <a:solidFill>
-          <a:schemeClr val="phClr"/>
-        </a:solidFill>
-        <a:solidFill>
-          <a:schemeClr val="phClr">
-            <a:tint val="95000"/>
-            <a:satMod val="170000"/>
-          </a:schemeClr>
-        </a:solidFill>
-        <a:gradFill rotWithShape="1">
-          <a:gsLst>
-            <a:gs pos="0">
-              <a:schemeClr val="phClr">
-                <a:tint val="93000"/>
-                <a:satMod val="150000"/>
-                <a:shade val="98000"/>
-                <a:lumMod val="102000"/>
-              </a:schemeClr>
-            </a:gs>
-            <a:gs pos="50000">
-              <a:schemeClr val="phClr">
-                <a:tint val="98000"/>
-                <a:satMod val="130000"/>
-                <a:shade val="90000"/>
-                <a:lumMod val="103000"/>
-              </a:schemeClr>
-            </a:gs>
-            <a:gs pos="100000">
-              <a:schemeClr val="phClr">
-                <a:shade val="63000"/>
-                <a:satMod val="120000"/>
-              </a:schemeClr>
-            </a:gs>
-          </a:gsLst>
-          <a:lin ang="5400000" scaled="0"/>
-        </a:gradFill>
-      </a:bgFillStyleLst>
-    </a:fmtScheme>
-  </a:themeElements>
-  <a:objectDefaults>
-    <a:lnDef>
-      <a:spPr/>
-      <a:bodyPr/>
-      <a:lstStyle/>
-      <a:style>
-        <a:lnRef idx="2">
-          <a:schemeClr val="accent1"/>
-        </a:lnRef>
-        <a:fillRef idx="0">
-          <a:schemeClr val="accent1"/>
-        </a:fillRef>
-        <a:effectRef idx="1">
-          <a:schemeClr val="accent1"/>
-        </a:effectRef>
-        <a:fontRef idx="minor">
-          <a:schemeClr val="tx1"/>
-        </a:fontRef>
-      </a:style>
-    </a:lnDef>
-  </a:objectDefaults>
-  <a:extraClrSchemeLst/>
-  <a:extLst>
-    <a:ext uri="{05A4C25C-085E-4340-85A3-A5531E510DB2}">
-      <thm15:themeFamily xmlns:thm15="http://schemas.microsoft.com/office/thememl/2012/main" name="Office Theme" id="{2E142A2C-CD16-42D6-873A-C26D2A0506FA}" vid="{1BDDFF52-6CD6-40A5-AB3C-68EB2F1E4D0A}"/>
-    </a:ext>
-  </a:extLst>
-</a:theme>
 </file>
--- a/reports/zh15min_slides.pptx
+++ b/reports/zh15min_slides.pptx
@@ -4854,7 +4854,7 @@
                 <a:ea typeface="Calibri" pitchFamily="34" charset="-122"/>
                 <a:cs typeface="Calibri" pitchFamily="34" charset="-120"/>
               </a:rPr>
-              <a:t>Innenstadt-Quartiere ragen wie Wolkenkratzer (Score 90+)</a:t>
+              <a:t>Innenstadt-Quartiere erscheinen erhöht (Score 90+)</a:t>
             </a:r>
             <a:endParaRPr lang="en-US" sz="1050" dirty="0"/>
           </a:p>
@@ -4939,7 +4939,7 @@
                 <a:ea typeface="Calibri" pitchFamily="34" charset="-122"/>
                 <a:cs typeface="Calibri" pitchFamily="34" charset="-120"/>
               </a:rPr>
-              <a:t>Live-Demo via PostGIS</a:t>
+              <a:t>PostGIS-Anbindung</a:t>
             </a:r>
             <a:endParaRPr lang="en-US" sz="1050" dirty="0"/>
           </a:p>
@@ -4956,7 +4956,7 @@
                 <a:ea typeface="Calibri" pitchFamily="34" charset="-122"/>
                 <a:cs typeface="Calibri" pitchFamily="34" charset="-120"/>
               </a:rPr>
-              <a:t>QGIS 3.40 LTR + PostGIS-Verbindung — neue POIs lassen sich live einsetzen, der Score reagiert dynamisch.</a:t>
+              <a:t>QGIS 3.40 LTR mit Layer-Zugriff auf zh15min.score — bei Änderungen der Datenbasis aktualisiert sich die Darstellung.</a:t>
             </a:r>
             <a:endParaRPr lang="en-US" sz="1050" dirty="0"/>
           </a:p>
@@ -6793,7 +6793,7 @@
                 <a:ea typeface="Calibri" pitchFamily="34" charset="-122"/>
                 <a:cs typeface="Calibri" pitchFamily="34" charset="-120"/>
               </a:rPr>
-              <a:t>Werte aus 06_gap_analysis.ipynb · Live-Reproduzierbar</a:t>
+              <a:t>Werte aus 06_gap_analysis.ipynb · vollständig reproduzierbar</a:t>
             </a:r>
             <a:endParaRPr lang="en-US" sz="900" dirty="0"/>
           </a:p>
@@ -13633,7 +13633,7 @@
                 <a:ea typeface="Calibri" pitchFamily="34" charset="-122"/>
                 <a:cs typeface="Calibri" pitchFamily="34" charset="-120"/>
               </a:rPr>
-              <a:t>Dynamisches Re-Scoring bei neuem POI (QGIS-Live-Demo)</a:t>
+              <a:t>Dynamisches Re-Scoring bei neuem POI via QGIS</a:t>
             </a:r>
             <a:endParaRPr lang="en-US" sz="1400" dirty="0"/>
           </a:p>
@@ -15476,7 +15476,7 @@
                 <a:ea typeface="Calibri" pitchFamily="34" charset="-122"/>
                 <a:cs typeface="Calibri" pitchFamily="34" charset="-120"/>
               </a:rPr>
-              <a:t> (Moreno 2021) ist heute Leitbild moderner Stadtplanung — und wird zunehmend zum </a:t>
+              <a:t> (Moreno 2021) ist in der Stadtplanung etabliert und gewinnt zunehmend </a:t>
             </a:r>
             <a:pPr indent="0" marL="0">
               <a:buNone/>
@@ -15490,7 +15490,7 @@
                 <a:ea typeface="Calibri" pitchFamily="34" charset="-122"/>
                 <a:cs typeface="Calibri" pitchFamily="34" charset="-120"/>
               </a:rPr>
-              <a:t>harten Wertfaktor</a:t>
+              <a:t>Relevanz als Wertfaktor</a:t>
             </a:r>
             <a:pPr indent="0" marL="0">
               <a:buNone/>

--- a/reports/zh15min_slides.pptx
+++ b/reports/zh15min_slides.pptx
@@ -4,6 +4,9 @@
   <p:sldMasterIdLst>
     <p:sldMasterId id="2147483648" r:id="rId1"/>
   </p:sldMasterIdLst>
+  <p:notesMasterIdLst>
+    <p:notesMasterId r:id="rId22"/>
+  </p:notesMasterIdLst>
   <p:sldIdLst>
     <p:sldId id="256" r:id="rId2"/>
     <p:sldId id="257" r:id="rId3"/>
@@ -26,10 +29,7 @@
     <p:sldId id="274" r:id="rId20"/>
     <p:sldId id="275" r:id="rId21"/>
   </p:sldIdLst>
-  <p:notesMasterIdLst>
-    <p:notesMasterId r:id="rId22"/>
-  </p:notesMasterIdLst>
-  <p:sldSz cx="9144000" cy="5143500"/>
+  <p:sldSz cx="9144000" cy="5143500" type="screen16x9"/>
   <p:notesSz cx="5143500" cy="9144000"/>
   <p:defaultTextStyle>
     <a:lvl1pPr marL="0" algn="l" defTabSz="914400" rtl="0" eaLnBrk="1" latinLnBrk="0" hangingPunct="1">
@@ -123,6 +123,11 @@
       </a:defRPr>
     </a:lvl9pPr>
   </p:defaultTextStyle>
+  <p:extLst>
+    <p:ext uri="{EFAFB233-063F-42B5-8137-9DF3F51BA10A}">
+      <p15:sldGuideLst xmlns:p15="http://schemas.microsoft.com/office/powerpoint/2012/main"/>
+    </p:ext>
+  </p:extLst>
 </p:presentation>
 </file>
 
@@ -148,234 +153,10 @@
           <a:chExt cx="0" cy="0"/>
         </a:xfrm>
       </p:grpSpPr>
-      <p:sp>
-        <p:nvSpPr>
-          <p:cNvPr id="2" name="Header Placeholder 1"/>
-          <p:cNvSpPr>
-            <a:spLocks noGrp="1"/>
-          </p:cNvSpPr>
-          <p:nvPr>
-            <p:ph type="hdr" sz="quarter"/>
-          </p:nvPr>
-        </p:nvSpPr>
-        <p:spPr>
-          <a:xfrm>
-            <a:off x="0" y="0"/>
-            <a:ext cx="2971800" cy="458788"/>
-          </a:xfrm>
-          <a:prstGeom prst="rect">
-            <a:avLst/>
-          </a:prstGeom>
-        </p:spPr>
-        <p:txBody>
-          <a:bodyPr vert="horz" lIns="91440" tIns="45720" rIns="91440" bIns="45720" rtlCol="0"/>
-          <a:lstStyle>
-            <a:lvl1pPr algn="l">
-              <a:defRPr sz="1200"/>
-            </a:lvl1pPr>
-          </a:lstStyle>
-          <a:p>
-            <a:endParaRPr lang="en-US"/>
-          </a:p>
-        </p:txBody>
-      </p:sp>
-      <p:sp>
-        <p:nvSpPr>
-          <p:cNvPr id="3" name="Date Placeholder 2"/>
-          <p:cNvSpPr>
-            <a:spLocks noGrp="1"/>
-          </p:cNvSpPr>
-          <p:nvPr>
-            <p:ph type="dt" idx="1"/>
-          </p:nvPr>
-        </p:nvSpPr>
-        <p:spPr>
-          <a:xfrm>
-            <a:off x="3884613" y="0"/>
-            <a:ext cx="2971800" cy="458788"/>
-          </a:xfrm>
-          <a:prstGeom prst="rect">
-            <a:avLst/>
-          </a:prstGeom>
-        </p:spPr>
-        <p:txBody>
-          <a:bodyPr vert="horz" lIns="91440" tIns="45720" rIns="91440" bIns="45720" rtlCol="0"/>
-          <a:lstStyle>
-            <a:lvl1pPr algn="r">
-              <a:defRPr sz="1200"/>
-            </a:lvl1pPr>
-          </a:lstStyle>
-          <a:p>
-            <a:fld id="{5282F153-3F37-0F45-9E97-73ACFA13230C}" type="datetimeFigureOut">
-              <a:rPr lang="en-US"/>
-              <a:t>7/23/19</a:t>
-            </a:fld>
-            <a:endParaRPr lang="en-US"/>
-          </a:p>
-        </p:txBody>
-      </p:sp>
-      <p:sp>
-        <p:nvSpPr>
-          <p:cNvPr id="4" name="Slide Image Placeholder 3"/>
-          <p:cNvSpPr>
-            <a:spLocks noGrp="1" noRot="1" noChangeAspect="1"/>
-          </p:cNvSpPr>
-          <p:nvPr>
-            <p:ph type="sldImg" idx="2"/>
-          </p:nvPr>
-        </p:nvSpPr>
-        <p:spPr>
-          <a:xfrm>
-            <a:off x="685800" y="1143000"/>
-            <a:ext cx="5486400" cy="3086100"/>
-          </a:xfrm>
-          <a:prstGeom prst="rect">
-            <a:avLst/>
-          </a:prstGeom>
-          <a:noFill/>
-          <a:ln w="12700">
-            <a:solidFill>
-              <a:prstClr val="black"/>
-            </a:solidFill>
-          </a:ln>
-        </p:spPr>
-        <p:txBody>
-          <a:bodyPr vert="horz" lIns="91440" tIns="45720" rIns="91440" bIns="45720" rtlCol="0" anchor="ctr"/>
-          <a:lstStyle/>
-          <a:p>
-            <a:endParaRPr lang="en-US"/>
-          </a:p>
-        </p:txBody>
-      </p:sp>
-      <p:sp>
-        <p:nvSpPr>
-          <p:cNvPr id="5" name="Notes Placeholder 4"/>
-          <p:cNvSpPr>
-            <a:spLocks noGrp="1"/>
-          </p:cNvSpPr>
-          <p:nvPr>
-            <p:ph type="body" sz="quarter" idx="3"/>
-          </p:nvPr>
-        </p:nvSpPr>
-        <p:spPr>
-          <a:xfrm>
-            <a:off x="685800" y="4400550"/>
-            <a:ext cx="5486400" cy="3600450"/>
-          </a:xfrm>
-          <a:prstGeom prst="rect">
-            <a:avLst/>
-          </a:prstGeom>
-        </p:spPr>
-        <p:txBody>
-          <a:bodyPr vert="horz" lIns="91440" tIns="45720" rIns="91440" bIns="45720" rtlCol="0"/>
-          <a:lstStyle/>
-          <a:p>
-            <a:pPr lvl="0"/>
-            <a:r>
-              <a:rPr lang="en-US"/>
-              <a:t>Click to edit Master text styles</a:t>
-            </a:r>
-          </a:p>
-          <a:p>
-            <a:pPr lvl="1"/>
-            <a:r>
-              <a:rPr lang="en-US"/>
-              <a:t>Second level</a:t>
-            </a:r>
-          </a:p>
-          <a:p>
-            <a:pPr lvl="2"/>
-            <a:r>
-              <a:rPr lang="en-US"/>
-              <a:t>Third level</a:t>
-            </a:r>
-          </a:p>
-          <a:p>
-            <a:pPr lvl="3"/>
-            <a:r>
-              <a:rPr lang="en-US"/>
-              <a:t>Fourth level</a:t>
-            </a:r>
-          </a:p>
-          <a:p>
-            <a:pPr lvl="4"/>
-            <a:r>
-              <a:rPr lang="en-US"/>
-              <a:t>Fifth level</a:t>
-            </a:r>
-          </a:p>
-        </p:txBody>
-      </p:sp>
-      <p:sp>
-        <p:nvSpPr>
-          <p:cNvPr id="6" name="Footer Placeholder 5"/>
-          <p:cNvSpPr>
-            <a:spLocks noGrp="1"/>
-          </p:cNvSpPr>
-          <p:nvPr>
-            <p:ph type="ftr" sz="quarter" idx="4"/>
-          </p:nvPr>
-        </p:nvSpPr>
-        <p:spPr>
-          <a:xfrm>
-            <a:off x="0" y="8685213"/>
-            <a:ext cx="2971800" cy="458787"/>
-          </a:xfrm>
-          <a:prstGeom prst="rect">
-            <a:avLst/>
-          </a:prstGeom>
-        </p:spPr>
-        <p:txBody>
-          <a:bodyPr vert="horz" lIns="91440" tIns="45720" rIns="91440" bIns="45720" rtlCol="0" anchor="b"/>
-          <a:lstStyle>
-            <a:lvl1pPr algn="l">
-              <a:defRPr sz="1200"/>
-            </a:lvl1pPr>
-          </a:lstStyle>
-          <a:p>
-            <a:endParaRPr lang="en-US"/>
-          </a:p>
-        </p:txBody>
-      </p:sp>
-      <p:sp>
-        <p:nvSpPr>
-          <p:cNvPr id="7" name="Slide Number Placeholder 6"/>
-          <p:cNvSpPr>
-            <a:spLocks noGrp="1"/>
-          </p:cNvSpPr>
-          <p:nvPr>
-            <p:ph type="sldNum" sz="quarter" idx="5"/>
-          </p:nvPr>
-        </p:nvSpPr>
-        <p:spPr>
-          <a:xfrm>
-            <a:off x="3884613" y="8685213"/>
-            <a:ext cx="2971800" cy="458787"/>
-          </a:xfrm>
-          <a:prstGeom prst="rect">
-            <a:avLst/>
-          </a:prstGeom>
-        </p:spPr>
-        <p:txBody>
-          <a:bodyPr vert="horz" lIns="91440" tIns="45720" rIns="91440" bIns="45720" rtlCol="0" anchor="b"/>
-          <a:lstStyle>
-            <a:lvl1pPr algn="r">
-              <a:defRPr sz="1200"/>
-            </a:lvl1pPr>
-          </a:lstStyle>
-          <a:p>
-            <a:fld id="{CE5E9CC1-C706-0F49-92D6-E571CC5EEA8F}" type="slidenum">
-              <a:rPr lang="en-US"/>
-              <a:t>‹#›</a:t>
-            </a:fld>
-            <a:endParaRPr lang="en-US"/>
-          </a:p>
-        </p:txBody>
-      </p:sp>
     </p:spTree>
     <p:extLst>
       <p:ext uri="{BB962C8B-B14F-4D97-AF65-F5344CB8AC3E}">
-        <p14:creationId xmlns:p14="http://schemas.microsoft.com/office/powerpoint/2010/main" val="1024086991"/>
+        <p14:creationId xmlns:p14="http://schemas.microsoft.com/office/powerpoint/2010/main" val="3257803057"/>
       </p:ext>
     </p:extLst>
   </p:cSld>
@@ -519,10 +300,6 @@
           <a:bodyPr/>
           <a:lstStyle/>
           <a:p>
-            <a:r>
-              <a:rPr lang="en-US" dirty="0"/>
-              <a:t/>
-            </a:r>
             <a:endParaRPr lang="en-US" dirty="0"/>
           </a:p>
         </p:txBody>
@@ -607,10 +384,6 @@
           <a:bodyPr/>
           <a:lstStyle/>
           <a:p>
-            <a:r>
-              <a:rPr lang="en-US" dirty="0"/>
-              <a:t/>
-            </a:r>
             <a:endParaRPr lang="en-US" dirty="0"/>
           </a:p>
         </p:txBody>
@@ -695,10 +468,6 @@
           <a:bodyPr/>
           <a:lstStyle/>
           <a:p>
-            <a:r>
-              <a:rPr lang="en-US" dirty="0"/>
-              <a:t/>
-            </a:r>
             <a:endParaRPr lang="en-US" dirty="0"/>
           </a:p>
         </p:txBody>
@@ -783,10 +552,6 @@
           <a:bodyPr/>
           <a:lstStyle/>
           <a:p>
-            <a:r>
-              <a:rPr lang="en-US" dirty="0"/>
-              <a:t/>
-            </a:r>
             <a:endParaRPr lang="en-US" dirty="0"/>
           </a:p>
         </p:txBody>
@@ -871,10 +636,6 @@
           <a:bodyPr/>
           <a:lstStyle/>
           <a:p>
-            <a:r>
-              <a:rPr lang="en-US" dirty="0"/>
-              <a:t/>
-            </a:r>
             <a:endParaRPr lang="en-US" dirty="0"/>
           </a:p>
         </p:txBody>
@@ -959,10 +720,6 @@
           <a:bodyPr/>
           <a:lstStyle/>
           <a:p>
-            <a:r>
-              <a:rPr lang="en-US" dirty="0"/>
-              <a:t/>
-            </a:r>
             <a:endParaRPr lang="en-US" dirty="0"/>
           </a:p>
         </p:txBody>
@@ -1047,10 +804,6 @@
           <a:bodyPr/>
           <a:lstStyle/>
           <a:p>
-            <a:r>
-              <a:rPr lang="en-US" dirty="0"/>
-              <a:t/>
-            </a:r>
             <a:endParaRPr lang="en-US" dirty="0"/>
           </a:p>
         </p:txBody>
@@ -1135,10 +888,6 @@
           <a:bodyPr/>
           <a:lstStyle/>
           <a:p>
-            <a:r>
-              <a:rPr lang="en-US" dirty="0"/>
-              <a:t/>
-            </a:r>
             <a:endParaRPr lang="en-US" dirty="0"/>
           </a:p>
         </p:txBody>
@@ -1223,10 +972,6 @@
           <a:bodyPr/>
           <a:lstStyle/>
           <a:p>
-            <a:r>
-              <a:rPr lang="en-US" dirty="0"/>
-              <a:t/>
-            </a:r>
             <a:endParaRPr lang="en-US" dirty="0"/>
           </a:p>
         </p:txBody>
@@ -1311,10 +1056,6 @@
           <a:bodyPr/>
           <a:lstStyle/>
           <a:p>
-            <a:r>
-              <a:rPr lang="en-US" dirty="0"/>
-              <a:t/>
-            </a:r>
             <a:endParaRPr lang="en-US" dirty="0"/>
           </a:p>
         </p:txBody>
@@ -1399,10 +1140,6 @@
           <a:bodyPr/>
           <a:lstStyle/>
           <a:p>
-            <a:r>
-              <a:rPr lang="en-US" dirty="0"/>
-              <a:t/>
-            </a:r>
             <a:endParaRPr lang="en-US" dirty="0"/>
           </a:p>
         </p:txBody>
@@ -1487,10 +1224,6 @@
           <a:bodyPr/>
           <a:lstStyle/>
           <a:p>
-            <a:r>
-              <a:rPr lang="en-US" dirty="0"/>
-              <a:t/>
-            </a:r>
             <a:endParaRPr lang="en-US" dirty="0"/>
           </a:p>
         </p:txBody>
@@ -1575,10 +1308,6 @@
           <a:bodyPr/>
           <a:lstStyle/>
           <a:p>
-            <a:r>
-              <a:rPr lang="en-US" dirty="0"/>
-              <a:t/>
-            </a:r>
             <a:endParaRPr lang="en-US" dirty="0"/>
           </a:p>
         </p:txBody>
@@ -1663,10 +1392,6 @@
           <a:bodyPr/>
           <a:lstStyle/>
           <a:p>
-            <a:r>
-              <a:rPr lang="en-US" dirty="0"/>
-              <a:t/>
-            </a:r>
             <a:endParaRPr lang="en-US" dirty="0"/>
           </a:p>
         </p:txBody>
@@ -1751,10 +1476,6 @@
           <a:bodyPr/>
           <a:lstStyle/>
           <a:p>
-            <a:r>
-              <a:rPr lang="en-US" dirty="0"/>
-              <a:t/>
-            </a:r>
             <a:endParaRPr lang="en-US" dirty="0"/>
           </a:p>
         </p:txBody>
@@ -1839,10 +1560,6 @@
           <a:bodyPr/>
           <a:lstStyle/>
           <a:p>
-            <a:r>
-              <a:rPr lang="en-US" dirty="0"/>
-              <a:t/>
-            </a:r>
             <a:endParaRPr lang="en-US" dirty="0"/>
           </a:p>
         </p:txBody>
@@ -1927,10 +1644,6 @@
           <a:bodyPr/>
           <a:lstStyle/>
           <a:p>
-            <a:r>
-              <a:rPr lang="en-US" dirty="0"/>
-              <a:t/>
-            </a:r>
             <a:endParaRPr lang="en-US" dirty="0"/>
           </a:p>
         </p:txBody>
@@ -2015,10 +1728,6 @@
           <a:bodyPr/>
           <a:lstStyle/>
           <a:p>
-            <a:r>
-              <a:rPr lang="en-US" dirty="0"/>
-              <a:t/>
-            </a:r>
             <a:endParaRPr lang="en-US" dirty="0"/>
           </a:p>
         </p:txBody>
@@ -2103,10 +1812,6 @@
           <a:bodyPr/>
           <a:lstStyle/>
           <a:p>
-            <a:r>
-              <a:rPr lang="en-US" dirty="0"/>
-              <a:t/>
-            </a:r>
             <a:endParaRPr lang="en-US" dirty="0"/>
           </a:p>
         </p:txBody>
@@ -2191,10 +1896,6 @@
           <a:bodyPr/>
           <a:lstStyle/>
           <a:p>
-            <a:r>
-              <a:rPr lang="en-US" dirty="0"/>
-              <a:t/>
-            </a:r>
             <a:endParaRPr lang="en-US" dirty="0"/>
           </a:p>
         </p:txBody>
@@ -2268,6 +1969,11 @@
 <file path=ppt/slideMasters/slideMaster1.xml><?xml version="1.0" encoding="utf-8"?>
 <p:sldMaster xmlns:a="http://schemas.openxmlformats.org/drawingml/2006/main" xmlns:r="http://schemas.openxmlformats.org/officeDocument/2006/relationships" xmlns:p="http://schemas.openxmlformats.org/presentationml/2006/main">
   <p:cSld>
+    <p:bg>
+      <p:bgRef idx="1001">
+        <a:schemeClr val="bg1"/>
+      </p:bgRef>
+    </p:bg>
     <p:spTree>
       <p:nvGrpSpPr>
         <p:cNvPr id="1" name=""/>
@@ -2550,6 +2256,7 @@
         <a:solidFill>
           <a:srgbClr val="21295C"/>
         </a:solidFill>
+        <a:effectLst/>
       </p:bgPr>
     </p:bg>
     <p:spTree>
@@ -2590,6 +2297,13 @@
             <a:prstDash val="solid"/>
           </a:ln>
         </p:spPr>
+        <p:txBody>
+          <a:bodyPr/>
+          <a:lstStyle/>
+          <a:p>
+            <a:endParaRPr lang="en-US"/>
+          </a:p>
+        </p:txBody>
       </p:sp>
       <p:sp>
         <p:nvSpPr>
@@ -2612,11 +2326,11 @@
           <a:bodyPr wrap="square" lIns="0" tIns="0" rIns="0" bIns="0" rtlCol="0" anchor="ctr"/>
           <a:lstStyle/>
           <a:p>
-            <a:pPr indent="0" marL="0">
-              <a:buNone/>
-            </a:pPr>
-            <a:r>
-              <a:rPr lang="en-US" sz="1100" spc="300" kern="0" dirty="0">
+            <a:pPr marL="0" indent="0">
+              <a:buNone/>
+            </a:pPr>
+            <a:r>
+              <a:rPr lang="en-US" sz="1100" kern="0" spc="300" dirty="0">
                 <a:solidFill>
                   <a:srgbClr val="CBD5E1"/>
                 </a:solidFill>
@@ -2651,7 +2365,7 @@
           <a:bodyPr wrap="square" lIns="0" tIns="0" rIns="0" bIns="0" rtlCol="0" anchor="ctr"/>
           <a:lstStyle/>
           <a:p>
-            <a:pPr indent="0" marL="0">
+            <a:pPr marL="0" indent="0">
               <a:buNone/>
             </a:pPr>
             <a:r>
@@ -2690,7 +2404,7 @@
           <a:bodyPr wrap="square" lIns="0" tIns="0" rIns="0" bIns="0" rtlCol="0" anchor="ctr"/>
           <a:lstStyle/>
           <a:p>
-            <a:pPr indent="0" marL="0">
+            <a:pPr marL="0" indent="0">
               <a:buNone/>
             </a:pPr>
             <a:r>
@@ -2732,6 +2446,13 @@
             <a:prstDash val="solid"/>
           </a:ln>
         </p:spPr>
+        <p:txBody>
+          <a:bodyPr/>
+          <a:lstStyle/>
+          <a:p>
+            <a:endParaRPr lang="en-US"/>
+          </a:p>
+        </p:txBody>
       </p:sp>
       <p:sp>
         <p:nvSpPr>
@@ -2754,7 +2475,7 @@
           <a:bodyPr wrap="square" lIns="0" tIns="0" rIns="0" bIns="0" rtlCol="0" anchor="ctr"/>
           <a:lstStyle/>
           <a:p>
-            <a:pPr indent="0" marL="0">
+            <a:pPr marL="0" indent="0">
               <a:buNone/>
             </a:pPr>
             <a:r>
@@ -2768,9 +2489,6 @@
               </a:rPr>
               <a:t>Gruppe: </a:t>
             </a:r>
-            <a:pPr indent="0" marL="0">
-              <a:buNone/>
-            </a:pPr>
             <a:r>
               <a:rPr lang="en-US" sz="1300" dirty="0">
                 <a:solidFill>
@@ -2807,7 +2525,7 @@
           <a:bodyPr wrap="square" lIns="0" tIns="0" rIns="0" bIns="0" rtlCol="0" anchor="ctr"/>
           <a:lstStyle/>
           <a:p>
-            <a:pPr indent="0" marL="0">
+            <a:pPr marL="0" indent="0">
               <a:buNone/>
             </a:pPr>
             <a:r>
@@ -2821,9 +2539,6 @@
               </a:rPr>
               <a:t>Modul: </a:t>
             </a:r>
-            <a:pPr indent="0" marL="0">
-              <a:buNone/>
-            </a:pPr>
             <a:r>
               <a:rPr lang="en-US" sz="1300" dirty="0">
                 <a:solidFill>
@@ -2860,7 +2575,7 @@
           <a:bodyPr wrap="square" lIns="0" tIns="0" rIns="0" bIns="0" rtlCol="0" anchor="ctr"/>
           <a:lstStyle/>
           <a:p>
-            <a:pPr indent="0" marL="0">
+            <a:pPr marL="0" indent="0">
               <a:buNone/>
             </a:pPr>
             <a:r>
@@ -2874,9 +2589,6 @@
               </a:rPr>
               <a:t>Datum: </a:t>
             </a:r>
-            <a:pPr indent="0" marL="0">
-              <a:buNone/>
-            </a:pPr>
             <a:r>
               <a:rPr lang="en-US" sz="1300" dirty="0">
                 <a:solidFill>
@@ -2913,7 +2625,7 @@
           <a:bodyPr wrap="square" lIns="0" tIns="0" rIns="0" bIns="0" rtlCol="0" anchor="ctr"/>
           <a:lstStyle/>
           <a:p>
-            <a:pPr algn="l" indent="0" marL="0">
+            <a:pPr marL="0" indent="0" algn="l">
               <a:buNone/>
             </a:pPr>
             <a:r>
@@ -2952,7 +2664,7 @@
           <a:bodyPr wrap="square" lIns="0" tIns="0" rIns="0" bIns="0" rtlCol="0" anchor="ctr"/>
           <a:lstStyle/>
           <a:p>
-            <a:pPr algn="r" indent="0" marL="0">
+            <a:pPr marL="0" indent="0" algn="r">
               <a:buNone/>
             </a:pPr>
             <a:r>
@@ -2986,6 +2698,7 @@
         <a:solidFill>
           <a:srgbClr val="FFFFFF"/>
         </a:solidFill>
+        <a:effectLst/>
       </p:bgPr>
     </p:bg>
     <p:spTree>
@@ -3023,11 +2736,11 @@
           <a:bodyPr wrap="square" lIns="0" tIns="0" rIns="0" bIns="0" rtlCol="0" anchor="ctr"/>
           <a:lstStyle/>
           <a:p>
-            <a:pPr indent="0" marL="0">
-              <a:buNone/>
-            </a:pPr>
-            <a:r>
-              <a:rPr lang="en-US" sz="1100" b="1" spc="400" kern="0" dirty="0">
+            <a:pPr marL="0" indent="0">
+              <a:buNone/>
+            </a:pPr>
+            <a:r>
+              <a:rPr lang="en-US" sz="1100" b="1" kern="0" spc="400" dirty="0">
                 <a:solidFill>
                   <a:srgbClr val="1C7293"/>
                 </a:solidFill>
@@ -3062,7 +2775,7 @@
           <a:bodyPr wrap="square" lIns="0" tIns="0" rIns="0" bIns="0" rtlCol="0" anchor="ctr"/>
           <a:lstStyle/>
           <a:p>
-            <a:pPr indent="0" marL="0">
+            <a:pPr marL="0" indent="0">
               <a:buNone/>
             </a:pPr>
             <a:r>
@@ -3104,6 +2817,13 @@
             <a:prstDash val="solid"/>
           </a:ln>
         </p:spPr>
+        <p:txBody>
+          <a:bodyPr/>
+          <a:lstStyle/>
+          <a:p>
+            <a:endParaRPr lang="en-US"/>
+          </a:p>
+        </p:txBody>
       </p:sp>
       <p:sp>
         <p:nvSpPr>
@@ -3129,6 +2849,13 @@
             <a:prstDash val="solid"/>
           </a:ln>
         </p:spPr>
+        <p:txBody>
+          <a:bodyPr/>
+          <a:lstStyle/>
+          <a:p>
+            <a:endParaRPr lang="en-US"/>
+          </a:p>
+        </p:txBody>
       </p:sp>
       <p:sp>
         <p:nvSpPr>
@@ -3151,7 +2878,7 @@
           <a:bodyPr wrap="square" lIns="0" tIns="0" rIns="0" bIns="0" rtlCol="0" anchor="ctr"/>
           <a:lstStyle/>
           <a:p>
-            <a:pPr algn="ctr" indent="0" marL="0">
+            <a:pPr marL="0" indent="0" algn="ctr">
               <a:buNone/>
             </a:pPr>
             <a:r>
@@ -3190,7 +2917,7 @@
           <a:bodyPr wrap="square" lIns="0" tIns="0" rIns="0" bIns="0" rtlCol="0" anchor="ctr"/>
           <a:lstStyle/>
           <a:p>
-            <a:pPr indent="0" marL="0">
+            <a:pPr marL="0" indent="0">
               <a:buNone/>
             </a:pPr>
             <a:r>
@@ -3232,6 +2959,13 @@
             <a:prstDash val="solid"/>
           </a:ln>
         </p:spPr>
+        <p:txBody>
+          <a:bodyPr/>
+          <a:lstStyle/>
+          <a:p>
+            <a:endParaRPr lang="en-US"/>
+          </a:p>
+        </p:txBody>
       </p:sp>
       <p:sp>
         <p:nvSpPr>
@@ -3254,7 +2988,7 @@
           <a:bodyPr wrap="square" lIns="0" tIns="0" rIns="0" bIns="0" rtlCol="0" anchor="ctr"/>
           <a:lstStyle/>
           <a:p>
-            <a:pPr algn="ctr" indent="0" marL="0">
+            <a:pPr marL="0" indent="0" algn="ctr">
               <a:buNone/>
             </a:pPr>
             <a:r>
@@ -3293,7 +3027,7 @@
           <a:bodyPr wrap="square" lIns="0" tIns="0" rIns="0" bIns="0" rtlCol="0" anchor="ctr"/>
           <a:lstStyle/>
           <a:p>
-            <a:pPr indent="0" marL="0">
+            <a:pPr marL="0" indent="0">
               <a:buNone/>
             </a:pPr>
             <a:r>
@@ -3335,6 +3069,13 @@
             <a:prstDash val="solid"/>
           </a:ln>
         </p:spPr>
+        <p:txBody>
+          <a:bodyPr/>
+          <a:lstStyle/>
+          <a:p>
+            <a:endParaRPr lang="en-US"/>
+          </a:p>
+        </p:txBody>
       </p:sp>
       <p:sp>
         <p:nvSpPr>
@@ -3357,7 +3098,7 @@
           <a:bodyPr wrap="square" lIns="0" tIns="0" rIns="0" bIns="0" rtlCol="0" anchor="ctr"/>
           <a:lstStyle/>
           <a:p>
-            <a:pPr algn="ctr" indent="0" marL="0">
+            <a:pPr marL="0" indent="0" algn="ctr">
               <a:buNone/>
             </a:pPr>
             <a:r>
@@ -3396,7 +3137,7 @@
           <a:bodyPr wrap="square" lIns="0" tIns="0" rIns="0" bIns="0" rtlCol="0" anchor="ctr"/>
           <a:lstStyle/>
           <a:p>
-            <a:pPr indent="0" marL="0">
+            <a:pPr marL="0" indent="0">
               <a:buNone/>
             </a:pPr>
             <a:r>
@@ -3438,6 +3179,13 @@
             <a:prstDash val="solid"/>
           </a:ln>
         </p:spPr>
+        <p:txBody>
+          <a:bodyPr/>
+          <a:lstStyle/>
+          <a:p>
+            <a:endParaRPr lang="en-US"/>
+          </a:p>
+        </p:txBody>
       </p:sp>
       <p:sp>
         <p:nvSpPr>
@@ -3460,7 +3208,7 @@
           <a:bodyPr wrap="square" lIns="0" tIns="0" rIns="0" bIns="0" rtlCol="0" anchor="ctr"/>
           <a:lstStyle/>
           <a:p>
-            <a:pPr algn="ctr" indent="0" marL="0">
+            <a:pPr marL="0" indent="0" algn="ctr">
               <a:buNone/>
             </a:pPr>
             <a:r>
@@ -3499,7 +3247,7 @@
           <a:bodyPr wrap="square" lIns="0" tIns="0" rIns="0" bIns="0" rtlCol="0" anchor="ctr"/>
           <a:lstStyle/>
           <a:p>
-            <a:pPr indent="0" marL="0">
+            <a:pPr marL="0" indent="0">
               <a:buNone/>
             </a:pPr>
             <a:r>
@@ -3541,6 +3289,13 @@
             <a:prstDash val="solid"/>
           </a:ln>
         </p:spPr>
+        <p:txBody>
+          <a:bodyPr/>
+          <a:lstStyle/>
+          <a:p>
+            <a:endParaRPr lang="en-US"/>
+          </a:p>
+        </p:txBody>
       </p:sp>
       <p:sp>
         <p:nvSpPr>
@@ -3563,7 +3318,7 @@
           <a:bodyPr wrap="square" lIns="0" tIns="0" rIns="0" bIns="0" rtlCol="0" anchor="ctr"/>
           <a:lstStyle/>
           <a:p>
-            <a:pPr algn="ctr" indent="0" marL="0">
+            <a:pPr marL="0" indent="0" algn="ctr">
               <a:buNone/>
             </a:pPr>
             <a:r>
@@ -3602,7 +3357,7 @@
           <a:bodyPr wrap="square" lIns="0" tIns="0" rIns="0" bIns="0" rtlCol="0" anchor="ctr"/>
           <a:lstStyle/>
           <a:p>
-            <a:pPr indent="0" marL="0">
+            <a:pPr marL="0" indent="0">
               <a:buNone/>
             </a:pPr>
             <a:r>
@@ -3644,6 +3399,13 @@
             <a:prstDash val="solid"/>
           </a:ln>
         </p:spPr>
+        <p:txBody>
+          <a:bodyPr/>
+          <a:lstStyle/>
+          <a:p>
+            <a:endParaRPr lang="en-US"/>
+          </a:p>
+        </p:txBody>
       </p:sp>
       <p:sp>
         <p:nvSpPr>
@@ -3666,7 +3428,7 @@
           <a:bodyPr wrap="square" lIns="0" tIns="0" rIns="0" bIns="0" rtlCol="0" anchor="ctr"/>
           <a:lstStyle/>
           <a:p>
-            <a:pPr algn="ctr" indent="0" marL="0">
+            <a:pPr marL="0" indent="0" algn="ctr">
               <a:buNone/>
             </a:pPr>
             <a:r>
@@ -3705,7 +3467,7 @@
           <a:bodyPr wrap="square" lIns="0" tIns="0" rIns="0" bIns="0" rtlCol="0" anchor="ctr"/>
           <a:lstStyle/>
           <a:p>
-            <a:pPr indent="0" marL="0">
+            <a:pPr marL="0" indent="0">
               <a:buNone/>
             </a:pPr>
             <a:r>
@@ -3747,6 +3509,13 @@
             <a:prstDash val="solid"/>
           </a:ln>
         </p:spPr>
+        <p:txBody>
+          <a:bodyPr/>
+          <a:lstStyle/>
+          <a:p>
+            <a:endParaRPr lang="en-US"/>
+          </a:p>
+        </p:txBody>
       </p:sp>
       <p:sp>
         <p:nvSpPr>
@@ -3769,7 +3538,7 @@
           <a:bodyPr wrap="square" lIns="0" tIns="0" rIns="0" bIns="0" rtlCol="0" anchor="ctr"/>
           <a:lstStyle/>
           <a:p>
-            <a:pPr algn="ctr" indent="0" marL="0">
+            <a:pPr marL="0" indent="0" algn="ctr">
               <a:buNone/>
             </a:pPr>
             <a:r>
@@ -3808,7 +3577,7 @@
           <a:bodyPr wrap="square" lIns="0" tIns="0" rIns="0" bIns="0" rtlCol="0" anchor="ctr"/>
           <a:lstStyle/>
           <a:p>
-            <a:pPr indent="0" marL="0">
+            <a:pPr marL="0" indent="0">
               <a:buNone/>
             </a:pPr>
             <a:r>
@@ -3850,6 +3619,13 @@
             <a:prstDash val="solid"/>
           </a:ln>
         </p:spPr>
+        <p:txBody>
+          <a:bodyPr/>
+          <a:lstStyle/>
+          <a:p>
+            <a:endParaRPr lang="en-US"/>
+          </a:p>
+        </p:txBody>
       </p:sp>
       <p:sp>
         <p:nvSpPr>
@@ -3872,7 +3648,7 @@
           <a:bodyPr wrap="square" lIns="0" tIns="0" rIns="0" bIns="0" rtlCol="0" anchor="ctr"/>
           <a:lstStyle/>
           <a:p>
-            <a:pPr algn="ctr" indent="0" marL="0">
+            <a:pPr marL="0" indent="0" algn="ctr">
               <a:buNone/>
             </a:pPr>
             <a:r>
@@ -3911,7 +3687,7 @@
           <a:bodyPr wrap="square" lIns="0" tIns="0" rIns="0" bIns="0" rtlCol="0" anchor="ctr"/>
           <a:lstStyle/>
           <a:p>
-            <a:pPr indent="0" marL="0">
+            <a:pPr marL="0" indent="0">
               <a:buNone/>
             </a:pPr>
             <a:r>
@@ -3953,6 +3729,13 @@
             <a:prstDash val="solid"/>
           </a:ln>
         </p:spPr>
+        <p:txBody>
+          <a:bodyPr/>
+          <a:lstStyle/>
+          <a:p>
+            <a:endParaRPr lang="en-US"/>
+          </a:p>
+        </p:txBody>
       </p:sp>
       <p:sp>
         <p:nvSpPr>
@@ -3975,7 +3758,7 @@
           <a:bodyPr wrap="square" lIns="0" tIns="0" rIns="0" bIns="0" rtlCol="0" anchor="ctr"/>
           <a:lstStyle/>
           <a:p>
-            <a:pPr algn="ctr" indent="0" marL="0">
+            <a:pPr marL="0" indent="0" algn="ctr">
               <a:buNone/>
             </a:pPr>
             <a:r>
@@ -4014,7 +3797,7 @@
           <a:bodyPr wrap="square" lIns="0" tIns="0" rIns="0" bIns="0" rtlCol="0" anchor="ctr"/>
           <a:lstStyle/>
           <a:p>
-            <a:pPr indent="0" marL="0">
+            <a:pPr marL="0" indent="0">
               <a:buNone/>
             </a:pPr>
             <a:r>
@@ -4053,7 +3836,7 @@
           <a:bodyPr wrap="square" lIns="0" tIns="0" rIns="0" bIns="0" rtlCol="0" anchor="ctr"/>
           <a:lstStyle/>
           <a:p>
-            <a:pPr algn="l" indent="0" marL="0">
+            <a:pPr marL="0" indent="0" algn="l">
               <a:buNone/>
             </a:pPr>
             <a:r>
@@ -4092,7 +3875,7 @@
           <a:bodyPr wrap="square" lIns="0" tIns="0" rIns="0" bIns="0" rtlCol="0" anchor="ctr"/>
           <a:lstStyle/>
           <a:p>
-            <a:pPr algn="r" indent="0" marL="0">
+            <a:pPr marL="0" indent="0" algn="r">
               <a:buNone/>
             </a:pPr>
             <a:r>
@@ -4126,6 +3909,7 @@
         <a:solidFill>
           <a:srgbClr val="FFFFFF"/>
         </a:solidFill>
+        <a:effectLst/>
       </p:bgPr>
     </p:bg>
     <p:spTree>
@@ -4163,11 +3947,11 @@
           <a:bodyPr wrap="square" lIns="0" tIns="0" rIns="0" bIns="0" rtlCol="0" anchor="ctr"/>
           <a:lstStyle/>
           <a:p>
-            <a:pPr indent="0" marL="0">
-              <a:buNone/>
-            </a:pPr>
-            <a:r>
-              <a:rPr lang="en-US" sz="1100" b="1" spc="400" kern="0" dirty="0">
+            <a:pPr marL="0" indent="0">
+              <a:buNone/>
+            </a:pPr>
+            <a:r>
+              <a:rPr lang="en-US" sz="1100" b="1" kern="0" spc="400" dirty="0">
                 <a:solidFill>
                   <a:srgbClr val="1C7293"/>
                 </a:solidFill>
@@ -4202,7 +3986,7 @@
           <a:bodyPr wrap="square" lIns="0" tIns="0" rIns="0" bIns="0" rtlCol="0" anchor="ctr"/>
           <a:lstStyle/>
           <a:p>
-            <a:pPr indent="0" marL="0">
+            <a:pPr marL="0" indent="0">
               <a:buNone/>
             </a:pPr>
             <a:r>
@@ -4222,15 +4006,15 @@
       </p:sp>
       <p:pic>
         <p:nvPicPr>
-          <p:cNvPr id="4" name="Image 0" descr="/sessions/intelligent-practical-clarke/mnt/Einsatz von Geodaten in Marketing/reports/figures/score_map.png">    </p:cNvPr>
+          <p:cNvPr id="4" name="Image 0" descr="/sessions/intelligent-practical-clarke/mnt/Einsatz von Geodaten in Marketing/reports/figures/score_map.png"/>
           <p:cNvPicPr>
             <a:picLocks noChangeAspect="1"/>
           </p:cNvPicPr>
           <p:nvPr/>
         </p:nvPicPr>
         <p:blipFill>
-          <a:blip r:embed="rId1"/>
-          <a:srcRect l="0" r="0" t="0" b="0"/>
+          <a:blip r:embed="rId3"/>
+          <a:srcRect/>
           <a:stretch/>
         </p:blipFill>
         <p:spPr>
@@ -4267,13 +4051,20 @@
             <a:prstDash val="solid"/>
           </a:ln>
           <a:effectLst>
-            <a:outerShdw sx="100000" sy="100000" kx="0" ky="0" algn="bl" rotWithShape="0" blurRad="101600" dist="12700" dir="5400000">
+            <a:outerShdw blurRad="101600" dist="12700" dir="5400000" algn="bl" rotWithShape="0">
               <a:srgbClr val="94A3B8">
                 <a:alpha val="12000"/>
               </a:srgbClr>
             </a:outerShdw>
           </a:effectLst>
         </p:spPr>
+        <p:txBody>
+          <a:bodyPr/>
+          <a:lstStyle/>
+          <a:p>
+            <a:endParaRPr lang="en-US"/>
+          </a:p>
+        </p:txBody>
       </p:sp>
       <p:sp>
         <p:nvSpPr>
@@ -4299,6 +4090,13 @@
             <a:prstDash val="solid"/>
           </a:ln>
         </p:spPr>
+        <p:txBody>
+          <a:bodyPr/>
+          <a:lstStyle/>
+          <a:p>
+            <a:endParaRPr lang="en-US"/>
+          </a:p>
+        </p:txBody>
       </p:sp>
       <p:sp>
         <p:nvSpPr>
@@ -4321,7 +4119,7 @@
           <a:bodyPr wrap="square" lIns="0" tIns="0" rIns="0" bIns="0" rtlCol="0" anchor="ctr"/>
           <a:lstStyle/>
           <a:p>
-            <a:pPr indent="0" marL="0">
+            <a:pPr marL="0" indent="0">
               <a:buNone/>
             </a:pPr>
             <a:r>
@@ -4360,7 +4158,7 @@
           <a:bodyPr wrap="square" lIns="0" tIns="0" rIns="0" bIns="0" rtlCol="0" anchor="ctr"/>
           <a:lstStyle/>
           <a:p>
-            <a:pPr indent="0" marL="0">
+            <a:pPr marL="0" indent="0">
               <a:buNone/>
             </a:pPr>
             <a:r>
@@ -4377,7 +4175,7 @@
             <a:endParaRPr lang="en-US" sz="1050" dirty="0"/>
           </a:p>
           <a:p>
-            <a:pPr indent="0" marL="0">
+            <a:pPr marL="0" indent="0">
               <a:buNone/>
             </a:pPr>
             <a:r>
@@ -4394,7 +4192,7 @@
             <a:endParaRPr lang="en-US" sz="1050" dirty="0"/>
           </a:p>
           <a:p>
-            <a:pPr indent="0" marL="0">
+            <a:pPr marL="0" indent="0">
               <a:buNone/>
             </a:pPr>
             <a:r>
@@ -4411,7 +4209,7 @@
             <a:endParaRPr lang="en-US" sz="1050" dirty="0"/>
           </a:p>
           <a:p>
-            <a:pPr indent="0" marL="0">
+            <a:pPr marL="0" indent="0">
               <a:buNone/>
             </a:pPr>
             <a:r>
@@ -4428,7 +4226,7 @@
             <a:endParaRPr lang="en-US" sz="1050" dirty="0"/>
           </a:p>
           <a:p>
-            <a:pPr indent="0" marL="0">
+            <a:pPr marL="0" indent="0">
               <a:buNone/>
             </a:pPr>
             <a:r>
@@ -4445,7 +4243,7 @@
             <a:endParaRPr lang="en-US" sz="1050" dirty="0"/>
           </a:p>
           <a:p>
-            <a:pPr indent="0" marL="0">
+            <a:pPr marL="0" indent="0">
               <a:buNone/>
             </a:pPr>
             <a:r>
@@ -4462,7 +4260,7 @@
             <a:endParaRPr lang="en-US" sz="1050" dirty="0"/>
           </a:p>
           <a:p>
-            <a:pPr indent="0" marL="0">
+            <a:pPr marL="0" indent="0">
               <a:buNone/>
             </a:pPr>
             <a:r>
@@ -4479,7 +4277,7 @@
             <a:endParaRPr lang="en-US" sz="1050" dirty="0"/>
           </a:p>
           <a:p>
-            <a:pPr indent="0" marL="0">
+            <a:pPr marL="0" indent="0">
               <a:buNone/>
             </a:pPr>
             <a:r>
@@ -4518,7 +4316,7 @@
           <a:bodyPr wrap="square" lIns="0" tIns="0" rIns="0" bIns="0" rtlCol="0" anchor="ctr"/>
           <a:lstStyle/>
           <a:p>
-            <a:pPr algn="l" indent="0" marL="0">
+            <a:pPr marL="0" indent="0" algn="l">
               <a:buNone/>
             </a:pPr>
             <a:r>
@@ -4557,7 +4355,7 @@
           <a:bodyPr wrap="square" lIns="0" tIns="0" rIns="0" bIns="0" rtlCol="0" anchor="ctr"/>
           <a:lstStyle/>
           <a:p>
-            <a:pPr algn="r" indent="0" marL="0">
+            <a:pPr marL="0" indent="0" algn="r">
               <a:buNone/>
             </a:pPr>
             <a:r>
@@ -4591,6 +4389,7 @@
         <a:solidFill>
           <a:srgbClr val="FFFFFF"/>
         </a:solidFill>
+        <a:effectLst/>
       </p:bgPr>
     </p:bg>
     <p:spTree>
@@ -4628,11 +4427,11 @@
           <a:bodyPr wrap="square" lIns="0" tIns="0" rIns="0" bIns="0" rtlCol="0" anchor="ctr"/>
           <a:lstStyle/>
           <a:p>
-            <a:pPr indent="0" marL="0">
-              <a:buNone/>
-            </a:pPr>
-            <a:r>
-              <a:rPr lang="en-US" sz="1100" b="1" spc="400" kern="0" dirty="0">
+            <a:pPr marL="0" indent="0">
+              <a:buNone/>
+            </a:pPr>
+            <a:r>
+              <a:rPr lang="en-US" sz="1100" b="1" kern="0" spc="400" dirty="0">
                 <a:solidFill>
                   <a:srgbClr val="1C7293"/>
                 </a:solidFill>
@@ -4667,7 +4466,7 @@
           <a:bodyPr wrap="square" lIns="0" tIns="0" rIns="0" bIns="0" rtlCol="0" anchor="ctr"/>
           <a:lstStyle/>
           <a:p>
-            <a:pPr indent="0" marL="0">
+            <a:pPr marL="0" indent="0">
               <a:buNone/>
             </a:pPr>
             <a:r>
@@ -4687,15 +4486,15 @@
       </p:sp>
       <p:pic>
         <p:nvPicPr>
-          <p:cNvPr id="4" name="Image 0" descr="/sessions/intelligent-practical-clarke/mnt/Einsatz von Geodaten in Marketing/reports/figures/qgis_3d_score.png">    </p:cNvPr>
+          <p:cNvPr id="4" name="Image 0" descr="/sessions/intelligent-practical-clarke/mnt/Einsatz von Geodaten in Marketing/reports/figures/qgis_3d_score.png"/>
           <p:cNvPicPr>
             <a:picLocks noChangeAspect="1"/>
           </p:cNvPicPr>
           <p:nvPr/>
         </p:nvPicPr>
         <p:blipFill>
-          <a:blip r:embed="rId1"/>
-          <a:srcRect l="0" r="0" t="0" b="0"/>
+          <a:blip r:embed="rId3"/>
+          <a:srcRect/>
           <a:stretch/>
         </p:blipFill>
         <p:spPr>
@@ -4732,13 +4531,20 @@
             <a:prstDash val="solid"/>
           </a:ln>
           <a:effectLst>
-            <a:outerShdw sx="100000" sy="100000" kx="0" ky="0" algn="bl" rotWithShape="0" blurRad="101600" dist="12700" dir="5400000">
+            <a:outerShdw blurRad="101600" dist="12700" dir="5400000" algn="bl" rotWithShape="0">
               <a:srgbClr val="94A3B8">
                 <a:alpha val="12000"/>
               </a:srgbClr>
             </a:outerShdw>
           </a:effectLst>
         </p:spPr>
+        <p:txBody>
+          <a:bodyPr/>
+          <a:lstStyle/>
+          <a:p>
+            <a:endParaRPr lang="en-US"/>
+          </a:p>
+        </p:txBody>
       </p:sp>
       <p:sp>
         <p:nvSpPr>
@@ -4764,6 +4570,13 @@
             <a:prstDash val="solid"/>
           </a:ln>
         </p:spPr>
+        <p:txBody>
+          <a:bodyPr/>
+          <a:lstStyle/>
+          <a:p>
+            <a:endParaRPr lang="en-US"/>
+          </a:p>
+        </p:txBody>
       </p:sp>
       <p:sp>
         <p:nvSpPr>
@@ -4786,7 +4599,7 @@
           <a:bodyPr wrap="square" lIns="0" tIns="0" rIns="0" bIns="0" rtlCol="0" anchor="ctr"/>
           <a:lstStyle/>
           <a:p>
-            <a:pPr indent="0" marL="0">
+            <a:pPr marL="0" indent="0">
               <a:buNone/>
             </a:pPr>
             <a:r>
@@ -4825,7 +4638,7 @@
           <a:bodyPr wrap="square" lIns="0" tIns="0" rIns="0" bIns="0" rtlCol="0" anchor="ctr"/>
           <a:lstStyle/>
           <a:p>
-            <a:pPr indent="0" marL="0">
+            <a:pPr marL="0" indent="0">
               <a:buNone/>
             </a:pPr>
             <a:r>
@@ -4842,7 +4655,7 @@
             <a:endParaRPr lang="en-US" sz="1050" dirty="0"/>
           </a:p>
           <a:p>
-            <a:pPr indent="0" marL="0">
+            <a:pPr marL="0" indent="0">
               <a:buNone/>
             </a:pPr>
             <a:r>
@@ -4859,7 +4672,7 @@
             <a:endParaRPr lang="en-US" sz="1050" dirty="0"/>
           </a:p>
           <a:p>
-            <a:pPr indent="0" marL="0">
+            <a:pPr marL="0" indent="0">
               <a:buNone/>
             </a:pPr>
             <a:r>
@@ -4876,7 +4689,7 @@
             <a:endParaRPr lang="en-US" sz="1050" dirty="0"/>
           </a:p>
           <a:p>
-            <a:pPr indent="0" marL="0">
+            <a:pPr marL="0" indent="0">
               <a:buNone/>
             </a:pPr>
             <a:r>
@@ -4893,7 +4706,7 @@
             <a:endParaRPr lang="en-US" sz="1050" dirty="0"/>
           </a:p>
           <a:p>
-            <a:pPr indent="0" marL="0">
+            <a:pPr marL="0" indent="0">
               <a:buNone/>
             </a:pPr>
             <a:r>
@@ -4910,7 +4723,7 @@
             <a:endParaRPr lang="en-US" sz="1050" dirty="0"/>
           </a:p>
           <a:p>
-            <a:pPr indent="0" marL="0">
+            <a:pPr marL="0" indent="0">
               <a:buNone/>
             </a:pPr>
             <a:r>
@@ -4927,7 +4740,7 @@
             <a:endParaRPr lang="en-US" sz="1050" dirty="0"/>
           </a:p>
           <a:p>
-            <a:pPr indent="0" marL="0">
+            <a:pPr marL="0" indent="0">
               <a:buNone/>
             </a:pPr>
             <a:r>
@@ -4944,7 +4757,7 @@
             <a:endParaRPr lang="en-US" sz="1050" dirty="0"/>
           </a:p>
           <a:p>
-            <a:pPr indent="0" marL="0">
+            <a:pPr marL="0" indent="0">
               <a:buNone/>
             </a:pPr>
             <a:r>
@@ -4983,7 +4796,7 @@
           <a:bodyPr wrap="square" lIns="0" tIns="0" rIns="0" bIns="0" rtlCol="0" anchor="ctr"/>
           <a:lstStyle/>
           <a:p>
-            <a:pPr algn="l" indent="0" marL="0">
+            <a:pPr marL="0" indent="0" algn="l">
               <a:buNone/>
             </a:pPr>
             <a:r>
@@ -5022,7 +4835,7 @@
           <a:bodyPr wrap="square" lIns="0" tIns="0" rIns="0" bIns="0" rtlCol="0" anchor="ctr"/>
           <a:lstStyle/>
           <a:p>
-            <a:pPr algn="r" indent="0" marL="0">
+            <a:pPr marL="0" indent="0" algn="r">
               <a:buNone/>
             </a:pPr>
             <a:r>
@@ -5056,6 +4869,7 @@
         <a:solidFill>
           <a:srgbClr val="FFFFFF"/>
         </a:solidFill>
+        <a:effectLst/>
       </p:bgPr>
     </p:bg>
     <p:spTree>
@@ -5093,11 +4907,11 @@
           <a:bodyPr wrap="square" lIns="0" tIns="0" rIns="0" bIns="0" rtlCol="0" anchor="ctr"/>
           <a:lstStyle/>
           <a:p>
-            <a:pPr indent="0" marL="0">
-              <a:buNone/>
-            </a:pPr>
-            <a:r>
-              <a:rPr lang="en-US" sz="1100" b="1" spc="400" kern="0" dirty="0">
+            <a:pPr marL="0" indent="0">
+              <a:buNone/>
+            </a:pPr>
+            <a:r>
+              <a:rPr lang="en-US" sz="1100" b="1" kern="0" spc="400" dirty="0">
                 <a:solidFill>
                   <a:srgbClr val="1C7293"/>
                 </a:solidFill>
@@ -5132,7 +4946,7 @@
           <a:bodyPr wrap="square" lIns="0" tIns="0" rIns="0" bIns="0" rtlCol="0" anchor="ctr"/>
           <a:lstStyle/>
           <a:p>
-            <a:pPr indent="0" marL="0">
+            <a:pPr marL="0" indent="0">
               <a:buNone/>
             </a:pPr>
             <a:r>
@@ -5152,15 +4966,15 @@
       </p:sp>
       <p:pic>
         <p:nvPicPr>
-          <p:cNvPr id="4" name="Image 0" descr="/sessions/intelligent-practical-clarke/mnt/Einsatz von Geodaten in Marketing/reports/figures/score_flat_vs_topo.png">    </p:cNvPr>
+          <p:cNvPr id="4" name="Image 0" descr="/sessions/intelligent-practical-clarke/mnt/Einsatz von Geodaten in Marketing/reports/figures/score_flat_vs_topo.png"/>
           <p:cNvPicPr>
             <a:picLocks noChangeAspect="1"/>
           </p:cNvPicPr>
           <p:nvPr/>
         </p:nvPicPr>
         <p:blipFill>
-          <a:blip r:embed="rId1"/>
-          <a:srcRect l="0" r="0" t="0" b="0"/>
+          <a:blip r:embed="rId3"/>
+          <a:srcRect/>
           <a:stretch/>
         </p:blipFill>
         <p:spPr>
@@ -5197,13 +5011,20 @@
             <a:prstDash val="solid"/>
           </a:ln>
           <a:effectLst>
-            <a:outerShdw sx="100000" sy="100000" kx="0" ky="0" algn="bl" rotWithShape="0" blurRad="101600" dist="12700" dir="5400000">
+            <a:outerShdw blurRad="101600" dist="12700" dir="5400000" algn="bl" rotWithShape="0">
               <a:srgbClr val="94A3B8">
                 <a:alpha val="12000"/>
               </a:srgbClr>
             </a:outerShdw>
           </a:effectLst>
         </p:spPr>
+        <p:txBody>
+          <a:bodyPr/>
+          <a:lstStyle/>
+          <a:p>
+            <a:endParaRPr lang="en-US"/>
+          </a:p>
+        </p:txBody>
       </p:sp>
       <p:sp>
         <p:nvSpPr>
@@ -5229,6 +5050,13 @@
             <a:prstDash val="solid"/>
           </a:ln>
         </p:spPr>
+        <p:txBody>
+          <a:bodyPr/>
+          <a:lstStyle/>
+          <a:p>
+            <a:endParaRPr lang="en-US"/>
+          </a:p>
+        </p:txBody>
       </p:sp>
       <p:sp>
         <p:nvSpPr>
@@ -5251,7 +5079,7 @@
           <a:bodyPr wrap="square" lIns="0" tIns="0" rIns="0" bIns="0" rtlCol="0" anchor="ctr"/>
           <a:lstStyle/>
           <a:p>
-            <a:pPr indent="0" marL="0">
+            <a:pPr marL="0" indent="0">
               <a:buNone/>
             </a:pPr>
             <a:r>
@@ -5290,7 +5118,7 @@
           <a:bodyPr wrap="square" lIns="0" tIns="0" rIns="0" bIns="0" rtlCol="0" anchor="ctr"/>
           <a:lstStyle/>
           <a:p>
-            <a:pPr indent="0" marL="0">
+            <a:pPr marL="0" indent="0">
               <a:buNone/>
             </a:pPr>
             <a:r>
@@ -5304,9 +5132,6 @@
               </a:rPr>
               <a:t>Oberstrass   </a:t>
             </a:r>
-            <a:pPr indent="0" marL="0">
-              <a:buNone/>
-            </a:pPr>
             <a:r>
               <a:rPr lang="en-US" sz="950" b="1" dirty="0">
                 <a:solidFill>
@@ -5321,7 +5146,7 @@
             <a:endParaRPr lang="en-US" sz="950" dirty="0"/>
           </a:p>
           <a:p>
-            <a:pPr indent="0" marL="0">
+            <a:pPr marL="0" indent="0">
               <a:buNone/>
             </a:pPr>
             <a:r>
@@ -5335,9 +5160,6 @@
               </a:rPr>
               <a:t>Fluntern     </a:t>
             </a:r>
-            <a:pPr indent="0" marL="0">
-              <a:buNone/>
-            </a:pPr>
             <a:r>
               <a:rPr lang="en-US" sz="950" b="1" dirty="0">
                 <a:solidFill>
@@ -5352,7 +5174,7 @@
             <a:endParaRPr lang="en-US" sz="950" dirty="0"/>
           </a:p>
           <a:p>
-            <a:pPr indent="0" marL="0">
+            <a:pPr marL="0" indent="0">
               <a:buNone/>
             </a:pPr>
             <a:r>
@@ -5366,9 +5188,6 @@
               </a:rPr>
               <a:t>Gewerbeschule </a:t>
             </a:r>
-            <a:pPr indent="0" marL="0">
-              <a:buNone/>
-            </a:pPr>
             <a:r>
               <a:rPr lang="en-US" sz="950" b="1" dirty="0">
                 <a:solidFill>
@@ -5383,7 +5202,7 @@
             <a:endParaRPr lang="en-US" sz="950" dirty="0"/>
           </a:p>
           <a:p>
-            <a:pPr indent="0" marL="0">
+            <a:pPr marL="0" indent="0">
               <a:buNone/>
             </a:pPr>
             <a:r>
@@ -5397,9 +5216,6 @@
               </a:rPr>
               <a:t>Alt-Wiedikon </a:t>
             </a:r>
-            <a:pPr indent="0" marL="0">
-              <a:buNone/>
-            </a:pPr>
             <a:r>
               <a:rPr lang="en-US" sz="950" b="1" dirty="0">
                 <a:solidFill>
@@ -5414,7 +5230,7 @@
             <a:endParaRPr lang="en-US" sz="950" dirty="0"/>
           </a:p>
           <a:p>
-            <a:pPr indent="0" marL="0">
+            <a:pPr marL="0" indent="0">
               <a:buNone/>
             </a:pPr>
             <a:r>
@@ -5428,9 +5244,6 @@
               </a:rPr>
               <a:t>Wipkingen    </a:t>
             </a:r>
-            <a:pPr indent="0" marL="0">
-              <a:buNone/>
-            </a:pPr>
             <a:r>
               <a:rPr lang="en-US" sz="950" b="1" dirty="0">
                 <a:solidFill>
@@ -5467,7 +5280,7 @@
           <a:bodyPr wrap="square" lIns="0" tIns="0" rIns="0" bIns="0" rtlCol="0" anchor="ctr"/>
           <a:lstStyle/>
           <a:p>
-            <a:pPr indent="0" marL="0">
+            <a:pPr marL="0" indent="0">
               <a:buNone/>
             </a:pPr>
             <a:r>
@@ -5506,7 +5319,7 @@
           <a:bodyPr wrap="square" lIns="0" tIns="0" rIns="0" bIns="0" rtlCol="0" anchor="ctr"/>
           <a:lstStyle/>
           <a:p>
-            <a:pPr indent="0" marL="0">
+            <a:pPr marL="0" indent="0">
               <a:buNone/>
             </a:pPr>
             <a:r>
@@ -5520,9 +5333,6 @@
               </a:rPr>
               <a:t>Mühlebach    </a:t>
             </a:r>
-            <a:pPr indent="0" marL="0">
-              <a:buNone/>
-            </a:pPr>
             <a:r>
               <a:rPr lang="en-US" sz="950" b="1" dirty="0">
                 <a:solidFill>
@@ -5537,7 +5347,7 @@
             <a:endParaRPr lang="en-US" sz="950" dirty="0"/>
           </a:p>
           <a:p>
-            <a:pPr indent="0" marL="0">
+            <a:pPr marL="0" indent="0">
               <a:buNone/>
             </a:pPr>
             <a:r>
@@ -5551,9 +5361,6 @@
               </a:rPr>
               <a:t>Seefeld      </a:t>
             </a:r>
-            <a:pPr indent="0" marL="0">
-              <a:buNone/>
-            </a:pPr>
             <a:r>
               <a:rPr lang="en-US" sz="950" b="1" dirty="0">
                 <a:solidFill>
@@ -5568,7 +5375,7 @@
             <a:endParaRPr lang="en-US" sz="950" dirty="0"/>
           </a:p>
           <a:p>
-            <a:pPr indent="0" marL="0">
+            <a:pPr marL="0" indent="0">
               <a:buNone/>
             </a:pPr>
             <a:r>
@@ -5582,9 +5389,6 @@
               </a:rPr>
               <a:t>Oerlikon     </a:t>
             </a:r>
-            <a:pPr indent="0" marL="0">
-              <a:buNone/>
-            </a:pPr>
             <a:r>
               <a:rPr lang="en-US" sz="950" b="1" dirty="0">
                 <a:solidFill>
@@ -5599,7 +5403,7 @@
             <a:endParaRPr lang="en-US" sz="950" dirty="0"/>
           </a:p>
           <a:p>
-            <a:pPr indent="0" marL="0">
+            <a:pPr marL="0" indent="0">
               <a:buNone/>
             </a:pPr>
             <a:r>
@@ -5613,9 +5417,6 @@
               </a:rPr>
               <a:t>Werd         </a:t>
             </a:r>
-            <a:pPr indent="0" marL="0">
-              <a:buNone/>
-            </a:pPr>
             <a:r>
               <a:rPr lang="en-US" sz="950" b="1" dirty="0">
                 <a:solidFill>
@@ -5630,7 +5431,7 @@
             <a:endParaRPr lang="en-US" sz="950" dirty="0"/>
           </a:p>
           <a:p>
-            <a:pPr indent="0" marL="0">
+            <a:pPr marL="0" indent="0">
               <a:buNone/>
             </a:pPr>
             <a:r>
@@ -5644,9 +5445,6 @@
               </a:rPr>
               <a:t>Sihlfeld     </a:t>
             </a:r>
-            <a:pPr indent="0" marL="0">
-              <a:buNone/>
-            </a:pPr>
             <a:r>
               <a:rPr lang="en-US" sz="950" b="1" dirty="0">
                 <a:solidFill>
@@ -5686,13 +5484,20 @@
             <a:prstDash val="solid"/>
           </a:ln>
           <a:effectLst>
-            <a:outerShdw sx="100000" sy="100000" kx="0" ky="0" algn="bl" rotWithShape="0" blurRad="101600" dist="12700" dir="5400000">
+            <a:outerShdw blurRad="101600" dist="12700" dir="5400000" algn="bl" rotWithShape="0">
               <a:srgbClr val="94A3B8">
                 <a:alpha val="12000"/>
               </a:srgbClr>
             </a:outerShdw>
           </a:effectLst>
         </p:spPr>
+        <p:txBody>
+          <a:bodyPr/>
+          <a:lstStyle/>
+          <a:p>
+            <a:endParaRPr lang="en-US"/>
+          </a:p>
+        </p:txBody>
       </p:sp>
       <p:sp>
         <p:nvSpPr>
@@ -5718,6 +5523,13 @@
             <a:prstDash val="solid"/>
           </a:ln>
         </p:spPr>
+        <p:txBody>
+          <a:bodyPr/>
+          <a:lstStyle/>
+          <a:p>
+            <a:endParaRPr lang="en-US"/>
+          </a:p>
+        </p:txBody>
       </p:sp>
       <p:sp>
         <p:nvSpPr>
@@ -5740,7 +5552,7 @@
           <a:bodyPr wrap="square" lIns="0" tIns="0" rIns="0" bIns="0" rtlCol="0" anchor="ctr"/>
           <a:lstStyle/>
           <a:p>
-            <a:pPr indent="0" marL="0">
+            <a:pPr marL="0" indent="0">
               <a:buNone/>
             </a:pPr>
             <a:r>
@@ -5779,7 +5591,7 @@
           <a:bodyPr wrap="square" lIns="0" tIns="0" rIns="0" bIns="0" rtlCol="0" anchor="ctr"/>
           <a:lstStyle/>
           <a:p>
-            <a:pPr indent="0" marL="0">
+            <a:pPr marL="0" indent="0">
               <a:buNone/>
             </a:pPr>
             <a:r>
@@ -5796,7 +5608,7 @@
             <a:endParaRPr lang="en-US" sz="1000" dirty="0"/>
           </a:p>
           <a:p>
-            <a:pPr indent="0" marL="0">
+            <a:pPr marL="0" indent="0">
               <a:buNone/>
             </a:pPr>
             <a:r>
@@ -5813,7 +5625,7 @@
             <a:endParaRPr lang="en-US" sz="1000" dirty="0"/>
           </a:p>
           <a:p>
-            <a:pPr indent="0" marL="0">
+            <a:pPr marL="0" indent="0">
               <a:buNone/>
             </a:pPr>
             <a:r>
@@ -5830,7 +5642,7 @@
             <a:endParaRPr lang="en-US" sz="1000" dirty="0"/>
           </a:p>
           <a:p>
-            <a:pPr indent="0" marL="0">
+            <a:pPr marL="0" indent="0">
               <a:buNone/>
             </a:pPr>
             <a:r>
@@ -5847,7 +5659,7 @@
             <a:endParaRPr lang="en-US" sz="1000" dirty="0"/>
           </a:p>
           <a:p>
-            <a:pPr indent="0" marL="0">
+            <a:pPr marL="0" indent="0">
               <a:buNone/>
             </a:pPr>
             <a:r>
@@ -5864,7 +5676,7 @@
             <a:endParaRPr lang="en-US" sz="1000" dirty="0"/>
           </a:p>
           <a:p>
-            <a:pPr indent="0" marL="0">
+            <a:pPr marL="0" indent="0">
               <a:buNone/>
             </a:pPr>
             <a:r>
@@ -5881,7 +5693,7 @@
             <a:endParaRPr lang="en-US" sz="1000" dirty="0"/>
           </a:p>
           <a:p>
-            <a:pPr indent="0" marL="0">
+            <a:pPr marL="0" indent="0">
               <a:buNone/>
             </a:pPr>
             <a:r>
@@ -5898,7 +5710,7 @@
             <a:endParaRPr lang="en-US" sz="1000" dirty="0"/>
           </a:p>
           <a:p>
-            <a:pPr indent="0" marL="0">
+            <a:pPr marL="0" indent="0">
               <a:buNone/>
             </a:pPr>
             <a:r>
@@ -5915,7 +5727,7 @@
             <a:endParaRPr lang="en-US" sz="1000" dirty="0"/>
           </a:p>
           <a:p>
-            <a:pPr indent="0" marL="0">
+            <a:pPr marL="0" indent="0">
               <a:buNone/>
             </a:pPr>
             <a:r>
@@ -5954,7 +5766,7 @@
           <a:bodyPr wrap="square" lIns="0" tIns="0" rIns="0" bIns="0" rtlCol="0" anchor="ctr"/>
           <a:lstStyle/>
           <a:p>
-            <a:pPr algn="l" indent="0" marL="0">
+            <a:pPr marL="0" indent="0" algn="l">
               <a:buNone/>
             </a:pPr>
             <a:r>
@@ -5993,7 +5805,7 @@
           <a:bodyPr wrap="square" lIns="0" tIns="0" rIns="0" bIns="0" rtlCol="0" anchor="ctr"/>
           <a:lstStyle/>
           <a:p>
-            <a:pPr algn="r" indent="0" marL="0">
+            <a:pPr marL="0" indent="0" algn="r">
               <a:buNone/>
             </a:pPr>
             <a:r>
@@ -6027,6 +5839,7 @@
         <a:solidFill>
           <a:srgbClr val="FFFFFF"/>
         </a:solidFill>
+        <a:effectLst/>
       </p:bgPr>
     </p:bg>
     <p:spTree>
@@ -6064,11 +5877,11 @@
           <a:bodyPr wrap="square" lIns="0" tIns="0" rIns="0" bIns="0" rtlCol="0" anchor="ctr"/>
           <a:lstStyle/>
           <a:p>
-            <a:pPr indent="0" marL="0">
-              <a:buNone/>
-            </a:pPr>
-            <a:r>
-              <a:rPr lang="en-US" sz="1100" b="1" spc="400" kern="0" dirty="0">
+            <a:pPr marL="0" indent="0">
+              <a:buNone/>
+            </a:pPr>
+            <a:r>
+              <a:rPr lang="en-US" sz="1100" b="1" kern="0" spc="400" dirty="0">
                 <a:solidFill>
                   <a:srgbClr val="1C7293"/>
                 </a:solidFill>
@@ -6103,7 +5916,7 @@
           <a:bodyPr wrap="square" lIns="0" tIns="0" rIns="0" bIns="0" rtlCol="0" anchor="ctr"/>
           <a:lstStyle/>
           <a:p>
-            <a:pPr indent="0" marL="0">
+            <a:pPr marL="0" indent="0">
               <a:buNone/>
             </a:pPr>
             <a:r>
@@ -6145,13 +5958,20 @@
             <a:prstDash val="solid"/>
           </a:ln>
           <a:effectLst>
-            <a:outerShdw sx="100000" sy="100000" kx="0" ky="0" algn="bl" rotWithShape="0" blurRad="101600" dist="12700" dir="5400000">
+            <a:outerShdw blurRad="101600" dist="12700" dir="5400000" algn="bl" rotWithShape="0">
               <a:srgbClr val="94A3B8">
                 <a:alpha val="12000"/>
               </a:srgbClr>
             </a:outerShdw>
           </a:effectLst>
         </p:spPr>
+        <p:txBody>
+          <a:bodyPr/>
+          <a:lstStyle/>
+          <a:p>
+            <a:endParaRPr lang="en-US"/>
+          </a:p>
+        </p:txBody>
       </p:sp>
       <p:sp>
         <p:nvSpPr>
@@ -6177,6 +5997,13 @@
             <a:prstDash val="solid"/>
           </a:ln>
         </p:spPr>
+        <p:txBody>
+          <a:bodyPr/>
+          <a:lstStyle/>
+          <a:p>
+            <a:endParaRPr lang="en-US"/>
+          </a:p>
+        </p:txBody>
       </p:sp>
       <p:sp>
         <p:nvSpPr>
@@ -6199,7 +6026,7 @@
           <a:bodyPr wrap="square" lIns="0" tIns="0" rIns="0" bIns="0" rtlCol="0" anchor="ctr"/>
           <a:lstStyle/>
           <a:p>
-            <a:pPr indent="0" marL="0">
+            <a:pPr marL="0" indent="0">
               <a:buNone/>
             </a:pPr>
             <a:r>
@@ -6238,7 +6065,7 @@
           <a:bodyPr wrap="square" lIns="0" tIns="0" rIns="0" bIns="0" rtlCol="0" anchor="b"/>
           <a:lstStyle/>
           <a:p>
-            <a:pPr algn="ctr" indent="0" marL="0">
+            <a:pPr marL="0" indent="0" algn="ctr">
               <a:buNone/>
             </a:pPr>
             <a:r>
@@ -6277,7 +6104,7 @@
           <a:bodyPr wrap="square" lIns="0" tIns="0" rIns="0" bIns="0" rtlCol="0" anchor="t"/>
           <a:lstStyle/>
           <a:p>
-            <a:pPr algn="ctr" indent="0" marL="0">
+            <a:pPr marL="0" indent="0" algn="ctr">
               <a:buNone/>
             </a:pPr>
             <a:r>
@@ -6316,7 +6143,7 @@
           <a:bodyPr wrap="square" lIns="0" tIns="0" rIns="0" bIns="0" rtlCol="0" anchor="ctr"/>
           <a:lstStyle/>
           <a:p>
-            <a:pPr indent="0" marL="0">
+            <a:pPr marL="0" indent="0">
               <a:buNone/>
             </a:pPr>
             <a:r>
@@ -6358,13 +6185,20 @@
             <a:prstDash val="solid"/>
           </a:ln>
           <a:effectLst>
-            <a:outerShdw sx="100000" sy="100000" kx="0" ky="0" algn="bl" rotWithShape="0" blurRad="101600" dist="12700" dir="5400000">
+            <a:outerShdw blurRad="101600" dist="12700" dir="5400000" algn="bl" rotWithShape="0">
               <a:srgbClr val="94A3B8">
                 <a:alpha val="12000"/>
               </a:srgbClr>
             </a:outerShdw>
           </a:effectLst>
         </p:spPr>
+        <p:txBody>
+          <a:bodyPr/>
+          <a:lstStyle/>
+          <a:p>
+            <a:endParaRPr lang="en-US"/>
+          </a:p>
+        </p:txBody>
       </p:sp>
       <p:sp>
         <p:nvSpPr>
@@ -6390,6 +6224,13 @@
             <a:prstDash val="solid"/>
           </a:ln>
         </p:spPr>
+        <p:txBody>
+          <a:bodyPr/>
+          <a:lstStyle/>
+          <a:p>
+            <a:endParaRPr lang="en-US"/>
+          </a:p>
+        </p:txBody>
       </p:sp>
       <p:sp>
         <p:nvSpPr>
@@ -6412,7 +6253,7 @@
           <a:bodyPr wrap="square" lIns="0" tIns="0" rIns="0" bIns="0" rtlCol="0" anchor="ctr"/>
           <a:lstStyle/>
           <a:p>
-            <a:pPr indent="0" marL="0">
+            <a:pPr marL="0" indent="0">
               <a:buNone/>
             </a:pPr>
             <a:r>
@@ -6451,7 +6292,7 @@
           <a:bodyPr wrap="square" lIns="0" tIns="0" rIns="0" bIns="0" rtlCol="0" anchor="b"/>
           <a:lstStyle/>
           <a:p>
-            <a:pPr algn="ctr" indent="0" marL="0">
+            <a:pPr marL="0" indent="0" algn="ctr">
               <a:buNone/>
             </a:pPr>
             <a:r>
@@ -6490,7 +6331,7 @@
           <a:bodyPr wrap="square" lIns="0" tIns="0" rIns="0" bIns="0" rtlCol="0" anchor="t"/>
           <a:lstStyle/>
           <a:p>
-            <a:pPr algn="ctr" indent="0" marL="0">
+            <a:pPr marL="0" indent="0" algn="ctr">
               <a:buNone/>
             </a:pPr>
             <a:r>
@@ -6529,7 +6370,7 @@
           <a:bodyPr wrap="square" lIns="0" tIns="0" rIns="0" bIns="0" rtlCol="0" anchor="ctr"/>
           <a:lstStyle/>
           <a:p>
-            <a:pPr indent="0" marL="0">
+            <a:pPr marL="0" indent="0">
               <a:buNone/>
             </a:pPr>
             <a:r>
@@ -6571,13 +6412,20 @@
             <a:prstDash val="solid"/>
           </a:ln>
           <a:effectLst>
-            <a:outerShdw sx="100000" sy="100000" kx="0" ky="0" algn="bl" rotWithShape="0" blurRad="101600" dist="12700" dir="5400000">
+            <a:outerShdw blurRad="101600" dist="12700" dir="5400000" algn="bl" rotWithShape="0">
               <a:srgbClr val="94A3B8">
                 <a:alpha val="12000"/>
               </a:srgbClr>
             </a:outerShdw>
           </a:effectLst>
         </p:spPr>
+        <p:txBody>
+          <a:bodyPr/>
+          <a:lstStyle/>
+          <a:p>
+            <a:endParaRPr lang="en-US"/>
+          </a:p>
+        </p:txBody>
       </p:sp>
       <p:sp>
         <p:nvSpPr>
@@ -6603,6 +6451,13 @@
             <a:prstDash val="solid"/>
           </a:ln>
         </p:spPr>
+        <p:txBody>
+          <a:bodyPr/>
+          <a:lstStyle/>
+          <a:p>
+            <a:endParaRPr lang="en-US"/>
+          </a:p>
+        </p:txBody>
       </p:sp>
       <p:sp>
         <p:nvSpPr>
@@ -6625,7 +6480,7 @@
           <a:bodyPr wrap="square" lIns="0" tIns="0" rIns="0" bIns="0" rtlCol="0" anchor="ctr"/>
           <a:lstStyle/>
           <a:p>
-            <a:pPr indent="0" marL="0">
+            <a:pPr marL="0" indent="0">
               <a:buNone/>
             </a:pPr>
             <a:r>
@@ -6664,7 +6519,7 @@
           <a:bodyPr wrap="square" lIns="0" tIns="0" rIns="0" bIns="0" rtlCol="0" anchor="b"/>
           <a:lstStyle/>
           <a:p>
-            <a:pPr algn="ctr" indent="0" marL="0">
+            <a:pPr marL="0" indent="0" algn="ctr">
               <a:buNone/>
             </a:pPr>
             <a:r>
@@ -6703,7 +6558,7 @@
           <a:bodyPr wrap="square" lIns="0" tIns="0" rIns="0" bIns="0" rtlCol="0" anchor="t"/>
           <a:lstStyle/>
           <a:p>
-            <a:pPr algn="ctr" indent="0" marL="0">
+            <a:pPr marL="0" indent="0" algn="ctr">
               <a:buNone/>
             </a:pPr>
             <a:r>
@@ -6742,7 +6597,7 @@
           <a:bodyPr wrap="square" lIns="0" tIns="0" rIns="0" bIns="0" rtlCol="0" anchor="ctr"/>
           <a:lstStyle/>
           <a:p>
-            <a:pPr indent="0" marL="0">
+            <a:pPr marL="0" indent="0">
               <a:buNone/>
             </a:pPr>
             <a:r>
@@ -6781,7 +6636,7 @@
           <a:bodyPr wrap="square" lIns="0" tIns="0" rIns="0" bIns="0" rtlCol="0" anchor="ctr"/>
           <a:lstStyle/>
           <a:p>
-            <a:pPr algn="l" indent="0" marL="0">
+            <a:pPr marL="0" indent="0" algn="l">
               <a:buNone/>
             </a:pPr>
             <a:r>
@@ -6820,7 +6675,7 @@
           <a:bodyPr wrap="square" lIns="0" tIns="0" rIns="0" bIns="0" rtlCol="0" anchor="ctr"/>
           <a:lstStyle/>
           <a:p>
-            <a:pPr algn="r" indent="0" marL="0">
+            <a:pPr marL="0" indent="0" algn="r">
               <a:buNone/>
             </a:pPr>
             <a:r>
@@ -6854,6 +6709,7 @@
         <a:solidFill>
           <a:srgbClr val="FFFFFF"/>
         </a:solidFill>
+        <a:effectLst/>
       </p:bgPr>
     </p:bg>
     <p:spTree>
@@ -6891,11 +6747,11 @@
           <a:bodyPr wrap="square" lIns="0" tIns="0" rIns="0" bIns="0" rtlCol="0" anchor="ctr"/>
           <a:lstStyle/>
           <a:p>
-            <a:pPr indent="0" marL="0">
-              <a:buNone/>
-            </a:pPr>
-            <a:r>
-              <a:rPr lang="en-US" sz="1100" b="1" spc="400" kern="0" dirty="0">
+            <a:pPr marL="0" indent="0">
+              <a:buNone/>
+            </a:pPr>
+            <a:r>
+              <a:rPr lang="en-US" sz="1100" b="1" kern="0" spc="400" dirty="0">
                 <a:solidFill>
                   <a:srgbClr val="1C7293"/>
                 </a:solidFill>
@@ -6930,7 +6786,7 @@
           <a:bodyPr wrap="square" lIns="0" tIns="0" rIns="0" bIns="0" rtlCol="0" anchor="ctr"/>
           <a:lstStyle/>
           <a:p>
-            <a:pPr indent="0" marL="0">
+            <a:pPr marL="0" indent="0">
               <a:buNone/>
             </a:pPr>
             <a:r>
@@ -6972,13 +6828,20 @@
             <a:prstDash val="solid"/>
           </a:ln>
           <a:effectLst>
-            <a:outerShdw sx="100000" sy="100000" kx="0" ky="0" algn="bl" rotWithShape="0" blurRad="101600" dist="12700" dir="5400000">
+            <a:outerShdw blurRad="101600" dist="12700" dir="5400000" algn="bl" rotWithShape="0">
               <a:srgbClr val="94A3B8">
                 <a:alpha val="12000"/>
               </a:srgbClr>
             </a:outerShdw>
           </a:effectLst>
         </p:spPr>
+        <p:txBody>
+          <a:bodyPr/>
+          <a:lstStyle/>
+          <a:p>
+            <a:endParaRPr lang="en-US"/>
+          </a:p>
+        </p:txBody>
       </p:sp>
       <p:sp>
         <p:nvSpPr>
@@ -7004,6 +6867,13 @@
             <a:prstDash val="solid"/>
           </a:ln>
         </p:spPr>
+        <p:txBody>
+          <a:bodyPr/>
+          <a:lstStyle/>
+          <a:p>
+            <a:endParaRPr lang="en-US"/>
+          </a:p>
+        </p:txBody>
       </p:sp>
       <p:sp>
         <p:nvSpPr>
@@ -7026,7 +6896,7 @@
           <a:bodyPr wrap="square" lIns="0" tIns="0" rIns="0" bIns="0" rtlCol="0" anchor="ctr"/>
           <a:lstStyle/>
           <a:p>
-            <a:pPr indent="0" marL="0">
+            <a:pPr marL="0" indent="0">
               <a:buNone/>
             </a:pPr>
             <a:r>
@@ -7065,7 +6935,7 @@
           <a:bodyPr wrap="square" lIns="0" tIns="0" rIns="0" bIns="0" rtlCol="0" anchor="ctr"/>
           <a:lstStyle/>
           <a:p>
-            <a:pPr indent="0" marL="0">
+            <a:pPr marL="0" indent="0">
               <a:buNone/>
             </a:pPr>
             <a:r>
@@ -7107,6 +6977,13 @@
             <a:prstDash val="solid"/>
           </a:ln>
         </p:spPr>
+        <p:txBody>
+          <a:bodyPr/>
+          <a:lstStyle/>
+          <a:p>
+            <a:endParaRPr lang="en-US"/>
+          </a:p>
+        </p:txBody>
       </p:sp>
       <p:sp>
         <p:nvSpPr>
@@ -7129,7 +7006,7 @@
           <a:bodyPr wrap="square" lIns="0" tIns="0" rIns="0" bIns="0" rtlCol="0" anchor="ctr"/>
           <a:lstStyle/>
           <a:p>
-            <a:pPr indent="0" marL="0">
+            <a:pPr marL="0" indent="0">
               <a:buNone/>
             </a:pPr>
             <a:r>
@@ -7168,7 +7045,7 @@
           <a:bodyPr wrap="square" lIns="0" tIns="0" rIns="0" bIns="0" rtlCol="0" anchor="ctr"/>
           <a:lstStyle/>
           <a:p>
-            <a:pPr indent="0" marL="0">
+            <a:pPr marL="0" indent="0">
               <a:buNone/>
             </a:pPr>
             <a:r>
@@ -7210,6 +7087,13 @@
             <a:prstDash val="solid"/>
           </a:ln>
         </p:spPr>
+        <p:txBody>
+          <a:bodyPr/>
+          <a:lstStyle/>
+          <a:p>
+            <a:endParaRPr lang="en-US"/>
+          </a:p>
+        </p:txBody>
       </p:sp>
       <p:sp>
         <p:nvSpPr>
@@ -7232,7 +7116,7 @@
           <a:bodyPr wrap="square" lIns="0" tIns="0" rIns="0" bIns="0" rtlCol="0" anchor="ctr"/>
           <a:lstStyle/>
           <a:p>
-            <a:pPr indent="0" marL="0">
+            <a:pPr marL="0" indent="0">
               <a:buNone/>
             </a:pPr>
             <a:r>
@@ -7271,7 +7155,7 @@
           <a:bodyPr wrap="square" lIns="0" tIns="0" rIns="0" bIns="0" rtlCol="0" anchor="ctr"/>
           <a:lstStyle/>
           <a:p>
-            <a:pPr indent="0" marL="0">
+            <a:pPr marL="0" indent="0">
               <a:buNone/>
             </a:pPr>
             <a:r>
@@ -7313,6 +7197,13 @@
             <a:prstDash val="solid"/>
           </a:ln>
         </p:spPr>
+        <p:txBody>
+          <a:bodyPr/>
+          <a:lstStyle/>
+          <a:p>
+            <a:endParaRPr lang="en-US"/>
+          </a:p>
+        </p:txBody>
       </p:sp>
       <p:sp>
         <p:nvSpPr>
@@ -7335,7 +7226,7 @@
           <a:bodyPr wrap="square" lIns="0" tIns="0" rIns="0" bIns="0" rtlCol="0" anchor="ctr"/>
           <a:lstStyle/>
           <a:p>
-            <a:pPr indent="0" marL="0">
+            <a:pPr marL="0" indent="0">
               <a:buNone/>
             </a:pPr>
             <a:r>
@@ -7374,7 +7265,7 @@
           <a:bodyPr wrap="square" lIns="0" tIns="0" rIns="0" bIns="0" rtlCol="0" anchor="ctr"/>
           <a:lstStyle/>
           <a:p>
-            <a:pPr indent="0" marL="0">
+            <a:pPr marL="0" indent="0">
               <a:buNone/>
             </a:pPr>
             <a:r>
@@ -7416,6 +7307,13 @@
             <a:prstDash val="solid"/>
           </a:ln>
         </p:spPr>
+        <p:txBody>
+          <a:bodyPr/>
+          <a:lstStyle/>
+          <a:p>
+            <a:endParaRPr lang="en-US"/>
+          </a:p>
+        </p:txBody>
       </p:sp>
       <p:sp>
         <p:nvSpPr>
@@ -7438,7 +7336,7 @@
           <a:bodyPr wrap="square" lIns="0" tIns="0" rIns="0" bIns="0" rtlCol="0" anchor="ctr"/>
           <a:lstStyle/>
           <a:p>
-            <a:pPr indent="0" marL="0">
+            <a:pPr marL="0" indent="0">
               <a:buNone/>
             </a:pPr>
             <a:r>
@@ -7477,7 +7375,7 @@
           <a:bodyPr wrap="square" lIns="0" tIns="0" rIns="0" bIns="0" rtlCol="0" anchor="ctr"/>
           <a:lstStyle/>
           <a:p>
-            <a:pPr indent="0" marL="0">
+            <a:pPr marL="0" indent="0">
               <a:buNone/>
             </a:pPr>
             <a:r>
@@ -7519,6 +7417,13 @@
             <a:prstDash val="solid"/>
           </a:ln>
         </p:spPr>
+        <p:txBody>
+          <a:bodyPr/>
+          <a:lstStyle/>
+          <a:p>
+            <a:endParaRPr lang="en-US"/>
+          </a:p>
+        </p:txBody>
       </p:sp>
       <p:sp>
         <p:nvSpPr>
@@ -7541,7 +7446,7 @@
           <a:bodyPr wrap="square" lIns="0" tIns="0" rIns="0" bIns="0" rtlCol="0" anchor="ctr"/>
           <a:lstStyle/>
           <a:p>
-            <a:pPr indent="0" marL="0">
+            <a:pPr marL="0" indent="0">
               <a:buNone/>
             </a:pPr>
             <a:r>
@@ -7583,13 +7488,20 @@
             <a:prstDash val="solid"/>
           </a:ln>
           <a:effectLst>
-            <a:outerShdw sx="100000" sy="100000" kx="0" ky="0" algn="bl" rotWithShape="0" blurRad="101600" dist="12700" dir="5400000">
+            <a:outerShdw blurRad="101600" dist="12700" dir="5400000" algn="bl" rotWithShape="0">
               <a:srgbClr val="94A3B8">
                 <a:alpha val="12000"/>
               </a:srgbClr>
             </a:outerShdw>
           </a:effectLst>
         </p:spPr>
+        <p:txBody>
+          <a:bodyPr/>
+          <a:lstStyle/>
+          <a:p>
+            <a:endParaRPr lang="en-US"/>
+          </a:p>
+        </p:txBody>
       </p:sp>
       <p:sp>
         <p:nvSpPr>
@@ -7615,6 +7527,13 @@
             <a:prstDash val="solid"/>
           </a:ln>
         </p:spPr>
+        <p:txBody>
+          <a:bodyPr/>
+          <a:lstStyle/>
+          <a:p>
+            <a:endParaRPr lang="en-US"/>
+          </a:p>
+        </p:txBody>
       </p:sp>
       <p:sp>
         <p:nvSpPr>
@@ -7637,7 +7556,7 @@
           <a:bodyPr wrap="square" lIns="0" tIns="0" rIns="0" bIns="0" rtlCol="0" anchor="ctr"/>
           <a:lstStyle/>
           <a:p>
-            <a:pPr indent="0" marL="0">
+            <a:pPr marL="0" indent="0">
               <a:buNone/>
             </a:pPr>
             <a:r>
@@ -7676,7 +7595,7 @@
           <a:bodyPr wrap="square" lIns="0" tIns="0" rIns="0" bIns="0" rtlCol="0" anchor="ctr"/>
           <a:lstStyle/>
           <a:p>
-            <a:pPr indent="0" marL="0">
+            <a:pPr marL="0" indent="0">
               <a:buNone/>
             </a:pPr>
             <a:r>
@@ -7718,6 +7637,13 @@
             <a:prstDash val="solid"/>
           </a:ln>
         </p:spPr>
+        <p:txBody>
+          <a:bodyPr/>
+          <a:lstStyle/>
+          <a:p>
+            <a:endParaRPr lang="en-US"/>
+          </a:p>
+        </p:txBody>
       </p:sp>
       <p:sp>
         <p:nvSpPr>
@@ -7740,7 +7666,7 @@
           <a:bodyPr wrap="square" lIns="0" tIns="0" rIns="0" bIns="0" rtlCol="0" anchor="ctr"/>
           <a:lstStyle/>
           <a:p>
-            <a:pPr indent="0" marL="0">
+            <a:pPr marL="0" indent="0">
               <a:buNone/>
             </a:pPr>
             <a:r>
@@ -7779,7 +7705,7 @@
           <a:bodyPr wrap="square" lIns="0" tIns="0" rIns="0" bIns="0" rtlCol="0" anchor="ctr"/>
           <a:lstStyle/>
           <a:p>
-            <a:pPr indent="0" marL="0">
+            <a:pPr marL="0" indent="0">
               <a:buNone/>
             </a:pPr>
             <a:r>
@@ -7821,6 +7747,13 @@
             <a:prstDash val="solid"/>
           </a:ln>
         </p:spPr>
+        <p:txBody>
+          <a:bodyPr/>
+          <a:lstStyle/>
+          <a:p>
+            <a:endParaRPr lang="en-US"/>
+          </a:p>
+        </p:txBody>
       </p:sp>
       <p:sp>
         <p:nvSpPr>
@@ -7843,7 +7776,7 @@
           <a:bodyPr wrap="square" lIns="0" tIns="0" rIns="0" bIns="0" rtlCol="0" anchor="ctr"/>
           <a:lstStyle/>
           <a:p>
-            <a:pPr indent="0" marL="0">
+            <a:pPr marL="0" indent="0">
               <a:buNone/>
             </a:pPr>
             <a:r>
@@ -7882,7 +7815,7 @@
           <a:bodyPr wrap="square" lIns="0" tIns="0" rIns="0" bIns="0" rtlCol="0" anchor="ctr"/>
           <a:lstStyle/>
           <a:p>
-            <a:pPr indent="0" marL="0">
+            <a:pPr marL="0" indent="0">
               <a:buNone/>
             </a:pPr>
             <a:r>
@@ -7924,6 +7857,13 @@
             <a:prstDash val="solid"/>
           </a:ln>
         </p:spPr>
+        <p:txBody>
+          <a:bodyPr/>
+          <a:lstStyle/>
+          <a:p>
+            <a:endParaRPr lang="en-US"/>
+          </a:p>
+        </p:txBody>
       </p:sp>
       <p:sp>
         <p:nvSpPr>
@@ -7946,7 +7886,7 @@
           <a:bodyPr wrap="square" lIns="0" tIns="0" rIns="0" bIns="0" rtlCol="0" anchor="ctr"/>
           <a:lstStyle/>
           <a:p>
-            <a:pPr indent="0" marL="0">
+            <a:pPr marL="0" indent="0">
               <a:buNone/>
             </a:pPr>
             <a:r>
@@ -7985,7 +7925,7 @@
           <a:bodyPr wrap="square" lIns="0" tIns="0" rIns="0" bIns="0" rtlCol="0" anchor="ctr"/>
           <a:lstStyle/>
           <a:p>
-            <a:pPr indent="0" marL="0">
+            <a:pPr marL="0" indent="0">
               <a:buNone/>
             </a:pPr>
             <a:r>
@@ -8027,6 +7967,13 @@
             <a:prstDash val="solid"/>
           </a:ln>
         </p:spPr>
+        <p:txBody>
+          <a:bodyPr/>
+          <a:lstStyle/>
+          <a:p>
+            <a:endParaRPr lang="en-US"/>
+          </a:p>
+        </p:txBody>
       </p:sp>
       <p:sp>
         <p:nvSpPr>
@@ -8049,7 +7996,7 @@
           <a:bodyPr wrap="square" lIns="0" tIns="0" rIns="0" bIns="0" rtlCol="0" anchor="ctr"/>
           <a:lstStyle/>
           <a:p>
-            <a:pPr indent="0" marL="0">
+            <a:pPr marL="0" indent="0">
               <a:buNone/>
             </a:pPr>
             <a:r>
@@ -8088,7 +8035,7 @@
           <a:bodyPr wrap="square" lIns="0" tIns="0" rIns="0" bIns="0" rtlCol="0" anchor="ctr"/>
           <a:lstStyle/>
           <a:p>
-            <a:pPr indent="0" marL="0">
+            <a:pPr marL="0" indent="0">
               <a:buNone/>
             </a:pPr>
             <a:r>
@@ -8130,6 +8077,13 @@
             <a:prstDash val="solid"/>
           </a:ln>
         </p:spPr>
+        <p:txBody>
+          <a:bodyPr/>
+          <a:lstStyle/>
+          <a:p>
+            <a:endParaRPr lang="en-US"/>
+          </a:p>
+        </p:txBody>
       </p:sp>
       <p:sp>
         <p:nvSpPr>
@@ -8152,7 +8106,7 @@
           <a:bodyPr wrap="square" lIns="0" tIns="0" rIns="0" bIns="0" rtlCol="0" anchor="ctr"/>
           <a:lstStyle/>
           <a:p>
-            <a:pPr indent="0" marL="0">
+            <a:pPr marL="0" indent="0">
               <a:buNone/>
             </a:pPr>
             <a:r>
@@ -8191,7 +8145,7 @@
           <a:bodyPr wrap="square" lIns="0" tIns="0" rIns="0" bIns="0" rtlCol="0" anchor="ctr"/>
           <a:lstStyle/>
           <a:p>
-            <a:pPr algn="l" indent="0" marL="0">
+            <a:pPr marL="0" indent="0" algn="l">
               <a:buNone/>
             </a:pPr>
             <a:r>
@@ -8230,7 +8184,7 @@
           <a:bodyPr wrap="square" lIns="0" tIns="0" rIns="0" bIns="0" rtlCol="0" anchor="ctr"/>
           <a:lstStyle/>
           <a:p>
-            <a:pPr algn="r" indent="0" marL="0">
+            <a:pPr marL="0" indent="0" algn="r">
               <a:buNone/>
             </a:pPr>
             <a:r>
@@ -8264,6 +8218,7 @@
         <a:solidFill>
           <a:srgbClr val="FFFFFF"/>
         </a:solidFill>
+        <a:effectLst/>
       </p:bgPr>
     </p:bg>
     <p:spTree>
@@ -8301,11 +8256,11 @@
           <a:bodyPr wrap="square" lIns="0" tIns="0" rIns="0" bIns="0" rtlCol="0" anchor="ctr"/>
           <a:lstStyle/>
           <a:p>
-            <a:pPr indent="0" marL="0">
-              <a:buNone/>
-            </a:pPr>
-            <a:r>
-              <a:rPr lang="en-US" sz="1100" b="1" spc="400" kern="0" dirty="0">
+            <a:pPr marL="0" indent="0">
+              <a:buNone/>
+            </a:pPr>
+            <a:r>
+              <a:rPr lang="en-US" sz="1100" b="1" kern="0" spc="400" dirty="0">
                 <a:solidFill>
                   <a:srgbClr val="1C7293"/>
                 </a:solidFill>
@@ -8340,7 +8295,7 @@
           <a:bodyPr wrap="square" lIns="0" tIns="0" rIns="0" bIns="0" rtlCol="0" anchor="ctr"/>
           <a:lstStyle/>
           <a:p>
-            <a:pPr indent="0" marL="0">
+            <a:pPr marL="0" indent="0">
               <a:buNone/>
             </a:pPr>
             <a:r>
@@ -8379,7 +8334,7 @@
           <a:bodyPr wrap="square" lIns="0" tIns="0" rIns="0" bIns="0" rtlCol="0" anchor="ctr"/>
           <a:lstStyle/>
           <a:p>
-            <a:pPr indent="0" marL="0">
+            <a:pPr marL="0" indent="0">
               <a:buNone/>
             </a:pPr>
             <a:r>
@@ -8393,9 +8348,6 @@
               </a:rPr>
               <a:t>Clustering der 34 Quartiere auf den </a:t>
             </a:r>
-            <a:pPr indent="0" marL="0">
-              <a:buNone/>
-            </a:pPr>
             <a:r>
               <a:rPr lang="en-US" sz="1300" b="1" dirty="0">
                 <a:solidFill>
@@ -8407,9 +8359,6 @@
               </a:rPr>
               <a:t>sechs Kategorie-Erreichbarkeiten</a:t>
             </a:r>
-            <a:pPr indent="0" marL="0">
-              <a:buNone/>
-            </a:pPr>
             <a:r>
               <a:rPr lang="en-US" sz="1300" dirty="0">
                 <a:solidFill>
@@ -8449,13 +8398,20 @@
             <a:prstDash val="solid"/>
           </a:ln>
           <a:effectLst>
-            <a:outerShdw sx="100000" sy="100000" kx="0" ky="0" algn="bl" rotWithShape="0" blurRad="101600" dist="12700" dir="5400000">
+            <a:outerShdw blurRad="101600" dist="12700" dir="5400000" algn="bl" rotWithShape="0">
               <a:srgbClr val="94A3B8">
                 <a:alpha val="12000"/>
               </a:srgbClr>
             </a:outerShdw>
           </a:effectLst>
         </p:spPr>
+        <p:txBody>
+          <a:bodyPr/>
+          <a:lstStyle/>
+          <a:p>
+            <a:endParaRPr lang="en-US"/>
+          </a:p>
+        </p:txBody>
       </p:sp>
       <p:sp>
         <p:nvSpPr>
@@ -8481,6 +8437,13 @@
             <a:prstDash val="solid"/>
           </a:ln>
         </p:spPr>
+        <p:txBody>
+          <a:bodyPr/>
+          <a:lstStyle/>
+          <a:p>
+            <a:endParaRPr lang="en-US"/>
+          </a:p>
+        </p:txBody>
       </p:sp>
       <p:sp>
         <p:nvSpPr>
@@ -8506,6 +8469,13 @@
             <a:prstDash val="solid"/>
           </a:ln>
         </p:spPr>
+        <p:txBody>
+          <a:bodyPr/>
+          <a:lstStyle/>
+          <a:p>
+            <a:endParaRPr lang="en-US"/>
+          </a:p>
+        </p:txBody>
       </p:sp>
       <p:sp>
         <p:nvSpPr>
@@ -8528,7 +8498,7 @@
           <a:bodyPr wrap="square" lIns="0" tIns="0" rIns="0" bIns="0" rtlCol="0" anchor="ctr"/>
           <a:lstStyle/>
           <a:p>
-            <a:pPr algn="ctr" indent="0" marL="0">
+            <a:pPr marL="0" indent="0" algn="ctr">
               <a:buNone/>
             </a:pPr>
             <a:r>
@@ -8567,7 +8537,7 @@
           <a:bodyPr wrap="square" lIns="0" tIns="0" rIns="0" bIns="0" rtlCol="0" anchor="ctr"/>
           <a:lstStyle/>
           <a:p>
-            <a:pPr indent="0" marL="0">
+            <a:pPr marL="0" indent="0">
               <a:buNone/>
             </a:pPr>
             <a:r>
@@ -8593,20 +8563,20 @@
         </p:nvSpPr>
         <p:spPr>
           <a:xfrm>
-            <a:off x="3703320" y="2176272"/>
-            <a:ext cx="731520" cy="292608"/>
-          </a:xfrm>
-          <a:prstGeom prst="rect">
-            <a:avLst/>
-          </a:prstGeom>
-          <a:noFill/>
-          <a:ln/>
-        </p:spPr>
-        <p:txBody>
-          <a:bodyPr wrap="square" lIns="0" tIns="0" rIns="0" bIns="0" rtlCol="0" anchor="ctr"/>
-          <a:lstStyle/>
-          <a:p>
-            <a:pPr algn="r" indent="0" marL="0">
+            <a:off x="3522428" y="2176272"/>
+            <a:ext cx="912412" cy="292608"/>
+          </a:xfrm>
+          <a:prstGeom prst="rect">
+            <a:avLst/>
+          </a:prstGeom>
+          <a:noFill/>
+          <a:ln/>
+        </p:spPr>
+        <p:txBody>
+          <a:bodyPr wrap="square" lIns="0" tIns="0" rIns="0" bIns="0" rtlCol="0" anchor="ctr"/>
+          <a:lstStyle/>
+          <a:p>
+            <a:pPr marL="0" indent="0" algn="r">
               <a:buNone/>
             </a:pPr>
             <a:r>
@@ -8645,7 +8615,7 @@
           <a:bodyPr wrap="square" lIns="0" tIns="0" rIns="0" bIns="0" rtlCol="0" anchor="ctr"/>
           <a:lstStyle/>
           <a:p>
-            <a:pPr indent="0" marL="0">
+            <a:pPr marL="0" indent="0">
               <a:buNone/>
             </a:pPr>
             <a:r>
@@ -8684,7 +8654,7 @@
           <a:bodyPr wrap="square" lIns="0" tIns="0" rIns="0" bIns="0" rtlCol="0" anchor="ctr"/>
           <a:lstStyle/>
           <a:p>
-            <a:pPr indent="0" marL="0">
+            <a:pPr marL="0" indent="0">
               <a:buNone/>
             </a:pPr>
             <a:r>
@@ -8726,13 +8696,20 @@
             <a:prstDash val="solid"/>
           </a:ln>
           <a:effectLst>
-            <a:outerShdw sx="100000" sy="100000" kx="0" ky="0" algn="bl" rotWithShape="0" blurRad="101600" dist="12700" dir="5400000">
+            <a:outerShdw blurRad="101600" dist="12700" dir="5400000" algn="bl" rotWithShape="0">
               <a:srgbClr val="94A3B8">
                 <a:alpha val="12000"/>
               </a:srgbClr>
             </a:outerShdw>
           </a:effectLst>
         </p:spPr>
+        <p:txBody>
+          <a:bodyPr/>
+          <a:lstStyle/>
+          <a:p>
+            <a:endParaRPr lang="en-US"/>
+          </a:p>
+        </p:txBody>
       </p:sp>
       <p:sp>
         <p:nvSpPr>
@@ -8758,6 +8735,13 @@
             <a:prstDash val="solid"/>
           </a:ln>
         </p:spPr>
+        <p:txBody>
+          <a:bodyPr/>
+          <a:lstStyle/>
+          <a:p>
+            <a:endParaRPr lang="en-US"/>
+          </a:p>
+        </p:txBody>
       </p:sp>
       <p:sp>
         <p:nvSpPr>
@@ -8783,6 +8767,13 @@
             <a:prstDash val="solid"/>
           </a:ln>
         </p:spPr>
+        <p:txBody>
+          <a:bodyPr/>
+          <a:lstStyle/>
+          <a:p>
+            <a:endParaRPr lang="en-US"/>
+          </a:p>
+        </p:txBody>
       </p:sp>
       <p:sp>
         <p:nvSpPr>
@@ -8805,7 +8796,7 @@
           <a:bodyPr wrap="square" lIns="0" tIns="0" rIns="0" bIns="0" rtlCol="0" anchor="ctr"/>
           <a:lstStyle/>
           <a:p>
-            <a:pPr algn="ctr" indent="0" marL="0">
+            <a:pPr marL="0" indent="0" algn="ctr">
               <a:buNone/>
             </a:pPr>
             <a:r>
@@ -8844,7 +8835,7 @@
           <a:bodyPr wrap="square" lIns="0" tIns="0" rIns="0" bIns="0" rtlCol="0" anchor="ctr"/>
           <a:lstStyle/>
           <a:p>
-            <a:pPr indent="0" marL="0">
+            <a:pPr marL="0" indent="0">
               <a:buNone/>
             </a:pPr>
             <a:r>
@@ -8870,20 +8861,20 @@
         </p:nvSpPr>
         <p:spPr>
           <a:xfrm>
-            <a:off x="7909560" y="2176272"/>
-            <a:ext cx="731520" cy="292608"/>
-          </a:xfrm>
-          <a:prstGeom prst="rect">
-            <a:avLst/>
-          </a:prstGeom>
-          <a:noFill/>
-          <a:ln/>
-        </p:spPr>
-        <p:txBody>
-          <a:bodyPr wrap="square" lIns="0" tIns="0" rIns="0" bIns="0" rtlCol="0" anchor="ctr"/>
-          <a:lstStyle/>
-          <a:p>
-            <a:pPr algn="r" indent="0" marL="0">
+            <a:off x="7736619" y="2176272"/>
+            <a:ext cx="904461" cy="292608"/>
+          </a:xfrm>
+          <a:prstGeom prst="rect">
+            <a:avLst/>
+          </a:prstGeom>
+          <a:noFill/>
+          <a:ln/>
+        </p:spPr>
+        <p:txBody>
+          <a:bodyPr wrap="square" lIns="0" tIns="0" rIns="0" bIns="0" rtlCol="0" anchor="ctr"/>
+          <a:lstStyle/>
+          <a:p>
+            <a:pPr marL="0" indent="0" algn="r">
               <a:buNone/>
             </a:pPr>
             <a:r>
@@ -8922,7 +8913,7 @@
           <a:bodyPr wrap="square" lIns="0" tIns="0" rIns="0" bIns="0" rtlCol="0" anchor="ctr"/>
           <a:lstStyle/>
           <a:p>
-            <a:pPr indent="0" marL="0">
+            <a:pPr marL="0" indent="0">
               <a:buNone/>
             </a:pPr>
             <a:r>
@@ -8961,7 +8952,7 @@
           <a:bodyPr wrap="square" lIns="0" tIns="0" rIns="0" bIns="0" rtlCol="0" anchor="ctr"/>
           <a:lstStyle/>
           <a:p>
-            <a:pPr indent="0" marL="0">
+            <a:pPr marL="0" indent="0">
               <a:buNone/>
             </a:pPr>
             <a:r>
@@ -9003,13 +8994,20 @@
             <a:prstDash val="solid"/>
           </a:ln>
           <a:effectLst>
-            <a:outerShdw sx="100000" sy="100000" kx="0" ky="0" algn="bl" rotWithShape="0" blurRad="101600" dist="12700" dir="5400000">
+            <a:outerShdw blurRad="101600" dist="12700" dir="5400000" algn="bl" rotWithShape="0">
               <a:srgbClr val="94A3B8">
                 <a:alpha val="12000"/>
               </a:srgbClr>
             </a:outerShdw>
           </a:effectLst>
         </p:spPr>
+        <p:txBody>
+          <a:bodyPr/>
+          <a:lstStyle/>
+          <a:p>
+            <a:endParaRPr lang="en-US"/>
+          </a:p>
+        </p:txBody>
       </p:sp>
       <p:sp>
         <p:nvSpPr>
@@ -9035,6 +9033,13 @@
             <a:prstDash val="solid"/>
           </a:ln>
         </p:spPr>
+        <p:txBody>
+          <a:bodyPr/>
+          <a:lstStyle/>
+          <a:p>
+            <a:endParaRPr lang="en-US"/>
+          </a:p>
+        </p:txBody>
       </p:sp>
       <p:sp>
         <p:nvSpPr>
@@ -9060,6 +9065,13 @@
             <a:prstDash val="solid"/>
           </a:ln>
         </p:spPr>
+        <p:txBody>
+          <a:bodyPr/>
+          <a:lstStyle/>
+          <a:p>
+            <a:endParaRPr lang="en-US"/>
+          </a:p>
+        </p:txBody>
       </p:sp>
       <p:sp>
         <p:nvSpPr>
@@ -9082,7 +9094,7 @@
           <a:bodyPr wrap="square" lIns="0" tIns="0" rIns="0" bIns="0" rtlCol="0" anchor="ctr"/>
           <a:lstStyle/>
           <a:p>
-            <a:pPr algn="ctr" indent="0" marL="0">
+            <a:pPr marL="0" indent="0" algn="ctr">
               <a:buNone/>
             </a:pPr>
             <a:r>
@@ -9121,7 +9133,7 @@
           <a:bodyPr wrap="square" lIns="0" tIns="0" rIns="0" bIns="0" rtlCol="0" anchor="ctr"/>
           <a:lstStyle/>
           <a:p>
-            <a:pPr indent="0" marL="0">
+            <a:pPr marL="0" indent="0">
               <a:buNone/>
             </a:pPr>
             <a:r>
@@ -9147,20 +9159,20 @@
         </p:nvSpPr>
         <p:spPr>
           <a:xfrm>
-            <a:off x="3703320" y="3502152"/>
-            <a:ext cx="731520" cy="292608"/>
-          </a:xfrm>
-          <a:prstGeom prst="rect">
-            <a:avLst/>
-          </a:prstGeom>
-          <a:noFill/>
-          <a:ln/>
-        </p:spPr>
-        <p:txBody>
-          <a:bodyPr wrap="square" lIns="0" tIns="0" rIns="0" bIns="0" rtlCol="0" anchor="ctr"/>
-          <a:lstStyle/>
-          <a:p>
-            <a:pPr algn="r" indent="0" marL="0">
+            <a:off x="3522428" y="3502152"/>
+            <a:ext cx="912412" cy="292608"/>
+          </a:xfrm>
+          <a:prstGeom prst="rect">
+            <a:avLst/>
+          </a:prstGeom>
+          <a:noFill/>
+          <a:ln/>
+        </p:spPr>
+        <p:txBody>
+          <a:bodyPr wrap="square" lIns="0" tIns="0" rIns="0" bIns="0" rtlCol="0" anchor="ctr"/>
+          <a:lstStyle/>
+          <a:p>
+            <a:pPr marL="0" indent="0" algn="r">
               <a:buNone/>
             </a:pPr>
             <a:r>
@@ -9199,7 +9211,7 @@
           <a:bodyPr wrap="square" lIns="0" tIns="0" rIns="0" bIns="0" rtlCol="0" anchor="ctr"/>
           <a:lstStyle/>
           <a:p>
-            <a:pPr indent="0" marL="0">
+            <a:pPr marL="0" indent="0">
               <a:buNone/>
             </a:pPr>
             <a:r>
@@ -9238,7 +9250,7 @@
           <a:bodyPr wrap="square" lIns="0" tIns="0" rIns="0" bIns="0" rtlCol="0" anchor="ctr"/>
           <a:lstStyle/>
           <a:p>
-            <a:pPr indent="0" marL="0">
+            <a:pPr marL="0" indent="0">
               <a:buNone/>
             </a:pPr>
             <a:r>
@@ -9280,13 +9292,20 @@
             <a:prstDash val="solid"/>
           </a:ln>
           <a:effectLst>
-            <a:outerShdw sx="100000" sy="100000" kx="0" ky="0" algn="bl" rotWithShape="0" blurRad="101600" dist="12700" dir="5400000">
+            <a:outerShdw blurRad="101600" dist="12700" dir="5400000" algn="bl" rotWithShape="0">
               <a:srgbClr val="94A3B8">
                 <a:alpha val="12000"/>
               </a:srgbClr>
             </a:outerShdw>
           </a:effectLst>
         </p:spPr>
+        <p:txBody>
+          <a:bodyPr/>
+          <a:lstStyle/>
+          <a:p>
+            <a:endParaRPr lang="en-US"/>
+          </a:p>
+        </p:txBody>
       </p:sp>
       <p:sp>
         <p:nvSpPr>
@@ -9312,6 +9331,13 @@
             <a:prstDash val="solid"/>
           </a:ln>
         </p:spPr>
+        <p:txBody>
+          <a:bodyPr/>
+          <a:lstStyle/>
+          <a:p>
+            <a:endParaRPr lang="en-US"/>
+          </a:p>
+        </p:txBody>
       </p:sp>
       <p:sp>
         <p:nvSpPr>
@@ -9337,6 +9363,13 @@
             <a:prstDash val="solid"/>
           </a:ln>
         </p:spPr>
+        <p:txBody>
+          <a:bodyPr/>
+          <a:lstStyle/>
+          <a:p>
+            <a:endParaRPr lang="en-US"/>
+          </a:p>
+        </p:txBody>
       </p:sp>
       <p:sp>
         <p:nvSpPr>
@@ -9359,7 +9392,7 @@
           <a:bodyPr wrap="square" lIns="0" tIns="0" rIns="0" bIns="0" rtlCol="0" anchor="ctr"/>
           <a:lstStyle/>
           <a:p>
-            <a:pPr algn="ctr" indent="0" marL="0">
+            <a:pPr marL="0" indent="0" algn="ctr">
               <a:buNone/>
             </a:pPr>
             <a:r>
@@ -9398,7 +9431,7 @@
           <a:bodyPr wrap="square" lIns="0" tIns="0" rIns="0" bIns="0" rtlCol="0" anchor="ctr"/>
           <a:lstStyle/>
           <a:p>
-            <a:pPr indent="0" marL="0">
+            <a:pPr marL="0" indent="0">
               <a:buNone/>
             </a:pPr>
             <a:r>
@@ -9424,20 +9457,20 @@
         </p:nvSpPr>
         <p:spPr>
           <a:xfrm>
-            <a:off x="7909560" y="3502152"/>
-            <a:ext cx="731520" cy="292608"/>
-          </a:xfrm>
-          <a:prstGeom prst="rect">
-            <a:avLst/>
-          </a:prstGeom>
-          <a:noFill/>
-          <a:ln/>
-        </p:spPr>
-        <p:txBody>
-          <a:bodyPr wrap="square" lIns="0" tIns="0" rIns="0" bIns="0" rtlCol="0" anchor="ctr"/>
-          <a:lstStyle/>
-          <a:p>
-            <a:pPr algn="r" indent="0" marL="0">
+            <a:off x="7680960" y="3502152"/>
+            <a:ext cx="960120" cy="292608"/>
+          </a:xfrm>
+          <a:prstGeom prst="rect">
+            <a:avLst/>
+          </a:prstGeom>
+          <a:noFill/>
+          <a:ln/>
+        </p:spPr>
+        <p:txBody>
+          <a:bodyPr wrap="square" lIns="0" tIns="0" rIns="0" bIns="0" rtlCol="0" anchor="ctr"/>
+          <a:lstStyle/>
+          <a:p>
+            <a:pPr marL="0" indent="0" algn="r">
               <a:buNone/>
             </a:pPr>
             <a:r>
@@ -9476,7 +9509,7 @@
           <a:bodyPr wrap="square" lIns="0" tIns="0" rIns="0" bIns="0" rtlCol="0" anchor="ctr"/>
           <a:lstStyle/>
           <a:p>
-            <a:pPr indent="0" marL="0">
+            <a:pPr marL="0" indent="0">
               <a:buNone/>
             </a:pPr>
             <a:r>
@@ -9515,7 +9548,7 @@
           <a:bodyPr wrap="square" lIns="0" tIns="0" rIns="0" bIns="0" rtlCol="0" anchor="ctr"/>
           <a:lstStyle/>
           <a:p>
-            <a:pPr indent="0" marL="0">
+            <a:pPr marL="0" indent="0">
               <a:buNone/>
             </a:pPr>
             <a:r>
@@ -9554,7 +9587,7 @@
           <a:bodyPr wrap="square" lIns="0" tIns="0" rIns="0" bIns="0" rtlCol="0" anchor="ctr"/>
           <a:lstStyle/>
           <a:p>
-            <a:pPr algn="l" indent="0" marL="0">
+            <a:pPr marL="0" indent="0" algn="l">
               <a:buNone/>
             </a:pPr>
             <a:r>
@@ -9593,7 +9626,7 @@
           <a:bodyPr wrap="square" lIns="0" tIns="0" rIns="0" bIns="0" rtlCol="0" anchor="ctr"/>
           <a:lstStyle/>
           <a:p>
-            <a:pPr algn="r" indent="0" marL="0">
+            <a:pPr marL="0" indent="0" algn="r">
               <a:buNone/>
             </a:pPr>
             <a:r>
@@ -9627,6 +9660,7 @@
         <a:solidFill>
           <a:srgbClr val="FFFFFF"/>
         </a:solidFill>
+        <a:effectLst/>
       </p:bgPr>
     </p:bg>
     <p:spTree>
@@ -9664,11 +9698,11 @@
           <a:bodyPr wrap="square" lIns="0" tIns="0" rIns="0" bIns="0" rtlCol="0" anchor="ctr"/>
           <a:lstStyle/>
           <a:p>
-            <a:pPr indent="0" marL="0">
-              <a:buNone/>
-            </a:pPr>
-            <a:r>
-              <a:rPr lang="en-US" sz="1100" b="1" spc="400" kern="0" dirty="0">
+            <a:pPr marL="0" indent="0">
+              <a:buNone/>
+            </a:pPr>
+            <a:r>
+              <a:rPr lang="en-US" sz="1100" b="1" kern="0" spc="400" dirty="0">
                 <a:solidFill>
                   <a:srgbClr val="1C7293"/>
                 </a:solidFill>
@@ -9703,7 +9737,7 @@
           <a:bodyPr wrap="square" lIns="0" tIns="0" rIns="0" bIns="0" rtlCol="0" anchor="ctr"/>
           <a:lstStyle/>
           <a:p>
-            <a:pPr indent="0" marL="0">
+            <a:pPr marL="0" indent="0">
               <a:buNone/>
             </a:pPr>
             <a:r>
@@ -9745,13 +9779,20 @@
             <a:prstDash val="solid"/>
           </a:ln>
           <a:effectLst>
-            <a:outerShdw sx="100000" sy="100000" kx="0" ky="0" algn="bl" rotWithShape="0" blurRad="101600" dist="12700" dir="5400000">
+            <a:outerShdw blurRad="101600" dist="12700" dir="5400000" algn="bl" rotWithShape="0">
               <a:srgbClr val="94A3B8">
                 <a:alpha val="12000"/>
               </a:srgbClr>
             </a:outerShdw>
           </a:effectLst>
         </p:spPr>
+        <p:txBody>
+          <a:bodyPr/>
+          <a:lstStyle/>
+          <a:p>
+            <a:endParaRPr lang="en-US"/>
+          </a:p>
+        </p:txBody>
       </p:sp>
       <p:sp>
         <p:nvSpPr>
@@ -9777,6 +9818,13 @@
             <a:prstDash val="solid"/>
           </a:ln>
         </p:spPr>
+        <p:txBody>
+          <a:bodyPr/>
+          <a:lstStyle/>
+          <a:p>
+            <a:endParaRPr lang="en-US"/>
+          </a:p>
+        </p:txBody>
       </p:sp>
       <p:sp>
         <p:nvSpPr>
@@ -9799,7 +9847,7 @@
           <a:bodyPr wrap="square" lIns="0" tIns="0" rIns="0" bIns="0" rtlCol="0" anchor="ctr"/>
           <a:lstStyle/>
           <a:p>
-            <a:pPr indent="0" marL="0">
+            <a:pPr marL="0" indent="0">
               <a:buNone/>
             </a:pPr>
             <a:r>
@@ -9813,9 +9861,6 @@
               </a:rPr>
               <a:t>Die grössten Lücken zwischen Wohnen und täglicher Infrastruktur </a:t>
             </a:r>
-            <a:pPr indent="0" marL="0">
-              <a:buNone/>
-            </a:pPr>
             <a:r>
               <a:rPr lang="en-US" sz="1400" b="1" dirty="0">
                 <a:solidFill>
@@ -9827,9 +9872,6 @@
               </a:rPr>
               <a:t>liegen in der Stadtperipherie</a:t>
             </a:r>
-            <a:pPr indent="0" marL="0">
-              <a:buNone/>
-            </a:pPr>
             <a:r>
               <a:rPr lang="en-US" sz="1400" dirty="0">
                 <a:solidFill>
@@ -9841,9 +9883,6 @@
               </a:rPr>
               <a:t> (Leimbach, Witikon, Hirzenbach, Affoltern, Friesenberg) — über 80 Score-Punkte Abstand zum Zentrum. Die Korrelation Score × Distanz zum HB beträgt </a:t>
             </a:r>
-            <a:pPr indent="0" marL="0">
-              <a:buNone/>
-            </a:pPr>
             <a:r>
               <a:rPr lang="en-US" sz="1400" b="1" dirty="0">
                 <a:solidFill>
@@ -9855,9 +9894,6 @@
               </a:rPr>
               <a:t>ρ = −0.81 (p &lt; 10⁻⁸)</a:t>
             </a:r>
-            <a:pPr indent="0" marL="0">
-              <a:buNone/>
-            </a:pPr>
             <a:r>
               <a:rPr lang="en-US" sz="1400" dirty="0">
                 <a:solidFill>
@@ -9897,13 +9933,20 @@
             <a:prstDash val="solid"/>
           </a:ln>
           <a:effectLst>
-            <a:outerShdw sx="100000" sy="100000" kx="0" ky="0" algn="bl" rotWithShape="0" blurRad="101600" dist="12700" dir="5400000">
+            <a:outerShdw blurRad="101600" dist="12700" dir="5400000" algn="bl" rotWithShape="0">
               <a:srgbClr val="94A3B8">
                 <a:alpha val="12000"/>
               </a:srgbClr>
             </a:outerShdw>
           </a:effectLst>
         </p:spPr>
+        <p:txBody>
+          <a:bodyPr/>
+          <a:lstStyle/>
+          <a:p>
+            <a:endParaRPr lang="en-US"/>
+          </a:p>
+        </p:txBody>
       </p:sp>
       <p:sp>
         <p:nvSpPr>
@@ -9929,6 +9972,13 @@
             <a:prstDash val="solid"/>
           </a:ln>
         </p:spPr>
+        <p:txBody>
+          <a:bodyPr/>
+          <a:lstStyle/>
+          <a:p>
+            <a:endParaRPr lang="en-US"/>
+          </a:p>
+        </p:txBody>
       </p:sp>
       <p:sp>
         <p:nvSpPr>
@@ -9951,7 +10001,7 @@
           <a:bodyPr wrap="square" lIns="0" tIns="0" rIns="0" bIns="0" rtlCol="0" anchor="ctr"/>
           <a:lstStyle/>
           <a:p>
-            <a:pPr indent="0" marL="0">
+            <a:pPr marL="0" indent="0">
               <a:buNone/>
             </a:pPr>
             <a:r>
@@ -9990,7 +10040,7 @@
           <a:bodyPr wrap="square" lIns="0" tIns="0" rIns="0" bIns="0" rtlCol="0" anchor="ctr"/>
           <a:lstStyle/>
           <a:p>
-            <a:pPr indent="0" marL="0">
+            <a:pPr marL="0" indent="0">
               <a:buNone/>
             </a:pPr>
             <a:r>
@@ -10032,13 +10082,20 @@
             <a:prstDash val="solid"/>
           </a:ln>
           <a:effectLst>
-            <a:outerShdw sx="100000" sy="100000" kx="0" ky="0" algn="bl" rotWithShape="0" blurRad="101600" dist="12700" dir="5400000">
+            <a:outerShdw blurRad="101600" dist="12700" dir="5400000" algn="bl" rotWithShape="0">
               <a:srgbClr val="94A3B8">
                 <a:alpha val="12000"/>
               </a:srgbClr>
             </a:outerShdw>
           </a:effectLst>
         </p:spPr>
+        <p:txBody>
+          <a:bodyPr/>
+          <a:lstStyle/>
+          <a:p>
+            <a:endParaRPr lang="en-US"/>
+          </a:p>
+        </p:txBody>
       </p:sp>
       <p:sp>
         <p:nvSpPr>
@@ -10064,6 +10121,13 @@
             <a:prstDash val="solid"/>
           </a:ln>
         </p:spPr>
+        <p:txBody>
+          <a:bodyPr/>
+          <a:lstStyle/>
+          <a:p>
+            <a:endParaRPr lang="en-US"/>
+          </a:p>
+        </p:txBody>
       </p:sp>
       <p:sp>
         <p:nvSpPr>
@@ -10086,7 +10150,7 @@
           <a:bodyPr wrap="square" lIns="0" tIns="0" rIns="0" bIns="0" rtlCol="0" anchor="ctr"/>
           <a:lstStyle/>
           <a:p>
-            <a:pPr indent="0" marL="0">
+            <a:pPr marL="0" indent="0">
               <a:buNone/>
             </a:pPr>
             <a:r>
@@ -10125,7 +10189,7 @@
           <a:bodyPr wrap="square" lIns="0" tIns="0" rIns="0" bIns="0" rtlCol="0" anchor="ctr"/>
           <a:lstStyle/>
           <a:p>
-            <a:pPr indent="0" marL="0">
+            <a:pPr marL="0" indent="0">
               <a:buNone/>
             </a:pPr>
             <a:r>
@@ -10167,13 +10231,20 @@
             <a:prstDash val="solid"/>
           </a:ln>
           <a:effectLst>
-            <a:outerShdw sx="100000" sy="100000" kx="0" ky="0" algn="bl" rotWithShape="0" blurRad="101600" dist="12700" dir="5400000">
+            <a:outerShdw blurRad="101600" dist="12700" dir="5400000" algn="bl" rotWithShape="0">
               <a:srgbClr val="94A3B8">
                 <a:alpha val="12000"/>
               </a:srgbClr>
             </a:outerShdw>
           </a:effectLst>
         </p:spPr>
+        <p:txBody>
+          <a:bodyPr/>
+          <a:lstStyle/>
+          <a:p>
+            <a:endParaRPr lang="en-US"/>
+          </a:p>
+        </p:txBody>
       </p:sp>
       <p:sp>
         <p:nvSpPr>
@@ -10199,6 +10270,13 @@
             <a:prstDash val="solid"/>
           </a:ln>
         </p:spPr>
+        <p:txBody>
+          <a:bodyPr/>
+          <a:lstStyle/>
+          <a:p>
+            <a:endParaRPr lang="en-US"/>
+          </a:p>
+        </p:txBody>
       </p:sp>
       <p:sp>
         <p:nvSpPr>
@@ -10221,7 +10299,7 @@
           <a:bodyPr wrap="square" lIns="0" tIns="0" rIns="0" bIns="0" rtlCol="0" anchor="ctr"/>
           <a:lstStyle/>
           <a:p>
-            <a:pPr indent="0" marL="0">
+            <a:pPr marL="0" indent="0">
               <a:buNone/>
             </a:pPr>
             <a:r>
@@ -10260,7 +10338,7 @@
           <a:bodyPr wrap="square" lIns="0" tIns="0" rIns="0" bIns="0" rtlCol="0" anchor="ctr"/>
           <a:lstStyle/>
           <a:p>
-            <a:pPr indent="0" marL="0">
+            <a:pPr marL="0" indent="0">
               <a:buNone/>
             </a:pPr>
             <a:r>
@@ -10299,7 +10377,7 @@
           <a:bodyPr wrap="square" lIns="0" tIns="0" rIns="0" bIns="0" rtlCol="0" anchor="ctr"/>
           <a:lstStyle/>
           <a:p>
-            <a:pPr algn="r" indent="0" marL="0">
+            <a:pPr marL="0" indent="0" algn="r">
               <a:buNone/>
             </a:pPr>
             <a:r>
@@ -10333,6 +10411,7 @@
         <a:solidFill>
           <a:srgbClr val="FFFFFF"/>
         </a:solidFill>
+        <a:effectLst/>
       </p:bgPr>
     </p:bg>
     <p:spTree>
@@ -10370,11 +10449,11 @@
           <a:bodyPr wrap="square" lIns="0" tIns="0" rIns="0" bIns="0" rtlCol="0" anchor="ctr"/>
           <a:lstStyle/>
           <a:p>
-            <a:pPr indent="0" marL="0">
-              <a:buNone/>
-            </a:pPr>
-            <a:r>
-              <a:rPr lang="en-US" sz="1100" b="1" spc="400" kern="0" dirty="0">
+            <a:pPr marL="0" indent="0">
+              <a:buNone/>
+            </a:pPr>
+            <a:r>
+              <a:rPr lang="en-US" sz="1100" b="1" kern="0" spc="400" dirty="0">
                 <a:solidFill>
                   <a:srgbClr val="1C7293"/>
                 </a:solidFill>
@@ -10409,7 +10488,7 @@
           <a:bodyPr wrap="square" lIns="0" tIns="0" rIns="0" bIns="0" rtlCol="0" anchor="ctr"/>
           <a:lstStyle/>
           <a:p>
-            <a:pPr indent="0" marL="0">
+            <a:pPr marL="0" indent="0">
               <a:buNone/>
             </a:pPr>
             <a:r>
@@ -10451,13 +10530,20 @@
             <a:prstDash val="solid"/>
           </a:ln>
           <a:effectLst>
-            <a:outerShdw sx="100000" sy="100000" kx="0" ky="0" algn="bl" rotWithShape="0" blurRad="101600" dist="12700" dir="5400000">
+            <a:outerShdw blurRad="101600" dist="12700" dir="5400000" algn="bl" rotWithShape="0">
               <a:srgbClr val="94A3B8">
                 <a:alpha val="12000"/>
               </a:srgbClr>
             </a:outerShdw>
           </a:effectLst>
         </p:spPr>
+        <p:txBody>
+          <a:bodyPr/>
+          <a:lstStyle/>
+          <a:p>
+            <a:endParaRPr lang="en-US"/>
+          </a:p>
+        </p:txBody>
       </p:sp>
       <p:sp>
         <p:nvSpPr>
@@ -10483,6 +10569,13 @@
             <a:prstDash val="solid"/>
           </a:ln>
         </p:spPr>
+        <p:txBody>
+          <a:bodyPr/>
+          <a:lstStyle/>
+          <a:p>
+            <a:endParaRPr lang="en-US"/>
+          </a:p>
+        </p:txBody>
       </p:sp>
       <p:sp>
         <p:nvSpPr>
@@ -10505,7 +10598,7 @@
           <a:bodyPr wrap="square" lIns="0" tIns="0" rIns="0" bIns="0" rtlCol="0" anchor="ctr"/>
           <a:lstStyle/>
           <a:p>
-            <a:pPr indent="0" marL="0">
+            <a:pPr marL="0" indent="0">
               <a:buNone/>
             </a:pPr>
             <a:r>
@@ -10544,7 +10637,7 @@
           <a:bodyPr wrap="square" lIns="0" tIns="0" rIns="0" bIns="0" rtlCol="0" anchor="ctr"/>
           <a:lstStyle/>
           <a:p>
-            <a:pPr indent="0" marL="0">
+            <a:pPr marL="0" indent="0">
               <a:buNone/>
             </a:pPr>
             <a:r>
@@ -10583,7 +10676,7 @@
           <a:bodyPr wrap="square" lIns="0" tIns="0" rIns="0" bIns="0" rtlCol="0" anchor="ctr"/>
           <a:lstStyle/>
           <a:p>
-            <a:pPr indent="0" marL="0">
+            <a:pPr marL="0" indent="0">
               <a:buNone/>
             </a:pPr>
             <a:r>
@@ -10622,7 +10715,7 @@
           <a:bodyPr wrap="square" lIns="0" tIns="0" rIns="0" bIns="0" rtlCol="0" anchor="ctr"/>
           <a:lstStyle/>
           <a:p>
-            <a:pPr indent="0" marL="0">
+            <a:pPr marL="0" indent="0">
               <a:buNone/>
             </a:pPr>
             <a:r>
@@ -10661,7 +10754,7 @@
           <a:bodyPr wrap="square" lIns="0" tIns="0" rIns="0" bIns="0" rtlCol="0" anchor="ctr"/>
           <a:lstStyle/>
           <a:p>
-            <a:pPr indent="0" marL="0">
+            <a:pPr marL="0" indent="0">
               <a:buNone/>
             </a:pPr>
             <a:r>
@@ -10700,7 +10793,7 @@
           <a:bodyPr wrap="square" lIns="0" tIns="0" rIns="0" bIns="0" rtlCol="0" anchor="ctr"/>
           <a:lstStyle/>
           <a:p>
-            <a:pPr indent="0" marL="0">
+            <a:pPr marL="0" indent="0">
               <a:buNone/>
             </a:pPr>
             <a:r>
@@ -10739,7 +10832,7 @@
           <a:bodyPr wrap="square" lIns="0" tIns="0" rIns="0" bIns="0" rtlCol="0" anchor="ctr"/>
           <a:lstStyle/>
           <a:p>
-            <a:pPr indent="0" marL="0">
+            <a:pPr marL="0" indent="0">
               <a:buNone/>
             </a:pPr>
             <a:r>
@@ -10778,7 +10871,7 @@
           <a:bodyPr wrap="square" lIns="0" tIns="0" rIns="0" bIns="0" rtlCol="0" anchor="ctr"/>
           <a:lstStyle/>
           <a:p>
-            <a:pPr indent="0" marL="0">
+            <a:pPr marL="0" indent="0">
               <a:buNone/>
             </a:pPr>
             <a:r>
@@ -10817,7 +10910,7 @@
           <a:bodyPr wrap="square" lIns="0" tIns="0" rIns="0" bIns="0" rtlCol="0" anchor="ctr"/>
           <a:lstStyle/>
           <a:p>
-            <a:pPr indent="0" marL="0">
+            <a:pPr marL="0" indent="0">
               <a:buNone/>
             </a:pPr>
             <a:r>
@@ -10856,7 +10949,7 @@
           <a:bodyPr wrap="square" lIns="0" tIns="0" rIns="0" bIns="0" rtlCol="0" anchor="ctr"/>
           <a:lstStyle/>
           <a:p>
-            <a:pPr indent="0" marL="0">
+            <a:pPr marL="0" indent="0">
               <a:buNone/>
             </a:pPr>
             <a:r>
@@ -10895,7 +10988,7 @@
           <a:bodyPr wrap="square" lIns="0" tIns="0" rIns="0" bIns="0" rtlCol="0" anchor="ctr"/>
           <a:lstStyle/>
           <a:p>
-            <a:pPr indent="0" marL="0">
+            <a:pPr marL="0" indent="0">
               <a:buNone/>
             </a:pPr>
             <a:r>
@@ -10934,7 +11027,7 @@
           <a:bodyPr wrap="square" lIns="0" tIns="0" rIns="0" bIns="0" rtlCol="0" anchor="ctr"/>
           <a:lstStyle/>
           <a:p>
-            <a:pPr indent="0" marL="0">
+            <a:pPr marL="0" indent="0">
               <a:buNone/>
             </a:pPr>
             <a:r>
@@ -10973,7 +11066,7 @@
           <a:bodyPr wrap="square" lIns="0" tIns="0" rIns="0" bIns="0" rtlCol="0" anchor="ctr"/>
           <a:lstStyle/>
           <a:p>
-            <a:pPr indent="0" marL="0">
+            <a:pPr marL="0" indent="0">
               <a:buNone/>
             </a:pPr>
             <a:r>
@@ -11012,7 +11105,7 @@
           <a:bodyPr wrap="square" lIns="0" tIns="0" rIns="0" bIns="0" rtlCol="0" anchor="ctr"/>
           <a:lstStyle/>
           <a:p>
-            <a:pPr indent="0" marL="0">
+            <a:pPr marL="0" indent="0">
               <a:buNone/>
             </a:pPr>
             <a:r>
@@ -11051,7 +11144,7 @@
           <a:bodyPr wrap="square" lIns="0" tIns="0" rIns="0" bIns="0" rtlCol="0" anchor="ctr"/>
           <a:lstStyle/>
           <a:p>
-            <a:pPr indent="0" marL="0">
+            <a:pPr marL="0" indent="0">
               <a:buNone/>
             </a:pPr>
             <a:r>
@@ -11090,7 +11183,7 @@
           <a:bodyPr wrap="square" lIns="0" tIns="0" rIns="0" bIns="0" rtlCol="0" anchor="ctr"/>
           <a:lstStyle/>
           <a:p>
-            <a:pPr indent="0" marL="0">
+            <a:pPr marL="0" indent="0">
               <a:buNone/>
             </a:pPr>
             <a:r>
@@ -11129,7 +11222,7 @@
           <a:bodyPr wrap="square" lIns="0" tIns="0" rIns="0" bIns="0" rtlCol="0" anchor="ctr"/>
           <a:lstStyle/>
           <a:p>
-            <a:pPr indent="0" marL="0">
+            <a:pPr marL="0" indent="0">
               <a:buNone/>
             </a:pPr>
             <a:r>
@@ -11168,7 +11261,7 @@
           <a:bodyPr wrap="square" lIns="0" tIns="0" rIns="0" bIns="0" rtlCol="0" anchor="ctr"/>
           <a:lstStyle/>
           <a:p>
-            <a:pPr indent="0" marL="0">
+            <a:pPr marL="0" indent="0">
               <a:buNone/>
             </a:pPr>
             <a:r>
@@ -11207,7 +11300,7 @@
           <a:bodyPr wrap="square" lIns="0" tIns="0" rIns="0" bIns="0" rtlCol="0" anchor="ctr"/>
           <a:lstStyle/>
           <a:p>
-            <a:pPr indent="0" marL="0">
+            <a:pPr marL="0" indent="0">
               <a:buNone/>
             </a:pPr>
             <a:r>
@@ -11246,7 +11339,7 @@
           <a:bodyPr wrap="square" lIns="0" tIns="0" rIns="0" bIns="0" rtlCol="0" anchor="ctr"/>
           <a:lstStyle/>
           <a:p>
-            <a:pPr indent="0" marL="0">
+            <a:pPr marL="0" indent="0">
               <a:buNone/>
             </a:pPr>
             <a:r>
@@ -11285,7 +11378,7 @@
           <a:bodyPr wrap="square" lIns="0" tIns="0" rIns="0" bIns="0" rtlCol="0" anchor="ctr"/>
           <a:lstStyle/>
           <a:p>
-            <a:pPr indent="0" marL="0">
+            <a:pPr marL="0" indent="0">
               <a:buNone/>
             </a:pPr>
             <a:r>
@@ -11324,7 +11417,7 @@
           <a:bodyPr wrap="square" lIns="0" tIns="0" rIns="0" bIns="0" rtlCol="0" anchor="ctr"/>
           <a:lstStyle/>
           <a:p>
-            <a:pPr indent="0" marL="0">
+            <a:pPr marL="0" indent="0">
               <a:buNone/>
             </a:pPr>
             <a:r>
@@ -11366,13 +11459,20 @@
             <a:prstDash val="solid"/>
           </a:ln>
           <a:effectLst>
-            <a:outerShdw sx="100000" sy="100000" kx="0" ky="0" algn="bl" rotWithShape="0" blurRad="101600" dist="12700" dir="5400000">
+            <a:outerShdw blurRad="101600" dist="12700" dir="5400000" algn="bl" rotWithShape="0">
               <a:srgbClr val="94A3B8">
                 <a:alpha val="12000"/>
               </a:srgbClr>
             </a:outerShdw>
           </a:effectLst>
         </p:spPr>
+        <p:txBody>
+          <a:bodyPr/>
+          <a:lstStyle/>
+          <a:p>
+            <a:endParaRPr lang="en-US"/>
+          </a:p>
+        </p:txBody>
       </p:sp>
       <p:sp>
         <p:nvSpPr>
@@ -11398,6 +11498,13 @@
             <a:prstDash val="solid"/>
           </a:ln>
         </p:spPr>
+        <p:txBody>
+          <a:bodyPr/>
+          <a:lstStyle/>
+          <a:p>
+            <a:endParaRPr lang="en-US"/>
+          </a:p>
+        </p:txBody>
       </p:sp>
       <p:sp>
         <p:nvSpPr>
@@ -11420,7 +11527,7 @@
           <a:bodyPr wrap="square" lIns="0" tIns="0" rIns="0" bIns="0" rtlCol="0" anchor="ctr"/>
           <a:lstStyle/>
           <a:p>
-            <a:pPr indent="0" marL="0">
+            <a:pPr marL="0" indent="0">
               <a:buNone/>
             </a:pPr>
             <a:r>
@@ -11459,7 +11566,7 @@
           <a:bodyPr wrap="square" lIns="0" tIns="0" rIns="0" bIns="0" rtlCol="0" anchor="ctr"/>
           <a:lstStyle/>
           <a:p>
-            <a:pPr indent="0" marL="0">
+            <a:pPr marL="0" indent="0">
               <a:buNone/>
             </a:pPr>
             <a:r>
@@ -11476,7 +11583,7 @@
             <a:endParaRPr lang="en-US" sz="1000" dirty="0"/>
           </a:p>
           <a:p>
-            <a:pPr indent="0" marL="0">
+            <a:pPr marL="0" indent="0">
               <a:buNone/>
             </a:pPr>
             <a:r>
@@ -11493,7 +11600,7 @@
             <a:endParaRPr lang="en-US" sz="1000" dirty="0"/>
           </a:p>
           <a:p>
-            <a:pPr indent="0" marL="0">
+            <a:pPr marL="0" indent="0">
               <a:buNone/>
             </a:pPr>
             <a:r>
@@ -11510,7 +11617,7 @@
             <a:endParaRPr lang="en-US" sz="1000" dirty="0"/>
           </a:p>
           <a:p>
-            <a:pPr indent="0" marL="0">
+            <a:pPr marL="0" indent="0">
               <a:buNone/>
             </a:pPr>
             <a:r>
@@ -11527,7 +11634,7 @@
             <a:endParaRPr lang="en-US" sz="1000" dirty="0"/>
           </a:p>
           <a:p>
-            <a:pPr indent="0" marL="0">
+            <a:pPr marL="0" indent="0">
               <a:buNone/>
             </a:pPr>
             <a:r>
@@ -11544,7 +11651,7 @@
             <a:endParaRPr lang="en-US" sz="1000" dirty="0"/>
           </a:p>
           <a:p>
-            <a:pPr indent="0" marL="0">
+            <a:pPr marL="0" indent="0">
               <a:buNone/>
             </a:pPr>
             <a:r>
@@ -11561,7 +11668,7 @@
             <a:endParaRPr lang="en-US" sz="1000" dirty="0"/>
           </a:p>
           <a:p>
-            <a:pPr indent="0" marL="0">
+            <a:pPr marL="0" indent="0">
               <a:buNone/>
             </a:pPr>
             <a:r>
@@ -11578,7 +11685,7 @@
             <a:endParaRPr lang="en-US" sz="1000" dirty="0"/>
           </a:p>
           <a:p>
-            <a:pPr indent="0" marL="0">
+            <a:pPr marL="0" indent="0">
               <a:buNone/>
             </a:pPr>
             <a:r>
@@ -11595,7 +11702,7 @@
             <a:endParaRPr lang="en-US" sz="1000" dirty="0"/>
           </a:p>
           <a:p>
-            <a:pPr indent="0" marL="0">
+            <a:pPr marL="0" indent="0">
               <a:buNone/>
             </a:pPr>
             <a:r>
@@ -11612,7 +11719,7 @@
             <a:endParaRPr lang="en-US" sz="1000" dirty="0"/>
           </a:p>
           <a:p>
-            <a:pPr indent="0" marL="0">
+            <a:pPr marL="0" indent="0">
               <a:buNone/>
             </a:pPr>
             <a:r>
@@ -11629,7 +11736,7 @@
             <a:endParaRPr lang="en-US" sz="1000" dirty="0"/>
           </a:p>
           <a:p>
-            <a:pPr indent="0" marL="0">
+            <a:pPr marL="0" indent="0">
               <a:buNone/>
             </a:pPr>
             <a:r>
@@ -11668,7 +11775,7 @@
           <a:bodyPr wrap="square" lIns="0" tIns="0" rIns="0" bIns="0" rtlCol="0" anchor="ctr"/>
           <a:lstStyle/>
           <a:p>
-            <a:pPr algn="l" indent="0" marL="0">
+            <a:pPr marL="0" indent="0" algn="l">
               <a:buNone/>
             </a:pPr>
             <a:r>
@@ -11707,7 +11814,7 @@
           <a:bodyPr wrap="square" lIns="0" tIns="0" rIns="0" bIns="0" rtlCol="0" anchor="ctr"/>
           <a:lstStyle/>
           <a:p>
-            <a:pPr algn="r" indent="0" marL="0">
+            <a:pPr marL="0" indent="0" algn="r">
               <a:buNone/>
             </a:pPr>
             <a:r>
@@ -11741,6 +11848,7 @@
         <a:solidFill>
           <a:srgbClr val="FFFFFF"/>
         </a:solidFill>
+        <a:effectLst/>
       </p:bgPr>
     </p:bg>
     <p:spTree>
@@ -11778,11 +11886,11 @@
           <a:bodyPr wrap="square" lIns="0" tIns="0" rIns="0" bIns="0" rtlCol="0" anchor="ctr"/>
           <a:lstStyle/>
           <a:p>
-            <a:pPr indent="0" marL="0">
-              <a:buNone/>
-            </a:pPr>
-            <a:r>
-              <a:rPr lang="en-US" sz="1100" b="1" spc="400" kern="0" dirty="0">
+            <a:pPr marL="0" indent="0">
+              <a:buNone/>
+            </a:pPr>
+            <a:r>
+              <a:rPr lang="en-US" sz="1100" b="1" kern="0" spc="400" dirty="0">
                 <a:solidFill>
                   <a:srgbClr val="1C7293"/>
                 </a:solidFill>
@@ -11817,7 +11925,7 @@
           <a:bodyPr wrap="square" lIns="0" tIns="0" rIns="0" bIns="0" rtlCol="0" anchor="ctr"/>
           <a:lstStyle/>
           <a:p>
-            <a:pPr indent="0" marL="0">
+            <a:pPr marL="0" indent="0">
               <a:buNone/>
             </a:pPr>
             <a:r>
@@ -11859,13 +11967,20 @@
             <a:prstDash val="solid"/>
           </a:ln>
           <a:effectLst>
-            <a:outerShdw sx="100000" sy="100000" kx="0" ky="0" algn="bl" rotWithShape="0" blurRad="101600" dist="12700" dir="5400000">
+            <a:outerShdw blurRad="101600" dist="12700" dir="5400000" algn="bl" rotWithShape="0">
               <a:srgbClr val="94A3B8">
                 <a:alpha val="12000"/>
               </a:srgbClr>
             </a:outerShdw>
           </a:effectLst>
         </p:spPr>
+        <p:txBody>
+          <a:bodyPr/>
+          <a:lstStyle/>
+          <a:p>
+            <a:endParaRPr lang="en-US"/>
+          </a:p>
+        </p:txBody>
       </p:sp>
       <p:sp>
         <p:nvSpPr>
@@ -11891,6 +12006,13 @@
             <a:prstDash val="solid"/>
           </a:ln>
         </p:spPr>
+        <p:txBody>
+          <a:bodyPr/>
+          <a:lstStyle/>
+          <a:p>
+            <a:endParaRPr lang="en-US"/>
+          </a:p>
+        </p:txBody>
       </p:sp>
       <p:sp>
         <p:nvSpPr>
@@ -11913,7 +12035,7 @@
           <a:bodyPr wrap="square" lIns="0" tIns="0" rIns="0" bIns="0" rtlCol="0" anchor="ctr"/>
           <a:lstStyle/>
           <a:p>
-            <a:pPr indent="0" marL="0">
+            <a:pPr marL="0" indent="0">
               <a:buNone/>
             </a:pPr>
             <a:r>
@@ -11952,7 +12074,7 @@
           <a:bodyPr wrap="square" lIns="0" tIns="0" rIns="0" bIns="0" rtlCol="0" anchor="ctr"/>
           <a:lstStyle/>
           <a:p>
-            <a:pPr indent="0" marL="0">
+            <a:pPr marL="0" indent="0">
               <a:buNone/>
             </a:pPr>
             <a:r>
@@ -11994,13 +12116,20 @@
             <a:prstDash val="solid"/>
           </a:ln>
           <a:effectLst>
-            <a:outerShdw sx="100000" sy="100000" kx="0" ky="0" algn="bl" rotWithShape="0" blurRad="101600" dist="12700" dir="5400000">
+            <a:outerShdw blurRad="101600" dist="12700" dir="5400000" algn="bl" rotWithShape="0">
               <a:srgbClr val="94A3B8">
                 <a:alpha val="12000"/>
               </a:srgbClr>
             </a:outerShdw>
           </a:effectLst>
         </p:spPr>
+        <p:txBody>
+          <a:bodyPr/>
+          <a:lstStyle/>
+          <a:p>
+            <a:endParaRPr lang="en-US"/>
+          </a:p>
+        </p:txBody>
       </p:sp>
       <p:sp>
         <p:nvSpPr>
@@ -12026,6 +12155,13 @@
             <a:prstDash val="solid"/>
           </a:ln>
         </p:spPr>
+        <p:txBody>
+          <a:bodyPr/>
+          <a:lstStyle/>
+          <a:p>
+            <a:endParaRPr lang="en-US"/>
+          </a:p>
+        </p:txBody>
       </p:sp>
       <p:sp>
         <p:nvSpPr>
@@ -12048,7 +12184,7 @@
           <a:bodyPr wrap="square" lIns="0" tIns="0" rIns="0" bIns="0" rtlCol="0" anchor="ctr"/>
           <a:lstStyle/>
           <a:p>
-            <a:pPr indent="0" marL="0">
+            <a:pPr marL="0" indent="0">
               <a:buNone/>
             </a:pPr>
             <a:r>
@@ -12087,7 +12223,7 @@
           <a:bodyPr wrap="square" lIns="0" tIns="0" rIns="0" bIns="0" rtlCol="0" anchor="ctr"/>
           <a:lstStyle/>
           <a:p>
-            <a:pPr indent="0" marL="0">
+            <a:pPr marL="0" indent="0">
               <a:buNone/>
             </a:pPr>
             <a:r>
@@ -12129,13 +12265,20 @@
             <a:prstDash val="solid"/>
           </a:ln>
           <a:effectLst>
-            <a:outerShdw sx="100000" sy="100000" kx="0" ky="0" algn="bl" rotWithShape="0" blurRad="101600" dist="12700" dir="5400000">
+            <a:outerShdw blurRad="101600" dist="12700" dir="5400000" algn="bl" rotWithShape="0">
               <a:srgbClr val="94A3B8">
                 <a:alpha val="12000"/>
               </a:srgbClr>
             </a:outerShdw>
           </a:effectLst>
         </p:spPr>
+        <p:txBody>
+          <a:bodyPr/>
+          <a:lstStyle/>
+          <a:p>
+            <a:endParaRPr lang="en-US"/>
+          </a:p>
+        </p:txBody>
       </p:sp>
       <p:sp>
         <p:nvSpPr>
@@ -12161,6 +12304,13 @@
             <a:prstDash val="solid"/>
           </a:ln>
         </p:spPr>
+        <p:txBody>
+          <a:bodyPr/>
+          <a:lstStyle/>
+          <a:p>
+            <a:endParaRPr lang="en-US"/>
+          </a:p>
+        </p:txBody>
       </p:sp>
       <p:sp>
         <p:nvSpPr>
@@ -12183,7 +12333,7 @@
           <a:bodyPr wrap="square" lIns="0" tIns="0" rIns="0" bIns="0" rtlCol="0" anchor="ctr"/>
           <a:lstStyle/>
           <a:p>
-            <a:pPr indent="0" marL="0">
+            <a:pPr marL="0" indent="0">
               <a:buNone/>
             </a:pPr>
             <a:r>
@@ -12222,7 +12372,7 @@
           <a:bodyPr wrap="square" lIns="0" tIns="0" rIns="0" bIns="0" rtlCol="0" anchor="ctr"/>
           <a:lstStyle/>
           <a:p>
-            <a:pPr indent="0" marL="0">
+            <a:pPr marL="0" indent="0">
               <a:buNone/>
             </a:pPr>
             <a:r>
@@ -12264,13 +12414,20 @@
             <a:prstDash val="solid"/>
           </a:ln>
           <a:effectLst>
-            <a:outerShdw sx="100000" sy="100000" kx="0" ky="0" algn="bl" rotWithShape="0" blurRad="101600" dist="12700" dir="5400000">
+            <a:outerShdw blurRad="101600" dist="12700" dir="5400000" algn="bl" rotWithShape="0">
               <a:srgbClr val="94A3B8">
                 <a:alpha val="12000"/>
               </a:srgbClr>
             </a:outerShdw>
           </a:effectLst>
         </p:spPr>
+        <p:txBody>
+          <a:bodyPr/>
+          <a:lstStyle/>
+          <a:p>
+            <a:endParaRPr lang="en-US"/>
+          </a:p>
+        </p:txBody>
       </p:sp>
       <p:sp>
         <p:nvSpPr>
@@ -12296,6 +12453,13 @@
             <a:prstDash val="solid"/>
           </a:ln>
         </p:spPr>
+        <p:txBody>
+          <a:bodyPr/>
+          <a:lstStyle/>
+          <a:p>
+            <a:endParaRPr lang="en-US"/>
+          </a:p>
+        </p:txBody>
       </p:sp>
       <p:sp>
         <p:nvSpPr>
@@ -12318,7 +12482,7 @@
           <a:bodyPr wrap="square" lIns="0" tIns="0" rIns="0" bIns="0" rtlCol="0" anchor="ctr"/>
           <a:lstStyle/>
           <a:p>
-            <a:pPr indent="0" marL="0">
+            <a:pPr marL="0" indent="0">
               <a:buNone/>
             </a:pPr>
             <a:r>
@@ -12357,7 +12521,7 @@
           <a:bodyPr wrap="square" lIns="0" tIns="0" rIns="0" bIns="0" rtlCol="0" anchor="ctr"/>
           <a:lstStyle/>
           <a:p>
-            <a:pPr indent="0" marL="0">
+            <a:pPr marL="0" indent="0">
               <a:buNone/>
             </a:pPr>
             <a:r>
@@ -12396,7 +12560,7 @@
           <a:bodyPr wrap="square" lIns="0" tIns="0" rIns="0" bIns="0" rtlCol="0" anchor="ctr"/>
           <a:lstStyle/>
           <a:p>
-            <a:pPr algn="r" indent="0" marL="0">
+            <a:pPr marL="0" indent="0" algn="r">
               <a:buNone/>
             </a:pPr>
             <a:r>
@@ -12430,6 +12594,7 @@
         <a:solidFill>
           <a:srgbClr val="FFFFFF"/>
         </a:solidFill>
+        <a:effectLst/>
       </p:bgPr>
     </p:bg>
     <p:spTree>
@@ -12467,11 +12632,11 @@
           <a:bodyPr wrap="square" lIns="0" tIns="0" rIns="0" bIns="0" rtlCol="0" anchor="ctr"/>
           <a:lstStyle/>
           <a:p>
-            <a:pPr indent="0" marL="0">
-              <a:buNone/>
-            </a:pPr>
-            <a:r>
-              <a:rPr lang="en-US" sz="1100" b="1" spc="400" kern="0" dirty="0">
+            <a:pPr marL="0" indent="0">
+              <a:buNone/>
+            </a:pPr>
+            <a:r>
+              <a:rPr lang="en-US" sz="1100" b="1" kern="0" spc="400" dirty="0">
                 <a:solidFill>
                   <a:srgbClr val="1C7293"/>
                 </a:solidFill>
@@ -12506,7 +12671,7 @@
           <a:bodyPr wrap="square" lIns="0" tIns="0" rIns="0" bIns="0" rtlCol="0" anchor="ctr"/>
           <a:lstStyle/>
           <a:p>
-            <a:pPr indent="0" marL="0">
+            <a:pPr marL="0" indent="0">
               <a:buNone/>
             </a:pPr>
             <a:r>
@@ -12548,6 +12713,13 @@
             <a:prstDash val="solid"/>
           </a:ln>
         </p:spPr>
+        <p:txBody>
+          <a:bodyPr/>
+          <a:lstStyle/>
+          <a:p>
+            <a:endParaRPr lang="en-US"/>
+          </a:p>
+        </p:txBody>
       </p:sp>
       <p:sp>
         <p:nvSpPr>
@@ -12570,7 +12742,7 @@
           <a:bodyPr wrap="square" lIns="0" tIns="0" rIns="0" bIns="0" rtlCol="0" anchor="ctr"/>
           <a:lstStyle/>
           <a:p>
-            <a:pPr algn="ctr" indent="0" marL="0">
+            <a:pPr marL="0" indent="0" algn="ctr">
               <a:buNone/>
             </a:pPr>
             <a:r>
@@ -12609,7 +12781,7 @@
           <a:bodyPr wrap="square" lIns="0" tIns="0" rIns="0" bIns="0" rtlCol="0" anchor="ctr"/>
           <a:lstStyle/>
           <a:p>
-            <a:pPr indent="0" marL="0">
+            <a:pPr marL="0" indent="0">
               <a:buNone/>
             </a:pPr>
             <a:r>
@@ -12651,6 +12823,13 @@
             <a:prstDash val="solid"/>
           </a:ln>
         </p:spPr>
+        <p:txBody>
+          <a:bodyPr/>
+          <a:lstStyle/>
+          <a:p>
+            <a:endParaRPr lang="en-US"/>
+          </a:p>
+        </p:txBody>
       </p:sp>
       <p:sp>
         <p:nvSpPr>
@@ -12673,7 +12852,7 @@
           <a:bodyPr wrap="square" lIns="0" tIns="0" rIns="0" bIns="0" rtlCol="0" anchor="ctr"/>
           <a:lstStyle/>
           <a:p>
-            <a:pPr algn="ctr" indent="0" marL="0">
+            <a:pPr marL="0" indent="0" algn="ctr">
               <a:buNone/>
             </a:pPr>
             <a:r>
@@ -12712,7 +12891,7 @@
           <a:bodyPr wrap="square" lIns="0" tIns="0" rIns="0" bIns="0" rtlCol="0" anchor="ctr"/>
           <a:lstStyle/>
           <a:p>
-            <a:pPr indent="0" marL="0">
+            <a:pPr marL="0" indent="0">
               <a:buNone/>
             </a:pPr>
             <a:r>
@@ -12754,6 +12933,13 @@
             <a:prstDash val="solid"/>
           </a:ln>
         </p:spPr>
+        <p:txBody>
+          <a:bodyPr/>
+          <a:lstStyle/>
+          <a:p>
+            <a:endParaRPr lang="en-US"/>
+          </a:p>
+        </p:txBody>
       </p:sp>
       <p:sp>
         <p:nvSpPr>
@@ -12776,7 +12962,7 @@
           <a:bodyPr wrap="square" lIns="0" tIns="0" rIns="0" bIns="0" rtlCol="0" anchor="ctr"/>
           <a:lstStyle/>
           <a:p>
-            <a:pPr algn="ctr" indent="0" marL="0">
+            <a:pPr marL="0" indent="0" algn="ctr">
               <a:buNone/>
             </a:pPr>
             <a:r>
@@ -12815,7 +13001,7 @@
           <a:bodyPr wrap="square" lIns="0" tIns="0" rIns="0" bIns="0" rtlCol="0" anchor="ctr"/>
           <a:lstStyle/>
           <a:p>
-            <a:pPr indent="0" marL="0">
+            <a:pPr marL="0" indent="0">
               <a:buNone/>
             </a:pPr>
             <a:r>
@@ -12857,6 +13043,13 @@
             <a:prstDash val="solid"/>
           </a:ln>
         </p:spPr>
+        <p:txBody>
+          <a:bodyPr/>
+          <a:lstStyle/>
+          <a:p>
+            <a:endParaRPr lang="en-US"/>
+          </a:p>
+        </p:txBody>
       </p:sp>
       <p:sp>
         <p:nvSpPr>
@@ -12879,7 +13072,7 @@
           <a:bodyPr wrap="square" lIns="0" tIns="0" rIns="0" bIns="0" rtlCol="0" anchor="ctr"/>
           <a:lstStyle/>
           <a:p>
-            <a:pPr algn="ctr" indent="0" marL="0">
+            <a:pPr marL="0" indent="0" algn="ctr">
               <a:buNone/>
             </a:pPr>
             <a:r>
@@ -12918,7 +13111,7 @@
           <a:bodyPr wrap="square" lIns="0" tIns="0" rIns="0" bIns="0" rtlCol="0" anchor="ctr"/>
           <a:lstStyle/>
           <a:p>
-            <a:pPr indent="0" marL="0">
+            <a:pPr marL="0" indent="0">
               <a:buNone/>
             </a:pPr>
             <a:r>
@@ -12960,6 +13153,13 @@
             <a:prstDash val="solid"/>
           </a:ln>
         </p:spPr>
+        <p:txBody>
+          <a:bodyPr/>
+          <a:lstStyle/>
+          <a:p>
+            <a:endParaRPr lang="en-US"/>
+          </a:p>
+        </p:txBody>
       </p:sp>
       <p:sp>
         <p:nvSpPr>
@@ -12982,7 +13182,7 @@
           <a:bodyPr wrap="square" lIns="0" tIns="0" rIns="0" bIns="0" rtlCol="0" anchor="ctr"/>
           <a:lstStyle/>
           <a:p>
-            <a:pPr algn="ctr" indent="0" marL="0">
+            <a:pPr marL="0" indent="0" algn="ctr">
               <a:buNone/>
             </a:pPr>
             <a:r>
@@ -13021,7 +13221,7 @@
           <a:bodyPr wrap="square" lIns="0" tIns="0" rIns="0" bIns="0" rtlCol="0" anchor="ctr"/>
           <a:lstStyle/>
           <a:p>
-            <a:pPr indent="0" marL="0">
+            <a:pPr marL="0" indent="0">
               <a:buNone/>
             </a:pPr>
             <a:r>
@@ -13063,6 +13263,13 @@
             <a:prstDash val="solid"/>
           </a:ln>
         </p:spPr>
+        <p:txBody>
+          <a:bodyPr/>
+          <a:lstStyle/>
+          <a:p>
+            <a:endParaRPr lang="en-US"/>
+          </a:p>
+        </p:txBody>
       </p:sp>
       <p:sp>
         <p:nvSpPr>
@@ -13085,7 +13292,7 @@
           <a:bodyPr wrap="square" lIns="0" tIns="0" rIns="0" bIns="0" rtlCol="0" anchor="ctr"/>
           <a:lstStyle/>
           <a:p>
-            <a:pPr algn="ctr" indent="0" marL="0">
+            <a:pPr marL="0" indent="0" algn="ctr">
               <a:buNone/>
             </a:pPr>
             <a:r>
@@ -13124,7 +13331,7 @@
           <a:bodyPr wrap="square" lIns="0" tIns="0" rIns="0" bIns="0" rtlCol="0" anchor="ctr"/>
           <a:lstStyle/>
           <a:p>
-            <a:pPr indent="0" marL="0">
+            <a:pPr marL="0" indent="0">
               <a:buNone/>
             </a:pPr>
             <a:r>
@@ -13163,7 +13370,7 @@
           <a:bodyPr wrap="square" lIns="0" tIns="0" rIns="0" bIns="0" rtlCol="0" anchor="ctr"/>
           <a:lstStyle/>
           <a:p>
-            <a:pPr algn="l" indent="0" marL="0">
+            <a:pPr marL="0" indent="0" algn="l">
               <a:buNone/>
             </a:pPr>
             <a:r>
@@ -13202,7 +13409,7 @@
           <a:bodyPr wrap="square" lIns="0" tIns="0" rIns="0" bIns="0" rtlCol="0" anchor="ctr"/>
           <a:lstStyle/>
           <a:p>
-            <a:pPr algn="r" indent="0" marL="0">
+            <a:pPr marL="0" indent="0" algn="r">
               <a:buNone/>
             </a:pPr>
             <a:r>
@@ -13236,6 +13443,7 @@
         <a:solidFill>
           <a:srgbClr val="21295C"/>
         </a:solidFill>
+        <a:effectLst/>
       </p:bgPr>
     </p:bg>
     <p:spTree>
@@ -13273,11 +13481,11 @@
           <a:bodyPr wrap="square" lIns="0" tIns="0" rIns="0" bIns="0" rtlCol="0" anchor="ctr"/>
           <a:lstStyle/>
           <a:p>
-            <a:pPr indent="0" marL="0">
-              <a:buNone/>
-            </a:pPr>
-            <a:r>
-              <a:rPr lang="en-US" sz="1100" b="1" spc="400" kern="0" dirty="0">
+            <a:pPr marL="0" indent="0">
+              <a:buNone/>
+            </a:pPr>
+            <a:r>
+              <a:rPr lang="en-US" sz="1100" b="1" kern="0" spc="400" dirty="0">
                 <a:solidFill>
                   <a:srgbClr val="1C7293"/>
                 </a:solidFill>
@@ -13312,7 +13520,7 @@
           <a:bodyPr wrap="square" lIns="0" tIns="0" rIns="0" bIns="0" rtlCol="0" anchor="ctr"/>
           <a:lstStyle/>
           <a:p>
-            <a:pPr indent="0" marL="0">
+            <a:pPr marL="0" indent="0">
               <a:buNone/>
             </a:pPr>
             <a:r>
@@ -13354,6 +13562,13 @@
             <a:prstDash val="solid"/>
           </a:ln>
         </p:spPr>
+        <p:txBody>
+          <a:bodyPr/>
+          <a:lstStyle/>
+          <a:p>
+            <a:endParaRPr lang="en-US"/>
+          </a:p>
+        </p:txBody>
       </p:sp>
       <p:sp>
         <p:nvSpPr>
@@ -13376,7 +13591,7 @@
           <a:bodyPr wrap="square" lIns="0" tIns="0" rIns="0" bIns="0" rtlCol="0" anchor="ctr"/>
           <a:lstStyle/>
           <a:p>
-            <a:pPr algn="ctr" indent="0" marL="0">
+            <a:pPr marL="0" indent="0" algn="ctr">
               <a:buNone/>
             </a:pPr>
             <a:r>
@@ -13415,7 +13630,7 @@
           <a:bodyPr wrap="square" lIns="0" tIns="0" rIns="0" bIns="0" rtlCol="0" anchor="ctr"/>
           <a:lstStyle/>
           <a:p>
-            <a:pPr indent="0" marL="0">
+            <a:pPr marL="0" indent="0">
               <a:buNone/>
             </a:pPr>
             <a:r>
@@ -13457,6 +13672,13 @@
             <a:prstDash val="solid"/>
           </a:ln>
         </p:spPr>
+        <p:txBody>
+          <a:bodyPr/>
+          <a:lstStyle/>
+          <a:p>
+            <a:endParaRPr lang="en-US"/>
+          </a:p>
+        </p:txBody>
       </p:sp>
       <p:sp>
         <p:nvSpPr>
@@ -13479,7 +13701,7 @@
           <a:bodyPr wrap="square" lIns="0" tIns="0" rIns="0" bIns="0" rtlCol="0" anchor="ctr"/>
           <a:lstStyle/>
           <a:p>
-            <a:pPr algn="ctr" indent="0" marL="0">
+            <a:pPr marL="0" indent="0" algn="ctr">
               <a:buNone/>
             </a:pPr>
             <a:r>
@@ -13518,7 +13740,7 @@
           <a:bodyPr wrap="square" lIns="0" tIns="0" rIns="0" bIns="0" rtlCol="0" anchor="ctr"/>
           <a:lstStyle/>
           <a:p>
-            <a:pPr indent="0" marL="0">
+            <a:pPr marL="0" indent="0">
               <a:buNone/>
             </a:pPr>
             <a:r>
@@ -13560,6 +13782,13 @@
             <a:prstDash val="solid"/>
           </a:ln>
         </p:spPr>
+        <p:txBody>
+          <a:bodyPr/>
+          <a:lstStyle/>
+          <a:p>
+            <a:endParaRPr lang="en-US"/>
+          </a:p>
+        </p:txBody>
       </p:sp>
       <p:sp>
         <p:nvSpPr>
@@ -13582,7 +13811,7 @@
           <a:bodyPr wrap="square" lIns="0" tIns="0" rIns="0" bIns="0" rtlCol="0" anchor="ctr"/>
           <a:lstStyle/>
           <a:p>
-            <a:pPr algn="ctr" indent="0" marL="0">
+            <a:pPr marL="0" indent="0" algn="ctr">
               <a:buNone/>
             </a:pPr>
             <a:r>
@@ -13621,7 +13850,7 @@
           <a:bodyPr wrap="square" lIns="0" tIns="0" rIns="0" bIns="0" rtlCol="0" anchor="ctr"/>
           <a:lstStyle/>
           <a:p>
-            <a:pPr indent="0" marL="0">
+            <a:pPr marL="0" indent="0">
               <a:buNone/>
             </a:pPr>
             <a:r>
@@ -13663,6 +13892,13 @@
             <a:prstDash val="solid"/>
           </a:ln>
         </p:spPr>
+        <p:txBody>
+          <a:bodyPr/>
+          <a:lstStyle/>
+          <a:p>
+            <a:endParaRPr lang="en-US"/>
+          </a:p>
+        </p:txBody>
       </p:sp>
       <p:sp>
         <p:nvSpPr>
@@ -13685,7 +13921,7 @@
           <a:bodyPr wrap="square" lIns="0" tIns="0" rIns="0" bIns="0" rtlCol="0" anchor="ctr"/>
           <a:lstStyle/>
           <a:p>
-            <a:pPr algn="ctr" indent="0" marL="0">
+            <a:pPr marL="0" indent="0" algn="ctr">
               <a:buNone/>
             </a:pPr>
             <a:r>
@@ -13724,7 +13960,7 @@
           <a:bodyPr wrap="square" lIns="0" tIns="0" rIns="0" bIns="0" rtlCol="0" anchor="ctr"/>
           <a:lstStyle/>
           <a:p>
-            <a:pPr indent="0" marL="0">
+            <a:pPr marL="0" indent="0">
               <a:buNone/>
             </a:pPr>
             <a:r>
@@ -13766,6 +14002,13 @@
             <a:prstDash val="solid"/>
           </a:ln>
         </p:spPr>
+        <p:txBody>
+          <a:bodyPr/>
+          <a:lstStyle/>
+          <a:p>
+            <a:endParaRPr lang="en-US"/>
+          </a:p>
+        </p:txBody>
       </p:sp>
       <p:sp>
         <p:nvSpPr>
@@ -13788,7 +14031,7 @@
           <a:bodyPr wrap="square" lIns="0" tIns="0" rIns="0" bIns="0" rtlCol="0" anchor="ctr"/>
           <a:lstStyle/>
           <a:p>
-            <a:pPr indent="0" marL="0">
+            <a:pPr marL="0" indent="0">
               <a:buNone/>
             </a:pPr>
             <a:r>
@@ -13827,7 +14070,7 @@
           <a:bodyPr wrap="square" lIns="0" tIns="0" rIns="0" bIns="0" rtlCol="0" anchor="ctr"/>
           <a:lstStyle/>
           <a:p>
-            <a:pPr indent="0" marL="0">
+            <a:pPr marL="0" indent="0">
               <a:buNone/>
             </a:pPr>
             <a:r>
@@ -13866,7 +14109,7 @@
           <a:bodyPr wrap="square" lIns="0" tIns="0" rIns="0" bIns="0" rtlCol="0" anchor="ctr"/>
           <a:lstStyle/>
           <a:p>
-            <a:pPr algn="l" indent="0" marL="0">
+            <a:pPr marL="0" indent="0" algn="l">
               <a:buNone/>
             </a:pPr>
             <a:r>
@@ -13905,7 +14148,7 @@
           <a:bodyPr wrap="square" lIns="0" tIns="0" rIns="0" bIns="0" rtlCol="0" anchor="ctr"/>
           <a:lstStyle/>
           <a:p>
-            <a:pPr algn="r" indent="0" marL="0">
+            <a:pPr marL="0" indent="0" algn="r">
               <a:buNone/>
             </a:pPr>
             <a:r>
@@ -13939,6 +14182,7 @@
         <a:solidFill>
           <a:srgbClr val="FFFFFF"/>
         </a:solidFill>
+        <a:effectLst/>
       </p:bgPr>
     </p:bg>
     <p:spTree>
@@ -13976,11 +14220,11 @@
           <a:bodyPr wrap="square" lIns="0" tIns="0" rIns="0" bIns="0" rtlCol="0" anchor="ctr"/>
           <a:lstStyle/>
           <a:p>
-            <a:pPr indent="0" marL="0">
-              <a:buNone/>
-            </a:pPr>
-            <a:r>
-              <a:rPr lang="en-US" sz="1100" b="1" spc="400" kern="0" dirty="0">
+            <a:pPr marL="0" indent="0">
+              <a:buNone/>
+            </a:pPr>
+            <a:r>
+              <a:rPr lang="en-US" sz="1100" b="1" kern="0" spc="400" dirty="0">
                 <a:solidFill>
                   <a:srgbClr val="1C7293"/>
                 </a:solidFill>
@@ -14015,7 +14259,7 @@
           <a:bodyPr wrap="square" lIns="0" tIns="0" rIns="0" bIns="0" rtlCol="0" anchor="ctr"/>
           <a:lstStyle/>
           <a:p>
-            <a:pPr indent="0" marL="0">
+            <a:pPr marL="0" indent="0">
               <a:buNone/>
             </a:pPr>
             <a:r>
@@ -14057,13 +14301,20 @@
             <a:prstDash val="solid"/>
           </a:ln>
           <a:effectLst>
-            <a:outerShdw sx="100000" sy="100000" kx="0" ky="0" algn="bl" rotWithShape="0" blurRad="101600" dist="12700" dir="5400000">
+            <a:outerShdw blurRad="101600" dist="12700" dir="5400000" algn="bl" rotWithShape="0">
               <a:srgbClr val="94A3B8">
                 <a:alpha val="12000"/>
               </a:srgbClr>
             </a:outerShdw>
           </a:effectLst>
         </p:spPr>
+        <p:txBody>
+          <a:bodyPr/>
+          <a:lstStyle/>
+          <a:p>
+            <a:endParaRPr lang="en-US"/>
+          </a:p>
+        </p:txBody>
       </p:sp>
       <p:sp>
         <p:nvSpPr>
@@ -14089,6 +14340,13 @@
             <a:prstDash val="solid"/>
           </a:ln>
         </p:spPr>
+        <p:txBody>
+          <a:bodyPr/>
+          <a:lstStyle/>
+          <a:p>
+            <a:endParaRPr lang="en-US"/>
+          </a:p>
+        </p:txBody>
       </p:sp>
       <p:sp>
         <p:nvSpPr>
@@ -14114,6 +14372,13 @@
             <a:prstDash val="solid"/>
           </a:ln>
         </p:spPr>
+        <p:txBody>
+          <a:bodyPr/>
+          <a:lstStyle/>
+          <a:p>
+            <a:endParaRPr lang="en-US"/>
+          </a:p>
+        </p:txBody>
       </p:sp>
       <p:sp>
         <p:nvSpPr>
@@ -14136,7 +14401,7 @@
           <a:bodyPr wrap="square" lIns="0" tIns="0" rIns="0" bIns="0" rtlCol="0" anchor="ctr"/>
           <a:lstStyle/>
           <a:p>
-            <a:pPr algn="ctr" indent="0" marL="0">
+            <a:pPr marL="0" indent="0" algn="ctr">
               <a:buNone/>
             </a:pPr>
             <a:r>
@@ -14175,7 +14440,7 @@
           <a:bodyPr wrap="square" lIns="0" tIns="0" rIns="0" bIns="0" rtlCol="0" anchor="ctr"/>
           <a:lstStyle/>
           <a:p>
-            <a:pPr indent="0" marL="0">
+            <a:pPr marL="0" indent="0">
               <a:buNone/>
             </a:pPr>
             <a:r>
@@ -14214,7 +14479,7 @@
           <a:bodyPr wrap="square" lIns="0" tIns="0" rIns="0" bIns="0" rtlCol="0" anchor="ctr"/>
           <a:lstStyle/>
           <a:p>
-            <a:pPr indent="0" marL="0">
+            <a:pPr marL="0" indent="0">
               <a:buNone/>
             </a:pPr>
             <a:r>
@@ -14256,13 +14521,20 @@
             <a:prstDash val="solid"/>
           </a:ln>
           <a:effectLst>
-            <a:outerShdw sx="100000" sy="100000" kx="0" ky="0" algn="bl" rotWithShape="0" blurRad="101600" dist="12700" dir="5400000">
+            <a:outerShdw blurRad="101600" dist="12700" dir="5400000" algn="bl" rotWithShape="0">
               <a:srgbClr val="94A3B8">
                 <a:alpha val="12000"/>
               </a:srgbClr>
             </a:outerShdw>
           </a:effectLst>
         </p:spPr>
+        <p:txBody>
+          <a:bodyPr/>
+          <a:lstStyle/>
+          <a:p>
+            <a:endParaRPr lang="en-US"/>
+          </a:p>
+        </p:txBody>
       </p:sp>
       <p:sp>
         <p:nvSpPr>
@@ -14288,6 +14560,13 @@
             <a:prstDash val="solid"/>
           </a:ln>
         </p:spPr>
+        <p:txBody>
+          <a:bodyPr/>
+          <a:lstStyle/>
+          <a:p>
+            <a:endParaRPr lang="en-US"/>
+          </a:p>
+        </p:txBody>
       </p:sp>
       <p:sp>
         <p:nvSpPr>
@@ -14313,6 +14592,13 @@
             <a:prstDash val="solid"/>
           </a:ln>
         </p:spPr>
+        <p:txBody>
+          <a:bodyPr/>
+          <a:lstStyle/>
+          <a:p>
+            <a:endParaRPr lang="en-US"/>
+          </a:p>
+        </p:txBody>
       </p:sp>
       <p:sp>
         <p:nvSpPr>
@@ -14335,7 +14621,7 @@
           <a:bodyPr wrap="square" lIns="0" tIns="0" rIns="0" bIns="0" rtlCol="0" anchor="ctr"/>
           <a:lstStyle/>
           <a:p>
-            <a:pPr algn="ctr" indent="0" marL="0">
+            <a:pPr marL="0" indent="0" algn="ctr">
               <a:buNone/>
             </a:pPr>
             <a:r>
@@ -14374,7 +14660,7 @@
           <a:bodyPr wrap="square" lIns="0" tIns="0" rIns="0" bIns="0" rtlCol="0" anchor="ctr"/>
           <a:lstStyle/>
           <a:p>
-            <a:pPr indent="0" marL="0">
+            <a:pPr marL="0" indent="0">
               <a:buNone/>
             </a:pPr>
             <a:r>
@@ -14413,7 +14699,7 @@
           <a:bodyPr wrap="square" lIns="0" tIns="0" rIns="0" bIns="0" rtlCol="0" anchor="ctr"/>
           <a:lstStyle/>
           <a:p>
-            <a:pPr indent="0" marL="0">
+            <a:pPr marL="0" indent="0">
               <a:buNone/>
             </a:pPr>
             <a:r>
@@ -14455,13 +14741,20 @@
             <a:prstDash val="solid"/>
           </a:ln>
           <a:effectLst>
-            <a:outerShdw sx="100000" sy="100000" kx="0" ky="0" algn="bl" rotWithShape="0" blurRad="101600" dist="12700" dir="5400000">
+            <a:outerShdw blurRad="101600" dist="12700" dir="5400000" algn="bl" rotWithShape="0">
               <a:srgbClr val="94A3B8">
                 <a:alpha val="12000"/>
               </a:srgbClr>
             </a:outerShdw>
           </a:effectLst>
         </p:spPr>
+        <p:txBody>
+          <a:bodyPr/>
+          <a:lstStyle/>
+          <a:p>
+            <a:endParaRPr lang="en-US"/>
+          </a:p>
+        </p:txBody>
       </p:sp>
       <p:sp>
         <p:nvSpPr>
@@ -14487,6 +14780,13 @@
             <a:prstDash val="solid"/>
           </a:ln>
         </p:spPr>
+        <p:txBody>
+          <a:bodyPr/>
+          <a:lstStyle/>
+          <a:p>
+            <a:endParaRPr lang="en-US"/>
+          </a:p>
+        </p:txBody>
       </p:sp>
       <p:sp>
         <p:nvSpPr>
@@ -14512,6 +14812,13 @@
             <a:prstDash val="solid"/>
           </a:ln>
         </p:spPr>
+        <p:txBody>
+          <a:bodyPr/>
+          <a:lstStyle/>
+          <a:p>
+            <a:endParaRPr lang="en-US"/>
+          </a:p>
+        </p:txBody>
       </p:sp>
       <p:sp>
         <p:nvSpPr>
@@ -14534,7 +14841,7 @@
           <a:bodyPr wrap="square" lIns="0" tIns="0" rIns="0" bIns="0" rtlCol="0" anchor="ctr"/>
           <a:lstStyle/>
           <a:p>
-            <a:pPr algn="ctr" indent="0" marL="0">
+            <a:pPr marL="0" indent="0" algn="ctr">
               <a:buNone/>
             </a:pPr>
             <a:r>
@@ -14573,7 +14880,7 @@
           <a:bodyPr wrap="square" lIns="0" tIns="0" rIns="0" bIns="0" rtlCol="0" anchor="ctr"/>
           <a:lstStyle/>
           <a:p>
-            <a:pPr indent="0" marL="0">
+            <a:pPr marL="0" indent="0">
               <a:buNone/>
             </a:pPr>
             <a:r>
@@ -14612,7 +14919,7 @@
           <a:bodyPr wrap="square" lIns="0" tIns="0" rIns="0" bIns="0" rtlCol="0" anchor="ctr"/>
           <a:lstStyle/>
           <a:p>
-            <a:pPr indent="0" marL="0">
+            <a:pPr marL="0" indent="0">
               <a:buNone/>
             </a:pPr>
             <a:r>
@@ -14654,13 +14961,20 @@
             <a:prstDash val="solid"/>
           </a:ln>
           <a:effectLst>
-            <a:outerShdw sx="100000" sy="100000" kx="0" ky="0" algn="bl" rotWithShape="0" blurRad="101600" dist="12700" dir="5400000">
+            <a:outerShdw blurRad="101600" dist="12700" dir="5400000" algn="bl" rotWithShape="0">
               <a:srgbClr val="94A3B8">
                 <a:alpha val="12000"/>
               </a:srgbClr>
             </a:outerShdw>
           </a:effectLst>
         </p:spPr>
+        <p:txBody>
+          <a:bodyPr/>
+          <a:lstStyle/>
+          <a:p>
+            <a:endParaRPr lang="en-US"/>
+          </a:p>
+        </p:txBody>
       </p:sp>
       <p:sp>
         <p:nvSpPr>
@@ -14686,6 +15000,13 @@
             <a:prstDash val="solid"/>
           </a:ln>
         </p:spPr>
+        <p:txBody>
+          <a:bodyPr/>
+          <a:lstStyle/>
+          <a:p>
+            <a:endParaRPr lang="en-US"/>
+          </a:p>
+        </p:txBody>
       </p:sp>
       <p:sp>
         <p:nvSpPr>
@@ -14711,6 +15032,13 @@
             <a:prstDash val="solid"/>
           </a:ln>
         </p:spPr>
+        <p:txBody>
+          <a:bodyPr/>
+          <a:lstStyle/>
+          <a:p>
+            <a:endParaRPr lang="en-US"/>
+          </a:p>
+        </p:txBody>
       </p:sp>
       <p:sp>
         <p:nvSpPr>
@@ -14733,7 +15061,7 @@
           <a:bodyPr wrap="square" lIns="0" tIns="0" rIns="0" bIns="0" rtlCol="0" anchor="ctr"/>
           <a:lstStyle/>
           <a:p>
-            <a:pPr algn="ctr" indent="0" marL="0">
+            <a:pPr marL="0" indent="0" algn="ctr">
               <a:buNone/>
             </a:pPr>
             <a:r>
@@ -14772,7 +15100,7 @@
           <a:bodyPr wrap="square" lIns="0" tIns="0" rIns="0" bIns="0" rtlCol="0" anchor="ctr"/>
           <a:lstStyle/>
           <a:p>
-            <a:pPr indent="0" marL="0">
+            <a:pPr marL="0" indent="0">
               <a:buNone/>
             </a:pPr>
             <a:r>
@@ -14811,7 +15139,7 @@
           <a:bodyPr wrap="square" lIns="0" tIns="0" rIns="0" bIns="0" rtlCol="0" anchor="ctr"/>
           <a:lstStyle/>
           <a:p>
-            <a:pPr indent="0" marL="0">
+            <a:pPr marL="0" indent="0">
               <a:buNone/>
             </a:pPr>
             <a:r>
@@ -14853,13 +15181,20 @@
             <a:prstDash val="solid"/>
           </a:ln>
           <a:effectLst>
-            <a:outerShdw sx="100000" sy="100000" kx="0" ky="0" algn="bl" rotWithShape="0" blurRad="101600" dist="12700" dir="5400000">
+            <a:outerShdw blurRad="101600" dist="12700" dir="5400000" algn="bl" rotWithShape="0">
               <a:srgbClr val="94A3B8">
                 <a:alpha val="12000"/>
               </a:srgbClr>
             </a:outerShdw>
           </a:effectLst>
         </p:spPr>
+        <p:txBody>
+          <a:bodyPr/>
+          <a:lstStyle/>
+          <a:p>
+            <a:endParaRPr lang="en-US"/>
+          </a:p>
+        </p:txBody>
       </p:sp>
       <p:sp>
         <p:nvSpPr>
@@ -14885,6 +15220,13 @@
             <a:prstDash val="solid"/>
           </a:ln>
         </p:spPr>
+        <p:txBody>
+          <a:bodyPr/>
+          <a:lstStyle/>
+          <a:p>
+            <a:endParaRPr lang="en-US"/>
+          </a:p>
+        </p:txBody>
       </p:sp>
       <p:sp>
         <p:nvSpPr>
@@ -14910,6 +15252,13 @@
             <a:prstDash val="solid"/>
           </a:ln>
         </p:spPr>
+        <p:txBody>
+          <a:bodyPr/>
+          <a:lstStyle/>
+          <a:p>
+            <a:endParaRPr lang="en-US"/>
+          </a:p>
+        </p:txBody>
       </p:sp>
       <p:sp>
         <p:nvSpPr>
@@ -14932,7 +15281,7 @@
           <a:bodyPr wrap="square" lIns="0" tIns="0" rIns="0" bIns="0" rtlCol="0" anchor="ctr"/>
           <a:lstStyle/>
           <a:p>
-            <a:pPr algn="ctr" indent="0" marL="0">
+            <a:pPr marL="0" indent="0" algn="ctr">
               <a:buNone/>
             </a:pPr>
             <a:r>
@@ -14971,7 +15320,7 @@
           <a:bodyPr wrap="square" lIns="0" tIns="0" rIns="0" bIns="0" rtlCol="0" anchor="ctr"/>
           <a:lstStyle/>
           <a:p>
-            <a:pPr indent="0" marL="0">
+            <a:pPr marL="0" indent="0">
               <a:buNone/>
             </a:pPr>
             <a:r>
@@ -15010,7 +15359,7 @@
           <a:bodyPr wrap="square" lIns="0" tIns="0" rIns="0" bIns="0" rtlCol="0" anchor="ctr"/>
           <a:lstStyle/>
           <a:p>
-            <a:pPr indent="0" marL="0">
+            <a:pPr marL="0" indent="0">
               <a:buNone/>
             </a:pPr>
             <a:r>
@@ -15052,13 +15401,20 @@
             <a:prstDash val="solid"/>
           </a:ln>
           <a:effectLst>
-            <a:outerShdw sx="100000" sy="100000" kx="0" ky="0" algn="bl" rotWithShape="0" blurRad="101600" dist="12700" dir="5400000">
+            <a:outerShdw blurRad="101600" dist="12700" dir="5400000" algn="bl" rotWithShape="0">
               <a:srgbClr val="94A3B8">
                 <a:alpha val="12000"/>
               </a:srgbClr>
             </a:outerShdw>
           </a:effectLst>
         </p:spPr>
+        <p:txBody>
+          <a:bodyPr/>
+          <a:lstStyle/>
+          <a:p>
+            <a:endParaRPr lang="en-US"/>
+          </a:p>
+        </p:txBody>
       </p:sp>
       <p:sp>
         <p:nvSpPr>
@@ -15084,6 +15440,13 @@
             <a:prstDash val="solid"/>
           </a:ln>
         </p:spPr>
+        <p:txBody>
+          <a:bodyPr/>
+          <a:lstStyle/>
+          <a:p>
+            <a:endParaRPr lang="en-US"/>
+          </a:p>
+        </p:txBody>
       </p:sp>
       <p:sp>
         <p:nvSpPr>
@@ -15109,6 +15472,13 @@
             <a:prstDash val="solid"/>
           </a:ln>
         </p:spPr>
+        <p:txBody>
+          <a:bodyPr/>
+          <a:lstStyle/>
+          <a:p>
+            <a:endParaRPr lang="en-US"/>
+          </a:p>
+        </p:txBody>
       </p:sp>
       <p:sp>
         <p:nvSpPr>
@@ -15131,7 +15501,7 @@
           <a:bodyPr wrap="square" lIns="0" tIns="0" rIns="0" bIns="0" rtlCol="0" anchor="ctr"/>
           <a:lstStyle/>
           <a:p>
-            <a:pPr algn="ctr" indent="0" marL="0">
+            <a:pPr marL="0" indent="0" algn="ctr">
               <a:buNone/>
             </a:pPr>
             <a:r>
@@ -15170,7 +15540,7 @@
           <a:bodyPr wrap="square" lIns="0" tIns="0" rIns="0" bIns="0" rtlCol="0" anchor="ctr"/>
           <a:lstStyle/>
           <a:p>
-            <a:pPr indent="0" marL="0">
+            <a:pPr marL="0" indent="0">
               <a:buNone/>
             </a:pPr>
             <a:r>
@@ -15209,7 +15579,7 @@
           <a:bodyPr wrap="square" lIns="0" tIns="0" rIns="0" bIns="0" rtlCol="0" anchor="ctr"/>
           <a:lstStyle/>
           <a:p>
-            <a:pPr indent="0" marL="0">
+            <a:pPr marL="0" indent="0">
               <a:buNone/>
             </a:pPr>
             <a:r>
@@ -15248,7 +15618,7 @@
           <a:bodyPr wrap="square" lIns="0" tIns="0" rIns="0" bIns="0" rtlCol="0" anchor="ctr"/>
           <a:lstStyle/>
           <a:p>
-            <a:pPr algn="l" indent="0" marL="0">
+            <a:pPr marL="0" indent="0" algn="l">
               <a:buNone/>
             </a:pPr>
             <a:r>
@@ -15287,7 +15657,7 @@
           <a:bodyPr wrap="square" lIns="0" tIns="0" rIns="0" bIns="0" rtlCol="0" anchor="ctr"/>
           <a:lstStyle/>
           <a:p>
-            <a:pPr algn="r" indent="0" marL="0">
+            <a:pPr marL="0" indent="0" algn="r">
               <a:buNone/>
             </a:pPr>
             <a:r>
@@ -15321,6 +15691,7 @@
         <a:solidFill>
           <a:srgbClr val="FFFFFF"/>
         </a:solidFill>
+        <a:effectLst/>
       </p:bgPr>
     </p:bg>
     <p:spTree>
@@ -15358,11 +15729,11 @@
           <a:bodyPr wrap="square" lIns="0" tIns="0" rIns="0" bIns="0" rtlCol="0" anchor="ctr"/>
           <a:lstStyle/>
           <a:p>
-            <a:pPr indent="0" marL="0">
-              <a:buNone/>
-            </a:pPr>
-            <a:r>
-              <a:rPr lang="en-US" sz="1100" b="1" spc="400" kern="0" dirty="0">
+            <a:pPr marL="0" indent="0">
+              <a:buNone/>
+            </a:pPr>
+            <a:r>
+              <a:rPr lang="en-US" sz="1100" b="1" kern="0" spc="400" dirty="0">
                 <a:solidFill>
                   <a:srgbClr val="1C7293"/>
                 </a:solidFill>
@@ -15397,7 +15768,7 @@
           <a:bodyPr wrap="square" lIns="0" tIns="0" rIns="0" bIns="0" rtlCol="0" anchor="ctr"/>
           <a:lstStyle/>
           <a:p>
-            <a:pPr indent="0" marL="0">
+            <a:pPr marL="0" indent="0">
               <a:buNone/>
             </a:pPr>
             <a:r>
@@ -15436,7 +15807,7 @@
           <a:bodyPr wrap="square" lIns="0" tIns="0" rIns="0" bIns="0" rtlCol="0" anchor="ctr"/>
           <a:lstStyle/>
           <a:p>
-            <a:pPr indent="0" marL="0">
+            <a:pPr marL="0" indent="0">
               <a:buNone/>
             </a:pPr>
             <a:r>
@@ -15450,9 +15821,6 @@
               </a:rPr>
               <a:t>Die </a:t>
             </a:r>
-            <a:pPr indent="0" marL="0">
-              <a:buNone/>
-            </a:pPr>
             <a:r>
               <a:rPr lang="en-US" sz="1600" b="1" dirty="0">
                 <a:solidFill>
@@ -15464,9 +15832,6 @@
               </a:rPr>
               <a:t>15-Minuten-Stadt</a:t>
             </a:r>
-            <a:pPr indent="0" marL="0">
-              <a:buNone/>
-            </a:pPr>
             <a:r>
               <a:rPr lang="en-US" sz="1600" dirty="0">
                 <a:solidFill>
@@ -15478,9 +15843,6 @@
               </a:rPr>
               <a:t> (Moreno 2021) ist in der Stadtplanung etabliert und gewinnt zunehmend </a:t>
             </a:r>
-            <a:pPr indent="0" marL="0">
-              <a:buNone/>
-            </a:pPr>
             <a:r>
               <a:rPr lang="en-US" sz="1600" b="1" dirty="0">
                 <a:solidFill>
@@ -15492,9 +15854,6 @@
               </a:rPr>
               <a:t>Relevanz als Wertfaktor</a:t>
             </a:r>
-            <a:pPr indent="0" marL="0">
-              <a:buNone/>
-            </a:pPr>
             <a:r>
               <a:rPr lang="en-US" sz="1600" dirty="0">
                 <a:solidFill>
@@ -15534,13 +15893,20 @@
             <a:prstDash val="solid"/>
           </a:ln>
           <a:effectLst>
-            <a:outerShdw sx="100000" sy="100000" kx="0" ky="0" algn="bl" rotWithShape="0" blurRad="101600" dist="12700" dir="5400000">
+            <a:outerShdw blurRad="101600" dist="12700" dir="5400000" algn="bl" rotWithShape="0">
               <a:srgbClr val="94A3B8">
                 <a:alpha val="12000"/>
               </a:srgbClr>
             </a:outerShdw>
           </a:effectLst>
         </p:spPr>
+        <p:txBody>
+          <a:bodyPr/>
+          <a:lstStyle/>
+          <a:p>
+            <a:endParaRPr lang="en-US"/>
+          </a:p>
+        </p:txBody>
       </p:sp>
       <p:sp>
         <p:nvSpPr>
@@ -15566,6 +15932,13 @@
             <a:prstDash val="solid"/>
           </a:ln>
         </p:spPr>
+        <p:txBody>
+          <a:bodyPr/>
+          <a:lstStyle/>
+          <a:p>
+            <a:endParaRPr lang="en-US"/>
+          </a:p>
+        </p:txBody>
       </p:sp>
       <p:sp>
         <p:nvSpPr>
@@ -15588,7 +15961,7 @@
           <a:bodyPr wrap="square" lIns="0" tIns="0" rIns="0" bIns="0" rtlCol="0" anchor="b"/>
           <a:lstStyle/>
           <a:p>
-            <a:pPr algn="ctr" indent="0" marL="0">
+            <a:pPr marL="0" indent="0" algn="ctr">
               <a:buNone/>
             </a:pPr>
             <a:r>
@@ -15627,7 +16000,7 @@
           <a:bodyPr wrap="square" lIns="0" tIns="0" rIns="0" bIns="0" rtlCol="0" anchor="t"/>
           <a:lstStyle/>
           <a:p>
-            <a:pPr algn="ctr" indent="0" marL="0">
+            <a:pPr marL="0" indent="0" algn="ctr">
               <a:buNone/>
             </a:pPr>
             <a:endParaRPr lang="en-US" sz="1100" dirty="0"/>
@@ -15655,7 +16028,7 @@
           <a:bodyPr wrap="square" lIns="0" tIns="0" rIns="0" bIns="0" rtlCol="0" anchor="ctr"/>
           <a:lstStyle/>
           <a:p>
-            <a:pPr algn="ctr" indent="0" marL="0">
+            <a:pPr marL="0" indent="0" algn="ctr">
               <a:buNone/>
             </a:pPr>
             <a:r>
@@ -15697,13 +16070,20 @@
             <a:prstDash val="solid"/>
           </a:ln>
           <a:effectLst>
-            <a:outerShdw sx="100000" sy="100000" kx="0" ky="0" algn="bl" rotWithShape="0" blurRad="101600" dist="12700" dir="5400000">
+            <a:outerShdw blurRad="101600" dist="12700" dir="5400000" algn="bl" rotWithShape="0">
               <a:srgbClr val="94A3B8">
                 <a:alpha val="12000"/>
               </a:srgbClr>
             </a:outerShdw>
           </a:effectLst>
         </p:spPr>
+        <p:txBody>
+          <a:bodyPr/>
+          <a:lstStyle/>
+          <a:p>
+            <a:endParaRPr lang="en-US"/>
+          </a:p>
+        </p:txBody>
       </p:sp>
       <p:sp>
         <p:nvSpPr>
@@ -15729,6 +16109,13 @@
             <a:prstDash val="solid"/>
           </a:ln>
         </p:spPr>
+        <p:txBody>
+          <a:bodyPr/>
+          <a:lstStyle/>
+          <a:p>
+            <a:endParaRPr lang="en-US"/>
+          </a:p>
+        </p:txBody>
       </p:sp>
       <p:sp>
         <p:nvSpPr>
@@ -15751,7 +16138,7 @@
           <a:bodyPr wrap="square" lIns="0" tIns="0" rIns="0" bIns="0" rtlCol="0" anchor="b"/>
           <a:lstStyle/>
           <a:p>
-            <a:pPr algn="ctr" indent="0" marL="0">
+            <a:pPr marL="0" indent="0" algn="ctr">
               <a:buNone/>
             </a:pPr>
             <a:r>
@@ -15790,7 +16177,7 @@
           <a:bodyPr wrap="square" lIns="0" tIns="0" rIns="0" bIns="0" rtlCol="0" anchor="t"/>
           <a:lstStyle/>
           <a:p>
-            <a:pPr algn="ctr" indent="0" marL="0">
+            <a:pPr marL="0" indent="0" algn="ctr">
               <a:buNone/>
             </a:pPr>
             <a:endParaRPr lang="en-US" sz="1100" dirty="0"/>
@@ -15818,7 +16205,7 @@
           <a:bodyPr wrap="square" lIns="0" tIns="0" rIns="0" bIns="0" rtlCol="0" anchor="ctr"/>
           <a:lstStyle/>
           <a:p>
-            <a:pPr algn="ctr" indent="0" marL="0">
+            <a:pPr marL="0" indent="0" algn="ctr">
               <a:buNone/>
             </a:pPr>
             <a:r>
@@ -15860,13 +16247,20 @@
             <a:prstDash val="solid"/>
           </a:ln>
           <a:effectLst>
-            <a:outerShdw sx="100000" sy="100000" kx="0" ky="0" algn="bl" rotWithShape="0" blurRad="101600" dist="12700" dir="5400000">
+            <a:outerShdw blurRad="101600" dist="12700" dir="5400000" algn="bl" rotWithShape="0">
               <a:srgbClr val="94A3B8">
                 <a:alpha val="12000"/>
               </a:srgbClr>
             </a:outerShdw>
           </a:effectLst>
         </p:spPr>
+        <p:txBody>
+          <a:bodyPr/>
+          <a:lstStyle/>
+          <a:p>
+            <a:endParaRPr lang="en-US"/>
+          </a:p>
+        </p:txBody>
       </p:sp>
       <p:sp>
         <p:nvSpPr>
@@ -15892,6 +16286,13 @@
             <a:prstDash val="solid"/>
           </a:ln>
         </p:spPr>
+        <p:txBody>
+          <a:bodyPr/>
+          <a:lstStyle/>
+          <a:p>
+            <a:endParaRPr lang="en-US"/>
+          </a:p>
+        </p:txBody>
       </p:sp>
       <p:sp>
         <p:nvSpPr>
@@ -15914,7 +16315,7 @@
           <a:bodyPr wrap="square" lIns="0" tIns="0" rIns="0" bIns="0" rtlCol="0" anchor="b"/>
           <a:lstStyle/>
           <a:p>
-            <a:pPr algn="ctr" indent="0" marL="0">
+            <a:pPr marL="0" indent="0" algn="ctr">
               <a:buNone/>
             </a:pPr>
             <a:r>
@@ -15953,7 +16354,7 @@
           <a:bodyPr wrap="square" lIns="0" tIns="0" rIns="0" bIns="0" rtlCol="0" anchor="t"/>
           <a:lstStyle/>
           <a:p>
-            <a:pPr algn="ctr" indent="0" marL="0">
+            <a:pPr marL="0" indent="0" algn="ctr">
               <a:buNone/>
             </a:pPr>
             <a:endParaRPr lang="en-US" sz="1100" dirty="0"/>
@@ -15981,7 +16382,7 @@
           <a:bodyPr wrap="square" lIns="0" tIns="0" rIns="0" bIns="0" rtlCol="0" anchor="ctr"/>
           <a:lstStyle/>
           <a:p>
-            <a:pPr algn="ctr" indent="0" marL="0">
+            <a:pPr marL="0" indent="0" algn="ctr">
               <a:buNone/>
             </a:pPr>
             <a:r>
@@ -16020,7 +16421,7 @@
           <a:bodyPr wrap="square" lIns="0" tIns="0" rIns="0" bIns="0" rtlCol="0" anchor="ctr"/>
           <a:lstStyle/>
           <a:p>
-            <a:pPr algn="r" indent="0" marL="0">
+            <a:pPr marL="0" indent="0" algn="r">
               <a:buNone/>
             </a:pPr>
             <a:r>
@@ -16054,6 +16455,7 @@
         <a:solidFill>
           <a:srgbClr val="FFFFFF"/>
         </a:solidFill>
+        <a:effectLst/>
       </p:bgPr>
     </p:bg>
     <p:spTree>
@@ -16091,11 +16493,11 @@
           <a:bodyPr wrap="square" lIns="0" tIns="0" rIns="0" bIns="0" rtlCol="0" anchor="ctr"/>
           <a:lstStyle/>
           <a:p>
-            <a:pPr indent="0" marL="0">
-              <a:buNone/>
-            </a:pPr>
-            <a:r>
-              <a:rPr lang="en-US" sz="1100" b="1" spc="400" kern="0" dirty="0">
+            <a:pPr marL="0" indent="0">
+              <a:buNone/>
+            </a:pPr>
+            <a:r>
+              <a:rPr lang="en-US" sz="1100" b="1" kern="0" spc="400" dirty="0">
                 <a:solidFill>
                   <a:srgbClr val="1C7293"/>
                 </a:solidFill>
@@ -16130,7 +16532,7 @@
           <a:bodyPr wrap="square" lIns="0" tIns="0" rIns="0" bIns="0" rtlCol="0" anchor="ctr"/>
           <a:lstStyle/>
           <a:p>
-            <a:pPr indent="0" marL="0">
+            <a:pPr marL="0" indent="0">
               <a:buNone/>
             </a:pPr>
             <a:r>
@@ -16172,13 +16574,20 @@
             <a:prstDash val="solid"/>
           </a:ln>
           <a:effectLst>
-            <a:outerShdw sx="100000" sy="100000" kx="0" ky="0" algn="bl" rotWithShape="0" blurRad="101600" dist="12700" dir="5400000">
+            <a:outerShdw blurRad="101600" dist="12700" dir="5400000" algn="bl" rotWithShape="0">
               <a:srgbClr val="94A3B8">
                 <a:alpha val="12000"/>
               </a:srgbClr>
             </a:outerShdw>
           </a:effectLst>
         </p:spPr>
+        <p:txBody>
+          <a:bodyPr/>
+          <a:lstStyle/>
+          <a:p>
+            <a:endParaRPr lang="en-US"/>
+          </a:p>
+        </p:txBody>
       </p:sp>
       <p:sp>
         <p:nvSpPr>
@@ -16204,6 +16613,13 @@
             <a:prstDash val="solid"/>
           </a:ln>
         </p:spPr>
+        <p:txBody>
+          <a:bodyPr/>
+          <a:lstStyle/>
+          <a:p>
+            <a:endParaRPr lang="en-US"/>
+          </a:p>
+        </p:txBody>
       </p:sp>
       <p:sp>
         <p:nvSpPr>
@@ -16226,7 +16642,7 @@
           <a:bodyPr wrap="square" lIns="0" tIns="0" rIns="0" bIns="0" rtlCol="0" anchor="ctr"/>
           <a:lstStyle/>
           <a:p>
-            <a:pPr indent="0" marL="0">
+            <a:pPr marL="0" indent="0">
               <a:buNone/>
             </a:pPr>
             <a:r>
@@ -16265,7 +16681,7 @@
           <a:bodyPr wrap="square" lIns="0" tIns="0" rIns="0" bIns="0" rtlCol="0" anchor="ctr"/>
           <a:lstStyle/>
           <a:p>
-            <a:pPr indent="0" marL="0">
+            <a:pPr marL="0" indent="0">
               <a:buNone/>
             </a:pPr>
             <a:r>
@@ -16307,13 +16723,20 @@
             <a:prstDash val="solid"/>
           </a:ln>
           <a:effectLst>
-            <a:outerShdw sx="100000" sy="100000" kx="0" ky="0" algn="bl" rotWithShape="0" blurRad="101600" dist="12700" dir="5400000">
+            <a:outerShdw blurRad="101600" dist="12700" dir="5400000" algn="bl" rotWithShape="0">
               <a:srgbClr val="94A3B8">
                 <a:alpha val="12000"/>
               </a:srgbClr>
             </a:outerShdw>
           </a:effectLst>
         </p:spPr>
+        <p:txBody>
+          <a:bodyPr/>
+          <a:lstStyle/>
+          <a:p>
+            <a:endParaRPr lang="en-US"/>
+          </a:p>
+        </p:txBody>
       </p:sp>
       <p:sp>
         <p:nvSpPr>
@@ -16339,6 +16762,13 @@
             <a:prstDash val="solid"/>
           </a:ln>
         </p:spPr>
+        <p:txBody>
+          <a:bodyPr/>
+          <a:lstStyle/>
+          <a:p>
+            <a:endParaRPr lang="en-US"/>
+          </a:p>
+        </p:txBody>
       </p:sp>
       <p:sp>
         <p:nvSpPr>
@@ -16361,7 +16791,7 @@
           <a:bodyPr wrap="square" lIns="0" tIns="0" rIns="0" bIns="0" rtlCol="0" anchor="ctr"/>
           <a:lstStyle/>
           <a:p>
-            <a:pPr indent="0" marL="0">
+            <a:pPr marL="0" indent="0">
               <a:buNone/>
             </a:pPr>
             <a:r>
@@ -16400,7 +16830,7 @@
           <a:bodyPr wrap="square" lIns="0" tIns="0" rIns="0" bIns="0" rtlCol="0" anchor="ctr"/>
           <a:lstStyle/>
           <a:p>
-            <a:pPr indent="0" marL="0">
+            <a:pPr marL="0" indent="0">
               <a:buNone/>
             </a:pPr>
             <a:r>
@@ -16439,7 +16869,7 @@
           <a:bodyPr wrap="square" lIns="0" tIns="0" rIns="0" bIns="0" rtlCol="0" anchor="ctr"/>
           <a:lstStyle/>
           <a:p>
-            <a:pPr algn="r" indent="0" marL="0">
+            <a:pPr marL="0" indent="0" algn="r">
               <a:buNone/>
             </a:pPr>
             <a:r>
@@ -16473,6 +16903,7 @@
         <a:solidFill>
           <a:srgbClr val="FFFFFF"/>
         </a:solidFill>
+        <a:effectLst/>
       </p:bgPr>
     </p:bg>
     <p:spTree>
@@ -16510,11 +16941,11 @@
           <a:bodyPr wrap="square" lIns="0" tIns="0" rIns="0" bIns="0" rtlCol="0" anchor="ctr"/>
           <a:lstStyle/>
           <a:p>
-            <a:pPr indent="0" marL="0">
-              <a:buNone/>
-            </a:pPr>
-            <a:r>
-              <a:rPr lang="en-US" sz="1100" b="1" spc="400" kern="0" dirty="0">
+            <a:pPr marL="0" indent="0">
+              <a:buNone/>
+            </a:pPr>
+            <a:r>
+              <a:rPr lang="en-US" sz="1100" b="1" kern="0" spc="400" dirty="0">
                 <a:solidFill>
                   <a:srgbClr val="1C7293"/>
                 </a:solidFill>
@@ -16549,7 +16980,7 @@
           <a:bodyPr wrap="square" lIns="0" tIns="0" rIns="0" bIns="0" rtlCol="0" anchor="ctr"/>
           <a:lstStyle/>
           <a:p>
-            <a:pPr indent="0" marL="0">
+            <a:pPr marL="0" indent="0">
               <a:buNone/>
             </a:pPr>
             <a:r>
@@ -16591,13 +17022,20 @@
             <a:prstDash val="solid"/>
           </a:ln>
           <a:effectLst>
-            <a:outerShdw sx="100000" sy="100000" kx="0" ky="0" algn="bl" rotWithShape="0" blurRad="101600" dist="12700" dir="5400000">
+            <a:outerShdw blurRad="101600" dist="12700" dir="5400000" algn="bl" rotWithShape="0">
               <a:srgbClr val="94A3B8">
                 <a:alpha val="12000"/>
               </a:srgbClr>
             </a:outerShdw>
           </a:effectLst>
         </p:spPr>
+        <p:txBody>
+          <a:bodyPr/>
+          <a:lstStyle/>
+          <a:p>
+            <a:endParaRPr lang="en-US"/>
+          </a:p>
+        </p:txBody>
       </p:sp>
       <p:sp>
         <p:nvSpPr>
@@ -16623,6 +17061,13 @@
             <a:prstDash val="solid"/>
           </a:ln>
         </p:spPr>
+        <p:txBody>
+          <a:bodyPr/>
+          <a:lstStyle/>
+          <a:p>
+            <a:endParaRPr lang="en-US"/>
+          </a:p>
+        </p:txBody>
       </p:sp>
       <p:sp>
         <p:nvSpPr>
@@ -16648,6 +17093,13 @@
             <a:prstDash val="solid"/>
           </a:ln>
         </p:spPr>
+        <p:txBody>
+          <a:bodyPr/>
+          <a:lstStyle/>
+          <a:p>
+            <a:endParaRPr lang="en-US"/>
+          </a:p>
+        </p:txBody>
       </p:sp>
       <p:sp>
         <p:nvSpPr>
@@ -16670,7 +17122,7 @@
           <a:bodyPr wrap="square" lIns="0" tIns="0" rIns="0" bIns="0" rtlCol="0" anchor="ctr"/>
           <a:lstStyle/>
           <a:p>
-            <a:pPr algn="ctr" indent="0" marL="0">
+            <a:pPr marL="0" indent="0" algn="ctr">
               <a:buNone/>
             </a:pPr>
             <a:r>
@@ -16709,7 +17161,7 @@
           <a:bodyPr wrap="square" lIns="0" tIns="0" rIns="0" bIns="0" rtlCol="0" anchor="ctr"/>
           <a:lstStyle/>
           <a:p>
-            <a:pPr indent="0" marL="0">
+            <a:pPr marL="0" indent="0">
               <a:buNone/>
             </a:pPr>
             <a:r>
@@ -16748,7 +17200,7 @@
           <a:bodyPr wrap="square" lIns="0" tIns="0" rIns="0" bIns="0" rtlCol="0" anchor="ctr"/>
           <a:lstStyle/>
           <a:p>
-            <a:pPr indent="0" marL="0">
+            <a:pPr marL="0" indent="0">
               <a:buNone/>
             </a:pPr>
             <a:r>
@@ -16787,7 +17239,7 @@
           <a:bodyPr wrap="square" lIns="0" tIns="0" rIns="0" bIns="0" rtlCol="0" anchor="ctr"/>
           <a:lstStyle/>
           <a:p>
-            <a:pPr indent="0" marL="0">
+            <a:pPr marL="0" indent="0">
               <a:buNone/>
             </a:pPr>
             <a:r>
@@ -16829,13 +17281,20 @@
             <a:prstDash val="solid"/>
           </a:ln>
           <a:effectLst>
-            <a:outerShdw sx="100000" sy="100000" kx="0" ky="0" algn="bl" rotWithShape="0" blurRad="101600" dist="12700" dir="5400000">
+            <a:outerShdw blurRad="101600" dist="12700" dir="5400000" algn="bl" rotWithShape="0">
               <a:srgbClr val="94A3B8">
                 <a:alpha val="12000"/>
               </a:srgbClr>
             </a:outerShdw>
           </a:effectLst>
         </p:spPr>
+        <p:txBody>
+          <a:bodyPr/>
+          <a:lstStyle/>
+          <a:p>
+            <a:endParaRPr lang="en-US"/>
+          </a:p>
+        </p:txBody>
       </p:sp>
       <p:sp>
         <p:nvSpPr>
@@ -16861,6 +17320,13 @@
             <a:prstDash val="solid"/>
           </a:ln>
         </p:spPr>
+        <p:txBody>
+          <a:bodyPr/>
+          <a:lstStyle/>
+          <a:p>
+            <a:endParaRPr lang="en-US"/>
+          </a:p>
+        </p:txBody>
       </p:sp>
       <p:sp>
         <p:nvSpPr>
@@ -16886,6 +17352,13 @@
             <a:prstDash val="solid"/>
           </a:ln>
         </p:spPr>
+        <p:txBody>
+          <a:bodyPr/>
+          <a:lstStyle/>
+          <a:p>
+            <a:endParaRPr lang="en-US"/>
+          </a:p>
+        </p:txBody>
       </p:sp>
       <p:sp>
         <p:nvSpPr>
@@ -16908,7 +17381,7 @@
           <a:bodyPr wrap="square" lIns="0" tIns="0" rIns="0" bIns="0" rtlCol="0" anchor="ctr"/>
           <a:lstStyle/>
           <a:p>
-            <a:pPr algn="ctr" indent="0" marL="0">
+            <a:pPr marL="0" indent="0" algn="ctr">
               <a:buNone/>
             </a:pPr>
             <a:r>
@@ -16947,7 +17420,7 @@
           <a:bodyPr wrap="square" lIns="0" tIns="0" rIns="0" bIns="0" rtlCol="0" anchor="ctr"/>
           <a:lstStyle/>
           <a:p>
-            <a:pPr indent="0" marL="0">
+            <a:pPr marL="0" indent="0">
               <a:buNone/>
             </a:pPr>
             <a:r>
@@ -16986,7 +17459,7 @@
           <a:bodyPr wrap="square" lIns="0" tIns="0" rIns="0" bIns="0" rtlCol="0" anchor="ctr"/>
           <a:lstStyle/>
           <a:p>
-            <a:pPr indent="0" marL="0">
+            <a:pPr marL="0" indent="0">
               <a:buNone/>
             </a:pPr>
             <a:r>
@@ -17025,7 +17498,7 @@
           <a:bodyPr wrap="square" lIns="0" tIns="0" rIns="0" bIns="0" rtlCol="0" anchor="ctr"/>
           <a:lstStyle/>
           <a:p>
-            <a:pPr indent="0" marL="0">
+            <a:pPr marL="0" indent="0">
               <a:buNone/>
             </a:pPr>
             <a:r>
@@ -17067,13 +17540,20 @@
             <a:prstDash val="solid"/>
           </a:ln>
           <a:effectLst>
-            <a:outerShdw sx="100000" sy="100000" kx="0" ky="0" algn="bl" rotWithShape="0" blurRad="101600" dist="12700" dir="5400000">
+            <a:outerShdw blurRad="101600" dist="12700" dir="5400000" algn="bl" rotWithShape="0">
               <a:srgbClr val="94A3B8">
                 <a:alpha val="12000"/>
               </a:srgbClr>
             </a:outerShdw>
           </a:effectLst>
         </p:spPr>
+        <p:txBody>
+          <a:bodyPr/>
+          <a:lstStyle/>
+          <a:p>
+            <a:endParaRPr lang="en-US"/>
+          </a:p>
+        </p:txBody>
       </p:sp>
       <p:sp>
         <p:nvSpPr>
@@ -17099,6 +17579,13 @@
             <a:prstDash val="solid"/>
           </a:ln>
         </p:spPr>
+        <p:txBody>
+          <a:bodyPr/>
+          <a:lstStyle/>
+          <a:p>
+            <a:endParaRPr lang="en-US"/>
+          </a:p>
+        </p:txBody>
       </p:sp>
       <p:sp>
         <p:nvSpPr>
@@ -17124,6 +17611,13 @@
             <a:prstDash val="solid"/>
           </a:ln>
         </p:spPr>
+        <p:txBody>
+          <a:bodyPr/>
+          <a:lstStyle/>
+          <a:p>
+            <a:endParaRPr lang="en-US"/>
+          </a:p>
+        </p:txBody>
       </p:sp>
       <p:sp>
         <p:nvSpPr>
@@ -17146,7 +17640,7 @@
           <a:bodyPr wrap="square" lIns="0" tIns="0" rIns="0" bIns="0" rtlCol="0" anchor="ctr"/>
           <a:lstStyle/>
           <a:p>
-            <a:pPr algn="ctr" indent="0" marL="0">
+            <a:pPr marL="0" indent="0" algn="ctr">
               <a:buNone/>
             </a:pPr>
             <a:r>
@@ -17185,7 +17679,7 @@
           <a:bodyPr wrap="square" lIns="0" tIns="0" rIns="0" bIns="0" rtlCol="0" anchor="ctr"/>
           <a:lstStyle/>
           <a:p>
-            <a:pPr indent="0" marL="0">
+            <a:pPr marL="0" indent="0">
               <a:buNone/>
             </a:pPr>
             <a:r>
@@ -17224,7 +17718,7 @@
           <a:bodyPr wrap="square" lIns="0" tIns="0" rIns="0" bIns="0" rtlCol="0" anchor="ctr"/>
           <a:lstStyle/>
           <a:p>
-            <a:pPr indent="0" marL="0">
+            <a:pPr marL="0" indent="0">
               <a:buNone/>
             </a:pPr>
             <a:r>
@@ -17263,7 +17757,7 @@
           <a:bodyPr wrap="square" lIns="0" tIns="0" rIns="0" bIns="0" rtlCol="0" anchor="ctr"/>
           <a:lstStyle/>
           <a:p>
-            <a:pPr indent="0" marL="0">
+            <a:pPr marL="0" indent="0">
               <a:buNone/>
             </a:pPr>
             <a:r>
@@ -17302,7 +17796,7 @@
           <a:bodyPr wrap="square" lIns="0" tIns="0" rIns="0" bIns="0" rtlCol="0" anchor="ctr"/>
           <a:lstStyle/>
           <a:p>
-            <a:pPr algn="r" indent="0" marL="0">
+            <a:pPr marL="0" indent="0" algn="r">
               <a:buNone/>
             </a:pPr>
             <a:r>
@@ -17336,6 +17830,7 @@
         <a:solidFill>
           <a:srgbClr val="FFFFFF"/>
         </a:solidFill>
+        <a:effectLst/>
       </p:bgPr>
     </p:bg>
     <p:spTree>
@@ -17373,11 +17868,11 @@
           <a:bodyPr wrap="square" lIns="0" tIns="0" rIns="0" bIns="0" rtlCol="0" anchor="ctr"/>
           <a:lstStyle/>
           <a:p>
-            <a:pPr indent="0" marL="0">
-              <a:buNone/>
-            </a:pPr>
-            <a:r>
-              <a:rPr lang="en-US" sz="1100" b="1" spc="400" kern="0" dirty="0">
+            <a:pPr marL="0" indent="0">
+              <a:buNone/>
+            </a:pPr>
+            <a:r>
+              <a:rPr lang="en-US" sz="1100" b="1" kern="0" spc="400" dirty="0">
                 <a:solidFill>
                   <a:srgbClr val="1C7293"/>
                 </a:solidFill>
@@ -17412,7 +17907,7 @@
           <a:bodyPr wrap="square" lIns="0" tIns="0" rIns="0" bIns="0" rtlCol="0" anchor="ctr"/>
           <a:lstStyle/>
           <a:p>
-            <a:pPr indent="0" marL="0">
+            <a:pPr marL="0" indent="0">
               <a:buNone/>
             </a:pPr>
             <a:r>
@@ -17446,16 +17941,34 @@
         </p:nvGraphicFramePr>
         <p:xfrm>
           <a:off x="457200" y="1554480"/>
-          <a:ext cx="8229600" cy="914400"/>
+          <a:ext cx="8229600" cy="3456432"/>
         </p:xfrm>
         <a:graphic>
           <a:graphicData uri="http://schemas.openxmlformats.org/drawingml/2006/table">
             <a:tbl>
               <a:tblPr/>
               <a:tblGrid>
-                <a:gridCol w="3108960"/>
-                <a:gridCol w="3657600"/>
-                <a:gridCol w="1463040"/>
+                <a:gridCol w="3108960">
+                  <a:extLst>
+                    <a:ext uri="{9D8B030D-6E8A-4147-A177-3AD203B41FA5}">
+                      <a16:colId xmlns:a16="http://schemas.microsoft.com/office/drawing/2014/main" val="20000"/>
+                    </a:ext>
+                  </a:extLst>
+                </a:gridCol>
+                <a:gridCol w="3657600">
+                  <a:extLst>
+                    <a:ext uri="{9D8B030D-6E8A-4147-A177-3AD203B41FA5}">
+                      <a16:colId xmlns:a16="http://schemas.microsoft.com/office/drawing/2014/main" val="20001"/>
+                    </a:ext>
+                  </a:extLst>
+                </a:gridCol>
+                <a:gridCol w="1463040">
+                  <a:extLst>
+                    <a:ext uri="{9D8B030D-6E8A-4147-A177-3AD203B41FA5}">
+                      <a16:colId xmlns:a16="http://schemas.microsoft.com/office/drawing/2014/main" val="20002"/>
+                    </a:ext>
+                  </a:extLst>
+                </a:gridCol>
               </a:tblGrid>
               <a:tr h="384048">
                 <a:tc>
@@ -17463,7 +17976,7 @@
                     <a:bodyPr/>
                     <a:lstStyle/>
                     <a:p>
-                      <a:pPr algn="l" indent="0" marL="0">
+                      <a:pPr marL="0" indent="0" algn="l">
                         <a:buNone/>
                       </a:pPr>
                       <a:r>
@@ -17484,7 +17997,7 @@
                       </a:endParaRPr>
                     </a:p>
                   </a:txBody>
-                  <a:tcPr marL="91440" marR="91440" marT="45720" marB="45720">
+                  <a:tcPr>
                     <a:lnL w="6350" cap="flat" cmpd="sng" algn="ctr">
                       <a:solidFill>
                         <a:srgbClr val="E2E8F0"/>
@@ -17531,7 +18044,7 @@
                     <a:bodyPr/>
                     <a:lstStyle/>
                     <a:p>
-                      <a:pPr algn="l" indent="0" marL="0">
+                      <a:pPr marL="0" indent="0" algn="l">
                         <a:buNone/>
                       </a:pPr>
                       <a:r>
@@ -17552,7 +18065,7 @@
                       </a:endParaRPr>
                     </a:p>
                   </a:txBody>
-                  <a:tcPr marL="91440" marR="91440" marT="45720" marB="45720">
+                  <a:tcPr>
                     <a:lnL w="6350" cap="flat" cmpd="sng" algn="ctr">
                       <a:solidFill>
                         <a:srgbClr val="E2E8F0"/>
@@ -17599,7 +18112,7 @@
                     <a:bodyPr/>
                     <a:lstStyle/>
                     <a:p>
-                      <a:pPr algn="l" indent="0" marL="0">
+                      <a:pPr marL="0" indent="0" algn="l">
                         <a:buNone/>
                       </a:pPr>
                       <a:r>
@@ -17620,7 +18133,7 @@
                       </a:endParaRPr>
                     </a:p>
                   </a:txBody>
-                  <a:tcPr marL="91440" marR="91440" marT="45720" marB="45720">
+                  <a:tcPr>
                     <a:lnL w="6350" cap="flat" cmpd="sng" algn="ctr">
                       <a:solidFill>
                         <a:srgbClr val="E2E8F0"/>
@@ -17662,6 +18175,11 @@
                     </a:solidFill>
                   </a:tcPr>
                 </a:tc>
+                <a:extLst>
+                  <a:ext uri="{0D108BD9-81ED-4DB2-BD59-A6C34878D82A}">
+                    <a16:rowId xmlns:a16="http://schemas.microsoft.com/office/drawing/2014/main" val="10000"/>
+                  </a:ext>
+                </a:extLst>
               </a:tr>
               <a:tr h="384048">
                 <a:tc>
@@ -17669,7 +18187,7 @@
                     <a:bodyPr/>
                     <a:lstStyle/>
                     <a:p>
-                      <a:pPr algn="l" indent="0" marL="0">
+                      <a:pPr marL="0" indent="0" algn="l">
                         <a:buNone/>
                       </a:pPr>
                       <a:r>
@@ -17690,7 +18208,7 @@
                       </a:endParaRPr>
                     </a:p>
                   </a:txBody>
-                  <a:tcPr marL="91440" marR="91440" marT="45720" marB="45720">
+                  <a:tcPr>
                     <a:lnL w="6350" cap="flat" cmpd="sng" algn="ctr">
                       <a:solidFill>
                         <a:srgbClr val="E2E8F0"/>
@@ -17737,7 +18255,7 @@
                     <a:bodyPr/>
                     <a:lstStyle/>
                     <a:p>
-                      <a:pPr algn="l" indent="0" marL="0">
+                      <a:pPr marL="0" indent="0" algn="l">
                         <a:buNone/>
                       </a:pPr>
                       <a:r>
@@ -17758,7 +18276,7 @@
                       </a:endParaRPr>
                     </a:p>
                   </a:txBody>
-                  <a:tcPr marL="91440" marR="91440" marT="45720" marB="45720">
+                  <a:tcPr>
                     <a:lnL w="6350" cap="flat" cmpd="sng" algn="ctr">
                       <a:solidFill>
                         <a:srgbClr val="E2E8F0"/>
@@ -17805,7 +18323,7 @@
                     <a:bodyPr/>
                     <a:lstStyle/>
                     <a:p>
-                      <a:pPr algn="l" indent="0" marL="0">
+                      <a:pPr marL="0" indent="0" algn="l">
                         <a:buNone/>
                       </a:pPr>
                       <a:r>
@@ -17826,7 +18344,7 @@
                       </a:endParaRPr>
                     </a:p>
                   </a:txBody>
-                  <a:tcPr marL="91440" marR="91440" marT="45720" marB="45720">
+                  <a:tcPr>
                     <a:lnL w="6350" cap="flat" cmpd="sng" algn="ctr">
                       <a:solidFill>
                         <a:srgbClr val="E2E8F0"/>
@@ -17868,6 +18386,11 @@
                     </a:solidFill>
                   </a:tcPr>
                 </a:tc>
+                <a:extLst>
+                  <a:ext uri="{0D108BD9-81ED-4DB2-BD59-A6C34878D82A}">
+                    <a16:rowId xmlns:a16="http://schemas.microsoft.com/office/drawing/2014/main" val="10001"/>
+                  </a:ext>
+                </a:extLst>
               </a:tr>
               <a:tr h="384048">
                 <a:tc>
@@ -17875,7 +18398,7 @@
                     <a:bodyPr/>
                     <a:lstStyle/>
                     <a:p>
-                      <a:pPr algn="l" indent="0" marL="0">
+                      <a:pPr marL="0" indent="0" algn="l">
                         <a:buNone/>
                       </a:pPr>
                       <a:r>
@@ -17896,7 +18419,7 @@
                       </a:endParaRPr>
                     </a:p>
                   </a:txBody>
-                  <a:tcPr marL="91440" marR="91440" marT="45720" marB="45720">
+                  <a:tcPr>
                     <a:lnL w="6350" cap="flat" cmpd="sng" algn="ctr">
                       <a:solidFill>
                         <a:srgbClr val="E2E8F0"/>
@@ -17943,7 +18466,7 @@
                     <a:bodyPr/>
                     <a:lstStyle/>
                     <a:p>
-                      <a:pPr algn="l" indent="0" marL="0">
+                      <a:pPr marL="0" indent="0" algn="l">
                         <a:buNone/>
                       </a:pPr>
                       <a:r>
@@ -17964,7 +18487,7 @@
                       </a:endParaRPr>
                     </a:p>
                   </a:txBody>
-                  <a:tcPr marL="91440" marR="91440" marT="45720" marB="45720">
+                  <a:tcPr>
                     <a:lnL w="6350" cap="flat" cmpd="sng" algn="ctr">
                       <a:solidFill>
                         <a:srgbClr val="E2E8F0"/>
@@ -18011,7 +18534,7 @@
                     <a:bodyPr/>
                     <a:lstStyle/>
                     <a:p>
-                      <a:pPr algn="l" indent="0" marL="0">
+                      <a:pPr marL="0" indent="0" algn="l">
                         <a:buNone/>
                       </a:pPr>
                       <a:r>
@@ -18032,7 +18555,7 @@
                       </a:endParaRPr>
                     </a:p>
                   </a:txBody>
-                  <a:tcPr marL="91440" marR="91440" marT="45720" marB="45720">
+                  <a:tcPr>
                     <a:lnL w="6350" cap="flat" cmpd="sng" algn="ctr">
                       <a:solidFill>
                         <a:srgbClr val="E2E8F0"/>
@@ -18074,6 +18597,11 @@
                     </a:solidFill>
                   </a:tcPr>
                 </a:tc>
+                <a:extLst>
+                  <a:ext uri="{0D108BD9-81ED-4DB2-BD59-A6C34878D82A}">
+                    <a16:rowId xmlns:a16="http://schemas.microsoft.com/office/drawing/2014/main" val="10002"/>
+                  </a:ext>
+                </a:extLst>
               </a:tr>
               <a:tr h="384048">
                 <a:tc>
@@ -18081,7 +18609,7 @@
                     <a:bodyPr/>
                     <a:lstStyle/>
                     <a:p>
-                      <a:pPr algn="l" indent="0" marL="0">
+                      <a:pPr marL="0" indent="0" algn="l">
                         <a:buNone/>
                       </a:pPr>
                       <a:r>
@@ -18102,7 +18630,7 @@
                       </a:endParaRPr>
                     </a:p>
                   </a:txBody>
-                  <a:tcPr marL="91440" marR="91440" marT="45720" marB="45720">
+                  <a:tcPr>
                     <a:lnL w="6350" cap="flat" cmpd="sng" algn="ctr">
                       <a:solidFill>
                         <a:srgbClr val="E2E8F0"/>
@@ -18149,7 +18677,7 @@
                     <a:bodyPr/>
                     <a:lstStyle/>
                     <a:p>
-                      <a:pPr algn="l" indent="0" marL="0">
+                      <a:pPr marL="0" indent="0" algn="l">
                         <a:buNone/>
                       </a:pPr>
                       <a:r>
@@ -18170,7 +18698,7 @@
                       </a:endParaRPr>
                     </a:p>
                   </a:txBody>
-                  <a:tcPr marL="91440" marR="91440" marT="45720" marB="45720">
+                  <a:tcPr>
                     <a:lnL w="6350" cap="flat" cmpd="sng" algn="ctr">
                       <a:solidFill>
                         <a:srgbClr val="E2E8F0"/>
@@ -18217,7 +18745,7 @@
                     <a:bodyPr/>
                     <a:lstStyle/>
                     <a:p>
-                      <a:pPr algn="l" indent="0" marL="0">
+                      <a:pPr marL="0" indent="0" algn="l">
                         <a:buNone/>
                       </a:pPr>
                       <a:r>
@@ -18238,7 +18766,7 @@
                       </a:endParaRPr>
                     </a:p>
                   </a:txBody>
-                  <a:tcPr marL="91440" marR="91440" marT="45720" marB="45720">
+                  <a:tcPr>
                     <a:lnL w="6350" cap="flat" cmpd="sng" algn="ctr">
                       <a:solidFill>
                         <a:srgbClr val="E2E8F0"/>
@@ -18280,6 +18808,11 @@
                     </a:solidFill>
                   </a:tcPr>
                 </a:tc>
+                <a:extLst>
+                  <a:ext uri="{0D108BD9-81ED-4DB2-BD59-A6C34878D82A}">
+                    <a16:rowId xmlns:a16="http://schemas.microsoft.com/office/drawing/2014/main" val="10003"/>
+                  </a:ext>
+                </a:extLst>
               </a:tr>
               <a:tr h="384048">
                 <a:tc>
@@ -18287,7 +18820,7 @@
                     <a:bodyPr/>
                     <a:lstStyle/>
                     <a:p>
-                      <a:pPr algn="l" indent="0" marL="0">
+                      <a:pPr marL="0" indent="0" algn="l">
                         <a:buNone/>
                       </a:pPr>
                       <a:r>
@@ -18308,7 +18841,7 @@
                       </a:endParaRPr>
                     </a:p>
                   </a:txBody>
-                  <a:tcPr marL="91440" marR="91440" marT="45720" marB="45720">
+                  <a:tcPr>
                     <a:lnL w="6350" cap="flat" cmpd="sng" algn="ctr">
                       <a:solidFill>
                         <a:srgbClr val="E2E8F0"/>
@@ -18355,7 +18888,7 @@
                     <a:bodyPr/>
                     <a:lstStyle/>
                     <a:p>
-                      <a:pPr algn="l" indent="0" marL="0">
+                      <a:pPr marL="0" indent="0" algn="l">
                         <a:buNone/>
                       </a:pPr>
                       <a:r>
@@ -18376,7 +18909,7 @@
                       </a:endParaRPr>
                     </a:p>
                   </a:txBody>
-                  <a:tcPr marL="91440" marR="91440" marT="45720" marB="45720">
+                  <a:tcPr>
                     <a:lnL w="6350" cap="flat" cmpd="sng" algn="ctr">
                       <a:solidFill>
                         <a:srgbClr val="E2E8F0"/>
@@ -18423,7 +18956,7 @@
                     <a:bodyPr/>
                     <a:lstStyle/>
                     <a:p>
-                      <a:pPr algn="l" indent="0" marL="0">
+                      <a:pPr marL="0" indent="0" algn="l">
                         <a:buNone/>
                       </a:pPr>
                       <a:r>
@@ -18444,7 +18977,7 @@
                       </a:endParaRPr>
                     </a:p>
                   </a:txBody>
-                  <a:tcPr marL="91440" marR="91440" marT="45720" marB="45720">
+                  <a:tcPr>
                     <a:lnL w="6350" cap="flat" cmpd="sng" algn="ctr">
                       <a:solidFill>
                         <a:srgbClr val="E2E8F0"/>
@@ -18486,6 +19019,11 @@
                     </a:solidFill>
                   </a:tcPr>
                 </a:tc>
+                <a:extLst>
+                  <a:ext uri="{0D108BD9-81ED-4DB2-BD59-A6C34878D82A}">
+                    <a16:rowId xmlns:a16="http://schemas.microsoft.com/office/drawing/2014/main" val="10004"/>
+                  </a:ext>
+                </a:extLst>
               </a:tr>
               <a:tr h="384048">
                 <a:tc>
@@ -18493,7 +19031,7 @@
                     <a:bodyPr/>
                     <a:lstStyle/>
                     <a:p>
-                      <a:pPr algn="l" indent="0" marL="0">
+                      <a:pPr marL="0" indent="0" algn="l">
                         <a:buNone/>
                       </a:pPr>
                       <a:r>
@@ -18514,7 +19052,7 @@
                       </a:endParaRPr>
                     </a:p>
                   </a:txBody>
-                  <a:tcPr marL="91440" marR="91440" marT="45720" marB="45720">
+                  <a:tcPr>
                     <a:lnL w="6350" cap="flat" cmpd="sng" algn="ctr">
                       <a:solidFill>
                         <a:srgbClr val="E2E8F0"/>
@@ -18561,7 +19099,7 @@
                     <a:bodyPr/>
                     <a:lstStyle/>
                     <a:p>
-                      <a:pPr algn="l" indent="0" marL="0">
+                      <a:pPr marL="0" indent="0" algn="l">
                         <a:buNone/>
                       </a:pPr>
                       <a:r>
@@ -18582,7 +19120,7 @@
                       </a:endParaRPr>
                     </a:p>
                   </a:txBody>
-                  <a:tcPr marL="91440" marR="91440" marT="45720" marB="45720">
+                  <a:tcPr>
                     <a:lnL w="6350" cap="flat" cmpd="sng" algn="ctr">
                       <a:solidFill>
                         <a:srgbClr val="E2E8F0"/>
@@ -18629,7 +19167,7 @@
                     <a:bodyPr/>
                     <a:lstStyle/>
                     <a:p>
-                      <a:pPr algn="l" indent="0" marL="0">
+                      <a:pPr marL="0" indent="0" algn="l">
                         <a:buNone/>
                       </a:pPr>
                       <a:r>
@@ -18650,7 +19188,7 @@
                       </a:endParaRPr>
                     </a:p>
                   </a:txBody>
-                  <a:tcPr marL="91440" marR="91440" marT="45720" marB="45720">
+                  <a:tcPr>
                     <a:lnL w="6350" cap="flat" cmpd="sng" algn="ctr">
                       <a:solidFill>
                         <a:srgbClr val="E2E8F0"/>
@@ -18692,6 +19230,11 @@
                     </a:solidFill>
                   </a:tcPr>
                 </a:tc>
+                <a:extLst>
+                  <a:ext uri="{0D108BD9-81ED-4DB2-BD59-A6C34878D82A}">
+                    <a16:rowId xmlns:a16="http://schemas.microsoft.com/office/drawing/2014/main" val="10005"/>
+                  </a:ext>
+                </a:extLst>
               </a:tr>
               <a:tr h="384048">
                 <a:tc>
@@ -18699,7 +19242,7 @@
                     <a:bodyPr/>
                     <a:lstStyle/>
                     <a:p>
-                      <a:pPr algn="l" indent="0" marL="0">
+                      <a:pPr marL="0" indent="0" algn="l">
                         <a:buNone/>
                       </a:pPr>
                       <a:r>
@@ -18720,7 +19263,7 @@
                       </a:endParaRPr>
                     </a:p>
                   </a:txBody>
-                  <a:tcPr marL="91440" marR="91440" marT="45720" marB="45720">
+                  <a:tcPr>
                     <a:lnL w="6350" cap="flat" cmpd="sng" algn="ctr">
                       <a:solidFill>
                         <a:srgbClr val="E2E8F0"/>
@@ -18767,7 +19310,7 @@
                     <a:bodyPr/>
                     <a:lstStyle/>
                     <a:p>
-                      <a:pPr algn="l" indent="0" marL="0">
+                      <a:pPr marL="0" indent="0" algn="l">
                         <a:buNone/>
                       </a:pPr>
                       <a:r>
@@ -18788,7 +19331,7 @@
                       </a:endParaRPr>
                     </a:p>
                   </a:txBody>
-                  <a:tcPr marL="91440" marR="91440" marT="45720" marB="45720">
+                  <a:tcPr>
                     <a:lnL w="6350" cap="flat" cmpd="sng" algn="ctr">
                       <a:solidFill>
                         <a:srgbClr val="E2E8F0"/>
@@ -18835,7 +19378,7 @@
                     <a:bodyPr/>
                     <a:lstStyle/>
                     <a:p>
-                      <a:pPr algn="l" indent="0" marL="0">
+                      <a:pPr marL="0" indent="0" algn="l">
                         <a:buNone/>
                       </a:pPr>
                       <a:r>
@@ -18856,7 +19399,7 @@
                       </a:endParaRPr>
                     </a:p>
                   </a:txBody>
-                  <a:tcPr marL="91440" marR="91440" marT="45720" marB="45720">
+                  <a:tcPr>
                     <a:lnL w="6350" cap="flat" cmpd="sng" algn="ctr">
                       <a:solidFill>
                         <a:srgbClr val="E2E8F0"/>
@@ -18898,6 +19441,11 @@
                     </a:solidFill>
                   </a:tcPr>
                 </a:tc>
+                <a:extLst>
+                  <a:ext uri="{0D108BD9-81ED-4DB2-BD59-A6C34878D82A}">
+                    <a16:rowId xmlns:a16="http://schemas.microsoft.com/office/drawing/2014/main" val="10006"/>
+                  </a:ext>
+                </a:extLst>
               </a:tr>
               <a:tr h="384048">
                 <a:tc>
@@ -18905,7 +19453,7 @@
                     <a:bodyPr/>
                     <a:lstStyle/>
                     <a:p>
-                      <a:pPr algn="l" indent="0" marL="0">
+                      <a:pPr marL="0" indent="0" algn="l">
                         <a:buNone/>
                       </a:pPr>
                       <a:r>
@@ -18926,7 +19474,7 @@
                       </a:endParaRPr>
                     </a:p>
                   </a:txBody>
-                  <a:tcPr marL="91440" marR="91440" marT="45720" marB="45720">
+                  <a:tcPr>
                     <a:lnL w="6350" cap="flat" cmpd="sng" algn="ctr">
                       <a:solidFill>
                         <a:srgbClr val="E2E8F0"/>
@@ -18973,7 +19521,7 @@
                     <a:bodyPr/>
                     <a:lstStyle/>
                     <a:p>
-                      <a:pPr algn="l" indent="0" marL="0">
+                      <a:pPr marL="0" indent="0" algn="l">
                         <a:buNone/>
                       </a:pPr>
                       <a:r>
@@ -18994,7 +19542,7 @@
                       </a:endParaRPr>
                     </a:p>
                   </a:txBody>
-                  <a:tcPr marL="91440" marR="91440" marT="45720" marB="45720">
+                  <a:tcPr>
                     <a:lnL w="6350" cap="flat" cmpd="sng" algn="ctr">
                       <a:solidFill>
                         <a:srgbClr val="E2E8F0"/>
@@ -19041,7 +19589,7 @@
                     <a:bodyPr/>
                     <a:lstStyle/>
                     <a:p>
-                      <a:pPr algn="l" indent="0" marL="0">
+                      <a:pPr marL="0" indent="0" algn="l">
                         <a:buNone/>
                       </a:pPr>
                       <a:r>
@@ -19062,7 +19610,7 @@
                       </a:endParaRPr>
                     </a:p>
                   </a:txBody>
-                  <a:tcPr marL="91440" marR="91440" marT="45720" marB="45720">
+                  <a:tcPr>
                     <a:lnL w="6350" cap="flat" cmpd="sng" algn="ctr">
                       <a:solidFill>
                         <a:srgbClr val="E2E8F0"/>
@@ -19104,6 +19652,11 @@
                     </a:solidFill>
                   </a:tcPr>
                 </a:tc>
+                <a:extLst>
+                  <a:ext uri="{0D108BD9-81ED-4DB2-BD59-A6C34878D82A}">
+                    <a16:rowId xmlns:a16="http://schemas.microsoft.com/office/drawing/2014/main" val="10007"/>
+                  </a:ext>
+                </a:extLst>
               </a:tr>
               <a:tr h="384048">
                 <a:tc>
@@ -19111,7 +19664,7 @@
                     <a:bodyPr/>
                     <a:lstStyle/>
                     <a:p>
-                      <a:pPr algn="l" indent="0" marL="0">
+                      <a:pPr marL="0" indent="0" algn="l">
                         <a:buNone/>
                       </a:pPr>
                       <a:r>
@@ -19132,7 +19685,7 @@
                       </a:endParaRPr>
                     </a:p>
                   </a:txBody>
-                  <a:tcPr marL="91440" marR="91440" marT="45720" marB="45720">
+                  <a:tcPr>
                     <a:lnL w="6350" cap="flat" cmpd="sng" algn="ctr">
                       <a:solidFill>
                         <a:srgbClr val="E2E8F0"/>
@@ -19179,7 +19732,7 @@
                     <a:bodyPr/>
                     <a:lstStyle/>
                     <a:p>
-                      <a:pPr algn="l" indent="0" marL="0">
+                      <a:pPr marL="0" indent="0" algn="l">
                         <a:buNone/>
                       </a:pPr>
                       <a:r>
@@ -19200,7 +19753,7 @@
                       </a:endParaRPr>
                     </a:p>
                   </a:txBody>
-                  <a:tcPr marL="91440" marR="91440" marT="45720" marB="45720">
+                  <a:tcPr>
                     <a:lnL w="6350" cap="flat" cmpd="sng" algn="ctr">
                       <a:solidFill>
                         <a:srgbClr val="E2E8F0"/>
@@ -19247,7 +19800,7 @@
                     <a:bodyPr/>
                     <a:lstStyle/>
                     <a:p>
-                      <a:pPr algn="l" indent="0" marL="0">
+                      <a:pPr marL="0" indent="0" algn="l">
                         <a:buNone/>
                       </a:pPr>
                       <a:r>
@@ -19268,7 +19821,7 @@
                       </a:endParaRPr>
                     </a:p>
                   </a:txBody>
-                  <a:tcPr marL="91440" marR="91440" marT="45720" marB="45720">
+                  <a:tcPr>
                     <a:lnL w="6350" cap="flat" cmpd="sng" algn="ctr">
                       <a:solidFill>
                         <a:srgbClr val="E2E8F0"/>
@@ -19310,6 +19863,11 @@
                     </a:solidFill>
                   </a:tcPr>
                 </a:tc>
+                <a:extLst>
+                  <a:ext uri="{0D108BD9-81ED-4DB2-BD59-A6C34878D82A}">
+                    <a16:rowId xmlns:a16="http://schemas.microsoft.com/office/drawing/2014/main" val="10008"/>
+                  </a:ext>
+                </a:extLst>
               </a:tr>
             </a:tbl>
           </a:graphicData>
@@ -19336,7 +19894,7 @@
           <a:bodyPr wrap="square" lIns="0" tIns="0" rIns="0" bIns="0" rtlCol="0" anchor="ctr"/>
           <a:lstStyle/>
           <a:p>
-            <a:pPr algn="l" indent="0" marL="0">
+            <a:pPr marL="0" indent="0" algn="l">
               <a:buNone/>
             </a:pPr>
             <a:r>
@@ -19375,7 +19933,7 @@
           <a:bodyPr wrap="square" lIns="0" tIns="0" rIns="0" bIns="0" rtlCol="0" anchor="ctr"/>
           <a:lstStyle/>
           <a:p>
-            <a:pPr algn="r" indent="0" marL="0">
+            <a:pPr marL="0" indent="0" algn="r">
               <a:buNone/>
             </a:pPr>
             <a:r>
@@ -19409,6 +19967,7 @@
         <a:solidFill>
           <a:srgbClr val="FFFFFF"/>
         </a:solidFill>
+        <a:effectLst/>
       </p:bgPr>
     </p:bg>
     <p:spTree>
@@ -19446,11 +20005,11 @@
           <a:bodyPr wrap="square" lIns="0" tIns="0" rIns="0" bIns="0" rtlCol="0" anchor="ctr"/>
           <a:lstStyle/>
           <a:p>
-            <a:pPr indent="0" marL="0">
-              <a:buNone/>
-            </a:pPr>
-            <a:r>
-              <a:rPr lang="en-US" sz="1100" b="1" spc="400" kern="0" dirty="0">
+            <a:pPr marL="0" indent="0">
+              <a:buNone/>
+            </a:pPr>
+            <a:r>
+              <a:rPr lang="en-US" sz="1100" b="1" kern="0" spc="400" dirty="0">
                 <a:solidFill>
                   <a:srgbClr val="1C7293"/>
                 </a:solidFill>
@@ -19485,7 +20044,7 @@
           <a:bodyPr wrap="square" lIns="0" tIns="0" rIns="0" bIns="0" rtlCol="0" anchor="ctr"/>
           <a:lstStyle/>
           <a:p>
-            <a:pPr indent="0" marL="0">
+            <a:pPr marL="0" indent="0">
               <a:buNone/>
             </a:pPr>
             <a:r>
@@ -19527,13 +20086,20 @@
             <a:prstDash val="solid"/>
           </a:ln>
           <a:effectLst>
-            <a:outerShdw sx="100000" sy="100000" kx="0" ky="0" algn="bl" rotWithShape="0" blurRad="101600" dist="12700" dir="5400000">
+            <a:outerShdw blurRad="101600" dist="12700" dir="5400000" algn="bl" rotWithShape="0">
               <a:srgbClr val="94A3B8">
                 <a:alpha val="12000"/>
               </a:srgbClr>
             </a:outerShdw>
           </a:effectLst>
         </p:spPr>
+        <p:txBody>
+          <a:bodyPr/>
+          <a:lstStyle/>
+          <a:p>
+            <a:endParaRPr lang="en-US"/>
+          </a:p>
+        </p:txBody>
       </p:sp>
       <p:sp>
         <p:nvSpPr>
@@ -19559,6 +20125,13 @@
             <a:prstDash val="solid"/>
           </a:ln>
         </p:spPr>
+        <p:txBody>
+          <a:bodyPr/>
+          <a:lstStyle/>
+          <a:p>
+            <a:endParaRPr lang="en-US"/>
+          </a:p>
+        </p:txBody>
       </p:sp>
       <p:sp>
         <p:nvSpPr>
@@ -19581,7 +20154,7 @@
           <a:bodyPr wrap="square" lIns="0" tIns="0" rIns="0" bIns="0" rtlCol="0" anchor="ctr"/>
           <a:lstStyle/>
           <a:p>
-            <a:pPr indent="0" marL="0">
+            <a:pPr marL="0" indent="0">
               <a:buNone/>
             </a:pPr>
             <a:r>
@@ -19620,7 +20193,7 @@
           <a:bodyPr wrap="square" lIns="0" tIns="0" rIns="0" bIns="0" rtlCol="0" anchor="ctr"/>
           <a:lstStyle/>
           <a:p>
-            <a:pPr indent="0" marL="0">
+            <a:pPr marL="0" indent="0">
               <a:buNone/>
             </a:pPr>
             <a:r>
@@ -19662,13 +20235,20 @@
             <a:prstDash val="solid"/>
           </a:ln>
           <a:effectLst>
-            <a:outerShdw sx="100000" sy="100000" kx="0" ky="0" algn="bl" rotWithShape="0" blurRad="101600" dist="12700" dir="5400000">
+            <a:outerShdw blurRad="101600" dist="12700" dir="5400000" algn="bl" rotWithShape="0">
               <a:srgbClr val="94A3B8">
                 <a:alpha val="12000"/>
               </a:srgbClr>
             </a:outerShdw>
           </a:effectLst>
         </p:spPr>
+        <p:txBody>
+          <a:bodyPr/>
+          <a:lstStyle/>
+          <a:p>
+            <a:endParaRPr lang="en-US"/>
+          </a:p>
+        </p:txBody>
       </p:sp>
       <p:sp>
         <p:nvSpPr>
@@ -19694,6 +20274,13 @@
             <a:prstDash val="solid"/>
           </a:ln>
         </p:spPr>
+        <p:txBody>
+          <a:bodyPr/>
+          <a:lstStyle/>
+          <a:p>
+            <a:endParaRPr lang="en-US"/>
+          </a:p>
+        </p:txBody>
       </p:sp>
       <p:sp>
         <p:nvSpPr>
@@ -19716,7 +20303,7 @@
           <a:bodyPr wrap="square" lIns="0" tIns="0" rIns="0" bIns="0" rtlCol="0" anchor="ctr"/>
           <a:lstStyle/>
           <a:p>
-            <a:pPr indent="0" marL="0">
+            <a:pPr marL="0" indent="0">
               <a:buNone/>
             </a:pPr>
             <a:r>
@@ -19755,7 +20342,7 @@
           <a:bodyPr wrap="square" lIns="0" tIns="0" rIns="0" bIns="0" rtlCol="0" anchor="ctr"/>
           <a:lstStyle/>
           <a:p>
-            <a:pPr indent="0" marL="0">
+            <a:pPr marL="0" indent="0">
               <a:buNone/>
             </a:pPr>
             <a:r>
@@ -19797,13 +20384,20 @@
             <a:prstDash val="solid"/>
           </a:ln>
           <a:effectLst>
-            <a:outerShdw sx="100000" sy="100000" kx="0" ky="0" algn="bl" rotWithShape="0" blurRad="101600" dist="12700" dir="5400000">
+            <a:outerShdw blurRad="101600" dist="12700" dir="5400000" algn="bl" rotWithShape="0">
               <a:srgbClr val="94A3B8">
                 <a:alpha val="12000"/>
               </a:srgbClr>
             </a:outerShdw>
           </a:effectLst>
         </p:spPr>
+        <p:txBody>
+          <a:bodyPr/>
+          <a:lstStyle/>
+          <a:p>
+            <a:endParaRPr lang="en-US"/>
+          </a:p>
+        </p:txBody>
       </p:sp>
       <p:sp>
         <p:nvSpPr>
@@ -19829,6 +20423,13 @@
             <a:prstDash val="solid"/>
           </a:ln>
         </p:spPr>
+        <p:txBody>
+          <a:bodyPr/>
+          <a:lstStyle/>
+          <a:p>
+            <a:endParaRPr lang="en-US"/>
+          </a:p>
+        </p:txBody>
       </p:sp>
       <p:sp>
         <p:nvSpPr>
@@ -19851,7 +20452,7 @@
           <a:bodyPr wrap="square" lIns="0" tIns="0" rIns="0" bIns="0" rtlCol="0" anchor="ctr"/>
           <a:lstStyle/>
           <a:p>
-            <a:pPr indent="0" marL="0">
+            <a:pPr marL="0" indent="0">
               <a:buNone/>
             </a:pPr>
             <a:r>
@@ -19890,7 +20491,7 @@
           <a:bodyPr wrap="square" lIns="0" tIns="0" rIns="0" bIns="0" rtlCol="0" anchor="ctr"/>
           <a:lstStyle/>
           <a:p>
-            <a:pPr indent="0" marL="0">
+            <a:pPr marL="0" indent="0">
               <a:buNone/>
             </a:pPr>
             <a:r>
@@ -19932,13 +20533,20 @@
             <a:prstDash val="solid"/>
           </a:ln>
           <a:effectLst>
-            <a:outerShdw sx="100000" sy="100000" kx="0" ky="0" algn="bl" rotWithShape="0" blurRad="101600" dist="12700" dir="5400000">
+            <a:outerShdw blurRad="101600" dist="12700" dir="5400000" algn="bl" rotWithShape="0">
               <a:srgbClr val="94A3B8">
                 <a:alpha val="12000"/>
               </a:srgbClr>
             </a:outerShdw>
           </a:effectLst>
         </p:spPr>
+        <p:txBody>
+          <a:bodyPr/>
+          <a:lstStyle/>
+          <a:p>
+            <a:endParaRPr lang="en-US"/>
+          </a:p>
+        </p:txBody>
       </p:sp>
       <p:sp>
         <p:nvSpPr>
@@ -19964,6 +20572,13 @@
             <a:prstDash val="solid"/>
           </a:ln>
         </p:spPr>
+        <p:txBody>
+          <a:bodyPr/>
+          <a:lstStyle/>
+          <a:p>
+            <a:endParaRPr lang="en-US"/>
+          </a:p>
+        </p:txBody>
       </p:sp>
       <p:sp>
         <p:nvSpPr>
@@ -19986,7 +20601,7 @@
           <a:bodyPr wrap="square" lIns="0" tIns="0" rIns="0" bIns="0" rtlCol="0" anchor="ctr"/>
           <a:lstStyle/>
           <a:p>
-            <a:pPr indent="0" marL="0">
+            <a:pPr marL="0" indent="0">
               <a:buNone/>
             </a:pPr>
             <a:r>
@@ -20025,7 +20640,7 @@
           <a:bodyPr wrap="square" lIns="0" tIns="0" rIns="0" bIns="0" rtlCol="0" anchor="ctr"/>
           <a:lstStyle/>
           <a:p>
-            <a:pPr indent="0" marL="0">
+            <a:pPr marL="0" indent="0">
               <a:buNone/>
             </a:pPr>
             <a:r>
@@ -20067,13 +20682,20 @@
             <a:prstDash val="solid"/>
           </a:ln>
           <a:effectLst>
-            <a:outerShdw sx="100000" sy="100000" kx="0" ky="0" algn="bl" rotWithShape="0" blurRad="101600" dist="12700" dir="5400000">
+            <a:outerShdw blurRad="101600" dist="12700" dir="5400000" algn="bl" rotWithShape="0">
               <a:srgbClr val="94A3B8">
                 <a:alpha val="12000"/>
               </a:srgbClr>
             </a:outerShdw>
           </a:effectLst>
         </p:spPr>
+        <p:txBody>
+          <a:bodyPr/>
+          <a:lstStyle/>
+          <a:p>
+            <a:endParaRPr lang="en-US"/>
+          </a:p>
+        </p:txBody>
       </p:sp>
       <p:sp>
         <p:nvSpPr>
@@ -20099,6 +20721,13 @@
             <a:prstDash val="solid"/>
           </a:ln>
         </p:spPr>
+        <p:txBody>
+          <a:bodyPr/>
+          <a:lstStyle/>
+          <a:p>
+            <a:endParaRPr lang="en-US"/>
+          </a:p>
+        </p:txBody>
       </p:sp>
       <p:sp>
         <p:nvSpPr>
@@ -20121,7 +20750,7 @@
           <a:bodyPr wrap="square" lIns="0" tIns="0" rIns="0" bIns="0" rtlCol="0" anchor="ctr"/>
           <a:lstStyle/>
           <a:p>
-            <a:pPr indent="0" marL="0">
+            <a:pPr marL="0" indent="0">
               <a:buNone/>
             </a:pPr>
             <a:r>
@@ -20160,7 +20789,7 @@
           <a:bodyPr wrap="square" lIns="0" tIns="0" rIns="0" bIns="0" rtlCol="0" anchor="ctr"/>
           <a:lstStyle/>
           <a:p>
-            <a:pPr indent="0" marL="0">
+            <a:pPr marL="0" indent="0">
               <a:buNone/>
             </a:pPr>
             <a:r>
@@ -20202,13 +20831,20 @@
             <a:prstDash val="solid"/>
           </a:ln>
           <a:effectLst>
-            <a:outerShdw sx="100000" sy="100000" kx="0" ky="0" algn="bl" rotWithShape="0" blurRad="101600" dist="12700" dir="5400000">
+            <a:outerShdw blurRad="101600" dist="12700" dir="5400000" algn="bl" rotWithShape="0">
               <a:srgbClr val="94A3B8">
                 <a:alpha val="12000"/>
               </a:srgbClr>
             </a:outerShdw>
           </a:effectLst>
         </p:spPr>
+        <p:txBody>
+          <a:bodyPr/>
+          <a:lstStyle/>
+          <a:p>
+            <a:endParaRPr lang="en-US"/>
+          </a:p>
+        </p:txBody>
       </p:sp>
       <p:sp>
         <p:nvSpPr>
@@ -20234,6 +20870,13 @@
             <a:prstDash val="solid"/>
           </a:ln>
         </p:spPr>
+        <p:txBody>
+          <a:bodyPr/>
+          <a:lstStyle/>
+          <a:p>
+            <a:endParaRPr lang="en-US"/>
+          </a:p>
+        </p:txBody>
       </p:sp>
       <p:sp>
         <p:nvSpPr>
@@ -20256,7 +20899,7 @@
           <a:bodyPr wrap="square" lIns="0" tIns="0" rIns="0" bIns="0" rtlCol="0" anchor="ctr"/>
           <a:lstStyle/>
           <a:p>
-            <a:pPr indent="0" marL="0">
+            <a:pPr marL="0" indent="0">
               <a:buNone/>
             </a:pPr>
             <a:r>
@@ -20295,7 +20938,7 @@
           <a:bodyPr wrap="square" lIns="0" tIns="0" rIns="0" bIns="0" rtlCol="0" anchor="ctr"/>
           <a:lstStyle/>
           <a:p>
-            <a:pPr indent="0" marL="0">
+            <a:pPr marL="0" indent="0">
               <a:buNone/>
             </a:pPr>
             <a:r>
@@ -20334,7 +20977,7 @@
           <a:bodyPr wrap="square" lIns="0" tIns="0" rIns="0" bIns="0" rtlCol="0" anchor="ctr"/>
           <a:lstStyle/>
           <a:p>
-            <a:pPr algn="r" indent="0" marL="0">
+            <a:pPr marL="0" indent="0" algn="r">
               <a:buNone/>
             </a:pPr>
             <a:r>
@@ -20368,6 +21011,7 @@
         <a:solidFill>
           <a:srgbClr val="FFFFFF"/>
         </a:solidFill>
+        <a:effectLst/>
       </p:bgPr>
     </p:bg>
     <p:spTree>
@@ -20405,11 +21049,11 @@
           <a:bodyPr wrap="square" lIns="0" tIns="0" rIns="0" bIns="0" rtlCol="0" anchor="ctr"/>
           <a:lstStyle/>
           <a:p>
-            <a:pPr indent="0" marL="0">
-              <a:buNone/>
-            </a:pPr>
-            <a:r>
-              <a:rPr lang="en-US" sz="1100" b="1" spc="400" kern="0" dirty="0">
+            <a:pPr marL="0" indent="0">
+              <a:buNone/>
+            </a:pPr>
+            <a:r>
+              <a:rPr lang="en-US" sz="1100" b="1" kern="0" spc="400" dirty="0">
                 <a:solidFill>
                   <a:srgbClr val="1C7293"/>
                 </a:solidFill>
@@ -20444,7 +21088,7 @@
           <a:bodyPr wrap="square" lIns="0" tIns="0" rIns="0" bIns="0" rtlCol="0" anchor="ctr"/>
           <a:lstStyle/>
           <a:p>
-            <a:pPr indent="0" marL="0">
+            <a:pPr marL="0" indent="0">
               <a:buNone/>
             </a:pPr>
             <a:r>
@@ -20486,13 +21130,20 @@
             <a:prstDash val="solid"/>
           </a:ln>
           <a:effectLst>
-            <a:outerShdw sx="100000" sy="100000" kx="0" ky="0" algn="bl" rotWithShape="0" blurRad="101600" dist="12700" dir="5400000">
+            <a:outerShdw blurRad="101600" dist="12700" dir="5400000" algn="bl" rotWithShape="0">
               <a:srgbClr val="94A3B8">
                 <a:alpha val="12000"/>
               </a:srgbClr>
             </a:outerShdw>
           </a:effectLst>
         </p:spPr>
+        <p:txBody>
+          <a:bodyPr/>
+          <a:lstStyle/>
+          <a:p>
+            <a:endParaRPr lang="en-US"/>
+          </a:p>
+        </p:txBody>
       </p:sp>
       <p:sp>
         <p:nvSpPr>
@@ -20518,6 +21169,13 @@
             <a:prstDash val="solid"/>
           </a:ln>
         </p:spPr>
+        <p:txBody>
+          <a:bodyPr/>
+          <a:lstStyle/>
+          <a:p>
+            <a:endParaRPr lang="en-US"/>
+          </a:p>
+        </p:txBody>
       </p:sp>
       <p:sp>
         <p:nvSpPr>
@@ -20540,7 +21198,7 @@
           <a:bodyPr wrap="square" lIns="0" tIns="0" rIns="0" bIns="0" rtlCol="0" anchor="ctr"/>
           <a:lstStyle/>
           <a:p>
-            <a:pPr indent="0" marL="0">
+            <a:pPr marL="0" indent="0">
               <a:buNone/>
             </a:pPr>
             <a:r>
@@ -20579,7 +21237,7 @@
           <a:bodyPr wrap="square" lIns="0" tIns="0" rIns="0" bIns="0" rtlCol="0" anchor="ctr"/>
           <a:lstStyle/>
           <a:p>
-            <a:pPr indent="0" marL="0">
+            <a:pPr marL="0" indent="0">
               <a:buNone/>
             </a:pPr>
             <a:r>
@@ -20618,7 +21276,7 @@
           <a:bodyPr wrap="square" lIns="0" tIns="0" rIns="0" bIns="0" rtlCol="0" anchor="ctr"/>
           <a:lstStyle/>
           <a:p>
-            <a:pPr indent="0" marL="0">
+            <a:pPr marL="0" indent="0">
               <a:buNone/>
             </a:pPr>
             <a:r>
@@ -20657,7 +21315,7 @@
           <a:bodyPr wrap="square" lIns="0" tIns="0" rIns="0" bIns="0" rtlCol="0" anchor="ctr"/>
           <a:lstStyle/>
           <a:p>
-            <a:pPr indent="0" marL="0">
+            <a:pPr marL="0" indent="0">
               <a:buNone/>
             </a:pPr>
             <a:r>
@@ -20699,6 +21357,13 @@
             <a:prstDash val="solid"/>
           </a:ln>
         </p:spPr>
+        <p:txBody>
+          <a:bodyPr/>
+          <a:lstStyle/>
+          <a:p>
+            <a:endParaRPr lang="en-US"/>
+          </a:p>
+        </p:txBody>
       </p:sp>
       <p:sp>
         <p:nvSpPr>
@@ -20721,7 +21386,7 @@
           <a:bodyPr wrap="square" lIns="0" tIns="0" rIns="0" bIns="0" rtlCol="0" anchor="ctr"/>
           <a:lstStyle/>
           <a:p>
-            <a:pPr algn="ctr" indent="0" marL="0">
+            <a:pPr marL="0" indent="0" algn="ctr">
               <a:buNone/>
             </a:pPr>
             <a:r>
@@ -20760,7 +21425,7 @@
           <a:bodyPr wrap="square" lIns="0" tIns="0" rIns="0" bIns="0" rtlCol="0" anchor="ctr"/>
           <a:lstStyle/>
           <a:p>
-            <a:pPr algn="ctr" indent="0" marL="0">
+            <a:pPr marL="0" indent="0" algn="ctr">
               <a:buNone/>
             </a:pPr>
             <a:r>
@@ -20802,6 +21467,13 @@
             <a:prstDash val="solid"/>
           </a:ln>
         </p:spPr>
+        <p:txBody>
+          <a:bodyPr/>
+          <a:lstStyle/>
+          <a:p>
+            <a:endParaRPr lang="en-US"/>
+          </a:p>
+        </p:txBody>
       </p:sp>
       <p:sp>
         <p:nvSpPr>
@@ -20824,7 +21496,7 @@
           <a:bodyPr wrap="square" lIns="0" tIns="0" rIns="0" bIns="0" rtlCol="0" anchor="ctr"/>
           <a:lstStyle/>
           <a:p>
-            <a:pPr algn="ctr" indent="0" marL="0">
+            <a:pPr marL="0" indent="0" algn="ctr">
               <a:buNone/>
             </a:pPr>
             <a:r>
@@ -20863,7 +21535,7 @@
           <a:bodyPr wrap="square" lIns="0" tIns="0" rIns="0" bIns="0" rtlCol="0" anchor="ctr"/>
           <a:lstStyle/>
           <a:p>
-            <a:pPr algn="ctr" indent="0" marL="0">
+            <a:pPr marL="0" indent="0" algn="ctr">
               <a:buNone/>
             </a:pPr>
             <a:r>
@@ -20905,6 +21577,13 @@
             <a:prstDash val="solid"/>
           </a:ln>
         </p:spPr>
+        <p:txBody>
+          <a:bodyPr/>
+          <a:lstStyle/>
+          <a:p>
+            <a:endParaRPr lang="en-US"/>
+          </a:p>
+        </p:txBody>
       </p:sp>
       <p:sp>
         <p:nvSpPr>
@@ -20927,7 +21606,7 @@
           <a:bodyPr wrap="square" lIns="0" tIns="0" rIns="0" bIns="0" rtlCol="0" anchor="ctr"/>
           <a:lstStyle/>
           <a:p>
-            <a:pPr algn="ctr" indent="0" marL="0">
+            <a:pPr marL="0" indent="0" algn="ctr">
               <a:buNone/>
             </a:pPr>
             <a:r>
@@ -20966,7 +21645,7 @@
           <a:bodyPr wrap="square" lIns="0" tIns="0" rIns="0" bIns="0" rtlCol="0" anchor="ctr"/>
           <a:lstStyle/>
           <a:p>
-            <a:pPr algn="ctr" indent="0" marL="0">
+            <a:pPr marL="0" indent="0" algn="ctr">
               <a:buNone/>
             </a:pPr>
             <a:r>
@@ -21008,6 +21687,13 @@
             <a:prstDash val="solid"/>
           </a:ln>
         </p:spPr>
+        <p:txBody>
+          <a:bodyPr/>
+          <a:lstStyle/>
+          <a:p>
+            <a:endParaRPr lang="en-US"/>
+          </a:p>
+        </p:txBody>
       </p:sp>
       <p:sp>
         <p:nvSpPr>
@@ -21030,7 +21716,7 @@
           <a:bodyPr wrap="square" lIns="0" tIns="0" rIns="0" bIns="0" rtlCol="0" anchor="ctr"/>
           <a:lstStyle/>
           <a:p>
-            <a:pPr algn="ctr" indent="0" marL="0">
+            <a:pPr marL="0" indent="0" algn="ctr">
               <a:buNone/>
             </a:pPr>
             <a:r>
@@ -21069,7 +21755,7 @@
           <a:bodyPr wrap="square" lIns="0" tIns="0" rIns="0" bIns="0" rtlCol="0" anchor="ctr"/>
           <a:lstStyle/>
           <a:p>
-            <a:pPr algn="ctr" indent="0" marL="0">
+            <a:pPr marL="0" indent="0" algn="ctr">
               <a:buNone/>
             </a:pPr>
             <a:r>
@@ -21111,6 +21797,13 @@
             <a:prstDash val="solid"/>
           </a:ln>
         </p:spPr>
+        <p:txBody>
+          <a:bodyPr/>
+          <a:lstStyle/>
+          <a:p>
+            <a:endParaRPr lang="en-US"/>
+          </a:p>
+        </p:txBody>
       </p:sp>
       <p:sp>
         <p:nvSpPr>
@@ -21133,7 +21826,7 @@
           <a:bodyPr wrap="square" lIns="0" tIns="0" rIns="0" bIns="0" rtlCol="0" anchor="ctr"/>
           <a:lstStyle/>
           <a:p>
-            <a:pPr algn="ctr" indent="0" marL="0">
+            <a:pPr marL="0" indent="0" algn="ctr">
               <a:buNone/>
             </a:pPr>
             <a:r>
@@ -21172,7 +21865,7 @@
           <a:bodyPr wrap="square" lIns="0" tIns="0" rIns="0" bIns="0" rtlCol="0" anchor="ctr"/>
           <a:lstStyle/>
           <a:p>
-            <a:pPr algn="ctr" indent="0" marL="0">
+            <a:pPr marL="0" indent="0" algn="ctr">
               <a:buNone/>
             </a:pPr>
             <a:r>
@@ -21214,6 +21907,13 @@
             <a:prstDash val="solid"/>
           </a:ln>
         </p:spPr>
+        <p:txBody>
+          <a:bodyPr/>
+          <a:lstStyle/>
+          <a:p>
+            <a:endParaRPr lang="en-US"/>
+          </a:p>
+        </p:txBody>
       </p:sp>
       <p:sp>
         <p:nvSpPr>
@@ -21236,7 +21936,7 @@
           <a:bodyPr wrap="square" lIns="0" tIns="0" rIns="0" bIns="0" rtlCol="0" anchor="ctr"/>
           <a:lstStyle/>
           <a:p>
-            <a:pPr algn="ctr" indent="0" marL="0">
+            <a:pPr marL="0" indent="0" algn="ctr">
               <a:buNone/>
             </a:pPr>
             <a:r>
@@ -21275,7 +21975,7 @@
           <a:bodyPr wrap="square" lIns="0" tIns="0" rIns="0" bIns="0" rtlCol="0" anchor="ctr"/>
           <a:lstStyle/>
           <a:p>
-            <a:pPr algn="ctr" indent="0" marL="0">
+            <a:pPr marL="0" indent="0" algn="ctr">
               <a:buNone/>
             </a:pPr>
             <a:r>
@@ -21314,7 +22014,7 @@
           <a:bodyPr wrap="square" lIns="0" tIns="0" rIns="0" bIns="0" rtlCol="0" anchor="ctr"/>
           <a:lstStyle/>
           <a:p>
-            <a:pPr algn="l" indent="0" marL="0">
+            <a:pPr marL="0" indent="0" algn="l">
               <a:buNone/>
             </a:pPr>
             <a:r>
@@ -21353,7 +22053,7 @@
           <a:bodyPr wrap="square" lIns="0" tIns="0" rIns="0" bIns="0" rtlCol="0" anchor="ctr"/>
           <a:lstStyle/>
           <a:p>
-            <a:pPr algn="r" indent="0" marL="0">
+            <a:pPr marL="0" indent="0" algn="r">
               <a:buNone/>
             </a:pPr>
             <a:r>
@@ -21672,4 +22372,319 @@
     </a:ext>
   </a:extLst>
 </a:theme>
+</file>
+
+<file path=ppt/theme/theme2.xml><?xml version="1.0" encoding="utf-8"?>
+<a:theme xmlns:a="http://schemas.openxmlformats.org/drawingml/2006/main" name="Office Theme">
+  <a:themeElements>
+    <a:clrScheme name="Office">
+      <a:dk1>
+        <a:sysClr val="windowText" lastClr="000000"/>
+      </a:dk1>
+      <a:lt1>
+        <a:sysClr val="window" lastClr="FFFFFF"/>
+      </a:lt1>
+      <a:dk2>
+        <a:srgbClr val="0E2841"/>
+      </a:dk2>
+      <a:lt2>
+        <a:srgbClr val="E8E8E8"/>
+      </a:lt2>
+      <a:accent1>
+        <a:srgbClr val="156082"/>
+      </a:accent1>
+      <a:accent2>
+        <a:srgbClr val="E97132"/>
+      </a:accent2>
+      <a:accent3>
+        <a:srgbClr val="196B24"/>
+      </a:accent3>
+      <a:accent4>
+        <a:srgbClr val="0F9ED5"/>
+      </a:accent4>
+      <a:accent5>
+        <a:srgbClr val="A02B93"/>
+      </a:accent5>
+      <a:accent6>
+        <a:srgbClr val="4EA72E"/>
+      </a:accent6>
+      <a:hlink>
+        <a:srgbClr val="467886"/>
+      </a:hlink>
+      <a:folHlink>
+        <a:srgbClr val="96607D"/>
+      </a:folHlink>
+    </a:clrScheme>
+    <a:fontScheme name="Office">
+      <a:majorFont>
+        <a:latin typeface="Aptos Display" panose="02110004020202020204"/>
+        <a:ea typeface=""/>
+        <a:cs typeface=""/>
+        <a:font script="Jpan" typeface="游ゴシック Light"/>
+        <a:font script="Hang" typeface="맑은 고딕"/>
+        <a:font script="Hans" typeface="等线 Light"/>
+        <a:font script="Hant" typeface="新細明體"/>
+        <a:font script="Arab" typeface="Times New Roman"/>
+        <a:font script="Hebr" typeface="Times New Roman"/>
+        <a:font script="Thai" typeface="Angsana New"/>
+        <a:font script="Ethi" typeface="Nyala"/>
+        <a:font script="Beng" typeface="Vrinda"/>
+        <a:font script="Gujr" typeface="Shruti"/>
+        <a:font script="Khmr" typeface="MoolBoran"/>
+        <a:font script="Knda" typeface="Tunga"/>
+        <a:font script="Guru" typeface="Raavi"/>
+        <a:font script="Cans" typeface="Euphemia"/>
+        <a:font script="Cher" typeface="Plantagenet Cherokee"/>
+        <a:font script="Yiii" typeface="Microsoft Yi Baiti"/>
+        <a:font script="Tibt" typeface="Microsoft Himalaya"/>
+        <a:font script="Thaa" typeface="MV Boli"/>
+        <a:font script="Deva" typeface="Mangal"/>
+        <a:font script="Telu" typeface="Gautami"/>
+        <a:font script="Taml" typeface="Latha"/>
+        <a:font script="Syrc" typeface="Estrangelo Edessa"/>
+        <a:font script="Orya" typeface="Kalinga"/>
+        <a:font script="Mlym" typeface="Kartika"/>
+        <a:font script="Laoo" typeface="DokChampa"/>
+        <a:font script="Sinh" typeface="Iskoola Pota"/>
+        <a:font script="Mong" typeface="Mongolian Baiti"/>
+        <a:font script="Viet" typeface="Times New Roman"/>
+        <a:font script="Uigh" typeface="Microsoft Uighur"/>
+        <a:font script="Geor" typeface="Sylfaen"/>
+        <a:font script="Armn" typeface="Arial"/>
+        <a:font script="Bugi" typeface="Leelawadee UI"/>
+        <a:font script="Bopo" typeface="Microsoft JhengHei"/>
+        <a:font script="Java" typeface="Javanese Text"/>
+        <a:font script="Lisu" typeface="Segoe UI"/>
+        <a:font script="Mymr" typeface="Myanmar Text"/>
+        <a:font script="Nkoo" typeface="Ebrima"/>
+        <a:font script="Olck" typeface="Nirmala UI"/>
+        <a:font script="Osma" typeface="Ebrima"/>
+        <a:font script="Phag" typeface="Phagspa"/>
+        <a:font script="Syrn" typeface="Estrangelo Edessa"/>
+        <a:font script="Syrj" typeface="Estrangelo Edessa"/>
+        <a:font script="Syre" typeface="Estrangelo Edessa"/>
+        <a:font script="Sora" typeface="Nirmala UI"/>
+        <a:font script="Tale" typeface="Microsoft Tai Le"/>
+        <a:font script="Talu" typeface="Microsoft New Tai Lue"/>
+        <a:font script="Tfng" typeface="Ebrima"/>
+      </a:majorFont>
+      <a:minorFont>
+        <a:latin typeface="Aptos" panose="02110004020202020204"/>
+        <a:ea typeface=""/>
+        <a:cs typeface=""/>
+        <a:font script="Jpan" typeface="游ゴシック"/>
+        <a:font script="Hang" typeface="맑은 고딕"/>
+        <a:font script="Hans" typeface="等线"/>
+        <a:font script="Hant" typeface="新細明體"/>
+        <a:font script="Arab" typeface="Arial"/>
+        <a:font script="Hebr" typeface="Arial"/>
+        <a:font script="Thai" typeface="Cordia New"/>
+        <a:font script="Ethi" typeface="Nyala"/>
+        <a:font script="Beng" typeface="Vrinda"/>
+        <a:font script="Gujr" typeface="Shruti"/>
+        <a:font script="Khmr" typeface="DaunPenh"/>
+        <a:font script="Knda" typeface="Tunga"/>
+        <a:font script="Guru" typeface="Raavi"/>
+        <a:font script="Cans" typeface="Euphemia"/>
+        <a:font script="Cher" typeface="Plantagenet Cherokee"/>
+        <a:font script="Yiii" typeface="Microsoft Yi Baiti"/>
+        <a:font script="Tibt" typeface="Microsoft Himalaya"/>
+        <a:font script="Thaa" typeface="MV Boli"/>
+        <a:font script="Deva" typeface="Mangal"/>
+        <a:font script="Telu" typeface="Gautami"/>
+        <a:font script="Taml" typeface="Latha"/>
+        <a:font script="Syrc" typeface="Estrangelo Edessa"/>
+        <a:font script="Orya" typeface="Kalinga"/>
+        <a:font script="Mlym" typeface="Kartika"/>
+        <a:font script="Laoo" typeface="DokChampa"/>
+        <a:font script="Sinh" typeface="Iskoola Pota"/>
+        <a:font script="Mong" typeface="Mongolian Baiti"/>
+        <a:font script="Viet" typeface="Arial"/>
+        <a:font script="Uigh" typeface="Microsoft Uighur"/>
+        <a:font script="Geor" typeface="Sylfaen"/>
+        <a:font script="Armn" typeface="Arial"/>
+        <a:font script="Bugi" typeface="Leelawadee UI"/>
+        <a:font script="Bopo" typeface="Microsoft JhengHei"/>
+        <a:font script="Java" typeface="Javanese Text"/>
+        <a:font script="Lisu" typeface="Segoe UI"/>
+        <a:font script="Mymr" typeface="Myanmar Text"/>
+        <a:font script="Nkoo" typeface="Ebrima"/>
+        <a:font script="Olck" typeface="Nirmala UI"/>
+        <a:font script="Osma" typeface="Ebrima"/>
+        <a:font script="Phag" typeface="Phagspa"/>
+        <a:font script="Syrn" typeface="Estrangelo Edessa"/>
+        <a:font script="Syrj" typeface="Estrangelo Edessa"/>
+        <a:font script="Syre" typeface="Estrangelo Edessa"/>
+        <a:font script="Sora" typeface="Nirmala UI"/>
+        <a:font script="Tale" typeface="Microsoft Tai Le"/>
+        <a:font script="Talu" typeface="Microsoft New Tai Lue"/>
+        <a:font script="Tfng" typeface="Ebrima"/>
+      </a:minorFont>
+    </a:fontScheme>
+    <a:fmtScheme name="Office">
+      <a:fillStyleLst>
+        <a:solidFill>
+          <a:schemeClr val="phClr"/>
+        </a:solidFill>
+        <a:gradFill rotWithShape="1">
+          <a:gsLst>
+            <a:gs pos="0">
+              <a:schemeClr val="phClr">
+                <a:lumMod val="110000"/>
+                <a:satMod val="105000"/>
+                <a:tint val="67000"/>
+              </a:schemeClr>
+            </a:gs>
+            <a:gs pos="50000">
+              <a:schemeClr val="phClr">
+                <a:lumMod val="105000"/>
+                <a:satMod val="103000"/>
+                <a:tint val="73000"/>
+              </a:schemeClr>
+            </a:gs>
+            <a:gs pos="100000">
+              <a:schemeClr val="phClr">
+                <a:lumMod val="105000"/>
+                <a:satMod val="109000"/>
+                <a:tint val="81000"/>
+              </a:schemeClr>
+            </a:gs>
+          </a:gsLst>
+          <a:lin ang="5400000" scaled="0"/>
+        </a:gradFill>
+        <a:gradFill rotWithShape="1">
+          <a:gsLst>
+            <a:gs pos="0">
+              <a:schemeClr val="phClr">
+                <a:satMod val="103000"/>
+                <a:lumMod val="102000"/>
+                <a:tint val="94000"/>
+              </a:schemeClr>
+            </a:gs>
+            <a:gs pos="50000">
+              <a:schemeClr val="phClr">
+                <a:satMod val="110000"/>
+                <a:lumMod val="100000"/>
+                <a:shade val="100000"/>
+              </a:schemeClr>
+            </a:gs>
+            <a:gs pos="100000">
+              <a:schemeClr val="phClr">
+                <a:lumMod val="99000"/>
+                <a:satMod val="120000"/>
+                <a:shade val="78000"/>
+              </a:schemeClr>
+            </a:gs>
+          </a:gsLst>
+          <a:lin ang="5400000" scaled="0"/>
+        </a:gradFill>
+      </a:fillStyleLst>
+      <a:lnStyleLst>
+        <a:ln w="12700" cap="flat" cmpd="sng" algn="ctr">
+          <a:solidFill>
+            <a:schemeClr val="phClr"/>
+          </a:solidFill>
+          <a:prstDash val="solid"/>
+          <a:miter lim="800000"/>
+        </a:ln>
+        <a:ln w="19050" cap="flat" cmpd="sng" algn="ctr">
+          <a:solidFill>
+            <a:schemeClr val="phClr"/>
+          </a:solidFill>
+          <a:prstDash val="solid"/>
+          <a:miter lim="800000"/>
+        </a:ln>
+        <a:ln w="25400" cap="flat" cmpd="sng" algn="ctr">
+          <a:solidFill>
+            <a:schemeClr val="phClr"/>
+          </a:solidFill>
+          <a:prstDash val="solid"/>
+          <a:miter lim="800000"/>
+        </a:ln>
+      </a:lnStyleLst>
+      <a:effectStyleLst>
+        <a:effectStyle>
+          <a:effectLst/>
+        </a:effectStyle>
+        <a:effectStyle>
+          <a:effectLst/>
+        </a:effectStyle>
+        <a:effectStyle>
+          <a:effectLst>
+            <a:outerShdw blurRad="57150" dist="19050" dir="5400000" algn="ctr" rotWithShape="0">
+              <a:srgbClr val="000000">
+                <a:alpha val="63000"/>
+              </a:srgbClr>
+            </a:outerShdw>
+          </a:effectLst>
+        </a:effectStyle>
+      </a:effectStyleLst>
+      <a:bgFillStyleLst>
+        <a:solidFill>
+          <a:schemeClr val="phClr"/>
+        </a:solidFill>
+        <a:solidFill>
+          <a:schemeClr val="phClr">
+            <a:tint val="95000"/>
+            <a:satMod val="170000"/>
+          </a:schemeClr>
+        </a:solidFill>
+        <a:gradFill rotWithShape="1">
+          <a:gsLst>
+            <a:gs pos="0">
+              <a:schemeClr val="phClr">
+                <a:tint val="93000"/>
+                <a:satMod val="150000"/>
+                <a:shade val="98000"/>
+                <a:lumMod val="102000"/>
+              </a:schemeClr>
+            </a:gs>
+            <a:gs pos="50000">
+              <a:schemeClr val="phClr">
+                <a:tint val="98000"/>
+                <a:satMod val="130000"/>
+                <a:shade val="90000"/>
+                <a:lumMod val="103000"/>
+              </a:schemeClr>
+            </a:gs>
+            <a:gs pos="100000">
+              <a:schemeClr val="phClr">
+                <a:shade val="63000"/>
+                <a:satMod val="120000"/>
+              </a:schemeClr>
+            </a:gs>
+          </a:gsLst>
+          <a:lin ang="5400000" scaled="0"/>
+        </a:gradFill>
+      </a:bgFillStyleLst>
+    </a:fmtScheme>
+  </a:themeElements>
+  <a:objectDefaults>
+    <a:lnDef>
+      <a:spPr/>
+      <a:bodyPr/>
+      <a:lstStyle/>
+      <a:style>
+        <a:lnRef idx="2">
+          <a:schemeClr val="accent1"/>
+        </a:lnRef>
+        <a:fillRef idx="0">
+          <a:schemeClr val="accent1"/>
+        </a:fillRef>
+        <a:effectRef idx="1">
+          <a:schemeClr val="accent1"/>
+        </a:effectRef>
+        <a:fontRef idx="minor">
+          <a:schemeClr val="tx1"/>
+        </a:fontRef>
+      </a:style>
+    </a:lnDef>
+  </a:objectDefaults>
+  <a:extraClrSchemeLst/>
+  <a:extLst>
+    <a:ext uri="{05A4C25C-085E-4340-85A3-A5531E510DB2}">
+      <thm15:themeFamily xmlns:thm15="http://schemas.microsoft.com/office/thememl/2012/main" name="Office Theme" id="{2E142A2C-CD16-42D6-873A-C26D2A0506FA}" vid="{1BDDFF52-6CD6-40A5-AB3C-68EB2F1E4D0A}"/>
+    </a:ext>
+  </a:extLst>
+</a:theme>
 </file>